--- a/clase1/clase1.pptx
+++ b/clase1/clase1.pptx
@@ -126,7 +126,7 @@
 <file path=ppt/revisionInfo.xml><?xml version="1.0" encoding="utf-8"?>
 <p1510:revInfo xmlns:a="http://schemas.openxmlformats.org/drawingml/2006/main" xmlns:r="http://schemas.openxmlformats.org/officeDocument/2006/relationships" xmlns:p1510="http://schemas.microsoft.com/office/powerpoint/2015/10/main">
   <p1510:revLst>
-    <p1510:client id="{808BD29D-6A75-433E-8BD7-266EC3CDB597}" v="48" dt="2026-09-26T19:05:53.710"/>
+    <p1510:client id="{808BD29D-6A75-433E-8BD7-266EC3CDB597}" v="49" dt="2026-09-26T23:59:05.517"/>
   </p1510:revLst>
 </p1510:revInfo>
 </file>
@@ -136,7 +136,7 @@
   <pc:docChgLst>
     <pc:chgData name="Nahuel Roel" userId="f57eb92d7f62e27b" providerId="LiveId" clId="{1698397B-2804-4513-BF38-7951CB4798F0}"/>
     <pc:docChg chg="undo custSel addSld delSld modSld sldOrd">
-      <pc:chgData name="Nahuel Roel" userId="f57eb92d7f62e27b" providerId="LiveId" clId="{1698397B-2804-4513-BF38-7951CB4798F0}" dt="2026-09-26T19:05:44.831" v="3536"/>
+      <pc:chgData name="Nahuel Roel" userId="f57eb92d7f62e27b" providerId="LiveId" clId="{1698397B-2804-4513-BF38-7951CB4798F0}" dt="2026-09-27T00:02:14.478" v="3872" actId="20577"/>
       <pc:docMkLst>
         <pc:docMk/>
       </pc:docMkLst>
@@ -307,7 +307,7 @@
         </pc:spChg>
       </pc:sldChg>
       <pc:sldChg chg="delSp modSp mod">
-        <pc:chgData name="Nahuel Roel" userId="f57eb92d7f62e27b" providerId="LiveId" clId="{1698397B-2804-4513-BF38-7951CB4798F0}" dt="2026-09-26T17:37:39.692" v="251" actId="790"/>
+        <pc:chgData name="Nahuel Roel" userId="f57eb92d7f62e27b" providerId="LiveId" clId="{1698397B-2804-4513-BF38-7951CB4798F0}" dt="2026-09-26T23:59:49.058" v="3657" actId="20577"/>
         <pc:sldMkLst>
           <pc:docMk/>
           <pc:sldMk cId="0" sldId="258"/>
@@ -336,8 +336,8 @@
             <ac:spMk id="4" creationId="{00000000-0000-0000-0000-000000000000}"/>
           </ac:spMkLst>
         </pc:spChg>
-        <pc:graphicFrameChg chg="modGraphic">
-          <ac:chgData name="Nahuel Roel" userId="f57eb92d7f62e27b" providerId="LiveId" clId="{1698397B-2804-4513-BF38-7951CB4798F0}" dt="2026-09-26T17:37:39.692" v="251" actId="790"/>
+        <pc:graphicFrameChg chg="mod modGraphic">
+          <ac:chgData name="Nahuel Roel" userId="f57eb92d7f62e27b" providerId="LiveId" clId="{1698397B-2804-4513-BF38-7951CB4798F0}" dt="2026-09-26T23:59:49.058" v="3657" actId="20577"/>
           <ac:graphicFrameMkLst>
             <pc:docMk/>
             <pc:sldMk cId="0" sldId="258"/>
@@ -1239,7 +1239,7 @@
         </pc:spChg>
       </pc:sldChg>
       <pc:sldChg chg="delSp modSp add mod setBg">
-        <pc:chgData name="Nahuel Roel" userId="f57eb92d7f62e27b" providerId="LiveId" clId="{1698397B-2804-4513-BF38-7951CB4798F0}" dt="2026-09-26T18:37:05.387" v="3462" actId="478"/>
+        <pc:chgData name="Nahuel Roel" userId="f57eb92d7f62e27b" providerId="LiveId" clId="{1698397B-2804-4513-BF38-7951CB4798F0}" dt="2026-09-27T00:02:14.478" v="3872" actId="20577"/>
         <pc:sldMkLst>
           <pc:docMk/>
           <pc:sldMk cId="3901877764" sldId="270"/>
@@ -1261,7 +1261,7 @@
           </ac:spMkLst>
         </pc:spChg>
         <pc:spChg chg="mod">
-          <ac:chgData name="Nahuel Roel" userId="f57eb92d7f62e27b" providerId="LiveId" clId="{1698397B-2804-4513-BF38-7951CB4798F0}" dt="2026-09-26T18:37:01.572" v="3461" actId="20577"/>
+          <ac:chgData name="Nahuel Roel" userId="f57eb92d7f62e27b" providerId="LiveId" clId="{1698397B-2804-4513-BF38-7951CB4798F0}" dt="2026-09-27T00:02:14.478" v="3872" actId="20577"/>
           <ac:spMkLst>
             <pc:docMk/>
             <pc:sldMk cId="3901877764" sldId="270"/>
@@ -3468,6 +3468,51 @@
               </a:rPr>
               <a:t>En caso de tener avisos o errores, revisar la consola y leer el texto que se imprimió allí.</a:t>
             </a:r>
+          </a:p>
+          <a:p>
+            <a:pPr marL="171450" indent="-171450">
+              <a:spcAft>
+                <a:spcPts val="200"/>
+              </a:spcAft>
+              <a:buFont typeface="Arial" panose="020B0604020202020204" pitchFamily="34" charset="0"/>
+              <a:buChar char="•"/>
+            </a:pPr>
+            <a:endParaRPr lang="es-UY" sz="1200" b="1" dirty="0">
+              <a:solidFill>
+                <a:srgbClr val="F1E9F8"/>
+              </a:solidFill>
+              <a:latin typeface="Courier New" pitchFamily="34" charset="0"/>
+              <a:cs typeface="Courier New" pitchFamily="34" charset="-120"/>
+            </a:endParaRPr>
+          </a:p>
+          <a:p>
+            <a:pPr marL="171450" indent="-171450">
+              <a:spcAft>
+                <a:spcPts val="200"/>
+              </a:spcAft>
+              <a:buFont typeface="Arial" panose="020B0604020202020204" pitchFamily="34" charset="0"/>
+              <a:buChar char="•"/>
+            </a:pPr>
+            <a:r>
+              <a:rPr lang="es-UY" sz="1200" b="1" noProof="0" dirty="0">
+                <a:solidFill>
+                  <a:srgbClr val="F1E9F8"/>
+                </a:solidFill>
+                <a:latin typeface="Courier New" pitchFamily="34" charset="0"/>
+                <a:cs typeface="Courier New" pitchFamily="34" charset="-120"/>
+              </a:rPr>
+              <a:t>Aún no nos centramos en comprender el código, sino que revisamos si funciona la aplicación y contrastamos los datos mostrados con </a:t>
+            </a:r>
+            <a:r>
+              <a:rPr lang="es-UY" sz="1200" b="1" dirty="0">
+                <a:solidFill>
+                  <a:srgbClr val="F1E9F8"/>
+                </a:solidFill>
+                <a:latin typeface="Courier New" pitchFamily="34" charset="0"/>
+                <a:cs typeface="Courier New" pitchFamily="34" charset="-120"/>
+              </a:rPr>
+              <a:t>nuestra base de datos original.</a:t>
+            </a:r>
             <a:endParaRPr lang="es-UY" sz="1200" b="1" noProof="0" dirty="0"/>
           </a:p>
         </p:txBody>
@@ -4509,14 +4554,14 @@
           <p:nvPr>
             <p:extLst>
               <p:ext uri="{D42A27DB-BD31-4B8C-83A1-F6EECF244321}">
-                <p14:modId xmlns:p14="http://schemas.microsoft.com/office/powerpoint/2010/main" val="2988607659"/>
+                <p14:modId xmlns:p14="http://schemas.microsoft.com/office/powerpoint/2010/main" val="3907259707"/>
               </p:ext>
             </p:extLst>
           </p:nvPr>
         </p:nvGraphicFramePr>
         <p:xfrm>
           <a:off x="502920" y="1188720"/>
-          <a:ext cx="8138160" cy="3017520"/>
+          <a:ext cx="8138160" cy="3291840"/>
         </p:xfrm>
         <a:graphic>
           <a:graphicData uri="http://schemas.openxmlformats.org/drawingml/2006/table">
@@ -4838,6 +4883,163 @@
                 <a:extLst>
                   <a:ext uri="{0D108BD9-81ED-4DB2-BD59-A6C34878D82A}">
                     <a16:rowId xmlns:a16="http://schemas.microsoft.com/office/drawing/2014/main" val="10001"/>
+                  </a:ext>
+                </a:extLst>
+              </a:tr>
+              <a:tr h="274320">
+                <a:tc>
+                  <a:txBody>
+                    <a:bodyPr/>
+                    <a:lstStyle/>
+                    <a:p>
+                      <a:pPr marL="0" indent="0">
+                        <a:buNone/>
+                      </a:pPr>
+                      <a:r>
+                        <a:rPr lang="es-UY" sz="1000" b="1" noProof="0" dirty="0">
+                          <a:solidFill>
+                            <a:srgbClr val="2E0A4E"/>
+                          </a:solidFill>
+                          <a:highlight>
+                            <a:srgbClr val="FFFF00"/>
+                          </a:highlight>
+                          <a:latin typeface="Calibri" pitchFamily="34" charset="0"/>
+                          <a:ea typeface="Calibri" pitchFamily="34" charset="-122"/>
+                          <a:cs typeface="Calibri" pitchFamily="34" charset="-120"/>
+                        </a:rPr>
+                        <a:t>1b</a:t>
+                      </a:r>
+                      <a:endParaRPr lang="es-UY" sz="1000" noProof="0" dirty="0">
+                        <a:highlight>
+                          <a:srgbClr val="FFFF00"/>
+                        </a:highlight>
+                        <a:latin typeface="Calibri" charset="0"/>
+                        <a:ea typeface="Calibri" charset="0"/>
+                        <a:cs typeface="Calibri" charset="0"/>
+                      </a:endParaRPr>
+                    </a:p>
+                  </a:txBody>
+                  <a:tcPr marL="45720" marR="45720" anchor="ctr">
+                    <a:lnL w="0" cap="flat" cmpd="sng" algn="ctr">
+                      <a:noFill/>
+                    </a:lnL>
+                    <a:lnR w="0" cap="flat" cmpd="sng" algn="ctr">
+                      <a:noFill/>
+                    </a:lnR>
+                    <a:lnT w="0" cap="flat" cmpd="sng" algn="ctr">
+                      <a:noFill/>
+                    </a:lnT>
+                    <a:lnB w="0" cap="flat" cmpd="sng" algn="ctr">
+                      <a:noFill/>
+                    </a:lnB>
+                    <a:solidFill>
+                      <a:srgbClr val="FFFFFF"/>
+                    </a:solidFill>
+                  </a:tcPr>
+                </a:tc>
+                <a:tc>
+                  <a:txBody>
+                    <a:bodyPr/>
+                    <a:lstStyle/>
+                    <a:p>
+                      <a:pPr marL="0" indent="0">
+                        <a:buNone/>
+                      </a:pPr>
+                      <a:r>
+                        <a:rPr lang="es-UY" sz="1000" noProof="0" dirty="0">
+                          <a:solidFill>
+                            <a:srgbClr val="2E0A4E"/>
+                          </a:solidFill>
+                          <a:highlight>
+                            <a:srgbClr val="FFFF00"/>
+                          </a:highlight>
+                          <a:latin typeface="Calibri" pitchFamily="34" charset="0"/>
+                          <a:ea typeface="Calibri" pitchFamily="34" charset="-122"/>
+                          <a:cs typeface="Calibri" pitchFamily="34" charset="-120"/>
+                        </a:rPr>
+                        <a:t>Refuerzo de fundamentos de R (opcional)</a:t>
+                      </a:r>
+                      <a:endParaRPr lang="es-UY" sz="1000" noProof="0" dirty="0">
+                        <a:highlight>
+                          <a:srgbClr val="FFFF00"/>
+                        </a:highlight>
+                        <a:latin typeface="Calibri" charset="0"/>
+                        <a:ea typeface="Calibri" charset="0"/>
+                        <a:cs typeface="Calibri" charset="0"/>
+                      </a:endParaRPr>
+                    </a:p>
+                  </a:txBody>
+                  <a:tcPr marL="45720" marR="45720" anchor="ctr">
+                    <a:lnL w="0" cap="flat" cmpd="sng" algn="ctr">
+                      <a:noFill/>
+                    </a:lnL>
+                    <a:lnR w="0" cap="flat" cmpd="sng" algn="ctr">
+                      <a:noFill/>
+                    </a:lnR>
+                    <a:lnT w="0" cap="flat" cmpd="sng" algn="ctr">
+                      <a:noFill/>
+                    </a:lnT>
+                    <a:lnB w="0" cap="flat" cmpd="sng" algn="ctr">
+                      <a:noFill/>
+                    </a:lnB>
+                    <a:solidFill>
+                      <a:srgbClr val="FFFFFF"/>
+                    </a:solidFill>
+                  </a:tcPr>
+                </a:tc>
+                <a:tc>
+                  <a:txBody>
+                    <a:bodyPr/>
+                    <a:lstStyle/>
+                    <a:p>
+                      <a:pPr marL="0" indent="0">
+                        <a:buNone/>
+                      </a:pPr>
+                      <a:r>
+                        <a:rPr lang="es-UY" sz="1000" noProof="0" dirty="0">
+                          <a:solidFill>
+                            <a:srgbClr val="2E0A4E"/>
+                          </a:solidFill>
+                          <a:highlight>
+                            <a:srgbClr val="FFFF00"/>
+                          </a:highlight>
+                          <a:latin typeface="Calibri" pitchFamily="34" charset="0"/>
+                          <a:ea typeface="Calibri" pitchFamily="34" charset="-122"/>
+                          <a:cs typeface="Calibri" pitchFamily="34" charset="-120"/>
+                        </a:rPr>
+                        <a:t>Nivelación. Reforzar conceptos principales</a:t>
+                      </a:r>
+                      <a:endParaRPr lang="es-UY" sz="1000" noProof="0" dirty="0">
+                        <a:highlight>
+                          <a:srgbClr val="FFFF00"/>
+                        </a:highlight>
+                        <a:latin typeface="Calibri" charset="0"/>
+                        <a:ea typeface="Calibri" charset="0"/>
+                        <a:cs typeface="Calibri" charset="0"/>
+                      </a:endParaRPr>
+                    </a:p>
+                  </a:txBody>
+                  <a:tcPr marL="45720" marR="45720" anchor="ctr">
+                    <a:lnL w="0" cap="flat" cmpd="sng" algn="ctr">
+                      <a:noFill/>
+                    </a:lnL>
+                    <a:lnR w="0" cap="flat" cmpd="sng" algn="ctr">
+                      <a:noFill/>
+                    </a:lnR>
+                    <a:lnT w="0" cap="flat" cmpd="sng" algn="ctr">
+                      <a:noFill/>
+                    </a:lnT>
+                    <a:lnB w="0" cap="flat" cmpd="sng" algn="ctr">
+                      <a:noFill/>
+                    </a:lnB>
+                    <a:solidFill>
+                      <a:srgbClr val="FFFFFF"/>
+                    </a:solidFill>
+                  </a:tcPr>
+                </a:tc>
+                <a:extLst>
+                  <a:ext uri="{0D108BD9-81ED-4DB2-BD59-A6C34878D82A}">
+                    <a16:rowId xmlns:a16="http://schemas.microsoft.com/office/drawing/2014/main" val="1207923196"/>
                   </a:ext>
                 </a:extLst>
               </a:tr>

--- a/clase1/clase1.pptx
+++ b/clase1/clase1.pptx
@@ -13,12 +13,19 @@
     <p:sldId id="258" r:id="rId4"/>
     <p:sldId id="259" r:id="rId5"/>
     <p:sldId id="264" r:id="rId6"/>
-    <p:sldId id="261" r:id="rId7"/>
     <p:sldId id="267" r:id="rId8"/>
     <p:sldId id="268" r:id="rId9"/>
     <p:sldId id="269" r:id="rId10"/>
+    <p:sldId id="272" r:id="rId21"/>
+    <p:sldId id="273" r:id="rId22"/>
+    <p:sldId id="274" r:id="rId23"/>
     <p:sldId id="270" r:id="rId11"/>
     <p:sldId id="271" r:id="rId12"/>
+    <p:sldId id="275" r:id="rId24"/>
+    <p:sldId id="276" r:id="rId25"/>
+    <p:sldId id="277" r:id="rId26"/>
+    <p:sldId id="278" r:id="rId27"/>
+    <p:sldId id="279" r:id="rId28"/>
     <p:sldId id="263" r:id="rId13"/>
   </p:sldIdLst>
   <p:sldSz cx="9144000" cy="5143500" type="screen16x9"/>
@@ -2230,97 +2237,6 @@
 </p:notes>
 </file>
 
-<file path=ppt/notesSlides/notesSlide6.xml><?xml version="1.0" encoding="utf-8"?>
-<p:notes xmlns:a="http://schemas.openxmlformats.org/drawingml/2006/main" xmlns:r="http://schemas.openxmlformats.org/officeDocument/2006/relationships" xmlns:p="http://schemas.openxmlformats.org/presentationml/2006/main">
-  <p:cSld>
-    <p:spTree>
-      <p:nvGrpSpPr>
-        <p:cNvPr id="1" name=""/>
-        <p:cNvGrpSpPr/>
-        <p:nvPr/>
-      </p:nvGrpSpPr>
-      <p:grpSpPr>
-        <a:xfrm>
-          <a:off x="0" y="0"/>
-          <a:ext cx="0" cy="0"/>
-          <a:chOff x="0" y="0"/>
-          <a:chExt cx="0" cy="0"/>
-        </a:xfrm>
-      </p:grpSpPr>
-      <p:sp>
-        <p:nvSpPr>
-          <p:cNvPr id="2" name="Slide Image Placeholder 1"/>
-          <p:cNvSpPr>
-            <a:spLocks noGrp="1" noRot="1" noChangeAspect="1"/>
-          </p:cNvSpPr>
-          <p:nvPr>
-            <p:ph type="sldImg"/>
-          </p:nvPr>
-        </p:nvSpPr>
-        <p:spPr/>
-        <p:txBody>
-          <a:bodyPr/>
-          <a:lstStyle/>
-          <a:p>
-            <a:endParaRPr lang="en-US"/>
-          </a:p>
-        </p:txBody>
-      </p:sp>
-      <p:sp>
-        <p:nvSpPr>
-          <p:cNvPr id="3" name="Notes Placeholder 2"/>
-          <p:cNvSpPr>
-            <a:spLocks noGrp="1"/>
-          </p:cNvSpPr>
-          <p:nvPr>
-            <p:ph type="body" idx="1"/>
-          </p:nvPr>
-        </p:nvSpPr>
-        <p:spPr/>
-        <p:txBody>
-          <a:bodyPr/>
-          <a:lstStyle/>
-          <a:p>
-            <a:endParaRPr lang="en-US" dirty="0"/>
-          </a:p>
-        </p:txBody>
-      </p:sp>
-      <p:sp>
-        <p:nvSpPr>
-          <p:cNvPr id="4" name="Slide Number Placeholder 3"/>
-          <p:cNvSpPr>
-            <a:spLocks noGrp="1"/>
-          </p:cNvSpPr>
-          <p:nvPr>
-            <p:ph type="sldNum" sz="quarter" idx="10"/>
-          </p:nvPr>
-        </p:nvSpPr>
-        <p:spPr/>
-        <p:txBody>
-          <a:bodyPr/>
-          <a:lstStyle/>
-          <a:p>
-            <a:fld id="{F7021451-1387-4CA6-816F-3879F97B5CBC}" type="slidenum">
-              <a:rPr lang="en-US"/>
-              <a:t>6</a:t>
-            </a:fld>
-            <a:endParaRPr lang="en-US"/>
-          </a:p>
-        </p:txBody>
-      </p:sp>
-    </p:spTree>
-    <p:extLst>
-      <p:ext uri="{BB962C8B-B14F-4D97-AF65-F5344CB8AC3E}">
-        <p14:creationId xmlns:p14="http://schemas.microsoft.com/office/powerpoint/2010/main" val="1024086991"/>
-      </p:ext>
-    </p:extLst>
-  </p:cSld>
-  <p:clrMapOvr>
-    <a:masterClrMapping/>
-  </p:clrMapOvr>
-</p:notes>
-</file>
-
 <file path=ppt/notesSlides/notesSlide7.xml><?xml version="1.0" encoding="utf-8"?>
 <p:notes xmlns:a="http://schemas.openxmlformats.org/drawingml/2006/main" xmlns:r="http://schemas.openxmlformats.org/officeDocument/2006/relationships" xmlns:p="http://schemas.openxmlformats.org/presentationml/2006/main">
   <p:cSld>
@@ -3070,7 +2986,7 @@
                 <a:ea typeface="Oswald" pitchFamily="34" charset="-122"/>
                 <a:cs typeface="Oswald" pitchFamily="34" charset="-120"/>
               </a:rPr>
-              <a:t>Clase 1 de 10</a:t>
+              <a:t>Clase 1 de 7</a:t>
             </a:r>
             <a:endParaRPr lang="es-UY" sz="1600" noProof="0" dirty="0"/>
           </a:p>
@@ -3101,7 +3017,7 @@
               <a:buNone/>
             </a:pPr>
             <a:r>
-              <a:rPr lang="es-UY" sz="3400" b="1" noProof="0" dirty="0">
+              <a:rPr lang="es-UY" sz="2800" b="1" noProof="0" dirty="0">
                 <a:solidFill>
                   <a:srgbClr val="2E0A4E"/>
                 </a:solidFill>
@@ -3109,7 +3025,7 @@
                 <a:ea typeface="Oswald" pitchFamily="34" charset="-122"/>
                 <a:cs typeface="Oswald" pitchFamily="34" charset="-120"/>
               </a:rPr>
-              <a:t>Presentación del curso</a:t>
+              <a:t>Presentación del curso y primeros pasos</a:t>
             </a:r>
             <a:endParaRPr lang="es-UY" sz="3400" noProof="0" dirty="0"/>
           </a:p>
@@ -3501,7 +3417,7 @@
                 <a:latin typeface="Courier New" pitchFamily="34" charset="0"/>
                 <a:cs typeface="Courier New" pitchFamily="34" charset="-120"/>
               </a:rPr>
-              <a:t>Aún no nos centramos en comprender el código, sino que revisamos si funciona la aplicación y contrastamos los datos mostrados con </a:t>
+              <a:t>Primero revisamos si funciona la aplicación y contrastamos los datos mostrados con </a:t>
             </a:r>
             <a:r>
               <a:rPr lang="es-UY" sz="1200" b="1" dirty="0">
@@ -3511,7 +3427,7 @@
                 <a:latin typeface="Courier New" pitchFamily="34" charset="0"/>
                 <a:cs typeface="Courier New" pitchFamily="34" charset="-120"/>
               </a:rPr>
-              <a:t>nuestra base de datos original.</a:t>
+              <a:t>nuestra base de datos original. Después vemos, pieza por pieza, cómo está construida.</a:t>
             </a:r>
             <a:endParaRPr lang="es-UY" sz="1200" b="1" noProof="0" dirty="0"/>
           </a:p>
@@ -3748,7 +3664,7 @@
                 <a:ea typeface="Oswald" pitchFamily="34" charset="-122"/>
                 <a:cs typeface="Oswald" pitchFamily="34" charset="-120"/>
               </a:rPr>
-              <a:t>Próxima clase. Escribimos nuestra primera app.</a:t>
+              <a:t>Antes de la próxima clase.</a:t>
             </a:r>
           </a:p>
           <a:p>
@@ -3773,7 +3689,7 @@
                 </a:solidFill>
                 <a:latin typeface="Oswald" pitchFamily="34" charset="0"/>
               </a:rPr>
-              <a:t>-Traer R instalado</a:t>
+              <a:t>-Correr primeros_pasos.R completo</a:t>
             </a:r>
           </a:p>
           <a:p>
@@ -3787,21 +3703,7 @@
                 </a:solidFill>
                 <a:latin typeface="Oswald" pitchFamily="34" charset="0"/>
               </a:rPr>
-              <a:t>-Traer Rstudio instalado</a:t>
-            </a:r>
-          </a:p>
-          <a:p>
-            <a:pPr marL="0" indent="0">
-              <a:buNone/>
-            </a:pPr>
-            <a:r>
-              <a:rPr lang="es-UY" sz="3000" dirty="0">
-                <a:solidFill>
-                  <a:srgbClr val="FFFFFF"/>
-                </a:solidFill>
-                <a:latin typeface="Oswald" pitchFamily="34" charset="0"/>
-              </a:rPr>
-              <a:t>-Instalar los paquetes</a:t>
+              <a:t>-Tener R, RStudio y paquetes listos</a:t>
             </a:r>
           </a:p>
           <a:p>
@@ -3853,6 +3755,3604 @@
                 <a:schemeClr val="bg1"/>
               </a:solidFill>
             </a:endParaRPr>
+          </a:p>
+        </p:txBody>
+      </p:sp>
+    </p:spTree>
+  </p:cSld>
+  <p:clrMapOvr>
+    <a:masterClrMapping/>
+  </p:clrMapOvr>
+</p:sld>
+</file>
+
+<file path=ppt/slides/slide13.xml><?xml version="1.0" encoding="utf-8"?>
+<p:sld xmlns:a="http://schemas.openxmlformats.org/drawingml/2006/main" xmlns:p="http://schemas.openxmlformats.org/presentationml/2006/main" xmlns:r="http://schemas.openxmlformats.org/officeDocument/2006/relationships">
+  <p:cSld>
+    <p:bg>
+      <p:bgPr>
+        <a:solidFill>
+          <a:srgbClr val="FFFFFF"/>
+        </a:solidFill>
+        <a:effectLst/>
+      </p:bgPr>
+    </p:bg>
+    <p:spTree>
+      <p:nvGrpSpPr>
+        <p:cNvPr id="1" name=""/>
+        <p:cNvGrpSpPr/>
+        <p:nvPr/>
+      </p:nvGrpSpPr>
+      <p:grpSpPr/>
+      <p:sp>
+        <p:nvSpPr>
+          <p:cNvPr id="2" name="Text 0">
+            <a:extLst>
+              <a:ext uri="{FF2B5EF4-FFF2-40B4-BE49-F238E27FC236}">
+                <a16:creationId xmlns:a16="http://schemas.microsoft.com/office/drawing/2014/main" id="{45FBCF84-BF0C-00DD-1115-ECF03D12DDA6}"/>
+              </a:ext>
+            </a:extLst>
+          </p:cNvPr>
+          <p:cNvSpPr txBox="1"/>
+          <p:nvPr/>
+        </p:nvSpPr>
+        <p:spPr>
+          <a:xfrm>
+            <a:off x="502920" y="320040"/>
+            <a:ext cx="7040880" cy="640080"/>
+          </a:xfrm>
+          <a:prstGeom prst="rect">
+            <a:avLst/>
+          </a:prstGeom>
+          <a:noFill/>
+          <a:ln/>
+        </p:spPr>
+        <p:txBody>
+          <a:bodyPr wrap="square" lIns="0" tIns="0" rIns="0" bIns="0" rtlCol="0" anchor="ctr"/>
+          <a:lstStyle/>
+          <a:p>
+            <a:pPr marL="0" indent="0">
+              <a:buNone/>
+            </a:pPr>
+            <a:r>
+              <a:rPr lang="en-US" sz="3000" b="1" dirty="0">
+                <a:solidFill>
+                  <a:srgbClr val="2E0A4E"/>
+                </a:solidFill>
+                <a:latin typeface="Oswald" pitchFamily="34" charset="0"/>
+                <a:ea typeface="Oswald" pitchFamily="34" charset="-122"/>
+                <a:cs typeface="Oswald" pitchFamily="34" charset="-120"/>
+              </a:rPr>
+              <a:t>Paso a paso (1)</a:t>
+            </a:r>
+            <a:endParaRPr lang="en-US" sz="3000" dirty="0"/>
+          </a:p>
+        </p:txBody>
+      </p:sp>
+      <p:sp>
+        <p:nvSpPr>
+          <p:cNvPr id="11" name="Shape 9">
+            <a:extLst>
+              <a:ext uri="{FF2B5EF4-FFF2-40B4-BE49-F238E27FC236}">
+                <a16:creationId xmlns:a16="http://schemas.microsoft.com/office/drawing/2014/main" id="{1E4D2BBF-BB0F-7CF4-3842-6325D6A2CD35}"/>
+              </a:ext>
+            </a:extLst>
+          </p:cNvPr>
+          <p:cNvSpPr/>
+          <p:nvPr/>
+        </p:nvSpPr>
+        <p:spPr>
+          <a:xfrm>
+            <a:off x="439616" y="1188720"/>
+            <a:ext cx="2560320" cy="1463040"/>
+          </a:xfrm>
+          <a:prstGeom prst="roundRect">
+            <a:avLst>
+              <a:gd name="adj" fmla="val 2143"/>
+            </a:avLst>
+          </a:prstGeom>
+          <a:solidFill>
+            <a:srgbClr val="5A189A"/>
+          </a:solidFill>
+          <a:ln w="12700">
+            <a:solidFill>
+              <a:srgbClr val="5A189A"/>
+            </a:solidFill>
+            <a:prstDash val="solid"/>
+          </a:ln>
+        </p:spPr>
+        <p:txBody>
+          <a:bodyPr/>
+          <a:lstStyle/>
+          <a:p>
+            <a:endParaRPr lang="en-US"/>
+          </a:p>
+        </p:txBody>
+      </p:sp>
+      <p:sp>
+        <p:nvSpPr>
+          <p:cNvPr id="12" name="Text 10">
+            <a:extLst>
+              <a:ext uri="{FF2B5EF4-FFF2-40B4-BE49-F238E27FC236}">
+                <a16:creationId xmlns:a16="http://schemas.microsoft.com/office/drawing/2014/main" id="{57EA7703-08D4-E6C4-4FDB-5B08F7881055}"/>
+              </a:ext>
+            </a:extLst>
+          </p:cNvPr>
+          <p:cNvSpPr txBox="1"/>
+          <p:nvPr/>
+        </p:nvSpPr>
+        <p:spPr>
+          <a:xfrm>
+            <a:off x="668216" y="1256068"/>
+            <a:ext cx="2103120" cy="502920"/>
+          </a:xfrm>
+          <a:prstGeom prst="rect">
+            <a:avLst/>
+          </a:prstGeom>
+          <a:noFill/>
+          <a:ln/>
+        </p:spPr>
+        <p:txBody>
+          <a:bodyPr wrap="square" lIns="0" tIns="0" rIns="0" bIns="0" rtlCol="0" anchor="ctr"/>
+          <a:lstStyle/>
+          <a:p>
+            <a:pPr marL="0" indent="0">
+              <a:buNone/>
+            </a:pPr>
+            <a:r>
+              <a:rPr lang="en-US" sz="1600" b="1" dirty="0">
+                <a:solidFill>
+                  <a:srgbClr val="FFFFFF"/>
+                </a:solidFill>
+                <a:latin typeface="Oswald" pitchFamily="34" charset="0"/>
+                <a:ea typeface="Oswald" pitchFamily="34" charset="-122"/>
+                <a:cs typeface="Oswald" pitchFamily="34" charset="-120"/>
+              </a:rPr>
+              <a:t>OBJETIVO 3</a:t>
+            </a:r>
+            <a:endParaRPr lang="en-US" sz="1600" dirty="0"/>
+          </a:p>
+        </p:txBody>
+      </p:sp>
+      <p:sp>
+        <p:nvSpPr>
+          <p:cNvPr id="13" name="Text 11">
+            <a:extLst>
+              <a:ext uri="{FF2B5EF4-FFF2-40B4-BE49-F238E27FC236}">
+                <a16:creationId xmlns:a16="http://schemas.microsoft.com/office/drawing/2014/main" id="{83082800-1689-F508-4C9C-8E0187A18BDD}"/>
+              </a:ext>
+            </a:extLst>
+          </p:cNvPr>
+          <p:cNvSpPr txBox="1"/>
+          <p:nvPr/>
+        </p:nvSpPr>
+        <p:spPr>
+          <a:xfrm>
+            <a:off x="668216" y="1734572"/>
+            <a:ext cx="2103120" cy="716926"/>
+          </a:xfrm>
+          <a:prstGeom prst="rect">
+            <a:avLst/>
+          </a:prstGeom>
+          <a:noFill/>
+          <a:ln/>
+        </p:spPr>
+        <p:txBody>
+          <a:bodyPr wrap="square" lIns="0" tIns="0" rIns="0" bIns="0" rtlCol="0" anchor="t"/>
+          <a:lstStyle/>
+          <a:p>
+            <a:r>
+              <a:rPr lang="es-ES" sz="1400" dirty="0">
+                <a:solidFill>
+                  <a:schemeClr val="bg1"/>
+                </a:solidFill>
+                <a:latin typeface="Calibri" pitchFamily="34" charset="0"/>
+                <a:ea typeface="Calibri" pitchFamily="34" charset="-122"/>
+                <a:cs typeface="Calibri" pitchFamily="34" charset="-120"/>
+              </a:rPr>
+              <a:t>Dejar todo instalado</a:t>
+            </a:r>
+            <a:endParaRPr lang="en-US" sz="1300" dirty="0"/>
+          </a:p>
+        </p:txBody>
+      </p:sp>
+      <p:sp>
+        <p:nvSpPr>
+          <p:cNvPr id="15" name="Shape 9">
+            <a:extLst>
+              <a:ext uri="{FF2B5EF4-FFF2-40B4-BE49-F238E27FC236}">
+                <a16:creationId xmlns:a16="http://schemas.microsoft.com/office/drawing/2014/main" id="{E750D06A-626A-4348-CA99-CE04C627A232}"/>
+              </a:ext>
+            </a:extLst>
+          </p:cNvPr>
+          <p:cNvSpPr/>
+          <p:nvPr/>
+        </p:nvSpPr>
+        <p:spPr>
+          <a:xfrm>
+            <a:off x="439615" y="2719107"/>
+            <a:ext cx="3773659" cy="2281957"/>
+          </a:xfrm>
+          <a:prstGeom prst="roundRect">
+            <a:avLst>
+              <a:gd name="adj" fmla="val 2143"/>
+            </a:avLst>
+          </a:prstGeom>
+          <a:solidFill>
+            <a:schemeClr val="accent1">
+              <a:lumMod val="75000"/>
+            </a:schemeClr>
+          </a:solidFill>
+          <a:ln w="12700">
+            <a:solidFill>
+              <a:schemeClr val="accent1">
+                <a:lumMod val="75000"/>
+              </a:schemeClr>
+            </a:solidFill>
+            <a:prstDash val="solid"/>
+          </a:ln>
+        </p:spPr>
+        <p:txBody>
+          <a:bodyPr/>
+          <a:lstStyle/>
+          <a:p>
+            <a:endParaRPr lang="en-US"/>
+          </a:p>
+        </p:txBody>
+      </p:sp>
+      <p:sp>
+        <p:nvSpPr>
+          <p:cNvPr id="17" name="Text 11">
+            <a:extLst>
+              <a:ext uri="{FF2B5EF4-FFF2-40B4-BE49-F238E27FC236}">
+                <a16:creationId xmlns:a16="http://schemas.microsoft.com/office/drawing/2014/main" id="{F3440954-5CFF-06C7-8641-E2E38BA6F847}"/>
+              </a:ext>
+            </a:extLst>
+          </p:cNvPr>
+          <p:cNvSpPr txBox="1"/>
+          <p:nvPr/>
+        </p:nvSpPr>
+        <p:spPr>
+          <a:xfrm>
+            <a:off x="668216" y="2899117"/>
+            <a:ext cx="3369212" cy="716926"/>
+          </a:xfrm>
+          <a:prstGeom prst="rect">
+            <a:avLst/>
+          </a:prstGeom>
+          <a:noFill/>
+          <a:ln/>
+        </p:spPr>
+        <p:txBody>
+          <a:bodyPr wrap="square" lIns="0" tIns="0" rIns="0" bIns="0" rtlCol="0" anchor="t"/>
+          <a:lstStyle/>
+          <a:p>
+            <a:r>
+              <a:rPr lang="es-ES" sz="1400" b="1" dirty="0">
+                <a:solidFill>
+                  <a:schemeClr val="bg1"/>
+                </a:solidFill>
+                <a:latin typeface="Calibri" pitchFamily="34" charset="0"/>
+                <a:ea typeface="Calibri" pitchFamily="34" charset="-122"/>
+                <a:cs typeface="Calibri" pitchFamily="34" charset="-120"/>
+              </a:rPr>
+              <a:t>Primero R, después RStudio. Los paquetes se instalan una sola vez con </a:t>
+            </a:r>
+            <a:r>
+              <a:rPr lang="es-ES" sz="1400" b="1" i="1" dirty="0">
+                <a:solidFill>
+                  <a:schemeClr val="bg1"/>
+                </a:solidFill>
+                <a:latin typeface="Calibri" pitchFamily="34" charset="0"/>
+                <a:ea typeface="Calibri" pitchFamily="34" charset="-122"/>
+                <a:cs typeface="Calibri" pitchFamily="34" charset="-120"/>
+              </a:rPr>
+              <a:t>install.packages()</a:t>
+            </a:r>
+            <a:r>
+              <a:rPr lang="es-ES" sz="1400" b="1" dirty="0">
+                <a:solidFill>
+                  <a:schemeClr val="bg1"/>
+                </a:solidFill>
+                <a:latin typeface="Calibri" pitchFamily="34" charset="0"/>
+                <a:ea typeface="Calibri" pitchFamily="34" charset="-122"/>
+                <a:cs typeface="Calibri" pitchFamily="34" charset="-120"/>
+              </a:rPr>
+              <a:t>.</a:t>
+            </a:r>
+          </a:p>
+          <a:p>
+            <a:endParaRPr lang="es-ES" sz="1400" b="1" dirty="0">
+              <a:solidFill>
+                <a:schemeClr val="bg1"/>
+              </a:solidFill>
+              <a:latin typeface="Calibri" pitchFamily="34" charset="0"/>
+              <a:ea typeface="Calibri" pitchFamily="34" charset="-122"/>
+              <a:cs typeface="Calibri" pitchFamily="34" charset="-120"/>
+            </a:endParaRPr>
+          </a:p>
+          <a:p>
+            <a:r>
+              <a:rPr lang="es-ES" sz="1400" b="1" dirty="0">
+                <a:solidFill>
+                  <a:schemeClr val="bg1"/>
+                </a:solidFill>
+                <a:latin typeface="Calibri" pitchFamily="34" charset="0"/>
+                <a:ea typeface="Calibri" pitchFamily="34" charset="-122"/>
+                <a:cs typeface="Calibri" pitchFamily="34" charset="-120"/>
+              </a:rPr>
+              <a:t>Abrir el curso siempre desde el archivo </a:t>
+            </a:r>
+            <a:r>
+              <a:rPr lang="es-ES" sz="1400" b="1" i="1" dirty="0">
+                <a:solidFill>
+                  <a:schemeClr val="bg1"/>
+                </a:solidFill>
+                <a:latin typeface="Calibri" pitchFamily="34" charset="0"/>
+                <a:ea typeface="Calibri" pitchFamily="34" charset="-122"/>
+                <a:cs typeface="Calibri" pitchFamily="34" charset="-120"/>
+              </a:rPr>
+              <a:t>.Rproj</a:t>
+            </a:r>
+            <a:r>
+              <a:rPr lang="es-ES" sz="1400" b="1" dirty="0">
+                <a:solidFill>
+                  <a:schemeClr val="bg1"/>
+                </a:solidFill>
+                <a:latin typeface="Calibri" pitchFamily="34" charset="0"/>
+                <a:ea typeface="Calibri" pitchFamily="34" charset="-122"/>
+                <a:cs typeface="Calibri" pitchFamily="34" charset="-120"/>
+              </a:rPr>
+              <a:t>. Así R sabe dónde están los datos.</a:t>
+            </a:r>
+          </a:p>
+        </p:txBody>
+      </p:sp>
+      <p:pic>
+        <p:nvPicPr>
+          <p:cNvPr id="22" name="Picture 21" descr="p1.png"/>
+          <p:cNvPicPr>
+            <a:picLocks noChangeAspect="1"/>
+          </p:cNvPicPr>
+          <p:nvPr/>
+        </p:nvPicPr>
+        <p:blipFill>
+          <a:blip r:embed="rId2"/>
+          <a:stretch>
+            <a:fillRect/>
+          </a:stretch>
+        </p:blipFill>
+        <p:spPr>
+          <a:xfrm>
+            <a:off x="4434840" y="1668901"/>
+            <a:ext cx="4480560" cy="2102876"/>
+          </a:xfrm>
+          <a:prstGeom prst="rect">
+            <a:avLst/>
+          </a:prstGeom>
+          <a:ln w="76200">
+            <a:solidFill>
+              <a:schemeClr val="accent1">
+                <a:lumMod val="75000"/>
+              </a:schemeClr>
+            </a:solidFill>
+          </a:ln>
+        </p:spPr>
+      </p:pic>
+    </p:spTree>
+  </p:cSld>
+  <p:clrMapOvr>
+    <a:masterClrMapping/>
+  </p:clrMapOvr>
+</p:sld>
+</file>
+
+<file path=ppt/slides/slide14.xml><?xml version="1.0" encoding="utf-8"?>
+<p:sld xmlns:a="http://schemas.openxmlformats.org/drawingml/2006/main" xmlns:p="http://schemas.openxmlformats.org/presentationml/2006/main" xmlns:r="http://schemas.openxmlformats.org/officeDocument/2006/relationships">
+  <p:cSld>
+    <p:bg>
+      <p:bgPr>
+        <a:solidFill>
+          <a:srgbClr val="FFFFFF"/>
+        </a:solidFill>
+        <a:effectLst/>
+      </p:bgPr>
+    </p:bg>
+    <p:spTree>
+      <p:nvGrpSpPr>
+        <p:cNvPr id="1" name=""/>
+        <p:cNvGrpSpPr/>
+        <p:nvPr/>
+      </p:nvGrpSpPr>
+      <p:grpSpPr/>
+      <p:sp>
+        <p:nvSpPr>
+          <p:cNvPr id="2" name="Text 0"/>
+          <p:cNvSpPr txBox="1"/>
+          <p:nvPr/>
+        </p:nvSpPr>
+        <p:spPr>
+          <a:xfrm>
+            <a:off x="502920" y="320040"/>
+            <a:ext cx="7040880" cy="640080"/>
+          </a:xfrm>
+          <a:prstGeom prst="rect">
+            <a:avLst/>
+          </a:prstGeom>
+          <a:noFill/>
+          <a:ln/>
+        </p:spPr>
+        <p:txBody>
+          <a:bodyPr wrap="square" lIns="0" tIns="0" rIns="0" bIns="0" rtlCol="0" anchor="ctr"/>
+          <a:lstStyle/>
+          <a:p>
+            <a:r>
+              <a:rPr lang="en-US" sz="3000" b="1" dirty="0">
+                <a:solidFill>
+                  <a:srgbClr val="2E0A4E"/>
+                </a:solidFill>
+                <a:latin typeface="Oswald" pitchFamily="34" charset="0"/>
+                <a:ea typeface="Oswald" pitchFamily="34" charset="-122"/>
+                <a:cs typeface="Oswald" pitchFamily="34" charset="-120"/>
+              </a:rPr>
+              <a:t>Paso a paso (2)</a:t>
+            </a:r>
+            <a:endParaRPr lang="en-US" sz="3000" dirty="0"/>
+          </a:p>
+        </p:txBody>
+      </p:sp>
+      <p:sp>
+        <p:nvSpPr>
+          <p:cNvPr id="11" name="Shape 9"/>
+          <p:cNvSpPr/>
+          <p:nvPr/>
+        </p:nvSpPr>
+        <p:spPr>
+          <a:xfrm>
+            <a:off x="439616" y="1188720"/>
+            <a:ext cx="2560320" cy="1463040"/>
+          </a:xfrm>
+          <a:prstGeom prst="roundRect">
+            <a:avLst>
+              <a:gd name="adj" fmla="val 2143"/>
+            </a:avLst>
+          </a:prstGeom>
+          <a:solidFill>
+            <a:srgbClr val="5A189A"/>
+          </a:solidFill>
+          <a:ln w="12700">
+            <a:solidFill>
+              <a:srgbClr val="5A189A"/>
+            </a:solidFill>
+            <a:prstDash val="solid"/>
+          </a:ln>
+        </p:spPr>
+        <p:txBody>
+          <a:bodyPr/>
+          <a:lstStyle/>
+          <a:p>
+            <a:endParaRPr lang="en-US"/>
+          </a:p>
+        </p:txBody>
+      </p:sp>
+      <p:sp>
+        <p:nvSpPr>
+          <p:cNvPr id="12" name="Text 10"/>
+          <p:cNvSpPr txBox="1"/>
+          <p:nvPr/>
+        </p:nvSpPr>
+        <p:spPr>
+          <a:xfrm>
+            <a:off x="668216" y="1256068"/>
+            <a:ext cx="2103120" cy="502920"/>
+          </a:xfrm>
+          <a:prstGeom prst="rect">
+            <a:avLst/>
+          </a:prstGeom>
+          <a:noFill/>
+          <a:ln/>
+        </p:spPr>
+        <p:txBody>
+          <a:bodyPr wrap="square" lIns="0" tIns="0" rIns="0" bIns="0" rtlCol="0" anchor="ctr"/>
+          <a:lstStyle/>
+          <a:p>
+            <a:pPr marL="0" indent="0">
+              <a:buNone/>
+            </a:pPr>
+            <a:r>
+              <a:rPr lang="en-US" sz="1600" b="1" dirty="0">
+                <a:solidFill>
+                  <a:srgbClr val="FFFFFF"/>
+                </a:solidFill>
+                <a:latin typeface="Oswald" pitchFamily="34" charset="0"/>
+                <a:ea typeface="Oswald" pitchFamily="34" charset="-122"/>
+                <a:cs typeface="Oswald" pitchFamily="34" charset="-120"/>
+              </a:rPr>
+              <a:t>OBJETIVO 4</a:t>
+            </a:r>
+            <a:endParaRPr lang="en-US" sz="1600" dirty="0"/>
+          </a:p>
+        </p:txBody>
+      </p:sp>
+      <p:sp>
+        <p:nvSpPr>
+          <p:cNvPr id="13" name="Text 11"/>
+          <p:cNvSpPr txBox="1"/>
+          <p:nvPr/>
+        </p:nvSpPr>
+        <p:spPr>
+          <a:xfrm>
+            <a:off x="668216" y="1734572"/>
+            <a:ext cx="2103120" cy="716926"/>
+          </a:xfrm>
+          <a:prstGeom prst="rect">
+            <a:avLst/>
+          </a:prstGeom>
+          <a:noFill/>
+          <a:ln/>
+        </p:spPr>
+        <p:txBody>
+          <a:bodyPr wrap="square" lIns="0" tIns="0" rIns="0" bIns="0" rtlCol="0" anchor="t"/>
+          <a:lstStyle/>
+          <a:p>
+            <a:r>
+              <a:rPr lang="es-ES" sz="1400" dirty="0">
+                <a:solidFill>
+                  <a:schemeClr val="bg1"/>
+                </a:solidFill>
+                <a:latin typeface="Calibri" pitchFamily="34" charset="0"/>
+                <a:ea typeface="Calibri" pitchFamily="34" charset="-122"/>
+                <a:cs typeface="Calibri" pitchFamily="34" charset="-120"/>
+              </a:rPr>
+              <a:t>Los cuatro paneles de RStudio</a:t>
+            </a:r>
+            <a:endParaRPr lang="en-US" sz="1300" dirty="0"/>
+          </a:p>
+        </p:txBody>
+      </p:sp>
+      <p:sp>
+        <p:nvSpPr>
+          <p:cNvPr id="15" name="Shape 9">
+            <a:extLst>
+              <a:ext uri="{FF2B5EF4-FFF2-40B4-BE49-F238E27FC236}">
+                <a16:creationId xmlns:a16="http://schemas.microsoft.com/office/drawing/2014/main" id="{1ED05ED1-CE50-06A2-178F-B4365671B18F}"/>
+              </a:ext>
+            </a:extLst>
+          </p:cNvPr>
+          <p:cNvSpPr/>
+          <p:nvPr/>
+        </p:nvSpPr>
+        <p:spPr>
+          <a:xfrm>
+            <a:off x="439615" y="2719107"/>
+            <a:ext cx="3773659" cy="2281957"/>
+          </a:xfrm>
+          <a:prstGeom prst="roundRect">
+            <a:avLst>
+              <a:gd name="adj" fmla="val 2143"/>
+            </a:avLst>
+          </a:prstGeom>
+          <a:solidFill>
+            <a:schemeClr val="accent1">
+              <a:lumMod val="75000"/>
+            </a:schemeClr>
+          </a:solidFill>
+          <a:ln w="12700">
+            <a:solidFill>
+              <a:schemeClr val="accent1">
+                <a:lumMod val="75000"/>
+              </a:schemeClr>
+            </a:solidFill>
+            <a:prstDash val="solid"/>
+          </a:ln>
+        </p:spPr>
+        <p:txBody>
+          <a:bodyPr/>
+          <a:lstStyle/>
+          <a:p>
+            <a:endParaRPr lang="en-US"/>
+          </a:p>
+        </p:txBody>
+      </p:sp>
+      <p:sp>
+        <p:nvSpPr>
+          <p:cNvPr id="17" name="Text 11">
+            <a:extLst>
+              <a:ext uri="{FF2B5EF4-FFF2-40B4-BE49-F238E27FC236}">
+                <a16:creationId xmlns:a16="http://schemas.microsoft.com/office/drawing/2014/main" id="{1291722D-C809-2238-9939-339690D52438}"/>
+              </a:ext>
+            </a:extLst>
+          </p:cNvPr>
+          <p:cNvSpPr txBox="1"/>
+          <p:nvPr/>
+        </p:nvSpPr>
+        <p:spPr>
+          <a:xfrm>
+            <a:off x="668216" y="2899117"/>
+            <a:ext cx="3369212" cy="716926"/>
+          </a:xfrm>
+          <a:prstGeom prst="rect">
+            <a:avLst/>
+          </a:prstGeom>
+          <a:noFill/>
+          <a:ln/>
+        </p:spPr>
+        <p:txBody>
+          <a:bodyPr wrap="square" lIns="0" tIns="0" rIns="0" bIns="0" rtlCol="0" anchor="t"/>
+          <a:lstStyle/>
+          <a:p>
+            <a:r>
+              <a:rPr lang="es-ES" sz="1400" b="1" dirty="0" err="1">
+                <a:solidFill>
+                  <a:schemeClr val="bg1"/>
+                </a:solidFill>
+                <a:latin typeface="Calibri" pitchFamily="34" charset="0"/>
+                <a:ea typeface="Calibri" pitchFamily="34" charset="-122"/>
+                <a:cs typeface="Calibri" pitchFamily="34" charset="-120"/>
+              </a:rPr>
+              <a:t>En el script se escribe y se guarda. </a:t>
+            </a:r>
+            <a:r>
+              <a:rPr lang="es-ES" sz="1400" b="1" i="1" dirty="0" err="1">
+                <a:solidFill>
+                  <a:schemeClr val="bg1"/>
+                </a:solidFill>
+                <a:latin typeface="Calibri" pitchFamily="34" charset="0"/>
+                <a:ea typeface="Calibri" pitchFamily="34" charset="-122"/>
+                <a:cs typeface="Calibri" pitchFamily="34" charset="-120"/>
+              </a:rPr>
+              <a:t>Ctrl + Enter</a:t>
+            </a:r>
+            <a:r>
+              <a:rPr lang="es-ES" sz="1400" b="1" dirty="0" err="1">
+                <a:solidFill>
+                  <a:schemeClr val="bg1"/>
+                </a:solidFill>
+                <a:latin typeface="Calibri" pitchFamily="34" charset="0"/>
+                <a:ea typeface="Calibri" pitchFamily="34" charset="-122"/>
+                <a:cs typeface="Calibri" pitchFamily="34" charset="-120"/>
+              </a:rPr>
+              <a:t> manda la línea a la consola, donde aparece el resultado.</a:t>
+            </a:r>
+          </a:p>
+          <a:p>
+            <a:endParaRPr lang="es-ES" sz="1400" b="1" dirty="0" err="1">
+              <a:solidFill>
+                <a:schemeClr val="bg1"/>
+              </a:solidFill>
+              <a:latin typeface="Calibri" pitchFamily="34" charset="0"/>
+              <a:ea typeface="Calibri" pitchFamily="34" charset="-122"/>
+              <a:cs typeface="Calibri" pitchFamily="34" charset="-120"/>
+            </a:endParaRPr>
+          </a:p>
+          <a:p>
+            <a:r>
+              <a:rPr lang="es-ES" sz="1400" b="1" dirty="0" err="1">
+                <a:solidFill>
+                  <a:schemeClr val="bg1"/>
+                </a:solidFill>
+                <a:latin typeface="Calibri" pitchFamily="34" charset="0"/>
+                <a:ea typeface="Calibri" pitchFamily="34" charset="-122"/>
+                <a:cs typeface="Calibri" pitchFamily="34" charset="-120"/>
+              </a:rPr>
+              <a:t>Los errores también salen en la consola. Leerlos con calma es la mitad del trabajo.</a:t>
+            </a:r>
+          </a:p>
+        </p:txBody>
+      </p:sp>
+      <p:pic>
+        <p:nvPicPr>
+          <p:cNvPr id="24" name="Picture 23" descr="p2.png"/>
+          <p:cNvPicPr>
+            <a:picLocks noChangeAspect="1"/>
+          </p:cNvPicPr>
+          <p:nvPr/>
+        </p:nvPicPr>
+        <p:blipFill>
+          <a:blip r:embed="rId2"/>
+          <a:stretch>
+            <a:fillRect/>
+          </a:stretch>
+        </p:blipFill>
+        <p:spPr>
+          <a:xfrm>
+            <a:off x="4434840" y="1320165"/>
+            <a:ext cx="4480560" cy="2800350"/>
+          </a:xfrm>
+          <a:prstGeom prst="rect">
+            <a:avLst/>
+          </a:prstGeom>
+          <a:ln w="76200">
+            <a:solidFill>
+              <a:schemeClr val="accent1">
+                <a:lumMod val="75000"/>
+              </a:schemeClr>
+            </a:solidFill>
+          </a:ln>
+        </p:spPr>
+      </p:pic>
+    </p:spTree>
+  </p:cSld>
+  <p:clrMapOvr>
+    <a:masterClrMapping/>
+  </p:clrMapOvr>
+</p:sld>
+</file>
+
+<file path=ppt/slides/slide15.xml><?xml version="1.0" encoding="utf-8"?>
+<p:sld xmlns:a="http://schemas.openxmlformats.org/drawingml/2006/main" xmlns:p="http://schemas.openxmlformats.org/presentationml/2006/main" xmlns:r="http://schemas.openxmlformats.org/officeDocument/2006/relationships">
+  <p:cSld>
+    <p:bg>
+      <p:bgPr>
+        <a:solidFill>
+          <a:srgbClr val="FFFFFF"/>
+        </a:solidFill>
+        <a:effectLst/>
+      </p:bgPr>
+    </p:bg>
+    <p:spTree>
+      <p:nvGrpSpPr>
+        <p:cNvPr id="1" name=""/>
+        <p:cNvGrpSpPr/>
+        <p:nvPr/>
+      </p:nvGrpSpPr>
+      <p:grpSpPr/>
+      <p:sp>
+        <p:nvSpPr>
+          <p:cNvPr id="2" name="Text 0">
+            <a:extLst>
+              <a:ext uri="{FF2B5EF4-FFF2-40B4-BE49-F238E27FC236}">
+                <a16:creationId xmlns:a16="http://schemas.microsoft.com/office/drawing/2014/main" id="{1B8BE186-2227-0AEE-46BF-1738518AF7E2}"/>
+              </a:ext>
+            </a:extLst>
+          </p:cNvPr>
+          <p:cNvSpPr txBox="1"/>
+          <p:nvPr/>
+        </p:nvSpPr>
+        <p:spPr>
+          <a:xfrm>
+            <a:off x="502920" y="320040"/>
+            <a:ext cx="7040880" cy="640080"/>
+          </a:xfrm>
+          <a:prstGeom prst="rect">
+            <a:avLst/>
+          </a:prstGeom>
+          <a:noFill/>
+          <a:ln/>
+        </p:spPr>
+        <p:txBody>
+          <a:bodyPr wrap="square" lIns="0" tIns="0" rIns="0" bIns="0" rtlCol="0" anchor="ctr"/>
+          <a:lstStyle/>
+          <a:p>
+            <a:r>
+              <a:rPr lang="en-US" sz="3000" b="1" dirty="0">
+                <a:solidFill>
+                  <a:srgbClr val="2E0A4E"/>
+                </a:solidFill>
+                <a:latin typeface="Oswald" pitchFamily="34" charset="0"/>
+                <a:ea typeface="Oswald" pitchFamily="34" charset="-122"/>
+                <a:cs typeface="Oswald" pitchFamily="34" charset="-120"/>
+              </a:rPr>
+              <a:t>Paso a paso (3)</a:t>
+            </a:r>
+            <a:endParaRPr lang="en-US" sz="3000" dirty="0"/>
+          </a:p>
+        </p:txBody>
+      </p:sp>
+      <p:sp>
+        <p:nvSpPr>
+          <p:cNvPr id="11" name="Shape 9">
+            <a:extLst>
+              <a:ext uri="{FF2B5EF4-FFF2-40B4-BE49-F238E27FC236}">
+                <a16:creationId xmlns:a16="http://schemas.microsoft.com/office/drawing/2014/main" id="{2D484EA3-17D5-DFDE-7FFB-391D9E546766}"/>
+              </a:ext>
+            </a:extLst>
+          </p:cNvPr>
+          <p:cNvSpPr/>
+          <p:nvPr/>
+        </p:nvSpPr>
+        <p:spPr>
+          <a:xfrm>
+            <a:off x="439616" y="1188720"/>
+            <a:ext cx="2560320" cy="1463040"/>
+          </a:xfrm>
+          <a:prstGeom prst="roundRect">
+            <a:avLst>
+              <a:gd name="adj" fmla="val 2143"/>
+            </a:avLst>
+          </a:prstGeom>
+          <a:solidFill>
+            <a:srgbClr val="5A189A"/>
+          </a:solidFill>
+          <a:ln w="12700">
+            <a:solidFill>
+              <a:srgbClr val="5A189A"/>
+            </a:solidFill>
+            <a:prstDash val="solid"/>
+          </a:ln>
+        </p:spPr>
+        <p:txBody>
+          <a:bodyPr/>
+          <a:lstStyle/>
+          <a:p>
+            <a:endParaRPr lang="en-US"/>
+          </a:p>
+        </p:txBody>
+      </p:sp>
+      <p:sp>
+        <p:nvSpPr>
+          <p:cNvPr id="12" name="Text 10">
+            <a:extLst>
+              <a:ext uri="{FF2B5EF4-FFF2-40B4-BE49-F238E27FC236}">
+                <a16:creationId xmlns:a16="http://schemas.microsoft.com/office/drawing/2014/main" id="{FF346D48-99B4-78ED-CF54-DB6A3D402E26}"/>
+              </a:ext>
+            </a:extLst>
+          </p:cNvPr>
+          <p:cNvSpPr txBox="1"/>
+          <p:nvPr/>
+        </p:nvSpPr>
+        <p:spPr>
+          <a:xfrm>
+            <a:off x="668216" y="1256068"/>
+            <a:ext cx="2103120" cy="502920"/>
+          </a:xfrm>
+          <a:prstGeom prst="rect">
+            <a:avLst/>
+          </a:prstGeom>
+          <a:noFill/>
+          <a:ln/>
+        </p:spPr>
+        <p:txBody>
+          <a:bodyPr wrap="square" lIns="0" tIns="0" rIns="0" bIns="0" rtlCol="0" anchor="ctr"/>
+          <a:lstStyle/>
+          <a:p>
+            <a:pPr marL="0" indent="0">
+              <a:buNone/>
+            </a:pPr>
+            <a:r>
+              <a:rPr lang="en-US" sz="1600" b="1" dirty="0">
+                <a:solidFill>
+                  <a:srgbClr val="FFFFFF"/>
+                </a:solidFill>
+                <a:latin typeface="Oswald" pitchFamily="34" charset="0"/>
+                <a:ea typeface="Oswald" pitchFamily="34" charset="-122"/>
+                <a:cs typeface="Oswald" pitchFamily="34" charset="-120"/>
+              </a:rPr>
+              <a:t>OBJETIVO 4</a:t>
+            </a:r>
+            <a:endParaRPr lang="en-US" sz="1600" dirty="0"/>
+          </a:p>
+        </p:txBody>
+      </p:sp>
+      <p:sp>
+        <p:nvSpPr>
+          <p:cNvPr id="13" name="Text 11">
+            <a:extLst>
+              <a:ext uri="{FF2B5EF4-FFF2-40B4-BE49-F238E27FC236}">
+                <a16:creationId xmlns:a16="http://schemas.microsoft.com/office/drawing/2014/main" id="{961D826F-99A4-C802-E6F8-FA059D329199}"/>
+              </a:ext>
+            </a:extLst>
+          </p:cNvPr>
+          <p:cNvSpPr txBox="1"/>
+          <p:nvPr/>
+        </p:nvSpPr>
+        <p:spPr>
+          <a:xfrm>
+            <a:off x="668216" y="1734572"/>
+            <a:ext cx="2103120" cy="716926"/>
+          </a:xfrm>
+          <a:prstGeom prst="rect">
+            <a:avLst/>
+          </a:prstGeom>
+          <a:noFill/>
+          <a:ln/>
+        </p:spPr>
+        <p:txBody>
+          <a:bodyPr wrap="square" lIns="0" tIns="0" rIns="0" bIns="0" rtlCol="0" anchor="t"/>
+          <a:lstStyle/>
+          <a:p>
+            <a:r>
+              <a:rPr lang="es-ES" sz="1400" dirty="0">
+                <a:solidFill>
+                  <a:schemeClr val="bg1"/>
+                </a:solidFill>
+                <a:latin typeface="Calibri" pitchFamily="34" charset="0"/>
+                <a:ea typeface="Calibri" pitchFamily="34" charset="-122"/>
+                <a:cs typeface="Calibri" pitchFamily="34" charset="-120"/>
+              </a:rPr>
+              <a:t>Lo básico de R</a:t>
+            </a:r>
+          </a:p>
+        </p:txBody>
+      </p:sp>
+      <p:sp>
+        <p:nvSpPr>
+          <p:cNvPr id="15" name="Shape 9">
+            <a:extLst>
+              <a:ext uri="{FF2B5EF4-FFF2-40B4-BE49-F238E27FC236}">
+                <a16:creationId xmlns:a16="http://schemas.microsoft.com/office/drawing/2014/main" id="{F33AC7BE-75B4-F8D4-43E0-87B7AD3B3F34}"/>
+              </a:ext>
+            </a:extLst>
+          </p:cNvPr>
+          <p:cNvSpPr/>
+          <p:nvPr/>
+        </p:nvSpPr>
+        <p:spPr>
+          <a:xfrm>
+            <a:off x="439615" y="2719107"/>
+            <a:ext cx="3773659" cy="2281957"/>
+          </a:xfrm>
+          <a:prstGeom prst="roundRect">
+            <a:avLst>
+              <a:gd name="adj" fmla="val 2143"/>
+            </a:avLst>
+          </a:prstGeom>
+          <a:solidFill>
+            <a:schemeClr val="accent1">
+              <a:lumMod val="75000"/>
+            </a:schemeClr>
+          </a:solidFill>
+          <a:ln w="12700">
+            <a:solidFill>
+              <a:schemeClr val="accent1">
+                <a:lumMod val="75000"/>
+              </a:schemeClr>
+            </a:solidFill>
+            <a:prstDash val="solid"/>
+          </a:ln>
+        </p:spPr>
+        <p:txBody>
+          <a:bodyPr/>
+          <a:lstStyle/>
+          <a:p>
+            <a:endParaRPr lang="en-US"/>
+          </a:p>
+        </p:txBody>
+      </p:sp>
+      <p:sp>
+        <p:nvSpPr>
+          <p:cNvPr id="17" name="Text 11">
+            <a:extLst>
+              <a:ext uri="{FF2B5EF4-FFF2-40B4-BE49-F238E27FC236}">
+                <a16:creationId xmlns:a16="http://schemas.microsoft.com/office/drawing/2014/main" id="{BFEECB63-4CC8-9CA3-665B-7BF2CFCADD52}"/>
+              </a:ext>
+            </a:extLst>
+          </p:cNvPr>
+          <p:cNvSpPr txBox="1"/>
+          <p:nvPr/>
+        </p:nvSpPr>
+        <p:spPr>
+          <a:xfrm>
+            <a:off x="668216" y="2899117"/>
+            <a:ext cx="3369212" cy="716926"/>
+          </a:xfrm>
+          <a:prstGeom prst="rect">
+            <a:avLst/>
+          </a:prstGeom>
+          <a:noFill/>
+          <a:ln/>
+        </p:spPr>
+        <p:txBody>
+          <a:bodyPr wrap="square" lIns="0" tIns="0" rIns="0" bIns="0" rtlCol="0" anchor="t"/>
+          <a:lstStyle/>
+          <a:p>
+            <a:r>
+              <a:rPr lang="es-ES" sz="1400" b="1" i="1" dirty="0">
+                <a:solidFill>
+                  <a:schemeClr val="bg1"/>
+                </a:solidFill>
+                <a:latin typeface="Calibri" pitchFamily="34" charset="0"/>
+                <a:ea typeface="Calibri" pitchFamily="34" charset="-122"/>
+                <a:cs typeface="Calibri" pitchFamily="34" charset="-120"/>
+              </a:rPr>
+              <a:t>&lt;-</a:t>
+            </a:r>
+            <a:r>
+              <a:rPr lang="es-ES" sz="1400" b="1" dirty="0">
+                <a:solidFill>
+                  <a:schemeClr val="bg1"/>
+                </a:solidFill>
+                <a:latin typeface="Calibri" pitchFamily="34" charset="0"/>
+                <a:ea typeface="Calibri" pitchFamily="34" charset="-122"/>
+                <a:cs typeface="Calibri" pitchFamily="34" charset="-120"/>
+              </a:rPr>
+              <a:t> guarda un valor en un objeto. </a:t>
+            </a:r>
+            <a:r>
+              <a:rPr lang="es-ES" sz="1400" b="1" i="1" dirty="0">
+                <a:solidFill>
+                  <a:schemeClr val="bg1"/>
+                </a:solidFill>
+                <a:latin typeface="Calibri" pitchFamily="34" charset="0"/>
+                <a:ea typeface="Calibri" pitchFamily="34" charset="-122"/>
+                <a:cs typeface="Calibri" pitchFamily="34" charset="-120"/>
+              </a:rPr>
+              <a:t>c()</a:t>
+            </a:r>
+            <a:r>
+              <a:rPr lang="es-ES" sz="1400" b="1" dirty="0">
+                <a:solidFill>
+                  <a:schemeClr val="bg1"/>
+                </a:solidFill>
+                <a:latin typeface="Calibri" pitchFamily="34" charset="0"/>
+                <a:ea typeface="Calibri" pitchFamily="34" charset="-122"/>
+                <a:cs typeface="Calibri" pitchFamily="34" charset="-120"/>
+              </a:rPr>
+              <a:t> arma un vector. </a:t>
+            </a:r>
+            <a:r>
+              <a:rPr lang="es-ES" sz="1400" b="1" i="1" dirty="0">
+                <a:solidFill>
+                  <a:schemeClr val="bg1"/>
+                </a:solidFill>
+                <a:latin typeface="Calibri" pitchFamily="34" charset="0"/>
+                <a:ea typeface="Calibri" pitchFamily="34" charset="-122"/>
+                <a:cs typeface="Calibri" pitchFamily="34" charset="-120"/>
+              </a:rPr>
+              <a:t>read.csv()</a:t>
+            </a:r>
+            <a:r>
+              <a:rPr lang="es-ES" sz="1400" b="1" dirty="0">
+                <a:solidFill>
+                  <a:schemeClr val="bg1"/>
+                </a:solidFill>
+                <a:latin typeface="Calibri" pitchFamily="34" charset="0"/>
+                <a:ea typeface="Calibri" pitchFamily="34" charset="-122"/>
+                <a:cs typeface="Calibri" pitchFamily="34" charset="-120"/>
+              </a:rPr>
+              <a:t> lee una tabla, un data frame.</a:t>
+            </a:r>
+            <a:endParaRPr lang="en-US" sz="1300" dirty="0"/>
+          </a:p>
+          <a:p>
+            <a:endParaRPr lang="en-US" sz="1300" dirty="0"/>
+          </a:p>
+          <a:p>
+            <a:r>
+              <a:rPr lang="es-ES" sz="1400" b="1" i="1" dirty="0">
+                <a:solidFill>
+                  <a:schemeClr val="bg1"/>
+                </a:solidFill>
+                <a:latin typeface="Calibri" pitchFamily="34" charset="0"/>
+                <a:ea typeface="Calibri" pitchFamily="34" charset="-122"/>
+                <a:cs typeface="Calibri" pitchFamily="34" charset="-120"/>
+              </a:rPr>
+              <a:t>elecciones$emitidos</a:t>
+            </a:r>
+            <a:r>
+              <a:rPr lang="es-ES" sz="1400" b="1" dirty="0">
+                <a:solidFill>
+                  <a:schemeClr val="bg1"/>
+                </a:solidFill>
+                <a:latin typeface="Calibri" pitchFamily="34" charset="0"/>
+                <a:ea typeface="Calibri" pitchFamily="34" charset="-122"/>
+                <a:cs typeface="Calibri" pitchFamily="34" charset="-120"/>
+              </a:rPr>
+              <a:t> elige una columna y </a:t>
+            </a:r>
+            <a:r>
+              <a:rPr lang="es-ES" sz="1400" b="1" i="1" dirty="0">
+                <a:solidFill>
+                  <a:schemeClr val="bg1"/>
+                </a:solidFill>
+                <a:latin typeface="Calibri" pitchFamily="34" charset="0"/>
+                <a:ea typeface="Calibri" pitchFamily="34" charset="-122"/>
+                <a:cs typeface="Calibri" pitchFamily="34" charset="-120"/>
+              </a:rPr>
+              <a:t>sum()</a:t>
+            </a:r>
+            <a:r>
+              <a:rPr lang="es-ES" sz="1400" b="1" dirty="0">
+                <a:solidFill>
+                  <a:schemeClr val="bg1"/>
+                </a:solidFill>
+                <a:latin typeface="Calibri" pitchFamily="34" charset="0"/>
+                <a:ea typeface="Calibri" pitchFamily="34" charset="-122"/>
+                <a:cs typeface="Calibri" pitchFamily="34" charset="-120"/>
+              </a:rPr>
+              <a:t> la suma. Todo está en </a:t>
+            </a:r>
+            <a:r>
+              <a:rPr lang="es-ES" sz="1400" b="1" i="1" dirty="0">
+                <a:solidFill>
+                  <a:schemeClr val="bg1"/>
+                </a:solidFill>
+                <a:latin typeface="Calibri" pitchFamily="34" charset="0"/>
+                <a:ea typeface="Calibri" pitchFamily="34" charset="-122"/>
+                <a:cs typeface="Calibri" pitchFamily="34" charset="-120"/>
+              </a:rPr>
+              <a:t>clase1/primeros_pasos.R</a:t>
+            </a:r>
+            <a:r>
+              <a:rPr lang="es-ES" sz="1400" b="1" dirty="0">
+                <a:solidFill>
+                  <a:schemeClr val="bg1"/>
+                </a:solidFill>
+                <a:latin typeface="Calibri" pitchFamily="34" charset="0"/>
+                <a:ea typeface="Calibri" pitchFamily="34" charset="-122"/>
+                <a:cs typeface="Calibri" pitchFamily="34" charset="-120"/>
+              </a:rPr>
+              <a:t>.</a:t>
+            </a:r>
+            <a:endParaRPr lang="en-US" sz="1300" dirty="0"/>
+          </a:p>
+        </p:txBody>
+      </p:sp>
+      <p:pic>
+        <p:nvPicPr>
+          <p:cNvPr id="22" name="Picture 21" descr="p3.png"/>
+          <p:cNvPicPr>
+            <a:picLocks noChangeAspect="1"/>
+          </p:cNvPicPr>
+          <p:nvPr/>
+        </p:nvPicPr>
+        <p:blipFill>
+          <a:blip r:embed="rId2"/>
+          <a:stretch>
+            <a:fillRect/>
+          </a:stretch>
+        </p:blipFill>
+        <p:spPr>
+          <a:xfrm>
+            <a:off x="4434840" y="1471757"/>
+            <a:ext cx="4480560" cy="2497165"/>
+          </a:xfrm>
+          <a:prstGeom prst="rect">
+            <a:avLst/>
+          </a:prstGeom>
+          <a:ln w="76200">
+            <a:solidFill>
+              <a:schemeClr val="accent1">
+                <a:lumMod val="75000"/>
+              </a:schemeClr>
+            </a:solidFill>
+          </a:ln>
+        </p:spPr>
+      </p:pic>
+    </p:spTree>
+  </p:cSld>
+  <p:clrMapOvr>
+    <a:masterClrMapping/>
+  </p:clrMapOvr>
+</p:sld>
+</file>
+
+<file path=ppt/slides/slide16.xml><?xml version="1.0" encoding="utf-8"?>
+<p:sld xmlns:a="http://schemas.openxmlformats.org/drawingml/2006/main" xmlns:p="http://schemas.openxmlformats.org/presentationml/2006/main" xmlns:r="http://schemas.openxmlformats.org/officeDocument/2006/relationships">
+  <p:cSld>
+    <p:bg>
+      <p:bgPr>
+        <a:solidFill>
+          <a:srgbClr val="FFFFFF"/>
+        </a:solidFill>
+        <a:effectLst/>
+      </p:bgPr>
+    </p:bg>
+    <p:spTree>
+      <p:nvGrpSpPr>
+        <p:cNvPr id="1" name=""/>
+        <p:cNvGrpSpPr/>
+        <p:nvPr/>
+      </p:nvGrpSpPr>
+      <p:grpSpPr/>
+      <p:sp>
+        <p:nvSpPr>
+          <p:cNvPr id="2" name="Text 0">
+            <a:extLst>
+              <a:ext uri="{FF2B5EF4-FFF2-40B4-BE49-F238E27FC236}">
+                <a16:creationId xmlns:a16="http://schemas.microsoft.com/office/drawing/2014/main" id="{21E0B84E-B772-A594-B980-A7B918F749C6}"/>
+              </a:ext>
+            </a:extLst>
+          </p:cNvPr>
+          <p:cNvSpPr txBox="1"/>
+          <p:nvPr/>
+        </p:nvSpPr>
+        <p:spPr>
+          <a:xfrm>
+            <a:off x="502920" y="320040"/>
+            <a:ext cx="7040880" cy="640080"/>
+          </a:xfrm>
+          <a:prstGeom prst="rect">
+            <a:avLst/>
+          </a:prstGeom>
+          <a:noFill/>
+          <a:ln/>
+        </p:spPr>
+        <p:txBody>
+          <a:bodyPr wrap="square" lIns="0" tIns="0" rIns="0" bIns="0" rtlCol="0" anchor="ctr"/>
+          <a:lstStyle/>
+          <a:p>
+            <a:r>
+              <a:rPr lang="en-US" sz="3000" b="1" dirty="0">
+                <a:solidFill>
+                  <a:srgbClr val="2E0A4E"/>
+                </a:solidFill>
+                <a:latin typeface="Oswald" pitchFamily="34" charset="0"/>
+                <a:ea typeface="Oswald" pitchFamily="34" charset="-122"/>
+                <a:cs typeface="Oswald" pitchFamily="34" charset="-120"/>
+              </a:rPr>
+              <a:t>Paso a paso (4)</a:t>
+            </a:r>
+            <a:endParaRPr lang="en-US" sz="3000" dirty="0"/>
+          </a:p>
+        </p:txBody>
+      </p:sp>
+      <p:sp>
+        <p:nvSpPr>
+          <p:cNvPr id="11" name="Shape 9">
+            <a:extLst>
+              <a:ext uri="{FF2B5EF4-FFF2-40B4-BE49-F238E27FC236}">
+                <a16:creationId xmlns:a16="http://schemas.microsoft.com/office/drawing/2014/main" id="{8584C834-90F2-8AA8-B328-3643E4CCE677}"/>
+              </a:ext>
+            </a:extLst>
+          </p:cNvPr>
+          <p:cNvSpPr/>
+          <p:nvPr/>
+        </p:nvSpPr>
+        <p:spPr>
+          <a:xfrm>
+            <a:off x="439616" y="1188720"/>
+            <a:ext cx="2560320" cy="1463040"/>
+          </a:xfrm>
+          <a:prstGeom prst="roundRect">
+            <a:avLst>
+              <a:gd name="adj" fmla="val 2143"/>
+            </a:avLst>
+          </a:prstGeom>
+          <a:solidFill>
+            <a:srgbClr val="5A189A"/>
+          </a:solidFill>
+          <a:ln w="12700">
+            <a:solidFill>
+              <a:srgbClr val="5A189A"/>
+            </a:solidFill>
+            <a:prstDash val="solid"/>
+          </a:ln>
+        </p:spPr>
+        <p:txBody>
+          <a:bodyPr/>
+          <a:lstStyle/>
+          <a:p>
+            <a:endParaRPr lang="en-US"/>
+          </a:p>
+        </p:txBody>
+      </p:sp>
+      <p:sp>
+        <p:nvSpPr>
+          <p:cNvPr id="12" name="Text 10">
+            <a:extLst>
+              <a:ext uri="{FF2B5EF4-FFF2-40B4-BE49-F238E27FC236}">
+                <a16:creationId xmlns:a16="http://schemas.microsoft.com/office/drawing/2014/main" id="{3D0787E2-7C7C-7A9C-ED72-1B8D5BA244E4}"/>
+              </a:ext>
+            </a:extLst>
+          </p:cNvPr>
+          <p:cNvSpPr txBox="1"/>
+          <p:nvPr/>
+        </p:nvSpPr>
+        <p:spPr>
+          <a:xfrm>
+            <a:off x="668216" y="1256068"/>
+            <a:ext cx="2103120" cy="502920"/>
+          </a:xfrm>
+          <a:prstGeom prst="rect">
+            <a:avLst/>
+          </a:prstGeom>
+          <a:noFill/>
+          <a:ln/>
+        </p:spPr>
+        <p:txBody>
+          <a:bodyPr wrap="square" lIns="0" tIns="0" rIns="0" bIns="0" rtlCol="0" anchor="ctr"/>
+          <a:lstStyle/>
+          <a:p>
+            <a:pPr marL="0" indent="0">
+              <a:buNone/>
+            </a:pPr>
+            <a:r>
+              <a:rPr lang="en-US" sz="1600" b="1" dirty="0">
+                <a:solidFill>
+                  <a:srgbClr val="FFFFFF"/>
+                </a:solidFill>
+                <a:latin typeface="Oswald" pitchFamily="34" charset="0"/>
+                <a:ea typeface="Oswald" pitchFamily="34" charset="-122"/>
+                <a:cs typeface="Oswald" pitchFamily="34" charset="-120"/>
+              </a:rPr>
+              <a:t>OBJETIVO 5</a:t>
+            </a:r>
+            <a:endParaRPr lang="en-US" sz="1600" dirty="0"/>
+          </a:p>
+        </p:txBody>
+      </p:sp>
+      <p:sp>
+        <p:nvSpPr>
+          <p:cNvPr id="13" name="Text 11">
+            <a:extLst>
+              <a:ext uri="{FF2B5EF4-FFF2-40B4-BE49-F238E27FC236}">
+                <a16:creationId xmlns:a16="http://schemas.microsoft.com/office/drawing/2014/main" id="{0C2592C3-39BA-DB09-D0F1-BF73ED6DEC99}"/>
+              </a:ext>
+            </a:extLst>
+          </p:cNvPr>
+          <p:cNvSpPr txBox="1"/>
+          <p:nvPr/>
+        </p:nvSpPr>
+        <p:spPr>
+          <a:xfrm>
+            <a:off x="668216" y="1734572"/>
+            <a:ext cx="2103120" cy="716926"/>
+          </a:xfrm>
+          <a:prstGeom prst="rect">
+            <a:avLst/>
+          </a:prstGeom>
+          <a:noFill/>
+          <a:ln/>
+        </p:spPr>
+        <p:txBody>
+          <a:bodyPr wrap="square" lIns="0" tIns="0" rIns="0" bIns="0" rtlCol="0" anchor="t"/>
+          <a:lstStyle/>
+          <a:p>
+            <a:r>
+              <a:rPr lang="es-ES" sz="1400" dirty="0">
+                <a:solidFill>
+                  <a:schemeClr val="bg1"/>
+                </a:solidFill>
+                <a:latin typeface="Calibri" pitchFamily="34" charset="0"/>
+                <a:ea typeface="Calibri" pitchFamily="34" charset="-122"/>
+                <a:cs typeface="Calibri" pitchFamily="34" charset="-120"/>
+              </a:rPr>
+              <a:t>La interfaz (ui)</a:t>
+            </a:r>
+          </a:p>
+        </p:txBody>
+      </p:sp>
+      <p:sp>
+        <p:nvSpPr>
+          <p:cNvPr id="15" name="Shape 9">
+            <a:extLst>
+              <a:ext uri="{FF2B5EF4-FFF2-40B4-BE49-F238E27FC236}">
+                <a16:creationId xmlns:a16="http://schemas.microsoft.com/office/drawing/2014/main" id="{ADB729CB-A987-663A-1058-A842556E3C9E}"/>
+              </a:ext>
+            </a:extLst>
+          </p:cNvPr>
+          <p:cNvSpPr/>
+          <p:nvPr/>
+        </p:nvSpPr>
+        <p:spPr>
+          <a:xfrm>
+            <a:off x="439615" y="2719107"/>
+            <a:ext cx="3773659" cy="2281957"/>
+          </a:xfrm>
+          <a:prstGeom prst="roundRect">
+            <a:avLst>
+              <a:gd name="adj" fmla="val 2143"/>
+            </a:avLst>
+          </a:prstGeom>
+          <a:solidFill>
+            <a:schemeClr val="accent1">
+              <a:lumMod val="75000"/>
+            </a:schemeClr>
+          </a:solidFill>
+          <a:ln w="12700">
+            <a:solidFill>
+              <a:schemeClr val="accent1">
+                <a:lumMod val="75000"/>
+              </a:schemeClr>
+            </a:solidFill>
+            <a:prstDash val="solid"/>
+          </a:ln>
+        </p:spPr>
+        <p:txBody>
+          <a:bodyPr/>
+          <a:lstStyle/>
+          <a:p>
+            <a:endParaRPr lang="en-US"/>
+          </a:p>
+        </p:txBody>
+      </p:sp>
+      <p:sp>
+        <p:nvSpPr>
+          <p:cNvPr id="17" name="Text 11">
+            <a:extLst>
+              <a:ext uri="{FF2B5EF4-FFF2-40B4-BE49-F238E27FC236}">
+                <a16:creationId xmlns:a16="http://schemas.microsoft.com/office/drawing/2014/main" id="{90C1F140-6606-DACA-D829-EF5414EB787C}"/>
+              </a:ext>
+            </a:extLst>
+          </p:cNvPr>
+          <p:cNvSpPr txBox="1"/>
+          <p:nvPr/>
+        </p:nvSpPr>
+        <p:spPr>
+          <a:xfrm>
+            <a:off x="647115" y="2880360"/>
+            <a:ext cx="3369212" cy="716926"/>
+          </a:xfrm>
+          <a:prstGeom prst="rect">
+            <a:avLst/>
+          </a:prstGeom>
+          <a:noFill/>
+          <a:ln/>
+        </p:spPr>
+        <p:txBody>
+          <a:bodyPr wrap="square" lIns="0" tIns="0" rIns="0" bIns="0" rtlCol="0" anchor="t"/>
+          <a:lstStyle/>
+          <a:p>
+            <a:endParaRPr lang="en-US" sz="1300" dirty="0"/>
+            <a:r>
+              <a:rPr lang="es-ES" sz="1400" b="1" dirty="0">
+                <a:solidFill>
+                  <a:schemeClr val="bg1"/>
+                </a:solidFill>
+                <a:latin typeface="Calibri" pitchFamily="34" charset="0"/>
+                <a:ea typeface="Calibri" pitchFamily="34" charset="-122"/>
+                <a:cs typeface="Calibri" pitchFamily="34" charset="-120"/>
+              </a:rPr>
+              <a:t/>
+            </a:r>
+            <a:r>
+              <a:rPr lang="es-ES" sz="1400" b="1" i="1" dirty="0">
+                <a:solidFill>
+                  <a:schemeClr val="bg1"/>
+                </a:solidFill>
+                <a:latin typeface="Calibri" pitchFamily="34" charset="0"/>
+                <a:ea typeface="Calibri" pitchFamily="34" charset="-122"/>
+                <a:cs typeface="Calibri" pitchFamily="34" charset="-120"/>
+              </a:rPr>
+              <a:t>fluidPage()</a:t>
+            </a:r>
+            <a:r>
+              <a:rPr lang="es-ES" sz="1400" b="1" dirty="0">
+                <a:solidFill>
+                  <a:schemeClr val="bg1"/>
+                </a:solidFill>
+                <a:latin typeface="Calibri" pitchFamily="34" charset="0"/>
+                <a:ea typeface="Calibri" pitchFamily="34" charset="-122"/>
+                <a:cs typeface="Calibri" pitchFamily="34" charset="-120"/>
+              </a:rPr>
+              <a:t> apila de arriba hacia abajo lo que va adentro. </a:t>
+            </a:r>
+            <a:r>
+              <a:rPr lang="es-ES" sz="1400" b="1" i="1" dirty="0">
+                <a:solidFill>
+                  <a:schemeClr val="bg1"/>
+                </a:solidFill>
+                <a:latin typeface="Calibri" pitchFamily="34" charset="0"/>
+                <a:ea typeface="Calibri" pitchFamily="34" charset="-122"/>
+                <a:cs typeface="Calibri" pitchFamily="34" charset="-120"/>
+              </a:rPr>
+              <a:t>titlePanel()</a:t>
+            </a:r>
+            <a:r>
+              <a:rPr lang="es-ES" sz="1400" b="1" dirty="0">
+                <a:solidFill>
+                  <a:schemeClr val="bg1"/>
+                </a:solidFill>
+                <a:latin typeface="Calibri" pitchFamily="34" charset="0"/>
+                <a:ea typeface="Calibri" pitchFamily="34" charset="-122"/>
+                <a:cs typeface="Calibri" pitchFamily="34" charset="-120"/>
+              </a:rPr>
+              <a:t>, </a:t>
+            </a:r>
+            <a:r>
+              <a:rPr lang="es-ES" sz="1400" b="1" i="1" dirty="0">
+                <a:solidFill>
+                  <a:schemeClr val="bg1"/>
+                </a:solidFill>
+                <a:latin typeface="Calibri" pitchFamily="34" charset="0"/>
+                <a:ea typeface="Calibri" pitchFamily="34" charset="-122"/>
+                <a:cs typeface="Calibri" pitchFamily="34" charset="-120"/>
+              </a:rPr>
+              <a:t>p()</a:t>
+            </a:r>
+            <a:r>
+              <a:rPr lang="es-ES" sz="1400" b="1" dirty="0">
+                <a:solidFill>
+                  <a:schemeClr val="bg1"/>
+                </a:solidFill>
+                <a:latin typeface="Calibri" pitchFamily="34" charset="0"/>
+                <a:ea typeface="Calibri" pitchFamily="34" charset="-122"/>
+                <a:cs typeface="Calibri" pitchFamily="34" charset="-120"/>
+              </a:rPr>
+              <a:t> y </a:t>
+            </a:r>
+            <a:r>
+              <a:rPr lang="es-ES" sz="1400" b="1" i="1" dirty="0">
+                <a:solidFill>
+                  <a:schemeClr val="bg1"/>
+                </a:solidFill>
+                <a:latin typeface="Calibri" pitchFamily="34" charset="0"/>
+                <a:ea typeface="Calibri" pitchFamily="34" charset="-122"/>
+                <a:cs typeface="Calibri" pitchFamily="34" charset="-120"/>
+              </a:rPr>
+              <a:t>h3()</a:t>
+            </a:r>
+            <a:r>
+              <a:rPr lang="es-ES" sz="1400" b="1" dirty="0">
+                <a:solidFill>
+                  <a:schemeClr val="bg1"/>
+                </a:solidFill>
+                <a:latin typeface="Calibri" pitchFamily="34" charset="0"/>
+                <a:ea typeface="Calibri" pitchFamily="34" charset="-122"/>
+                <a:cs typeface="Calibri" pitchFamily="34" charset="-120"/>
+              </a:rPr>
+              <a:t> son texto fijo.</a:t>
+            </a:r>
+          </a:p>
+          <a:p>
+            <a:endParaRPr lang="en-US" sz="1300" dirty="0"/>
+          </a:p>
+          <a:p>
+            <a:endParaRPr lang="en-US" sz="1300" dirty="0"/>
+            <a:r>
+              <a:rPr lang="es-ES" sz="1400" b="1" dirty="0">
+                <a:solidFill>
+                  <a:schemeClr val="bg1"/>
+                </a:solidFill>
+                <a:latin typeface="Calibri" pitchFamily="34" charset="0"/>
+                <a:ea typeface="Calibri" pitchFamily="34" charset="-122"/>
+                <a:cs typeface="Calibri" pitchFamily="34" charset="-120"/>
+              </a:rPr>
+              <a:t/>
+            </a:r>
+            <a:r>
+              <a:rPr lang="es-ES" sz="1400" b="1" i="1" dirty="0">
+                <a:solidFill>
+                  <a:schemeClr val="bg1"/>
+                </a:solidFill>
+                <a:latin typeface="Calibri" pitchFamily="34" charset="0"/>
+                <a:ea typeface="Calibri" pitchFamily="34" charset="-122"/>
+                <a:cs typeface="Calibri" pitchFamily="34" charset="-120"/>
+              </a:rPr>
+              <a:t>tableOutput()</a:t>
+            </a:r>
+            <a:r>
+              <a:rPr lang="es-ES" sz="1400" b="1" dirty="0">
+                <a:solidFill>
+                  <a:schemeClr val="bg1"/>
+                </a:solidFill>
+                <a:latin typeface="Calibri" pitchFamily="34" charset="0"/>
+                <a:ea typeface="Calibri" pitchFamily="34" charset="-122"/>
+                <a:cs typeface="Calibri" pitchFamily="34" charset="-120"/>
+              </a:rPr>
+              <a:t> y </a:t>
+            </a:r>
+            <a:r>
+              <a:rPr lang="es-ES" sz="1400" b="1" i="1" dirty="0">
+                <a:solidFill>
+                  <a:schemeClr val="bg1"/>
+                </a:solidFill>
+                <a:latin typeface="Calibri" pitchFamily="34" charset="0"/>
+                <a:ea typeface="Calibri" pitchFamily="34" charset="-122"/>
+                <a:cs typeface="Calibri" pitchFamily="34" charset="-120"/>
+              </a:rPr>
+              <a:t>textOutput()</a:t>
+            </a:r>
+            <a:r>
+              <a:rPr lang="es-ES" sz="1400" b="1" dirty="0">
+                <a:solidFill>
+                  <a:schemeClr val="bg1"/>
+                </a:solidFill>
+                <a:latin typeface="Calibri" pitchFamily="34" charset="0"/>
+                <a:ea typeface="Calibri" pitchFamily="34" charset="-122"/>
+                <a:cs typeface="Calibri" pitchFamily="34" charset="-120"/>
+              </a:rPr>
+              <a:t> son espacios vacíos con un id, que el server va a rellenar. </a:t>
+            </a:r>
+            <a:r>
+              <a:rPr lang="es-ES" sz="1400" b="1" i="1" dirty="0">
+                <a:solidFill>
+                  <a:schemeClr val="bg1"/>
+                </a:solidFill>
+                <a:latin typeface="Calibri" pitchFamily="34" charset="0"/>
+                <a:ea typeface="Calibri" pitchFamily="34" charset="-122"/>
+                <a:cs typeface="Calibri" pitchFamily="34" charset="-120"/>
+              </a:rPr>
+              <a:t>TITULO</a:t>
+            </a:r>
+            <a:r>
+              <a:rPr lang="es-ES" sz="1400" b="1" dirty="0">
+                <a:solidFill>
+                  <a:schemeClr val="bg1"/>
+                </a:solidFill>
+                <a:latin typeface="Calibri" pitchFamily="34" charset="0"/>
+                <a:ea typeface="Calibri" pitchFamily="34" charset="-122"/>
+                <a:cs typeface="Calibri" pitchFamily="34" charset="-120"/>
+              </a:rPr>
+              <a:t> es la zona de pruebas.</a:t>
+            </a:r>
+          </a:p>
+        </p:txBody>
+      </p:sp>
+      <p:pic>
+        <p:nvPicPr>
+          <p:cNvPr id="22" name="Picture 21" descr="p4.png"/>
+          <p:cNvPicPr>
+            <a:picLocks noChangeAspect="1"/>
+          </p:cNvPicPr>
+          <p:nvPr/>
+        </p:nvPicPr>
+        <p:blipFill>
+          <a:blip r:embed="rId3"/>
+          <a:stretch>
+            <a:fillRect/>
+          </a:stretch>
+        </p:blipFill>
+        <p:spPr>
+          <a:xfrm>
+            <a:off x="4434840" y="1979662"/>
+            <a:ext cx="4300000" cy="2040677"/>
+          </a:xfrm>
+          <a:prstGeom prst="rect">
+            <a:avLst/>
+          </a:prstGeom>
+          <a:ln w="76200">
+            <a:solidFill>
+              <a:schemeClr val="accent1">
+                <a:lumMod val="75000"/>
+              </a:schemeClr>
+            </a:solidFill>
+          </a:ln>
+        </p:spPr>
+      </p:pic>
+    </p:spTree>
+  </p:cSld>
+  <p:clrMapOvr>
+    <a:masterClrMapping/>
+  </p:clrMapOvr>
+</p:sld>
+</file>
+
+<file path=ppt/slides/slide17.xml><?xml version="1.0" encoding="utf-8"?>
+<p:sld xmlns:a="http://schemas.openxmlformats.org/drawingml/2006/main" xmlns:p="http://schemas.openxmlformats.org/presentationml/2006/main" xmlns:r="http://schemas.openxmlformats.org/officeDocument/2006/relationships">
+  <p:cSld>
+    <p:bg>
+      <p:bgPr>
+        <a:solidFill>
+          <a:srgbClr val="FFFFFF"/>
+        </a:solidFill>
+        <a:effectLst/>
+      </p:bgPr>
+    </p:bg>
+    <p:spTree>
+      <p:nvGrpSpPr>
+        <p:cNvPr id="1" name=""/>
+        <p:cNvGrpSpPr/>
+        <p:nvPr/>
+      </p:nvGrpSpPr>
+      <p:grpSpPr/>
+      <p:sp>
+        <p:nvSpPr>
+          <p:cNvPr id="2" name="Text 0">
+            <a:extLst>
+              <a:ext uri="{FF2B5EF4-FFF2-40B4-BE49-F238E27FC236}">
+                <a16:creationId xmlns:a16="http://schemas.microsoft.com/office/drawing/2014/main" id="{21E0B84E-B772-A594-B980-A7B918F749C6}"/>
+              </a:ext>
+            </a:extLst>
+          </p:cNvPr>
+          <p:cNvSpPr txBox="1"/>
+          <p:nvPr/>
+        </p:nvSpPr>
+        <p:spPr>
+          <a:xfrm>
+            <a:off x="502920" y="320040"/>
+            <a:ext cx="7040880" cy="640080"/>
+          </a:xfrm>
+          <a:prstGeom prst="rect">
+            <a:avLst/>
+          </a:prstGeom>
+          <a:noFill/>
+          <a:ln/>
+        </p:spPr>
+        <p:txBody>
+          <a:bodyPr wrap="square" lIns="0" tIns="0" rIns="0" bIns="0" rtlCol="0" anchor="ctr"/>
+          <a:lstStyle/>
+          <a:p>
+            <a:r>
+              <a:rPr lang="en-US" sz="3000" b="1" dirty="0">
+                <a:solidFill>
+                  <a:srgbClr val="2E0A4E"/>
+                </a:solidFill>
+                <a:latin typeface="Oswald" pitchFamily="34" charset="0"/>
+                <a:ea typeface="Oswald" pitchFamily="34" charset="-122"/>
+                <a:cs typeface="Oswald" pitchFamily="34" charset="-120"/>
+              </a:rPr>
+              <a:t>Paso a paso (5)</a:t>
+            </a:r>
+            <a:endParaRPr lang="en-US" sz="3000" dirty="0"/>
+          </a:p>
+        </p:txBody>
+      </p:sp>
+      <p:sp>
+        <p:nvSpPr>
+          <p:cNvPr id="11" name="Shape 9">
+            <a:extLst>
+              <a:ext uri="{FF2B5EF4-FFF2-40B4-BE49-F238E27FC236}">
+                <a16:creationId xmlns:a16="http://schemas.microsoft.com/office/drawing/2014/main" id="{8584C834-90F2-8AA8-B328-3643E4CCE677}"/>
+              </a:ext>
+            </a:extLst>
+          </p:cNvPr>
+          <p:cNvSpPr/>
+          <p:nvPr/>
+        </p:nvSpPr>
+        <p:spPr>
+          <a:xfrm>
+            <a:off x="439616" y="1188720"/>
+            <a:ext cx="2560320" cy="1463040"/>
+          </a:xfrm>
+          <a:prstGeom prst="roundRect">
+            <a:avLst>
+              <a:gd name="adj" fmla="val 2143"/>
+            </a:avLst>
+          </a:prstGeom>
+          <a:solidFill>
+            <a:srgbClr val="5A189A"/>
+          </a:solidFill>
+          <a:ln w="12700">
+            <a:solidFill>
+              <a:srgbClr val="5A189A"/>
+            </a:solidFill>
+            <a:prstDash val="solid"/>
+          </a:ln>
+        </p:spPr>
+        <p:txBody>
+          <a:bodyPr/>
+          <a:lstStyle/>
+          <a:p>
+            <a:endParaRPr lang="en-US"/>
+          </a:p>
+        </p:txBody>
+      </p:sp>
+      <p:sp>
+        <p:nvSpPr>
+          <p:cNvPr id="12" name="Text 10">
+            <a:extLst>
+              <a:ext uri="{FF2B5EF4-FFF2-40B4-BE49-F238E27FC236}">
+                <a16:creationId xmlns:a16="http://schemas.microsoft.com/office/drawing/2014/main" id="{3D0787E2-7C7C-7A9C-ED72-1B8D5BA244E4}"/>
+              </a:ext>
+            </a:extLst>
+          </p:cNvPr>
+          <p:cNvSpPr txBox="1"/>
+          <p:nvPr/>
+        </p:nvSpPr>
+        <p:spPr>
+          <a:xfrm>
+            <a:off x="668216" y="1256068"/>
+            <a:ext cx="2103120" cy="502920"/>
+          </a:xfrm>
+          <a:prstGeom prst="rect">
+            <a:avLst/>
+          </a:prstGeom>
+          <a:noFill/>
+          <a:ln/>
+        </p:spPr>
+        <p:txBody>
+          <a:bodyPr wrap="square" lIns="0" tIns="0" rIns="0" bIns="0" rtlCol="0" anchor="ctr"/>
+          <a:lstStyle/>
+          <a:p>
+            <a:pPr marL="0" indent="0">
+              <a:buNone/>
+            </a:pPr>
+            <a:r>
+              <a:rPr lang="en-US" sz="1600" b="1" dirty="0">
+                <a:solidFill>
+                  <a:srgbClr val="FFFFFF"/>
+                </a:solidFill>
+                <a:latin typeface="Oswald" pitchFamily="34" charset="0"/>
+                <a:ea typeface="Oswald" pitchFamily="34" charset="-122"/>
+                <a:cs typeface="Oswald" pitchFamily="34" charset="-120"/>
+              </a:rPr>
+              <a:t>OBJETIVO 5</a:t>
+            </a:r>
+            <a:endParaRPr lang="en-US" sz="1600" dirty="0"/>
+          </a:p>
+        </p:txBody>
+      </p:sp>
+      <p:sp>
+        <p:nvSpPr>
+          <p:cNvPr id="13" name="Text 11">
+            <a:extLst>
+              <a:ext uri="{FF2B5EF4-FFF2-40B4-BE49-F238E27FC236}">
+                <a16:creationId xmlns:a16="http://schemas.microsoft.com/office/drawing/2014/main" id="{0C2592C3-39BA-DB09-D0F1-BF73ED6DEC99}"/>
+              </a:ext>
+            </a:extLst>
+          </p:cNvPr>
+          <p:cNvSpPr txBox="1"/>
+          <p:nvPr/>
+        </p:nvSpPr>
+        <p:spPr>
+          <a:xfrm>
+            <a:off x="668216" y="1734572"/>
+            <a:ext cx="2103120" cy="716926"/>
+          </a:xfrm>
+          <a:prstGeom prst="rect">
+            <a:avLst/>
+          </a:prstGeom>
+          <a:noFill/>
+          <a:ln/>
+        </p:spPr>
+        <p:txBody>
+          <a:bodyPr wrap="square" lIns="0" tIns="0" rIns="0" bIns="0" rtlCol="0" anchor="t"/>
+          <a:lstStyle/>
+          <a:p>
+            <a:r>
+              <a:rPr lang="es-ES" sz="1400" dirty="0">
+                <a:solidFill>
+                  <a:schemeClr val="bg1"/>
+                </a:solidFill>
+                <a:latin typeface="Calibri" pitchFamily="34" charset="0"/>
+                <a:ea typeface="Calibri" pitchFamily="34" charset="-122"/>
+                <a:cs typeface="Calibri" pitchFamily="34" charset="-120"/>
+              </a:rPr>
+              <a:t>El servidor (server)</a:t>
+            </a:r>
+          </a:p>
+        </p:txBody>
+      </p:sp>
+      <p:sp>
+        <p:nvSpPr>
+          <p:cNvPr id="15" name="Shape 9">
+            <a:extLst>
+              <a:ext uri="{FF2B5EF4-FFF2-40B4-BE49-F238E27FC236}">
+                <a16:creationId xmlns:a16="http://schemas.microsoft.com/office/drawing/2014/main" id="{ADB729CB-A987-663A-1058-A842556E3C9E}"/>
+              </a:ext>
+            </a:extLst>
+          </p:cNvPr>
+          <p:cNvSpPr/>
+          <p:nvPr/>
+        </p:nvSpPr>
+        <p:spPr>
+          <a:xfrm>
+            <a:off x="439615" y="2719107"/>
+            <a:ext cx="3773659" cy="2281957"/>
+          </a:xfrm>
+          <a:prstGeom prst="roundRect">
+            <a:avLst>
+              <a:gd name="adj" fmla="val 2143"/>
+            </a:avLst>
+          </a:prstGeom>
+          <a:solidFill>
+            <a:schemeClr val="accent1">
+              <a:lumMod val="75000"/>
+            </a:schemeClr>
+          </a:solidFill>
+          <a:ln w="12700">
+            <a:solidFill>
+              <a:schemeClr val="accent1">
+                <a:lumMod val="75000"/>
+              </a:schemeClr>
+            </a:solidFill>
+            <a:prstDash val="solid"/>
+          </a:ln>
+        </p:spPr>
+        <p:txBody>
+          <a:bodyPr/>
+          <a:lstStyle/>
+          <a:p>
+            <a:endParaRPr lang="en-US"/>
+          </a:p>
+        </p:txBody>
+      </p:sp>
+      <p:sp>
+        <p:nvSpPr>
+          <p:cNvPr id="17" name="Text 11">
+            <a:extLst>
+              <a:ext uri="{FF2B5EF4-FFF2-40B4-BE49-F238E27FC236}">
+                <a16:creationId xmlns:a16="http://schemas.microsoft.com/office/drawing/2014/main" id="{90C1F140-6606-DACA-D829-EF5414EB787C}"/>
+              </a:ext>
+            </a:extLst>
+          </p:cNvPr>
+          <p:cNvSpPr txBox="1"/>
+          <p:nvPr/>
+        </p:nvSpPr>
+        <p:spPr>
+          <a:xfrm>
+            <a:off x="647115" y="2880360"/>
+            <a:ext cx="3369212" cy="716926"/>
+          </a:xfrm>
+          <a:prstGeom prst="rect">
+            <a:avLst/>
+          </a:prstGeom>
+          <a:noFill/>
+          <a:ln/>
+        </p:spPr>
+        <p:txBody>
+          <a:bodyPr wrap="square" lIns="0" tIns="0" rIns="0" bIns="0" rtlCol="0" anchor="t"/>
+          <a:lstStyle/>
+          <a:p>
+            <a:endParaRPr lang="en-US" sz="1300" dirty="0"/>
+            <a:r>
+              <a:rPr lang="es-ES" sz="1400" b="1" dirty="0">
+                <a:solidFill>
+                  <a:schemeClr val="bg1"/>
+                </a:solidFill>
+                <a:latin typeface="Calibri" pitchFamily="34" charset="0"/>
+                <a:ea typeface="Calibri" pitchFamily="34" charset="-122"/>
+                <a:cs typeface="Calibri" pitchFamily="34" charset="-120"/>
+              </a:rPr>
+              <a:t/>
+            </a:r>
+            <a:r>
+              <a:rPr lang="es-ES" sz="1400" b="1" i="1" dirty="0">
+                <a:solidFill>
+                  <a:schemeClr val="bg1"/>
+                </a:solidFill>
+                <a:latin typeface="Calibri" pitchFamily="34" charset="0"/>
+                <a:ea typeface="Calibri" pitchFamily="34" charset="-122"/>
+                <a:cs typeface="Calibri" pitchFamily="34" charset="-120"/>
+              </a:rPr>
+              <a:t>output$tabla_elecciones &lt;- renderTable()</a:t>
+            </a:r>
+            <a:r>
+              <a:rPr lang="es-ES" sz="1400" b="1" dirty="0">
+                <a:solidFill>
+                  <a:schemeClr val="bg1"/>
+                </a:solidFill>
+                <a:latin typeface="Calibri" pitchFamily="34" charset="0"/>
+                <a:ea typeface="Calibri" pitchFamily="34" charset="-122"/>
+                <a:cs typeface="Calibri" pitchFamily="34" charset="-120"/>
+              </a:rPr>
+              <a:t> rellena el espacio que tiene ese mismo id. </a:t>
+            </a:r>
+            <a:r>
+              <a:rPr lang="es-ES" sz="1400" b="1" i="1" dirty="0">
+                <a:solidFill>
+                  <a:schemeClr val="bg1"/>
+                </a:solidFill>
+                <a:latin typeface="Calibri" pitchFamily="34" charset="0"/>
+                <a:ea typeface="Calibri" pitchFamily="34" charset="-122"/>
+                <a:cs typeface="Calibri" pitchFamily="34" charset="-120"/>
+              </a:rPr>
+              <a:t>renderText()</a:t>
+            </a:r>
+            <a:r>
+              <a:rPr lang="es-ES" sz="1400" b="1" dirty="0">
+                <a:solidFill>
+                  <a:schemeClr val="bg1"/>
+                </a:solidFill>
+                <a:latin typeface="Calibri" pitchFamily="34" charset="0"/>
+                <a:ea typeface="Calibri" pitchFamily="34" charset="-122"/>
+                <a:cs typeface="Calibri" pitchFamily="34" charset="-120"/>
+              </a:rPr>
+              <a:t> hace lo mismo con el total.</a:t>
+            </a:r>
+          </a:p>
+          <a:p>
+            <a:endParaRPr lang="en-US" sz="1300" dirty="0"/>
+          </a:p>
+          <a:p>
+            <a:endParaRPr lang="en-US" sz="1300" dirty="0"/>
+            <a:r>
+              <a:rPr lang="es-ES" sz="1400" b="1" dirty="0">
+                <a:solidFill>
+                  <a:schemeClr val="bg1"/>
+                </a:solidFill>
+                <a:latin typeface="Calibri" pitchFamily="34" charset="0"/>
+                <a:ea typeface="Calibri" pitchFamily="34" charset="-122"/>
+                <a:cs typeface="Calibri" pitchFamily="34" charset="-120"/>
+              </a:rPr>
+              <a:t/>
+            </a:r>
+            <a:r>
+              <a:rPr lang="es-ES" sz="1400" b="1" i="1" dirty="0">
+                <a:solidFill>
+                  <a:schemeClr val="bg1"/>
+                </a:solidFill>
+                <a:latin typeface="Calibri" pitchFamily="34" charset="0"/>
+                <a:ea typeface="Calibri" pitchFamily="34" charset="-122"/>
+                <a:cs typeface="Calibri" pitchFamily="34" charset="-120"/>
+              </a:rPr>
+              <a:t>read.csv()</a:t>
+            </a:r>
+            <a:r>
+              <a:rPr lang="es-ES" sz="1400" b="1" dirty="0">
+                <a:solidFill>
+                  <a:schemeClr val="bg1"/>
+                </a:solidFill>
+                <a:latin typeface="Calibri" pitchFamily="34" charset="0"/>
+                <a:ea typeface="Calibri" pitchFamily="34" charset="-122"/>
+                <a:cs typeface="Calibri" pitchFamily="34" charset="-120"/>
+              </a:rPr>
+              <a:t> corre una sola vez, al arrancar. </a:t>
+            </a:r>
+            <a:r>
+              <a:rPr lang="es-ES" sz="1400" b="1" i="1" dirty="0">
+                <a:solidFill>
+                  <a:schemeClr val="bg1"/>
+                </a:solidFill>
+                <a:latin typeface="Calibri" pitchFamily="34" charset="0"/>
+                <a:ea typeface="Calibri" pitchFamily="34" charset="-122"/>
+                <a:cs typeface="Calibri" pitchFamily="34" charset="-120"/>
+              </a:rPr>
+              <a:t>shinyApp()</a:t>
+            </a:r>
+            <a:r>
+              <a:rPr lang="es-ES" sz="1400" b="1" dirty="0">
+                <a:solidFill>
+                  <a:schemeClr val="bg1"/>
+                </a:solidFill>
+                <a:latin typeface="Calibri" pitchFamily="34" charset="0"/>
+                <a:ea typeface="Calibri" pitchFamily="34" charset="-122"/>
+                <a:cs typeface="Calibri" pitchFamily="34" charset="-120"/>
+              </a:rPr>
+              <a:t> une la ui y el server.</a:t>
+            </a:r>
+          </a:p>
+        </p:txBody>
+      </p:sp>
+      <p:pic>
+        <p:nvPicPr>
+          <p:cNvPr id="22" name="Picture 21" descr="p4.png"/>
+          <p:cNvPicPr>
+            <a:picLocks noChangeAspect="1"/>
+          </p:cNvPicPr>
+          <p:nvPr/>
+        </p:nvPicPr>
+        <p:blipFill>
+          <a:blip r:embed="rId3"/>
+          <a:stretch>
+            <a:fillRect/>
+          </a:stretch>
+        </p:blipFill>
+        <p:spPr>
+          <a:xfrm>
+            <a:off x="4434840" y="2296950"/>
+            <a:ext cx="4300000" cy="1406100"/>
+          </a:xfrm>
+          <a:prstGeom prst="rect">
+            <a:avLst/>
+          </a:prstGeom>
+          <a:ln w="76200">
+            <a:solidFill>
+              <a:schemeClr val="accent1">
+                <a:lumMod val="75000"/>
+              </a:schemeClr>
+            </a:solidFill>
+          </a:ln>
+        </p:spPr>
+      </p:pic>
+    </p:spTree>
+  </p:cSld>
+  <p:clrMapOvr>
+    <a:masterClrMapping/>
+  </p:clrMapOvr>
+</p:sld>
+</file>
+
+<file path=ppt/slides/slide18.xml><?xml version="1.0" encoding="utf-8"?>
+<p:sld xmlns:a="http://schemas.openxmlformats.org/drawingml/2006/main" xmlns:p="http://schemas.openxmlformats.org/presentationml/2006/main" xmlns:r="http://schemas.openxmlformats.org/officeDocument/2006/relationships">
+  <p:cSld>
+    <p:bg>
+      <p:bgPr>
+        <a:solidFill>
+          <a:srgbClr val="FFFFFF"/>
+        </a:solidFill>
+        <a:effectLst/>
+      </p:bgPr>
+    </p:bg>
+    <p:spTree>
+      <p:nvGrpSpPr>
+        <p:cNvPr id="2" name=""/>
+        <p:cNvGrpSpPr/>
+        <p:nvPr/>
+      </p:nvGrpSpPr>
+      <p:grpSpPr/>
+      <p:sp>
+        <p:nvSpPr>
+          <p:cNvPr id="3" name="Text 0"/>
+          <p:cNvSpPr txBox="1"/>
+          <p:nvPr/>
+        </p:nvSpPr>
+        <p:spPr>
+          <a:xfrm>
+            <a:off x="502920" y="320040"/>
+            <a:ext cx="7040880" cy="640080"/>
+          </a:xfrm>
+          <a:prstGeom prst="rect">
+            <a:avLst/>
+          </a:prstGeom>
+          <a:noFill/>
+          <a:ln/>
+        </p:spPr>
+        <p:txBody>
+          <a:bodyPr wrap="square" lIns="0" tIns="0" rIns="0" bIns="0" rtlCol="0" anchor="ctr"/>
+          <a:lstStyle/>
+          <a:p>
+            <a:pPr marL="0" indent="0">
+              <a:buNone/>
+            </a:pPr>
+            <a:r>
+              <a:rPr lang="en-US" sz="3000" b="1" dirty="0">
+                <a:solidFill>
+                  <a:srgbClr val="2E0A4E"/>
+                </a:solidFill>
+                <a:latin typeface="Oswald" pitchFamily="34" charset="0"/>
+                <a:ea typeface="Oswald" pitchFamily="34" charset="-122"/>
+                <a:cs typeface="Oswald" pitchFamily="34" charset="-120"/>
+              </a:rPr>
+              <a:t>Componentes a </a:t>
+            </a:r>
+            <a:r>
+              <a:rPr lang="en-US" sz="3000" b="1" dirty="0" err="1">
+                <a:solidFill>
+                  <a:srgbClr val="2E0A4E"/>
+                </a:solidFill>
+                <a:latin typeface="Oswald" pitchFamily="34" charset="0"/>
+                <a:ea typeface="Oswald" pitchFamily="34" charset="-122"/>
+                <a:cs typeface="Oswald" pitchFamily="34" charset="-120"/>
+              </a:rPr>
+              <a:t>observar</a:t>
+            </a:r>
+            <a:r>
+              <a:rPr lang="en-US" sz="3000" b="1" dirty="0">
+                <a:solidFill>
+                  <a:srgbClr val="2E0A4E"/>
+                </a:solidFill>
+                <a:latin typeface="Oswald" pitchFamily="34" charset="0"/>
+                <a:ea typeface="Oswald" pitchFamily="34" charset="-122"/>
+                <a:cs typeface="Oswald" pitchFamily="34" charset="-120"/>
+              </a:rPr>
+              <a:t> en la </a:t>
+            </a:r>
+            <a:r>
+              <a:rPr lang="en-US" sz="3000" b="1" dirty="0" err="1">
+                <a:solidFill>
+                  <a:srgbClr val="2E0A4E"/>
+                </a:solidFill>
+                <a:latin typeface="Oswald" pitchFamily="34" charset="0"/>
+                <a:ea typeface="Oswald" pitchFamily="34" charset="-122"/>
+                <a:cs typeface="Oswald" pitchFamily="34" charset="-120"/>
+              </a:rPr>
+              <a:t>replicación</a:t>
+            </a:r>
+            <a:r>
+              <a:rPr lang="en-US" sz="3000" b="1" dirty="0">
+                <a:solidFill>
+                  <a:srgbClr val="2E0A4E"/>
+                </a:solidFill>
+                <a:latin typeface="Oswald" pitchFamily="34" charset="0"/>
+                <a:ea typeface="Oswald" pitchFamily="34" charset="-122"/>
+                <a:cs typeface="Oswald" pitchFamily="34" charset="-120"/>
+              </a:rPr>
+              <a:t> </a:t>
+            </a:r>
+            <a:endParaRPr lang="en-US" sz="3000" dirty="0"/>
+          </a:p>
+        </p:txBody>
+      </p:sp>
+      <p:sp>
+        <p:nvSpPr>
+          <p:cNvPr id="4" name="Shape 3"/>
+          <p:cNvSpPr/>
+          <p:nvPr/>
+        </p:nvSpPr>
+        <p:spPr>
+          <a:xfrm>
+            <a:off x="502920" y="1188720"/>
+            <a:ext cx="3954780" cy="585216"/>
+          </a:xfrm>
+          <a:prstGeom prst="roundRect">
+            <a:avLst>
+              <a:gd name="adj" fmla="val 7813"/>
+            </a:avLst>
+          </a:prstGeom>
+          <a:solidFill>
+            <a:schemeClr val="accent1">
+              <a:lumMod val="20000"/>
+              <a:lumOff val="80000"/>
+            </a:schemeClr>
+          </a:solidFill>
+          <a:ln w="12700">
+            <a:solidFill>
+              <a:srgbClr val="F4ECFB"/>
+            </a:solidFill>
+            <a:prstDash val="solid"/>
+          </a:ln>
+        </p:spPr>
+        <p:txBody>
+          <a:bodyPr/>
+          <a:lstStyle/>
+          <a:p>
+            <a:endParaRPr lang="en-US"/>
+          </a:p>
+        </p:txBody>
+      </p:sp>
+      <p:sp>
+        <p:nvSpPr>
+          <p:cNvPr id="5" name="Text 4"/>
+          <p:cNvSpPr txBox="1"/>
+          <p:nvPr/>
+        </p:nvSpPr>
+        <p:spPr>
+          <a:xfrm>
+            <a:off x="640080" y="1207008"/>
+            <a:ext cx="3680460" cy="292608"/>
+          </a:xfrm>
+          <a:prstGeom prst="rect">
+            <a:avLst/>
+          </a:prstGeom>
+          <a:noFill/>
+          <a:ln/>
+        </p:spPr>
+        <p:txBody>
+          <a:bodyPr wrap="square" lIns="0" tIns="0" rIns="0" bIns="0" rtlCol="0" anchor="ctr"/>
+          <a:lstStyle/>
+          <a:p>
+            <a:pPr marL="0" indent="0">
+              <a:buNone/>
+            </a:pPr>
+            <a:r>
+              <a:rPr lang="en-US" sz="1050" b="1" dirty="0">
+                <a:solidFill>
+                  <a:srgbClr val="5A189A"/>
+                </a:solidFill>
+                <a:latin typeface="Courier New" pitchFamily="34" charset="0"/>
+                <a:ea typeface="Courier New" pitchFamily="34" charset="-122"/>
+                <a:cs typeface="Courier New" pitchFamily="34" charset="-120"/>
+              </a:rPr>
+              <a:t>objeto &lt;- valor</a:t>
+            </a:r>
+            <a:endParaRPr lang="en-US" sz="1050" dirty="0"/>
+          </a:p>
+        </p:txBody>
+      </p:sp>
+      <p:sp>
+        <p:nvSpPr>
+          <p:cNvPr id="6" name="Text 5"/>
+          <p:cNvSpPr txBox="1"/>
+          <p:nvPr/>
+        </p:nvSpPr>
+        <p:spPr>
+          <a:xfrm>
+            <a:off x="640080" y="1469624"/>
+            <a:ext cx="3680460" cy="292608"/>
+          </a:xfrm>
+          <a:prstGeom prst="rect">
+            <a:avLst/>
+          </a:prstGeom>
+          <a:noFill/>
+          <a:ln/>
+        </p:spPr>
+        <p:txBody>
+          <a:bodyPr wrap="square" lIns="0" tIns="0" rIns="0" bIns="0" rtlCol="0" anchor="ctr"/>
+          <a:lstStyle/>
+          <a:p>
+            <a:pPr marL="0" indent="0">
+              <a:buNone/>
+            </a:pPr>
+            <a:r>
+              <a:rPr lang="en-US" sz="1050" dirty="0">
+                <a:solidFill>
+                  <a:srgbClr val="2E0A4E"/>
+                </a:solidFill>
+                <a:latin typeface="Calibri" pitchFamily="34" charset="0"/>
+                <a:ea typeface="Calibri" pitchFamily="34" charset="-122"/>
+                <a:cs typeface="Calibri" pitchFamily="34" charset="-120"/>
+              </a:rPr>
+              <a:t>Guarda un valor con un nombre.</a:t>
+            </a:r>
+            <a:endParaRPr lang="en-US" sz="1050" dirty="0"/>
+          </a:p>
+        </p:txBody>
+      </p:sp>
+      <p:sp>
+        <p:nvSpPr>
+          <p:cNvPr id="7" name="Shape 6"/>
+          <p:cNvSpPr/>
+          <p:nvPr/>
+        </p:nvSpPr>
+        <p:spPr>
+          <a:xfrm>
+            <a:off x="4675751" y="1609344"/>
+            <a:ext cx="3954780" cy="585216"/>
+          </a:xfrm>
+          <a:prstGeom prst="roundRect">
+            <a:avLst>
+              <a:gd name="adj" fmla="val 7813"/>
+            </a:avLst>
+          </a:prstGeom>
+          <a:solidFill>
+            <a:schemeClr val="accent4">
+              <a:lumMod val="20000"/>
+              <a:lumOff val="80000"/>
+            </a:schemeClr>
+          </a:solidFill>
+          <a:ln w="12700">
+            <a:solidFill>
+              <a:srgbClr val="F4ECFB"/>
+            </a:solidFill>
+            <a:prstDash val="solid"/>
+          </a:ln>
+        </p:spPr>
+        <p:txBody>
+          <a:bodyPr/>
+          <a:lstStyle/>
+          <a:p>
+            <a:endParaRPr lang="en-US"/>
+          </a:p>
+        </p:txBody>
+      </p:sp>
+      <p:sp>
+        <p:nvSpPr>
+          <p:cNvPr id="8" name="Text 7"/>
+          <p:cNvSpPr txBox="1"/>
+          <p:nvPr/>
+        </p:nvSpPr>
+        <p:spPr>
+          <a:xfrm>
+            <a:off x="4812911" y="1627632"/>
+            <a:ext cx="3680460" cy="292608"/>
+          </a:xfrm>
+          <a:prstGeom prst="rect">
+            <a:avLst/>
+          </a:prstGeom>
+          <a:noFill/>
+          <a:ln/>
+        </p:spPr>
+        <p:txBody>
+          <a:bodyPr wrap="square" lIns="0" tIns="0" rIns="0" bIns="0" rtlCol="0" anchor="ctr"/>
+          <a:lstStyle/>
+          <a:p>
+            <a:pPr marL="0" indent="0">
+              <a:buNone/>
+            </a:pPr>
+            <a:r>
+              <a:rPr lang="en-US" sz="1050" b="1" dirty="0">
+                <a:solidFill>
+                  <a:srgbClr val="5A189A"/>
+                </a:solidFill>
+                <a:latin typeface="Courier New" pitchFamily="34" charset="0"/>
+                <a:ea typeface="Courier New" pitchFamily="34" charset="-122"/>
+                <a:cs typeface="Courier New" pitchFamily="34" charset="-120"/>
+              </a:rPr>
+              <a:t>c() y vector[1]</a:t>
+            </a:r>
+            <a:endParaRPr lang="en-US" sz="1050" dirty="0"/>
+          </a:p>
+        </p:txBody>
+      </p:sp>
+      <p:sp>
+        <p:nvSpPr>
+          <p:cNvPr id="9" name="Text 8"/>
+          <p:cNvSpPr txBox="1"/>
+          <p:nvPr/>
+        </p:nvSpPr>
+        <p:spPr>
+          <a:xfrm>
+            <a:off x="4812911" y="1890248"/>
+            <a:ext cx="3680460" cy="292608"/>
+          </a:xfrm>
+          <a:prstGeom prst="rect">
+            <a:avLst/>
+          </a:prstGeom>
+          <a:noFill/>
+          <a:ln/>
+        </p:spPr>
+        <p:txBody>
+          <a:bodyPr wrap="square" lIns="0" tIns="0" rIns="0" bIns="0" rtlCol="0" anchor="ctr"/>
+          <a:lstStyle/>
+          <a:p>
+            <a:pPr marL="0" indent="0">
+              <a:buNone/>
+            </a:pPr>
+            <a:r>
+              <a:rPr lang="en-US" sz="1050" dirty="0">
+                <a:solidFill>
+                  <a:srgbClr val="2E0A4E"/>
+                </a:solidFill>
+                <a:latin typeface="Calibri" pitchFamily="34" charset="0"/>
+                <a:ea typeface="Calibri" pitchFamily="34" charset="-122"/>
+                <a:cs typeface="Calibri" pitchFamily="34" charset="-120"/>
+              </a:rPr>
+              <a:t>Varios valores juntos, y cómo elegir uno.</a:t>
+            </a:r>
+            <a:endParaRPr lang="en-US" sz="1050" dirty="0"/>
+          </a:p>
+        </p:txBody>
+      </p:sp>
+      <p:sp>
+        <p:nvSpPr>
+          <p:cNvPr id="10" name="Shape 9"/>
+          <p:cNvSpPr/>
+          <p:nvPr/>
+        </p:nvSpPr>
+        <p:spPr>
+          <a:xfrm>
+            <a:off x="502920" y="1847088"/>
+            <a:ext cx="3954780" cy="585216"/>
+          </a:xfrm>
+          <a:prstGeom prst="roundRect">
+            <a:avLst>
+              <a:gd name="adj" fmla="val 7813"/>
+            </a:avLst>
+          </a:prstGeom>
+          <a:solidFill>
+            <a:schemeClr val="accent1">
+              <a:lumMod val="20000"/>
+              <a:lumOff val="80000"/>
+            </a:schemeClr>
+          </a:solidFill>
+          <a:ln w="12700">
+            <a:solidFill>
+              <a:srgbClr val="F4ECFB"/>
+            </a:solidFill>
+            <a:prstDash val="solid"/>
+          </a:ln>
+        </p:spPr>
+        <p:txBody>
+          <a:bodyPr/>
+          <a:lstStyle/>
+          <a:p>
+            <a:endParaRPr lang="en-US"/>
+          </a:p>
+        </p:txBody>
+      </p:sp>
+      <p:sp>
+        <p:nvSpPr>
+          <p:cNvPr id="11" name="Text 10"/>
+          <p:cNvSpPr txBox="1"/>
+          <p:nvPr/>
+        </p:nvSpPr>
+        <p:spPr>
+          <a:xfrm>
+            <a:off x="640080" y="1865376"/>
+            <a:ext cx="3680460" cy="292608"/>
+          </a:xfrm>
+          <a:prstGeom prst="rect">
+            <a:avLst/>
+          </a:prstGeom>
+          <a:noFill/>
+          <a:ln/>
+        </p:spPr>
+        <p:txBody>
+          <a:bodyPr wrap="square" lIns="0" tIns="0" rIns="0" bIns="0" rtlCol="0" anchor="ctr"/>
+          <a:lstStyle/>
+          <a:p>
+            <a:pPr marL="0" indent="0">
+              <a:buNone/>
+            </a:pPr>
+            <a:r>
+              <a:rPr lang="en-US" sz="1050" b="1" dirty="0">
+                <a:solidFill>
+                  <a:srgbClr val="5A189A"/>
+                </a:solidFill>
+                <a:latin typeface="Courier New" pitchFamily="34" charset="0"/>
+                <a:ea typeface="Courier New" pitchFamily="34" charset="-122"/>
+                <a:cs typeface="Courier New" pitchFamily="34" charset="-120"/>
+              </a:rPr>
+              <a:t>sum(), mean(), paste0()</a:t>
+            </a:r>
+            <a:endParaRPr lang="en-US" sz="1050" dirty="0"/>
+          </a:p>
+        </p:txBody>
+      </p:sp>
+      <p:sp>
+        <p:nvSpPr>
+          <p:cNvPr id="12" name="Text 11"/>
+          <p:cNvSpPr txBox="1"/>
+          <p:nvPr/>
+        </p:nvSpPr>
+        <p:spPr>
+          <a:xfrm>
+            <a:off x="640080" y="2127992"/>
+            <a:ext cx="3680460" cy="292608"/>
+          </a:xfrm>
+          <a:prstGeom prst="rect">
+            <a:avLst/>
+          </a:prstGeom>
+          <a:noFill/>
+          <a:ln/>
+        </p:spPr>
+        <p:txBody>
+          <a:bodyPr wrap="square" lIns="0" tIns="0" rIns="0" bIns="0" rtlCol="0" anchor="ctr"/>
+          <a:lstStyle/>
+          <a:p>
+            <a:pPr marL="0" indent="0">
+              <a:buNone/>
+            </a:pPr>
+            <a:r>
+              <a:rPr lang="en-US" sz="1050" dirty="0">
+                <a:solidFill>
+                  <a:srgbClr val="2E0A4E"/>
+                </a:solidFill>
+                <a:latin typeface="Calibri" pitchFamily="34" charset="0"/>
+                <a:ea typeface="Calibri" pitchFamily="34" charset="-122"/>
+                <a:cs typeface="Calibri" pitchFamily="34" charset="-120"/>
+              </a:rPr>
+              <a:t>Funciones, reciben algo y devuelven un resultado.</a:t>
+            </a:r>
+            <a:endParaRPr lang="en-US" sz="1050" dirty="0"/>
+          </a:p>
+        </p:txBody>
+      </p:sp>
+      <p:sp>
+        <p:nvSpPr>
+          <p:cNvPr id="13" name="Shape 12"/>
+          <p:cNvSpPr/>
+          <p:nvPr/>
+        </p:nvSpPr>
+        <p:spPr>
+          <a:xfrm>
+            <a:off x="4675751" y="2267712"/>
+            <a:ext cx="3954780" cy="585216"/>
+          </a:xfrm>
+          <a:prstGeom prst="roundRect">
+            <a:avLst>
+              <a:gd name="adj" fmla="val 7813"/>
+            </a:avLst>
+          </a:prstGeom>
+          <a:solidFill>
+            <a:schemeClr val="accent4">
+              <a:lumMod val="20000"/>
+              <a:lumOff val="80000"/>
+            </a:schemeClr>
+          </a:solidFill>
+          <a:ln w="12700">
+            <a:solidFill>
+              <a:srgbClr val="F4ECFB"/>
+            </a:solidFill>
+            <a:prstDash val="solid"/>
+          </a:ln>
+        </p:spPr>
+        <p:txBody>
+          <a:bodyPr/>
+          <a:lstStyle/>
+          <a:p>
+            <a:endParaRPr lang="en-US"/>
+          </a:p>
+        </p:txBody>
+      </p:sp>
+      <p:sp>
+        <p:nvSpPr>
+          <p:cNvPr id="14" name="Text 13"/>
+          <p:cNvSpPr txBox="1"/>
+          <p:nvPr/>
+        </p:nvSpPr>
+        <p:spPr>
+          <a:xfrm>
+            <a:off x="4812911" y="2286000"/>
+            <a:ext cx="3680460" cy="292608"/>
+          </a:xfrm>
+          <a:prstGeom prst="rect">
+            <a:avLst/>
+          </a:prstGeom>
+          <a:noFill/>
+          <a:ln/>
+        </p:spPr>
+        <p:txBody>
+          <a:bodyPr wrap="square" lIns="0" tIns="0" rIns="0" bIns="0" rtlCol="0" anchor="ctr"/>
+          <a:lstStyle/>
+          <a:p>
+            <a:pPr marL="0" indent="0">
+              <a:buNone/>
+            </a:pPr>
+            <a:r>
+              <a:rPr lang="en-US" sz="1050" b="1" dirty="0">
+                <a:solidFill>
+                  <a:srgbClr val="5A189A"/>
+                </a:solidFill>
+                <a:latin typeface="Courier New" pitchFamily="34" charset="0"/>
+                <a:ea typeface="Courier New" pitchFamily="34" charset="-122"/>
+                <a:cs typeface="Courier New" pitchFamily="34" charset="-120"/>
+              </a:rPr>
+              <a:t>install.packages() y library()</a:t>
+            </a:r>
+            <a:endParaRPr lang="en-US" sz="1050" dirty="0"/>
+          </a:p>
+        </p:txBody>
+      </p:sp>
+      <p:sp>
+        <p:nvSpPr>
+          <p:cNvPr id="15" name="Text 14"/>
+          <p:cNvSpPr txBox="1"/>
+          <p:nvPr/>
+        </p:nvSpPr>
+        <p:spPr>
+          <a:xfrm>
+            <a:off x="4812911" y="2548616"/>
+            <a:ext cx="3680460" cy="292608"/>
+          </a:xfrm>
+          <a:prstGeom prst="rect">
+            <a:avLst/>
+          </a:prstGeom>
+          <a:noFill/>
+          <a:ln/>
+        </p:spPr>
+        <p:txBody>
+          <a:bodyPr wrap="square" lIns="0" tIns="0" rIns="0" bIns="0" rtlCol="0" anchor="ctr"/>
+          <a:lstStyle/>
+          <a:p>
+            <a:pPr marL="0" indent="0">
+              <a:buNone/>
+            </a:pPr>
+            <a:r>
+              <a:rPr lang="en-US" sz="1050" dirty="0">
+                <a:solidFill>
+                  <a:srgbClr val="2E0A4E"/>
+                </a:solidFill>
+                <a:latin typeface="Calibri" pitchFamily="34" charset="0"/>
+                <a:ea typeface="Calibri" pitchFamily="34" charset="-122"/>
+                <a:cs typeface="Calibri" pitchFamily="34" charset="-120"/>
+              </a:rPr>
+              <a:t>Instalar una vez, activar cada vez.</a:t>
+            </a:r>
+            <a:endParaRPr lang="en-US" sz="1050" dirty="0"/>
+          </a:p>
+        </p:txBody>
+      </p:sp>
+      <p:sp>
+        <p:nvSpPr>
+          <p:cNvPr id="16" name="Shape 15"/>
+          <p:cNvSpPr/>
+          <p:nvPr/>
+        </p:nvSpPr>
+        <p:spPr>
+          <a:xfrm>
+            <a:off x="502920" y="2505456"/>
+            <a:ext cx="3954780" cy="585216"/>
+          </a:xfrm>
+          <a:prstGeom prst="roundRect">
+            <a:avLst>
+              <a:gd name="adj" fmla="val 7813"/>
+            </a:avLst>
+          </a:prstGeom>
+          <a:solidFill>
+            <a:schemeClr val="accent1">
+              <a:lumMod val="20000"/>
+              <a:lumOff val="80000"/>
+            </a:schemeClr>
+          </a:solidFill>
+          <a:ln w="12700">
+            <a:solidFill>
+              <a:srgbClr val="F4ECFB"/>
+            </a:solidFill>
+            <a:prstDash val="solid"/>
+          </a:ln>
+        </p:spPr>
+        <p:txBody>
+          <a:bodyPr/>
+          <a:lstStyle/>
+          <a:p>
+            <a:endParaRPr lang="en-US"/>
+          </a:p>
+        </p:txBody>
+      </p:sp>
+      <p:sp>
+        <p:nvSpPr>
+          <p:cNvPr id="17" name="Text 16"/>
+          <p:cNvSpPr txBox="1"/>
+          <p:nvPr/>
+        </p:nvSpPr>
+        <p:spPr>
+          <a:xfrm>
+            <a:off x="640080" y="2523744"/>
+            <a:ext cx="3680460" cy="292608"/>
+          </a:xfrm>
+          <a:prstGeom prst="rect">
+            <a:avLst/>
+          </a:prstGeom>
+          <a:noFill/>
+          <a:ln/>
+        </p:spPr>
+        <p:txBody>
+          <a:bodyPr wrap="square" lIns="0" tIns="0" rIns="0" bIns="0" rtlCol="0" anchor="ctr"/>
+          <a:lstStyle/>
+          <a:p>
+            <a:pPr marL="0" indent="0">
+              <a:buNone/>
+            </a:pPr>
+            <a:r>
+              <a:rPr lang="en-US" sz="1050" b="1" dirty="0">
+                <a:solidFill>
+                  <a:srgbClr val="5A189A"/>
+                </a:solidFill>
+                <a:latin typeface="Courier New" pitchFamily="34" charset="0"/>
+                <a:ea typeface="Courier New" pitchFamily="34" charset="-122"/>
+                <a:cs typeface="Courier New" pitchFamily="34" charset="-120"/>
+              </a:rPr>
+              <a:t>getwd() y read.csv()</a:t>
+            </a:r>
+            <a:endParaRPr lang="en-US" sz="1050" dirty="0"/>
+          </a:p>
+        </p:txBody>
+      </p:sp>
+      <p:sp>
+        <p:nvSpPr>
+          <p:cNvPr id="18" name="Text 17"/>
+          <p:cNvSpPr txBox="1"/>
+          <p:nvPr/>
+        </p:nvSpPr>
+        <p:spPr>
+          <a:xfrm>
+            <a:off x="640080" y="2786360"/>
+            <a:ext cx="3680460" cy="292608"/>
+          </a:xfrm>
+          <a:prstGeom prst="rect">
+            <a:avLst/>
+          </a:prstGeom>
+          <a:noFill/>
+          <a:ln/>
+        </p:spPr>
+        <p:txBody>
+          <a:bodyPr wrap="square" lIns="0" tIns="0" rIns="0" bIns="0" rtlCol="0" anchor="ctr"/>
+          <a:lstStyle/>
+          <a:p>
+            <a:pPr marL="0" indent="0">
+              <a:buNone/>
+            </a:pPr>
+            <a:r>
+              <a:rPr lang="en-US" sz="1050" dirty="0">
+                <a:solidFill>
+                  <a:srgbClr val="2E0A4E"/>
+                </a:solidFill>
+                <a:latin typeface="Calibri" pitchFamily="34" charset="0"/>
+                <a:ea typeface="Calibri" pitchFamily="34" charset="-122"/>
+                <a:cs typeface="Calibri" pitchFamily="34" charset="-120"/>
+              </a:rPr>
+              <a:t>Dónde está parado R y cómo lee un CSV.</a:t>
+            </a:r>
+            <a:endParaRPr lang="en-US" sz="1050" dirty="0"/>
+          </a:p>
+        </p:txBody>
+      </p:sp>
+      <p:sp>
+        <p:nvSpPr>
+          <p:cNvPr id="19" name="Shape 18"/>
+          <p:cNvSpPr/>
+          <p:nvPr/>
+        </p:nvSpPr>
+        <p:spPr>
+          <a:xfrm>
+            <a:off x="4675751" y="2926080"/>
+            <a:ext cx="3954780" cy="585216"/>
+          </a:xfrm>
+          <a:prstGeom prst="roundRect">
+            <a:avLst>
+              <a:gd name="adj" fmla="val 7813"/>
+            </a:avLst>
+          </a:prstGeom>
+          <a:solidFill>
+            <a:schemeClr val="accent4">
+              <a:lumMod val="20000"/>
+              <a:lumOff val="80000"/>
+            </a:schemeClr>
+          </a:solidFill>
+          <a:ln w="12700">
+            <a:solidFill>
+              <a:srgbClr val="F4ECFB"/>
+            </a:solidFill>
+            <a:prstDash val="solid"/>
+          </a:ln>
+        </p:spPr>
+        <p:txBody>
+          <a:bodyPr/>
+          <a:lstStyle/>
+          <a:p>
+            <a:endParaRPr lang="en-US"/>
+          </a:p>
+        </p:txBody>
+      </p:sp>
+      <p:sp>
+        <p:nvSpPr>
+          <p:cNvPr id="20" name="Text 19"/>
+          <p:cNvSpPr txBox="1"/>
+          <p:nvPr/>
+        </p:nvSpPr>
+        <p:spPr>
+          <a:xfrm>
+            <a:off x="4812911" y="2944368"/>
+            <a:ext cx="3680460" cy="292608"/>
+          </a:xfrm>
+          <a:prstGeom prst="rect">
+            <a:avLst/>
+          </a:prstGeom>
+          <a:noFill/>
+          <a:ln/>
+        </p:spPr>
+        <p:txBody>
+          <a:bodyPr wrap="square" lIns="0" tIns="0" rIns="0" bIns="0" rtlCol="0" anchor="ctr"/>
+          <a:lstStyle/>
+          <a:p>
+            <a:pPr marL="0" indent="0">
+              <a:buNone/>
+            </a:pPr>
+            <a:r>
+              <a:rPr lang="en-US" sz="1050" b="1" dirty="0">
+                <a:solidFill>
+                  <a:srgbClr val="5A189A"/>
+                </a:solidFill>
+                <a:latin typeface="Courier New" pitchFamily="34" charset="0"/>
+                <a:ea typeface="Courier New" pitchFamily="34" charset="-122"/>
+                <a:cs typeface="Courier New" pitchFamily="34" charset="-120"/>
+              </a:rPr>
+              <a:t>datos$columna y datos[filas, columnas]</a:t>
+            </a:r>
+            <a:endParaRPr lang="en-US" sz="1050" dirty="0"/>
+          </a:p>
+        </p:txBody>
+      </p:sp>
+      <p:sp>
+        <p:nvSpPr>
+          <p:cNvPr id="21" name="Text 20"/>
+          <p:cNvSpPr txBox="1"/>
+          <p:nvPr/>
+        </p:nvSpPr>
+        <p:spPr>
+          <a:xfrm>
+            <a:off x="4812911" y="3206984"/>
+            <a:ext cx="3680460" cy="292608"/>
+          </a:xfrm>
+          <a:prstGeom prst="rect">
+            <a:avLst/>
+          </a:prstGeom>
+          <a:noFill/>
+          <a:ln/>
+        </p:spPr>
+        <p:txBody>
+          <a:bodyPr wrap="square" lIns="0" tIns="0" rIns="0" bIns="0" rtlCol="0" anchor="ctr"/>
+          <a:lstStyle/>
+          <a:p>
+            <a:pPr marL="0" indent="0">
+              <a:buNone/>
+            </a:pPr>
+            <a:r>
+              <a:rPr lang="en-US" sz="1050" dirty="0">
+                <a:solidFill>
+                  <a:srgbClr val="2E0A4E"/>
+                </a:solidFill>
+                <a:latin typeface="Calibri" pitchFamily="34" charset="0"/>
+                <a:ea typeface="Calibri" pitchFamily="34" charset="-122"/>
+                <a:cs typeface="Calibri" pitchFamily="34" charset="-120"/>
+              </a:rPr>
+              <a:t>Elegir partes de un data frame.</a:t>
+            </a:r>
+            <a:endParaRPr lang="en-US" sz="1050" dirty="0"/>
+          </a:p>
+        </p:txBody>
+      </p:sp>
+      <p:sp>
+        <p:nvSpPr>
+          <p:cNvPr id="22" name="Shape 21"/>
+          <p:cNvSpPr/>
+          <p:nvPr/>
+        </p:nvSpPr>
+        <p:spPr>
+          <a:xfrm>
+            <a:off x="502920" y="3163824"/>
+            <a:ext cx="3954780" cy="585216"/>
+          </a:xfrm>
+          <a:prstGeom prst="roundRect">
+            <a:avLst>
+              <a:gd name="adj" fmla="val 7813"/>
+            </a:avLst>
+          </a:prstGeom>
+          <a:solidFill>
+            <a:schemeClr val="accent1">
+              <a:lumMod val="20000"/>
+              <a:lumOff val="80000"/>
+            </a:schemeClr>
+          </a:solidFill>
+          <a:ln w="12700">
+            <a:solidFill>
+              <a:srgbClr val="F4ECFB"/>
+            </a:solidFill>
+            <a:prstDash val="solid"/>
+          </a:ln>
+        </p:spPr>
+        <p:txBody>
+          <a:bodyPr/>
+          <a:lstStyle/>
+          <a:p>
+            <a:endParaRPr lang="en-US"/>
+          </a:p>
+        </p:txBody>
+      </p:sp>
+      <p:sp>
+        <p:nvSpPr>
+          <p:cNvPr id="23" name="Text 22"/>
+          <p:cNvSpPr txBox="1"/>
+          <p:nvPr/>
+        </p:nvSpPr>
+        <p:spPr>
+          <a:xfrm>
+            <a:off x="640080" y="3182112"/>
+            <a:ext cx="3680460" cy="292608"/>
+          </a:xfrm>
+          <a:prstGeom prst="rect">
+            <a:avLst/>
+          </a:prstGeom>
+          <a:noFill/>
+          <a:ln/>
+        </p:spPr>
+        <p:txBody>
+          <a:bodyPr wrap="square" lIns="0" tIns="0" rIns="0" bIns="0" rtlCol="0" anchor="ctr"/>
+          <a:lstStyle/>
+          <a:p>
+            <a:pPr marL="0" indent="0">
+              <a:buNone/>
+            </a:pPr>
+            <a:r>
+              <a:rPr lang="en-US" sz="1050" b="1" dirty="0">
+                <a:solidFill>
+                  <a:srgbClr val="5A189A"/>
+                </a:solidFill>
+                <a:latin typeface="Courier New" pitchFamily="34" charset="0"/>
+                <a:ea typeface="Courier New" pitchFamily="34" charset="-122"/>
+                <a:cs typeface="Courier New" pitchFamily="34" charset="-120"/>
+              </a:rPr>
+              <a:t>ui, server y shinyApp()</a:t>
+            </a:r>
+            <a:endParaRPr lang="en-US" sz="1050" dirty="0"/>
+          </a:p>
+        </p:txBody>
+      </p:sp>
+      <p:sp>
+        <p:nvSpPr>
+          <p:cNvPr id="24" name="Text 23"/>
+          <p:cNvSpPr txBox="1"/>
+          <p:nvPr/>
+        </p:nvSpPr>
+        <p:spPr>
+          <a:xfrm>
+            <a:off x="640080" y="3444728"/>
+            <a:ext cx="3680460" cy="292608"/>
+          </a:xfrm>
+          <a:prstGeom prst="rect">
+            <a:avLst/>
+          </a:prstGeom>
+          <a:noFill/>
+          <a:ln/>
+        </p:spPr>
+        <p:txBody>
+          <a:bodyPr wrap="square" lIns="0" tIns="0" rIns="0" bIns="0" rtlCol="0" anchor="ctr"/>
+          <a:lstStyle/>
+          <a:p>
+            <a:pPr marL="0" indent="0">
+              <a:buNone/>
+            </a:pPr>
+            <a:r>
+              <a:rPr lang="en-US" sz="1050" dirty="0">
+                <a:solidFill>
+                  <a:srgbClr val="2E0A4E"/>
+                </a:solidFill>
+                <a:latin typeface="Calibri" pitchFamily="34" charset="0"/>
+                <a:ea typeface="Calibri" pitchFamily="34" charset="-122"/>
+                <a:cs typeface="Calibri" pitchFamily="34" charset="-120"/>
+              </a:rPr>
+              <a:t>Las tres piezas de toda app de Shiny.</a:t>
+            </a:r>
+            <a:endParaRPr lang="en-US" sz="1050" dirty="0"/>
+          </a:p>
+        </p:txBody>
+      </p:sp>
+      <p:sp>
+        <p:nvSpPr>
+          <p:cNvPr id="25" name="Shape 18"/>
+          <p:cNvSpPr/>
+          <p:nvPr/>
+        </p:nvSpPr>
+        <p:spPr>
+          <a:xfrm>
+            <a:off x="4675751" y="3584448"/>
+            <a:ext cx="3954780" cy="585216"/>
+          </a:xfrm>
+          <a:prstGeom prst="roundRect">
+            <a:avLst>
+              <a:gd name="adj" fmla="val 7813"/>
+            </a:avLst>
+          </a:prstGeom>
+          <a:solidFill>
+            <a:schemeClr val="accent4">
+              <a:lumMod val="20000"/>
+              <a:lumOff val="80000"/>
+            </a:schemeClr>
+          </a:solidFill>
+          <a:ln w="12700">
+            <a:solidFill>
+              <a:srgbClr val="F4ECFB"/>
+            </a:solidFill>
+            <a:prstDash val="solid"/>
+          </a:ln>
+        </p:spPr>
+        <p:txBody>
+          <a:bodyPr/>
+          <a:lstStyle/>
+          <a:p>
+            <a:endParaRPr lang="en-US"/>
+          </a:p>
+        </p:txBody>
+      </p:sp>
+      <p:sp>
+        <p:nvSpPr>
+          <p:cNvPr id="26" name="Text 19"/>
+          <p:cNvSpPr txBox="1"/>
+          <p:nvPr/>
+        </p:nvSpPr>
+        <p:spPr>
+          <a:xfrm>
+            <a:off x="4812911" y="3602736"/>
+            <a:ext cx="3680460" cy="292608"/>
+          </a:xfrm>
+          <a:prstGeom prst="rect">
+            <a:avLst/>
+          </a:prstGeom>
+          <a:noFill/>
+          <a:ln/>
+        </p:spPr>
+        <p:txBody>
+          <a:bodyPr wrap="square" lIns="0" tIns="0" rIns="0" bIns="0" rtlCol="0" anchor="ctr"/>
+          <a:lstStyle/>
+          <a:p>
+            <a:pPr marL="0" indent="0">
+              <a:buNone/>
+            </a:pPr>
+            <a:r>
+              <a:rPr lang="en-US" sz="1050" b="1" dirty="0">
+                <a:solidFill>
+                  <a:srgbClr val="5A189A"/>
+                </a:solidFill>
+                <a:latin typeface="Courier New" pitchFamily="34" charset="0"/>
+                <a:ea typeface="Courier New" pitchFamily="34" charset="-122"/>
+                <a:cs typeface="Courier New" pitchFamily="34" charset="-120"/>
+              </a:rPr>
+              <a:t>tableOutput() y renderTable()</a:t>
+            </a:r>
+            <a:endParaRPr lang="en-US" sz="1050" dirty="0"/>
+          </a:p>
+        </p:txBody>
+      </p:sp>
+      <p:sp>
+        <p:nvSpPr>
+          <p:cNvPr id="27" name="Text 20"/>
+          <p:cNvSpPr txBox="1"/>
+          <p:nvPr/>
+        </p:nvSpPr>
+        <p:spPr>
+          <a:xfrm>
+            <a:off x="4812911" y="3865352"/>
+            <a:ext cx="3680460" cy="292608"/>
+          </a:xfrm>
+          <a:prstGeom prst="rect">
+            <a:avLst/>
+          </a:prstGeom>
+          <a:noFill/>
+          <a:ln/>
+        </p:spPr>
+        <p:txBody>
+          <a:bodyPr wrap="square" lIns="0" tIns="0" rIns="0" bIns="0" rtlCol="0" anchor="ctr"/>
+          <a:lstStyle/>
+          <a:p>
+            <a:pPr marL="0" indent="0">
+              <a:buNone/>
+            </a:pPr>
+            <a:r>
+              <a:rPr lang="en-US" sz="1050" dirty="0">
+                <a:solidFill>
+                  <a:srgbClr val="2E0A4E"/>
+                </a:solidFill>
+                <a:latin typeface="Calibri" pitchFamily="34" charset="0"/>
+                <a:ea typeface="Calibri" pitchFamily="34" charset="-122"/>
+                <a:cs typeface="Calibri" pitchFamily="34" charset="-120"/>
+              </a:rPr>
+              <a:t>Un espacio en la ui y lo que lo rellena.</a:t>
+            </a:r>
+            <a:endParaRPr lang="en-US" sz="1050" dirty="0"/>
+          </a:p>
+        </p:txBody>
+      </p:sp>
+    </p:spTree>
+  </p:cSld>
+  <p:clrMapOvr>
+    <a:masterClrMapping/>
+  </p:clrMapOvr>
+</p:sld>
+</file>
+
+<file path=ppt/slides/slide19.xml><?xml version="1.0" encoding="utf-8"?>
+<p:sld xmlns:a="http://schemas.openxmlformats.org/drawingml/2006/main" xmlns:p="http://schemas.openxmlformats.org/presentationml/2006/main" xmlns:r="http://schemas.openxmlformats.org/officeDocument/2006/relationships">
+  <p:cSld>
+    <p:bg>
+      <p:bgPr>
+        <a:solidFill>
+          <a:srgbClr val="FFFFFF"/>
+        </a:solidFill>
+        <a:effectLst/>
+      </p:bgPr>
+    </p:bg>
+    <p:spTree>
+      <p:nvGrpSpPr>
+        <p:cNvPr id="1" name=""/>
+        <p:cNvGrpSpPr/>
+        <p:nvPr/>
+      </p:nvGrpSpPr>
+      <p:grpSpPr/>
+      <p:sp>
+        <p:nvSpPr>
+          <p:cNvPr id="2" name="Text 0"/>
+          <p:cNvSpPr txBox="1"/>
+          <p:nvPr/>
+        </p:nvSpPr>
+        <p:spPr>
+          <a:xfrm>
+            <a:off x="502920" y="320040"/>
+            <a:ext cx="7040880" cy="640080"/>
+          </a:xfrm>
+          <a:prstGeom prst="rect">
+            <a:avLst/>
+          </a:prstGeom>
+          <a:noFill/>
+          <a:ln/>
+        </p:spPr>
+        <p:txBody>
+          <a:bodyPr wrap="square" lIns="0" tIns="0" rIns="0" bIns="0" rtlCol="0" anchor="ctr"/>
+          <a:lstStyle/>
+          <a:p>
+            <a:pPr marL="0" indent="0">
+              <a:buNone/>
+            </a:pPr>
+            <a:r>
+              <a:rPr lang="en-US" sz="3000" b="1" dirty="0">
+                <a:solidFill>
+                  <a:srgbClr val="2E0A4E"/>
+                </a:solidFill>
+                <a:latin typeface="Oswald" pitchFamily="34" charset="0"/>
+                <a:ea typeface="Oswald" pitchFamily="34" charset="-122"/>
+                <a:cs typeface="Oswald" pitchFamily="34" charset="-120"/>
+              </a:rPr>
+              <a:t>Código clave</a:t>
+            </a:r>
+            <a:endParaRPr lang="en-US" sz="3000" dirty="0"/>
+          </a:p>
+        </p:txBody>
+      </p:sp>
+      <p:sp>
+        <p:nvSpPr>
+          <p:cNvPr id="4" name="Text 2"/>
+          <p:cNvSpPr txBox="1"/>
+          <p:nvPr/>
+        </p:nvSpPr>
+        <p:spPr>
+          <a:xfrm>
+            <a:off x="502920" y="4759452"/>
+            <a:ext cx="8138160" cy="228600"/>
+          </a:xfrm>
+          <a:prstGeom prst="rect">
+            <a:avLst/>
+          </a:prstGeom>
+          <a:noFill/>
+          <a:ln/>
+        </p:spPr>
+        <p:txBody>
+          <a:bodyPr wrap="square" lIns="0" tIns="0" rIns="0" bIns="0" rtlCol="0" anchor="ctr"/>
+          <a:lstStyle/>
+          <a:p>
+            <a:pPr marL="0" indent="0">
+              <a:buNone/>
+            </a:pPr>
+            <a:r>
+              <a:rPr lang="en-US" sz="900" dirty="0">
+                <a:solidFill>
+                  <a:srgbClr val="999999"/>
+                </a:solidFill>
+                <a:latin typeface="Calibri" pitchFamily="34" charset="0"/>
+                <a:ea typeface="Calibri" pitchFamily="34" charset="-122"/>
+                <a:cs typeface="Calibri" pitchFamily="34" charset="-120"/>
+              </a:rPr>
+              <a:t>Visualización interactiva de datos con R y Shiny · Udelar</a:t>
+            </a:r>
+            <a:endParaRPr lang="en-US" sz="900" dirty="0"/>
+          </a:p>
+        </p:txBody>
+      </p:sp>
+      <p:sp>
+        <p:nvSpPr>
+          <p:cNvPr id="5" name="Shape 3"/>
+          <p:cNvSpPr/>
+          <p:nvPr/>
+        </p:nvSpPr>
+        <p:spPr>
+          <a:xfrm>
+            <a:off x="502920" y="1188720"/>
+            <a:ext cx="8138160" cy="3429000"/>
+          </a:xfrm>
+          <a:prstGeom prst="roundRect">
+            <a:avLst>
+              <a:gd name="adj" fmla="val 1600"/>
+            </a:avLst>
+          </a:prstGeom>
+          <a:solidFill>
+            <a:srgbClr val="2E0A4E"/>
+          </a:solidFill>
+          <a:ln w="12700">
+            <a:solidFill>
+              <a:srgbClr val="2E0A4E"/>
+            </a:solidFill>
+            <a:prstDash val="solid"/>
+          </a:ln>
+        </p:spPr>
+        <p:txBody>
+          <a:bodyPr/>
+          <a:lstStyle/>
+          <a:p>
+            <a:endParaRPr lang="en-US"/>
+          </a:p>
+        </p:txBody>
+      </p:sp>
+      <p:sp>
+        <p:nvSpPr>
+          <p:cNvPr id="6" name="Text 4"/>
+          <p:cNvSpPr txBox="1"/>
+          <p:nvPr/>
+        </p:nvSpPr>
+        <p:spPr>
+          <a:xfrm>
+            <a:off x="777240" y="1325880"/>
+            <a:ext cx="7589520" cy="3154680"/>
+          </a:xfrm>
+          <a:prstGeom prst="rect">
+            <a:avLst/>
+          </a:prstGeom>
+          <a:noFill/>
+          <a:ln/>
+        </p:spPr>
+        <p:txBody>
+          <a:bodyPr wrap="square" lIns="0" tIns="0" rIns="0" bIns="0" rtlCol="0" anchor="t"/>
+          <a:lstStyle/>
+          <a:p>
+            <a:pPr marL="0" indent="0">
+              <a:spcAft>
+                <a:spcPts val="200"/>
+              </a:spcAft>
+              <a:buNone/>
+            </a:pPr>
+            <a:r>
+              <a:rPr lang="en-US" sz="1000" dirty="0">
+                <a:solidFill>
+                  <a:srgbClr val="F1E9F8"/>
+                </a:solidFill>
+                <a:latin typeface="Courier New" pitchFamily="34" charset="0"/>
+                <a:ea typeface="Courier New" pitchFamily="34" charset="-122"/>
+                <a:cs typeface="Courier New" pitchFamily="34" charset="-120"/>
+              </a:rPr>
+              <a:t>library(shiny)</a:t>
+            </a:r>
+            <a:endParaRPr lang="en-US" sz="1100" dirty="0"/>
+          </a:p>
+          <a:p>
+            <a:pPr marL="0" indent="0">
+              <a:spcAft>
+                <a:spcPts val="200"/>
+              </a:spcAft>
+              <a:buNone/>
+            </a:pPr>
+            <a:r>
+              <a:rPr lang="en-US" sz="1000" dirty="0">
+                <a:solidFill>
+                  <a:srgbClr val="F1E9F8"/>
+                </a:solidFill>
+                <a:latin typeface="Courier New" pitchFamily="34" charset="0"/>
+                <a:ea typeface="Courier New" pitchFamily="34" charset="-122"/>
+                <a:cs typeface="Courier New" pitchFamily="34" charset="-120"/>
+              </a:rPr>
+              <a:t>TITULO &lt;- "Mi primera app Shiny"</a:t>
+            </a:r>
+            <a:endParaRPr lang="en-US" sz="1100" dirty="0"/>
+          </a:p>
+          <a:p>
+            <a:pPr marL="0" indent="0">
+              <a:spcAft>
+                <a:spcPts val="200"/>
+              </a:spcAft>
+              <a:buNone/>
+            </a:pPr>
+            <a:r>
+              <a:rPr lang="en-US" sz="1000" dirty="0">
+                <a:solidFill>
+                  <a:srgbClr val="F1E9F8"/>
+                </a:solidFill>
+                <a:latin typeface="Courier New" pitchFamily="34" charset="0"/>
+                <a:ea typeface="Courier New" pitchFamily="34" charset="-122"/>
+                <a:cs typeface="Courier New" pitchFamily="34" charset="-120"/>
+              </a:rPr>
+              <a:t>elecciones &lt;- read.csv("../datos/elecciones_departamento_2024.csv")</a:t>
+            </a:r>
+            <a:endParaRPr lang="en-US" sz="1100" dirty="0"/>
+          </a:p>
+          <a:p>
+            <a:pPr marL="0" indent="0">
+              <a:spcAft>
+                <a:spcPts val="200"/>
+              </a:spcAft>
+              <a:buNone/>
+            </a:pPr>
+            <a:r>
+              <a:rPr lang="en-US" sz="1000" dirty="0">
+                <a:solidFill>
+                  <a:srgbClr val="F1E9F8"/>
+                </a:solidFill>
+                <a:latin typeface="Courier New" pitchFamily="34" charset="0"/>
+                <a:ea typeface="Courier New" pitchFamily="34" charset="-122"/>
+                <a:cs typeface="Courier New" pitchFamily="34" charset="-120"/>
+              </a:rPr>
+              <a:t>ui &lt;- fluidPage(</a:t>
+            </a:r>
+            <a:endParaRPr lang="en-US" sz="1100" dirty="0"/>
+          </a:p>
+          <a:p>
+            <a:pPr marL="0" indent="0">
+              <a:spcAft>
+                <a:spcPts val="200"/>
+              </a:spcAft>
+              <a:buNone/>
+            </a:pPr>
+            <a:r>
+              <a:rPr lang="en-US" sz="1000" dirty="0">
+                <a:solidFill>
+                  <a:srgbClr val="F1E9F8"/>
+                </a:solidFill>
+                <a:latin typeface="Courier New" pitchFamily="34" charset="0"/>
+                <a:ea typeface="Courier New" pitchFamily="34" charset="-122"/>
+                <a:cs typeface="Courier New" pitchFamily="34" charset="-120"/>
+              </a:rPr>
+              <a:t>  titlePanel(TITULO),</a:t>
+            </a:r>
+            <a:endParaRPr lang="en-US" sz="1100" dirty="0"/>
+          </a:p>
+          <a:p>
+            <a:pPr marL="0" indent="0">
+              <a:spcAft>
+                <a:spcPts val="200"/>
+              </a:spcAft>
+              <a:buNone/>
+            </a:pPr>
+            <a:r>
+              <a:rPr lang="en-US" sz="1000" dirty="0">
+                <a:solidFill>
+                  <a:srgbClr val="F1E9F8"/>
+                </a:solidFill>
+                <a:latin typeface="Courier New" pitchFamily="34" charset="0"/>
+                <a:ea typeface="Courier New" pitchFamily="34" charset="-122"/>
+                <a:cs typeface="Courier New" pitchFamily="34" charset="-120"/>
+              </a:rPr>
+              <a:t>  h3("Votos emitidos por departamento"),</a:t>
+            </a:r>
+            <a:endParaRPr lang="en-US" sz="1100" dirty="0"/>
+          </a:p>
+          <a:p>
+            <a:pPr marL="0" indent="0">
+              <a:spcAft>
+                <a:spcPts val="200"/>
+              </a:spcAft>
+              <a:buNone/>
+            </a:pPr>
+            <a:r>
+              <a:rPr lang="en-US" sz="1000" dirty="0">
+                <a:solidFill>
+                  <a:srgbClr val="F1E9F8"/>
+                </a:solidFill>
+                <a:latin typeface="Courier New" pitchFamily="34" charset="0"/>
+                <a:ea typeface="Courier New" pitchFamily="34" charset="-122"/>
+                <a:cs typeface="Courier New" pitchFamily="34" charset="-120"/>
+              </a:rPr>
+              <a:t>  tableOutput("tabla_elecciones"),</a:t>
+            </a:r>
+            <a:endParaRPr lang="en-US" sz="1100" dirty="0"/>
+          </a:p>
+          <a:p>
+            <a:pPr marL="0" indent="0">
+              <a:spcAft>
+                <a:spcPts val="200"/>
+              </a:spcAft>
+              <a:buNone/>
+            </a:pPr>
+            <a:r>
+              <a:rPr lang="en-US" sz="1000" dirty="0">
+                <a:solidFill>
+                  <a:srgbClr val="F1E9F8"/>
+                </a:solidFill>
+                <a:latin typeface="Courier New" pitchFamily="34" charset="0"/>
+                <a:ea typeface="Courier New" pitchFamily="34" charset="-122"/>
+                <a:cs typeface="Courier New" pitchFamily="34" charset="-120"/>
+              </a:rPr>
+              <a:t>  textOutput("resumen")</a:t>
+            </a:r>
+            <a:endParaRPr lang="en-US" sz="1100" dirty="0"/>
+          </a:p>
+          <a:p>
+            <a:pPr marL="0" indent="0">
+              <a:spcAft>
+                <a:spcPts val="200"/>
+              </a:spcAft>
+              <a:buNone/>
+            </a:pPr>
+            <a:r>
+              <a:rPr lang="en-US" sz="1000" dirty="0">
+                <a:solidFill>
+                  <a:srgbClr val="F1E9F8"/>
+                </a:solidFill>
+                <a:latin typeface="Courier New" pitchFamily="34" charset="0"/>
+                <a:ea typeface="Courier New" pitchFamily="34" charset="-122"/>
+                <a:cs typeface="Courier New" pitchFamily="34" charset="-120"/>
+              </a:rPr>
+              <a:t>)</a:t>
+            </a:r>
+            <a:endParaRPr lang="en-US" sz="1100" dirty="0"/>
+          </a:p>
+          <a:p>
+            <a:pPr marL="0" indent="0">
+              <a:spcAft>
+                <a:spcPts val="200"/>
+              </a:spcAft>
+              <a:buNone/>
+            </a:pPr>
+            <a:r>
+              <a:rPr lang="en-US" sz="1000" dirty="0">
+                <a:solidFill>
+                  <a:srgbClr val="F1E9F8"/>
+                </a:solidFill>
+                <a:latin typeface="Courier New" pitchFamily="34" charset="0"/>
+                <a:ea typeface="Courier New" pitchFamily="34" charset="-122"/>
+                <a:cs typeface="Courier New" pitchFamily="34" charset="-120"/>
+              </a:rPr>
+              <a:t>server &lt;- function(input, output, session) {</a:t>
+            </a:r>
+            <a:endParaRPr lang="en-US" sz="1100" dirty="0"/>
+          </a:p>
+          <a:p>
+            <a:pPr marL="0" indent="0">
+              <a:spcAft>
+                <a:spcPts val="200"/>
+              </a:spcAft>
+              <a:buNone/>
+            </a:pPr>
+            <a:r>
+              <a:rPr lang="en-US" sz="1000" dirty="0">
+                <a:solidFill>
+                  <a:srgbClr val="F1E9F8"/>
+                </a:solidFill>
+                <a:latin typeface="Courier New" pitchFamily="34" charset="0"/>
+                <a:ea typeface="Courier New" pitchFamily="34" charset="-122"/>
+                <a:cs typeface="Courier New" pitchFamily="34" charset="-120"/>
+              </a:rPr>
+              <a:t>  output$tabla_elecciones &lt;- renderTable({</a:t>
+            </a:r>
+            <a:endParaRPr lang="en-US" sz="1100" dirty="0"/>
+          </a:p>
+          <a:p>
+            <a:pPr marL="0" indent="0">
+              <a:spcAft>
+                <a:spcPts val="200"/>
+              </a:spcAft>
+              <a:buNone/>
+            </a:pPr>
+            <a:r>
+              <a:rPr lang="en-US" sz="1000" dirty="0">
+                <a:solidFill>
+                  <a:srgbClr val="F1E9F8"/>
+                </a:solidFill>
+                <a:latin typeface="Courier New" pitchFamily="34" charset="0"/>
+                <a:ea typeface="Courier New" pitchFamily="34" charset="-122"/>
+                <a:cs typeface="Courier New" pitchFamily="34" charset="-120"/>
+              </a:rPr>
+              <a:t>    elecciones[, c("departamento", "emitidos")]</a:t>
+            </a:r>
+            <a:endParaRPr lang="en-US" sz="1100" dirty="0"/>
+          </a:p>
+          <a:p>
+            <a:pPr marL="0" indent="0">
+              <a:spcAft>
+                <a:spcPts val="200"/>
+              </a:spcAft>
+              <a:buNone/>
+            </a:pPr>
+            <a:r>
+              <a:rPr lang="en-US" sz="1000" dirty="0">
+                <a:solidFill>
+                  <a:srgbClr val="F1E9F8"/>
+                </a:solidFill>
+                <a:latin typeface="Courier New" pitchFamily="34" charset="0"/>
+                <a:ea typeface="Courier New" pitchFamily="34" charset="-122"/>
+                <a:cs typeface="Courier New" pitchFamily="34" charset="-120"/>
+              </a:rPr>
+              <a:t>  })</a:t>
+            </a:r>
+            <a:endParaRPr lang="en-US" sz="1100" dirty="0"/>
+          </a:p>
+          <a:p>
+            <a:pPr marL="0" indent="0">
+              <a:spcAft>
+                <a:spcPts val="200"/>
+              </a:spcAft>
+              <a:buNone/>
+            </a:pPr>
+            <a:r>
+              <a:rPr lang="en-US" sz="1000" dirty="0">
+                <a:solidFill>
+                  <a:srgbClr val="F1E9F8"/>
+                </a:solidFill>
+                <a:latin typeface="Courier New" pitchFamily="34" charset="0"/>
+                <a:ea typeface="Courier New" pitchFamily="34" charset="-122"/>
+                <a:cs typeface="Courier New" pitchFamily="34" charset="-120"/>
+              </a:rPr>
+              <a:t>  output$resumen &lt;- renderText({</a:t>
+            </a:r>
+            <a:endParaRPr lang="en-US" sz="1100" dirty="0"/>
+          </a:p>
+          <a:p>
+            <a:pPr marL="0" indent="0">
+              <a:spcAft>
+                <a:spcPts val="200"/>
+              </a:spcAft>
+              <a:buNone/>
+            </a:pPr>
+            <a:r>
+              <a:rPr lang="en-US" sz="1000" dirty="0">
+                <a:solidFill>
+                  <a:srgbClr val="F1E9F8"/>
+                </a:solidFill>
+                <a:latin typeface="Courier New" pitchFamily="34" charset="0"/>
+                <a:ea typeface="Courier New" pitchFamily="34" charset="-122"/>
+                <a:cs typeface="Courier New" pitchFamily="34" charset="-120"/>
+              </a:rPr>
+              <a:t>    paste0("Votos emitidos en total: ", sum(elecciones$emitidos))</a:t>
+            </a:r>
+            <a:endParaRPr lang="en-US" sz="1100" dirty="0"/>
+          </a:p>
+          <a:p>
+            <a:pPr marL="0" indent="0">
+              <a:spcAft>
+                <a:spcPts val="200"/>
+              </a:spcAft>
+              <a:buNone/>
+            </a:pPr>
+            <a:r>
+              <a:rPr lang="en-US" sz="1000" dirty="0">
+                <a:solidFill>
+                  <a:srgbClr val="F1E9F8"/>
+                </a:solidFill>
+                <a:latin typeface="Courier New" pitchFamily="34" charset="0"/>
+                <a:ea typeface="Courier New" pitchFamily="34" charset="-122"/>
+                <a:cs typeface="Courier New" pitchFamily="34" charset="-120"/>
+              </a:rPr>
+              <a:t>  })</a:t>
+            </a:r>
+            <a:endParaRPr lang="en-US" sz="1100" dirty="0"/>
+          </a:p>
+          <a:p>
+            <a:pPr marL="0" indent="0">
+              <a:spcAft>
+                <a:spcPts val="200"/>
+              </a:spcAft>
+              <a:buNone/>
+            </a:pPr>
+            <a:r>
+              <a:rPr lang="en-US" sz="1000" dirty="0">
+                <a:solidFill>
+                  <a:srgbClr val="F1E9F8"/>
+                </a:solidFill>
+                <a:latin typeface="Courier New" pitchFamily="34" charset="0"/>
+                <a:ea typeface="Courier New" pitchFamily="34" charset="-122"/>
+                <a:cs typeface="Courier New" pitchFamily="34" charset="-120"/>
+              </a:rPr>
+              <a:t>}</a:t>
+            </a:r>
+            <a:endParaRPr lang="en-US" sz="1100" dirty="0"/>
+          </a:p>
+          <a:p>
+            <a:pPr marL="0" indent="0">
+              <a:spcAft>
+                <a:spcPts val="200"/>
+              </a:spcAft>
+              <a:buNone/>
+            </a:pPr>
+            <a:r>
+              <a:rPr lang="en-US" sz="1000" dirty="0">
+                <a:solidFill>
+                  <a:srgbClr val="F1E9F8"/>
+                </a:solidFill>
+                <a:latin typeface="Courier New" pitchFamily="34" charset="0"/>
+                <a:ea typeface="Courier New" pitchFamily="34" charset="-122"/>
+                <a:cs typeface="Courier New" pitchFamily="34" charset="-120"/>
+              </a:rPr>
+              <a:t>shinyApp(ui = ui, server = server)</a:t>
+            </a:r>
+            <a:endParaRPr lang="en-US" sz="1100" dirty="0"/>
           </a:p>
         </p:txBody>
       </p:sp>
@@ -3877,7 +7377,7 @@
     </p:bg>
     <p:spTree>
       <p:nvGrpSpPr>
-        <p:cNvPr id="1" name=""/>
+        <p:cNvPr id="2" name=""/>
         <p:cNvGrpSpPr/>
         <p:nvPr/>
       </p:nvGrpSpPr>
@@ -3891,7 +7391,7 @@
       </p:grpSpPr>
       <p:sp>
         <p:nvSpPr>
-          <p:cNvPr id="2" name="Text 0"/>
+          <p:cNvPr id="3" name="Text 0"/>
           <p:cNvSpPr txBox="1"/>
           <p:nvPr/>
         </p:nvSpPr>
@@ -3975,7 +7475,7 @@
         </p:nvSpPr>
         <p:spPr>
           <a:xfrm>
-            <a:off x="502920" y="1280160"/>
+            <a:off x="502920" y="1188720"/>
             <a:ext cx="457200" cy="457200"/>
           </a:xfrm>
           <a:prstGeom prst="ellipse">
@@ -4007,7 +7507,7 @@
         </p:nvSpPr>
         <p:spPr>
           <a:xfrm>
-            <a:off x="502920" y="1280160"/>
+            <a:off x="502920" y="1188720"/>
             <a:ext cx="457200" cy="457200"/>
           </a:xfrm>
           <a:prstGeom prst="rect">
@@ -4046,7 +7546,7 @@
         </p:nvSpPr>
         <p:spPr>
           <a:xfrm>
-            <a:off x="1188720" y="1234440"/>
+            <a:off x="1188720" y="1143000"/>
             <a:ext cx="5120640" cy="548640"/>
           </a:xfrm>
           <a:prstGeom prst="rect">
@@ -4085,7 +7585,7 @@
         </p:nvSpPr>
         <p:spPr>
           <a:xfrm>
-            <a:off x="502920" y="2057400"/>
+            <a:off x="502920" y="1752600"/>
             <a:ext cx="457200" cy="457200"/>
           </a:xfrm>
           <a:prstGeom prst="ellipse">
@@ -4117,7 +7617,7 @@
         </p:nvSpPr>
         <p:spPr>
           <a:xfrm>
-            <a:off x="502920" y="2057400"/>
+            <a:off x="502920" y="1752600"/>
             <a:ext cx="457200" cy="457200"/>
           </a:xfrm>
           <a:prstGeom prst="rect">
@@ -4156,7 +7656,7 @@
         </p:nvSpPr>
         <p:spPr>
           <a:xfrm>
-            <a:off x="1188720" y="2011680"/>
+            <a:off x="1188720" y="1706880"/>
             <a:ext cx="5120640" cy="548640"/>
           </a:xfrm>
           <a:prstGeom prst="rect">
@@ -4181,51 +7681,7 @@
                 <a:ea typeface="Calibri" pitchFamily="34" charset="-122"/>
                 <a:cs typeface="Calibri" pitchFamily="34" charset="-120"/>
               </a:rPr>
-              <a:t>Dejar </a:t>
-            </a:r>
-            <a:r>
-              <a:rPr lang="es-UY" sz="1500" b="1" noProof="0" dirty="0">
-                <a:solidFill>
-                  <a:srgbClr val="2E0A4E"/>
-                </a:solidFill>
-                <a:latin typeface="Calibri" pitchFamily="34" charset="0"/>
-                <a:ea typeface="Calibri" pitchFamily="34" charset="-122"/>
-                <a:cs typeface="Calibri" pitchFamily="34" charset="-120"/>
-              </a:rPr>
-              <a:t>R, </a:t>
-            </a:r>
-            <a:r>
-              <a:rPr lang="es-UY" sz="1500" b="1" noProof="0" dirty="0" err="1">
-                <a:solidFill>
-                  <a:srgbClr val="2E0A4E"/>
-                </a:solidFill>
-                <a:latin typeface="Calibri" pitchFamily="34" charset="0"/>
-                <a:ea typeface="Calibri" pitchFamily="34" charset="-122"/>
-                <a:cs typeface="Calibri" pitchFamily="34" charset="-120"/>
-              </a:rPr>
-              <a:t>RStudio</a:t>
-            </a:r>
-            <a:r>
-              <a:rPr lang="es-UY" sz="1500" b="1" noProof="0" dirty="0">
-                <a:solidFill>
-                  <a:srgbClr val="2E0A4E"/>
-                </a:solidFill>
-                <a:latin typeface="Calibri" pitchFamily="34" charset="0"/>
-                <a:ea typeface="Calibri" pitchFamily="34" charset="-122"/>
-                <a:cs typeface="Calibri" pitchFamily="34" charset="-120"/>
-              </a:rPr>
-              <a:t> y los paquetes </a:t>
-            </a:r>
-            <a:r>
-              <a:rPr lang="es-UY" sz="1500" noProof="0" dirty="0">
-                <a:solidFill>
-                  <a:srgbClr val="2E0A4E"/>
-                </a:solidFill>
-                <a:latin typeface="Calibri" pitchFamily="34" charset="0"/>
-                <a:ea typeface="Calibri" pitchFamily="34" charset="-122"/>
-                <a:cs typeface="Calibri" pitchFamily="34" charset="-120"/>
-              </a:rPr>
-              <a:t>instalados y funcionando.</a:t>
+              <a:t>Ver Shinys ya desplegadas para entender qué se puede hacer con la herramienta.</a:t>
             </a:r>
             <a:endParaRPr lang="es-UY" sz="1500" noProof="0" dirty="0"/>
           </a:p>
@@ -4239,7 +7695,7 @@
         </p:nvSpPr>
         <p:spPr>
           <a:xfrm>
-            <a:off x="502920" y="2834640"/>
+            <a:off x="502920" y="2316480"/>
             <a:ext cx="457200" cy="457200"/>
           </a:xfrm>
           <a:prstGeom prst="ellipse">
@@ -4271,7 +7727,7 @@
         </p:nvSpPr>
         <p:spPr>
           <a:xfrm>
-            <a:off x="502920" y="2834640"/>
+            <a:off x="502920" y="2316480"/>
             <a:ext cx="457200" cy="457200"/>
           </a:xfrm>
           <a:prstGeom prst="rect">
@@ -4310,7 +7766,7 @@
         </p:nvSpPr>
         <p:spPr>
           <a:xfrm>
-            <a:off x="1188720" y="2788920"/>
+            <a:off x="1188720" y="2270760"/>
             <a:ext cx="5120640" cy="548640"/>
           </a:xfrm>
           <a:prstGeom prst="rect">
@@ -4335,29 +7791,7 @@
                 <a:ea typeface="Calibri" pitchFamily="34" charset="-122"/>
                 <a:cs typeface="Calibri" pitchFamily="34" charset="-120"/>
               </a:rPr>
-              <a:t>Ver Shinys </a:t>
-            </a:r>
-            <a:r>
-              <a:rPr lang="es-UY" sz="1500" b="1" noProof="0" dirty="0">
-                <a:solidFill>
-                  <a:srgbClr val="2E0A4E"/>
-                </a:solidFill>
-                <a:latin typeface="Calibri" pitchFamily="34" charset="0"/>
-                <a:ea typeface="Calibri" pitchFamily="34" charset="-122"/>
-                <a:cs typeface="Calibri" pitchFamily="34" charset="-120"/>
-              </a:rPr>
-              <a:t>ya desplegadas </a:t>
-            </a:r>
-            <a:r>
-              <a:rPr lang="es-UY" sz="1500" noProof="0" dirty="0">
-                <a:solidFill>
-                  <a:srgbClr val="2E0A4E"/>
-                </a:solidFill>
-                <a:latin typeface="Calibri" pitchFamily="34" charset="0"/>
-                <a:ea typeface="Calibri" pitchFamily="34" charset="-122"/>
-                <a:cs typeface="Calibri" pitchFamily="34" charset="-120"/>
-              </a:rPr>
-              <a:t>para entender qué se puede hacer con la herramienta.</a:t>
+              <a:t>Dejar R, RStudio y los paquetes instalados y funcionando.</a:t>
             </a:r>
             <a:endParaRPr lang="es-UY" sz="1500" noProof="0" dirty="0"/>
           </a:p>
@@ -4371,7 +7805,7 @@
         </p:nvSpPr>
         <p:spPr>
           <a:xfrm>
-            <a:off x="502920" y="3611880"/>
+            <a:off x="502920" y="2880360"/>
             <a:ext cx="457200" cy="457200"/>
           </a:xfrm>
           <a:prstGeom prst="ellipse">
@@ -4403,7 +7837,7 @@
         </p:nvSpPr>
         <p:spPr>
           <a:xfrm>
-            <a:off x="502920" y="3611880"/>
+            <a:off x="502920" y="2880360"/>
             <a:ext cx="457200" cy="457200"/>
           </a:xfrm>
           <a:prstGeom prst="rect">
@@ -4442,7 +7876,7 @@
         </p:nvSpPr>
         <p:spPr>
           <a:xfrm>
-            <a:off x="1188720" y="3566160"/>
+            <a:off x="1188720" y="2834640"/>
             <a:ext cx="5120640" cy="548640"/>
           </a:xfrm>
           <a:prstGeom prst="rect">
@@ -4467,9 +7901,428 @@
                 <a:ea typeface="Calibri" pitchFamily="34" charset="-122"/>
                 <a:cs typeface="Calibri" pitchFamily="34" charset="-120"/>
               </a:rPr>
-              <a:t>Empezar a pensar el corpus de datos que c/u usará en este curso</a:t>
+              <a:t>Conocer RStudio y lo básico de R, objetos, funciones y tablas.</a:t>
             </a:r>
             <a:endParaRPr lang="es-UY" sz="1500" noProof="0" dirty="0"/>
+          </a:p>
+        </p:txBody>
+      </p:sp>
+      <p:sp>
+        <p:nvSpPr>
+          <p:cNvPr id="17" name="Shape 12"/>
+          <p:cNvSpPr/>
+          <p:nvPr/>
+        </p:nvSpPr>
+        <p:spPr>
+          <a:xfrm>
+            <a:off x="502920" y="3444240"/>
+            <a:ext cx="457200" cy="457200"/>
+          </a:xfrm>
+          <a:prstGeom prst="ellipse">
+            <a:avLst/>
+          </a:prstGeom>
+          <a:solidFill>
+            <a:srgbClr val="5A189A"/>
+          </a:solidFill>
+          <a:ln w="12700">
+            <a:solidFill>
+              <a:srgbClr val="5A189A"/>
+            </a:solidFill>
+            <a:prstDash val="solid"/>
+          </a:ln>
+        </p:spPr>
+        <p:txBody>
+          <a:bodyPr/>
+          <a:lstStyle/>
+          <a:p>
+            <a:endParaRPr lang="es-UY" noProof="0" dirty="0"/>
+          </a:p>
+        </p:txBody>
+      </p:sp>
+      <p:sp>
+        <p:nvSpPr>
+          <p:cNvPr id="18" name="Text 13"/>
+          <p:cNvSpPr txBox="1"/>
+          <p:nvPr/>
+        </p:nvSpPr>
+        <p:spPr>
+          <a:xfrm>
+            <a:off x="502920" y="3444240"/>
+            <a:ext cx="457200" cy="457200"/>
+          </a:xfrm>
+          <a:prstGeom prst="rect">
+            <a:avLst/>
+          </a:prstGeom>
+          <a:noFill/>
+          <a:ln/>
+        </p:spPr>
+        <p:txBody>
+          <a:bodyPr wrap="square" lIns="0" tIns="0" rIns="0" bIns="0" rtlCol="0" anchor="ctr"/>
+          <a:lstStyle/>
+          <a:p>
+            <a:pPr marL="0" indent="0" algn="ctr">
+              <a:buNone/>
+            </a:pPr>
+            <a:r>
+              <a:rPr lang="es-UY" sz="1600" b="1" noProof="0" dirty="0">
+                <a:solidFill>
+                  <a:srgbClr val="FFFFFF"/>
+                </a:solidFill>
+                <a:latin typeface="Oswald" pitchFamily="34" charset="0"/>
+                <a:ea typeface="Oswald" pitchFamily="34" charset="-122"/>
+                <a:cs typeface="Oswald" pitchFamily="34" charset="-120"/>
+              </a:rPr>
+              <a:t>5</a:t>
+            </a:r>
+            <a:endParaRPr lang="es-UY" sz="1600" noProof="0" dirty="0"/>
+          </a:p>
+        </p:txBody>
+      </p:sp>
+      <p:sp>
+        <p:nvSpPr>
+          <p:cNvPr id="19" name="Text 14"/>
+          <p:cNvSpPr txBox="1"/>
+          <p:nvPr/>
+        </p:nvSpPr>
+        <p:spPr>
+          <a:xfrm>
+            <a:off x="1188720" y="3398520"/>
+            <a:ext cx="5120640" cy="548640"/>
+          </a:xfrm>
+          <a:prstGeom prst="rect">
+            <a:avLst/>
+          </a:prstGeom>
+          <a:noFill/>
+          <a:ln/>
+        </p:spPr>
+        <p:txBody>
+          <a:bodyPr wrap="square" lIns="0" tIns="0" rIns="0" bIns="0" rtlCol="0" anchor="ctr"/>
+          <a:lstStyle/>
+          <a:p>
+            <a:pPr marL="0" indent="0">
+              <a:buNone/>
+            </a:pPr>
+            <a:r>
+              <a:rPr lang="es-UY" sz="1500" noProof="0" dirty="0">
+                <a:solidFill>
+                  <a:srgbClr val="2E0A4E"/>
+                </a:solidFill>
+                <a:latin typeface="Calibri" pitchFamily="34" charset="0"/>
+                <a:ea typeface="Calibri" pitchFamily="34" charset="-122"/>
+                <a:cs typeface="Calibri" pitchFamily="34" charset="-120"/>
+              </a:rPr>
+              <a:t>Correr la primera app con datos y entender cómo está construida.</a:t>
+            </a:r>
+            <a:endParaRPr lang="es-UY" sz="1500" noProof="0" dirty="0"/>
+          </a:p>
+        </p:txBody>
+      </p:sp>
+      <p:sp>
+        <p:nvSpPr>
+          <p:cNvPr id="20" name="Shape 12"/>
+          <p:cNvSpPr/>
+          <p:nvPr/>
+        </p:nvSpPr>
+        <p:spPr>
+          <a:xfrm>
+            <a:off x="502920" y="4008120"/>
+            <a:ext cx="457200" cy="457200"/>
+          </a:xfrm>
+          <a:prstGeom prst="ellipse">
+            <a:avLst/>
+          </a:prstGeom>
+          <a:solidFill>
+            <a:srgbClr val="5A189A"/>
+          </a:solidFill>
+          <a:ln w="12700">
+            <a:solidFill>
+              <a:srgbClr val="5A189A"/>
+            </a:solidFill>
+            <a:prstDash val="solid"/>
+          </a:ln>
+        </p:spPr>
+        <p:txBody>
+          <a:bodyPr/>
+          <a:lstStyle/>
+          <a:p>
+            <a:endParaRPr lang="es-UY" noProof="0" dirty="0"/>
+          </a:p>
+        </p:txBody>
+      </p:sp>
+      <p:sp>
+        <p:nvSpPr>
+          <p:cNvPr id="21" name="Text 13"/>
+          <p:cNvSpPr txBox="1"/>
+          <p:nvPr/>
+        </p:nvSpPr>
+        <p:spPr>
+          <a:xfrm>
+            <a:off x="502920" y="4008120"/>
+            <a:ext cx="457200" cy="457200"/>
+          </a:xfrm>
+          <a:prstGeom prst="rect">
+            <a:avLst/>
+          </a:prstGeom>
+          <a:noFill/>
+          <a:ln/>
+        </p:spPr>
+        <p:txBody>
+          <a:bodyPr wrap="square" lIns="0" tIns="0" rIns="0" bIns="0" rtlCol="0" anchor="ctr"/>
+          <a:lstStyle/>
+          <a:p>
+            <a:pPr marL="0" indent="0" algn="ctr">
+              <a:buNone/>
+            </a:pPr>
+            <a:r>
+              <a:rPr lang="es-UY" sz="1600" b="1" noProof="0" dirty="0">
+                <a:solidFill>
+                  <a:srgbClr val="FFFFFF"/>
+                </a:solidFill>
+                <a:latin typeface="Oswald" pitchFamily="34" charset="0"/>
+                <a:ea typeface="Oswald" pitchFamily="34" charset="-122"/>
+                <a:cs typeface="Oswald" pitchFamily="34" charset="-120"/>
+              </a:rPr>
+              <a:t>6</a:t>
+            </a:r>
+            <a:endParaRPr lang="es-UY" sz="1600" noProof="0" dirty="0"/>
+          </a:p>
+        </p:txBody>
+      </p:sp>
+      <p:sp>
+        <p:nvSpPr>
+          <p:cNvPr id="22" name="Text 14"/>
+          <p:cNvSpPr txBox="1"/>
+          <p:nvPr/>
+        </p:nvSpPr>
+        <p:spPr>
+          <a:xfrm>
+            <a:off x="1188720" y="3962400"/>
+            <a:ext cx="5120640" cy="548640"/>
+          </a:xfrm>
+          <a:prstGeom prst="rect">
+            <a:avLst/>
+          </a:prstGeom>
+          <a:noFill/>
+          <a:ln/>
+        </p:spPr>
+        <p:txBody>
+          <a:bodyPr wrap="square" lIns="0" tIns="0" rIns="0" bIns="0" rtlCol="0" anchor="ctr"/>
+          <a:lstStyle/>
+          <a:p>
+            <a:pPr marL="0" indent="0">
+              <a:buNone/>
+            </a:pPr>
+            <a:r>
+              <a:rPr lang="es-UY" sz="1500" noProof="0" dirty="0">
+                <a:solidFill>
+                  <a:srgbClr val="2E0A4E"/>
+                </a:solidFill>
+                <a:latin typeface="Calibri" pitchFamily="34" charset="0"/>
+                <a:ea typeface="Calibri" pitchFamily="34" charset="-122"/>
+                <a:cs typeface="Calibri" pitchFamily="34" charset="-120"/>
+              </a:rPr>
+              <a:t>Empezar a pensar el corpus de datos que cada quien usará en el curso.</a:t>
+            </a:r>
+            <a:endParaRPr lang="es-UY" sz="1500" noProof="0" dirty="0"/>
+          </a:p>
+        </p:txBody>
+      </p:sp>
+    </p:spTree>
+  </p:cSld>
+  <p:clrMapOvr>
+    <a:masterClrMapping/>
+  </p:clrMapOvr>
+</p:sld>
+</file>
+
+<file path=ppt/slides/slide20.xml><?xml version="1.0" encoding="utf-8"?>
+<p:sld xmlns:a="http://schemas.openxmlformats.org/drawingml/2006/main" xmlns:p="http://schemas.openxmlformats.org/presentationml/2006/main" xmlns:r="http://schemas.openxmlformats.org/officeDocument/2006/relationships">
+  <p:cSld>
+    <p:bg>
+      <p:bgPr>
+        <a:solidFill>
+          <a:srgbClr val="2E0A4E"/>
+        </a:solidFill>
+        <a:effectLst/>
+      </p:bgPr>
+    </p:bg>
+    <p:spTree>
+      <p:nvGrpSpPr>
+        <p:cNvPr id="1" name=""/>
+        <p:cNvGrpSpPr/>
+        <p:nvPr/>
+      </p:nvGrpSpPr>
+      <p:grpSpPr/>
+      <p:sp>
+        <p:nvSpPr>
+          <p:cNvPr id="3" name="Text 1"/>
+          <p:cNvSpPr txBox="1"/>
+          <p:nvPr/>
+        </p:nvSpPr>
+        <p:spPr>
+          <a:xfrm>
+            <a:off x="861646" y="327074"/>
+            <a:ext cx="7315200" cy="1463040"/>
+          </a:xfrm>
+          <a:prstGeom prst="rect">
+            <a:avLst/>
+          </a:prstGeom>
+          <a:noFill/>
+          <a:ln/>
+        </p:spPr>
+        <p:txBody>
+          <a:bodyPr wrap="square" lIns="0" tIns="0" rIns="0" bIns="0" rtlCol="0" anchor="t"/>
+          <a:lstStyle/>
+          <a:p>
+            <a:pPr marL="0" indent="0">
+              <a:buNone/>
+            </a:pPr>
+            <a:r>
+              <a:rPr lang="en-US" sz="3000" b="1" dirty="0" err="1">
+                <a:solidFill>
+                  <a:srgbClr val="FFFFFF"/>
+                </a:solidFill>
+                <a:latin typeface="Oswald" pitchFamily="34" charset="0"/>
+                <a:ea typeface="Oswald" pitchFamily="34" charset="-122"/>
+                <a:cs typeface="Oswald" pitchFamily="34" charset="-120"/>
+              </a:rPr>
+              <a:t>Próxima clase, la primera interacción.</a:t>
+            </a:r>
+            <a:endParaRPr lang="en-US" sz="3000" dirty="0"/>
+          </a:p>
+        </p:txBody>
+      </p:sp>
+      <p:sp>
+        <p:nvSpPr>
+          <p:cNvPr id="6" name="Text 0">
+            <a:extLst>
+              <a:ext uri="{FF2B5EF4-FFF2-40B4-BE49-F238E27FC236}">
+                <a16:creationId xmlns:a16="http://schemas.microsoft.com/office/drawing/2014/main" id="{5DEF2027-0747-FA2E-1227-2DA6BFBD4726}"/>
+              </a:ext>
+            </a:extLst>
+          </p:cNvPr>
+          <p:cNvSpPr txBox="1"/>
+          <p:nvPr/>
+        </p:nvSpPr>
+        <p:spPr>
+          <a:xfrm>
+            <a:off x="777240" y="1470074"/>
+            <a:ext cx="7040880" cy="640080"/>
+          </a:xfrm>
+          <a:prstGeom prst="rect">
+            <a:avLst/>
+          </a:prstGeom>
+          <a:noFill/>
+          <a:ln/>
+        </p:spPr>
+        <p:txBody>
+          <a:bodyPr wrap="square" lIns="0" tIns="0" rIns="0" bIns="0" rtlCol="0" anchor="ctr"/>
+          <a:lstStyle/>
+          <a:p>
+            <a:pPr marL="0" indent="0">
+              <a:buNone/>
+            </a:pPr>
+            <a:r>
+              <a:rPr lang="en-US" sz="3000" b="1" dirty="0">
+                <a:solidFill>
+                  <a:schemeClr val="bg1"/>
+                </a:solidFill>
+                <a:latin typeface="Oswald" pitchFamily="34" charset="0"/>
+                <a:ea typeface="Oswald" pitchFamily="34" charset="-122"/>
+                <a:cs typeface="Oswald" pitchFamily="34" charset="-120"/>
+              </a:rPr>
+              <a:t>Ejercicio propuesto</a:t>
+            </a:r>
+            <a:endParaRPr lang="en-US" sz="3000" dirty="0">
+              <a:solidFill>
+                <a:schemeClr val="bg1"/>
+              </a:solidFill>
+            </a:endParaRPr>
+          </a:p>
+        </p:txBody>
+      </p:sp>
+      <p:sp>
+        <p:nvSpPr>
+          <p:cNvPr id="8" name="Shape 3">
+            <a:extLst>
+              <a:ext uri="{FF2B5EF4-FFF2-40B4-BE49-F238E27FC236}">
+                <a16:creationId xmlns:a16="http://schemas.microsoft.com/office/drawing/2014/main" id="{B76805F3-EB20-5347-6375-5560CC710DE1}"/>
+              </a:ext>
+            </a:extLst>
+          </p:cNvPr>
+          <p:cNvSpPr/>
+          <p:nvPr/>
+        </p:nvSpPr>
+        <p:spPr>
+          <a:xfrm>
+            <a:off x="946053" y="2198334"/>
+            <a:ext cx="6756009" cy="1670025"/>
+          </a:xfrm>
+          <a:prstGeom prst="roundRect">
+            <a:avLst>
+              <a:gd name="adj" fmla="val 2727"/>
+            </a:avLst>
+          </a:prstGeom>
+          <a:solidFill>
+            <a:srgbClr val="F4ECFB"/>
+          </a:solidFill>
+          <a:ln w="12700">
+            <a:solidFill>
+              <a:srgbClr val="F4ECFB"/>
+            </a:solidFill>
+            <a:prstDash val="solid"/>
+          </a:ln>
+        </p:spPr>
+        <p:txBody>
+          <a:bodyPr/>
+          <a:lstStyle/>
+          <a:p>
+            <a:endParaRPr lang="en-US"/>
+          </a:p>
+        </p:txBody>
+      </p:sp>
+      <p:sp>
+        <p:nvSpPr>
+          <p:cNvPr id="10" name="Text 4">
+            <a:extLst>
+              <a:ext uri="{FF2B5EF4-FFF2-40B4-BE49-F238E27FC236}">
+                <a16:creationId xmlns:a16="http://schemas.microsoft.com/office/drawing/2014/main" id="{B7E35F91-C4B0-63AC-AA54-9A7227871712}"/>
+              </a:ext>
+            </a:extLst>
+          </p:cNvPr>
+          <p:cNvSpPr txBox="1"/>
+          <p:nvPr/>
+        </p:nvSpPr>
+        <p:spPr>
+          <a:xfrm>
+            <a:off x="1311813" y="2381214"/>
+            <a:ext cx="6148727" cy="1366384"/>
+          </a:xfrm>
+          <a:prstGeom prst="rect">
+            <a:avLst/>
+          </a:prstGeom>
+          <a:noFill/>
+          <a:ln/>
+        </p:spPr>
+        <p:txBody>
+          <a:bodyPr wrap="square" lIns="0" tIns="0" rIns="0" bIns="0" rtlCol="0" anchor="ctr"/>
+          <a:lstStyle/>
+          <a:p>
+            <a:pPr marL="0" indent="0">
+              <a:buNone/>
+            </a:pPr>
+            <a:r>
+              <a:rPr lang="en-US" sz="1700" dirty="0">
+                <a:solidFill>
+                  <a:srgbClr val="2E0A4E"/>
+                </a:solidFill>
+                <a:latin typeface="Calibri" pitchFamily="34" charset="0"/>
+                <a:ea typeface="Calibri" pitchFamily="34" charset="-122"/>
+                <a:cs typeface="Calibri" pitchFamily="34" charset="-120"/>
+              </a:rPr>
+              <a:t>Cambiá TITULO en la zona de pruebas y agregá un p() con tu nombre. Después corré primeros_pasos.R de punta a punta.</a:t>
+            </a:r>
+            <a:endParaRPr lang="en-US" sz="1700" dirty="0"/>
           </a:p>
         </p:txBody>
       </p:sp>
@@ -4539,7 +8392,7 @@
                 <a:ea typeface="Oswald" pitchFamily="34" charset="-122"/>
                 <a:cs typeface="Oswald" pitchFamily="34" charset="-120"/>
               </a:rPr>
-              <a:t>Programa - 10 clases</a:t>
+              <a:t>Programa - 7 clases</a:t>
             </a:r>
             <a:endParaRPr lang="es-UY" sz="3000" noProof="0" dirty="0"/>
           </a:p>
@@ -4561,7 +8414,7 @@
         </p:nvGraphicFramePr>
         <p:xfrm>
           <a:off x="502920" y="1188720"/>
-          <a:ext cx="8138160" cy="3291840"/>
+          <a:ext cx="8138160" cy="2468880"/>
         </p:xfrm>
         <a:graphic>
           <a:graphicData uri="http://schemas.openxmlformats.org/drawingml/2006/table">
@@ -4800,7 +8653,7 @@
                           <a:ea typeface="Calibri" pitchFamily="34" charset="-122"/>
                           <a:cs typeface="Calibri" pitchFamily="34" charset="-120"/>
                         </a:rPr>
-                        <a:t>Presentación del curso</a:t>
+                        <a:t>Presentación y primeros pasos</a:t>
                       </a:r>
                       <a:endParaRPr lang="es-UY" sz="1000" noProof="0" dirty="0">
                         <a:highlight>
@@ -4850,7 +8703,7 @@
                           <a:ea typeface="Calibri" pitchFamily="34" charset="-122"/>
                           <a:cs typeface="Calibri" pitchFamily="34" charset="-120"/>
                         </a:rPr>
-                        <a:t>Programa, instalación y ejemplos.</a:t>
+                        <a:t>Programa, instalación, R básico y la primera app con datos.</a:t>
                       </a:r>
                       <a:endParaRPr lang="es-UY" sz="1000" noProof="0" dirty="0">
                         <a:highlight>
@@ -4883,163 +8736,6 @@
                 <a:extLst>
                   <a:ext uri="{0D108BD9-81ED-4DB2-BD59-A6C34878D82A}">
                     <a16:rowId xmlns:a16="http://schemas.microsoft.com/office/drawing/2014/main" val="10001"/>
-                  </a:ext>
-                </a:extLst>
-              </a:tr>
-              <a:tr h="274320">
-                <a:tc>
-                  <a:txBody>
-                    <a:bodyPr/>
-                    <a:lstStyle/>
-                    <a:p>
-                      <a:pPr marL="0" indent="0">
-                        <a:buNone/>
-                      </a:pPr>
-                      <a:r>
-                        <a:rPr lang="es-UY" sz="1000" b="1" noProof="0" dirty="0">
-                          <a:solidFill>
-                            <a:srgbClr val="2E0A4E"/>
-                          </a:solidFill>
-                          <a:highlight>
-                            <a:srgbClr val="FFFF00"/>
-                          </a:highlight>
-                          <a:latin typeface="Calibri" pitchFamily="34" charset="0"/>
-                          <a:ea typeface="Calibri" pitchFamily="34" charset="-122"/>
-                          <a:cs typeface="Calibri" pitchFamily="34" charset="-120"/>
-                        </a:rPr>
-                        <a:t>1b</a:t>
-                      </a:r>
-                      <a:endParaRPr lang="es-UY" sz="1000" noProof="0" dirty="0">
-                        <a:highlight>
-                          <a:srgbClr val="FFFF00"/>
-                        </a:highlight>
-                        <a:latin typeface="Calibri" charset="0"/>
-                        <a:ea typeface="Calibri" charset="0"/>
-                        <a:cs typeface="Calibri" charset="0"/>
-                      </a:endParaRPr>
-                    </a:p>
-                  </a:txBody>
-                  <a:tcPr marL="45720" marR="45720" anchor="ctr">
-                    <a:lnL w="0" cap="flat" cmpd="sng" algn="ctr">
-                      <a:noFill/>
-                    </a:lnL>
-                    <a:lnR w="0" cap="flat" cmpd="sng" algn="ctr">
-                      <a:noFill/>
-                    </a:lnR>
-                    <a:lnT w="0" cap="flat" cmpd="sng" algn="ctr">
-                      <a:noFill/>
-                    </a:lnT>
-                    <a:lnB w="0" cap="flat" cmpd="sng" algn="ctr">
-                      <a:noFill/>
-                    </a:lnB>
-                    <a:solidFill>
-                      <a:srgbClr val="FFFFFF"/>
-                    </a:solidFill>
-                  </a:tcPr>
-                </a:tc>
-                <a:tc>
-                  <a:txBody>
-                    <a:bodyPr/>
-                    <a:lstStyle/>
-                    <a:p>
-                      <a:pPr marL="0" indent="0">
-                        <a:buNone/>
-                      </a:pPr>
-                      <a:r>
-                        <a:rPr lang="es-UY" sz="1000" noProof="0" dirty="0">
-                          <a:solidFill>
-                            <a:srgbClr val="2E0A4E"/>
-                          </a:solidFill>
-                          <a:highlight>
-                            <a:srgbClr val="FFFF00"/>
-                          </a:highlight>
-                          <a:latin typeface="Calibri" pitchFamily="34" charset="0"/>
-                          <a:ea typeface="Calibri" pitchFamily="34" charset="-122"/>
-                          <a:cs typeface="Calibri" pitchFamily="34" charset="-120"/>
-                        </a:rPr>
-                        <a:t>Refuerzo de fundamentos de R (opcional)</a:t>
-                      </a:r>
-                      <a:endParaRPr lang="es-UY" sz="1000" noProof="0" dirty="0">
-                        <a:highlight>
-                          <a:srgbClr val="FFFF00"/>
-                        </a:highlight>
-                        <a:latin typeface="Calibri" charset="0"/>
-                        <a:ea typeface="Calibri" charset="0"/>
-                        <a:cs typeface="Calibri" charset="0"/>
-                      </a:endParaRPr>
-                    </a:p>
-                  </a:txBody>
-                  <a:tcPr marL="45720" marR="45720" anchor="ctr">
-                    <a:lnL w="0" cap="flat" cmpd="sng" algn="ctr">
-                      <a:noFill/>
-                    </a:lnL>
-                    <a:lnR w="0" cap="flat" cmpd="sng" algn="ctr">
-                      <a:noFill/>
-                    </a:lnR>
-                    <a:lnT w="0" cap="flat" cmpd="sng" algn="ctr">
-                      <a:noFill/>
-                    </a:lnT>
-                    <a:lnB w="0" cap="flat" cmpd="sng" algn="ctr">
-                      <a:noFill/>
-                    </a:lnB>
-                    <a:solidFill>
-                      <a:srgbClr val="FFFFFF"/>
-                    </a:solidFill>
-                  </a:tcPr>
-                </a:tc>
-                <a:tc>
-                  <a:txBody>
-                    <a:bodyPr/>
-                    <a:lstStyle/>
-                    <a:p>
-                      <a:pPr marL="0" indent="0">
-                        <a:buNone/>
-                      </a:pPr>
-                      <a:r>
-                        <a:rPr lang="es-UY" sz="1000" noProof="0" dirty="0">
-                          <a:solidFill>
-                            <a:srgbClr val="2E0A4E"/>
-                          </a:solidFill>
-                          <a:highlight>
-                            <a:srgbClr val="FFFF00"/>
-                          </a:highlight>
-                          <a:latin typeface="Calibri" pitchFamily="34" charset="0"/>
-                          <a:ea typeface="Calibri" pitchFamily="34" charset="-122"/>
-                          <a:cs typeface="Calibri" pitchFamily="34" charset="-120"/>
-                        </a:rPr>
-                        <a:t>Nivelación. Reforzar conceptos principales</a:t>
-                      </a:r>
-                      <a:endParaRPr lang="es-UY" sz="1000" noProof="0" dirty="0">
-                        <a:highlight>
-                          <a:srgbClr val="FFFF00"/>
-                        </a:highlight>
-                        <a:latin typeface="Calibri" charset="0"/>
-                        <a:ea typeface="Calibri" charset="0"/>
-                        <a:cs typeface="Calibri" charset="0"/>
-                      </a:endParaRPr>
-                    </a:p>
-                  </a:txBody>
-                  <a:tcPr marL="45720" marR="45720" anchor="ctr">
-                    <a:lnL w="0" cap="flat" cmpd="sng" algn="ctr">
-                      <a:noFill/>
-                    </a:lnL>
-                    <a:lnR w="0" cap="flat" cmpd="sng" algn="ctr">
-                      <a:noFill/>
-                    </a:lnR>
-                    <a:lnT w="0" cap="flat" cmpd="sng" algn="ctr">
-                      <a:noFill/>
-                    </a:lnT>
-                    <a:lnB w="0" cap="flat" cmpd="sng" algn="ctr">
-                      <a:noFill/>
-                    </a:lnB>
-                    <a:solidFill>
-                      <a:srgbClr val="FFFFFF"/>
-                    </a:solidFill>
-                  </a:tcPr>
-                </a:tc>
-                <a:extLst>
-                  <a:ext uri="{0D108BD9-81ED-4DB2-BD59-A6C34878D82A}">
-                    <a16:rowId xmlns:a16="http://schemas.microsoft.com/office/drawing/2014/main" val="1207923196"/>
                   </a:ext>
                 </a:extLst>
               </a:tr>
@@ -5105,29 +8801,7 @@
                           <a:ea typeface="Calibri" pitchFamily="34" charset="-122"/>
                           <a:cs typeface="Calibri" pitchFamily="34" charset="-120"/>
                         </a:rPr>
-                        <a:t>Bases de </a:t>
-                      </a:r>
-                      <a:r>
-                        <a:rPr lang="es-UY" sz="1000" noProof="0" dirty="0" err="1">
-                          <a:solidFill>
-                            <a:srgbClr val="2E0A4E"/>
-                          </a:solidFill>
-                          <a:latin typeface="Calibri" pitchFamily="34" charset="0"/>
-                          <a:ea typeface="Calibri" pitchFamily="34" charset="-122"/>
-                          <a:cs typeface="Calibri" pitchFamily="34" charset="-120"/>
-                        </a:rPr>
-                        <a:t>RStudio</a:t>
-                      </a:r>
-                      <a:r>
-                        <a:rPr lang="es-UY" sz="1000" noProof="0" dirty="0">
-                          <a:solidFill>
-                            <a:srgbClr val="2E0A4E"/>
-                          </a:solidFill>
-                          <a:latin typeface="Calibri" pitchFamily="34" charset="0"/>
-                          <a:ea typeface="Calibri" pitchFamily="34" charset="-122"/>
-                          <a:cs typeface="Calibri" pitchFamily="34" charset="-120"/>
-                        </a:rPr>
-                        <a:t> y Shiny</a:t>
+                        <a:t>Bases de RStudio y Shiny</a:t>
                       </a:r>
                       <a:endParaRPr lang="es-UY" sz="1000" noProof="0" dirty="0">
                         <a:latin typeface="Calibri" charset="0"/>
@@ -5171,40 +8845,7 @@
                           <a:ea typeface="Calibri" pitchFamily="34" charset="-122"/>
                           <a:cs typeface="Calibri" pitchFamily="34" charset="-120"/>
                         </a:rPr>
-                        <a:t>ui</a:t>
-                      </a:r>
-                      <a:r>
-                        <a:rPr lang="es-UY" sz="1000" noProof="0" dirty="0">
-                          <a:solidFill>
-                            <a:srgbClr val="2E0A4E"/>
-                          </a:solidFill>
-                          <a:latin typeface="Calibri" pitchFamily="34" charset="0"/>
-                          <a:ea typeface="Calibri" pitchFamily="34" charset="-122"/>
-                          <a:cs typeface="Calibri" pitchFamily="34" charset="-120"/>
-                        </a:rPr>
-                        <a:t>, server y </a:t>
-                      </a:r>
-                      <a:r>
-                        <a:rPr lang="es-UY" sz="1000" noProof="0" dirty="0" err="1">
-                          <a:solidFill>
-                            <a:srgbClr val="2E0A4E"/>
-                          </a:solidFill>
-                          <a:latin typeface="Calibri" pitchFamily="34" charset="0"/>
-                          <a:ea typeface="Calibri" pitchFamily="34" charset="-122"/>
-                          <a:cs typeface="Calibri" pitchFamily="34" charset="-120"/>
-                        </a:rPr>
-                        <a:t>shinyApp</a:t>
-                      </a:r>
-                      <a:r>
-                        <a:rPr lang="es-UY" sz="1000" noProof="0" dirty="0">
-                          <a:solidFill>
-                            <a:srgbClr val="2E0A4E"/>
-                          </a:solidFill>
-                          <a:latin typeface="Calibri" pitchFamily="34" charset="0"/>
-                          <a:ea typeface="Calibri" pitchFamily="34" charset="-122"/>
-                          <a:cs typeface="Calibri" pitchFamily="34" charset="-120"/>
-                        </a:rPr>
-                        <a:t>(). Un menú que cambia un texto.</a:t>
+                        <a:t>ui, server y shinyApp(). Un menú que cambia un texto.</a:t>
                       </a:r>
                       <a:endParaRPr lang="es-UY" sz="1000" noProof="0" dirty="0">
                         <a:latin typeface="Calibri" charset="0"/>
@@ -5278,7 +8919,7 @@
                       <a:noFill/>
                     </a:lnB>
                     <a:solidFill>
-                      <a:srgbClr val="F4ECFB"/>
+                      <a:srgbClr val="FFFFFF"/>
                     </a:solidFill>
                   </a:tcPr>
                 </a:tc>
@@ -5322,7 +8963,7 @@
                       <a:noFill/>
                     </a:lnB>
                     <a:solidFill>
-                      <a:srgbClr val="F4ECFB"/>
+                      <a:srgbClr val="FFFFFF"/>
                     </a:solidFill>
                   </a:tcPr>
                 </a:tc>
@@ -5335,7 +8976,7 @@
                         <a:buNone/>
                       </a:pPr>
                       <a:r>
-                        <a:rPr lang="es-UY" sz="1000" noProof="0" dirty="0">
+                        <a:rPr lang="es-UY" sz="1000" noProof="0" dirty="0" err="1">
                           <a:solidFill>
                             <a:srgbClr val="2E0A4E"/>
                           </a:solidFill>
@@ -5366,13 +9007,13 @@
                       <a:noFill/>
                     </a:lnB>
                     <a:solidFill>
-                      <a:srgbClr val="F4ECFB"/>
+                      <a:srgbClr val="FFFFFF"/>
                     </a:solidFill>
                   </a:tcPr>
                 </a:tc>
                 <a:extLst>
                   <a:ext uri="{0D108BD9-81ED-4DB2-BD59-A6C34878D82A}">
-                    <a16:rowId xmlns:a16="http://schemas.microsoft.com/office/drawing/2014/main" val="10003"/>
+                    <a16:rowId xmlns:a16="http://schemas.microsoft.com/office/drawing/2014/main" val="10002"/>
                   </a:ext>
                 </a:extLst>
               </a:tr>
@@ -5438,7 +9079,7 @@
                           <a:ea typeface="Calibri" pitchFamily="34" charset="-122"/>
                           <a:cs typeface="Calibri" pitchFamily="34" charset="-120"/>
                         </a:rPr>
-                        <a:t>Entradas de Datos (Inputs)</a:t>
+                        <a:t>Entradas y Salidas</a:t>
                       </a:r>
                       <a:endParaRPr lang="es-UY" sz="1000" noProof="0" dirty="0">
                         <a:latin typeface="Calibri" charset="0"/>
@@ -5474,7 +9115,7 @@
                         <a:buNone/>
                       </a:pPr>
                       <a:r>
-                        <a:rPr lang="es-UY" sz="1000" noProof="0" dirty="0">
+                        <a:rPr lang="es-UY" sz="1000" noProof="0" dirty="0" err="1">
                           <a:solidFill>
                             <a:srgbClr val="2E0A4E"/>
                           </a:solidFill>
@@ -5482,7 +9123,7 @@
                           <a:ea typeface="Calibri" pitchFamily="34" charset="-122"/>
                           <a:cs typeface="Calibri" pitchFamily="34" charset="-120"/>
                         </a:rPr>
-                        <a:t>Qué controles hay y qué devuelve cada uno.</a:t>
+                        <a:t>Inputs, outputs y cómo se conectan.</a:t>
                       </a:r>
                       <a:endParaRPr lang="es-UY" sz="1000" noProof="0" dirty="0">
                         <a:latin typeface="Calibri" charset="0"/>
@@ -5511,7 +9152,7 @@
                 </a:tc>
                 <a:extLst>
                   <a:ext uri="{0D108BD9-81ED-4DB2-BD59-A6C34878D82A}">
-                    <a16:rowId xmlns:a16="http://schemas.microsoft.com/office/drawing/2014/main" val="10004"/>
+                    <a16:rowId xmlns:a16="http://schemas.microsoft.com/office/drawing/2014/main" val="10002"/>
                   </a:ext>
                 </a:extLst>
               </a:tr>
@@ -5534,145 +9175,6 @@
                           <a:cs typeface="Calibri" pitchFamily="34" charset="-120"/>
                         </a:rPr>
                         <a:t>5</a:t>
-                      </a:r>
-                      <a:endParaRPr lang="es-UY" sz="1000" noProof="0" dirty="0">
-                        <a:latin typeface="Calibri" charset="0"/>
-                        <a:ea typeface="Calibri" charset="0"/>
-                        <a:cs typeface="Calibri" charset="0"/>
-                      </a:endParaRPr>
-                    </a:p>
-                  </a:txBody>
-                  <a:tcPr marL="45720" marR="45720" anchor="ctr">
-                    <a:lnL w="0" cap="flat" cmpd="sng" algn="ctr">
-                      <a:noFill/>
-                    </a:lnL>
-                    <a:lnR w="0" cap="flat" cmpd="sng" algn="ctr">
-                      <a:noFill/>
-                    </a:lnR>
-                    <a:lnT w="0" cap="flat" cmpd="sng" algn="ctr">
-                      <a:noFill/>
-                    </a:lnT>
-                    <a:lnB w="0" cap="flat" cmpd="sng" algn="ctr">
-                      <a:noFill/>
-                    </a:lnB>
-                    <a:solidFill>
-                      <a:srgbClr val="F4ECFB"/>
-                    </a:solidFill>
-                  </a:tcPr>
-                </a:tc>
-                <a:tc>
-                  <a:txBody>
-                    <a:bodyPr/>
-                    <a:lstStyle/>
-                    <a:p>
-                      <a:pPr marL="0" indent="0">
-                        <a:buNone/>
-                      </a:pPr>
-                      <a:r>
-                        <a:rPr lang="es-UY" sz="1000" noProof="0" dirty="0">
-                          <a:solidFill>
-                            <a:srgbClr val="2E0A4E"/>
-                          </a:solidFill>
-                          <a:latin typeface="Calibri" pitchFamily="34" charset="0"/>
-                          <a:ea typeface="Calibri" pitchFamily="34" charset="-122"/>
-                          <a:cs typeface="Calibri" pitchFamily="34" charset="-120"/>
-                        </a:rPr>
-                        <a:t>Salidas (Outputs)</a:t>
-                      </a:r>
-                      <a:endParaRPr lang="es-UY" sz="1000" noProof="0" dirty="0">
-                        <a:latin typeface="Calibri" charset="0"/>
-                        <a:ea typeface="Calibri" charset="0"/>
-                        <a:cs typeface="Calibri" charset="0"/>
-                      </a:endParaRPr>
-                    </a:p>
-                  </a:txBody>
-                  <a:tcPr marL="45720" marR="45720" anchor="ctr">
-                    <a:lnL w="0" cap="flat" cmpd="sng" algn="ctr">
-                      <a:noFill/>
-                    </a:lnL>
-                    <a:lnR w="0" cap="flat" cmpd="sng" algn="ctr">
-                      <a:noFill/>
-                    </a:lnR>
-                    <a:lnT w="0" cap="flat" cmpd="sng" algn="ctr">
-                      <a:noFill/>
-                    </a:lnT>
-                    <a:lnB w="0" cap="flat" cmpd="sng" algn="ctr">
-                      <a:noFill/>
-                    </a:lnB>
-                    <a:solidFill>
-                      <a:srgbClr val="F4ECFB"/>
-                    </a:solidFill>
-                  </a:tcPr>
-                </a:tc>
-                <a:tc>
-                  <a:txBody>
-                    <a:bodyPr/>
-                    <a:lstStyle/>
-                    <a:p>
-                      <a:pPr marL="0" indent="0">
-                        <a:buNone/>
-                      </a:pPr>
-                      <a:r>
-                        <a:rPr lang="es-UY" sz="1000" noProof="0" dirty="0">
-                          <a:solidFill>
-                            <a:srgbClr val="2E0A4E"/>
-                          </a:solidFill>
-                          <a:latin typeface="Calibri" pitchFamily="34" charset="0"/>
-                          <a:ea typeface="Calibri" pitchFamily="34" charset="-122"/>
-                          <a:cs typeface="Calibri" pitchFamily="34" charset="-120"/>
-                        </a:rPr>
-                        <a:t>Output y render, gráfico y descarga.</a:t>
-                      </a:r>
-                      <a:endParaRPr lang="es-UY" sz="1000" noProof="0" dirty="0">
-                        <a:latin typeface="Calibri" charset="0"/>
-                        <a:ea typeface="Calibri" charset="0"/>
-                        <a:cs typeface="Calibri" charset="0"/>
-                      </a:endParaRPr>
-                    </a:p>
-                  </a:txBody>
-                  <a:tcPr marL="45720" marR="45720" anchor="ctr">
-                    <a:lnL w="0" cap="flat" cmpd="sng" algn="ctr">
-                      <a:noFill/>
-                    </a:lnL>
-                    <a:lnR w="0" cap="flat" cmpd="sng" algn="ctr">
-                      <a:noFill/>
-                    </a:lnR>
-                    <a:lnT w="0" cap="flat" cmpd="sng" algn="ctr">
-                      <a:noFill/>
-                    </a:lnT>
-                    <a:lnB w="0" cap="flat" cmpd="sng" algn="ctr">
-                      <a:noFill/>
-                    </a:lnB>
-                    <a:solidFill>
-                      <a:srgbClr val="F4ECFB"/>
-                    </a:solidFill>
-                  </a:tcPr>
-                </a:tc>
-                <a:extLst>
-                  <a:ext uri="{0D108BD9-81ED-4DB2-BD59-A6C34878D82A}">
-                    <a16:rowId xmlns:a16="http://schemas.microsoft.com/office/drawing/2014/main" val="10005"/>
-                  </a:ext>
-                </a:extLst>
-              </a:tr>
-              <a:tr h="274320">
-                <a:tc>
-                  <a:txBody>
-                    <a:bodyPr/>
-                    <a:lstStyle/>
-                    <a:p>
-                      <a:pPr marL="0" indent="0">
-                        <a:buNone/>
-                      </a:pPr>
-                      <a:r>
-                        <a:rPr lang="es-UY" sz="1000" b="1" noProof="0" dirty="0">
-                          <a:solidFill>
-                            <a:srgbClr val="2E0A4E"/>
-                          </a:solidFill>
-                          <a:latin typeface="Calibri" pitchFamily="34" charset="0"/>
-                          <a:ea typeface="Calibri" pitchFamily="34" charset="-122"/>
-                          <a:cs typeface="Calibri" pitchFamily="34" charset="-120"/>
-                        </a:rPr>
-                        <a:t>6</a:t>
                       </a:r>
                       <a:endParaRPr lang="es-UY" sz="1000" noProof="0" dirty="0">
                         <a:latin typeface="Calibri" charset="0"/>
@@ -5752,17 +9254,6 @@
                         <a:buNone/>
                       </a:pPr>
                       <a:r>
-                        <a:rPr lang="es-UY" sz="1000" noProof="0" dirty="0">
-                          <a:solidFill>
-                            <a:srgbClr val="2E0A4E"/>
-                          </a:solidFill>
-                          <a:latin typeface="Calibri" pitchFamily="34" charset="0"/>
-                          <a:ea typeface="Calibri" pitchFamily="34" charset="-122"/>
-                          <a:cs typeface="Calibri" pitchFamily="34" charset="-120"/>
-                        </a:rPr>
-                        <a:t>reactive(), </a:t>
-                      </a:r>
-                      <a:r>
                         <a:rPr lang="es-UY" sz="1000" noProof="0" dirty="0" err="1">
                           <a:solidFill>
                             <a:srgbClr val="2E0A4E"/>
@@ -5771,40 +9262,7 @@
                           <a:ea typeface="Calibri" pitchFamily="34" charset="-122"/>
                           <a:cs typeface="Calibri" pitchFamily="34" charset="-120"/>
                         </a:rPr>
-                        <a:t>req</a:t>
-                      </a:r>
-                      <a:r>
-                        <a:rPr lang="es-UY" sz="1000" noProof="0" dirty="0">
-                          <a:solidFill>
-                            <a:srgbClr val="2E0A4E"/>
-                          </a:solidFill>
-                          <a:latin typeface="Calibri" pitchFamily="34" charset="0"/>
-                          <a:ea typeface="Calibri" pitchFamily="34" charset="-122"/>
-                          <a:cs typeface="Calibri" pitchFamily="34" charset="-120"/>
-                        </a:rPr>
-                        <a:t>(), </a:t>
-                      </a:r>
-                      <a:r>
-                        <a:rPr lang="es-UY" sz="1000" noProof="0" dirty="0" err="1">
-                          <a:solidFill>
-                            <a:srgbClr val="2E0A4E"/>
-                          </a:solidFill>
-                          <a:latin typeface="Calibri" pitchFamily="34" charset="0"/>
-                          <a:ea typeface="Calibri" pitchFamily="34" charset="-122"/>
-                          <a:cs typeface="Calibri" pitchFamily="34" charset="-120"/>
-                        </a:rPr>
-                        <a:t>validate</a:t>
-                      </a:r>
-                      <a:r>
-                        <a:rPr lang="es-UY" sz="1000" noProof="0" dirty="0">
-                          <a:solidFill>
-                            <a:srgbClr val="2E0A4E"/>
-                          </a:solidFill>
-                          <a:latin typeface="Calibri" pitchFamily="34" charset="0"/>
-                          <a:ea typeface="Calibri" pitchFamily="34" charset="-122"/>
-                          <a:cs typeface="Calibri" pitchFamily="34" charset="-120"/>
-                        </a:rPr>
-                        <a:t>() y botones.</a:t>
+                        <a:t>reactive(), req() y botones con eventReactive().</a:t>
                       </a:r>
                       <a:endParaRPr lang="es-UY" sz="1000" noProof="0" dirty="0">
                         <a:latin typeface="Calibri" charset="0"/>
@@ -5833,7 +9291,146 @@
                 </a:tc>
                 <a:extLst>
                   <a:ext uri="{0D108BD9-81ED-4DB2-BD59-A6C34878D82A}">
-                    <a16:rowId xmlns:a16="http://schemas.microsoft.com/office/drawing/2014/main" val="10006"/>
+                    <a16:rowId xmlns:a16="http://schemas.microsoft.com/office/drawing/2014/main" val="10002"/>
+                  </a:ext>
+                </a:extLst>
+              </a:tr>
+              <a:tr h="274320">
+                <a:tc>
+                  <a:txBody>
+                    <a:bodyPr/>
+                    <a:lstStyle/>
+                    <a:p>
+                      <a:pPr marL="0" indent="0">
+                        <a:buNone/>
+                      </a:pPr>
+                      <a:r>
+                        <a:rPr lang="es-UY" sz="1000" b="1" noProof="0" dirty="0">
+                          <a:solidFill>
+                            <a:srgbClr val="2E0A4E"/>
+                          </a:solidFill>
+                          <a:latin typeface="Calibri" pitchFamily="34" charset="0"/>
+                          <a:ea typeface="Calibri" pitchFamily="34" charset="-122"/>
+                          <a:cs typeface="Calibri" pitchFamily="34" charset="-120"/>
+                        </a:rPr>
+                        <a:t>6</a:t>
+                      </a:r>
+                      <a:endParaRPr lang="es-UY" sz="1000" noProof="0" dirty="0">
+                        <a:latin typeface="Calibri" charset="0"/>
+                        <a:ea typeface="Calibri" charset="0"/>
+                        <a:cs typeface="Calibri" charset="0"/>
+                      </a:endParaRPr>
+                    </a:p>
+                  </a:txBody>
+                  <a:tcPr marL="45720" marR="45720" anchor="ctr">
+                    <a:lnL w="0" cap="flat" cmpd="sng" algn="ctr">
+                      <a:noFill/>
+                    </a:lnL>
+                    <a:lnR w="0" cap="flat" cmpd="sng" algn="ctr">
+                      <a:noFill/>
+                    </a:lnR>
+                    <a:lnT w="0" cap="flat" cmpd="sng" algn="ctr">
+                      <a:noFill/>
+                    </a:lnT>
+                    <a:lnB w="0" cap="flat" cmpd="sng" algn="ctr">
+                      <a:noFill/>
+                    </a:lnB>
+                    <a:solidFill>
+                      <a:srgbClr val="FFFFFF"/>
+                    </a:solidFill>
+                  </a:tcPr>
+                </a:tc>
+                <a:tc>
+                  <a:txBody>
+                    <a:bodyPr/>
+                    <a:lstStyle/>
+                    <a:p>
+                      <a:pPr marL="0" indent="0">
+                        <a:buNone/>
+                      </a:pPr>
+                      <a:r>
+                        <a:rPr lang="es-UY" sz="1000" noProof="0" dirty="0">
+                          <a:solidFill>
+                            <a:srgbClr val="2E0A4E"/>
+                          </a:solidFill>
+                          <a:latin typeface="Calibri" pitchFamily="34" charset="0"/>
+                          <a:ea typeface="Calibri" pitchFamily="34" charset="-122"/>
+                          <a:cs typeface="Calibri" pitchFamily="34" charset="-120"/>
+                        </a:rPr>
+                        <a:t>Gráficos Dinámicos</a:t>
+                      </a:r>
+                      <a:endParaRPr lang="es-UY" sz="1000" noProof="0" dirty="0">
+                        <a:latin typeface="Calibri" charset="0"/>
+                        <a:ea typeface="Calibri" charset="0"/>
+                        <a:cs typeface="Calibri" charset="0"/>
+                      </a:endParaRPr>
+                    </a:p>
+                  </a:txBody>
+                  <a:tcPr marL="45720" marR="45720" anchor="ctr">
+                    <a:lnL w="0" cap="flat" cmpd="sng" algn="ctr">
+                      <a:noFill/>
+                    </a:lnL>
+                    <a:lnR w="0" cap="flat" cmpd="sng" algn="ctr">
+                      <a:noFill/>
+                    </a:lnR>
+                    <a:lnT w="0" cap="flat" cmpd="sng" algn="ctr">
+                      <a:noFill/>
+                    </a:lnT>
+                    <a:lnB w="0" cap="flat" cmpd="sng" algn="ctr">
+                      <a:noFill/>
+                    </a:lnB>
+                    <a:solidFill>
+                      <a:srgbClr val="FFFFFF"/>
+                    </a:solidFill>
+                  </a:tcPr>
+                </a:tc>
+                <a:tc>
+                  <a:txBody>
+                    <a:bodyPr/>
+                    <a:lstStyle/>
+                    <a:p>
+                      <a:pPr marL="0" indent="0">
+                        <a:buNone/>
+                      </a:pPr>
+                      <a:r>
+                        <a:rPr lang="es-UY" sz="1000" noProof="0" dirty="0" err="1">
+                          <a:solidFill>
+                            <a:srgbClr val="2E0A4E"/>
+                          </a:solidFill>
+                          <a:latin typeface="Calibri" pitchFamily="34" charset="0"/>
+                          <a:ea typeface="Calibri" pitchFamily="34" charset="-122"/>
+                          <a:cs typeface="Calibri" pitchFamily="34" charset="-120"/>
+                        </a:rPr>
+                        <a:t>ggplot2 y gráficos interactivos con plotly.</a:t>
+                      </a:r>
+                      <a:endParaRPr lang="es-UY" sz="1000" noProof="0" dirty="0">
+                        <a:latin typeface="Calibri" charset="0"/>
+                        <a:ea typeface="Calibri" charset="0"/>
+                        <a:cs typeface="Calibri" charset="0"/>
+                      </a:endParaRPr>
+                    </a:p>
+                  </a:txBody>
+                  <a:tcPr marL="45720" marR="45720" anchor="ctr">
+                    <a:lnL w="0" cap="flat" cmpd="sng" algn="ctr">
+                      <a:noFill/>
+                    </a:lnL>
+                    <a:lnR w="0" cap="flat" cmpd="sng" algn="ctr">
+                      <a:noFill/>
+                    </a:lnR>
+                    <a:lnT w="0" cap="flat" cmpd="sng" algn="ctr">
+                      <a:noFill/>
+                    </a:lnT>
+                    <a:lnB w="0" cap="flat" cmpd="sng" algn="ctr">
+                      <a:noFill/>
+                    </a:lnB>
+                    <a:solidFill>
+                      <a:srgbClr val="FFFFFF"/>
+                    </a:solidFill>
+                  </a:tcPr>
+                </a:tc>
+                <a:extLst>
+                  <a:ext uri="{0D108BD9-81ED-4DB2-BD59-A6C34878D82A}">
+                    <a16:rowId xmlns:a16="http://schemas.microsoft.com/office/drawing/2014/main" val="10002"/>
                   </a:ext>
                 </a:extLst>
               </a:tr>
@@ -5878,7 +9475,7 @@
                       <a:noFill/>
                     </a:lnB>
                     <a:solidFill>
-                      <a:srgbClr val="F4ECFB"/>
+                      <a:srgbClr val="FFFFFF"/>
                     </a:solidFill>
                   </a:tcPr>
                 </a:tc>
@@ -5899,7 +9496,7 @@
                           <a:ea typeface="Calibri" pitchFamily="34" charset="-122"/>
                           <a:cs typeface="Calibri" pitchFamily="34" charset="-120"/>
                         </a:rPr>
-                        <a:t>Gráficos Dinámicos</a:t>
+                        <a:t>Estética, app final y publicación</a:t>
                       </a:r>
                       <a:endParaRPr lang="es-UY" sz="1000" noProof="0" dirty="0">
                         <a:latin typeface="Calibri" charset="0"/>
@@ -5922,7 +9519,7 @@
                       <a:noFill/>
                     </a:lnB>
                     <a:solidFill>
-                      <a:srgbClr val="F4ECFB"/>
+                      <a:srgbClr val="FFFFFF"/>
                     </a:solidFill>
                   </a:tcPr>
                 </a:tc>
@@ -5935,7 +9532,7 @@
                         <a:buNone/>
                       </a:pPr>
                       <a:r>
-                        <a:rPr lang="es-UY" sz="1000" noProof="0" dirty="0">
+                        <a:rPr lang="es-UY" sz="1000" noProof="0" dirty="0" err="1">
                           <a:solidFill>
                             <a:srgbClr val="2E0A4E"/>
                           </a:solidFill>
@@ -5943,7 +9540,7 @@
                           <a:ea typeface="Calibri" pitchFamily="34" charset="-122"/>
                           <a:cs typeface="Calibri" pitchFamily="34" charset="-120"/>
                         </a:rPr>
-                        <a:t>ggplot2 reactivo, clic en el gráfico y plotly.</a:t>
+                        <a:t>bslib, navbar, value boxes, DT, mapas con leaflet y deploy.</a:t>
                       </a:r>
                       <a:endParaRPr lang="es-UY" sz="1000" noProof="0" dirty="0">
                         <a:latin typeface="Calibri" charset="0"/>
@@ -5966,13 +9563,13 @@
                       <a:noFill/>
                     </a:lnB>
                     <a:solidFill>
-                      <a:srgbClr val="F4ECFB"/>
+                      <a:srgbClr val="FFFFFF"/>
                     </a:solidFill>
                   </a:tcPr>
                 </a:tc>
                 <a:extLst>
                   <a:ext uri="{0D108BD9-81ED-4DB2-BD59-A6C34878D82A}">
-                    <a16:rowId xmlns:a16="http://schemas.microsoft.com/office/drawing/2014/main" val="10007"/>
+                    <a16:rowId xmlns:a16="http://schemas.microsoft.com/office/drawing/2014/main" val="10002"/>
                   </a:ext>
                 </a:extLst>
               </a:tr>
@@ -5994,7 +9591,7 @@
                           <a:ea typeface="Calibri" pitchFamily="34" charset="-122"/>
                           <a:cs typeface="Calibri" pitchFamily="34" charset="-120"/>
                         </a:rPr>
-                        <a:t>8</a:t>
+                        <a:t>Extra</a:t>
                       </a:r>
                       <a:endParaRPr lang="es-UY" sz="1000" noProof="0" dirty="0">
                         <a:latin typeface="Calibri" charset="0"/>
@@ -6038,7 +9635,7 @@
                           <a:ea typeface="Calibri" pitchFamily="34" charset="-122"/>
                           <a:cs typeface="Calibri" pitchFamily="34" charset="-120"/>
                         </a:rPr>
-                        <a:t>Estética y Navegación</a:t>
+                        <a:t>Tus datos y lo que faltaba</a:t>
                       </a:r>
                       <a:endParaRPr lang="es-UY" sz="1000" noProof="0" dirty="0">
                         <a:latin typeface="Calibri" charset="0"/>
@@ -6074,17 +9671,6 @@
                         <a:buNone/>
                       </a:pPr>
                       <a:r>
-                        <a:rPr lang="es-UY" sz="1000" noProof="0" dirty="0">
-                          <a:solidFill>
-                            <a:srgbClr val="2E0A4E"/>
-                          </a:solidFill>
-                          <a:latin typeface="Calibri" pitchFamily="34" charset="0"/>
-                          <a:ea typeface="Calibri" pitchFamily="34" charset="-122"/>
-                          <a:cs typeface="Calibri" pitchFamily="34" charset="-120"/>
-                        </a:rPr>
-                        <a:t>bslib, </a:t>
-                      </a:r>
-                      <a:r>
                         <a:rPr lang="es-UY" sz="1000" noProof="0" dirty="0" err="1">
                           <a:solidFill>
                             <a:srgbClr val="2E0A4E"/>
@@ -6093,40 +9679,7 @@
                           <a:ea typeface="Calibri" pitchFamily="34" charset="-122"/>
                           <a:cs typeface="Calibri" pitchFamily="34" charset="-120"/>
                         </a:rPr>
-                        <a:t>navbar</a:t>
-                      </a:r>
-                      <a:r>
-                        <a:rPr lang="es-UY" sz="1000" noProof="0" dirty="0">
-                          <a:solidFill>
-                            <a:srgbClr val="2E0A4E"/>
-                          </a:solidFill>
-                          <a:latin typeface="Calibri" pitchFamily="34" charset="0"/>
-                          <a:ea typeface="Calibri" pitchFamily="34" charset="-122"/>
-                          <a:cs typeface="Calibri" pitchFamily="34" charset="-120"/>
-                        </a:rPr>
-                        <a:t>, </a:t>
-                      </a:r>
-                      <a:r>
-                        <a:rPr lang="es-UY" sz="1000" noProof="0" dirty="0" err="1">
-                          <a:solidFill>
-                            <a:srgbClr val="2E0A4E"/>
-                          </a:solidFill>
-                          <a:latin typeface="Calibri" pitchFamily="34" charset="0"/>
-                          <a:ea typeface="Calibri" pitchFamily="34" charset="-122"/>
-                          <a:cs typeface="Calibri" pitchFamily="34" charset="-120"/>
-                        </a:rPr>
-                        <a:t>cards</a:t>
-                      </a:r>
-                      <a:r>
-                        <a:rPr lang="es-UY" sz="1000" noProof="0" dirty="0">
-                          <a:solidFill>
-                            <a:srgbClr val="2E0A4E"/>
-                          </a:solidFill>
-                          <a:latin typeface="Calibri" pitchFamily="34" charset="0"/>
-                          <a:ea typeface="Calibri" pitchFamily="34" charset="-122"/>
-                          <a:cs typeface="Calibri" pitchFamily="34" charset="-120"/>
-                        </a:rPr>
-                        <a:t>, value boxes y DT.</a:t>
+                        <a:t>Revisar el corpus propio, mensajes claros y límites de Shiny.</a:t>
                       </a:r>
                       <a:endParaRPr lang="es-UY" sz="1000" noProof="0" dirty="0">
                         <a:latin typeface="Calibri" charset="0"/>
@@ -6155,307 +9708,7 @@
                 </a:tc>
                 <a:extLst>
                   <a:ext uri="{0D108BD9-81ED-4DB2-BD59-A6C34878D82A}">
-                    <a16:rowId xmlns:a16="http://schemas.microsoft.com/office/drawing/2014/main" val="10008"/>
-                  </a:ext>
-                </a:extLst>
-              </a:tr>
-              <a:tr h="274320">
-                <a:tc>
-                  <a:txBody>
-                    <a:bodyPr/>
-                    <a:lstStyle/>
-                    <a:p>
-                      <a:pPr marL="0" indent="0">
-                        <a:buNone/>
-                      </a:pPr>
-                      <a:r>
-                        <a:rPr lang="es-UY" sz="1000" b="1" noProof="0" dirty="0">
-                          <a:solidFill>
-                            <a:srgbClr val="2E0A4E"/>
-                          </a:solidFill>
-                          <a:latin typeface="Calibri" pitchFamily="34" charset="0"/>
-                          <a:ea typeface="Calibri" pitchFamily="34" charset="-122"/>
-                          <a:cs typeface="Calibri" pitchFamily="34" charset="-120"/>
-                        </a:rPr>
-                        <a:t>9</a:t>
-                      </a:r>
-                      <a:endParaRPr lang="es-UY" sz="1000" noProof="0" dirty="0">
-                        <a:latin typeface="Calibri" charset="0"/>
-                        <a:ea typeface="Calibri" charset="0"/>
-                        <a:cs typeface="Calibri" charset="0"/>
-                      </a:endParaRPr>
-                    </a:p>
-                  </a:txBody>
-                  <a:tcPr marL="45720" marR="45720" anchor="ctr">
-                    <a:lnL w="0" cap="flat" cmpd="sng" algn="ctr">
-                      <a:noFill/>
-                    </a:lnL>
-                    <a:lnR w="0" cap="flat" cmpd="sng" algn="ctr">
-                      <a:noFill/>
-                    </a:lnR>
-                    <a:lnT w="0" cap="flat" cmpd="sng" algn="ctr">
-                      <a:noFill/>
-                    </a:lnT>
-                    <a:lnB w="0" cap="flat" cmpd="sng" algn="ctr">
-                      <a:noFill/>
-                    </a:lnB>
-                    <a:solidFill>
-                      <a:srgbClr val="F4ECFB"/>
-                    </a:solidFill>
-                  </a:tcPr>
-                </a:tc>
-                <a:tc>
-                  <a:txBody>
-                    <a:bodyPr/>
-                    <a:lstStyle/>
-                    <a:p>
-                      <a:pPr marL="0" indent="0">
-                        <a:buNone/>
-                      </a:pPr>
-                      <a:r>
-                        <a:rPr lang="es-UY" sz="1000" noProof="0" dirty="0">
-                          <a:solidFill>
-                            <a:srgbClr val="2E0A4E"/>
-                          </a:solidFill>
-                          <a:latin typeface="Calibri" pitchFamily="34" charset="0"/>
-                          <a:ea typeface="Calibri" pitchFamily="34" charset="-122"/>
-                          <a:cs typeface="Calibri" pitchFamily="34" charset="-120"/>
-                        </a:rPr>
-                        <a:t>Puesta en Producción</a:t>
-                      </a:r>
-                      <a:endParaRPr lang="es-UY" sz="1000" noProof="0" dirty="0">
-                        <a:latin typeface="Calibri" charset="0"/>
-                        <a:ea typeface="Calibri" charset="0"/>
-                        <a:cs typeface="Calibri" charset="0"/>
-                      </a:endParaRPr>
-                    </a:p>
-                  </a:txBody>
-                  <a:tcPr marL="45720" marR="45720" anchor="ctr">
-                    <a:lnL w="0" cap="flat" cmpd="sng" algn="ctr">
-                      <a:noFill/>
-                    </a:lnL>
-                    <a:lnR w="0" cap="flat" cmpd="sng" algn="ctr">
-                      <a:noFill/>
-                    </a:lnR>
-                    <a:lnT w="0" cap="flat" cmpd="sng" algn="ctr">
-                      <a:noFill/>
-                    </a:lnT>
-                    <a:lnB w="0" cap="flat" cmpd="sng" algn="ctr">
-                      <a:noFill/>
-                    </a:lnB>
-                    <a:solidFill>
-                      <a:srgbClr val="F4ECFB"/>
-                    </a:solidFill>
-                  </a:tcPr>
-                </a:tc>
-                <a:tc>
-                  <a:txBody>
-                    <a:bodyPr/>
-                    <a:lstStyle/>
-                    <a:p>
-                      <a:pPr marL="0" indent="0">
-                        <a:buNone/>
-                      </a:pPr>
-                      <a:r>
-                        <a:rPr lang="es-UY" sz="1000" noProof="0" dirty="0">
-                          <a:solidFill>
-                            <a:srgbClr val="2E0A4E"/>
-                          </a:solidFill>
-                          <a:latin typeface="Calibri" pitchFamily="34" charset="0"/>
-                          <a:ea typeface="Calibri" pitchFamily="34" charset="-122"/>
-                          <a:cs typeface="Calibri" pitchFamily="34" charset="-120"/>
-                        </a:rPr>
-                        <a:t>Revisar una app final de tres paneles y </a:t>
-                      </a:r>
-                      <a:r>
-                        <a:rPr lang="es-UY" sz="1000" noProof="0" dirty="0" err="1">
-                          <a:solidFill>
-                            <a:srgbClr val="2E0A4E"/>
-                          </a:solidFill>
-                          <a:latin typeface="Calibri" pitchFamily="34" charset="0"/>
-                          <a:ea typeface="Calibri" pitchFamily="34" charset="-122"/>
-                          <a:cs typeface="Calibri" pitchFamily="34" charset="-120"/>
-                        </a:rPr>
-                        <a:t>deploy</a:t>
-                      </a:r>
-                      <a:r>
-                        <a:rPr lang="es-UY" sz="1000" noProof="0" dirty="0">
-                          <a:solidFill>
-                            <a:srgbClr val="2E0A4E"/>
-                          </a:solidFill>
-                          <a:latin typeface="Calibri" pitchFamily="34" charset="0"/>
-                          <a:ea typeface="Calibri" pitchFamily="34" charset="-122"/>
-                          <a:cs typeface="Calibri" pitchFamily="34" charset="-120"/>
-                        </a:rPr>
-                        <a:t>.</a:t>
-                      </a:r>
-                      <a:endParaRPr lang="es-UY" sz="1000" noProof="0" dirty="0">
-                        <a:latin typeface="Calibri" charset="0"/>
-                        <a:ea typeface="Calibri" charset="0"/>
-                        <a:cs typeface="Calibri" charset="0"/>
-                      </a:endParaRPr>
-                    </a:p>
-                  </a:txBody>
-                  <a:tcPr marL="45720" marR="45720" anchor="ctr">
-                    <a:lnL w="0" cap="flat" cmpd="sng" algn="ctr">
-                      <a:noFill/>
-                    </a:lnL>
-                    <a:lnR w="0" cap="flat" cmpd="sng" algn="ctr">
-                      <a:noFill/>
-                    </a:lnR>
-                    <a:lnT w="0" cap="flat" cmpd="sng" algn="ctr">
-                      <a:noFill/>
-                    </a:lnT>
-                    <a:lnB w="0" cap="flat" cmpd="sng" algn="ctr">
-                      <a:noFill/>
-                    </a:lnB>
-                    <a:solidFill>
-                      <a:srgbClr val="F4ECFB"/>
-                    </a:solidFill>
-                  </a:tcPr>
-                </a:tc>
-                <a:extLst>
-                  <a:ext uri="{0D108BD9-81ED-4DB2-BD59-A6C34878D82A}">
-                    <a16:rowId xmlns:a16="http://schemas.microsoft.com/office/drawing/2014/main" val="10009"/>
-                  </a:ext>
-                </a:extLst>
-              </a:tr>
-              <a:tr h="274320">
-                <a:tc>
-                  <a:txBody>
-                    <a:bodyPr/>
-                    <a:lstStyle/>
-                    <a:p>
-                      <a:pPr marL="0" indent="0">
-                        <a:buNone/>
-                      </a:pPr>
-                      <a:r>
-                        <a:rPr lang="es-UY" sz="1000" b="1" noProof="0" dirty="0">
-                          <a:solidFill>
-                            <a:srgbClr val="2E0A4E"/>
-                          </a:solidFill>
-                          <a:latin typeface="Calibri" pitchFamily="34" charset="0"/>
-                          <a:ea typeface="Calibri" pitchFamily="34" charset="-122"/>
-                          <a:cs typeface="Calibri" pitchFamily="34" charset="-120"/>
-                        </a:rPr>
-                        <a:t>10</a:t>
-                      </a:r>
-                      <a:endParaRPr lang="es-UY" sz="1000" noProof="0" dirty="0">
-                        <a:latin typeface="Calibri" charset="0"/>
-                        <a:ea typeface="Calibri" charset="0"/>
-                        <a:cs typeface="Calibri" charset="0"/>
-                      </a:endParaRPr>
-                    </a:p>
-                  </a:txBody>
-                  <a:tcPr marL="45720" marR="45720" anchor="ctr">
-                    <a:lnL w="0" cap="flat" cmpd="sng" algn="ctr">
-                      <a:noFill/>
-                    </a:lnL>
-                    <a:lnR w="0" cap="flat" cmpd="sng" algn="ctr">
-                      <a:noFill/>
-                    </a:lnR>
-                    <a:lnT w="0" cap="flat" cmpd="sng" algn="ctr">
-                      <a:noFill/>
-                    </a:lnT>
-                    <a:lnB w="0" cap="flat" cmpd="sng" algn="ctr">
-                      <a:noFill/>
-                    </a:lnB>
-                    <a:solidFill>
-                      <a:srgbClr val="FFFFFF"/>
-                    </a:solidFill>
-                  </a:tcPr>
-                </a:tc>
-                <a:tc>
-                  <a:txBody>
-                    <a:bodyPr/>
-                    <a:lstStyle/>
-                    <a:p>
-                      <a:pPr marL="0" indent="0">
-                        <a:buNone/>
-                      </a:pPr>
-                      <a:r>
-                        <a:rPr lang="es-UY" sz="1000" noProof="0" dirty="0">
-                          <a:solidFill>
-                            <a:srgbClr val="2E0A4E"/>
-                          </a:solidFill>
-                          <a:latin typeface="Calibri" pitchFamily="34" charset="0"/>
-                          <a:ea typeface="Calibri" pitchFamily="34" charset="-122"/>
-                          <a:cs typeface="Calibri" pitchFamily="34" charset="-120"/>
-                        </a:rPr>
-                        <a:t>Discusión de corpus</a:t>
-                      </a:r>
-                      <a:endParaRPr lang="es-UY" sz="1000" noProof="0" dirty="0">
-                        <a:latin typeface="Calibri" charset="0"/>
-                        <a:ea typeface="Calibri" charset="0"/>
-                        <a:cs typeface="Calibri" charset="0"/>
-                      </a:endParaRPr>
-                    </a:p>
-                  </a:txBody>
-                  <a:tcPr marL="45720" marR="45720" anchor="ctr">
-                    <a:lnL w="0" cap="flat" cmpd="sng" algn="ctr">
-                      <a:noFill/>
-                    </a:lnL>
-                    <a:lnR w="0" cap="flat" cmpd="sng" algn="ctr">
-                      <a:noFill/>
-                    </a:lnR>
-                    <a:lnT w="0" cap="flat" cmpd="sng" algn="ctr">
-                      <a:noFill/>
-                    </a:lnT>
-                    <a:lnB w="0" cap="flat" cmpd="sng" algn="ctr">
-                      <a:noFill/>
-                    </a:lnB>
-                    <a:solidFill>
-                      <a:srgbClr val="FFFFFF"/>
-                    </a:solidFill>
-                  </a:tcPr>
-                </a:tc>
-                <a:tc>
-                  <a:txBody>
-                    <a:bodyPr/>
-                    <a:lstStyle/>
-                    <a:p>
-                      <a:pPr marL="0" indent="0">
-                        <a:buNone/>
-                      </a:pPr>
-                      <a:r>
-                        <a:rPr lang="es-UY" sz="1000" noProof="0" dirty="0">
-                          <a:solidFill>
-                            <a:srgbClr val="2E0A4E"/>
-                          </a:solidFill>
-                          <a:latin typeface="Calibri" pitchFamily="34" charset="0"/>
-                          <a:ea typeface="Calibri" pitchFamily="34" charset="-122"/>
-                          <a:cs typeface="Calibri" pitchFamily="34" charset="-120"/>
-                        </a:rPr>
-                        <a:t>Intercambiar sobre los datos y el proyecto de cada uno.</a:t>
-                      </a:r>
-                      <a:endParaRPr lang="es-UY" sz="1000" noProof="0" dirty="0">
-                        <a:latin typeface="Calibri" charset="0"/>
-                        <a:ea typeface="Calibri" charset="0"/>
-                        <a:cs typeface="Calibri" charset="0"/>
-                      </a:endParaRPr>
-                    </a:p>
-                  </a:txBody>
-                  <a:tcPr marL="45720" marR="45720" anchor="ctr">
-                    <a:lnL w="0" cap="flat" cmpd="sng" algn="ctr">
-                      <a:noFill/>
-                    </a:lnL>
-                    <a:lnR w="0" cap="flat" cmpd="sng" algn="ctr">
-                      <a:noFill/>
-                    </a:lnR>
-                    <a:lnT w="0" cap="flat" cmpd="sng" algn="ctr">
-                      <a:noFill/>
-                    </a:lnT>
-                    <a:lnB w="0" cap="flat" cmpd="sng" algn="ctr">
-                      <a:noFill/>
-                    </a:lnB>
-                    <a:solidFill>
-                      <a:srgbClr val="FFFFFF"/>
-                    </a:solidFill>
-                  </a:tcPr>
-                </a:tc>
-                <a:extLst>
-                  <a:ext uri="{0D108BD9-81ED-4DB2-BD59-A6C34878D82A}">
-                    <a16:rowId xmlns:a16="http://schemas.microsoft.com/office/drawing/2014/main" val="10010"/>
+                    <a16:rowId xmlns:a16="http://schemas.microsoft.com/office/drawing/2014/main" val="10002"/>
                   </a:ext>
                 </a:extLst>
               </a:tr>
@@ -8300,420 +11553,6 @@
         <p14:creationId xmlns:p14="http://schemas.microsoft.com/office/powerpoint/2010/main" val="2241413046"/>
       </p:ext>
     </p:extLst>
-  </p:cSld>
-  <p:clrMapOvr>
-    <a:masterClrMapping/>
-  </p:clrMapOvr>
-</p:sld>
-</file>
-
-<file path=ppt/slides/slide6.xml><?xml version="1.0" encoding="utf-8"?>
-<p:sld xmlns:a="http://schemas.openxmlformats.org/drawingml/2006/main" xmlns:r="http://schemas.openxmlformats.org/officeDocument/2006/relationships" xmlns:p="http://schemas.openxmlformats.org/presentationml/2006/main">
-  <p:cSld name="Slide 6">
-    <p:bg>
-      <p:bgPr>
-        <a:solidFill>
-          <a:srgbClr val="FFFFFF"/>
-        </a:solidFill>
-        <a:effectLst/>
-      </p:bgPr>
-    </p:bg>
-    <p:spTree>
-      <p:nvGrpSpPr>
-        <p:cNvPr id="1" name=""/>
-        <p:cNvGrpSpPr/>
-        <p:nvPr/>
-      </p:nvGrpSpPr>
-      <p:grpSpPr>
-        <a:xfrm>
-          <a:off x="0" y="0"/>
-          <a:ext cx="0" cy="0"/>
-          <a:chOff x="0" y="0"/>
-          <a:chExt cx="0" cy="0"/>
-        </a:xfrm>
-      </p:grpSpPr>
-      <p:sp>
-        <p:nvSpPr>
-          <p:cNvPr id="2" name="Text 0"/>
-          <p:cNvSpPr txBox="1"/>
-          <p:nvPr/>
-        </p:nvSpPr>
-        <p:spPr>
-          <a:xfrm>
-            <a:off x="502920" y="320040"/>
-            <a:ext cx="7040880" cy="640080"/>
-          </a:xfrm>
-          <a:prstGeom prst="rect">
-            <a:avLst/>
-          </a:prstGeom>
-          <a:noFill/>
-          <a:ln/>
-        </p:spPr>
-        <p:txBody>
-          <a:bodyPr wrap="square" lIns="0" tIns="0" rIns="0" bIns="0" rtlCol="0" anchor="ctr"/>
-          <a:lstStyle/>
-          <a:p>
-            <a:pPr marL="0" indent="0">
-              <a:buNone/>
-            </a:pPr>
-            <a:r>
-              <a:rPr lang="es-UY" sz="3000" b="1" noProof="0" dirty="0">
-                <a:solidFill>
-                  <a:srgbClr val="2E0A4E"/>
-                </a:solidFill>
-                <a:latin typeface="Oswald" pitchFamily="34" charset="0"/>
-                <a:ea typeface="Oswald" pitchFamily="34" charset="-122"/>
-                <a:cs typeface="Oswald" pitchFamily="34" charset="-120"/>
-              </a:rPr>
-              <a:t>Instalaciones (antes de la Clase 2)</a:t>
-            </a:r>
-            <a:endParaRPr lang="es-UY" sz="3000" noProof="0" dirty="0"/>
-          </a:p>
-        </p:txBody>
-      </p:sp>
-      <p:sp>
-        <p:nvSpPr>
-          <p:cNvPr id="4" name="Text 2"/>
-          <p:cNvSpPr txBox="1"/>
-          <p:nvPr/>
-        </p:nvSpPr>
-        <p:spPr>
-          <a:xfrm>
-            <a:off x="502920" y="4759452"/>
-            <a:ext cx="8138160" cy="228600"/>
-          </a:xfrm>
-          <a:prstGeom prst="rect">
-            <a:avLst/>
-          </a:prstGeom>
-          <a:noFill/>
-          <a:ln/>
-        </p:spPr>
-        <p:txBody>
-          <a:bodyPr wrap="square" lIns="0" tIns="0" rIns="0" bIns="0" rtlCol="0" anchor="ctr"/>
-          <a:lstStyle/>
-          <a:p>
-            <a:pPr marL="0" indent="0">
-              <a:buNone/>
-            </a:pPr>
-            <a:r>
-              <a:rPr lang="es-UY" sz="900" noProof="0" dirty="0">
-                <a:solidFill>
-                  <a:srgbClr val="999999"/>
-                </a:solidFill>
-                <a:latin typeface="Calibri" pitchFamily="34" charset="0"/>
-                <a:ea typeface="Calibri" pitchFamily="34" charset="-122"/>
-                <a:cs typeface="Calibri" pitchFamily="34" charset="-120"/>
-              </a:rPr>
-              <a:t>Visualización interactiva de datos con R y Shiny · Udelar</a:t>
-            </a:r>
-            <a:endParaRPr lang="es-UY" sz="900" noProof="0" dirty="0"/>
-          </a:p>
-        </p:txBody>
-      </p:sp>
-      <p:sp>
-        <p:nvSpPr>
-          <p:cNvPr id="5" name="Shape 3"/>
-          <p:cNvSpPr/>
-          <p:nvPr/>
-        </p:nvSpPr>
-        <p:spPr>
-          <a:xfrm>
-            <a:off x="502920" y="1188720"/>
-            <a:ext cx="8138160" cy="3429000"/>
-          </a:xfrm>
-          <a:prstGeom prst="roundRect">
-            <a:avLst>
-              <a:gd name="adj" fmla="val 1600"/>
-            </a:avLst>
-          </a:prstGeom>
-          <a:solidFill>
-            <a:srgbClr val="2E0A4E"/>
-          </a:solidFill>
-          <a:ln w="12700">
-            <a:solidFill>
-              <a:srgbClr val="2E0A4E"/>
-            </a:solidFill>
-            <a:prstDash val="solid"/>
-          </a:ln>
-        </p:spPr>
-        <p:txBody>
-          <a:bodyPr/>
-          <a:lstStyle/>
-          <a:p>
-            <a:endParaRPr lang="es-UY" noProof="0" dirty="0"/>
-          </a:p>
-        </p:txBody>
-      </p:sp>
-      <p:sp>
-        <p:nvSpPr>
-          <p:cNvPr id="6" name="Text 4"/>
-          <p:cNvSpPr txBox="1"/>
-          <p:nvPr/>
-        </p:nvSpPr>
-        <p:spPr>
-          <a:xfrm>
-            <a:off x="777240" y="1325880"/>
-            <a:ext cx="7589520" cy="3154680"/>
-          </a:xfrm>
-          <a:prstGeom prst="rect">
-            <a:avLst/>
-          </a:prstGeom>
-          <a:noFill/>
-          <a:ln/>
-        </p:spPr>
-        <p:txBody>
-          <a:bodyPr wrap="square" lIns="0" tIns="0" rIns="0" bIns="0" rtlCol="0" anchor="t"/>
-          <a:lstStyle/>
-          <a:p>
-            <a:pPr marL="171450" indent="-171450">
-              <a:spcAft>
-                <a:spcPts val="200"/>
-              </a:spcAft>
-              <a:buFont typeface="Arial" panose="020B0604020202020204" pitchFamily="34" charset="0"/>
-              <a:buChar char="•"/>
-            </a:pPr>
-            <a:r>
-              <a:rPr lang="es-UY" sz="1200" b="1" noProof="0" dirty="0">
-                <a:solidFill>
-                  <a:srgbClr val="F1E9F8"/>
-                </a:solidFill>
-                <a:latin typeface="Courier New" pitchFamily="34" charset="0"/>
-                <a:ea typeface="Courier New" pitchFamily="34" charset="-122"/>
-                <a:cs typeface="Courier New" pitchFamily="34" charset="-120"/>
-              </a:rPr>
-              <a:t>Instalar R (la versión mas reciente) desde </a:t>
-            </a:r>
-            <a:r>
-              <a:rPr lang="es-UY" sz="1200" b="1" noProof="0" dirty="0">
-                <a:solidFill>
-                  <a:srgbClr val="F1E9F8"/>
-                </a:solidFill>
-                <a:latin typeface="Courier New" pitchFamily="34" charset="0"/>
-                <a:ea typeface="Courier New" pitchFamily="34" charset="-122"/>
-                <a:cs typeface="Courier New" pitchFamily="34" charset="-120"/>
-                <a:hlinkClick r:id="rId3"/>
-              </a:rPr>
-              <a:t>cran.r-project.org</a:t>
-            </a:r>
-            <a:endParaRPr lang="es-UY" sz="1200" b="1" noProof="0" dirty="0">
-              <a:solidFill>
-                <a:srgbClr val="F1E9F8"/>
-              </a:solidFill>
-              <a:latin typeface="Courier New" pitchFamily="34" charset="0"/>
-              <a:ea typeface="Courier New" pitchFamily="34" charset="-122"/>
-              <a:cs typeface="Courier New" pitchFamily="34" charset="-120"/>
-            </a:endParaRPr>
-          </a:p>
-          <a:p>
-            <a:pPr marL="0" indent="0">
-              <a:spcAft>
-                <a:spcPts val="200"/>
-              </a:spcAft>
-              <a:buNone/>
-            </a:pPr>
-            <a:endParaRPr lang="es-UY" sz="1200" dirty="0">
-              <a:solidFill>
-                <a:srgbClr val="F1E9F8"/>
-              </a:solidFill>
-              <a:latin typeface="Courier New" pitchFamily="34" charset="0"/>
-              <a:cs typeface="Courier New" pitchFamily="34" charset="-120"/>
-            </a:endParaRPr>
-          </a:p>
-          <a:p>
-            <a:pPr marL="171450" indent="-171450">
-              <a:spcAft>
-                <a:spcPts val="200"/>
-              </a:spcAft>
-              <a:buFont typeface="Arial" panose="020B0604020202020204" pitchFamily="34" charset="0"/>
-              <a:buChar char="•"/>
-            </a:pPr>
-            <a:r>
-              <a:rPr lang="es-UY" sz="1200" b="1" noProof="0" dirty="0">
-                <a:solidFill>
-                  <a:srgbClr val="F1E9F8"/>
-                </a:solidFill>
-                <a:latin typeface="Courier New" pitchFamily="34" charset="0"/>
-                <a:ea typeface="Courier New" pitchFamily="34" charset="-122"/>
-                <a:cs typeface="Courier New" pitchFamily="34" charset="-120"/>
-              </a:rPr>
-              <a:t>Instalar Rstudio Desktop desde </a:t>
-            </a:r>
-            <a:r>
-              <a:rPr lang="es-UY" sz="1200" b="1" noProof="0" dirty="0">
-                <a:solidFill>
-                  <a:srgbClr val="F1E9F8"/>
-                </a:solidFill>
-                <a:latin typeface="Courier New" pitchFamily="34" charset="0"/>
-                <a:ea typeface="Courier New" pitchFamily="34" charset="-122"/>
-                <a:cs typeface="Courier New" pitchFamily="34" charset="-120"/>
-                <a:hlinkClick r:id="rId4"/>
-              </a:rPr>
-              <a:t>posit.co/download/rstudio-desktop</a:t>
-            </a:r>
-            <a:r>
-              <a:rPr lang="es-UY" sz="1200" b="1" noProof="0" dirty="0">
-                <a:solidFill>
-                  <a:srgbClr val="F1E9F8"/>
-                </a:solidFill>
-                <a:latin typeface="Courier New" pitchFamily="34" charset="0"/>
-                <a:ea typeface="Courier New" pitchFamily="34" charset="-122"/>
-                <a:cs typeface="Courier New" pitchFamily="34" charset="-120"/>
-              </a:rPr>
-              <a:t> o un IDE equivalente</a:t>
-            </a:r>
-          </a:p>
-          <a:p>
-            <a:pPr marL="171450" indent="-171450">
-              <a:spcAft>
-                <a:spcPts val="200"/>
-              </a:spcAft>
-              <a:buFont typeface="Arial" panose="020B0604020202020204" pitchFamily="34" charset="0"/>
-              <a:buChar char="•"/>
-            </a:pPr>
-            <a:endParaRPr lang="es-UY" sz="1200" b="1" dirty="0">
-              <a:solidFill>
-                <a:srgbClr val="F1E9F8"/>
-              </a:solidFill>
-              <a:latin typeface="Courier New" pitchFamily="34" charset="0"/>
-              <a:cs typeface="Courier New" pitchFamily="34" charset="-120"/>
-            </a:endParaRPr>
-          </a:p>
-          <a:p>
-            <a:pPr marL="171450" indent="-171450">
-              <a:spcAft>
-                <a:spcPts val="200"/>
-              </a:spcAft>
-              <a:buFont typeface="Arial" panose="020B0604020202020204" pitchFamily="34" charset="0"/>
-              <a:buChar char="•"/>
-            </a:pPr>
-            <a:r>
-              <a:rPr lang="es-UY" sz="1200" b="1" noProof="0" dirty="0">
-                <a:solidFill>
-                  <a:srgbClr val="F1E9F8"/>
-                </a:solidFill>
-                <a:latin typeface="Courier New" pitchFamily="34" charset="0"/>
-                <a:cs typeface="Courier New" pitchFamily="34" charset="-120"/>
-              </a:rPr>
-              <a:t>Instalar los paquetes necesarios</a:t>
-            </a:r>
-            <a:endParaRPr lang="es-UY" sz="1200" b="1" noProof="0" dirty="0"/>
-          </a:p>
-          <a:p>
-            <a:pPr marL="0" indent="0">
-              <a:spcAft>
-                <a:spcPts val="200"/>
-              </a:spcAft>
-              <a:buNone/>
-            </a:pPr>
-            <a:r>
-              <a:rPr lang="es-UY" sz="1200" noProof="0" dirty="0">
-                <a:solidFill>
-                  <a:srgbClr val="F1E9F8"/>
-                </a:solidFill>
-                <a:latin typeface="Courier New" pitchFamily="34" charset="0"/>
-                <a:ea typeface="Courier New" pitchFamily="34" charset="-122"/>
-                <a:cs typeface="Courier New" pitchFamily="34" charset="-120"/>
-              </a:rPr>
-              <a:t>install.packages(c("shiny", "bslib", "ggplot2", "plotly", "DT", "scales", "leaflet", "rsconnect"))</a:t>
-            </a:r>
-          </a:p>
-          <a:p>
-            <a:pPr marL="0" indent="0">
-              <a:spcAft>
-                <a:spcPts val="200"/>
-              </a:spcAft>
-              <a:buNone/>
-            </a:pPr>
-            <a:endParaRPr lang="es-UY" sz="1200" dirty="0">
-              <a:solidFill>
-                <a:srgbClr val="F1E9F8"/>
-              </a:solidFill>
-              <a:latin typeface="Courier New" pitchFamily="34" charset="0"/>
-              <a:ea typeface="Courier New" pitchFamily="34" charset="-122"/>
-              <a:cs typeface="Courier New" pitchFamily="34" charset="-120"/>
-            </a:endParaRPr>
-          </a:p>
-          <a:p>
-            <a:pPr marL="171450" indent="-171450">
-              <a:spcAft>
-                <a:spcPts val="200"/>
-              </a:spcAft>
-              <a:buFont typeface="Arial" panose="020B0604020202020204" pitchFamily="34" charset="0"/>
-              <a:buChar char="•"/>
-            </a:pPr>
-            <a:r>
-              <a:rPr lang="es-UY" sz="1200" b="1" noProof="0" dirty="0">
-                <a:solidFill>
-                  <a:srgbClr val="F1E9F8"/>
-                </a:solidFill>
-                <a:latin typeface="Courier New" pitchFamily="34" charset="0"/>
-                <a:ea typeface="Courier New" pitchFamily="34" charset="-122"/>
-                <a:cs typeface="Courier New" pitchFamily="34" charset="-120"/>
-              </a:rPr>
-              <a:t>Crearse una cuenta gratuita en </a:t>
-            </a:r>
-            <a:r>
-              <a:rPr lang="es-UY" sz="1200" b="1" dirty="0">
-                <a:solidFill>
-                  <a:srgbClr val="F1E9F8"/>
-                </a:solidFill>
-                <a:latin typeface="Courier New" pitchFamily="34" charset="0"/>
-                <a:ea typeface="Courier New" pitchFamily="34" charset="-122"/>
-                <a:cs typeface="Courier New" pitchFamily="34" charset="-120"/>
-                <a:hlinkClick r:id="rId5"/>
-              </a:rPr>
-              <a:t>shinyapps.io</a:t>
-            </a:r>
-            <a:r>
-              <a:rPr lang="es-UY" sz="1200" b="1" dirty="0">
-                <a:solidFill>
-                  <a:srgbClr val="F1E9F8"/>
-                </a:solidFill>
-                <a:latin typeface="Courier New" pitchFamily="34" charset="0"/>
-                <a:ea typeface="Courier New" pitchFamily="34" charset="-122"/>
-                <a:cs typeface="Courier New" pitchFamily="34" charset="-120"/>
-              </a:rPr>
-              <a:t> </a:t>
-            </a:r>
-            <a:r>
-              <a:rPr lang="es-UY" sz="1200" b="1" noProof="0" dirty="0">
-                <a:solidFill>
-                  <a:srgbClr val="F1E9F8"/>
-                </a:solidFill>
-                <a:latin typeface="Courier New" pitchFamily="34" charset="0"/>
-                <a:ea typeface="Courier New" pitchFamily="34" charset="-122"/>
-                <a:cs typeface="Courier New" pitchFamily="34" charset="-120"/>
-              </a:rPr>
-              <a:t>o </a:t>
-            </a:r>
-            <a:r>
-              <a:rPr lang="es-UY" sz="1200" b="1" dirty="0">
-                <a:solidFill>
-                  <a:srgbClr val="F1E9F8"/>
-                </a:solidFill>
-                <a:latin typeface="Courier New" pitchFamily="34" charset="0"/>
-                <a:ea typeface="Courier New" pitchFamily="34" charset="-122"/>
-                <a:cs typeface="Courier New" pitchFamily="34" charset="-120"/>
-              </a:rPr>
-              <a:t>en </a:t>
-            </a:r>
-            <a:r>
-              <a:rPr lang="es-UY" sz="1200" b="1" dirty="0">
-                <a:solidFill>
-                  <a:srgbClr val="F1E9F8"/>
-                </a:solidFill>
-                <a:latin typeface="Courier New" pitchFamily="34" charset="0"/>
-                <a:ea typeface="Courier New" pitchFamily="34" charset="-122"/>
-                <a:cs typeface="Courier New" pitchFamily="34" charset="-120"/>
-                <a:hlinkClick r:id="rId6"/>
-              </a:rPr>
-              <a:t>connect.posit.cloud</a:t>
-            </a:r>
-            <a:endParaRPr lang="es-UY" sz="1200" b="1" noProof="0" dirty="0"/>
-          </a:p>
-        </p:txBody>
-      </p:sp>
-    </p:spTree>
   </p:cSld>
   <p:clrMapOvr>
     <a:masterClrMapping/>

--- a/clase1/clase1.pptx
+++ b/clase1/clase1.pptx
@@ -17,6 +17,7 @@
     <p:sldId id="268" r:id="rId9"/>
     <p:sldId id="269" r:id="rId10"/>
     <p:sldId id="272" r:id="rId21"/>
+    <p:sldId id="280" r:id="rId7"/>
     <p:sldId id="273" r:id="rId22"/>
     <p:sldId id="274" r:id="rId23"/>
     <p:sldId id="270" r:id="rId11"/>
@@ -25,6 +26,8 @@
     <p:sldId id="276" r:id="rId25"/>
     <p:sldId id="277" r:id="rId26"/>
     <p:sldId id="278" r:id="rId27"/>
+    <p:sldId id="281" r:id="rId29"/>
+    <p:sldId id="282" r:id="rId30"/>
     <p:sldId id="279" r:id="rId28"/>
     <p:sldId id="263" r:id="rId13"/>
   </p:sldIdLst>
@@ -3118,6 +3121,1194 @@
 </file>
 
 <file path=ppt/slides/slide10.xml><?xml version="1.0" encoding="utf-8"?>
+<p:sld xmlns:a="http://schemas.openxmlformats.org/drawingml/2006/main" xmlns:p="http://schemas.openxmlformats.org/presentationml/2006/main" xmlns:r="http://schemas.openxmlformats.org/officeDocument/2006/relationships">
+  <p:cSld>
+    <p:bg>
+      <p:bgPr>
+        <a:solidFill>
+          <a:srgbClr val="FFFFFF"/>
+        </a:solidFill>
+        <a:effectLst/>
+      </p:bgPr>
+    </p:bg>
+    <p:spTree>
+      <p:nvGrpSpPr>
+        <p:cNvPr id="1" name=""/>
+        <p:cNvGrpSpPr/>
+        <p:nvPr/>
+      </p:nvGrpSpPr>
+      <p:grpSpPr/>
+      <p:sp>
+        <p:nvSpPr>
+          <p:cNvPr id="2" name="Text 0">
+            <a:extLst>
+              <a:ext uri="{FF2B5EF4-FFF2-40B4-BE49-F238E27FC236}">
+                <a16:creationId xmlns:a16="http://schemas.microsoft.com/office/drawing/2014/main" id="{45FBCF84-BF0C-00DD-1115-ECF03D12DDA6}"/>
+              </a:ext>
+            </a:extLst>
+          </p:cNvPr>
+          <p:cNvSpPr txBox="1"/>
+          <p:nvPr/>
+        </p:nvSpPr>
+        <p:spPr>
+          <a:xfrm>
+            <a:off x="502920" y="320040"/>
+            <a:ext cx="7040880" cy="640080"/>
+          </a:xfrm>
+          <a:prstGeom prst="rect">
+            <a:avLst/>
+          </a:prstGeom>
+          <a:noFill/>
+          <a:ln/>
+        </p:spPr>
+        <p:txBody>
+          <a:bodyPr wrap="square" lIns="0" tIns="0" rIns="0" bIns="0" rtlCol="0" anchor="ctr"/>
+          <a:lstStyle/>
+          <a:p>
+            <a:pPr marL="0" indent="0">
+              <a:buNone/>
+            </a:pPr>
+            <a:r>
+              <a:rPr lang="en-US" sz="3000" b="1" dirty="0">
+                <a:solidFill>
+                  <a:srgbClr val="2E0A4E"/>
+                </a:solidFill>
+                <a:latin typeface="Oswald" pitchFamily="34" charset="0"/>
+                <a:ea typeface="Oswald" pitchFamily="34" charset="-122"/>
+                <a:cs typeface="Oswald" pitchFamily="34" charset="-120"/>
+              </a:rPr>
+              <a:t>Paso a paso (2)</a:t>
+            </a:r>
+            <a:endParaRPr lang="en-US" sz="3000" dirty="0"/>
+          </a:p>
+        </p:txBody>
+      </p:sp>
+      <p:sp>
+        <p:nvSpPr>
+          <p:cNvPr id="11" name="Shape 9">
+            <a:extLst>
+              <a:ext uri="{FF2B5EF4-FFF2-40B4-BE49-F238E27FC236}">
+                <a16:creationId xmlns:a16="http://schemas.microsoft.com/office/drawing/2014/main" id="{1E4D2BBF-BB0F-7CF4-3842-6325D6A2CD35}"/>
+              </a:ext>
+            </a:extLst>
+          </p:cNvPr>
+          <p:cNvSpPr/>
+          <p:nvPr/>
+        </p:nvSpPr>
+        <p:spPr>
+          <a:xfrm>
+            <a:off x="439616" y="1188720"/>
+            <a:ext cx="2560320" cy="1463040"/>
+          </a:xfrm>
+          <a:prstGeom prst="roundRect">
+            <a:avLst>
+              <a:gd name="adj" fmla="val 2143"/>
+            </a:avLst>
+          </a:prstGeom>
+          <a:solidFill>
+            <a:srgbClr val="5A189A"/>
+          </a:solidFill>
+          <a:ln w="12700">
+            <a:solidFill>
+              <a:srgbClr val="5A189A"/>
+            </a:solidFill>
+            <a:prstDash val="solid"/>
+          </a:ln>
+        </p:spPr>
+        <p:txBody>
+          <a:bodyPr/>
+          <a:lstStyle/>
+          <a:p>
+            <a:endParaRPr lang="en-US"/>
+          </a:p>
+        </p:txBody>
+      </p:sp>
+      <p:sp>
+        <p:nvSpPr>
+          <p:cNvPr id="12" name="Text 10">
+            <a:extLst>
+              <a:ext uri="{FF2B5EF4-FFF2-40B4-BE49-F238E27FC236}">
+                <a16:creationId xmlns:a16="http://schemas.microsoft.com/office/drawing/2014/main" id="{57EA7703-08D4-E6C4-4FDB-5B08F7881055}"/>
+              </a:ext>
+            </a:extLst>
+          </p:cNvPr>
+          <p:cNvSpPr txBox="1"/>
+          <p:nvPr/>
+        </p:nvSpPr>
+        <p:spPr>
+          <a:xfrm>
+            <a:off x="668216" y="1256068"/>
+            <a:ext cx="2103120" cy="502920"/>
+          </a:xfrm>
+          <a:prstGeom prst="rect">
+            <a:avLst/>
+          </a:prstGeom>
+          <a:noFill/>
+          <a:ln/>
+        </p:spPr>
+        <p:txBody>
+          <a:bodyPr wrap="square" lIns="0" tIns="0" rIns="0" bIns="0" rtlCol="0" anchor="ctr"/>
+          <a:lstStyle/>
+          <a:p>
+            <a:pPr marL="0" indent="0">
+              <a:buNone/>
+            </a:pPr>
+            <a:r>
+              <a:rPr lang="en-US" sz="1600" b="1" dirty="0">
+                <a:solidFill>
+                  <a:srgbClr val="FFFFFF"/>
+                </a:solidFill>
+                <a:latin typeface="Oswald" pitchFamily="34" charset="0"/>
+                <a:ea typeface="Oswald" pitchFamily="34" charset="-122"/>
+                <a:cs typeface="Oswald" pitchFamily="34" charset="-120"/>
+              </a:rPr>
+              <a:t>OBJETIVO 3</a:t>
+            </a:r>
+            <a:endParaRPr lang="en-US" sz="1600" dirty="0"/>
+          </a:p>
+        </p:txBody>
+      </p:sp>
+      <p:sp>
+        <p:nvSpPr>
+          <p:cNvPr id="13" name="Text 11">
+            <a:extLst>
+              <a:ext uri="{FF2B5EF4-FFF2-40B4-BE49-F238E27FC236}">
+                <a16:creationId xmlns:a16="http://schemas.microsoft.com/office/drawing/2014/main" id="{83082800-1689-F508-4C9C-8E0187A18BDD}"/>
+              </a:ext>
+            </a:extLst>
+          </p:cNvPr>
+          <p:cNvSpPr txBox="1"/>
+          <p:nvPr/>
+        </p:nvSpPr>
+        <p:spPr>
+          <a:xfrm>
+            <a:off x="668216" y="1734572"/>
+            <a:ext cx="2103120" cy="716926"/>
+          </a:xfrm>
+          <a:prstGeom prst="rect">
+            <a:avLst/>
+          </a:prstGeom>
+          <a:noFill/>
+          <a:ln/>
+        </p:spPr>
+        <p:txBody>
+          <a:bodyPr wrap="square" lIns="0" tIns="0" rIns="0" bIns="0" rtlCol="0" anchor="t"/>
+          <a:lstStyle/>
+          <a:p>
+            <a:r>
+              <a:rPr lang="es-ES" sz="1400" dirty="0">
+                <a:solidFill>
+                  <a:schemeClr val="bg1"/>
+                </a:solidFill>
+                <a:latin typeface="Calibri" pitchFamily="34" charset="0"/>
+                <a:ea typeface="Calibri" pitchFamily="34" charset="-122"/>
+                <a:cs typeface="Calibri" pitchFamily="34" charset="-120"/>
+              </a:rPr>
+              <a:t>Trabajar en un proyecto</a:t>
+            </a:r>
+            <a:endParaRPr lang="en-US" sz="1300" dirty="0"/>
+          </a:p>
+        </p:txBody>
+      </p:sp>
+      <p:sp>
+        <p:nvSpPr>
+          <p:cNvPr id="15" name="Shape 9">
+            <a:extLst>
+              <a:ext uri="{FF2B5EF4-FFF2-40B4-BE49-F238E27FC236}">
+                <a16:creationId xmlns:a16="http://schemas.microsoft.com/office/drawing/2014/main" id="{E750D06A-626A-4348-CA99-CE04C627A232}"/>
+              </a:ext>
+            </a:extLst>
+          </p:cNvPr>
+          <p:cNvSpPr/>
+          <p:nvPr/>
+        </p:nvSpPr>
+        <p:spPr>
+          <a:xfrm>
+            <a:off x="439615" y="2719107"/>
+            <a:ext cx="3773659" cy="2281957"/>
+          </a:xfrm>
+          <a:prstGeom prst="roundRect">
+            <a:avLst>
+              <a:gd name="adj" fmla="val 2143"/>
+            </a:avLst>
+          </a:prstGeom>
+          <a:solidFill>
+            <a:schemeClr val="accent1">
+              <a:lumMod val="75000"/>
+            </a:schemeClr>
+          </a:solidFill>
+          <a:ln w="12700">
+            <a:solidFill>
+              <a:schemeClr val="accent1">
+                <a:lumMod val="75000"/>
+              </a:schemeClr>
+            </a:solidFill>
+            <a:prstDash val="solid"/>
+          </a:ln>
+        </p:spPr>
+        <p:txBody>
+          <a:bodyPr/>
+          <a:lstStyle/>
+          <a:p>
+            <a:endParaRPr lang="en-US"/>
+          </a:p>
+        </p:txBody>
+      </p:sp>
+      <p:sp>
+        <p:nvSpPr>
+          <p:cNvPr id="17" name="Text 11">
+            <a:extLst>
+              <a:ext uri="{FF2B5EF4-FFF2-40B4-BE49-F238E27FC236}">
+                <a16:creationId xmlns:a16="http://schemas.microsoft.com/office/drawing/2014/main" id="{F3440954-5CFF-06C7-8641-E2E38BA6F847}"/>
+              </a:ext>
+            </a:extLst>
+          </p:cNvPr>
+          <p:cNvSpPr txBox="1"/>
+          <p:nvPr/>
+        </p:nvSpPr>
+        <p:spPr>
+          <a:xfrm>
+            <a:off x="668216" y="2899117"/>
+            <a:ext cx="3369212" cy="716926"/>
+          </a:xfrm>
+          <a:prstGeom prst="rect">
+            <a:avLst/>
+          </a:prstGeom>
+          <a:noFill/>
+          <a:ln/>
+        </p:spPr>
+        <p:txBody>
+          <a:bodyPr wrap="square" lIns="0" tIns="0" rIns="0" bIns="0" rtlCol="0" anchor="t"/>
+          <a:lstStyle/>
+          <a:p>
+            <a:r>
+              <a:rPr lang="es-ES" sz="1400" b="1" dirty="0">
+                <a:solidFill>
+                  <a:schemeClr val="bg1"/>
+                </a:solidFill>
+                <a:latin typeface="Calibri" pitchFamily="34" charset="0"/>
+                <a:ea typeface="Calibri" pitchFamily="34" charset="-122"/>
+                <a:cs typeface="Calibri" pitchFamily="34" charset="-120"/>
+              </a:rPr>
+              <a:t>Un proyecto es una carpeta con un archivo </a:t>
+            </a:r>
+            <a:r>
+              <a:rPr lang="es-ES" sz="1400" b="1" dirty="0" i="1">
+                <a:solidFill>
+                  <a:schemeClr val="bg1"/>
+                </a:solidFill>
+                <a:latin typeface="Calibri" pitchFamily="34" charset="0"/>
+                <a:ea typeface="Calibri" pitchFamily="34" charset="-122"/>
+                <a:cs typeface="Calibri" pitchFamily="34" charset="-120"/>
+              </a:rPr>
+              <a:t>.Rproj</a:t>
+            </a:r>
+            <a:r>
+              <a:rPr lang="es-ES" sz="1400" b="1" dirty="0">
+                <a:solidFill>
+                  <a:schemeClr val="bg1"/>
+                </a:solidFill>
+                <a:latin typeface="Calibri" pitchFamily="34" charset="0"/>
+                <a:ea typeface="Calibri" pitchFamily="34" charset="-122"/>
+                <a:cs typeface="Calibri" pitchFamily="34" charset="-120"/>
+              </a:rPr>
+              <a:t>. Mientras está abierto, R trabaja desde esa carpeta y rutas como </a:t>
+            </a:r>
+            <a:r>
+              <a:rPr lang="es-ES" sz="1400" b="1" dirty="0" i="1">
+                <a:solidFill>
+                  <a:schemeClr val="bg1"/>
+                </a:solidFill>
+                <a:latin typeface="Calibri" pitchFamily="34" charset="0"/>
+                <a:ea typeface="Calibri" pitchFamily="34" charset="-122"/>
+                <a:cs typeface="Calibri" pitchFamily="34" charset="-120"/>
+              </a:rPr>
+              <a:t>datos/</a:t>
+            </a:r>
+            <a:r>
+              <a:rPr lang="es-ES" sz="1400" b="1" dirty="0">
+                <a:solidFill>
+                  <a:schemeClr val="bg1"/>
+                </a:solidFill>
+                <a:latin typeface="Calibri" pitchFamily="34" charset="0"/>
+                <a:ea typeface="Calibri" pitchFamily="34" charset="-122"/>
+                <a:cs typeface="Calibri" pitchFamily="34" charset="-120"/>
+              </a:rPr>
+              <a:t> funcionan solas.</a:t>
+            </a:r>
+          </a:p>
+          <a:p>
+            <a:endParaRPr lang="es-ES" sz="1400" b="1" dirty="0">
+              <a:solidFill>
+                <a:schemeClr val="bg1"/>
+              </a:solidFill>
+              <a:latin typeface="Calibri" pitchFamily="34" charset="0"/>
+              <a:ea typeface="Calibri" pitchFamily="34" charset="-122"/>
+              <a:cs typeface="Calibri" pitchFamily="34" charset="-120"/>
+            </a:endParaRPr>
+          </a:p>
+          <a:p>
+            <a:r>
+              <a:rPr lang="es-ES" sz="1400" b="1" dirty="0">
+                <a:solidFill>
+                  <a:schemeClr val="bg1"/>
+                </a:solidFill>
+                <a:latin typeface="Calibri" pitchFamily="34" charset="0"/>
+                <a:ea typeface="Calibri" pitchFamily="34" charset="-122"/>
+                <a:cs typeface="Calibri" pitchFamily="34" charset="-120"/>
+              </a:rPr>
+              <a:t>Su nombre aparece arriba a la derecha de RStudio. Si no está, </a:t>
+            </a:r>
+            <a:r>
+              <a:rPr lang="es-ES" sz="1400" b="1" dirty="0" i="1">
+                <a:solidFill>
+                  <a:schemeClr val="bg1"/>
+                </a:solidFill>
+                <a:latin typeface="Calibri" pitchFamily="34" charset="0"/>
+                <a:ea typeface="Calibri" pitchFamily="34" charset="-122"/>
+                <a:cs typeface="Calibri" pitchFamily="34" charset="-120"/>
+              </a:rPr>
+              <a:t>File, Open Project</a:t>
+            </a:r>
+            <a:r>
+              <a:rPr lang="es-ES" sz="1400" b="1" dirty="0">
+                <a:solidFill>
+                  <a:schemeClr val="bg1"/>
+                </a:solidFill>
+                <a:latin typeface="Calibri" pitchFamily="34" charset="0"/>
+                <a:ea typeface="Calibri" pitchFamily="34" charset="-122"/>
+                <a:cs typeface="Calibri" pitchFamily="34" charset="-120"/>
+              </a:rPr>
+              <a:t> y elegir </a:t>
+            </a:r>
+            <a:r>
+              <a:rPr lang="es-ES" sz="1400" b="1" dirty="0" i="1">
+                <a:solidFill>
+                  <a:schemeClr val="bg1"/>
+                </a:solidFill>
+                <a:latin typeface="Calibri" pitchFamily="34" charset="0"/>
+                <a:ea typeface="Calibri" pitchFamily="34" charset="-122"/>
+                <a:cs typeface="Calibri" pitchFamily="34" charset="-120"/>
+              </a:rPr>
+              <a:t>visualizacion_datos_shiny.Rproj</a:t>
+            </a:r>
+            <a:r>
+              <a:rPr lang="es-ES" sz="1400" b="1" dirty="0">
+                <a:solidFill>
+                  <a:schemeClr val="bg1"/>
+                </a:solidFill>
+                <a:latin typeface="Calibri" pitchFamily="34" charset="0"/>
+                <a:ea typeface="Calibri" pitchFamily="34" charset="-122"/>
+                <a:cs typeface="Calibri" pitchFamily="34" charset="-120"/>
+              </a:rPr>
+              <a:t>.</a:t>
+            </a:r>
+          </a:p>
+        </p:txBody>
+      </p:sp>
+      <p:pic>
+        <p:nvPicPr>
+          <p:cNvPr id="18" name="Picture 17" descr="cap1.png"/>
+          <p:cNvPicPr>
+            <a:picLocks noChangeAspect="1"/>
+          </p:cNvPicPr>
+          <p:nvPr/>
+        </p:nvPicPr>
+        <p:blipFill>
+          <a:blip r:embed="rId5"/>
+          <a:stretch>
+            <a:fillRect/>
+          </a:stretch>
+        </p:blipFill>
+        <p:spPr>
+          <a:xfrm>
+            <a:off x="4870731" y="1188720"/>
+            <a:ext cx="3608778" cy="3100000"/>
+          </a:xfrm>
+          <a:prstGeom prst="rect">
+            <a:avLst/>
+          </a:prstGeom>
+        </p:spPr>
+      </p:pic>
+    </p:spTree>
+  </p:cSld>
+  <p:clrMapOvr>
+    <a:masterClrMapping/>
+  </p:clrMapOvr>
+</p:sld>
+</file>
+
+<file path=ppt/slides/slide11.xml><?xml version="1.0" encoding="utf-8"?>
+<p:sld xmlns:a="http://schemas.openxmlformats.org/drawingml/2006/main" xmlns:p="http://schemas.openxmlformats.org/presentationml/2006/main" xmlns:r="http://schemas.openxmlformats.org/officeDocument/2006/relationships">
+  <p:cSld>
+    <p:bg>
+      <p:bgPr>
+        <a:solidFill>
+          <a:srgbClr val="FFFFFF"/>
+        </a:solidFill>
+        <a:effectLst/>
+      </p:bgPr>
+    </p:bg>
+    <p:spTree>
+      <p:nvGrpSpPr>
+        <p:cNvPr id="1" name=""/>
+        <p:cNvGrpSpPr/>
+        <p:nvPr/>
+      </p:nvGrpSpPr>
+      <p:grpSpPr/>
+      <p:sp>
+        <p:nvSpPr>
+          <p:cNvPr id="2" name="Text 0"/>
+          <p:cNvSpPr txBox="1"/>
+          <p:nvPr/>
+        </p:nvSpPr>
+        <p:spPr>
+          <a:xfrm>
+            <a:off x="502920" y="320040"/>
+            <a:ext cx="7040880" cy="640080"/>
+          </a:xfrm>
+          <a:prstGeom prst="rect">
+            <a:avLst/>
+          </a:prstGeom>
+          <a:noFill/>
+          <a:ln/>
+        </p:spPr>
+        <p:txBody>
+          <a:bodyPr wrap="square" lIns="0" tIns="0" rIns="0" bIns="0" rtlCol="0" anchor="ctr"/>
+          <a:lstStyle/>
+          <a:p>
+            <a:r>
+              <a:rPr lang="en-US" sz="3000" b="1" dirty="0">
+                <a:solidFill>
+                  <a:srgbClr val="2E0A4E"/>
+                </a:solidFill>
+                <a:latin typeface="Oswald" pitchFamily="34" charset="0"/>
+                <a:ea typeface="Oswald" pitchFamily="34" charset="-122"/>
+                <a:cs typeface="Oswald" pitchFamily="34" charset="-120"/>
+              </a:rPr>
+              <a:t>Paso a paso (3)</a:t>
+            </a:r>
+            <a:endParaRPr lang="en-US" sz="3000" dirty="0"/>
+          </a:p>
+        </p:txBody>
+      </p:sp>
+      <p:sp>
+        <p:nvSpPr>
+          <p:cNvPr id="11" name="Shape 9"/>
+          <p:cNvSpPr/>
+          <p:nvPr/>
+        </p:nvSpPr>
+        <p:spPr>
+          <a:xfrm>
+            <a:off x="439616" y="1188720"/>
+            <a:ext cx="2560320" cy="1463040"/>
+          </a:xfrm>
+          <a:prstGeom prst="roundRect">
+            <a:avLst>
+              <a:gd name="adj" fmla="val 2143"/>
+            </a:avLst>
+          </a:prstGeom>
+          <a:solidFill>
+            <a:srgbClr val="5A189A"/>
+          </a:solidFill>
+          <a:ln w="12700">
+            <a:solidFill>
+              <a:srgbClr val="5A189A"/>
+            </a:solidFill>
+            <a:prstDash val="solid"/>
+          </a:ln>
+        </p:spPr>
+        <p:txBody>
+          <a:bodyPr/>
+          <a:lstStyle/>
+          <a:p>
+            <a:endParaRPr lang="en-US"/>
+          </a:p>
+        </p:txBody>
+      </p:sp>
+      <p:sp>
+        <p:nvSpPr>
+          <p:cNvPr id="12" name="Text 10"/>
+          <p:cNvSpPr txBox="1"/>
+          <p:nvPr/>
+        </p:nvSpPr>
+        <p:spPr>
+          <a:xfrm>
+            <a:off x="668216" y="1256068"/>
+            <a:ext cx="2103120" cy="502920"/>
+          </a:xfrm>
+          <a:prstGeom prst="rect">
+            <a:avLst/>
+          </a:prstGeom>
+          <a:noFill/>
+          <a:ln/>
+        </p:spPr>
+        <p:txBody>
+          <a:bodyPr wrap="square" lIns="0" tIns="0" rIns="0" bIns="0" rtlCol="0" anchor="ctr"/>
+          <a:lstStyle/>
+          <a:p>
+            <a:pPr marL="0" indent="0">
+              <a:buNone/>
+            </a:pPr>
+            <a:r>
+              <a:rPr lang="en-US" sz="1600" b="1" dirty="0">
+                <a:solidFill>
+                  <a:srgbClr val="FFFFFF"/>
+                </a:solidFill>
+                <a:latin typeface="Oswald" pitchFamily="34" charset="0"/>
+                <a:ea typeface="Oswald" pitchFamily="34" charset="-122"/>
+                <a:cs typeface="Oswald" pitchFamily="34" charset="-120"/>
+              </a:rPr>
+              <a:t>OBJETIVO 4</a:t>
+            </a:r>
+            <a:endParaRPr lang="en-US" sz="1600" dirty="0"/>
+          </a:p>
+        </p:txBody>
+      </p:sp>
+      <p:sp>
+        <p:nvSpPr>
+          <p:cNvPr id="13" name="Text 11"/>
+          <p:cNvSpPr txBox="1"/>
+          <p:nvPr/>
+        </p:nvSpPr>
+        <p:spPr>
+          <a:xfrm>
+            <a:off x="668216" y="1734572"/>
+            <a:ext cx="2103120" cy="716926"/>
+          </a:xfrm>
+          <a:prstGeom prst="rect">
+            <a:avLst/>
+          </a:prstGeom>
+          <a:noFill/>
+          <a:ln/>
+        </p:spPr>
+        <p:txBody>
+          <a:bodyPr wrap="square" lIns="0" tIns="0" rIns="0" bIns="0" rtlCol="0" anchor="t"/>
+          <a:lstStyle/>
+          <a:p>
+            <a:r>
+              <a:rPr lang="es-ES" sz="1400" dirty="0">
+                <a:solidFill>
+                  <a:schemeClr val="bg1"/>
+                </a:solidFill>
+                <a:latin typeface="Calibri" pitchFamily="34" charset="0"/>
+                <a:ea typeface="Calibri" pitchFamily="34" charset="-122"/>
+                <a:cs typeface="Calibri" pitchFamily="34" charset="-120"/>
+              </a:rPr>
+              <a:t>Los cuatro paneles de RStudio</a:t>
+            </a:r>
+            <a:endParaRPr lang="en-US" sz="1300" dirty="0"/>
+          </a:p>
+        </p:txBody>
+      </p:sp>
+      <p:sp>
+        <p:nvSpPr>
+          <p:cNvPr id="15" name="Shape 9">
+            <a:extLst>
+              <a:ext uri="{FF2B5EF4-FFF2-40B4-BE49-F238E27FC236}">
+                <a16:creationId xmlns:a16="http://schemas.microsoft.com/office/drawing/2014/main" id="{1ED05ED1-CE50-06A2-178F-B4365671B18F}"/>
+              </a:ext>
+            </a:extLst>
+          </p:cNvPr>
+          <p:cNvSpPr/>
+          <p:nvPr/>
+        </p:nvSpPr>
+        <p:spPr>
+          <a:xfrm>
+            <a:off x="439615" y="2719107"/>
+            <a:ext cx="3773659" cy="2281957"/>
+          </a:xfrm>
+          <a:prstGeom prst="roundRect">
+            <a:avLst>
+              <a:gd name="adj" fmla="val 2143"/>
+            </a:avLst>
+          </a:prstGeom>
+          <a:solidFill>
+            <a:schemeClr val="accent1">
+              <a:lumMod val="75000"/>
+            </a:schemeClr>
+          </a:solidFill>
+          <a:ln w="12700">
+            <a:solidFill>
+              <a:schemeClr val="accent1">
+                <a:lumMod val="75000"/>
+              </a:schemeClr>
+            </a:solidFill>
+            <a:prstDash val="solid"/>
+          </a:ln>
+        </p:spPr>
+        <p:txBody>
+          <a:bodyPr/>
+          <a:lstStyle/>
+          <a:p>
+            <a:endParaRPr lang="en-US"/>
+          </a:p>
+        </p:txBody>
+      </p:sp>
+      <p:sp>
+        <p:nvSpPr>
+          <p:cNvPr id="17" name="Text 11">
+            <a:extLst>
+              <a:ext uri="{FF2B5EF4-FFF2-40B4-BE49-F238E27FC236}">
+                <a16:creationId xmlns:a16="http://schemas.microsoft.com/office/drawing/2014/main" id="{1291722D-C809-2238-9939-339690D52438}"/>
+              </a:ext>
+            </a:extLst>
+          </p:cNvPr>
+          <p:cNvSpPr txBox="1"/>
+          <p:nvPr/>
+        </p:nvSpPr>
+        <p:spPr>
+          <a:xfrm>
+            <a:off x="668216" y="2899117"/>
+            <a:ext cx="3369212" cy="716926"/>
+          </a:xfrm>
+          <a:prstGeom prst="rect">
+            <a:avLst/>
+          </a:prstGeom>
+          <a:noFill/>
+          <a:ln/>
+        </p:spPr>
+        <p:txBody>
+          <a:bodyPr wrap="square" lIns="0" tIns="0" rIns="0" bIns="0" rtlCol="0" anchor="t"/>
+          <a:lstStyle/>
+          <a:p>
+            <a:r>
+              <a:rPr lang="es-ES" sz="1400" b="1" dirty="0" err="1">
+                <a:solidFill>
+                  <a:schemeClr val="bg1"/>
+                </a:solidFill>
+                <a:latin typeface="Calibri" pitchFamily="34" charset="0"/>
+                <a:ea typeface="Calibri" pitchFamily="34" charset="-122"/>
+                <a:cs typeface="Calibri" pitchFamily="34" charset="-120"/>
+              </a:rPr>
+              <a:t>En el script se escribe y se guarda. </a:t>
+            </a:r>
+            <a:r>
+              <a:rPr lang="es-ES" sz="1400" b="1" i="1" dirty="0" err="1">
+                <a:solidFill>
+                  <a:schemeClr val="bg1"/>
+                </a:solidFill>
+                <a:latin typeface="Calibri" pitchFamily="34" charset="0"/>
+                <a:ea typeface="Calibri" pitchFamily="34" charset="-122"/>
+                <a:cs typeface="Calibri" pitchFamily="34" charset="-120"/>
+              </a:rPr>
+              <a:t>Ctrl + Enter</a:t>
+            </a:r>
+            <a:r>
+              <a:rPr lang="es-ES" sz="1400" b="1" dirty="0" err="1">
+                <a:solidFill>
+                  <a:schemeClr val="bg1"/>
+                </a:solidFill>
+                <a:latin typeface="Calibri" pitchFamily="34" charset="0"/>
+                <a:ea typeface="Calibri" pitchFamily="34" charset="-122"/>
+                <a:cs typeface="Calibri" pitchFamily="34" charset="-120"/>
+              </a:rPr>
+              <a:t> manda la línea a la consola, donde aparece el resultado.</a:t>
+            </a:r>
+          </a:p>
+          <a:p>
+            <a:endParaRPr lang="es-ES" sz="1400" b="1" dirty="0" err="1">
+              <a:solidFill>
+                <a:schemeClr val="bg1"/>
+              </a:solidFill>
+              <a:latin typeface="Calibri" pitchFamily="34" charset="0"/>
+              <a:ea typeface="Calibri" pitchFamily="34" charset="-122"/>
+              <a:cs typeface="Calibri" pitchFamily="34" charset="-120"/>
+            </a:endParaRPr>
+          </a:p>
+          <a:p>
+            <a:r>
+              <a:rPr lang="es-ES" sz="1400" b="1" dirty="0" err="1">
+                <a:solidFill>
+                  <a:schemeClr val="bg1"/>
+                </a:solidFill>
+                <a:latin typeface="Calibri" pitchFamily="34" charset="0"/>
+                <a:ea typeface="Calibri" pitchFamily="34" charset="-122"/>
+                <a:cs typeface="Calibri" pitchFamily="34" charset="-120"/>
+              </a:rPr>
+              <a:t>Los errores también salen en la consola. Leerlos con calma es la mitad del trabajo.</a:t>
+            </a:r>
+          </a:p>
+        </p:txBody>
+      </p:sp>
+      <p:pic>
+        <p:nvPicPr>
+          <p:cNvPr id="24" name="Picture 23" descr="p2.png"/>
+          <p:cNvPicPr>
+            <a:picLocks noChangeAspect="1"/>
+          </p:cNvPicPr>
+          <p:nvPr/>
+        </p:nvPicPr>
+        <p:blipFill>
+          <a:blip r:embed="rId2"/>
+          <a:stretch>
+            <a:fillRect/>
+          </a:stretch>
+        </p:blipFill>
+        <p:spPr>
+          <a:xfrm>
+            <a:off x="4434840" y="1320165"/>
+            <a:ext cx="4480560" cy="2800350"/>
+          </a:xfrm>
+          <a:prstGeom prst="rect">
+            <a:avLst/>
+          </a:prstGeom>
+          <a:ln w="76200">
+            <a:solidFill>
+              <a:schemeClr val="accent1">
+                <a:lumMod val="75000"/>
+              </a:schemeClr>
+            </a:solidFill>
+          </a:ln>
+        </p:spPr>
+      </p:pic>
+    </p:spTree>
+  </p:cSld>
+  <p:clrMapOvr>
+    <a:masterClrMapping/>
+  </p:clrMapOvr>
+</p:sld>
+</file>
+
+<file path=ppt/slides/slide12.xml><?xml version="1.0" encoding="utf-8"?>
+<p:sld xmlns:a="http://schemas.openxmlformats.org/drawingml/2006/main" xmlns:p="http://schemas.openxmlformats.org/presentationml/2006/main" xmlns:r="http://schemas.openxmlformats.org/officeDocument/2006/relationships">
+  <p:cSld>
+    <p:bg>
+      <p:bgPr>
+        <a:solidFill>
+          <a:srgbClr val="FFFFFF"/>
+        </a:solidFill>
+        <a:effectLst/>
+      </p:bgPr>
+    </p:bg>
+    <p:spTree>
+      <p:nvGrpSpPr>
+        <p:cNvPr id="1" name=""/>
+        <p:cNvGrpSpPr/>
+        <p:nvPr/>
+      </p:nvGrpSpPr>
+      <p:grpSpPr/>
+      <p:sp>
+        <p:nvSpPr>
+          <p:cNvPr id="2" name="Text 0">
+            <a:extLst>
+              <a:ext uri="{FF2B5EF4-FFF2-40B4-BE49-F238E27FC236}">
+                <a16:creationId xmlns:a16="http://schemas.microsoft.com/office/drawing/2014/main" id="{1B8BE186-2227-0AEE-46BF-1738518AF7E2}"/>
+              </a:ext>
+            </a:extLst>
+          </p:cNvPr>
+          <p:cNvSpPr txBox="1"/>
+          <p:nvPr/>
+        </p:nvSpPr>
+        <p:spPr>
+          <a:xfrm>
+            <a:off x="502920" y="320040"/>
+            <a:ext cx="7040880" cy="640080"/>
+          </a:xfrm>
+          <a:prstGeom prst="rect">
+            <a:avLst/>
+          </a:prstGeom>
+          <a:noFill/>
+          <a:ln/>
+        </p:spPr>
+        <p:txBody>
+          <a:bodyPr wrap="square" lIns="0" tIns="0" rIns="0" bIns="0" rtlCol="0" anchor="ctr"/>
+          <a:lstStyle/>
+          <a:p>
+            <a:r>
+              <a:rPr lang="en-US" sz="3000" b="1" dirty="0">
+                <a:solidFill>
+                  <a:srgbClr val="2E0A4E"/>
+                </a:solidFill>
+                <a:latin typeface="Oswald" pitchFamily="34" charset="0"/>
+                <a:ea typeface="Oswald" pitchFamily="34" charset="-122"/>
+                <a:cs typeface="Oswald" pitchFamily="34" charset="-120"/>
+              </a:rPr>
+              <a:t>Paso a paso (4)</a:t>
+            </a:r>
+            <a:endParaRPr lang="en-US" sz="3000" dirty="0"/>
+          </a:p>
+        </p:txBody>
+      </p:sp>
+      <p:sp>
+        <p:nvSpPr>
+          <p:cNvPr id="11" name="Shape 9">
+            <a:extLst>
+              <a:ext uri="{FF2B5EF4-FFF2-40B4-BE49-F238E27FC236}">
+                <a16:creationId xmlns:a16="http://schemas.microsoft.com/office/drawing/2014/main" id="{2D484EA3-17D5-DFDE-7FFB-391D9E546766}"/>
+              </a:ext>
+            </a:extLst>
+          </p:cNvPr>
+          <p:cNvSpPr/>
+          <p:nvPr/>
+        </p:nvSpPr>
+        <p:spPr>
+          <a:xfrm>
+            <a:off x="439616" y="1188720"/>
+            <a:ext cx="2560320" cy="1463040"/>
+          </a:xfrm>
+          <a:prstGeom prst="roundRect">
+            <a:avLst>
+              <a:gd name="adj" fmla="val 2143"/>
+            </a:avLst>
+          </a:prstGeom>
+          <a:solidFill>
+            <a:srgbClr val="5A189A"/>
+          </a:solidFill>
+          <a:ln w="12700">
+            <a:solidFill>
+              <a:srgbClr val="5A189A"/>
+            </a:solidFill>
+            <a:prstDash val="solid"/>
+          </a:ln>
+        </p:spPr>
+        <p:txBody>
+          <a:bodyPr/>
+          <a:lstStyle/>
+          <a:p>
+            <a:endParaRPr lang="en-US"/>
+          </a:p>
+        </p:txBody>
+      </p:sp>
+      <p:sp>
+        <p:nvSpPr>
+          <p:cNvPr id="12" name="Text 10">
+            <a:extLst>
+              <a:ext uri="{FF2B5EF4-FFF2-40B4-BE49-F238E27FC236}">
+                <a16:creationId xmlns:a16="http://schemas.microsoft.com/office/drawing/2014/main" id="{FF346D48-99B4-78ED-CF54-DB6A3D402E26}"/>
+              </a:ext>
+            </a:extLst>
+          </p:cNvPr>
+          <p:cNvSpPr txBox="1"/>
+          <p:nvPr/>
+        </p:nvSpPr>
+        <p:spPr>
+          <a:xfrm>
+            <a:off x="668216" y="1256068"/>
+            <a:ext cx="2103120" cy="502920"/>
+          </a:xfrm>
+          <a:prstGeom prst="rect">
+            <a:avLst/>
+          </a:prstGeom>
+          <a:noFill/>
+          <a:ln/>
+        </p:spPr>
+        <p:txBody>
+          <a:bodyPr wrap="square" lIns="0" tIns="0" rIns="0" bIns="0" rtlCol="0" anchor="ctr"/>
+          <a:lstStyle/>
+          <a:p>
+            <a:pPr marL="0" indent="0">
+              <a:buNone/>
+            </a:pPr>
+            <a:r>
+              <a:rPr lang="en-US" sz="1600" b="1" dirty="0">
+                <a:solidFill>
+                  <a:srgbClr val="FFFFFF"/>
+                </a:solidFill>
+                <a:latin typeface="Oswald" pitchFamily="34" charset="0"/>
+                <a:ea typeface="Oswald" pitchFamily="34" charset="-122"/>
+                <a:cs typeface="Oswald" pitchFamily="34" charset="-120"/>
+              </a:rPr>
+              <a:t>OBJETIVO 4</a:t>
+            </a:r>
+            <a:endParaRPr lang="en-US" sz="1600" dirty="0"/>
+          </a:p>
+        </p:txBody>
+      </p:sp>
+      <p:sp>
+        <p:nvSpPr>
+          <p:cNvPr id="13" name="Text 11">
+            <a:extLst>
+              <a:ext uri="{FF2B5EF4-FFF2-40B4-BE49-F238E27FC236}">
+                <a16:creationId xmlns:a16="http://schemas.microsoft.com/office/drawing/2014/main" id="{961D826F-99A4-C802-E6F8-FA059D329199}"/>
+              </a:ext>
+            </a:extLst>
+          </p:cNvPr>
+          <p:cNvSpPr txBox="1"/>
+          <p:nvPr/>
+        </p:nvSpPr>
+        <p:spPr>
+          <a:xfrm>
+            <a:off x="668216" y="1734572"/>
+            <a:ext cx="2103120" cy="716926"/>
+          </a:xfrm>
+          <a:prstGeom prst="rect">
+            <a:avLst/>
+          </a:prstGeom>
+          <a:noFill/>
+          <a:ln/>
+        </p:spPr>
+        <p:txBody>
+          <a:bodyPr wrap="square" lIns="0" tIns="0" rIns="0" bIns="0" rtlCol="0" anchor="t"/>
+          <a:lstStyle/>
+          <a:p>
+            <a:r>
+              <a:rPr lang="es-ES" sz="1400" dirty="0">
+                <a:solidFill>
+                  <a:schemeClr val="bg1"/>
+                </a:solidFill>
+                <a:latin typeface="Calibri" pitchFamily="34" charset="0"/>
+                <a:ea typeface="Calibri" pitchFamily="34" charset="-122"/>
+                <a:cs typeface="Calibri" pitchFamily="34" charset="-120"/>
+              </a:rPr>
+              <a:t>Lo básico de R</a:t>
+            </a:r>
+          </a:p>
+        </p:txBody>
+      </p:sp>
+      <p:sp>
+        <p:nvSpPr>
+          <p:cNvPr id="15" name="Shape 9">
+            <a:extLst>
+              <a:ext uri="{FF2B5EF4-FFF2-40B4-BE49-F238E27FC236}">
+                <a16:creationId xmlns:a16="http://schemas.microsoft.com/office/drawing/2014/main" id="{F33AC7BE-75B4-F8D4-43E0-87B7AD3B3F34}"/>
+              </a:ext>
+            </a:extLst>
+          </p:cNvPr>
+          <p:cNvSpPr/>
+          <p:nvPr/>
+        </p:nvSpPr>
+        <p:spPr>
+          <a:xfrm>
+            <a:off x="439615" y="2719107"/>
+            <a:ext cx="3773659" cy="2281957"/>
+          </a:xfrm>
+          <a:prstGeom prst="roundRect">
+            <a:avLst>
+              <a:gd name="adj" fmla="val 2143"/>
+            </a:avLst>
+          </a:prstGeom>
+          <a:solidFill>
+            <a:schemeClr val="accent1">
+              <a:lumMod val="75000"/>
+            </a:schemeClr>
+          </a:solidFill>
+          <a:ln w="12700">
+            <a:solidFill>
+              <a:schemeClr val="accent1">
+                <a:lumMod val="75000"/>
+              </a:schemeClr>
+            </a:solidFill>
+            <a:prstDash val="solid"/>
+          </a:ln>
+        </p:spPr>
+        <p:txBody>
+          <a:bodyPr/>
+          <a:lstStyle/>
+          <a:p>
+            <a:endParaRPr lang="en-US"/>
+          </a:p>
+        </p:txBody>
+      </p:sp>
+      <p:sp>
+        <p:nvSpPr>
+          <p:cNvPr id="17" name="Text 11">
+            <a:extLst>
+              <a:ext uri="{FF2B5EF4-FFF2-40B4-BE49-F238E27FC236}">
+                <a16:creationId xmlns:a16="http://schemas.microsoft.com/office/drawing/2014/main" id="{BFEECB63-4CC8-9CA3-665B-7BF2CFCADD52}"/>
+              </a:ext>
+            </a:extLst>
+          </p:cNvPr>
+          <p:cNvSpPr txBox="1"/>
+          <p:nvPr/>
+        </p:nvSpPr>
+        <p:spPr>
+          <a:xfrm>
+            <a:off x="668216" y="2899117"/>
+            <a:ext cx="3369212" cy="716926"/>
+          </a:xfrm>
+          <a:prstGeom prst="rect">
+            <a:avLst/>
+          </a:prstGeom>
+          <a:noFill/>
+          <a:ln/>
+        </p:spPr>
+        <p:txBody>
+          <a:bodyPr wrap="square" lIns="0" tIns="0" rIns="0" bIns="0" rtlCol="0" anchor="t"/>
+          <a:lstStyle/>
+          <a:p>
+            <a:r>
+              <a:rPr lang="es-ES" sz="1400" b="1" i="1" dirty="0">
+                <a:solidFill>
+                  <a:schemeClr val="bg1"/>
+                </a:solidFill>
+                <a:latin typeface="Calibri" pitchFamily="34" charset="0"/>
+                <a:ea typeface="Calibri" pitchFamily="34" charset="-122"/>
+                <a:cs typeface="Calibri" pitchFamily="34" charset="-120"/>
+              </a:rPr>
+              <a:t>&lt;-</a:t>
+            </a:r>
+            <a:r>
+              <a:rPr lang="es-ES" sz="1400" b="1" dirty="0">
+                <a:solidFill>
+                  <a:schemeClr val="bg1"/>
+                </a:solidFill>
+                <a:latin typeface="Calibri" pitchFamily="34" charset="0"/>
+                <a:ea typeface="Calibri" pitchFamily="34" charset="-122"/>
+                <a:cs typeface="Calibri" pitchFamily="34" charset="-120"/>
+              </a:rPr>
+              <a:t> guarda un valor en un objeto. </a:t>
+            </a:r>
+            <a:r>
+              <a:rPr lang="es-ES" sz="1400" b="1" i="1" dirty="0">
+                <a:solidFill>
+                  <a:schemeClr val="bg1"/>
+                </a:solidFill>
+                <a:latin typeface="Calibri" pitchFamily="34" charset="0"/>
+                <a:ea typeface="Calibri" pitchFamily="34" charset="-122"/>
+                <a:cs typeface="Calibri" pitchFamily="34" charset="-120"/>
+              </a:rPr>
+              <a:t>c()</a:t>
+            </a:r>
+            <a:r>
+              <a:rPr lang="es-ES" sz="1400" b="1" dirty="0">
+                <a:solidFill>
+                  <a:schemeClr val="bg1"/>
+                </a:solidFill>
+                <a:latin typeface="Calibri" pitchFamily="34" charset="0"/>
+                <a:ea typeface="Calibri" pitchFamily="34" charset="-122"/>
+                <a:cs typeface="Calibri" pitchFamily="34" charset="-120"/>
+              </a:rPr>
+              <a:t> arma un vector. </a:t>
+            </a:r>
+            <a:r>
+              <a:rPr lang="es-ES" sz="1400" b="1" i="1" dirty="0">
+                <a:solidFill>
+                  <a:schemeClr val="bg1"/>
+                </a:solidFill>
+                <a:latin typeface="Calibri" pitchFamily="34" charset="0"/>
+                <a:ea typeface="Calibri" pitchFamily="34" charset="-122"/>
+                <a:cs typeface="Calibri" pitchFamily="34" charset="-120"/>
+              </a:rPr>
+              <a:t>read.csv()</a:t>
+            </a:r>
+            <a:r>
+              <a:rPr lang="es-ES" sz="1400" b="1" dirty="0">
+                <a:solidFill>
+                  <a:schemeClr val="bg1"/>
+                </a:solidFill>
+                <a:latin typeface="Calibri" pitchFamily="34" charset="0"/>
+                <a:ea typeface="Calibri" pitchFamily="34" charset="-122"/>
+                <a:cs typeface="Calibri" pitchFamily="34" charset="-120"/>
+              </a:rPr>
+              <a:t> lee una tabla, un data frame.</a:t>
+            </a:r>
+            <a:endParaRPr lang="en-US" sz="1300" dirty="0"/>
+          </a:p>
+          <a:p>
+            <a:endParaRPr lang="en-US" sz="1300" dirty="0"/>
+          </a:p>
+          <a:p>
+            <a:r>
+              <a:rPr lang="es-ES" sz="1400" b="1" i="1" dirty="0">
+                <a:solidFill>
+                  <a:schemeClr val="bg1"/>
+                </a:solidFill>
+                <a:latin typeface="Calibri" pitchFamily="34" charset="0"/>
+                <a:ea typeface="Calibri" pitchFamily="34" charset="-122"/>
+                <a:cs typeface="Calibri" pitchFamily="34" charset="-120"/>
+              </a:rPr>
+              <a:t>elecciones$emitidos</a:t>
+            </a:r>
+            <a:r>
+              <a:rPr lang="es-ES" sz="1400" b="1" dirty="0">
+                <a:solidFill>
+                  <a:schemeClr val="bg1"/>
+                </a:solidFill>
+                <a:latin typeface="Calibri" pitchFamily="34" charset="0"/>
+                <a:ea typeface="Calibri" pitchFamily="34" charset="-122"/>
+                <a:cs typeface="Calibri" pitchFamily="34" charset="-120"/>
+              </a:rPr>
+              <a:t> elige una columna y </a:t>
+            </a:r>
+            <a:r>
+              <a:rPr lang="es-ES" sz="1400" b="1" i="1" dirty="0">
+                <a:solidFill>
+                  <a:schemeClr val="bg1"/>
+                </a:solidFill>
+                <a:latin typeface="Calibri" pitchFamily="34" charset="0"/>
+                <a:ea typeface="Calibri" pitchFamily="34" charset="-122"/>
+                <a:cs typeface="Calibri" pitchFamily="34" charset="-120"/>
+              </a:rPr>
+              <a:t>sum()</a:t>
+            </a:r>
+            <a:r>
+              <a:rPr lang="es-ES" sz="1400" b="1" dirty="0">
+                <a:solidFill>
+                  <a:schemeClr val="bg1"/>
+                </a:solidFill>
+                <a:latin typeface="Calibri" pitchFamily="34" charset="0"/>
+                <a:ea typeface="Calibri" pitchFamily="34" charset="-122"/>
+                <a:cs typeface="Calibri" pitchFamily="34" charset="-120"/>
+              </a:rPr>
+              <a:t> la suma. Todo está en </a:t>
+            </a:r>
+            <a:r>
+              <a:rPr lang="es-ES" sz="1400" b="1" i="1" dirty="0">
+                <a:solidFill>
+                  <a:schemeClr val="bg1"/>
+                </a:solidFill>
+                <a:latin typeface="Calibri" pitchFamily="34" charset="0"/>
+                <a:ea typeface="Calibri" pitchFamily="34" charset="-122"/>
+                <a:cs typeface="Calibri" pitchFamily="34" charset="-120"/>
+              </a:rPr>
+              <a:t>clase1/primeros_pasos.R</a:t>
+            </a:r>
+            <a:r>
+              <a:rPr lang="es-ES" sz="1400" b="1" dirty="0">
+                <a:solidFill>
+                  <a:schemeClr val="bg1"/>
+                </a:solidFill>
+                <a:latin typeface="Calibri" pitchFamily="34" charset="0"/>
+                <a:ea typeface="Calibri" pitchFamily="34" charset="-122"/>
+                <a:cs typeface="Calibri" pitchFamily="34" charset="-120"/>
+              </a:rPr>
+              <a:t>.</a:t>
+            </a:r>
+            <a:endParaRPr lang="en-US" sz="1300" dirty="0"/>
+          </a:p>
+        </p:txBody>
+      </p:sp>
+      <p:pic>
+        <p:nvPicPr>
+          <p:cNvPr id="22" name="Picture 21" descr="p3.png"/>
+          <p:cNvPicPr>
+            <a:picLocks noChangeAspect="1"/>
+          </p:cNvPicPr>
+          <p:nvPr/>
+        </p:nvPicPr>
+        <p:blipFill>
+          <a:blip r:embed="rId2"/>
+          <a:stretch>
+            <a:fillRect/>
+          </a:stretch>
+        </p:blipFill>
+        <p:spPr>
+          <a:xfrm>
+            <a:off x="4434840" y="1471757"/>
+            <a:ext cx="4480560" cy="2497165"/>
+          </a:xfrm>
+          <a:prstGeom prst="rect">
+            <a:avLst/>
+          </a:prstGeom>
+          <a:ln w="76200">
+            <a:solidFill>
+              <a:schemeClr val="accent1">
+                <a:lumMod val="75000"/>
+              </a:schemeClr>
+            </a:solidFill>
+          </a:ln>
+        </p:spPr>
+      </p:pic>
+    </p:spTree>
+  </p:cSld>
+  <p:clrMapOvr>
+    <a:masterClrMapping/>
+  </p:clrMapOvr>
+</p:sld>
+</file>
+
+<file path=ppt/slides/slide13.xml><?xml version="1.0" encoding="utf-8"?>
 <p:sld xmlns:a="http://schemas.openxmlformats.org/drawingml/2006/main" xmlns:r="http://schemas.openxmlformats.org/officeDocument/2006/relationships" xmlns:p="http://schemas.openxmlformats.org/presentationml/2006/main">
   <p:cSld>
     <p:spTree>
@@ -3446,7 +4637,7 @@
 </p:sld>
 </file>
 
-<file path=ppt/slides/slide11.xml><?xml version="1.0" encoding="utf-8"?>
+<file path=ppt/slides/slide14.xml><?xml version="1.0" encoding="utf-8"?>
 <p:sld xmlns:a="http://schemas.openxmlformats.org/drawingml/2006/main" xmlns:r="http://schemas.openxmlformats.org/officeDocument/2006/relationships" xmlns:p="http://schemas.openxmlformats.org/presentationml/2006/main">
   <p:cSld>
     <p:spTree>
@@ -3599,879 +4790,6 @@
         <p14:creationId xmlns:p14="http://schemas.microsoft.com/office/powerpoint/2010/main" val="2543718561"/>
       </p:ext>
     </p:extLst>
-  </p:cSld>
-  <p:clrMapOvr>
-    <a:masterClrMapping/>
-  </p:clrMapOvr>
-</p:sld>
-</file>
-
-<file path=ppt/slides/slide12.xml><?xml version="1.0" encoding="utf-8"?>
-<p:sld xmlns:a="http://schemas.openxmlformats.org/drawingml/2006/main" xmlns:r="http://schemas.openxmlformats.org/officeDocument/2006/relationships" xmlns:p="http://schemas.openxmlformats.org/presentationml/2006/main">
-  <p:cSld name="Slide 8">
-    <p:bg>
-      <p:bgPr>
-        <a:solidFill>
-          <a:srgbClr val="2E0A4E"/>
-        </a:solidFill>
-        <a:effectLst/>
-      </p:bgPr>
-    </p:bg>
-    <p:spTree>
-      <p:nvGrpSpPr>
-        <p:cNvPr id="1" name=""/>
-        <p:cNvGrpSpPr/>
-        <p:nvPr/>
-      </p:nvGrpSpPr>
-      <p:grpSpPr>
-        <a:xfrm>
-          <a:off x="0" y="0"/>
-          <a:ext cx="0" cy="0"/>
-          <a:chOff x="0" y="0"/>
-          <a:chExt cx="0" cy="0"/>
-        </a:xfrm>
-      </p:grpSpPr>
-      <p:sp>
-        <p:nvSpPr>
-          <p:cNvPr id="3" name="Text 1"/>
-          <p:cNvSpPr txBox="1"/>
-          <p:nvPr/>
-        </p:nvSpPr>
-        <p:spPr>
-          <a:xfrm>
-            <a:off x="960120" y="845820"/>
-            <a:ext cx="7315200" cy="1463040"/>
-          </a:xfrm>
-          <a:prstGeom prst="rect">
-            <a:avLst/>
-          </a:prstGeom>
-          <a:noFill/>
-          <a:ln/>
-        </p:spPr>
-        <p:txBody>
-          <a:bodyPr wrap="square" lIns="0" tIns="0" rIns="0" bIns="0" rtlCol="0" anchor="t"/>
-          <a:lstStyle/>
-          <a:p>
-            <a:pPr marL="0" indent="0">
-              <a:buNone/>
-            </a:pPr>
-            <a:r>
-              <a:rPr lang="es-UY" sz="3000" noProof="0" dirty="0">
-                <a:solidFill>
-                  <a:srgbClr val="FFFFFF"/>
-                </a:solidFill>
-                <a:latin typeface="Oswald" pitchFamily="34" charset="0"/>
-                <a:ea typeface="Oswald" pitchFamily="34" charset="-122"/>
-                <a:cs typeface="Oswald" pitchFamily="34" charset="-120"/>
-              </a:rPr>
-              <a:t>Antes de la próxima clase.</a:t>
-            </a:r>
-          </a:p>
-          <a:p>
-            <a:pPr marL="0" indent="0">
-              <a:buNone/>
-            </a:pPr>
-            <a:endParaRPr lang="es-UY" sz="3000" dirty="0">
-              <a:solidFill>
-                <a:srgbClr val="FFFFFF"/>
-              </a:solidFill>
-              <a:latin typeface="Oswald" pitchFamily="34" charset="0"/>
-            </a:endParaRPr>
-          </a:p>
-          <a:p>
-            <a:pPr marL="0" indent="0">
-              <a:buNone/>
-            </a:pPr>
-            <a:r>
-              <a:rPr lang="es-UY" sz="3000" noProof="0" dirty="0">
-                <a:solidFill>
-                  <a:srgbClr val="FFFFFF"/>
-                </a:solidFill>
-                <a:latin typeface="Oswald" pitchFamily="34" charset="0"/>
-              </a:rPr>
-              <a:t>-Correr primeros_pasos.R completo</a:t>
-            </a:r>
-          </a:p>
-          <a:p>
-            <a:pPr marL="0" indent="0">
-              <a:buNone/>
-            </a:pPr>
-            <a:r>
-              <a:rPr lang="es-UY" sz="3000" dirty="0">
-                <a:solidFill>
-                  <a:srgbClr val="FFFFFF"/>
-                </a:solidFill>
-                <a:latin typeface="Oswald" pitchFamily="34" charset="0"/>
-              </a:rPr>
-              <a:t>-Tener R, RStudio y paquetes listos</a:t>
-            </a:r>
-          </a:p>
-          <a:p>
-            <a:pPr marL="0" indent="0">
-              <a:buNone/>
-            </a:pPr>
-            <a:r>
-              <a:rPr lang="es-UY" sz="3000" b="1" noProof="0" dirty="0">
-                <a:solidFill>
-                  <a:srgbClr val="FFFFFF"/>
-                </a:solidFill>
-                <a:latin typeface="Oswald" pitchFamily="34" charset="0"/>
-              </a:rPr>
-              <a:t>-</a:t>
-            </a:r>
-            <a:r>
-              <a:rPr lang="es-UY" sz="3000" b="1" dirty="0">
-                <a:solidFill>
-                  <a:srgbClr val="FFFFFF"/>
-                </a:solidFill>
-                <a:latin typeface="Oswald" pitchFamily="34" charset="0"/>
-              </a:rPr>
-              <a:t>Hacer formulario de diagnóstico:</a:t>
-            </a:r>
-          </a:p>
-          <a:p>
-            <a:pPr marL="0" indent="0">
-              <a:buNone/>
-            </a:pPr>
-            <a:endParaRPr lang="es-UY" sz="3000" b="1" noProof="0" dirty="0">
-              <a:solidFill>
-                <a:srgbClr val="FFFFFF"/>
-              </a:solidFill>
-              <a:latin typeface="Oswald" pitchFamily="34" charset="0"/>
-            </a:endParaRPr>
-          </a:p>
-          <a:p>
-            <a:r>
-              <a:rPr lang="es-UY" sz="3000" b="1" dirty="0">
-                <a:solidFill>
-                  <a:schemeClr val="bg1"/>
-                </a:solidFill>
-                <a:hlinkClick r:id="rId3"/>
-              </a:rPr>
-              <a:t>https://forms.gle/fBNWZZm4eD2N7DDw9</a:t>
-            </a:r>
-            <a:endParaRPr lang="es-UY" sz="3000" b="1" noProof="0" dirty="0">
-              <a:solidFill>
-                <a:schemeClr val="bg1"/>
-              </a:solidFill>
-            </a:endParaRPr>
-          </a:p>
-        </p:txBody>
-      </p:sp>
-    </p:spTree>
-  </p:cSld>
-  <p:clrMapOvr>
-    <a:masterClrMapping/>
-  </p:clrMapOvr>
-</p:sld>
-</file>
-
-<file path=ppt/slides/slide13.xml><?xml version="1.0" encoding="utf-8"?>
-<p:sld xmlns:a="http://schemas.openxmlformats.org/drawingml/2006/main" xmlns:p="http://schemas.openxmlformats.org/presentationml/2006/main" xmlns:r="http://schemas.openxmlformats.org/officeDocument/2006/relationships">
-  <p:cSld>
-    <p:bg>
-      <p:bgPr>
-        <a:solidFill>
-          <a:srgbClr val="FFFFFF"/>
-        </a:solidFill>
-        <a:effectLst/>
-      </p:bgPr>
-    </p:bg>
-    <p:spTree>
-      <p:nvGrpSpPr>
-        <p:cNvPr id="1" name=""/>
-        <p:cNvGrpSpPr/>
-        <p:nvPr/>
-      </p:nvGrpSpPr>
-      <p:grpSpPr/>
-      <p:sp>
-        <p:nvSpPr>
-          <p:cNvPr id="2" name="Text 0">
-            <a:extLst>
-              <a:ext uri="{FF2B5EF4-FFF2-40B4-BE49-F238E27FC236}">
-                <a16:creationId xmlns:a16="http://schemas.microsoft.com/office/drawing/2014/main" id="{45FBCF84-BF0C-00DD-1115-ECF03D12DDA6}"/>
-              </a:ext>
-            </a:extLst>
-          </p:cNvPr>
-          <p:cNvSpPr txBox="1"/>
-          <p:nvPr/>
-        </p:nvSpPr>
-        <p:spPr>
-          <a:xfrm>
-            <a:off x="502920" y="320040"/>
-            <a:ext cx="7040880" cy="640080"/>
-          </a:xfrm>
-          <a:prstGeom prst="rect">
-            <a:avLst/>
-          </a:prstGeom>
-          <a:noFill/>
-          <a:ln/>
-        </p:spPr>
-        <p:txBody>
-          <a:bodyPr wrap="square" lIns="0" tIns="0" rIns="0" bIns="0" rtlCol="0" anchor="ctr"/>
-          <a:lstStyle/>
-          <a:p>
-            <a:pPr marL="0" indent="0">
-              <a:buNone/>
-            </a:pPr>
-            <a:r>
-              <a:rPr lang="en-US" sz="3000" b="1" dirty="0">
-                <a:solidFill>
-                  <a:srgbClr val="2E0A4E"/>
-                </a:solidFill>
-                <a:latin typeface="Oswald" pitchFamily="34" charset="0"/>
-                <a:ea typeface="Oswald" pitchFamily="34" charset="-122"/>
-                <a:cs typeface="Oswald" pitchFamily="34" charset="-120"/>
-              </a:rPr>
-              <a:t>Paso a paso (1)</a:t>
-            </a:r>
-            <a:endParaRPr lang="en-US" sz="3000" dirty="0"/>
-          </a:p>
-        </p:txBody>
-      </p:sp>
-      <p:sp>
-        <p:nvSpPr>
-          <p:cNvPr id="11" name="Shape 9">
-            <a:extLst>
-              <a:ext uri="{FF2B5EF4-FFF2-40B4-BE49-F238E27FC236}">
-                <a16:creationId xmlns:a16="http://schemas.microsoft.com/office/drawing/2014/main" id="{1E4D2BBF-BB0F-7CF4-3842-6325D6A2CD35}"/>
-              </a:ext>
-            </a:extLst>
-          </p:cNvPr>
-          <p:cNvSpPr/>
-          <p:nvPr/>
-        </p:nvSpPr>
-        <p:spPr>
-          <a:xfrm>
-            <a:off x="439616" y="1188720"/>
-            <a:ext cx="2560320" cy="1463040"/>
-          </a:xfrm>
-          <a:prstGeom prst="roundRect">
-            <a:avLst>
-              <a:gd name="adj" fmla="val 2143"/>
-            </a:avLst>
-          </a:prstGeom>
-          <a:solidFill>
-            <a:srgbClr val="5A189A"/>
-          </a:solidFill>
-          <a:ln w="12700">
-            <a:solidFill>
-              <a:srgbClr val="5A189A"/>
-            </a:solidFill>
-            <a:prstDash val="solid"/>
-          </a:ln>
-        </p:spPr>
-        <p:txBody>
-          <a:bodyPr/>
-          <a:lstStyle/>
-          <a:p>
-            <a:endParaRPr lang="en-US"/>
-          </a:p>
-        </p:txBody>
-      </p:sp>
-      <p:sp>
-        <p:nvSpPr>
-          <p:cNvPr id="12" name="Text 10">
-            <a:extLst>
-              <a:ext uri="{FF2B5EF4-FFF2-40B4-BE49-F238E27FC236}">
-                <a16:creationId xmlns:a16="http://schemas.microsoft.com/office/drawing/2014/main" id="{57EA7703-08D4-E6C4-4FDB-5B08F7881055}"/>
-              </a:ext>
-            </a:extLst>
-          </p:cNvPr>
-          <p:cNvSpPr txBox="1"/>
-          <p:nvPr/>
-        </p:nvSpPr>
-        <p:spPr>
-          <a:xfrm>
-            <a:off x="668216" y="1256068"/>
-            <a:ext cx="2103120" cy="502920"/>
-          </a:xfrm>
-          <a:prstGeom prst="rect">
-            <a:avLst/>
-          </a:prstGeom>
-          <a:noFill/>
-          <a:ln/>
-        </p:spPr>
-        <p:txBody>
-          <a:bodyPr wrap="square" lIns="0" tIns="0" rIns="0" bIns="0" rtlCol="0" anchor="ctr"/>
-          <a:lstStyle/>
-          <a:p>
-            <a:pPr marL="0" indent="0">
-              <a:buNone/>
-            </a:pPr>
-            <a:r>
-              <a:rPr lang="en-US" sz="1600" b="1" dirty="0">
-                <a:solidFill>
-                  <a:srgbClr val="FFFFFF"/>
-                </a:solidFill>
-                <a:latin typeface="Oswald" pitchFamily="34" charset="0"/>
-                <a:ea typeface="Oswald" pitchFamily="34" charset="-122"/>
-                <a:cs typeface="Oswald" pitchFamily="34" charset="-120"/>
-              </a:rPr>
-              <a:t>OBJETIVO 3</a:t>
-            </a:r>
-            <a:endParaRPr lang="en-US" sz="1600" dirty="0"/>
-          </a:p>
-        </p:txBody>
-      </p:sp>
-      <p:sp>
-        <p:nvSpPr>
-          <p:cNvPr id="13" name="Text 11">
-            <a:extLst>
-              <a:ext uri="{FF2B5EF4-FFF2-40B4-BE49-F238E27FC236}">
-                <a16:creationId xmlns:a16="http://schemas.microsoft.com/office/drawing/2014/main" id="{83082800-1689-F508-4C9C-8E0187A18BDD}"/>
-              </a:ext>
-            </a:extLst>
-          </p:cNvPr>
-          <p:cNvSpPr txBox="1"/>
-          <p:nvPr/>
-        </p:nvSpPr>
-        <p:spPr>
-          <a:xfrm>
-            <a:off x="668216" y="1734572"/>
-            <a:ext cx="2103120" cy="716926"/>
-          </a:xfrm>
-          <a:prstGeom prst="rect">
-            <a:avLst/>
-          </a:prstGeom>
-          <a:noFill/>
-          <a:ln/>
-        </p:spPr>
-        <p:txBody>
-          <a:bodyPr wrap="square" lIns="0" tIns="0" rIns="0" bIns="0" rtlCol="0" anchor="t"/>
-          <a:lstStyle/>
-          <a:p>
-            <a:r>
-              <a:rPr lang="es-ES" sz="1400" dirty="0">
-                <a:solidFill>
-                  <a:schemeClr val="bg1"/>
-                </a:solidFill>
-                <a:latin typeface="Calibri" pitchFamily="34" charset="0"/>
-                <a:ea typeface="Calibri" pitchFamily="34" charset="-122"/>
-                <a:cs typeface="Calibri" pitchFamily="34" charset="-120"/>
-              </a:rPr>
-              <a:t>Dejar todo instalado</a:t>
-            </a:r>
-            <a:endParaRPr lang="en-US" sz="1300" dirty="0"/>
-          </a:p>
-        </p:txBody>
-      </p:sp>
-      <p:sp>
-        <p:nvSpPr>
-          <p:cNvPr id="15" name="Shape 9">
-            <a:extLst>
-              <a:ext uri="{FF2B5EF4-FFF2-40B4-BE49-F238E27FC236}">
-                <a16:creationId xmlns:a16="http://schemas.microsoft.com/office/drawing/2014/main" id="{E750D06A-626A-4348-CA99-CE04C627A232}"/>
-              </a:ext>
-            </a:extLst>
-          </p:cNvPr>
-          <p:cNvSpPr/>
-          <p:nvPr/>
-        </p:nvSpPr>
-        <p:spPr>
-          <a:xfrm>
-            <a:off x="439615" y="2719107"/>
-            <a:ext cx="3773659" cy="2281957"/>
-          </a:xfrm>
-          <a:prstGeom prst="roundRect">
-            <a:avLst>
-              <a:gd name="adj" fmla="val 2143"/>
-            </a:avLst>
-          </a:prstGeom>
-          <a:solidFill>
-            <a:schemeClr val="accent1">
-              <a:lumMod val="75000"/>
-            </a:schemeClr>
-          </a:solidFill>
-          <a:ln w="12700">
-            <a:solidFill>
-              <a:schemeClr val="accent1">
-                <a:lumMod val="75000"/>
-              </a:schemeClr>
-            </a:solidFill>
-            <a:prstDash val="solid"/>
-          </a:ln>
-        </p:spPr>
-        <p:txBody>
-          <a:bodyPr/>
-          <a:lstStyle/>
-          <a:p>
-            <a:endParaRPr lang="en-US"/>
-          </a:p>
-        </p:txBody>
-      </p:sp>
-      <p:sp>
-        <p:nvSpPr>
-          <p:cNvPr id="17" name="Text 11">
-            <a:extLst>
-              <a:ext uri="{FF2B5EF4-FFF2-40B4-BE49-F238E27FC236}">
-                <a16:creationId xmlns:a16="http://schemas.microsoft.com/office/drawing/2014/main" id="{F3440954-5CFF-06C7-8641-E2E38BA6F847}"/>
-              </a:ext>
-            </a:extLst>
-          </p:cNvPr>
-          <p:cNvSpPr txBox="1"/>
-          <p:nvPr/>
-        </p:nvSpPr>
-        <p:spPr>
-          <a:xfrm>
-            <a:off x="668216" y="2899117"/>
-            <a:ext cx="3369212" cy="716926"/>
-          </a:xfrm>
-          <a:prstGeom prst="rect">
-            <a:avLst/>
-          </a:prstGeom>
-          <a:noFill/>
-          <a:ln/>
-        </p:spPr>
-        <p:txBody>
-          <a:bodyPr wrap="square" lIns="0" tIns="0" rIns="0" bIns="0" rtlCol="0" anchor="t"/>
-          <a:lstStyle/>
-          <a:p>
-            <a:r>
-              <a:rPr lang="es-ES" sz="1400" b="1" dirty="0">
-                <a:solidFill>
-                  <a:schemeClr val="bg1"/>
-                </a:solidFill>
-                <a:latin typeface="Calibri" pitchFamily="34" charset="0"/>
-                <a:ea typeface="Calibri" pitchFamily="34" charset="-122"/>
-                <a:cs typeface="Calibri" pitchFamily="34" charset="-120"/>
-              </a:rPr>
-              <a:t>Primero R, después RStudio. Los paquetes se instalan una sola vez con </a:t>
-            </a:r>
-            <a:r>
-              <a:rPr lang="es-ES" sz="1400" b="1" i="1" dirty="0">
-                <a:solidFill>
-                  <a:schemeClr val="bg1"/>
-                </a:solidFill>
-                <a:latin typeface="Calibri" pitchFamily="34" charset="0"/>
-                <a:ea typeface="Calibri" pitchFamily="34" charset="-122"/>
-                <a:cs typeface="Calibri" pitchFamily="34" charset="-120"/>
-              </a:rPr>
-              <a:t>install.packages()</a:t>
-            </a:r>
-            <a:r>
-              <a:rPr lang="es-ES" sz="1400" b="1" dirty="0">
-                <a:solidFill>
-                  <a:schemeClr val="bg1"/>
-                </a:solidFill>
-                <a:latin typeface="Calibri" pitchFamily="34" charset="0"/>
-                <a:ea typeface="Calibri" pitchFamily="34" charset="-122"/>
-                <a:cs typeface="Calibri" pitchFamily="34" charset="-120"/>
-              </a:rPr>
-              <a:t>.</a:t>
-            </a:r>
-          </a:p>
-          <a:p>
-            <a:endParaRPr lang="es-ES" sz="1400" b="1" dirty="0">
-              <a:solidFill>
-                <a:schemeClr val="bg1"/>
-              </a:solidFill>
-              <a:latin typeface="Calibri" pitchFamily="34" charset="0"/>
-              <a:ea typeface="Calibri" pitchFamily="34" charset="-122"/>
-              <a:cs typeface="Calibri" pitchFamily="34" charset="-120"/>
-            </a:endParaRPr>
-          </a:p>
-          <a:p>
-            <a:r>
-              <a:rPr lang="es-ES" sz="1400" b="1" dirty="0">
-                <a:solidFill>
-                  <a:schemeClr val="bg1"/>
-                </a:solidFill>
-                <a:latin typeface="Calibri" pitchFamily="34" charset="0"/>
-                <a:ea typeface="Calibri" pitchFamily="34" charset="-122"/>
-                <a:cs typeface="Calibri" pitchFamily="34" charset="-120"/>
-              </a:rPr>
-              <a:t>Abrir el curso siempre desde el archivo </a:t>
-            </a:r>
-            <a:r>
-              <a:rPr lang="es-ES" sz="1400" b="1" i="1" dirty="0">
-                <a:solidFill>
-                  <a:schemeClr val="bg1"/>
-                </a:solidFill>
-                <a:latin typeface="Calibri" pitchFamily="34" charset="0"/>
-                <a:ea typeface="Calibri" pitchFamily="34" charset="-122"/>
-                <a:cs typeface="Calibri" pitchFamily="34" charset="-120"/>
-              </a:rPr>
-              <a:t>.Rproj</a:t>
-            </a:r>
-            <a:r>
-              <a:rPr lang="es-ES" sz="1400" b="1" dirty="0">
-                <a:solidFill>
-                  <a:schemeClr val="bg1"/>
-                </a:solidFill>
-                <a:latin typeface="Calibri" pitchFamily="34" charset="0"/>
-                <a:ea typeface="Calibri" pitchFamily="34" charset="-122"/>
-                <a:cs typeface="Calibri" pitchFamily="34" charset="-120"/>
-              </a:rPr>
-              <a:t>. Así R sabe dónde están los datos.</a:t>
-            </a:r>
-          </a:p>
-        </p:txBody>
-      </p:sp>
-      <p:pic>
-        <p:nvPicPr>
-          <p:cNvPr id="22" name="Picture 21" descr="p1.png"/>
-          <p:cNvPicPr>
-            <a:picLocks noChangeAspect="1"/>
-          </p:cNvPicPr>
-          <p:nvPr/>
-        </p:nvPicPr>
-        <p:blipFill>
-          <a:blip r:embed="rId2"/>
-          <a:stretch>
-            <a:fillRect/>
-          </a:stretch>
-        </p:blipFill>
-        <p:spPr>
-          <a:xfrm>
-            <a:off x="4434840" y="1668901"/>
-            <a:ext cx="4480560" cy="2102876"/>
-          </a:xfrm>
-          <a:prstGeom prst="rect">
-            <a:avLst/>
-          </a:prstGeom>
-          <a:ln w="76200">
-            <a:solidFill>
-              <a:schemeClr val="accent1">
-                <a:lumMod val="75000"/>
-              </a:schemeClr>
-            </a:solidFill>
-          </a:ln>
-        </p:spPr>
-      </p:pic>
-    </p:spTree>
-  </p:cSld>
-  <p:clrMapOvr>
-    <a:masterClrMapping/>
-  </p:clrMapOvr>
-</p:sld>
-</file>
-
-<file path=ppt/slides/slide14.xml><?xml version="1.0" encoding="utf-8"?>
-<p:sld xmlns:a="http://schemas.openxmlformats.org/drawingml/2006/main" xmlns:p="http://schemas.openxmlformats.org/presentationml/2006/main" xmlns:r="http://schemas.openxmlformats.org/officeDocument/2006/relationships">
-  <p:cSld>
-    <p:bg>
-      <p:bgPr>
-        <a:solidFill>
-          <a:srgbClr val="FFFFFF"/>
-        </a:solidFill>
-        <a:effectLst/>
-      </p:bgPr>
-    </p:bg>
-    <p:spTree>
-      <p:nvGrpSpPr>
-        <p:cNvPr id="1" name=""/>
-        <p:cNvGrpSpPr/>
-        <p:nvPr/>
-      </p:nvGrpSpPr>
-      <p:grpSpPr/>
-      <p:sp>
-        <p:nvSpPr>
-          <p:cNvPr id="2" name="Text 0"/>
-          <p:cNvSpPr txBox="1"/>
-          <p:nvPr/>
-        </p:nvSpPr>
-        <p:spPr>
-          <a:xfrm>
-            <a:off x="502920" y="320040"/>
-            <a:ext cx="7040880" cy="640080"/>
-          </a:xfrm>
-          <a:prstGeom prst="rect">
-            <a:avLst/>
-          </a:prstGeom>
-          <a:noFill/>
-          <a:ln/>
-        </p:spPr>
-        <p:txBody>
-          <a:bodyPr wrap="square" lIns="0" tIns="0" rIns="0" bIns="0" rtlCol="0" anchor="ctr"/>
-          <a:lstStyle/>
-          <a:p>
-            <a:r>
-              <a:rPr lang="en-US" sz="3000" b="1" dirty="0">
-                <a:solidFill>
-                  <a:srgbClr val="2E0A4E"/>
-                </a:solidFill>
-                <a:latin typeface="Oswald" pitchFamily="34" charset="0"/>
-                <a:ea typeface="Oswald" pitchFamily="34" charset="-122"/>
-                <a:cs typeface="Oswald" pitchFamily="34" charset="-120"/>
-              </a:rPr>
-              <a:t>Paso a paso (2)</a:t>
-            </a:r>
-            <a:endParaRPr lang="en-US" sz="3000" dirty="0"/>
-          </a:p>
-        </p:txBody>
-      </p:sp>
-      <p:sp>
-        <p:nvSpPr>
-          <p:cNvPr id="11" name="Shape 9"/>
-          <p:cNvSpPr/>
-          <p:nvPr/>
-        </p:nvSpPr>
-        <p:spPr>
-          <a:xfrm>
-            <a:off x="439616" y="1188720"/>
-            <a:ext cx="2560320" cy="1463040"/>
-          </a:xfrm>
-          <a:prstGeom prst="roundRect">
-            <a:avLst>
-              <a:gd name="adj" fmla="val 2143"/>
-            </a:avLst>
-          </a:prstGeom>
-          <a:solidFill>
-            <a:srgbClr val="5A189A"/>
-          </a:solidFill>
-          <a:ln w="12700">
-            <a:solidFill>
-              <a:srgbClr val="5A189A"/>
-            </a:solidFill>
-            <a:prstDash val="solid"/>
-          </a:ln>
-        </p:spPr>
-        <p:txBody>
-          <a:bodyPr/>
-          <a:lstStyle/>
-          <a:p>
-            <a:endParaRPr lang="en-US"/>
-          </a:p>
-        </p:txBody>
-      </p:sp>
-      <p:sp>
-        <p:nvSpPr>
-          <p:cNvPr id="12" name="Text 10"/>
-          <p:cNvSpPr txBox="1"/>
-          <p:nvPr/>
-        </p:nvSpPr>
-        <p:spPr>
-          <a:xfrm>
-            <a:off x="668216" y="1256068"/>
-            <a:ext cx="2103120" cy="502920"/>
-          </a:xfrm>
-          <a:prstGeom prst="rect">
-            <a:avLst/>
-          </a:prstGeom>
-          <a:noFill/>
-          <a:ln/>
-        </p:spPr>
-        <p:txBody>
-          <a:bodyPr wrap="square" lIns="0" tIns="0" rIns="0" bIns="0" rtlCol="0" anchor="ctr"/>
-          <a:lstStyle/>
-          <a:p>
-            <a:pPr marL="0" indent="0">
-              <a:buNone/>
-            </a:pPr>
-            <a:r>
-              <a:rPr lang="en-US" sz="1600" b="1" dirty="0">
-                <a:solidFill>
-                  <a:srgbClr val="FFFFFF"/>
-                </a:solidFill>
-                <a:latin typeface="Oswald" pitchFamily="34" charset="0"/>
-                <a:ea typeface="Oswald" pitchFamily="34" charset="-122"/>
-                <a:cs typeface="Oswald" pitchFamily="34" charset="-120"/>
-              </a:rPr>
-              <a:t>OBJETIVO 4</a:t>
-            </a:r>
-            <a:endParaRPr lang="en-US" sz="1600" dirty="0"/>
-          </a:p>
-        </p:txBody>
-      </p:sp>
-      <p:sp>
-        <p:nvSpPr>
-          <p:cNvPr id="13" name="Text 11"/>
-          <p:cNvSpPr txBox="1"/>
-          <p:nvPr/>
-        </p:nvSpPr>
-        <p:spPr>
-          <a:xfrm>
-            <a:off x="668216" y="1734572"/>
-            <a:ext cx="2103120" cy="716926"/>
-          </a:xfrm>
-          <a:prstGeom prst="rect">
-            <a:avLst/>
-          </a:prstGeom>
-          <a:noFill/>
-          <a:ln/>
-        </p:spPr>
-        <p:txBody>
-          <a:bodyPr wrap="square" lIns="0" tIns="0" rIns="0" bIns="0" rtlCol="0" anchor="t"/>
-          <a:lstStyle/>
-          <a:p>
-            <a:r>
-              <a:rPr lang="es-ES" sz="1400" dirty="0">
-                <a:solidFill>
-                  <a:schemeClr val="bg1"/>
-                </a:solidFill>
-                <a:latin typeface="Calibri" pitchFamily="34" charset="0"/>
-                <a:ea typeface="Calibri" pitchFamily="34" charset="-122"/>
-                <a:cs typeface="Calibri" pitchFamily="34" charset="-120"/>
-              </a:rPr>
-              <a:t>Los cuatro paneles de RStudio</a:t>
-            </a:r>
-            <a:endParaRPr lang="en-US" sz="1300" dirty="0"/>
-          </a:p>
-        </p:txBody>
-      </p:sp>
-      <p:sp>
-        <p:nvSpPr>
-          <p:cNvPr id="15" name="Shape 9">
-            <a:extLst>
-              <a:ext uri="{FF2B5EF4-FFF2-40B4-BE49-F238E27FC236}">
-                <a16:creationId xmlns:a16="http://schemas.microsoft.com/office/drawing/2014/main" id="{1ED05ED1-CE50-06A2-178F-B4365671B18F}"/>
-              </a:ext>
-            </a:extLst>
-          </p:cNvPr>
-          <p:cNvSpPr/>
-          <p:nvPr/>
-        </p:nvSpPr>
-        <p:spPr>
-          <a:xfrm>
-            <a:off x="439615" y="2719107"/>
-            <a:ext cx="3773659" cy="2281957"/>
-          </a:xfrm>
-          <a:prstGeom prst="roundRect">
-            <a:avLst>
-              <a:gd name="adj" fmla="val 2143"/>
-            </a:avLst>
-          </a:prstGeom>
-          <a:solidFill>
-            <a:schemeClr val="accent1">
-              <a:lumMod val="75000"/>
-            </a:schemeClr>
-          </a:solidFill>
-          <a:ln w="12700">
-            <a:solidFill>
-              <a:schemeClr val="accent1">
-                <a:lumMod val="75000"/>
-              </a:schemeClr>
-            </a:solidFill>
-            <a:prstDash val="solid"/>
-          </a:ln>
-        </p:spPr>
-        <p:txBody>
-          <a:bodyPr/>
-          <a:lstStyle/>
-          <a:p>
-            <a:endParaRPr lang="en-US"/>
-          </a:p>
-        </p:txBody>
-      </p:sp>
-      <p:sp>
-        <p:nvSpPr>
-          <p:cNvPr id="17" name="Text 11">
-            <a:extLst>
-              <a:ext uri="{FF2B5EF4-FFF2-40B4-BE49-F238E27FC236}">
-                <a16:creationId xmlns:a16="http://schemas.microsoft.com/office/drawing/2014/main" id="{1291722D-C809-2238-9939-339690D52438}"/>
-              </a:ext>
-            </a:extLst>
-          </p:cNvPr>
-          <p:cNvSpPr txBox="1"/>
-          <p:nvPr/>
-        </p:nvSpPr>
-        <p:spPr>
-          <a:xfrm>
-            <a:off x="668216" y="2899117"/>
-            <a:ext cx="3369212" cy="716926"/>
-          </a:xfrm>
-          <a:prstGeom prst="rect">
-            <a:avLst/>
-          </a:prstGeom>
-          <a:noFill/>
-          <a:ln/>
-        </p:spPr>
-        <p:txBody>
-          <a:bodyPr wrap="square" lIns="0" tIns="0" rIns="0" bIns="0" rtlCol="0" anchor="t"/>
-          <a:lstStyle/>
-          <a:p>
-            <a:r>
-              <a:rPr lang="es-ES" sz="1400" b="1" dirty="0" err="1">
-                <a:solidFill>
-                  <a:schemeClr val="bg1"/>
-                </a:solidFill>
-                <a:latin typeface="Calibri" pitchFamily="34" charset="0"/>
-                <a:ea typeface="Calibri" pitchFamily="34" charset="-122"/>
-                <a:cs typeface="Calibri" pitchFamily="34" charset="-120"/>
-              </a:rPr>
-              <a:t>En el script se escribe y se guarda. </a:t>
-            </a:r>
-            <a:r>
-              <a:rPr lang="es-ES" sz="1400" b="1" i="1" dirty="0" err="1">
-                <a:solidFill>
-                  <a:schemeClr val="bg1"/>
-                </a:solidFill>
-                <a:latin typeface="Calibri" pitchFamily="34" charset="0"/>
-                <a:ea typeface="Calibri" pitchFamily="34" charset="-122"/>
-                <a:cs typeface="Calibri" pitchFamily="34" charset="-120"/>
-              </a:rPr>
-              <a:t>Ctrl + Enter</a:t>
-            </a:r>
-            <a:r>
-              <a:rPr lang="es-ES" sz="1400" b="1" dirty="0" err="1">
-                <a:solidFill>
-                  <a:schemeClr val="bg1"/>
-                </a:solidFill>
-                <a:latin typeface="Calibri" pitchFamily="34" charset="0"/>
-                <a:ea typeface="Calibri" pitchFamily="34" charset="-122"/>
-                <a:cs typeface="Calibri" pitchFamily="34" charset="-120"/>
-              </a:rPr>
-              <a:t> manda la línea a la consola, donde aparece el resultado.</a:t>
-            </a:r>
-          </a:p>
-          <a:p>
-            <a:endParaRPr lang="es-ES" sz="1400" b="1" dirty="0" err="1">
-              <a:solidFill>
-                <a:schemeClr val="bg1"/>
-              </a:solidFill>
-              <a:latin typeface="Calibri" pitchFamily="34" charset="0"/>
-              <a:ea typeface="Calibri" pitchFamily="34" charset="-122"/>
-              <a:cs typeface="Calibri" pitchFamily="34" charset="-120"/>
-            </a:endParaRPr>
-          </a:p>
-          <a:p>
-            <a:r>
-              <a:rPr lang="es-ES" sz="1400" b="1" dirty="0" err="1">
-                <a:solidFill>
-                  <a:schemeClr val="bg1"/>
-                </a:solidFill>
-                <a:latin typeface="Calibri" pitchFamily="34" charset="0"/>
-                <a:ea typeface="Calibri" pitchFamily="34" charset="-122"/>
-                <a:cs typeface="Calibri" pitchFamily="34" charset="-120"/>
-              </a:rPr>
-              <a:t>Los errores también salen en la consola. Leerlos con calma es la mitad del trabajo.</a:t>
-            </a:r>
-          </a:p>
-        </p:txBody>
-      </p:sp>
-      <p:pic>
-        <p:nvPicPr>
-          <p:cNvPr id="24" name="Picture 23" descr="p2.png"/>
-          <p:cNvPicPr>
-            <a:picLocks noChangeAspect="1"/>
-          </p:cNvPicPr>
-          <p:nvPr/>
-        </p:nvPicPr>
-        <p:blipFill>
-          <a:blip r:embed="rId2"/>
-          <a:stretch>
-            <a:fillRect/>
-          </a:stretch>
-        </p:blipFill>
-        <p:spPr>
-          <a:xfrm>
-            <a:off x="4434840" y="1320165"/>
-            <a:ext cx="4480560" cy="2800350"/>
-          </a:xfrm>
-          <a:prstGeom prst="rect">
-            <a:avLst/>
-          </a:prstGeom>
-          <a:ln w="76200">
-            <a:solidFill>
-              <a:schemeClr val="accent1">
-                <a:lumMod val="75000"/>
-              </a:schemeClr>
-            </a:solidFill>
-          </a:ln>
-        </p:spPr>
-      </p:pic>
-    </p:spTree>
   </p:cSld>
   <p:clrMapOvr>
     <a:masterClrMapping/>
@@ -4502,7 +4820,7 @@
           <p:cNvPr id="2" name="Text 0">
             <a:extLst>
               <a:ext uri="{FF2B5EF4-FFF2-40B4-BE49-F238E27FC236}">
-                <a16:creationId xmlns:a16="http://schemas.microsoft.com/office/drawing/2014/main" id="{1B8BE186-2227-0AEE-46BF-1738518AF7E2}"/>
+                <a16:creationId xmlns:a16="http://schemas.microsoft.com/office/drawing/2014/main" id="{21E0B84E-B772-A594-B980-A7B918F749C6}"/>
               </a:ext>
             </a:extLst>
           </p:cNvPr>
@@ -4533,7 +4851,7 @@
                 <a:ea typeface="Oswald" pitchFamily="34" charset="-122"/>
                 <a:cs typeface="Oswald" pitchFamily="34" charset="-120"/>
               </a:rPr>
-              <a:t>Paso a paso (3)</a:t>
+              <a:t>Paso a paso (5)</a:t>
             </a:r>
             <a:endParaRPr lang="en-US" sz="3000" dirty="0"/>
           </a:p>
@@ -4544,7 +4862,7 @@
           <p:cNvPr id="11" name="Shape 9">
             <a:extLst>
               <a:ext uri="{FF2B5EF4-FFF2-40B4-BE49-F238E27FC236}">
-                <a16:creationId xmlns:a16="http://schemas.microsoft.com/office/drawing/2014/main" id="{2D484EA3-17D5-DFDE-7FFB-391D9E546766}"/>
+                <a16:creationId xmlns:a16="http://schemas.microsoft.com/office/drawing/2014/main" id="{8584C834-90F2-8AA8-B328-3643E4CCE677}"/>
               </a:ext>
             </a:extLst>
           </p:cNvPr>
@@ -4584,7 +4902,7 @@
           <p:cNvPr id="12" name="Text 10">
             <a:extLst>
               <a:ext uri="{FF2B5EF4-FFF2-40B4-BE49-F238E27FC236}">
-                <a16:creationId xmlns:a16="http://schemas.microsoft.com/office/drawing/2014/main" id="{FF346D48-99B4-78ED-CF54-DB6A3D402E26}"/>
+                <a16:creationId xmlns:a16="http://schemas.microsoft.com/office/drawing/2014/main" id="{3D0787E2-7C7C-7A9C-ED72-1B8D5BA244E4}"/>
               </a:ext>
             </a:extLst>
           </p:cNvPr>
@@ -4618,7 +4936,7 @@
                 <a:ea typeface="Oswald" pitchFamily="34" charset="-122"/>
                 <a:cs typeface="Oswald" pitchFamily="34" charset="-120"/>
               </a:rPr>
-              <a:t>OBJETIVO 4</a:t>
+              <a:t>OBJETIVO 5</a:t>
             </a:r>
             <a:endParaRPr lang="en-US" sz="1600" dirty="0"/>
           </a:p>
@@ -4629,7 +4947,7 @@
           <p:cNvPr id="13" name="Text 11">
             <a:extLst>
               <a:ext uri="{FF2B5EF4-FFF2-40B4-BE49-F238E27FC236}">
-                <a16:creationId xmlns:a16="http://schemas.microsoft.com/office/drawing/2014/main" id="{961D826F-99A4-C802-E6F8-FA059D329199}"/>
+                <a16:creationId xmlns:a16="http://schemas.microsoft.com/office/drawing/2014/main" id="{0C2592C3-39BA-DB09-D0F1-BF73ED6DEC99}"/>
               </a:ext>
             </a:extLst>
           </p:cNvPr>
@@ -4660,7 +4978,7 @@
                 <a:ea typeface="Calibri" pitchFamily="34" charset="-122"/>
                 <a:cs typeface="Calibri" pitchFamily="34" charset="-120"/>
               </a:rPr>
-              <a:t>Lo básico de R</a:t>
+              <a:t>La interfaz (ui)</a:t>
             </a:r>
           </a:p>
         </p:txBody>
@@ -4670,7 +4988,7 @@
           <p:cNvPr id="15" name="Shape 9">
             <a:extLst>
               <a:ext uri="{FF2B5EF4-FFF2-40B4-BE49-F238E27FC236}">
-                <a16:creationId xmlns:a16="http://schemas.microsoft.com/office/drawing/2014/main" id="{F33AC7BE-75B4-F8D4-43E0-87B7AD3B3F34}"/>
+                <a16:creationId xmlns:a16="http://schemas.microsoft.com/office/drawing/2014/main" id="{ADB729CB-A987-663A-1058-A842556E3C9E}"/>
               </a:ext>
             </a:extLst>
           </p:cNvPr>
@@ -4714,7 +5032,7 @@
           <p:cNvPr id="17" name="Text 11">
             <a:extLst>
               <a:ext uri="{FF2B5EF4-FFF2-40B4-BE49-F238E27FC236}">
-                <a16:creationId xmlns:a16="http://schemas.microsoft.com/office/drawing/2014/main" id="{BFEECB63-4CC8-9CA3-665B-7BF2CFCADD52}"/>
+                <a16:creationId xmlns:a16="http://schemas.microsoft.com/office/drawing/2014/main" id="{90C1F140-6606-DACA-D829-EF5414EB787C}"/>
               </a:ext>
             </a:extLst>
           </p:cNvPr>
@@ -4723,7 +5041,7 @@
         </p:nvSpPr>
         <p:spPr>
           <a:xfrm>
-            <a:off x="668216" y="2899117"/>
+            <a:off x="647115" y="2880360"/>
             <a:ext cx="3369212" cy="716926"/>
           </a:xfrm>
           <a:prstGeom prst="rect">
@@ -4736,8 +5054,9 @@
           <a:bodyPr wrap="square" lIns="0" tIns="0" rIns="0" bIns="0" rtlCol="0" anchor="t"/>
           <a:lstStyle/>
           <a:p>
-            <a:r>
-              <a:rPr lang="es-ES" sz="1400" b="1" i="1" dirty="0">
+            <a:endParaRPr lang="en-US" sz="1300" dirty="0"/>
+            <a:r>
+              <a:rPr lang="es-ES" sz="1400" b="1" dirty="0">
                 <a:solidFill>
                   <a:schemeClr val="bg1"/>
                 </a:solidFill>
@@ -4745,10 +5064,10 @@
                 <a:ea typeface="Calibri" pitchFamily="34" charset="-122"/>
                 <a:cs typeface="Calibri" pitchFamily="34" charset="-120"/>
               </a:rPr>
-              <a:t>&lt;-</a:t>
-            </a:r>
-            <a:r>
-              <a:rPr lang="es-ES" sz="1400" b="1" dirty="0">
+              <a:t/>
+            </a:r>
+            <a:r>
+              <a:rPr lang="es-ES" sz="1400" b="1" i="1" dirty="0">
                 <a:solidFill>
                   <a:schemeClr val="bg1"/>
                 </a:solidFill>
@@ -4756,10 +5075,10 @@
                 <a:ea typeface="Calibri" pitchFamily="34" charset="-122"/>
                 <a:cs typeface="Calibri" pitchFamily="34" charset="-120"/>
               </a:rPr>
-              <a:t> guarda un valor en un objeto. </a:t>
-            </a:r>
-            <a:r>
-              <a:rPr lang="es-ES" sz="1400" b="1" i="1" dirty="0">
+              <a:t>fluidPage()</a:t>
+            </a:r>
+            <a:r>
+              <a:rPr lang="es-ES" sz="1400" b="1" dirty="0">
                 <a:solidFill>
                   <a:schemeClr val="bg1"/>
                 </a:solidFill>
@@ -4767,10 +5086,10 @@
                 <a:ea typeface="Calibri" pitchFamily="34" charset="-122"/>
                 <a:cs typeface="Calibri" pitchFamily="34" charset="-120"/>
               </a:rPr>
-              <a:t>c()</a:t>
-            </a:r>
-            <a:r>
-              <a:rPr lang="es-ES" sz="1400" b="1" dirty="0">
+              <a:t> apila de arriba hacia abajo lo que va adentro. </a:t>
+            </a:r>
+            <a:r>
+              <a:rPr lang="es-ES" sz="1400" b="1" i="1" dirty="0">
                 <a:solidFill>
                   <a:schemeClr val="bg1"/>
                 </a:solidFill>
@@ -4778,10 +5097,10 @@
                 <a:ea typeface="Calibri" pitchFamily="34" charset="-122"/>
                 <a:cs typeface="Calibri" pitchFamily="34" charset="-120"/>
               </a:rPr>
-              <a:t> arma un vector. </a:t>
-            </a:r>
-            <a:r>
-              <a:rPr lang="es-ES" sz="1400" b="1" i="1" dirty="0">
+              <a:t>titlePanel()</a:t>
+            </a:r>
+            <a:r>
+              <a:rPr lang="es-ES" sz="1400" b="1" dirty="0">
                 <a:solidFill>
                   <a:schemeClr val="bg1"/>
                 </a:solidFill>
@@ -4789,10 +5108,10 @@
                 <a:ea typeface="Calibri" pitchFamily="34" charset="-122"/>
                 <a:cs typeface="Calibri" pitchFamily="34" charset="-120"/>
               </a:rPr>
-              <a:t>read.csv()</a:t>
-            </a:r>
-            <a:r>
-              <a:rPr lang="es-ES" sz="1400" b="1" dirty="0">
+              <a:t>, </a:t>
+            </a:r>
+            <a:r>
+              <a:rPr lang="es-ES" sz="1400" b="1" i="1" dirty="0">
                 <a:solidFill>
                   <a:schemeClr val="bg1"/>
                 </a:solidFill>
@@ -4800,16 +5119,10 @@
                 <a:ea typeface="Calibri" pitchFamily="34" charset="-122"/>
                 <a:cs typeface="Calibri" pitchFamily="34" charset="-120"/>
               </a:rPr>
-              <a:t> lee una tabla, un data frame.</a:t>
-            </a:r>
-            <a:endParaRPr lang="en-US" sz="1300" dirty="0"/>
-          </a:p>
-          <a:p>
-            <a:endParaRPr lang="en-US" sz="1300" dirty="0"/>
-          </a:p>
-          <a:p>
-            <a:r>
-              <a:rPr lang="es-ES" sz="1400" b="1" i="1" dirty="0">
+              <a:t>p()</a:t>
+            </a:r>
+            <a:r>
+              <a:rPr lang="es-ES" sz="1400" b="1" dirty="0">
                 <a:solidFill>
                   <a:schemeClr val="bg1"/>
                 </a:solidFill>
@@ -4817,10 +5130,10 @@
                 <a:ea typeface="Calibri" pitchFamily="34" charset="-122"/>
                 <a:cs typeface="Calibri" pitchFamily="34" charset="-120"/>
               </a:rPr>
-              <a:t>elecciones$emitidos</a:t>
-            </a:r>
-            <a:r>
-              <a:rPr lang="es-ES" sz="1400" b="1" dirty="0">
+              <a:t> y </a:t>
+            </a:r>
+            <a:r>
+              <a:rPr lang="es-ES" sz="1400" b="1" i="1" dirty="0">
                 <a:solidFill>
                   <a:schemeClr val="bg1"/>
                 </a:solidFill>
@@ -4828,10 +5141,10 @@
                 <a:ea typeface="Calibri" pitchFamily="34" charset="-122"/>
                 <a:cs typeface="Calibri" pitchFamily="34" charset="-120"/>
               </a:rPr>
-              <a:t> elige una columna y </a:t>
-            </a:r>
-            <a:r>
-              <a:rPr lang="es-ES" sz="1400" b="1" i="1" dirty="0">
+              <a:t>h3()</a:t>
+            </a:r>
+            <a:r>
+              <a:rPr lang="es-ES" sz="1400" b="1" dirty="0">
                 <a:solidFill>
                   <a:schemeClr val="bg1"/>
                 </a:solidFill>
@@ -4839,8 +5152,14 @@
                 <a:ea typeface="Calibri" pitchFamily="34" charset="-122"/>
                 <a:cs typeface="Calibri" pitchFamily="34" charset="-120"/>
               </a:rPr>
-              <a:t>sum()</a:t>
-            </a:r>
+              <a:t> son texto fijo.</a:t>
+            </a:r>
+          </a:p>
+          <a:p>
+            <a:endParaRPr lang="en-US" sz="1300" dirty="0"/>
+          </a:p>
+          <a:p>
+            <a:endParaRPr lang="en-US" sz="1300" dirty="0"/>
             <a:r>
               <a:rPr lang="es-ES" sz="1400" b="1" dirty="0">
                 <a:solidFill>
@@ -4850,7 +5169,7 @@
                 <a:ea typeface="Calibri" pitchFamily="34" charset="-122"/>
                 <a:cs typeface="Calibri" pitchFamily="34" charset="-120"/>
               </a:rPr>
-              <a:t> la suma. Todo está en </a:t>
+              <a:t/>
             </a:r>
             <a:r>
               <a:rPr lang="es-ES" sz="1400" b="1" i="1" dirty="0">
@@ -4861,7 +5180,7 @@
                 <a:ea typeface="Calibri" pitchFamily="34" charset="-122"/>
                 <a:cs typeface="Calibri" pitchFamily="34" charset="-120"/>
               </a:rPr>
-              <a:t>clase1/primeros_pasos.R</a:t>
+              <a:t>tableOutput()</a:t>
             </a:r>
             <a:r>
               <a:rPr lang="es-ES" sz="1400" b="1" dirty="0">
@@ -4872,30 +5191,73 @@
                 <a:ea typeface="Calibri" pitchFamily="34" charset="-122"/>
                 <a:cs typeface="Calibri" pitchFamily="34" charset="-120"/>
               </a:rPr>
-              <a:t>.</a:t>
-            </a:r>
-            <a:endParaRPr lang="en-US" sz="1300" dirty="0"/>
+              <a:t> y </a:t>
+            </a:r>
+            <a:r>
+              <a:rPr lang="es-ES" sz="1400" b="1" i="1" dirty="0">
+                <a:solidFill>
+                  <a:schemeClr val="bg1"/>
+                </a:solidFill>
+                <a:latin typeface="Calibri" pitchFamily="34" charset="0"/>
+                <a:ea typeface="Calibri" pitchFamily="34" charset="-122"/>
+                <a:cs typeface="Calibri" pitchFamily="34" charset="-120"/>
+              </a:rPr>
+              <a:t>textOutput()</a:t>
+            </a:r>
+            <a:r>
+              <a:rPr lang="es-ES" sz="1400" b="1" dirty="0">
+                <a:solidFill>
+                  <a:schemeClr val="bg1"/>
+                </a:solidFill>
+                <a:latin typeface="Calibri" pitchFamily="34" charset="0"/>
+                <a:ea typeface="Calibri" pitchFamily="34" charset="-122"/>
+                <a:cs typeface="Calibri" pitchFamily="34" charset="-120"/>
+              </a:rPr>
+              <a:t> son espacios vacíos con un id, que el server va a rellenar. </a:t>
+            </a:r>
+            <a:r>
+              <a:rPr lang="es-ES" sz="1400" b="1" i="1" dirty="0">
+                <a:solidFill>
+                  <a:schemeClr val="bg1"/>
+                </a:solidFill>
+                <a:latin typeface="Calibri" pitchFamily="34" charset="0"/>
+                <a:ea typeface="Calibri" pitchFamily="34" charset="-122"/>
+                <a:cs typeface="Calibri" pitchFamily="34" charset="-120"/>
+              </a:rPr>
+              <a:t>TITULO</a:t>
+            </a:r>
+            <a:r>
+              <a:rPr lang="es-ES" sz="1400" b="1" dirty="0">
+                <a:solidFill>
+                  <a:schemeClr val="bg1"/>
+                </a:solidFill>
+                <a:latin typeface="Calibri" pitchFamily="34" charset="0"/>
+                <a:ea typeface="Calibri" pitchFamily="34" charset="-122"/>
+                <a:cs typeface="Calibri" pitchFamily="34" charset="-120"/>
+              </a:rPr>
+              <a:t> es la zona de pruebas.</a:t>
+            </a:r>
           </a:p>
         </p:txBody>
       </p:sp>
       <p:pic>
         <p:nvPicPr>
-          <p:cNvPr id="22" name="Picture 21" descr="p3.png"/>
+          <p:cNvPr id="22" name="Picture 21" descr="p4.png"/>
           <p:cNvPicPr>
             <a:picLocks noChangeAspect="1"/>
           </p:cNvPicPr>
           <p:nvPr/>
         </p:nvPicPr>
         <p:blipFill>
-          <a:blip r:embed="rId2"/>
+          <a:blip r:embed="rId3"/>
           <a:stretch>
             <a:fillRect/>
           </a:stretch>
         </p:blipFill>
         <p:spPr>
           <a:xfrm>
-            <a:off x="4434840" y="1471757"/>
-            <a:ext cx="4480560" cy="2497165"/>
+            <a:off x="4434840" y="1979662"/>
+            <a:ext cx="4300000" cy="2040677"/>
           </a:xfrm>
           <a:prstGeom prst="rect">
             <a:avLst/>
@@ -4971,7 +5333,7 @@
                 <a:ea typeface="Oswald" pitchFamily="34" charset="-122"/>
                 <a:cs typeface="Oswald" pitchFamily="34" charset="-120"/>
               </a:rPr>
-              <a:t>Paso a paso (4)</a:t>
+              <a:t>Paso a paso (6)</a:t>
             </a:r>
             <a:endParaRPr lang="en-US" sz="3000" dirty="0"/>
           </a:p>
@@ -5098,7 +5460,7 @@
                 <a:ea typeface="Calibri" pitchFamily="34" charset="-122"/>
                 <a:cs typeface="Calibri" pitchFamily="34" charset="-120"/>
               </a:rPr>
-              <a:t>La interfaz (ui)</a:t>
+              <a:t>El servidor (server)</a:t>
             </a:r>
           </a:p>
         </p:txBody>
@@ -5195,7 +5557,7 @@
                 <a:ea typeface="Calibri" pitchFamily="34" charset="-122"/>
                 <a:cs typeface="Calibri" pitchFamily="34" charset="-120"/>
               </a:rPr>
-              <a:t>fluidPage()</a:t>
+              <a:t>output$tabla_elecciones &lt;- renderTable()</a:t>
             </a:r>
             <a:r>
               <a:rPr lang="es-ES" sz="1400" b="1" dirty="0">
@@ -5206,7 +5568,7 @@
                 <a:ea typeface="Calibri" pitchFamily="34" charset="-122"/>
                 <a:cs typeface="Calibri" pitchFamily="34" charset="-120"/>
               </a:rPr>
-              <a:t> apila de arriba hacia abajo lo que va adentro. </a:t>
+              <a:t> rellena el espacio que tiene ese mismo id. </a:t>
             </a:r>
             <a:r>
               <a:rPr lang="es-ES" sz="1400" b="1" i="1" dirty="0">
@@ -5217,7 +5579,7 @@
                 <a:ea typeface="Calibri" pitchFamily="34" charset="-122"/>
                 <a:cs typeface="Calibri" pitchFamily="34" charset="-120"/>
               </a:rPr>
-              <a:t>titlePanel()</a:t>
+              <a:t>renderText()</a:t>
             </a:r>
             <a:r>
               <a:rPr lang="es-ES" sz="1400" b="1" dirty="0">
@@ -5228,10 +5590,16 @@
                 <a:ea typeface="Calibri" pitchFamily="34" charset="-122"/>
                 <a:cs typeface="Calibri" pitchFamily="34" charset="-120"/>
               </a:rPr>
-              <a:t>, </a:t>
-            </a:r>
-            <a:r>
-              <a:rPr lang="es-ES" sz="1400" b="1" i="1" dirty="0">
+              <a:t> hace lo mismo con el total.</a:t>
+            </a:r>
+          </a:p>
+          <a:p>
+            <a:endParaRPr lang="en-US" sz="1300" dirty="0"/>
+          </a:p>
+          <a:p>
+            <a:endParaRPr lang="en-US" sz="1300" dirty="0"/>
+            <a:r>
+              <a:rPr lang="es-ES" sz="1400" b="1" dirty="0">
                 <a:solidFill>
                   <a:schemeClr val="bg1"/>
                 </a:solidFill>
@@ -5239,10 +5607,10 @@
                 <a:ea typeface="Calibri" pitchFamily="34" charset="-122"/>
                 <a:cs typeface="Calibri" pitchFamily="34" charset="-120"/>
               </a:rPr>
-              <a:t>p()</a:t>
-            </a:r>
-            <a:r>
-              <a:rPr lang="es-ES" sz="1400" b="1" dirty="0">
+              <a:t/>
+            </a:r>
+            <a:r>
+              <a:rPr lang="es-ES" sz="1400" b="1" i="1" dirty="0">
                 <a:solidFill>
                   <a:schemeClr val="bg1"/>
                 </a:solidFill>
@@ -5250,10 +5618,10 @@
                 <a:ea typeface="Calibri" pitchFamily="34" charset="-122"/>
                 <a:cs typeface="Calibri" pitchFamily="34" charset="-120"/>
               </a:rPr>
-              <a:t> y </a:t>
-            </a:r>
-            <a:r>
-              <a:rPr lang="es-ES" sz="1400" b="1" i="1" dirty="0">
+              <a:t>read.csv()</a:t>
+            </a:r>
+            <a:r>
+              <a:rPr lang="es-ES" sz="1400" b="1" dirty="0">
                 <a:solidFill>
                   <a:schemeClr val="bg1"/>
                 </a:solidFill>
@@ -5261,10 +5629,10 @@
                 <a:ea typeface="Calibri" pitchFamily="34" charset="-122"/>
                 <a:cs typeface="Calibri" pitchFamily="34" charset="-120"/>
               </a:rPr>
-              <a:t>h3()</a:t>
-            </a:r>
-            <a:r>
-              <a:rPr lang="es-ES" sz="1400" b="1" dirty="0">
+              <a:t> corre una sola vez, al arrancar. </a:t>
+            </a:r>
+            <a:r>
+              <a:rPr lang="es-ES" sz="1400" b="1" i="1" dirty="0">
                 <a:solidFill>
                   <a:schemeClr val="bg1"/>
                 </a:solidFill>
@@ -5272,14 +5640,8 @@
                 <a:ea typeface="Calibri" pitchFamily="34" charset="-122"/>
                 <a:cs typeface="Calibri" pitchFamily="34" charset="-120"/>
               </a:rPr>
-              <a:t> son texto fijo.</a:t>
-            </a:r>
-          </a:p>
-          <a:p>
-            <a:endParaRPr lang="en-US" sz="1300" dirty="0"/>
-          </a:p>
-          <a:p>
-            <a:endParaRPr lang="en-US" sz="1300" dirty="0"/>
+              <a:t>shinyApp()</a:t>
+            </a:r>
             <a:r>
               <a:rPr lang="es-ES" sz="1400" b="1" dirty="0">
                 <a:solidFill>
@@ -5289,73 +5651,7 @@
                 <a:ea typeface="Calibri" pitchFamily="34" charset="-122"/>
                 <a:cs typeface="Calibri" pitchFamily="34" charset="-120"/>
               </a:rPr>
-              <a:t/>
-            </a:r>
-            <a:r>
-              <a:rPr lang="es-ES" sz="1400" b="1" i="1" dirty="0">
-                <a:solidFill>
-                  <a:schemeClr val="bg1"/>
-                </a:solidFill>
-                <a:latin typeface="Calibri" pitchFamily="34" charset="0"/>
-                <a:ea typeface="Calibri" pitchFamily="34" charset="-122"/>
-                <a:cs typeface="Calibri" pitchFamily="34" charset="-120"/>
-              </a:rPr>
-              <a:t>tableOutput()</a:t>
-            </a:r>
-            <a:r>
-              <a:rPr lang="es-ES" sz="1400" b="1" dirty="0">
-                <a:solidFill>
-                  <a:schemeClr val="bg1"/>
-                </a:solidFill>
-                <a:latin typeface="Calibri" pitchFamily="34" charset="0"/>
-                <a:ea typeface="Calibri" pitchFamily="34" charset="-122"/>
-                <a:cs typeface="Calibri" pitchFamily="34" charset="-120"/>
-              </a:rPr>
-              <a:t> y </a:t>
-            </a:r>
-            <a:r>
-              <a:rPr lang="es-ES" sz="1400" b="1" i="1" dirty="0">
-                <a:solidFill>
-                  <a:schemeClr val="bg1"/>
-                </a:solidFill>
-                <a:latin typeface="Calibri" pitchFamily="34" charset="0"/>
-                <a:ea typeface="Calibri" pitchFamily="34" charset="-122"/>
-                <a:cs typeface="Calibri" pitchFamily="34" charset="-120"/>
-              </a:rPr>
-              <a:t>textOutput()</a:t>
-            </a:r>
-            <a:r>
-              <a:rPr lang="es-ES" sz="1400" b="1" dirty="0">
-                <a:solidFill>
-                  <a:schemeClr val="bg1"/>
-                </a:solidFill>
-                <a:latin typeface="Calibri" pitchFamily="34" charset="0"/>
-                <a:ea typeface="Calibri" pitchFamily="34" charset="-122"/>
-                <a:cs typeface="Calibri" pitchFamily="34" charset="-120"/>
-              </a:rPr>
-              <a:t> son espacios vacíos con un id, que el server va a rellenar. </a:t>
-            </a:r>
-            <a:r>
-              <a:rPr lang="es-ES" sz="1400" b="1" i="1" dirty="0">
-                <a:solidFill>
-                  <a:schemeClr val="bg1"/>
-                </a:solidFill>
-                <a:latin typeface="Calibri" pitchFamily="34" charset="0"/>
-                <a:ea typeface="Calibri" pitchFamily="34" charset="-122"/>
-                <a:cs typeface="Calibri" pitchFamily="34" charset="-120"/>
-              </a:rPr>
-              <a:t>TITULO</a:t>
-            </a:r>
-            <a:r>
-              <a:rPr lang="es-ES" sz="1400" b="1" dirty="0">
-                <a:solidFill>
-                  <a:schemeClr val="bg1"/>
-                </a:solidFill>
-                <a:latin typeface="Calibri" pitchFamily="34" charset="0"/>
-                <a:ea typeface="Calibri" pitchFamily="34" charset="-122"/>
-                <a:cs typeface="Calibri" pitchFamily="34" charset="-120"/>
-              </a:rPr>
-              <a:t> es la zona de pruebas.</a:t>
+              <a:t> une la ui y el server.</a:t>
             </a:r>
           </a:p>
         </p:txBody>
@@ -5376,8 +5672,8 @@
         </p:blipFill>
         <p:spPr>
           <a:xfrm>
-            <a:off x="4434840" y="1979662"/>
-            <a:ext cx="4300000" cy="2040677"/>
+            <a:off x="4434840" y="2296950"/>
+            <a:ext cx="4300000" cy="1406100"/>
           </a:xfrm>
           <a:prstGeom prst="rect">
             <a:avLst/>
@@ -5412,20 +5708,14 @@
     </p:bg>
     <p:spTree>
       <p:nvGrpSpPr>
-        <p:cNvPr id="1" name=""/>
+        <p:cNvPr id="2" name=""/>
         <p:cNvGrpSpPr/>
         <p:nvPr/>
       </p:nvGrpSpPr>
       <p:grpSpPr/>
       <p:sp>
         <p:nvSpPr>
-          <p:cNvPr id="2" name="Text 0">
-            <a:extLst>
-              <a:ext uri="{FF2B5EF4-FFF2-40B4-BE49-F238E27FC236}">
-                <a16:creationId xmlns:a16="http://schemas.microsoft.com/office/drawing/2014/main" id="{21E0B84E-B772-A594-B980-A7B918F749C6}"/>
-              </a:ext>
-            </a:extLst>
-          </p:cNvPr>
+          <p:cNvPr id="3" name="Text 0"/>
           <p:cNvSpPr txBox="1"/>
           <p:nvPr/>
         </p:nvSpPr>
@@ -5444,6 +5734,9 @@
           <a:bodyPr wrap="square" lIns="0" tIns="0" rIns="0" bIns="0" rtlCol="0" anchor="ctr"/>
           <a:lstStyle/>
           <a:p>
+            <a:pPr marL="0" indent="0">
+              <a:buNone/>
+            </a:pPr>
             <a:r>
               <a:rPr lang="en-US" sz="3000" b="1" dirty="0">
                 <a:solidFill>
@@ -5453,170 +5746,81 @@
                 <a:ea typeface="Oswald" pitchFamily="34" charset="-122"/>
                 <a:cs typeface="Oswald" pitchFamily="34" charset="-120"/>
               </a:rPr>
-              <a:t>Paso a paso (5)</a:t>
-            </a:r>
-            <a:endParaRPr lang="en-US" sz="3000" dirty="0"/>
-          </a:p>
-        </p:txBody>
-      </p:sp>
-      <p:sp>
-        <p:nvSpPr>
-          <p:cNvPr id="11" name="Shape 9">
-            <a:extLst>
-              <a:ext uri="{FF2B5EF4-FFF2-40B4-BE49-F238E27FC236}">
-                <a16:creationId xmlns:a16="http://schemas.microsoft.com/office/drawing/2014/main" id="{8584C834-90F2-8AA8-B328-3643E4CCE677}"/>
-              </a:ext>
-            </a:extLst>
-          </p:cNvPr>
-          <p:cNvSpPr/>
-          <p:nvPr/>
-        </p:nvSpPr>
-        <p:spPr>
-          <a:xfrm>
-            <a:off x="439616" y="1188720"/>
-            <a:ext cx="2560320" cy="1463040"/>
-          </a:xfrm>
-          <a:prstGeom prst="roundRect">
-            <a:avLst>
-              <a:gd name="adj" fmla="val 2143"/>
-            </a:avLst>
-          </a:prstGeom>
-          <a:solidFill>
-            <a:srgbClr val="5A189A"/>
-          </a:solidFill>
-          <a:ln w="12700">
-            <a:solidFill>
-              <a:srgbClr val="5A189A"/>
-            </a:solidFill>
-            <a:prstDash val="solid"/>
-          </a:ln>
-        </p:spPr>
-        <p:txBody>
-          <a:bodyPr/>
-          <a:lstStyle/>
-          <a:p>
-            <a:endParaRPr lang="en-US"/>
-          </a:p>
-        </p:txBody>
-      </p:sp>
-      <p:sp>
-        <p:nvSpPr>
-          <p:cNvPr id="12" name="Text 10">
-            <a:extLst>
-              <a:ext uri="{FF2B5EF4-FFF2-40B4-BE49-F238E27FC236}">
-                <a16:creationId xmlns:a16="http://schemas.microsoft.com/office/drawing/2014/main" id="{3D0787E2-7C7C-7A9C-ED72-1B8D5BA244E4}"/>
-              </a:ext>
-            </a:extLst>
-          </p:cNvPr>
-          <p:cNvSpPr txBox="1"/>
-          <p:nvPr/>
-        </p:nvSpPr>
-        <p:spPr>
-          <a:xfrm>
-            <a:off x="668216" y="1256068"/>
-            <a:ext cx="2103120" cy="502920"/>
-          </a:xfrm>
-          <a:prstGeom prst="rect">
-            <a:avLst/>
-          </a:prstGeom>
-          <a:noFill/>
-          <a:ln/>
-        </p:spPr>
-        <p:txBody>
-          <a:bodyPr wrap="square" lIns="0" tIns="0" rIns="0" bIns="0" rtlCol="0" anchor="ctr"/>
-          <a:lstStyle/>
-          <a:p>
-            <a:pPr marL="0" indent="0">
-              <a:buNone/>
-            </a:pPr>
-            <a:r>
-              <a:rPr lang="en-US" sz="1600" b="1" dirty="0">
-                <a:solidFill>
-                  <a:srgbClr val="FFFFFF"/>
+              <a:t>Componentes a </a:t>
+            </a:r>
+            <a:r>
+              <a:rPr lang="en-US" sz="3000" b="1" dirty="0" err="1">
+                <a:solidFill>
+                  <a:srgbClr val="2E0A4E"/>
                 </a:solidFill>
                 <a:latin typeface="Oswald" pitchFamily="34" charset="0"/>
                 <a:ea typeface="Oswald" pitchFamily="34" charset="-122"/>
                 <a:cs typeface="Oswald" pitchFamily="34" charset="-120"/>
               </a:rPr>
-              <a:t>OBJETIVO 5</a:t>
-            </a:r>
-            <a:endParaRPr lang="en-US" sz="1600" dirty="0"/>
-          </a:p>
-        </p:txBody>
-      </p:sp>
-      <p:sp>
-        <p:nvSpPr>
-          <p:cNvPr id="13" name="Text 11">
-            <a:extLst>
-              <a:ext uri="{FF2B5EF4-FFF2-40B4-BE49-F238E27FC236}">
-                <a16:creationId xmlns:a16="http://schemas.microsoft.com/office/drawing/2014/main" id="{0C2592C3-39BA-DB09-D0F1-BF73ED6DEC99}"/>
-              </a:ext>
-            </a:extLst>
-          </p:cNvPr>
-          <p:cNvSpPr txBox="1"/>
-          <p:nvPr/>
-        </p:nvSpPr>
-        <p:spPr>
-          <a:xfrm>
-            <a:off x="668216" y="1734572"/>
-            <a:ext cx="2103120" cy="716926"/>
-          </a:xfrm>
-          <a:prstGeom prst="rect">
-            <a:avLst/>
-          </a:prstGeom>
-          <a:noFill/>
-          <a:ln/>
-        </p:spPr>
-        <p:txBody>
-          <a:bodyPr wrap="square" lIns="0" tIns="0" rIns="0" bIns="0" rtlCol="0" anchor="t"/>
-          <a:lstStyle/>
-          <a:p>
-            <a:r>
-              <a:rPr lang="es-ES" sz="1400" dirty="0">
-                <a:solidFill>
-                  <a:schemeClr val="bg1"/>
-                </a:solidFill>
-                <a:latin typeface="Calibri" pitchFamily="34" charset="0"/>
-                <a:ea typeface="Calibri" pitchFamily="34" charset="-122"/>
-                <a:cs typeface="Calibri" pitchFamily="34" charset="-120"/>
-              </a:rPr>
-              <a:t>El servidor (server)</a:t>
-            </a:r>
-          </a:p>
-        </p:txBody>
-      </p:sp>
-      <p:sp>
-        <p:nvSpPr>
-          <p:cNvPr id="15" name="Shape 9">
-            <a:extLst>
-              <a:ext uri="{FF2B5EF4-FFF2-40B4-BE49-F238E27FC236}">
-                <a16:creationId xmlns:a16="http://schemas.microsoft.com/office/drawing/2014/main" id="{ADB729CB-A987-663A-1058-A842556E3C9E}"/>
-              </a:ext>
-            </a:extLst>
-          </p:cNvPr>
+              <a:t>observar</a:t>
+            </a:r>
+            <a:r>
+              <a:rPr lang="en-US" sz="3000" b="1" dirty="0">
+                <a:solidFill>
+                  <a:srgbClr val="2E0A4E"/>
+                </a:solidFill>
+                <a:latin typeface="Oswald" pitchFamily="34" charset="0"/>
+                <a:ea typeface="Oswald" pitchFamily="34" charset="-122"/>
+                <a:cs typeface="Oswald" pitchFamily="34" charset="-120"/>
+              </a:rPr>
+              <a:t> en la </a:t>
+            </a:r>
+            <a:r>
+              <a:rPr lang="en-US" sz="3000" b="1" dirty="0" err="1">
+                <a:solidFill>
+                  <a:srgbClr val="2E0A4E"/>
+                </a:solidFill>
+                <a:latin typeface="Oswald" pitchFamily="34" charset="0"/>
+                <a:ea typeface="Oswald" pitchFamily="34" charset="-122"/>
+                <a:cs typeface="Oswald" pitchFamily="34" charset="-120"/>
+              </a:rPr>
+              <a:t>replicación</a:t>
+            </a:r>
+            <a:r>
+              <a:rPr lang="en-US" sz="3000" b="1" dirty="0">
+                <a:solidFill>
+                  <a:srgbClr val="2E0A4E"/>
+                </a:solidFill>
+                <a:latin typeface="Oswald" pitchFamily="34" charset="0"/>
+                <a:ea typeface="Oswald" pitchFamily="34" charset="-122"/>
+                <a:cs typeface="Oswald" pitchFamily="34" charset="-120"/>
+              </a:rPr>
+              <a:t> </a:t>
+            </a:r>
+            <a:endParaRPr lang="en-US" sz="3000" dirty="0"/>
+          </a:p>
+        </p:txBody>
+      </p:sp>
+      <p:sp>
+        <p:nvSpPr>
+          <p:cNvPr id="4" name="Shape 3"/>
           <p:cNvSpPr/>
           <p:nvPr/>
         </p:nvSpPr>
         <p:spPr>
           <a:xfrm>
-            <a:off x="439615" y="2719107"/>
-            <a:ext cx="3773659" cy="2281957"/>
+            <a:off x="502920" y="1188720"/>
+            <a:ext cx="3954780" cy="585216"/>
           </a:xfrm>
           <a:prstGeom prst="roundRect">
             <a:avLst>
-              <a:gd name="adj" fmla="val 2143"/>
+              <a:gd name="adj" fmla="val 7813"/>
             </a:avLst>
           </a:prstGeom>
           <a:solidFill>
             <a:schemeClr val="accent1">
-              <a:lumMod val="75000"/>
+              <a:lumMod val="20000"/>
+              <a:lumOff val="80000"/>
             </a:schemeClr>
           </a:solidFill>
           <a:ln w="12700">
             <a:solidFill>
-              <a:schemeClr val="accent1">
-                <a:lumMod val="75000"/>
-              </a:schemeClr>
+              <a:srgbClr val="F4ECFB"/>
             </a:solidFill>
             <a:prstDash val="solid"/>
           </a:ln>
@@ -5631,20 +5835,14 @@
       </p:sp>
       <p:sp>
         <p:nvSpPr>
-          <p:cNvPr id="17" name="Text 11">
-            <a:extLst>
-              <a:ext uri="{FF2B5EF4-FFF2-40B4-BE49-F238E27FC236}">
-                <a16:creationId xmlns:a16="http://schemas.microsoft.com/office/drawing/2014/main" id="{90C1F140-6606-DACA-D829-EF5414EB787C}"/>
-              </a:ext>
-            </a:extLst>
-          </p:cNvPr>
+          <p:cNvPr id="5" name="Text 4"/>
           <p:cNvSpPr txBox="1"/>
           <p:nvPr/>
         </p:nvSpPr>
         <p:spPr>
           <a:xfrm>
-            <a:off x="647115" y="2880360"/>
-            <a:ext cx="3369212" cy="716926"/>
+            <a:off x="640080" y="1207008"/>
+            <a:ext cx="3680460" cy="292608"/>
           </a:xfrm>
           <a:prstGeom prst="rect">
             <a:avLst/>
@@ -5653,160 +5851,871 @@
           <a:ln/>
         </p:spPr>
         <p:txBody>
-          <a:bodyPr wrap="square" lIns="0" tIns="0" rIns="0" bIns="0" rtlCol="0" anchor="t"/>
-          <a:lstStyle/>
-          <a:p>
-            <a:endParaRPr lang="en-US" sz="1300" dirty="0"/>
-            <a:r>
-              <a:rPr lang="es-ES" sz="1400" b="1" dirty="0">
-                <a:solidFill>
-                  <a:schemeClr val="bg1"/>
+          <a:bodyPr wrap="square" lIns="0" tIns="0" rIns="0" bIns="0" rtlCol="0" anchor="ctr"/>
+          <a:lstStyle/>
+          <a:p>
+            <a:pPr marL="0" indent="0">
+              <a:buNone/>
+            </a:pPr>
+            <a:r>
+              <a:rPr lang="en-US" sz="1050" b="1" dirty="0">
+                <a:solidFill>
+                  <a:srgbClr val="5A189A"/>
+                </a:solidFill>
+                <a:latin typeface="Courier New" pitchFamily="34" charset="0"/>
+                <a:ea typeface="Courier New" pitchFamily="34" charset="-122"/>
+                <a:cs typeface="Courier New" pitchFamily="34" charset="-120"/>
+              </a:rPr>
+              <a:t>objeto &lt;- valor</a:t>
+            </a:r>
+            <a:endParaRPr lang="en-US" sz="1050" dirty="0"/>
+          </a:p>
+        </p:txBody>
+      </p:sp>
+      <p:sp>
+        <p:nvSpPr>
+          <p:cNvPr id="6" name="Text 5"/>
+          <p:cNvSpPr txBox="1"/>
+          <p:nvPr/>
+        </p:nvSpPr>
+        <p:spPr>
+          <a:xfrm>
+            <a:off x="640080" y="1469624"/>
+            <a:ext cx="3680460" cy="292608"/>
+          </a:xfrm>
+          <a:prstGeom prst="rect">
+            <a:avLst/>
+          </a:prstGeom>
+          <a:noFill/>
+          <a:ln/>
+        </p:spPr>
+        <p:txBody>
+          <a:bodyPr wrap="square" lIns="0" tIns="0" rIns="0" bIns="0" rtlCol="0" anchor="ctr"/>
+          <a:lstStyle/>
+          <a:p>
+            <a:pPr marL="0" indent="0">
+              <a:buNone/>
+            </a:pPr>
+            <a:r>
+              <a:rPr lang="en-US" sz="1050" dirty="0">
+                <a:solidFill>
+                  <a:srgbClr val="2E0A4E"/>
                 </a:solidFill>
                 <a:latin typeface="Calibri" pitchFamily="34" charset="0"/>
                 <a:ea typeface="Calibri" pitchFamily="34" charset="-122"/>
                 <a:cs typeface="Calibri" pitchFamily="34" charset="-120"/>
               </a:rPr>
-              <a:t/>
-            </a:r>
-            <a:r>
-              <a:rPr lang="es-ES" sz="1400" b="1" i="1" dirty="0">
-                <a:solidFill>
-                  <a:schemeClr val="bg1"/>
+              <a:t>Guarda un valor con un nombre.</a:t>
+            </a:r>
+            <a:endParaRPr lang="en-US" sz="1050" dirty="0"/>
+          </a:p>
+        </p:txBody>
+      </p:sp>
+      <p:sp>
+        <p:nvSpPr>
+          <p:cNvPr id="7" name="Shape 6"/>
+          <p:cNvSpPr/>
+          <p:nvPr/>
+        </p:nvSpPr>
+        <p:spPr>
+          <a:xfrm>
+            <a:off x="4675751" y="1609344"/>
+            <a:ext cx="3954780" cy="585216"/>
+          </a:xfrm>
+          <a:prstGeom prst="roundRect">
+            <a:avLst>
+              <a:gd name="adj" fmla="val 7813"/>
+            </a:avLst>
+          </a:prstGeom>
+          <a:solidFill>
+            <a:schemeClr val="accent4">
+              <a:lumMod val="20000"/>
+              <a:lumOff val="80000"/>
+            </a:schemeClr>
+          </a:solidFill>
+          <a:ln w="12700">
+            <a:solidFill>
+              <a:srgbClr val="F4ECFB"/>
+            </a:solidFill>
+            <a:prstDash val="solid"/>
+          </a:ln>
+        </p:spPr>
+        <p:txBody>
+          <a:bodyPr/>
+          <a:lstStyle/>
+          <a:p>
+            <a:endParaRPr lang="en-US"/>
+          </a:p>
+        </p:txBody>
+      </p:sp>
+      <p:sp>
+        <p:nvSpPr>
+          <p:cNvPr id="8" name="Text 7"/>
+          <p:cNvSpPr txBox="1"/>
+          <p:nvPr/>
+        </p:nvSpPr>
+        <p:spPr>
+          <a:xfrm>
+            <a:off x="4812911" y="1627632"/>
+            <a:ext cx="3680460" cy="292608"/>
+          </a:xfrm>
+          <a:prstGeom prst="rect">
+            <a:avLst/>
+          </a:prstGeom>
+          <a:noFill/>
+          <a:ln/>
+        </p:spPr>
+        <p:txBody>
+          <a:bodyPr wrap="square" lIns="0" tIns="0" rIns="0" bIns="0" rtlCol="0" anchor="ctr"/>
+          <a:lstStyle/>
+          <a:p>
+            <a:pPr marL="0" indent="0">
+              <a:buNone/>
+            </a:pPr>
+            <a:r>
+              <a:rPr lang="en-US" sz="1050" b="1" dirty="0">
+                <a:solidFill>
+                  <a:srgbClr val="5A189A"/>
+                </a:solidFill>
+                <a:latin typeface="Courier New" pitchFamily="34" charset="0"/>
+                <a:ea typeface="Courier New" pitchFamily="34" charset="-122"/>
+                <a:cs typeface="Courier New" pitchFamily="34" charset="-120"/>
+              </a:rPr>
+              <a:t>c() y vector[1]</a:t>
+            </a:r>
+            <a:endParaRPr lang="en-US" sz="1050" dirty="0"/>
+          </a:p>
+        </p:txBody>
+      </p:sp>
+      <p:sp>
+        <p:nvSpPr>
+          <p:cNvPr id="9" name="Text 8"/>
+          <p:cNvSpPr txBox="1"/>
+          <p:nvPr/>
+        </p:nvSpPr>
+        <p:spPr>
+          <a:xfrm>
+            <a:off x="4812911" y="1890248"/>
+            <a:ext cx="3680460" cy="292608"/>
+          </a:xfrm>
+          <a:prstGeom prst="rect">
+            <a:avLst/>
+          </a:prstGeom>
+          <a:noFill/>
+          <a:ln/>
+        </p:spPr>
+        <p:txBody>
+          <a:bodyPr wrap="square" lIns="0" tIns="0" rIns="0" bIns="0" rtlCol="0" anchor="ctr"/>
+          <a:lstStyle/>
+          <a:p>
+            <a:pPr marL="0" indent="0">
+              <a:buNone/>
+            </a:pPr>
+            <a:r>
+              <a:rPr lang="en-US" sz="1050" dirty="0">
+                <a:solidFill>
+                  <a:srgbClr val="2E0A4E"/>
                 </a:solidFill>
                 <a:latin typeface="Calibri" pitchFamily="34" charset="0"/>
                 <a:ea typeface="Calibri" pitchFamily="34" charset="-122"/>
                 <a:cs typeface="Calibri" pitchFamily="34" charset="-120"/>
               </a:rPr>
-              <a:t>output$tabla_elecciones &lt;- renderTable()</a:t>
-            </a:r>
-            <a:r>
-              <a:rPr lang="es-ES" sz="1400" b="1" dirty="0">
-                <a:solidFill>
-                  <a:schemeClr val="bg1"/>
+              <a:t>Varios valores juntos, y cómo elegir uno.</a:t>
+            </a:r>
+            <a:endParaRPr lang="en-US" sz="1050" dirty="0"/>
+          </a:p>
+        </p:txBody>
+      </p:sp>
+      <p:sp>
+        <p:nvSpPr>
+          <p:cNvPr id="10" name="Shape 9"/>
+          <p:cNvSpPr/>
+          <p:nvPr/>
+        </p:nvSpPr>
+        <p:spPr>
+          <a:xfrm>
+            <a:off x="502920" y="1847088"/>
+            <a:ext cx="3954780" cy="585216"/>
+          </a:xfrm>
+          <a:prstGeom prst="roundRect">
+            <a:avLst>
+              <a:gd name="adj" fmla="val 7813"/>
+            </a:avLst>
+          </a:prstGeom>
+          <a:solidFill>
+            <a:schemeClr val="accent1">
+              <a:lumMod val="20000"/>
+              <a:lumOff val="80000"/>
+            </a:schemeClr>
+          </a:solidFill>
+          <a:ln w="12700">
+            <a:solidFill>
+              <a:srgbClr val="F4ECFB"/>
+            </a:solidFill>
+            <a:prstDash val="solid"/>
+          </a:ln>
+        </p:spPr>
+        <p:txBody>
+          <a:bodyPr/>
+          <a:lstStyle/>
+          <a:p>
+            <a:endParaRPr lang="en-US"/>
+          </a:p>
+        </p:txBody>
+      </p:sp>
+      <p:sp>
+        <p:nvSpPr>
+          <p:cNvPr id="11" name="Text 10"/>
+          <p:cNvSpPr txBox="1"/>
+          <p:nvPr/>
+        </p:nvSpPr>
+        <p:spPr>
+          <a:xfrm>
+            <a:off x="640080" y="1865376"/>
+            <a:ext cx="3680460" cy="292608"/>
+          </a:xfrm>
+          <a:prstGeom prst="rect">
+            <a:avLst/>
+          </a:prstGeom>
+          <a:noFill/>
+          <a:ln/>
+        </p:spPr>
+        <p:txBody>
+          <a:bodyPr wrap="square" lIns="0" tIns="0" rIns="0" bIns="0" rtlCol="0" anchor="ctr"/>
+          <a:lstStyle/>
+          <a:p>
+            <a:pPr marL="0" indent="0">
+              <a:buNone/>
+            </a:pPr>
+            <a:r>
+              <a:rPr lang="en-US" sz="1050" b="1" dirty="0">
+                <a:solidFill>
+                  <a:srgbClr val="5A189A"/>
+                </a:solidFill>
+                <a:latin typeface="Courier New" pitchFamily="34" charset="0"/>
+                <a:ea typeface="Courier New" pitchFamily="34" charset="-122"/>
+                <a:cs typeface="Courier New" pitchFamily="34" charset="-120"/>
+              </a:rPr>
+              <a:t>sum(), mean(), paste0()</a:t>
+            </a:r>
+            <a:endParaRPr lang="en-US" sz="1050" dirty="0"/>
+          </a:p>
+        </p:txBody>
+      </p:sp>
+      <p:sp>
+        <p:nvSpPr>
+          <p:cNvPr id="12" name="Text 11"/>
+          <p:cNvSpPr txBox="1"/>
+          <p:nvPr/>
+        </p:nvSpPr>
+        <p:spPr>
+          <a:xfrm>
+            <a:off x="640080" y="2127992"/>
+            <a:ext cx="3680460" cy="292608"/>
+          </a:xfrm>
+          <a:prstGeom prst="rect">
+            <a:avLst/>
+          </a:prstGeom>
+          <a:noFill/>
+          <a:ln/>
+        </p:spPr>
+        <p:txBody>
+          <a:bodyPr wrap="square" lIns="0" tIns="0" rIns="0" bIns="0" rtlCol="0" anchor="ctr"/>
+          <a:lstStyle/>
+          <a:p>
+            <a:pPr marL="0" indent="0">
+              <a:buNone/>
+            </a:pPr>
+            <a:r>
+              <a:rPr lang="en-US" sz="1050" dirty="0">
+                <a:solidFill>
+                  <a:srgbClr val="2E0A4E"/>
                 </a:solidFill>
                 <a:latin typeface="Calibri" pitchFamily="34" charset="0"/>
                 <a:ea typeface="Calibri" pitchFamily="34" charset="-122"/>
                 <a:cs typeface="Calibri" pitchFamily="34" charset="-120"/>
               </a:rPr>
-              <a:t> rellena el espacio que tiene ese mismo id. </a:t>
-            </a:r>
-            <a:r>
-              <a:rPr lang="es-ES" sz="1400" b="1" i="1" dirty="0">
-                <a:solidFill>
-                  <a:schemeClr val="bg1"/>
+              <a:t>Funciones, reciben algo y devuelven un resultado.</a:t>
+            </a:r>
+            <a:endParaRPr lang="en-US" sz="1050" dirty="0"/>
+          </a:p>
+        </p:txBody>
+      </p:sp>
+      <p:sp>
+        <p:nvSpPr>
+          <p:cNvPr id="13" name="Shape 12"/>
+          <p:cNvSpPr/>
+          <p:nvPr/>
+        </p:nvSpPr>
+        <p:spPr>
+          <a:xfrm>
+            <a:off x="4675751" y="2267712"/>
+            <a:ext cx="3954780" cy="585216"/>
+          </a:xfrm>
+          <a:prstGeom prst="roundRect">
+            <a:avLst>
+              <a:gd name="adj" fmla="val 7813"/>
+            </a:avLst>
+          </a:prstGeom>
+          <a:solidFill>
+            <a:schemeClr val="accent4">
+              <a:lumMod val="20000"/>
+              <a:lumOff val="80000"/>
+            </a:schemeClr>
+          </a:solidFill>
+          <a:ln w="12700">
+            <a:solidFill>
+              <a:srgbClr val="F4ECFB"/>
+            </a:solidFill>
+            <a:prstDash val="solid"/>
+          </a:ln>
+        </p:spPr>
+        <p:txBody>
+          <a:bodyPr/>
+          <a:lstStyle/>
+          <a:p>
+            <a:endParaRPr lang="en-US"/>
+          </a:p>
+        </p:txBody>
+      </p:sp>
+      <p:sp>
+        <p:nvSpPr>
+          <p:cNvPr id="14" name="Text 13"/>
+          <p:cNvSpPr txBox="1"/>
+          <p:nvPr/>
+        </p:nvSpPr>
+        <p:spPr>
+          <a:xfrm>
+            <a:off x="4812911" y="2286000"/>
+            <a:ext cx="3680460" cy="292608"/>
+          </a:xfrm>
+          <a:prstGeom prst="rect">
+            <a:avLst/>
+          </a:prstGeom>
+          <a:noFill/>
+          <a:ln/>
+        </p:spPr>
+        <p:txBody>
+          <a:bodyPr wrap="square" lIns="0" tIns="0" rIns="0" bIns="0" rtlCol="0" anchor="ctr"/>
+          <a:lstStyle/>
+          <a:p>
+            <a:pPr marL="0" indent="0">
+              <a:buNone/>
+            </a:pPr>
+            <a:r>
+              <a:rPr lang="en-US" sz="1050" b="1" dirty="0">
+                <a:solidFill>
+                  <a:srgbClr val="5A189A"/>
+                </a:solidFill>
+                <a:latin typeface="Courier New" pitchFamily="34" charset="0"/>
+                <a:ea typeface="Courier New" pitchFamily="34" charset="-122"/>
+                <a:cs typeface="Courier New" pitchFamily="34" charset="-120"/>
+              </a:rPr>
+              <a:t>install.packages() y library()</a:t>
+            </a:r>
+            <a:endParaRPr lang="en-US" sz="1050" dirty="0"/>
+          </a:p>
+        </p:txBody>
+      </p:sp>
+      <p:sp>
+        <p:nvSpPr>
+          <p:cNvPr id="15" name="Text 14"/>
+          <p:cNvSpPr txBox="1"/>
+          <p:nvPr/>
+        </p:nvSpPr>
+        <p:spPr>
+          <a:xfrm>
+            <a:off x="4812911" y="2548616"/>
+            <a:ext cx="3680460" cy="292608"/>
+          </a:xfrm>
+          <a:prstGeom prst="rect">
+            <a:avLst/>
+          </a:prstGeom>
+          <a:noFill/>
+          <a:ln/>
+        </p:spPr>
+        <p:txBody>
+          <a:bodyPr wrap="square" lIns="0" tIns="0" rIns="0" bIns="0" rtlCol="0" anchor="ctr"/>
+          <a:lstStyle/>
+          <a:p>
+            <a:pPr marL="0" indent="0">
+              <a:buNone/>
+            </a:pPr>
+            <a:r>
+              <a:rPr lang="en-US" sz="1050" dirty="0">
+                <a:solidFill>
+                  <a:srgbClr val="2E0A4E"/>
                 </a:solidFill>
                 <a:latin typeface="Calibri" pitchFamily="34" charset="0"/>
                 <a:ea typeface="Calibri" pitchFamily="34" charset="-122"/>
                 <a:cs typeface="Calibri" pitchFamily="34" charset="-120"/>
               </a:rPr>
-              <a:t>renderText()</a:t>
-            </a:r>
-            <a:r>
-              <a:rPr lang="es-ES" sz="1400" b="1" dirty="0">
-                <a:solidFill>
-                  <a:schemeClr val="bg1"/>
+              <a:t>Instalar una vez, activar cada vez.</a:t>
+            </a:r>
+            <a:endParaRPr lang="en-US" sz="1050" dirty="0"/>
+          </a:p>
+        </p:txBody>
+      </p:sp>
+      <p:sp>
+        <p:nvSpPr>
+          <p:cNvPr id="16" name="Shape 15"/>
+          <p:cNvSpPr/>
+          <p:nvPr/>
+        </p:nvSpPr>
+        <p:spPr>
+          <a:xfrm>
+            <a:off x="502920" y="2505456"/>
+            <a:ext cx="3954780" cy="585216"/>
+          </a:xfrm>
+          <a:prstGeom prst="roundRect">
+            <a:avLst>
+              <a:gd name="adj" fmla="val 7813"/>
+            </a:avLst>
+          </a:prstGeom>
+          <a:solidFill>
+            <a:schemeClr val="accent1">
+              <a:lumMod val="20000"/>
+              <a:lumOff val="80000"/>
+            </a:schemeClr>
+          </a:solidFill>
+          <a:ln w="12700">
+            <a:solidFill>
+              <a:srgbClr val="F4ECFB"/>
+            </a:solidFill>
+            <a:prstDash val="solid"/>
+          </a:ln>
+        </p:spPr>
+        <p:txBody>
+          <a:bodyPr/>
+          <a:lstStyle/>
+          <a:p>
+            <a:endParaRPr lang="en-US"/>
+          </a:p>
+        </p:txBody>
+      </p:sp>
+      <p:sp>
+        <p:nvSpPr>
+          <p:cNvPr id="17" name="Text 16"/>
+          <p:cNvSpPr txBox="1"/>
+          <p:nvPr/>
+        </p:nvSpPr>
+        <p:spPr>
+          <a:xfrm>
+            <a:off x="640080" y="2523744"/>
+            <a:ext cx="3680460" cy="292608"/>
+          </a:xfrm>
+          <a:prstGeom prst="rect">
+            <a:avLst/>
+          </a:prstGeom>
+          <a:noFill/>
+          <a:ln/>
+        </p:spPr>
+        <p:txBody>
+          <a:bodyPr wrap="square" lIns="0" tIns="0" rIns="0" bIns="0" rtlCol="0" anchor="ctr"/>
+          <a:lstStyle/>
+          <a:p>
+            <a:pPr marL="0" indent="0">
+              <a:buNone/>
+            </a:pPr>
+            <a:r>
+              <a:rPr lang="en-US" sz="1050" b="1" dirty="0">
+                <a:solidFill>
+                  <a:srgbClr val="5A189A"/>
+                </a:solidFill>
+                <a:latin typeface="Courier New" pitchFamily="34" charset="0"/>
+                <a:ea typeface="Courier New" pitchFamily="34" charset="-122"/>
+                <a:cs typeface="Courier New" pitchFamily="34" charset="-120"/>
+              </a:rPr>
+              <a:t>getwd() y read.csv()</a:t>
+            </a:r>
+            <a:endParaRPr lang="en-US" sz="1050" dirty="0"/>
+          </a:p>
+        </p:txBody>
+      </p:sp>
+      <p:sp>
+        <p:nvSpPr>
+          <p:cNvPr id="18" name="Text 17"/>
+          <p:cNvSpPr txBox="1"/>
+          <p:nvPr/>
+        </p:nvSpPr>
+        <p:spPr>
+          <a:xfrm>
+            <a:off x="640080" y="2786360"/>
+            <a:ext cx="3680460" cy="292608"/>
+          </a:xfrm>
+          <a:prstGeom prst="rect">
+            <a:avLst/>
+          </a:prstGeom>
+          <a:noFill/>
+          <a:ln/>
+        </p:spPr>
+        <p:txBody>
+          <a:bodyPr wrap="square" lIns="0" tIns="0" rIns="0" bIns="0" rtlCol="0" anchor="ctr"/>
+          <a:lstStyle/>
+          <a:p>
+            <a:pPr marL="0" indent="0">
+              <a:buNone/>
+            </a:pPr>
+            <a:r>
+              <a:rPr lang="en-US" sz="1050" dirty="0">
+                <a:solidFill>
+                  <a:srgbClr val="2E0A4E"/>
                 </a:solidFill>
                 <a:latin typeface="Calibri" pitchFamily="34" charset="0"/>
                 <a:ea typeface="Calibri" pitchFamily="34" charset="-122"/>
                 <a:cs typeface="Calibri" pitchFamily="34" charset="-120"/>
               </a:rPr>
-              <a:t> hace lo mismo con el total.</a:t>
-            </a:r>
-          </a:p>
-          <a:p>
-            <a:endParaRPr lang="en-US" sz="1300" dirty="0"/>
-          </a:p>
-          <a:p>
-            <a:endParaRPr lang="en-US" sz="1300" dirty="0"/>
-            <a:r>
-              <a:rPr lang="es-ES" sz="1400" b="1" dirty="0">
-                <a:solidFill>
-                  <a:schemeClr val="bg1"/>
+              <a:t>Dónde está parado R y cómo lee un CSV.</a:t>
+            </a:r>
+            <a:endParaRPr lang="en-US" sz="1050" dirty="0"/>
+          </a:p>
+        </p:txBody>
+      </p:sp>
+      <p:sp>
+        <p:nvSpPr>
+          <p:cNvPr id="19" name="Shape 18"/>
+          <p:cNvSpPr/>
+          <p:nvPr/>
+        </p:nvSpPr>
+        <p:spPr>
+          <a:xfrm>
+            <a:off x="4675751" y="2926080"/>
+            <a:ext cx="3954780" cy="585216"/>
+          </a:xfrm>
+          <a:prstGeom prst="roundRect">
+            <a:avLst>
+              <a:gd name="adj" fmla="val 7813"/>
+            </a:avLst>
+          </a:prstGeom>
+          <a:solidFill>
+            <a:schemeClr val="accent4">
+              <a:lumMod val="20000"/>
+              <a:lumOff val="80000"/>
+            </a:schemeClr>
+          </a:solidFill>
+          <a:ln w="12700">
+            <a:solidFill>
+              <a:srgbClr val="F4ECFB"/>
+            </a:solidFill>
+            <a:prstDash val="solid"/>
+          </a:ln>
+        </p:spPr>
+        <p:txBody>
+          <a:bodyPr/>
+          <a:lstStyle/>
+          <a:p>
+            <a:endParaRPr lang="en-US"/>
+          </a:p>
+        </p:txBody>
+      </p:sp>
+      <p:sp>
+        <p:nvSpPr>
+          <p:cNvPr id="20" name="Text 19"/>
+          <p:cNvSpPr txBox="1"/>
+          <p:nvPr/>
+        </p:nvSpPr>
+        <p:spPr>
+          <a:xfrm>
+            <a:off x="4812911" y="2944368"/>
+            <a:ext cx="3680460" cy="292608"/>
+          </a:xfrm>
+          <a:prstGeom prst="rect">
+            <a:avLst/>
+          </a:prstGeom>
+          <a:noFill/>
+          <a:ln/>
+        </p:spPr>
+        <p:txBody>
+          <a:bodyPr wrap="square" lIns="0" tIns="0" rIns="0" bIns="0" rtlCol="0" anchor="ctr"/>
+          <a:lstStyle/>
+          <a:p>
+            <a:pPr marL="0" indent="0">
+              <a:buNone/>
+            </a:pPr>
+            <a:r>
+              <a:rPr lang="en-US" sz="1050" b="1" dirty="0">
+                <a:solidFill>
+                  <a:srgbClr val="5A189A"/>
+                </a:solidFill>
+                <a:latin typeface="Courier New" pitchFamily="34" charset="0"/>
+                <a:ea typeface="Courier New" pitchFamily="34" charset="-122"/>
+                <a:cs typeface="Courier New" pitchFamily="34" charset="-120"/>
+              </a:rPr>
+              <a:t>datos$columna y datos[filas, columnas]</a:t>
+            </a:r>
+            <a:endParaRPr lang="en-US" sz="1050" dirty="0"/>
+          </a:p>
+        </p:txBody>
+      </p:sp>
+      <p:sp>
+        <p:nvSpPr>
+          <p:cNvPr id="21" name="Text 20"/>
+          <p:cNvSpPr txBox="1"/>
+          <p:nvPr/>
+        </p:nvSpPr>
+        <p:spPr>
+          <a:xfrm>
+            <a:off x="4812911" y="3206984"/>
+            <a:ext cx="3680460" cy="292608"/>
+          </a:xfrm>
+          <a:prstGeom prst="rect">
+            <a:avLst/>
+          </a:prstGeom>
+          <a:noFill/>
+          <a:ln/>
+        </p:spPr>
+        <p:txBody>
+          <a:bodyPr wrap="square" lIns="0" tIns="0" rIns="0" bIns="0" rtlCol="0" anchor="ctr"/>
+          <a:lstStyle/>
+          <a:p>
+            <a:pPr marL="0" indent="0">
+              <a:buNone/>
+            </a:pPr>
+            <a:r>
+              <a:rPr lang="en-US" sz="1050" dirty="0">
+                <a:solidFill>
+                  <a:srgbClr val="2E0A4E"/>
                 </a:solidFill>
                 <a:latin typeface="Calibri" pitchFamily="34" charset="0"/>
                 <a:ea typeface="Calibri" pitchFamily="34" charset="-122"/>
                 <a:cs typeface="Calibri" pitchFamily="34" charset="-120"/>
               </a:rPr>
-              <a:t/>
-            </a:r>
-            <a:r>
-              <a:rPr lang="es-ES" sz="1400" b="1" i="1" dirty="0">
-                <a:solidFill>
-                  <a:schemeClr val="bg1"/>
+              <a:t>Elegir partes de un data frame.</a:t>
+            </a:r>
+            <a:endParaRPr lang="en-US" sz="1050" dirty="0"/>
+          </a:p>
+        </p:txBody>
+      </p:sp>
+      <p:sp>
+        <p:nvSpPr>
+          <p:cNvPr id="22" name="Shape 21"/>
+          <p:cNvSpPr/>
+          <p:nvPr/>
+        </p:nvSpPr>
+        <p:spPr>
+          <a:xfrm>
+            <a:off x="502920" y="3163824"/>
+            <a:ext cx="3954780" cy="585216"/>
+          </a:xfrm>
+          <a:prstGeom prst="roundRect">
+            <a:avLst>
+              <a:gd name="adj" fmla="val 7813"/>
+            </a:avLst>
+          </a:prstGeom>
+          <a:solidFill>
+            <a:schemeClr val="accent1">
+              <a:lumMod val="20000"/>
+              <a:lumOff val="80000"/>
+            </a:schemeClr>
+          </a:solidFill>
+          <a:ln w="12700">
+            <a:solidFill>
+              <a:srgbClr val="F4ECFB"/>
+            </a:solidFill>
+            <a:prstDash val="solid"/>
+          </a:ln>
+        </p:spPr>
+        <p:txBody>
+          <a:bodyPr/>
+          <a:lstStyle/>
+          <a:p>
+            <a:endParaRPr lang="en-US"/>
+          </a:p>
+        </p:txBody>
+      </p:sp>
+      <p:sp>
+        <p:nvSpPr>
+          <p:cNvPr id="23" name="Text 22"/>
+          <p:cNvSpPr txBox="1"/>
+          <p:nvPr/>
+        </p:nvSpPr>
+        <p:spPr>
+          <a:xfrm>
+            <a:off x="640080" y="3182112"/>
+            <a:ext cx="3680460" cy="292608"/>
+          </a:xfrm>
+          <a:prstGeom prst="rect">
+            <a:avLst/>
+          </a:prstGeom>
+          <a:noFill/>
+          <a:ln/>
+        </p:spPr>
+        <p:txBody>
+          <a:bodyPr wrap="square" lIns="0" tIns="0" rIns="0" bIns="0" rtlCol="0" anchor="ctr"/>
+          <a:lstStyle/>
+          <a:p>
+            <a:pPr marL="0" indent="0">
+              <a:buNone/>
+            </a:pPr>
+            <a:r>
+              <a:rPr lang="en-US" sz="1050" b="1" dirty="0">
+                <a:solidFill>
+                  <a:srgbClr val="5A189A"/>
+                </a:solidFill>
+                <a:latin typeface="Courier New" pitchFamily="34" charset="0"/>
+                <a:ea typeface="Courier New" pitchFamily="34" charset="-122"/>
+                <a:cs typeface="Courier New" pitchFamily="34" charset="-120"/>
+              </a:rPr>
+              <a:t>ui, server y shinyApp()</a:t>
+            </a:r>
+            <a:endParaRPr lang="en-US" sz="1050" dirty="0"/>
+          </a:p>
+        </p:txBody>
+      </p:sp>
+      <p:sp>
+        <p:nvSpPr>
+          <p:cNvPr id="24" name="Text 23"/>
+          <p:cNvSpPr txBox="1"/>
+          <p:nvPr/>
+        </p:nvSpPr>
+        <p:spPr>
+          <a:xfrm>
+            <a:off x="640080" y="3444728"/>
+            <a:ext cx="3680460" cy="292608"/>
+          </a:xfrm>
+          <a:prstGeom prst="rect">
+            <a:avLst/>
+          </a:prstGeom>
+          <a:noFill/>
+          <a:ln/>
+        </p:spPr>
+        <p:txBody>
+          <a:bodyPr wrap="square" lIns="0" tIns="0" rIns="0" bIns="0" rtlCol="0" anchor="ctr"/>
+          <a:lstStyle/>
+          <a:p>
+            <a:pPr marL="0" indent="0">
+              <a:buNone/>
+            </a:pPr>
+            <a:r>
+              <a:rPr lang="en-US" sz="1050" dirty="0">
+                <a:solidFill>
+                  <a:srgbClr val="2E0A4E"/>
                 </a:solidFill>
                 <a:latin typeface="Calibri" pitchFamily="34" charset="0"/>
                 <a:ea typeface="Calibri" pitchFamily="34" charset="-122"/>
                 <a:cs typeface="Calibri" pitchFamily="34" charset="-120"/>
               </a:rPr>
-              <a:t>read.csv()</a:t>
-            </a:r>
-            <a:r>
-              <a:rPr lang="es-ES" sz="1400" b="1" dirty="0">
-                <a:solidFill>
-                  <a:schemeClr val="bg1"/>
+              <a:t>Las tres piezas de toda app de Shiny.</a:t>
+            </a:r>
+            <a:endParaRPr lang="en-US" sz="1050" dirty="0"/>
+          </a:p>
+        </p:txBody>
+      </p:sp>
+      <p:sp>
+        <p:nvSpPr>
+          <p:cNvPr id="25" name="Shape 18"/>
+          <p:cNvSpPr/>
+          <p:nvPr/>
+        </p:nvSpPr>
+        <p:spPr>
+          <a:xfrm>
+            <a:off x="4675751" y="3584448"/>
+            <a:ext cx="3954780" cy="585216"/>
+          </a:xfrm>
+          <a:prstGeom prst="roundRect">
+            <a:avLst>
+              <a:gd name="adj" fmla="val 7813"/>
+            </a:avLst>
+          </a:prstGeom>
+          <a:solidFill>
+            <a:schemeClr val="accent4">
+              <a:lumMod val="20000"/>
+              <a:lumOff val="80000"/>
+            </a:schemeClr>
+          </a:solidFill>
+          <a:ln w="12700">
+            <a:solidFill>
+              <a:srgbClr val="F4ECFB"/>
+            </a:solidFill>
+            <a:prstDash val="solid"/>
+          </a:ln>
+        </p:spPr>
+        <p:txBody>
+          <a:bodyPr/>
+          <a:lstStyle/>
+          <a:p>
+            <a:endParaRPr lang="en-US"/>
+          </a:p>
+        </p:txBody>
+      </p:sp>
+      <p:sp>
+        <p:nvSpPr>
+          <p:cNvPr id="26" name="Text 19"/>
+          <p:cNvSpPr txBox="1"/>
+          <p:nvPr/>
+        </p:nvSpPr>
+        <p:spPr>
+          <a:xfrm>
+            <a:off x="4812911" y="3602736"/>
+            <a:ext cx="3680460" cy="292608"/>
+          </a:xfrm>
+          <a:prstGeom prst="rect">
+            <a:avLst/>
+          </a:prstGeom>
+          <a:noFill/>
+          <a:ln/>
+        </p:spPr>
+        <p:txBody>
+          <a:bodyPr wrap="square" lIns="0" tIns="0" rIns="0" bIns="0" rtlCol="0" anchor="ctr"/>
+          <a:lstStyle/>
+          <a:p>
+            <a:pPr marL="0" indent="0">
+              <a:buNone/>
+            </a:pPr>
+            <a:r>
+              <a:rPr lang="en-US" sz="1050" b="1" dirty="0">
+                <a:solidFill>
+                  <a:srgbClr val="5A189A"/>
+                </a:solidFill>
+                <a:latin typeface="Courier New" pitchFamily="34" charset="0"/>
+                <a:ea typeface="Courier New" pitchFamily="34" charset="-122"/>
+                <a:cs typeface="Courier New" pitchFamily="34" charset="-120"/>
+              </a:rPr>
+              <a:t>tableOutput() y renderTable()</a:t>
+            </a:r>
+            <a:endParaRPr lang="en-US" sz="1050" dirty="0"/>
+          </a:p>
+        </p:txBody>
+      </p:sp>
+      <p:sp>
+        <p:nvSpPr>
+          <p:cNvPr id="27" name="Text 20"/>
+          <p:cNvSpPr txBox="1"/>
+          <p:nvPr/>
+        </p:nvSpPr>
+        <p:spPr>
+          <a:xfrm>
+            <a:off x="4812911" y="3865352"/>
+            <a:ext cx="3680460" cy="292608"/>
+          </a:xfrm>
+          <a:prstGeom prst="rect">
+            <a:avLst/>
+          </a:prstGeom>
+          <a:noFill/>
+          <a:ln/>
+        </p:spPr>
+        <p:txBody>
+          <a:bodyPr wrap="square" lIns="0" tIns="0" rIns="0" bIns="0" rtlCol="0" anchor="ctr"/>
+          <a:lstStyle/>
+          <a:p>
+            <a:pPr marL="0" indent="0">
+              <a:buNone/>
+            </a:pPr>
+            <a:r>
+              <a:rPr lang="en-US" sz="1050" dirty="0">
+                <a:solidFill>
+                  <a:srgbClr val="2E0A4E"/>
                 </a:solidFill>
                 <a:latin typeface="Calibri" pitchFamily="34" charset="0"/>
                 <a:ea typeface="Calibri" pitchFamily="34" charset="-122"/>
                 <a:cs typeface="Calibri" pitchFamily="34" charset="-120"/>
               </a:rPr>
-              <a:t> corre una sola vez, al arrancar. </a:t>
-            </a:r>
-            <a:r>
-              <a:rPr lang="es-ES" sz="1400" b="1" i="1" dirty="0">
-                <a:solidFill>
-                  <a:schemeClr val="bg1"/>
-                </a:solidFill>
-                <a:latin typeface="Calibri" pitchFamily="34" charset="0"/>
-                <a:ea typeface="Calibri" pitchFamily="34" charset="-122"/>
-                <a:cs typeface="Calibri" pitchFamily="34" charset="-120"/>
-              </a:rPr>
-              <a:t>shinyApp()</a:t>
-            </a:r>
-            <a:r>
-              <a:rPr lang="es-ES" sz="1400" b="1" dirty="0">
-                <a:solidFill>
-                  <a:schemeClr val="bg1"/>
-                </a:solidFill>
-                <a:latin typeface="Calibri" pitchFamily="34" charset="0"/>
-                <a:ea typeface="Calibri" pitchFamily="34" charset="-122"/>
-                <a:cs typeface="Calibri" pitchFamily="34" charset="-120"/>
-              </a:rPr>
-              <a:t> une la ui y el server.</a:t>
-            </a:r>
-          </a:p>
-        </p:txBody>
-      </p:sp>
-      <p:pic>
-        <p:nvPicPr>
-          <p:cNvPr id="22" name="Picture 21" descr="p4.png"/>
-          <p:cNvPicPr>
-            <a:picLocks noChangeAspect="1"/>
-          </p:cNvPicPr>
-          <p:nvPr/>
-        </p:nvPicPr>
-        <p:blipFill>
-          <a:blip r:embed="rId3"/>
-          <a:stretch>
-            <a:fillRect/>
-          </a:stretch>
-        </p:blipFill>
-        <p:spPr>
-          <a:xfrm>
-            <a:off x="4434840" y="2296950"/>
-            <a:ext cx="4300000" cy="1406100"/>
-          </a:xfrm>
-          <a:prstGeom prst="rect">
-            <a:avLst/>
-          </a:prstGeom>
-          <a:ln w="76200">
-            <a:solidFill>
-              <a:schemeClr val="accent1">
-                <a:lumMod val="75000"/>
-              </a:schemeClr>
-            </a:solidFill>
-          </a:ln>
-        </p:spPr>
-      </p:pic>
+              <a:t>Un espacio en la ui y lo que lo rellena.</a:t>
+            </a:r>
+            <a:endParaRPr lang="en-US" sz="1050" dirty="0"/>
+          </a:p>
+        </p:txBody>
+      </p:sp>
     </p:spTree>
   </p:cSld>
   <p:clrMapOvr>
@@ -5828,14 +6737,14 @@
     </p:bg>
     <p:spTree>
       <p:nvGrpSpPr>
-        <p:cNvPr id="2" name=""/>
+        <p:cNvPr id="1" name=""/>
         <p:cNvGrpSpPr/>
         <p:nvPr/>
       </p:nvGrpSpPr>
       <p:grpSpPr/>
       <p:sp>
         <p:nvSpPr>
-          <p:cNvPr id="3" name="Text 0"/>
+          <p:cNvPr id="2" name="Text 0"/>
           <p:cNvSpPr txBox="1"/>
           <p:nvPr/>
         </p:nvSpPr>
@@ -5866,51 +6775,7 @@
                 <a:ea typeface="Oswald" pitchFamily="34" charset="-122"/>
                 <a:cs typeface="Oswald" pitchFamily="34" charset="-120"/>
               </a:rPr>
-              <a:t>Componentes a </a:t>
-            </a:r>
-            <a:r>
-              <a:rPr lang="en-US" sz="3000" b="1" dirty="0" err="1">
-                <a:solidFill>
-                  <a:srgbClr val="2E0A4E"/>
-                </a:solidFill>
-                <a:latin typeface="Oswald" pitchFamily="34" charset="0"/>
-                <a:ea typeface="Oswald" pitchFamily="34" charset="-122"/>
-                <a:cs typeface="Oswald" pitchFamily="34" charset="-120"/>
-              </a:rPr>
-              <a:t>observar</a:t>
-            </a:r>
-            <a:r>
-              <a:rPr lang="en-US" sz="3000" b="1" dirty="0">
-                <a:solidFill>
-                  <a:srgbClr val="2E0A4E"/>
-                </a:solidFill>
-                <a:latin typeface="Oswald" pitchFamily="34" charset="0"/>
-                <a:ea typeface="Oswald" pitchFamily="34" charset="-122"/>
-                <a:cs typeface="Oswald" pitchFamily="34" charset="-120"/>
-              </a:rPr>
-              <a:t> en la </a:t>
-            </a:r>
-            <a:r>
-              <a:rPr lang="en-US" sz="3000" b="1" dirty="0" err="1">
-                <a:solidFill>
-                  <a:srgbClr val="2E0A4E"/>
-                </a:solidFill>
-                <a:latin typeface="Oswald" pitchFamily="34" charset="0"/>
-                <a:ea typeface="Oswald" pitchFamily="34" charset="-122"/>
-                <a:cs typeface="Oswald" pitchFamily="34" charset="-120"/>
-              </a:rPr>
-              <a:t>replicación</a:t>
-            </a:r>
-            <a:r>
-              <a:rPr lang="en-US" sz="3000" b="1" dirty="0">
-                <a:solidFill>
-                  <a:srgbClr val="2E0A4E"/>
-                </a:solidFill>
-                <a:latin typeface="Oswald" pitchFamily="34" charset="0"/>
-                <a:ea typeface="Oswald" pitchFamily="34" charset="-122"/>
-                <a:cs typeface="Oswald" pitchFamily="34" charset="-120"/>
-              </a:rPr>
-              <a:t> </a:t>
+              <a:t>Código clave</a:t>
             </a:r>
             <a:endParaRPr lang="en-US" sz="3000" dirty="0"/>
           </a:p>
@@ -5918,29 +6783,65 @@
       </p:sp>
       <p:sp>
         <p:nvSpPr>
-          <p:cNvPr id="4" name="Shape 3"/>
+          <p:cNvPr id="4" name="Text 2"/>
+          <p:cNvSpPr txBox="1"/>
+          <p:nvPr/>
+        </p:nvSpPr>
+        <p:spPr>
+          <a:xfrm>
+            <a:off x="502920" y="4759452"/>
+            <a:ext cx="8138160" cy="228600"/>
+          </a:xfrm>
+          <a:prstGeom prst="rect">
+            <a:avLst/>
+          </a:prstGeom>
+          <a:noFill/>
+          <a:ln/>
+        </p:spPr>
+        <p:txBody>
+          <a:bodyPr wrap="square" lIns="0" tIns="0" rIns="0" bIns="0" rtlCol="0" anchor="ctr"/>
+          <a:lstStyle/>
+          <a:p>
+            <a:pPr marL="0" indent="0">
+              <a:buNone/>
+            </a:pPr>
+            <a:r>
+              <a:rPr lang="en-US" sz="900" dirty="0">
+                <a:solidFill>
+                  <a:srgbClr val="999999"/>
+                </a:solidFill>
+                <a:latin typeface="Calibri" pitchFamily="34" charset="0"/>
+                <a:ea typeface="Calibri" pitchFamily="34" charset="-122"/>
+                <a:cs typeface="Calibri" pitchFamily="34" charset="-120"/>
+              </a:rPr>
+              <a:t>Visualización interactiva de datos con R y Shiny · Udelar</a:t>
+            </a:r>
+            <a:endParaRPr lang="en-US" sz="900" dirty="0"/>
+          </a:p>
+        </p:txBody>
+      </p:sp>
+      <p:sp>
+        <p:nvSpPr>
+          <p:cNvPr id="5" name="Shape 3"/>
           <p:cNvSpPr/>
           <p:nvPr/>
         </p:nvSpPr>
         <p:spPr>
           <a:xfrm>
             <a:off x="502920" y="1188720"/>
-            <a:ext cx="3954780" cy="585216"/>
+            <a:ext cx="8138160" cy="3429000"/>
           </a:xfrm>
           <a:prstGeom prst="roundRect">
             <a:avLst>
-              <a:gd name="adj" fmla="val 7813"/>
+              <a:gd name="adj" fmla="val 1600"/>
             </a:avLst>
           </a:prstGeom>
           <a:solidFill>
-            <a:schemeClr val="accent1">
-              <a:lumMod val="20000"/>
-              <a:lumOff val="80000"/>
-            </a:schemeClr>
+            <a:srgbClr val="2E0A4E"/>
           </a:solidFill>
           <a:ln w="12700">
             <a:solidFill>
-              <a:srgbClr val="F4ECFB"/>
+              <a:srgbClr val="2E0A4E"/>
             </a:solidFill>
             <a:prstDash val="solid"/>
           </a:ln>
@@ -5955,14 +6856,14 @@
       </p:sp>
       <p:sp>
         <p:nvSpPr>
-          <p:cNvPr id="5" name="Text 4"/>
+          <p:cNvPr id="6" name="Text 4"/>
           <p:cNvSpPr txBox="1"/>
           <p:nvPr/>
         </p:nvSpPr>
         <p:spPr>
           <a:xfrm>
-            <a:off x="640080" y="1207008"/>
-            <a:ext cx="3680460" cy="292608"/>
+            <a:off x="777240" y="1325880"/>
+            <a:ext cx="7589520" cy="3154680"/>
           </a:xfrm>
           <a:prstGeom prst="rect">
             <a:avLst/>
@@ -5971,868 +6872,367 @@
           <a:ln/>
         </p:spPr>
         <p:txBody>
-          <a:bodyPr wrap="square" lIns="0" tIns="0" rIns="0" bIns="0" rtlCol="0" anchor="ctr"/>
+          <a:bodyPr wrap="square" lIns="0" tIns="0" rIns="0" bIns="0" rtlCol="0" anchor="t"/>
           <a:lstStyle/>
           <a:p>
             <a:pPr marL="0" indent="0">
+              <a:spcAft>
+                <a:spcPts val="200"/>
+              </a:spcAft>
               <a:buNone/>
             </a:pPr>
             <a:r>
-              <a:rPr lang="en-US" sz="1050" b="1" dirty="0">
-                <a:solidFill>
-                  <a:srgbClr val="5A189A"/>
+              <a:rPr lang="en-US" sz="1000" dirty="0">
+                <a:solidFill>
+                  <a:srgbClr val="F1E9F8"/>
                 </a:solidFill>
                 <a:latin typeface="Courier New" pitchFamily="34" charset="0"/>
                 <a:ea typeface="Courier New" pitchFamily="34" charset="-122"/>
                 <a:cs typeface="Courier New" pitchFamily="34" charset="-120"/>
               </a:rPr>
-              <a:t>objeto &lt;- valor</a:t>
-            </a:r>
-            <a:endParaRPr lang="en-US" sz="1050" dirty="0"/>
-          </a:p>
-        </p:txBody>
-      </p:sp>
-      <p:sp>
-        <p:nvSpPr>
-          <p:cNvPr id="6" name="Text 5"/>
-          <p:cNvSpPr txBox="1"/>
-          <p:nvPr/>
-        </p:nvSpPr>
-        <p:spPr>
-          <a:xfrm>
-            <a:off x="640080" y="1469624"/>
-            <a:ext cx="3680460" cy="292608"/>
-          </a:xfrm>
-          <a:prstGeom prst="rect">
-            <a:avLst/>
-          </a:prstGeom>
-          <a:noFill/>
-          <a:ln/>
-        </p:spPr>
-        <p:txBody>
-          <a:bodyPr wrap="square" lIns="0" tIns="0" rIns="0" bIns="0" rtlCol="0" anchor="ctr"/>
-          <a:lstStyle/>
+              <a:t>library(shiny)</a:t>
+            </a:r>
+            <a:endParaRPr lang="en-US" sz="1100" dirty="0"/>
+          </a:p>
           <a:p>
             <a:pPr marL="0" indent="0">
+              <a:spcAft>
+                <a:spcPts val="200"/>
+              </a:spcAft>
               <a:buNone/>
             </a:pPr>
             <a:r>
-              <a:rPr lang="en-US" sz="1050" dirty="0">
-                <a:solidFill>
-                  <a:srgbClr val="2E0A4E"/>
-                </a:solidFill>
-                <a:latin typeface="Calibri" pitchFamily="34" charset="0"/>
-                <a:ea typeface="Calibri" pitchFamily="34" charset="-122"/>
-                <a:cs typeface="Calibri" pitchFamily="34" charset="-120"/>
-              </a:rPr>
-              <a:t>Guarda un valor con un nombre.</a:t>
-            </a:r>
-            <a:endParaRPr lang="en-US" sz="1050" dirty="0"/>
-          </a:p>
-        </p:txBody>
-      </p:sp>
-      <p:sp>
-        <p:nvSpPr>
-          <p:cNvPr id="7" name="Shape 6"/>
-          <p:cNvSpPr/>
-          <p:nvPr/>
-        </p:nvSpPr>
-        <p:spPr>
-          <a:xfrm>
-            <a:off x="4675751" y="1609344"/>
-            <a:ext cx="3954780" cy="585216"/>
-          </a:xfrm>
-          <a:prstGeom prst="roundRect">
-            <a:avLst>
-              <a:gd name="adj" fmla="val 7813"/>
-            </a:avLst>
-          </a:prstGeom>
-          <a:solidFill>
-            <a:schemeClr val="accent4">
-              <a:lumMod val="20000"/>
-              <a:lumOff val="80000"/>
-            </a:schemeClr>
-          </a:solidFill>
-          <a:ln w="12700">
-            <a:solidFill>
-              <a:srgbClr val="F4ECFB"/>
-            </a:solidFill>
-            <a:prstDash val="solid"/>
-          </a:ln>
-        </p:spPr>
-        <p:txBody>
-          <a:bodyPr/>
-          <a:lstStyle/>
-          <a:p>
-            <a:endParaRPr lang="en-US"/>
-          </a:p>
-        </p:txBody>
-      </p:sp>
-      <p:sp>
-        <p:nvSpPr>
-          <p:cNvPr id="8" name="Text 7"/>
-          <p:cNvSpPr txBox="1"/>
-          <p:nvPr/>
-        </p:nvSpPr>
-        <p:spPr>
-          <a:xfrm>
-            <a:off x="4812911" y="1627632"/>
-            <a:ext cx="3680460" cy="292608"/>
-          </a:xfrm>
-          <a:prstGeom prst="rect">
-            <a:avLst/>
-          </a:prstGeom>
-          <a:noFill/>
-          <a:ln/>
-        </p:spPr>
-        <p:txBody>
-          <a:bodyPr wrap="square" lIns="0" tIns="0" rIns="0" bIns="0" rtlCol="0" anchor="ctr"/>
-          <a:lstStyle/>
-          <a:p>
-            <a:pPr marL="0" indent="0">
-              <a:buNone/>
-            </a:pPr>
-            <a:r>
-              <a:rPr lang="en-US" sz="1050" b="1" dirty="0">
-                <a:solidFill>
-                  <a:srgbClr val="5A189A"/>
+              <a:rPr lang="en-US" sz="1000" dirty="0">
+                <a:solidFill>
+                  <a:srgbClr val="F1E9F8"/>
                 </a:solidFill>
                 <a:latin typeface="Courier New" pitchFamily="34" charset="0"/>
                 <a:ea typeface="Courier New" pitchFamily="34" charset="-122"/>
                 <a:cs typeface="Courier New" pitchFamily="34" charset="-120"/>
               </a:rPr>
-              <a:t>c() y vector[1]</a:t>
-            </a:r>
-            <a:endParaRPr lang="en-US" sz="1050" dirty="0"/>
-          </a:p>
-        </p:txBody>
-      </p:sp>
-      <p:sp>
-        <p:nvSpPr>
-          <p:cNvPr id="9" name="Text 8"/>
-          <p:cNvSpPr txBox="1"/>
-          <p:nvPr/>
-        </p:nvSpPr>
-        <p:spPr>
-          <a:xfrm>
-            <a:off x="4812911" y="1890248"/>
-            <a:ext cx="3680460" cy="292608"/>
-          </a:xfrm>
-          <a:prstGeom prst="rect">
-            <a:avLst/>
-          </a:prstGeom>
-          <a:noFill/>
-          <a:ln/>
-        </p:spPr>
-        <p:txBody>
-          <a:bodyPr wrap="square" lIns="0" tIns="0" rIns="0" bIns="0" rtlCol="0" anchor="ctr"/>
-          <a:lstStyle/>
+              <a:t>TITULO &lt;- "Mi primera app Shiny"</a:t>
+            </a:r>
+            <a:endParaRPr lang="en-US" sz="1100" dirty="0"/>
+          </a:p>
           <a:p>
             <a:pPr marL="0" indent="0">
+              <a:spcAft>
+                <a:spcPts val="200"/>
+              </a:spcAft>
               <a:buNone/>
             </a:pPr>
             <a:r>
-              <a:rPr lang="en-US" sz="1050" dirty="0">
-                <a:solidFill>
-                  <a:srgbClr val="2E0A4E"/>
-                </a:solidFill>
-                <a:latin typeface="Calibri" pitchFamily="34" charset="0"/>
-                <a:ea typeface="Calibri" pitchFamily="34" charset="-122"/>
-                <a:cs typeface="Calibri" pitchFamily="34" charset="-120"/>
-              </a:rPr>
-              <a:t>Varios valores juntos, y cómo elegir uno.</a:t>
-            </a:r>
-            <a:endParaRPr lang="en-US" sz="1050" dirty="0"/>
-          </a:p>
-        </p:txBody>
-      </p:sp>
-      <p:sp>
-        <p:nvSpPr>
-          <p:cNvPr id="10" name="Shape 9"/>
-          <p:cNvSpPr/>
-          <p:nvPr/>
-        </p:nvSpPr>
-        <p:spPr>
-          <a:xfrm>
-            <a:off x="502920" y="1847088"/>
-            <a:ext cx="3954780" cy="585216"/>
-          </a:xfrm>
-          <a:prstGeom prst="roundRect">
-            <a:avLst>
-              <a:gd name="adj" fmla="val 7813"/>
-            </a:avLst>
-          </a:prstGeom>
-          <a:solidFill>
-            <a:schemeClr val="accent1">
-              <a:lumMod val="20000"/>
-              <a:lumOff val="80000"/>
-            </a:schemeClr>
-          </a:solidFill>
-          <a:ln w="12700">
-            <a:solidFill>
-              <a:srgbClr val="F4ECFB"/>
-            </a:solidFill>
-            <a:prstDash val="solid"/>
-          </a:ln>
-        </p:spPr>
-        <p:txBody>
-          <a:bodyPr/>
-          <a:lstStyle/>
-          <a:p>
-            <a:endParaRPr lang="en-US"/>
-          </a:p>
-        </p:txBody>
-      </p:sp>
-      <p:sp>
-        <p:nvSpPr>
-          <p:cNvPr id="11" name="Text 10"/>
-          <p:cNvSpPr txBox="1"/>
-          <p:nvPr/>
-        </p:nvSpPr>
-        <p:spPr>
-          <a:xfrm>
-            <a:off x="640080" y="1865376"/>
-            <a:ext cx="3680460" cy="292608"/>
-          </a:xfrm>
-          <a:prstGeom prst="rect">
-            <a:avLst/>
-          </a:prstGeom>
-          <a:noFill/>
-          <a:ln/>
-        </p:spPr>
-        <p:txBody>
-          <a:bodyPr wrap="square" lIns="0" tIns="0" rIns="0" bIns="0" rtlCol="0" anchor="ctr"/>
-          <a:lstStyle/>
-          <a:p>
-            <a:pPr marL="0" indent="0">
-              <a:buNone/>
-            </a:pPr>
-            <a:r>
-              <a:rPr lang="en-US" sz="1050" b="1" dirty="0">
-                <a:solidFill>
-                  <a:srgbClr val="5A189A"/>
+              <a:rPr lang="en-US" sz="1000" dirty="0">
+                <a:solidFill>
+                  <a:srgbClr val="F1E9F8"/>
                 </a:solidFill>
                 <a:latin typeface="Courier New" pitchFamily="34" charset="0"/>
                 <a:ea typeface="Courier New" pitchFamily="34" charset="-122"/>
                 <a:cs typeface="Courier New" pitchFamily="34" charset="-120"/>
               </a:rPr>
-              <a:t>sum(), mean(), paste0()</a:t>
-            </a:r>
-            <a:endParaRPr lang="en-US" sz="1050" dirty="0"/>
-          </a:p>
-        </p:txBody>
-      </p:sp>
-      <p:sp>
-        <p:nvSpPr>
-          <p:cNvPr id="12" name="Text 11"/>
-          <p:cNvSpPr txBox="1"/>
-          <p:nvPr/>
-        </p:nvSpPr>
-        <p:spPr>
-          <a:xfrm>
-            <a:off x="640080" y="2127992"/>
-            <a:ext cx="3680460" cy="292608"/>
-          </a:xfrm>
-          <a:prstGeom prst="rect">
-            <a:avLst/>
-          </a:prstGeom>
-          <a:noFill/>
-          <a:ln/>
-        </p:spPr>
-        <p:txBody>
-          <a:bodyPr wrap="square" lIns="0" tIns="0" rIns="0" bIns="0" rtlCol="0" anchor="ctr"/>
-          <a:lstStyle/>
+              <a:t>elecciones &lt;- read.csv("../datos/elecciones_departamento_2024.csv")</a:t>
+            </a:r>
+            <a:endParaRPr lang="en-US" sz="1100" dirty="0"/>
+          </a:p>
           <a:p>
             <a:pPr marL="0" indent="0">
+              <a:spcAft>
+                <a:spcPts val="200"/>
+              </a:spcAft>
               <a:buNone/>
             </a:pPr>
             <a:r>
-              <a:rPr lang="en-US" sz="1050" dirty="0">
-                <a:solidFill>
-                  <a:srgbClr val="2E0A4E"/>
-                </a:solidFill>
-                <a:latin typeface="Calibri" pitchFamily="34" charset="0"/>
-                <a:ea typeface="Calibri" pitchFamily="34" charset="-122"/>
-                <a:cs typeface="Calibri" pitchFamily="34" charset="-120"/>
-              </a:rPr>
-              <a:t>Funciones, reciben algo y devuelven un resultado.</a:t>
-            </a:r>
-            <a:endParaRPr lang="en-US" sz="1050" dirty="0"/>
-          </a:p>
-        </p:txBody>
-      </p:sp>
-      <p:sp>
-        <p:nvSpPr>
-          <p:cNvPr id="13" name="Shape 12"/>
-          <p:cNvSpPr/>
-          <p:nvPr/>
-        </p:nvSpPr>
-        <p:spPr>
-          <a:xfrm>
-            <a:off x="4675751" y="2267712"/>
-            <a:ext cx="3954780" cy="585216"/>
-          </a:xfrm>
-          <a:prstGeom prst="roundRect">
-            <a:avLst>
-              <a:gd name="adj" fmla="val 7813"/>
-            </a:avLst>
-          </a:prstGeom>
-          <a:solidFill>
-            <a:schemeClr val="accent4">
-              <a:lumMod val="20000"/>
-              <a:lumOff val="80000"/>
-            </a:schemeClr>
-          </a:solidFill>
-          <a:ln w="12700">
-            <a:solidFill>
-              <a:srgbClr val="F4ECFB"/>
-            </a:solidFill>
-            <a:prstDash val="solid"/>
-          </a:ln>
-        </p:spPr>
-        <p:txBody>
-          <a:bodyPr/>
-          <a:lstStyle/>
-          <a:p>
-            <a:endParaRPr lang="en-US"/>
-          </a:p>
-        </p:txBody>
-      </p:sp>
-      <p:sp>
-        <p:nvSpPr>
-          <p:cNvPr id="14" name="Text 13"/>
-          <p:cNvSpPr txBox="1"/>
-          <p:nvPr/>
-        </p:nvSpPr>
-        <p:spPr>
-          <a:xfrm>
-            <a:off x="4812911" y="2286000"/>
-            <a:ext cx="3680460" cy="292608"/>
-          </a:xfrm>
-          <a:prstGeom prst="rect">
-            <a:avLst/>
-          </a:prstGeom>
-          <a:noFill/>
-          <a:ln/>
-        </p:spPr>
-        <p:txBody>
-          <a:bodyPr wrap="square" lIns="0" tIns="0" rIns="0" bIns="0" rtlCol="0" anchor="ctr"/>
-          <a:lstStyle/>
-          <a:p>
-            <a:pPr marL="0" indent="0">
-              <a:buNone/>
-            </a:pPr>
-            <a:r>
-              <a:rPr lang="en-US" sz="1050" b="1" dirty="0">
-                <a:solidFill>
-                  <a:srgbClr val="5A189A"/>
+              <a:rPr lang="en-US" sz="1000" dirty="0">
+                <a:solidFill>
+                  <a:srgbClr val="F1E9F8"/>
                 </a:solidFill>
                 <a:latin typeface="Courier New" pitchFamily="34" charset="0"/>
                 <a:ea typeface="Courier New" pitchFamily="34" charset="-122"/>
                 <a:cs typeface="Courier New" pitchFamily="34" charset="-120"/>
               </a:rPr>
-              <a:t>install.packages() y library()</a:t>
-            </a:r>
-            <a:endParaRPr lang="en-US" sz="1050" dirty="0"/>
-          </a:p>
-        </p:txBody>
-      </p:sp>
-      <p:sp>
-        <p:nvSpPr>
-          <p:cNvPr id="15" name="Text 14"/>
-          <p:cNvSpPr txBox="1"/>
-          <p:nvPr/>
-        </p:nvSpPr>
-        <p:spPr>
-          <a:xfrm>
-            <a:off x="4812911" y="2548616"/>
-            <a:ext cx="3680460" cy="292608"/>
-          </a:xfrm>
-          <a:prstGeom prst="rect">
-            <a:avLst/>
-          </a:prstGeom>
-          <a:noFill/>
-          <a:ln/>
-        </p:spPr>
-        <p:txBody>
-          <a:bodyPr wrap="square" lIns="0" tIns="0" rIns="0" bIns="0" rtlCol="0" anchor="ctr"/>
-          <a:lstStyle/>
+              <a:t>ui &lt;- fluidPage(</a:t>
+            </a:r>
+            <a:endParaRPr lang="en-US" sz="1100" dirty="0"/>
+          </a:p>
           <a:p>
             <a:pPr marL="0" indent="0">
+              <a:spcAft>
+                <a:spcPts val="200"/>
+              </a:spcAft>
               <a:buNone/>
             </a:pPr>
             <a:r>
-              <a:rPr lang="en-US" sz="1050" dirty="0">
-                <a:solidFill>
-                  <a:srgbClr val="2E0A4E"/>
-                </a:solidFill>
-                <a:latin typeface="Calibri" pitchFamily="34" charset="0"/>
-                <a:ea typeface="Calibri" pitchFamily="34" charset="-122"/>
-                <a:cs typeface="Calibri" pitchFamily="34" charset="-120"/>
-              </a:rPr>
-              <a:t>Instalar una vez, activar cada vez.</a:t>
-            </a:r>
-            <a:endParaRPr lang="en-US" sz="1050" dirty="0"/>
-          </a:p>
-        </p:txBody>
-      </p:sp>
-      <p:sp>
-        <p:nvSpPr>
-          <p:cNvPr id="16" name="Shape 15"/>
-          <p:cNvSpPr/>
-          <p:nvPr/>
-        </p:nvSpPr>
-        <p:spPr>
-          <a:xfrm>
-            <a:off x="502920" y="2505456"/>
-            <a:ext cx="3954780" cy="585216"/>
-          </a:xfrm>
-          <a:prstGeom prst="roundRect">
-            <a:avLst>
-              <a:gd name="adj" fmla="val 7813"/>
-            </a:avLst>
-          </a:prstGeom>
-          <a:solidFill>
-            <a:schemeClr val="accent1">
-              <a:lumMod val="20000"/>
-              <a:lumOff val="80000"/>
-            </a:schemeClr>
-          </a:solidFill>
-          <a:ln w="12700">
-            <a:solidFill>
-              <a:srgbClr val="F4ECFB"/>
-            </a:solidFill>
-            <a:prstDash val="solid"/>
-          </a:ln>
-        </p:spPr>
-        <p:txBody>
-          <a:bodyPr/>
-          <a:lstStyle/>
-          <a:p>
-            <a:endParaRPr lang="en-US"/>
-          </a:p>
-        </p:txBody>
-      </p:sp>
-      <p:sp>
-        <p:nvSpPr>
-          <p:cNvPr id="17" name="Text 16"/>
-          <p:cNvSpPr txBox="1"/>
-          <p:nvPr/>
-        </p:nvSpPr>
-        <p:spPr>
-          <a:xfrm>
-            <a:off x="640080" y="2523744"/>
-            <a:ext cx="3680460" cy="292608"/>
-          </a:xfrm>
-          <a:prstGeom prst="rect">
-            <a:avLst/>
-          </a:prstGeom>
-          <a:noFill/>
-          <a:ln/>
-        </p:spPr>
-        <p:txBody>
-          <a:bodyPr wrap="square" lIns="0" tIns="0" rIns="0" bIns="0" rtlCol="0" anchor="ctr"/>
-          <a:lstStyle/>
-          <a:p>
-            <a:pPr marL="0" indent="0">
-              <a:buNone/>
-            </a:pPr>
-            <a:r>
-              <a:rPr lang="en-US" sz="1050" b="1" dirty="0">
-                <a:solidFill>
-                  <a:srgbClr val="5A189A"/>
+              <a:rPr lang="en-US" sz="1000" dirty="0">
+                <a:solidFill>
+                  <a:srgbClr val="F1E9F8"/>
                 </a:solidFill>
                 <a:latin typeface="Courier New" pitchFamily="34" charset="0"/>
                 <a:ea typeface="Courier New" pitchFamily="34" charset="-122"/>
                 <a:cs typeface="Courier New" pitchFamily="34" charset="-120"/>
               </a:rPr>
-              <a:t>getwd() y read.csv()</a:t>
-            </a:r>
-            <a:endParaRPr lang="en-US" sz="1050" dirty="0"/>
-          </a:p>
-        </p:txBody>
-      </p:sp>
-      <p:sp>
-        <p:nvSpPr>
-          <p:cNvPr id="18" name="Text 17"/>
-          <p:cNvSpPr txBox="1"/>
-          <p:nvPr/>
-        </p:nvSpPr>
-        <p:spPr>
-          <a:xfrm>
-            <a:off x="640080" y="2786360"/>
-            <a:ext cx="3680460" cy="292608"/>
-          </a:xfrm>
-          <a:prstGeom prst="rect">
-            <a:avLst/>
-          </a:prstGeom>
-          <a:noFill/>
-          <a:ln/>
-        </p:spPr>
-        <p:txBody>
-          <a:bodyPr wrap="square" lIns="0" tIns="0" rIns="0" bIns="0" rtlCol="0" anchor="ctr"/>
-          <a:lstStyle/>
+              <a:t>  titlePanel(TITULO),</a:t>
+            </a:r>
+            <a:endParaRPr lang="en-US" sz="1100" dirty="0"/>
+          </a:p>
           <a:p>
             <a:pPr marL="0" indent="0">
+              <a:spcAft>
+                <a:spcPts val="200"/>
+              </a:spcAft>
               <a:buNone/>
             </a:pPr>
             <a:r>
-              <a:rPr lang="en-US" sz="1050" dirty="0">
-                <a:solidFill>
-                  <a:srgbClr val="2E0A4E"/>
-                </a:solidFill>
-                <a:latin typeface="Calibri" pitchFamily="34" charset="0"/>
-                <a:ea typeface="Calibri" pitchFamily="34" charset="-122"/>
-                <a:cs typeface="Calibri" pitchFamily="34" charset="-120"/>
-              </a:rPr>
-              <a:t>Dónde está parado R y cómo lee un CSV.</a:t>
-            </a:r>
-            <a:endParaRPr lang="en-US" sz="1050" dirty="0"/>
-          </a:p>
-        </p:txBody>
-      </p:sp>
-      <p:sp>
-        <p:nvSpPr>
-          <p:cNvPr id="19" name="Shape 18"/>
-          <p:cNvSpPr/>
-          <p:nvPr/>
-        </p:nvSpPr>
-        <p:spPr>
-          <a:xfrm>
-            <a:off x="4675751" y="2926080"/>
-            <a:ext cx="3954780" cy="585216"/>
-          </a:xfrm>
-          <a:prstGeom prst="roundRect">
-            <a:avLst>
-              <a:gd name="adj" fmla="val 7813"/>
-            </a:avLst>
-          </a:prstGeom>
-          <a:solidFill>
-            <a:schemeClr val="accent4">
-              <a:lumMod val="20000"/>
-              <a:lumOff val="80000"/>
-            </a:schemeClr>
-          </a:solidFill>
-          <a:ln w="12700">
-            <a:solidFill>
-              <a:srgbClr val="F4ECFB"/>
-            </a:solidFill>
-            <a:prstDash val="solid"/>
-          </a:ln>
-        </p:spPr>
-        <p:txBody>
-          <a:bodyPr/>
-          <a:lstStyle/>
-          <a:p>
-            <a:endParaRPr lang="en-US"/>
-          </a:p>
-        </p:txBody>
-      </p:sp>
-      <p:sp>
-        <p:nvSpPr>
-          <p:cNvPr id="20" name="Text 19"/>
-          <p:cNvSpPr txBox="1"/>
-          <p:nvPr/>
-        </p:nvSpPr>
-        <p:spPr>
-          <a:xfrm>
-            <a:off x="4812911" y="2944368"/>
-            <a:ext cx="3680460" cy="292608"/>
-          </a:xfrm>
-          <a:prstGeom prst="rect">
-            <a:avLst/>
-          </a:prstGeom>
-          <a:noFill/>
-          <a:ln/>
-        </p:spPr>
-        <p:txBody>
-          <a:bodyPr wrap="square" lIns="0" tIns="0" rIns="0" bIns="0" rtlCol="0" anchor="ctr"/>
-          <a:lstStyle/>
-          <a:p>
-            <a:pPr marL="0" indent="0">
-              <a:buNone/>
-            </a:pPr>
-            <a:r>
-              <a:rPr lang="en-US" sz="1050" b="1" dirty="0">
-                <a:solidFill>
-                  <a:srgbClr val="5A189A"/>
+              <a:rPr lang="en-US" sz="1000" dirty="0">
+                <a:solidFill>
+                  <a:srgbClr val="F1E9F8"/>
                 </a:solidFill>
                 <a:latin typeface="Courier New" pitchFamily="34" charset="0"/>
                 <a:ea typeface="Courier New" pitchFamily="34" charset="-122"/>
                 <a:cs typeface="Courier New" pitchFamily="34" charset="-120"/>
               </a:rPr>
-              <a:t>datos$columna y datos[filas, columnas]</a:t>
-            </a:r>
-            <a:endParaRPr lang="en-US" sz="1050" dirty="0"/>
-          </a:p>
-        </p:txBody>
-      </p:sp>
-      <p:sp>
-        <p:nvSpPr>
-          <p:cNvPr id="21" name="Text 20"/>
-          <p:cNvSpPr txBox="1"/>
-          <p:nvPr/>
-        </p:nvSpPr>
-        <p:spPr>
-          <a:xfrm>
-            <a:off x="4812911" y="3206984"/>
-            <a:ext cx="3680460" cy="292608"/>
-          </a:xfrm>
-          <a:prstGeom prst="rect">
-            <a:avLst/>
-          </a:prstGeom>
-          <a:noFill/>
-          <a:ln/>
-        </p:spPr>
-        <p:txBody>
-          <a:bodyPr wrap="square" lIns="0" tIns="0" rIns="0" bIns="0" rtlCol="0" anchor="ctr"/>
-          <a:lstStyle/>
+              <a:t>  h3("Votos emitidos por departamento"),</a:t>
+            </a:r>
+            <a:endParaRPr lang="en-US" sz="1100" dirty="0"/>
+          </a:p>
           <a:p>
             <a:pPr marL="0" indent="0">
+              <a:spcAft>
+                <a:spcPts val="200"/>
+              </a:spcAft>
               <a:buNone/>
             </a:pPr>
             <a:r>
-              <a:rPr lang="en-US" sz="1050" dirty="0">
-                <a:solidFill>
-                  <a:srgbClr val="2E0A4E"/>
-                </a:solidFill>
-                <a:latin typeface="Calibri" pitchFamily="34" charset="0"/>
-                <a:ea typeface="Calibri" pitchFamily="34" charset="-122"/>
-                <a:cs typeface="Calibri" pitchFamily="34" charset="-120"/>
-              </a:rPr>
-              <a:t>Elegir partes de un data frame.</a:t>
-            </a:r>
-            <a:endParaRPr lang="en-US" sz="1050" dirty="0"/>
-          </a:p>
-        </p:txBody>
-      </p:sp>
-      <p:sp>
-        <p:nvSpPr>
-          <p:cNvPr id="22" name="Shape 21"/>
-          <p:cNvSpPr/>
-          <p:nvPr/>
-        </p:nvSpPr>
-        <p:spPr>
-          <a:xfrm>
-            <a:off x="502920" y="3163824"/>
-            <a:ext cx="3954780" cy="585216"/>
-          </a:xfrm>
-          <a:prstGeom prst="roundRect">
-            <a:avLst>
-              <a:gd name="adj" fmla="val 7813"/>
-            </a:avLst>
-          </a:prstGeom>
-          <a:solidFill>
-            <a:schemeClr val="accent1">
-              <a:lumMod val="20000"/>
-              <a:lumOff val="80000"/>
-            </a:schemeClr>
-          </a:solidFill>
-          <a:ln w="12700">
-            <a:solidFill>
-              <a:srgbClr val="F4ECFB"/>
-            </a:solidFill>
-            <a:prstDash val="solid"/>
-          </a:ln>
-        </p:spPr>
-        <p:txBody>
-          <a:bodyPr/>
-          <a:lstStyle/>
-          <a:p>
-            <a:endParaRPr lang="en-US"/>
-          </a:p>
-        </p:txBody>
-      </p:sp>
-      <p:sp>
-        <p:nvSpPr>
-          <p:cNvPr id="23" name="Text 22"/>
-          <p:cNvSpPr txBox="1"/>
-          <p:nvPr/>
-        </p:nvSpPr>
-        <p:spPr>
-          <a:xfrm>
-            <a:off x="640080" y="3182112"/>
-            <a:ext cx="3680460" cy="292608"/>
-          </a:xfrm>
-          <a:prstGeom prst="rect">
-            <a:avLst/>
-          </a:prstGeom>
-          <a:noFill/>
-          <a:ln/>
-        </p:spPr>
-        <p:txBody>
-          <a:bodyPr wrap="square" lIns="0" tIns="0" rIns="0" bIns="0" rtlCol="0" anchor="ctr"/>
-          <a:lstStyle/>
-          <a:p>
-            <a:pPr marL="0" indent="0">
-              <a:buNone/>
-            </a:pPr>
-            <a:r>
-              <a:rPr lang="en-US" sz="1050" b="1" dirty="0">
-                <a:solidFill>
-                  <a:srgbClr val="5A189A"/>
+              <a:rPr lang="en-US" sz="1000" dirty="0">
+                <a:solidFill>
+                  <a:srgbClr val="F1E9F8"/>
                 </a:solidFill>
                 <a:latin typeface="Courier New" pitchFamily="34" charset="0"/>
                 <a:ea typeface="Courier New" pitchFamily="34" charset="-122"/>
                 <a:cs typeface="Courier New" pitchFamily="34" charset="-120"/>
               </a:rPr>
-              <a:t>ui, server y shinyApp()</a:t>
-            </a:r>
-            <a:endParaRPr lang="en-US" sz="1050" dirty="0"/>
-          </a:p>
-        </p:txBody>
-      </p:sp>
-      <p:sp>
-        <p:nvSpPr>
-          <p:cNvPr id="24" name="Text 23"/>
-          <p:cNvSpPr txBox="1"/>
-          <p:nvPr/>
-        </p:nvSpPr>
-        <p:spPr>
-          <a:xfrm>
-            <a:off x="640080" y="3444728"/>
-            <a:ext cx="3680460" cy="292608"/>
-          </a:xfrm>
-          <a:prstGeom prst="rect">
-            <a:avLst/>
-          </a:prstGeom>
-          <a:noFill/>
-          <a:ln/>
-        </p:spPr>
-        <p:txBody>
-          <a:bodyPr wrap="square" lIns="0" tIns="0" rIns="0" bIns="0" rtlCol="0" anchor="ctr"/>
-          <a:lstStyle/>
+              <a:t>  tableOutput("tabla_elecciones"),</a:t>
+            </a:r>
+            <a:endParaRPr lang="en-US" sz="1100" dirty="0"/>
+          </a:p>
           <a:p>
             <a:pPr marL="0" indent="0">
+              <a:spcAft>
+                <a:spcPts val="200"/>
+              </a:spcAft>
               <a:buNone/>
             </a:pPr>
             <a:r>
-              <a:rPr lang="en-US" sz="1050" dirty="0">
-                <a:solidFill>
-                  <a:srgbClr val="2E0A4E"/>
-                </a:solidFill>
-                <a:latin typeface="Calibri" pitchFamily="34" charset="0"/>
-                <a:ea typeface="Calibri" pitchFamily="34" charset="-122"/>
-                <a:cs typeface="Calibri" pitchFamily="34" charset="-120"/>
-              </a:rPr>
-              <a:t>Las tres piezas de toda app de Shiny.</a:t>
-            </a:r>
-            <a:endParaRPr lang="en-US" sz="1050" dirty="0"/>
-          </a:p>
-        </p:txBody>
-      </p:sp>
-      <p:sp>
-        <p:nvSpPr>
-          <p:cNvPr id="25" name="Shape 18"/>
-          <p:cNvSpPr/>
-          <p:nvPr/>
-        </p:nvSpPr>
-        <p:spPr>
-          <a:xfrm>
-            <a:off x="4675751" y="3584448"/>
-            <a:ext cx="3954780" cy="585216"/>
-          </a:xfrm>
-          <a:prstGeom prst="roundRect">
-            <a:avLst>
-              <a:gd name="adj" fmla="val 7813"/>
-            </a:avLst>
-          </a:prstGeom>
-          <a:solidFill>
-            <a:schemeClr val="accent4">
-              <a:lumMod val="20000"/>
-              <a:lumOff val="80000"/>
-            </a:schemeClr>
-          </a:solidFill>
-          <a:ln w="12700">
-            <a:solidFill>
-              <a:srgbClr val="F4ECFB"/>
-            </a:solidFill>
-            <a:prstDash val="solid"/>
-          </a:ln>
-        </p:spPr>
-        <p:txBody>
-          <a:bodyPr/>
-          <a:lstStyle/>
-          <a:p>
-            <a:endParaRPr lang="en-US"/>
-          </a:p>
-        </p:txBody>
-      </p:sp>
-      <p:sp>
-        <p:nvSpPr>
-          <p:cNvPr id="26" name="Text 19"/>
-          <p:cNvSpPr txBox="1"/>
-          <p:nvPr/>
-        </p:nvSpPr>
-        <p:spPr>
-          <a:xfrm>
-            <a:off x="4812911" y="3602736"/>
-            <a:ext cx="3680460" cy="292608"/>
-          </a:xfrm>
-          <a:prstGeom prst="rect">
-            <a:avLst/>
-          </a:prstGeom>
-          <a:noFill/>
-          <a:ln/>
-        </p:spPr>
-        <p:txBody>
-          <a:bodyPr wrap="square" lIns="0" tIns="0" rIns="0" bIns="0" rtlCol="0" anchor="ctr"/>
-          <a:lstStyle/>
-          <a:p>
-            <a:pPr marL="0" indent="0">
-              <a:buNone/>
-            </a:pPr>
-            <a:r>
-              <a:rPr lang="en-US" sz="1050" b="1" dirty="0">
-                <a:solidFill>
-                  <a:srgbClr val="5A189A"/>
+              <a:rPr lang="en-US" sz="1000" dirty="0">
+                <a:solidFill>
+                  <a:srgbClr val="F1E9F8"/>
                 </a:solidFill>
                 <a:latin typeface="Courier New" pitchFamily="34" charset="0"/>
                 <a:ea typeface="Courier New" pitchFamily="34" charset="-122"/>
                 <a:cs typeface="Courier New" pitchFamily="34" charset="-120"/>
               </a:rPr>
-              <a:t>tableOutput() y renderTable()</a:t>
-            </a:r>
-            <a:endParaRPr lang="en-US" sz="1050" dirty="0"/>
-          </a:p>
-        </p:txBody>
-      </p:sp>
-      <p:sp>
-        <p:nvSpPr>
-          <p:cNvPr id="27" name="Text 20"/>
-          <p:cNvSpPr txBox="1"/>
-          <p:nvPr/>
-        </p:nvSpPr>
-        <p:spPr>
-          <a:xfrm>
-            <a:off x="4812911" y="3865352"/>
-            <a:ext cx="3680460" cy="292608"/>
-          </a:xfrm>
-          <a:prstGeom prst="rect">
-            <a:avLst/>
-          </a:prstGeom>
-          <a:noFill/>
-          <a:ln/>
-        </p:spPr>
-        <p:txBody>
-          <a:bodyPr wrap="square" lIns="0" tIns="0" rIns="0" bIns="0" rtlCol="0" anchor="ctr"/>
-          <a:lstStyle/>
+              <a:t>  textOutput("resumen")</a:t>
+            </a:r>
+            <a:endParaRPr lang="en-US" sz="1100" dirty="0"/>
+          </a:p>
           <a:p>
             <a:pPr marL="0" indent="0">
+              <a:spcAft>
+                <a:spcPts val="200"/>
+              </a:spcAft>
               <a:buNone/>
             </a:pPr>
             <a:r>
-              <a:rPr lang="en-US" sz="1050" dirty="0">
-                <a:solidFill>
-                  <a:srgbClr val="2E0A4E"/>
-                </a:solidFill>
-                <a:latin typeface="Calibri" pitchFamily="34" charset="0"/>
-                <a:ea typeface="Calibri" pitchFamily="34" charset="-122"/>
-                <a:cs typeface="Calibri" pitchFamily="34" charset="-120"/>
-              </a:rPr>
-              <a:t>Un espacio en la ui y lo que lo rellena.</a:t>
-            </a:r>
-            <a:endParaRPr lang="en-US" sz="1050" dirty="0"/>
+              <a:rPr lang="en-US" sz="1000" dirty="0">
+                <a:solidFill>
+                  <a:srgbClr val="F1E9F8"/>
+                </a:solidFill>
+                <a:latin typeface="Courier New" pitchFamily="34" charset="0"/>
+                <a:ea typeface="Courier New" pitchFamily="34" charset="-122"/>
+                <a:cs typeface="Courier New" pitchFamily="34" charset="-120"/>
+              </a:rPr>
+              <a:t>)</a:t>
+            </a:r>
+            <a:endParaRPr lang="en-US" sz="1100" dirty="0"/>
+          </a:p>
+          <a:p>
+            <a:pPr marL="0" indent="0">
+              <a:spcAft>
+                <a:spcPts val="200"/>
+              </a:spcAft>
+              <a:buNone/>
+            </a:pPr>
+            <a:r>
+              <a:rPr lang="en-US" sz="1000" dirty="0">
+                <a:solidFill>
+                  <a:srgbClr val="F1E9F8"/>
+                </a:solidFill>
+                <a:latin typeface="Courier New" pitchFamily="34" charset="0"/>
+                <a:ea typeface="Courier New" pitchFamily="34" charset="-122"/>
+                <a:cs typeface="Courier New" pitchFamily="34" charset="-120"/>
+              </a:rPr>
+              <a:t>server &lt;- function(input, output, session) {</a:t>
+            </a:r>
+            <a:endParaRPr lang="en-US" sz="1100" dirty="0"/>
+          </a:p>
+          <a:p>
+            <a:pPr marL="0" indent="0">
+              <a:spcAft>
+                <a:spcPts val="200"/>
+              </a:spcAft>
+              <a:buNone/>
+            </a:pPr>
+            <a:r>
+              <a:rPr lang="en-US" sz="1000" dirty="0">
+                <a:solidFill>
+                  <a:srgbClr val="F1E9F8"/>
+                </a:solidFill>
+                <a:latin typeface="Courier New" pitchFamily="34" charset="0"/>
+                <a:ea typeface="Courier New" pitchFamily="34" charset="-122"/>
+                <a:cs typeface="Courier New" pitchFamily="34" charset="-120"/>
+              </a:rPr>
+              <a:t>  output$tabla_elecciones &lt;- renderTable({</a:t>
+            </a:r>
+            <a:endParaRPr lang="en-US" sz="1100" dirty="0"/>
+          </a:p>
+          <a:p>
+            <a:pPr marL="0" indent="0">
+              <a:spcAft>
+                <a:spcPts val="200"/>
+              </a:spcAft>
+              <a:buNone/>
+            </a:pPr>
+            <a:r>
+              <a:rPr lang="en-US" sz="1000" dirty="0">
+                <a:solidFill>
+                  <a:srgbClr val="F1E9F8"/>
+                </a:solidFill>
+                <a:latin typeface="Courier New" pitchFamily="34" charset="0"/>
+                <a:ea typeface="Courier New" pitchFamily="34" charset="-122"/>
+                <a:cs typeface="Courier New" pitchFamily="34" charset="-120"/>
+              </a:rPr>
+              <a:t>    elecciones[, c("departamento", "emitidos")]</a:t>
+            </a:r>
+            <a:endParaRPr lang="en-US" sz="1100" dirty="0"/>
+          </a:p>
+          <a:p>
+            <a:pPr marL="0" indent="0">
+              <a:spcAft>
+                <a:spcPts val="200"/>
+              </a:spcAft>
+              <a:buNone/>
+            </a:pPr>
+            <a:r>
+              <a:rPr lang="en-US" sz="1000" dirty="0">
+                <a:solidFill>
+                  <a:srgbClr val="F1E9F8"/>
+                </a:solidFill>
+                <a:latin typeface="Courier New" pitchFamily="34" charset="0"/>
+                <a:ea typeface="Courier New" pitchFamily="34" charset="-122"/>
+                <a:cs typeface="Courier New" pitchFamily="34" charset="-120"/>
+              </a:rPr>
+              <a:t>  })</a:t>
+            </a:r>
+            <a:endParaRPr lang="en-US" sz="1100" dirty="0"/>
+          </a:p>
+          <a:p>
+            <a:pPr marL="0" indent="0">
+              <a:spcAft>
+                <a:spcPts val="200"/>
+              </a:spcAft>
+              <a:buNone/>
+            </a:pPr>
+            <a:r>
+              <a:rPr lang="en-US" sz="1000" dirty="0">
+                <a:solidFill>
+                  <a:srgbClr val="F1E9F8"/>
+                </a:solidFill>
+                <a:latin typeface="Courier New" pitchFamily="34" charset="0"/>
+                <a:ea typeface="Courier New" pitchFamily="34" charset="-122"/>
+                <a:cs typeface="Courier New" pitchFamily="34" charset="-120"/>
+              </a:rPr>
+              <a:t>  output$resumen &lt;- renderText({</a:t>
+            </a:r>
+            <a:endParaRPr lang="en-US" sz="1100" dirty="0"/>
+          </a:p>
+          <a:p>
+            <a:pPr marL="0" indent="0">
+              <a:spcAft>
+                <a:spcPts val="200"/>
+              </a:spcAft>
+              <a:buNone/>
+            </a:pPr>
+            <a:r>
+              <a:rPr lang="en-US" sz="1000" dirty="0">
+                <a:solidFill>
+                  <a:srgbClr val="F1E9F8"/>
+                </a:solidFill>
+                <a:latin typeface="Courier New" pitchFamily="34" charset="0"/>
+                <a:ea typeface="Courier New" pitchFamily="34" charset="-122"/>
+                <a:cs typeface="Courier New" pitchFamily="34" charset="-120"/>
+              </a:rPr>
+              <a:t>    paste0("Votos emitidos en total: ", sum(elecciones$emitidos))</a:t>
+            </a:r>
+            <a:endParaRPr lang="en-US" sz="1100" dirty="0"/>
+          </a:p>
+          <a:p>
+            <a:pPr marL="0" indent="0">
+              <a:spcAft>
+                <a:spcPts val="200"/>
+              </a:spcAft>
+              <a:buNone/>
+            </a:pPr>
+            <a:r>
+              <a:rPr lang="en-US" sz="1000" dirty="0">
+                <a:solidFill>
+                  <a:srgbClr val="F1E9F8"/>
+                </a:solidFill>
+                <a:latin typeface="Courier New" pitchFamily="34" charset="0"/>
+                <a:ea typeface="Courier New" pitchFamily="34" charset="-122"/>
+                <a:cs typeface="Courier New" pitchFamily="34" charset="-120"/>
+              </a:rPr>
+              <a:t>  })</a:t>
+            </a:r>
+            <a:endParaRPr lang="en-US" sz="1100" dirty="0"/>
+          </a:p>
+          <a:p>
+            <a:pPr marL="0" indent="0">
+              <a:spcAft>
+                <a:spcPts val="200"/>
+              </a:spcAft>
+              <a:buNone/>
+            </a:pPr>
+            <a:r>
+              <a:rPr lang="en-US" sz="1000" dirty="0">
+                <a:solidFill>
+                  <a:srgbClr val="F1E9F8"/>
+                </a:solidFill>
+                <a:latin typeface="Courier New" pitchFamily="34" charset="0"/>
+                <a:ea typeface="Courier New" pitchFamily="34" charset="-122"/>
+                <a:cs typeface="Courier New" pitchFamily="34" charset="-120"/>
+              </a:rPr>
+              <a:t>}</a:t>
+            </a:r>
+            <a:endParaRPr lang="en-US" sz="1100" dirty="0"/>
+          </a:p>
+          <a:p>
+            <a:pPr marL="0" indent="0">
+              <a:spcAft>
+                <a:spcPts val="200"/>
+              </a:spcAft>
+              <a:buNone/>
+            </a:pPr>
+            <a:r>
+              <a:rPr lang="en-US" sz="1000" dirty="0">
+                <a:solidFill>
+                  <a:srgbClr val="F1E9F8"/>
+                </a:solidFill>
+                <a:latin typeface="Courier New" pitchFamily="34" charset="0"/>
+                <a:ea typeface="Courier New" pitchFamily="34" charset="-122"/>
+                <a:cs typeface="Courier New" pitchFamily="34" charset="-120"/>
+              </a:rPr>
+              <a:t>shinyApp(ui = ui, server = server)</a:t>
+            </a:r>
+            <a:endParaRPr lang="en-US" sz="1100" dirty="0"/>
           </a:p>
         </p:txBody>
       </p:sp>
@@ -6864,7 +7264,13 @@
       <p:grpSpPr/>
       <p:sp>
         <p:nvSpPr>
-          <p:cNvPr id="2" name="Text 0"/>
+          <p:cNvPr id="2" name="Text 0">
+            <a:extLst>
+              <a:ext uri="{FF2B5EF4-FFF2-40B4-BE49-F238E27FC236}">
+                <a16:creationId xmlns:a16="http://schemas.microsoft.com/office/drawing/2014/main" id="{45FBCF84-BF0C-00DD-1115-ECF03D12DDA6}"/>
+              </a:ext>
+            </a:extLst>
+          </p:cNvPr>
           <p:cNvSpPr txBox="1"/>
           <p:nvPr/>
         </p:nvSpPr>
@@ -6895,7 +7301,7 @@
                 <a:ea typeface="Oswald" pitchFamily="34" charset="-122"/>
                 <a:cs typeface="Oswald" pitchFamily="34" charset="-120"/>
               </a:rPr>
-              <a:t>Código clave</a:t>
+              <a:t>Desafío opcional (1)</a:t>
             </a:r>
             <a:endParaRPr lang="en-US" sz="3000" dirty="0"/>
           </a:p>
@@ -6903,14 +7309,60 @@
       </p:sp>
       <p:sp>
         <p:nvSpPr>
-          <p:cNvPr id="4" name="Text 2"/>
+          <p:cNvPr id="11" name="Shape 9">
+            <a:extLst>
+              <a:ext uri="{FF2B5EF4-FFF2-40B4-BE49-F238E27FC236}">
+                <a16:creationId xmlns:a16="http://schemas.microsoft.com/office/drawing/2014/main" id="{1E4D2BBF-BB0F-7CF4-3842-6325D6A2CD35}"/>
+              </a:ext>
+            </a:extLst>
+          </p:cNvPr>
+          <p:cNvSpPr/>
+          <p:nvPr/>
+        </p:nvSpPr>
+        <p:spPr>
+          <a:xfrm>
+            <a:off x="439616" y="1188720"/>
+            <a:ext cx="2560320" cy="1463040"/>
+          </a:xfrm>
+          <a:prstGeom prst="roundRect">
+            <a:avLst>
+              <a:gd name="adj" fmla="val 2143"/>
+            </a:avLst>
+          </a:prstGeom>
+          <a:solidFill>
+            <a:srgbClr val="5A189A"/>
+          </a:solidFill>
+          <a:ln w="12700">
+            <a:solidFill>
+              <a:srgbClr val="5A189A"/>
+            </a:solidFill>
+            <a:prstDash val="solid"/>
+          </a:ln>
+        </p:spPr>
+        <p:txBody>
+          <a:bodyPr/>
+          <a:lstStyle/>
+          <a:p>
+            <a:endParaRPr lang="en-US"/>
+          </a:p>
+        </p:txBody>
+      </p:sp>
+      <p:sp>
+        <p:nvSpPr>
+          <p:cNvPr id="12" name="Text 10">
+            <a:extLst>
+              <a:ext uri="{FF2B5EF4-FFF2-40B4-BE49-F238E27FC236}">
+                <a16:creationId xmlns:a16="http://schemas.microsoft.com/office/drawing/2014/main" id="{57EA7703-08D4-E6C4-4FDB-5B08F7881055}"/>
+              </a:ext>
+            </a:extLst>
+          </p:cNvPr>
           <p:cNvSpPr txBox="1"/>
           <p:nvPr/>
         </p:nvSpPr>
         <p:spPr>
           <a:xfrm>
-            <a:off x="502920" y="4759452"/>
-            <a:ext cx="8138160" cy="228600"/>
+            <a:off x="668216" y="1256068"/>
+            <a:ext cx="2103120" cy="502920"/>
           </a:xfrm>
           <a:prstGeom prst="rect">
             <a:avLst/>
@@ -6926,42 +7378,94 @@
               <a:buNone/>
             </a:pPr>
             <a:r>
-              <a:rPr lang="en-US" sz="900" dirty="0">
-                <a:solidFill>
-                  <a:srgbClr val="999999"/>
+              <a:rPr lang="en-US" sz="1600" b="1" dirty="0">
+                <a:solidFill>
+                  <a:srgbClr val="FFFFFF"/>
+                </a:solidFill>
+                <a:latin typeface="Oswald" pitchFamily="34" charset="0"/>
+                <a:ea typeface="Oswald" pitchFamily="34" charset="-122"/>
+                <a:cs typeface="Oswald" pitchFamily="34" charset="-120"/>
+              </a:rPr>
+              <a:t>OPCIONAL</a:t>
+            </a:r>
+            <a:endParaRPr lang="en-US" sz="1600" dirty="0"/>
+          </a:p>
+        </p:txBody>
+      </p:sp>
+      <p:sp>
+        <p:nvSpPr>
+          <p:cNvPr id="13" name="Text 11">
+            <a:extLst>
+              <a:ext uri="{FF2B5EF4-FFF2-40B4-BE49-F238E27FC236}">
+                <a16:creationId xmlns:a16="http://schemas.microsoft.com/office/drawing/2014/main" id="{83082800-1689-F508-4C9C-8E0187A18BDD}"/>
+              </a:ext>
+            </a:extLst>
+          </p:cNvPr>
+          <p:cNvSpPr txBox="1"/>
+          <p:nvPr/>
+        </p:nvSpPr>
+        <p:spPr>
+          <a:xfrm>
+            <a:off x="668216" y="1734572"/>
+            <a:ext cx="2103120" cy="716926"/>
+          </a:xfrm>
+          <a:prstGeom prst="rect">
+            <a:avLst/>
+          </a:prstGeom>
+          <a:noFill/>
+          <a:ln/>
+        </p:spPr>
+        <p:txBody>
+          <a:bodyPr wrap="square" lIns="0" tIns="0" rIns="0" bIns="0" rtlCol="0" anchor="t"/>
+          <a:lstStyle/>
+          <a:p>
+            <a:r>
+              <a:rPr lang="es-ES" sz="1400" dirty="0">
+                <a:solidFill>
+                  <a:schemeClr val="bg1"/>
                 </a:solidFill>
                 <a:latin typeface="Calibri" pitchFamily="34" charset="0"/>
                 <a:ea typeface="Calibri" pitchFamily="34" charset="-122"/>
                 <a:cs typeface="Calibri" pitchFamily="34" charset="-120"/>
               </a:rPr>
-              <a:t>Visualización interactiva de datos con R y Shiny · Udelar</a:t>
-            </a:r>
-            <a:endParaRPr lang="en-US" sz="900" dirty="0"/>
-          </a:p>
-        </p:txBody>
-      </p:sp>
-      <p:sp>
-        <p:nvSpPr>
-          <p:cNvPr id="5" name="Shape 3"/>
+              <a:t>GitHub, tu repositorio</a:t>
+            </a:r>
+            <a:endParaRPr lang="en-US" sz="1300" dirty="0"/>
+          </a:p>
+        </p:txBody>
+      </p:sp>
+      <p:sp>
+        <p:nvSpPr>
+          <p:cNvPr id="15" name="Shape 9">
+            <a:extLst>
+              <a:ext uri="{FF2B5EF4-FFF2-40B4-BE49-F238E27FC236}">
+                <a16:creationId xmlns:a16="http://schemas.microsoft.com/office/drawing/2014/main" id="{E750D06A-626A-4348-CA99-CE04C627A232}"/>
+              </a:ext>
+            </a:extLst>
+          </p:cNvPr>
           <p:cNvSpPr/>
           <p:nvPr/>
         </p:nvSpPr>
         <p:spPr>
           <a:xfrm>
-            <a:off x="502920" y="1188720"/>
-            <a:ext cx="8138160" cy="3429000"/>
+            <a:off x="439615" y="2719107"/>
+            <a:ext cx="3773659" cy="2281957"/>
           </a:xfrm>
           <a:prstGeom prst="roundRect">
             <a:avLst>
-              <a:gd name="adj" fmla="val 1600"/>
+              <a:gd name="adj" fmla="val 2143"/>
             </a:avLst>
           </a:prstGeom>
           <a:solidFill>
-            <a:srgbClr val="2E0A4E"/>
+            <a:schemeClr val="accent1">
+              <a:lumMod val="75000"/>
+            </a:schemeClr>
           </a:solidFill>
           <a:ln w="12700">
             <a:solidFill>
-              <a:srgbClr val="2E0A4E"/>
+              <a:schemeClr val="accent1">
+                <a:lumMod val="75000"/>
+              </a:schemeClr>
             </a:solidFill>
             <a:prstDash val="solid"/>
           </a:ln>
@@ -6976,14 +7480,20 @@
       </p:sp>
       <p:sp>
         <p:nvSpPr>
-          <p:cNvPr id="6" name="Text 4"/>
+          <p:cNvPr id="17" name="Text 11">
+            <a:extLst>
+              <a:ext uri="{FF2B5EF4-FFF2-40B4-BE49-F238E27FC236}">
+                <a16:creationId xmlns:a16="http://schemas.microsoft.com/office/drawing/2014/main" id="{F3440954-5CFF-06C7-8641-E2E38BA6F847}"/>
+              </a:ext>
+            </a:extLst>
+          </p:cNvPr>
           <p:cNvSpPr txBox="1"/>
           <p:nvPr/>
         </p:nvSpPr>
         <p:spPr>
           <a:xfrm>
-            <a:off x="777240" y="1325880"/>
-            <a:ext cx="7589520" cy="3154680"/>
+            <a:off x="668216" y="2899117"/>
+            <a:ext cx="3369212" cy="716926"/>
           </a:xfrm>
           <a:prstGeom prst="rect">
             <a:avLst/>
@@ -6995,367 +7505,89 @@
           <a:bodyPr wrap="square" lIns="0" tIns="0" rIns="0" bIns="0" rtlCol="0" anchor="t"/>
           <a:lstStyle/>
           <a:p>
-            <a:pPr marL="0" indent="0">
-              <a:spcAft>
-                <a:spcPts val="200"/>
-              </a:spcAft>
-              <a:buNone/>
-            </a:pPr>
-            <a:r>
-              <a:rPr lang="en-US" sz="1000" dirty="0">
-                <a:solidFill>
-                  <a:srgbClr val="F1E9F8"/>
-                </a:solidFill>
-                <a:latin typeface="Courier New" pitchFamily="34" charset="0"/>
-                <a:ea typeface="Courier New" pitchFamily="34" charset="-122"/>
-                <a:cs typeface="Courier New" pitchFamily="34" charset="-120"/>
-              </a:rPr>
-              <a:t>library(shiny)</a:t>
-            </a:r>
-            <a:endParaRPr lang="en-US" sz="1100" dirty="0"/>
-          </a:p>
-          <a:p>
-            <a:pPr marL="0" indent="0">
-              <a:spcAft>
-                <a:spcPts val="200"/>
-              </a:spcAft>
-              <a:buNone/>
-            </a:pPr>
-            <a:r>
-              <a:rPr lang="en-US" sz="1000" dirty="0">
-                <a:solidFill>
-                  <a:srgbClr val="F1E9F8"/>
-                </a:solidFill>
-                <a:latin typeface="Courier New" pitchFamily="34" charset="0"/>
-                <a:ea typeface="Courier New" pitchFamily="34" charset="-122"/>
-                <a:cs typeface="Courier New" pitchFamily="34" charset="-120"/>
-              </a:rPr>
-              <a:t>TITULO &lt;- "Mi primera app Shiny"</a:t>
-            </a:r>
-            <a:endParaRPr lang="en-US" sz="1100" dirty="0"/>
-          </a:p>
-          <a:p>
-            <a:pPr marL="0" indent="0">
-              <a:spcAft>
-                <a:spcPts val="200"/>
-              </a:spcAft>
-              <a:buNone/>
-            </a:pPr>
-            <a:r>
-              <a:rPr lang="en-US" sz="1000" dirty="0">
-                <a:solidFill>
-                  <a:srgbClr val="F1E9F8"/>
-                </a:solidFill>
-                <a:latin typeface="Courier New" pitchFamily="34" charset="0"/>
-                <a:ea typeface="Courier New" pitchFamily="34" charset="-122"/>
-                <a:cs typeface="Courier New" pitchFamily="34" charset="-120"/>
-              </a:rPr>
-              <a:t>elecciones &lt;- read.csv("../datos/elecciones_departamento_2024.csv")</a:t>
-            </a:r>
-            <a:endParaRPr lang="en-US" sz="1100" dirty="0"/>
-          </a:p>
-          <a:p>
-            <a:pPr marL="0" indent="0">
-              <a:spcAft>
-                <a:spcPts val="200"/>
-              </a:spcAft>
-              <a:buNone/>
-            </a:pPr>
-            <a:r>
-              <a:rPr lang="en-US" sz="1000" dirty="0">
-                <a:solidFill>
-                  <a:srgbClr val="F1E9F8"/>
-                </a:solidFill>
-                <a:latin typeface="Courier New" pitchFamily="34" charset="0"/>
-                <a:ea typeface="Courier New" pitchFamily="34" charset="-122"/>
-                <a:cs typeface="Courier New" pitchFamily="34" charset="-120"/>
-              </a:rPr>
-              <a:t>ui &lt;- fluidPage(</a:t>
-            </a:r>
-            <a:endParaRPr lang="en-US" sz="1100" dirty="0"/>
-          </a:p>
-          <a:p>
-            <a:pPr marL="0" indent="0">
-              <a:spcAft>
-                <a:spcPts val="200"/>
-              </a:spcAft>
-              <a:buNone/>
-            </a:pPr>
-            <a:r>
-              <a:rPr lang="en-US" sz="1000" dirty="0">
-                <a:solidFill>
-                  <a:srgbClr val="F1E9F8"/>
-                </a:solidFill>
-                <a:latin typeface="Courier New" pitchFamily="34" charset="0"/>
-                <a:ea typeface="Courier New" pitchFamily="34" charset="-122"/>
-                <a:cs typeface="Courier New" pitchFamily="34" charset="-120"/>
-              </a:rPr>
-              <a:t>  titlePanel(TITULO),</a:t>
-            </a:r>
-            <a:endParaRPr lang="en-US" sz="1100" dirty="0"/>
-          </a:p>
-          <a:p>
-            <a:pPr marL="0" indent="0">
-              <a:spcAft>
-                <a:spcPts val="200"/>
-              </a:spcAft>
-              <a:buNone/>
-            </a:pPr>
-            <a:r>
-              <a:rPr lang="en-US" sz="1000" dirty="0">
-                <a:solidFill>
-                  <a:srgbClr val="F1E9F8"/>
-                </a:solidFill>
-                <a:latin typeface="Courier New" pitchFamily="34" charset="0"/>
-                <a:ea typeface="Courier New" pitchFamily="34" charset="-122"/>
-                <a:cs typeface="Courier New" pitchFamily="34" charset="-120"/>
-              </a:rPr>
-              <a:t>  h3("Votos emitidos por departamento"),</a:t>
-            </a:r>
-            <a:endParaRPr lang="en-US" sz="1100" dirty="0"/>
-          </a:p>
-          <a:p>
-            <a:pPr marL="0" indent="0">
-              <a:spcAft>
-                <a:spcPts val="200"/>
-              </a:spcAft>
-              <a:buNone/>
-            </a:pPr>
-            <a:r>
-              <a:rPr lang="en-US" sz="1000" dirty="0">
-                <a:solidFill>
-                  <a:srgbClr val="F1E9F8"/>
-                </a:solidFill>
-                <a:latin typeface="Courier New" pitchFamily="34" charset="0"/>
-                <a:ea typeface="Courier New" pitchFamily="34" charset="-122"/>
-                <a:cs typeface="Courier New" pitchFamily="34" charset="-120"/>
-              </a:rPr>
-              <a:t>  tableOutput("tabla_elecciones"),</a:t>
-            </a:r>
-            <a:endParaRPr lang="en-US" sz="1100" dirty="0"/>
-          </a:p>
-          <a:p>
-            <a:pPr marL="0" indent="0">
-              <a:spcAft>
-                <a:spcPts val="200"/>
-              </a:spcAft>
-              <a:buNone/>
-            </a:pPr>
-            <a:r>
-              <a:rPr lang="en-US" sz="1000" dirty="0">
-                <a:solidFill>
-                  <a:srgbClr val="F1E9F8"/>
-                </a:solidFill>
-                <a:latin typeface="Courier New" pitchFamily="34" charset="0"/>
-                <a:ea typeface="Courier New" pitchFamily="34" charset="-122"/>
-                <a:cs typeface="Courier New" pitchFamily="34" charset="-120"/>
-              </a:rPr>
-              <a:t>  textOutput("resumen")</a:t>
-            </a:r>
-            <a:endParaRPr lang="en-US" sz="1100" dirty="0"/>
-          </a:p>
-          <a:p>
-            <a:pPr marL="0" indent="0">
-              <a:spcAft>
-                <a:spcPts val="200"/>
-              </a:spcAft>
-              <a:buNone/>
-            </a:pPr>
-            <a:r>
-              <a:rPr lang="en-US" sz="1000" dirty="0">
-                <a:solidFill>
-                  <a:srgbClr val="F1E9F8"/>
-                </a:solidFill>
-                <a:latin typeface="Courier New" pitchFamily="34" charset="0"/>
-                <a:ea typeface="Courier New" pitchFamily="34" charset="-122"/>
-                <a:cs typeface="Courier New" pitchFamily="34" charset="-120"/>
-              </a:rPr>
-              <a:t>)</a:t>
-            </a:r>
-            <a:endParaRPr lang="en-US" sz="1100" dirty="0"/>
-          </a:p>
-          <a:p>
-            <a:pPr marL="0" indent="0">
-              <a:spcAft>
-                <a:spcPts val="200"/>
-              </a:spcAft>
-              <a:buNone/>
-            </a:pPr>
-            <a:r>
-              <a:rPr lang="en-US" sz="1000" dirty="0">
-                <a:solidFill>
-                  <a:srgbClr val="F1E9F8"/>
-                </a:solidFill>
-                <a:latin typeface="Courier New" pitchFamily="34" charset="0"/>
-                <a:ea typeface="Courier New" pitchFamily="34" charset="-122"/>
-                <a:cs typeface="Courier New" pitchFamily="34" charset="-120"/>
-              </a:rPr>
-              <a:t>server &lt;- function(input, output, session) {</a:t>
-            </a:r>
-            <a:endParaRPr lang="en-US" sz="1100" dirty="0"/>
-          </a:p>
-          <a:p>
-            <a:pPr marL="0" indent="0">
-              <a:spcAft>
-                <a:spcPts val="200"/>
-              </a:spcAft>
-              <a:buNone/>
-            </a:pPr>
-            <a:r>
-              <a:rPr lang="en-US" sz="1000" dirty="0">
-                <a:solidFill>
-                  <a:srgbClr val="F1E9F8"/>
-                </a:solidFill>
-                <a:latin typeface="Courier New" pitchFamily="34" charset="0"/>
-                <a:ea typeface="Courier New" pitchFamily="34" charset="-122"/>
-                <a:cs typeface="Courier New" pitchFamily="34" charset="-120"/>
-              </a:rPr>
-              <a:t>  output$tabla_elecciones &lt;- renderTable({</a:t>
-            </a:r>
-            <a:endParaRPr lang="en-US" sz="1100" dirty="0"/>
-          </a:p>
-          <a:p>
-            <a:pPr marL="0" indent="0">
-              <a:spcAft>
-                <a:spcPts val="200"/>
-              </a:spcAft>
-              <a:buNone/>
-            </a:pPr>
-            <a:r>
-              <a:rPr lang="en-US" sz="1000" dirty="0">
-                <a:solidFill>
-                  <a:srgbClr val="F1E9F8"/>
-                </a:solidFill>
-                <a:latin typeface="Courier New" pitchFamily="34" charset="0"/>
-                <a:ea typeface="Courier New" pitchFamily="34" charset="-122"/>
-                <a:cs typeface="Courier New" pitchFamily="34" charset="-120"/>
-              </a:rPr>
-              <a:t>    elecciones[, c("departamento", "emitidos")]</a:t>
-            </a:r>
-            <a:endParaRPr lang="en-US" sz="1100" dirty="0"/>
-          </a:p>
-          <a:p>
-            <a:pPr marL="0" indent="0">
-              <a:spcAft>
-                <a:spcPts val="200"/>
-              </a:spcAft>
-              <a:buNone/>
-            </a:pPr>
-            <a:r>
-              <a:rPr lang="en-US" sz="1000" dirty="0">
-                <a:solidFill>
-                  <a:srgbClr val="F1E9F8"/>
-                </a:solidFill>
-                <a:latin typeface="Courier New" pitchFamily="34" charset="0"/>
-                <a:ea typeface="Courier New" pitchFamily="34" charset="-122"/>
-                <a:cs typeface="Courier New" pitchFamily="34" charset="-120"/>
-              </a:rPr>
-              <a:t>  })</a:t>
-            </a:r>
-            <a:endParaRPr lang="en-US" sz="1100" dirty="0"/>
-          </a:p>
-          <a:p>
-            <a:pPr marL="0" indent="0">
-              <a:spcAft>
-                <a:spcPts val="200"/>
-              </a:spcAft>
-              <a:buNone/>
-            </a:pPr>
-            <a:r>
-              <a:rPr lang="en-US" sz="1000" dirty="0">
-                <a:solidFill>
-                  <a:srgbClr val="F1E9F8"/>
-                </a:solidFill>
-                <a:latin typeface="Courier New" pitchFamily="34" charset="0"/>
-                <a:ea typeface="Courier New" pitchFamily="34" charset="-122"/>
-                <a:cs typeface="Courier New" pitchFamily="34" charset="-120"/>
-              </a:rPr>
-              <a:t>  output$resumen &lt;- renderText({</a:t>
-            </a:r>
-            <a:endParaRPr lang="en-US" sz="1100" dirty="0"/>
-          </a:p>
-          <a:p>
-            <a:pPr marL="0" indent="0">
-              <a:spcAft>
-                <a:spcPts val="200"/>
-              </a:spcAft>
-              <a:buNone/>
-            </a:pPr>
-            <a:r>
-              <a:rPr lang="en-US" sz="1000" dirty="0">
-                <a:solidFill>
-                  <a:srgbClr val="F1E9F8"/>
-                </a:solidFill>
-                <a:latin typeface="Courier New" pitchFamily="34" charset="0"/>
-                <a:ea typeface="Courier New" pitchFamily="34" charset="-122"/>
-                <a:cs typeface="Courier New" pitchFamily="34" charset="-120"/>
-              </a:rPr>
-              <a:t>    paste0("Votos emitidos en total: ", sum(elecciones$emitidos))</a:t>
-            </a:r>
-            <a:endParaRPr lang="en-US" sz="1100" dirty="0"/>
-          </a:p>
-          <a:p>
-            <a:pPr marL="0" indent="0">
-              <a:spcAft>
-                <a:spcPts val="200"/>
-              </a:spcAft>
-              <a:buNone/>
-            </a:pPr>
-            <a:r>
-              <a:rPr lang="en-US" sz="1000" dirty="0">
-                <a:solidFill>
-                  <a:srgbClr val="F1E9F8"/>
-                </a:solidFill>
-                <a:latin typeface="Courier New" pitchFamily="34" charset="0"/>
-                <a:ea typeface="Courier New" pitchFamily="34" charset="-122"/>
-                <a:cs typeface="Courier New" pitchFamily="34" charset="-120"/>
-              </a:rPr>
-              <a:t>  })</a:t>
-            </a:r>
-            <a:endParaRPr lang="en-US" sz="1100" dirty="0"/>
-          </a:p>
-          <a:p>
-            <a:pPr marL="0" indent="0">
-              <a:spcAft>
-                <a:spcPts val="200"/>
-              </a:spcAft>
-              <a:buNone/>
-            </a:pPr>
-            <a:r>
-              <a:rPr lang="en-US" sz="1000" dirty="0">
-                <a:solidFill>
-                  <a:srgbClr val="F1E9F8"/>
-                </a:solidFill>
-                <a:latin typeface="Courier New" pitchFamily="34" charset="0"/>
-                <a:ea typeface="Courier New" pitchFamily="34" charset="-122"/>
-                <a:cs typeface="Courier New" pitchFamily="34" charset="-120"/>
-              </a:rPr>
-              <a:t>}</a:t>
-            </a:r>
-            <a:endParaRPr lang="en-US" sz="1100" dirty="0"/>
-          </a:p>
-          <a:p>
-            <a:pPr marL="0" indent="0">
-              <a:spcAft>
-                <a:spcPts val="200"/>
-              </a:spcAft>
-              <a:buNone/>
-            </a:pPr>
-            <a:r>
-              <a:rPr lang="en-US" sz="1000" dirty="0">
-                <a:solidFill>
-                  <a:srgbClr val="F1E9F8"/>
-                </a:solidFill>
-                <a:latin typeface="Courier New" pitchFamily="34" charset="0"/>
-                <a:ea typeface="Courier New" pitchFamily="34" charset="-122"/>
-                <a:cs typeface="Courier New" pitchFamily="34" charset="-120"/>
-              </a:rPr>
-              <a:t>shinyApp(ui = ui, server = server)</a:t>
-            </a:r>
-            <a:endParaRPr lang="en-US" sz="1100" dirty="0"/>
-          </a:p>
-        </p:txBody>
-      </p:sp>
+            <a:r>
+              <a:rPr lang="es-ES" sz="1400" b="1" dirty="0">
+                <a:solidFill>
+                  <a:schemeClr val="bg1"/>
+                </a:solidFill>
+                <a:latin typeface="Calibri" pitchFamily="34" charset="0"/>
+                <a:ea typeface="Calibri" pitchFamily="34" charset="-122"/>
+                <a:cs typeface="Calibri" pitchFamily="34" charset="-120"/>
+              </a:rPr>
+              <a:t>Git guarda versiones de tu código y GitHub las guarda en la web. Es opcional, el curso se hace completo sin GitHub.</a:t>
+            </a:r>
+          </a:p>
+          <a:p>
+            <a:endParaRPr lang="es-ES" sz="1400" b="1" dirty="0">
+              <a:solidFill>
+                <a:schemeClr val="bg1"/>
+              </a:solidFill>
+              <a:latin typeface="Calibri" pitchFamily="34" charset="0"/>
+              <a:ea typeface="Calibri" pitchFamily="34" charset="-122"/>
+              <a:cs typeface="Calibri" pitchFamily="34" charset="-120"/>
+            </a:endParaRPr>
+          </a:p>
+          <a:p>
+            <a:r>
+              <a:rPr lang="es-ES" sz="1400" b="1" dirty="0">
+                <a:solidFill>
+                  <a:schemeClr val="bg1"/>
+                </a:solidFill>
+                <a:latin typeface="Calibri" pitchFamily="34" charset="0"/>
+                <a:ea typeface="Calibri" pitchFamily="34" charset="-122"/>
+                <a:cs typeface="Calibri" pitchFamily="34" charset="-120"/>
+              </a:rPr>
+              <a:t>Instalá Git, creá una cuenta y un repositorio nuevo. En RStudio, </a:t>
+            </a:r>
+            <a:r>
+              <a:rPr lang="es-ES" sz="1400" b="1" dirty="0" i="1">
+                <a:solidFill>
+                  <a:schemeClr val="bg1"/>
+                </a:solidFill>
+                <a:latin typeface="Calibri" pitchFamily="34" charset="0"/>
+                <a:ea typeface="Calibri" pitchFamily="34" charset="-122"/>
+                <a:cs typeface="Calibri" pitchFamily="34" charset="-120"/>
+              </a:rPr>
+              <a:t>File, New Project, Version Control, Git</a:t>
+            </a:r>
+            <a:r>
+              <a:rPr lang="es-ES" sz="1400" b="1" dirty="0">
+                <a:solidFill>
+                  <a:schemeClr val="bg1"/>
+                </a:solidFill>
+                <a:latin typeface="Calibri" pitchFamily="34" charset="0"/>
+                <a:ea typeface="Calibri" pitchFamily="34" charset="-122"/>
+                <a:cs typeface="Calibri" pitchFamily="34" charset="-120"/>
+              </a:rPr>
+              <a:t> y pegá su dirección. Queda abierto como un proyecto.</a:t>
+            </a:r>
+          </a:p>
+        </p:txBody>
+      </p:sp>
+      <p:pic>
+        <p:nvPicPr>
+          <p:cNvPr id="18" name="Picture 17" descr="cap2.png"/>
+          <p:cNvPicPr>
+            <a:picLocks noChangeAspect="1"/>
+          </p:cNvPicPr>
+          <p:nvPr/>
+        </p:nvPicPr>
+        <p:blipFill>
+          <a:blip r:embed="rId3"/>
+          <a:stretch>
+            <a:fillRect/>
+          </a:stretch>
+        </p:blipFill>
+        <p:spPr>
+          <a:xfrm>
+            <a:off x="4546204" y="1188720"/>
+            <a:ext cx="4257831" cy="3100000"/>
+          </a:xfrm>
+          <a:prstGeom prst="rect">
+            <a:avLst/>
+          </a:prstGeom>
+        </p:spPr>
+      </p:pic>
     </p:spTree>
   </p:cSld>
   <p:clrMapOvr>
@@ -7791,7 +8023,7 @@
                 <a:ea typeface="Calibri" pitchFamily="34" charset="-122"/>
                 <a:cs typeface="Calibri" pitchFamily="34" charset="-120"/>
               </a:rPr>
-              <a:t>Dejar R, RStudio y los paquetes instalados y funcionando.</a:t>
+              <a:t>Dejar R, RStudio y los paquetes instalados, y trabajar dentro de un proyecto.</a:t>
             </a:r>
             <a:endParaRPr lang="es-UY" sz="1500" noProof="0" dirty="0"/>
           </a:p>
@@ -8136,6 +8368,446 @@
 </file>
 
 <file path=ppt/slides/slide20.xml><?xml version="1.0" encoding="utf-8"?>
+<p:sld xmlns:a="http://schemas.openxmlformats.org/drawingml/2006/main" xmlns:p="http://schemas.openxmlformats.org/presentationml/2006/main" xmlns:r="http://schemas.openxmlformats.org/officeDocument/2006/relationships">
+  <p:cSld>
+    <p:bg>
+      <p:bgPr>
+        <a:solidFill>
+          <a:srgbClr val="FFFFFF"/>
+        </a:solidFill>
+        <a:effectLst/>
+      </p:bgPr>
+    </p:bg>
+    <p:spTree>
+      <p:nvGrpSpPr>
+        <p:cNvPr id="1" name=""/>
+        <p:cNvGrpSpPr/>
+        <p:nvPr/>
+      </p:nvGrpSpPr>
+      <p:grpSpPr/>
+      <p:sp>
+        <p:nvSpPr>
+          <p:cNvPr id="2" name="Text 0">
+            <a:extLst>
+              <a:ext uri="{FF2B5EF4-FFF2-40B4-BE49-F238E27FC236}">
+                <a16:creationId xmlns:a16="http://schemas.microsoft.com/office/drawing/2014/main" id="{45FBCF84-BF0C-00DD-1115-ECF03D12DDA6}"/>
+              </a:ext>
+            </a:extLst>
+          </p:cNvPr>
+          <p:cNvSpPr txBox="1"/>
+          <p:nvPr/>
+        </p:nvSpPr>
+        <p:spPr>
+          <a:xfrm>
+            <a:off x="502920" y="320040"/>
+            <a:ext cx="7040880" cy="640080"/>
+          </a:xfrm>
+          <a:prstGeom prst="rect">
+            <a:avLst/>
+          </a:prstGeom>
+          <a:noFill/>
+          <a:ln/>
+        </p:spPr>
+        <p:txBody>
+          <a:bodyPr wrap="square" lIns="0" tIns="0" rIns="0" bIns="0" rtlCol="0" anchor="ctr"/>
+          <a:lstStyle/>
+          <a:p>
+            <a:pPr marL="0" indent="0">
+              <a:buNone/>
+            </a:pPr>
+            <a:r>
+              <a:rPr lang="en-US" sz="3000" b="1" dirty="0">
+                <a:solidFill>
+                  <a:srgbClr val="2E0A4E"/>
+                </a:solidFill>
+                <a:latin typeface="Oswald" pitchFamily="34" charset="0"/>
+                <a:ea typeface="Oswald" pitchFamily="34" charset="-122"/>
+                <a:cs typeface="Oswald" pitchFamily="34" charset="-120"/>
+              </a:rPr>
+              <a:t>Desafío opcional (2)</a:t>
+            </a:r>
+            <a:endParaRPr lang="en-US" sz="3000" dirty="0"/>
+          </a:p>
+        </p:txBody>
+      </p:sp>
+      <p:sp>
+        <p:nvSpPr>
+          <p:cNvPr id="11" name="Shape 9">
+            <a:extLst>
+              <a:ext uri="{FF2B5EF4-FFF2-40B4-BE49-F238E27FC236}">
+                <a16:creationId xmlns:a16="http://schemas.microsoft.com/office/drawing/2014/main" id="{1E4D2BBF-BB0F-7CF4-3842-6325D6A2CD35}"/>
+              </a:ext>
+            </a:extLst>
+          </p:cNvPr>
+          <p:cNvSpPr/>
+          <p:nvPr/>
+        </p:nvSpPr>
+        <p:spPr>
+          <a:xfrm>
+            <a:off x="439616" y="1188720"/>
+            <a:ext cx="2560320" cy="1463040"/>
+          </a:xfrm>
+          <a:prstGeom prst="roundRect">
+            <a:avLst>
+              <a:gd name="adj" fmla="val 2143"/>
+            </a:avLst>
+          </a:prstGeom>
+          <a:solidFill>
+            <a:srgbClr val="5A189A"/>
+          </a:solidFill>
+          <a:ln w="12700">
+            <a:solidFill>
+              <a:srgbClr val="5A189A"/>
+            </a:solidFill>
+            <a:prstDash val="solid"/>
+          </a:ln>
+        </p:spPr>
+        <p:txBody>
+          <a:bodyPr/>
+          <a:lstStyle/>
+          <a:p>
+            <a:endParaRPr lang="en-US"/>
+          </a:p>
+        </p:txBody>
+      </p:sp>
+      <p:sp>
+        <p:nvSpPr>
+          <p:cNvPr id="12" name="Text 10">
+            <a:extLst>
+              <a:ext uri="{FF2B5EF4-FFF2-40B4-BE49-F238E27FC236}">
+                <a16:creationId xmlns:a16="http://schemas.microsoft.com/office/drawing/2014/main" id="{57EA7703-08D4-E6C4-4FDB-5B08F7881055}"/>
+              </a:ext>
+            </a:extLst>
+          </p:cNvPr>
+          <p:cNvSpPr txBox="1"/>
+          <p:nvPr/>
+        </p:nvSpPr>
+        <p:spPr>
+          <a:xfrm>
+            <a:off x="668216" y="1256068"/>
+            <a:ext cx="2103120" cy="502920"/>
+          </a:xfrm>
+          <a:prstGeom prst="rect">
+            <a:avLst/>
+          </a:prstGeom>
+          <a:noFill/>
+          <a:ln/>
+        </p:spPr>
+        <p:txBody>
+          <a:bodyPr wrap="square" lIns="0" tIns="0" rIns="0" bIns="0" rtlCol="0" anchor="ctr"/>
+          <a:lstStyle/>
+          <a:p>
+            <a:pPr marL="0" indent="0">
+              <a:buNone/>
+            </a:pPr>
+            <a:r>
+              <a:rPr lang="en-US" sz="1600" b="1" dirty="0">
+                <a:solidFill>
+                  <a:srgbClr val="FFFFFF"/>
+                </a:solidFill>
+                <a:latin typeface="Oswald" pitchFamily="34" charset="0"/>
+                <a:ea typeface="Oswald" pitchFamily="34" charset="-122"/>
+                <a:cs typeface="Oswald" pitchFamily="34" charset="-120"/>
+              </a:rPr>
+              <a:t>OPCIONAL</a:t>
+            </a:r>
+            <a:endParaRPr lang="en-US" sz="1600" dirty="0"/>
+          </a:p>
+        </p:txBody>
+      </p:sp>
+      <p:sp>
+        <p:nvSpPr>
+          <p:cNvPr id="13" name="Text 11">
+            <a:extLst>
+              <a:ext uri="{FF2B5EF4-FFF2-40B4-BE49-F238E27FC236}">
+                <a16:creationId xmlns:a16="http://schemas.microsoft.com/office/drawing/2014/main" id="{83082800-1689-F508-4C9C-8E0187A18BDD}"/>
+              </a:ext>
+            </a:extLst>
+          </p:cNvPr>
+          <p:cNvSpPr txBox="1"/>
+          <p:nvPr/>
+        </p:nvSpPr>
+        <p:spPr>
+          <a:xfrm>
+            <a:off x="668216" y="1734572"/>
+            <a:ext cx="2103120" cy="716926"/>
+          </a:xfrm>
+          <a:prstGeom prst="rect">
+            <a:avLst/>
+          </a:prstGeom>
+          <a:noFill/>
+          <a:ln/>
+        </p:spPr>
+        <p:txBody>
+          <a:bodyPr wrap="square" lIns="0" tIns="0" rIns="0" bIns="0" rtlCol="0" anchor="t"/>
+          <a:lstStyle/>
+          <a:p>
+            <a:r>
+              <a:rPr lang="es-ES" sz="1400" dirty="0">
+                <a:solidFill>
+                  <a:schemeClr val="bg1"/>
+                </a:solidFill>
+                <a:latin typeface="Calibri" pitchFamily="34" charset="0"/>
+                <a:ea typeface="Calibri" pitchFamily="34" charset="-122"/>
+                <a:cs typeface="Calibri" pitchFamily="34" charset="-120"/>
+              </a:rPr>
+              <a:t>Guardar y subir cambios</a:t>
+            </a:r>
+            <a:endParaRPr lang="en-US" sz="1300" dirty="0"/>
+          </a:p>
+        </p:txBody>
+      </p:sp>
+      <p:sp>
+        <p:nvSpPr>
+          <p:cNvPr id="15" name="Shape 9">
+            <a:extLst>
+              <a:ext uri="{FF2B5EF4-FFF2-40B4-BE49-F238E27FC236}">
+                <a16:creationId xmlns:a16="http://schemas.microsoft.com/office/drawing/2014/main" id="{E750D06A-626A-4348-CA99-CE04C627A232}"/>
+              </a:ext>
+            </a:extLst>
+          </p:cNvPr>
+          <p:cNvSpPr/>
+          <p:nvPr/>
+        </p:nvSpPr>
+        <p:spPr>
+          <a:xfrm>
+            <a:off x="439615" y="2719107"/>
+            <a:ext cx="3773659" cy="2281957"/>
+          </a:xfrm>
+          <a:prstGeom prst="roundRect">
+            <a:avLst>
+              <a:gd name="adj" fmla="val 2143"/>
+            </a:avLst>
+          </a:prstGeom>
+          <a:solidFill>
+            <a:schemeClr val="accent1">
+              <a:lumMod val="75000"/>
+            </a:schemeClr>
+          </a:solidFill>
+          <a:ln w="12700">
+            <a:solidFill>
+              <a:schemeClr val="accent1">
+                <a:lumMod val="75000"/>
+              </a:schemeClr>
+            </a:solidFill>
+            <a:prstDash val="solid"/>
+          </a:ln>
+        </p:spPr>
+        <p:txBody>
+          <a:bodyPr/>
+          <a:lstStyle/>
+          <a:p>
+            <a:endParaRPr lang="en-US"/>
+          </a:p>
+        </p:txBody>
+      </p:sp>
+      <p:sp>
+        <p:nvSpPr>
+          <p:cNvPr id="17" name="Text 11">
+            <a:extLst>
+              <a:ext uri="{FF2B5EF4-FFF2-40B4-BE49-F238E27FC236}">
+                <a16:creationId xmlns:a16="http://schemas.microsoft.com/office/drawing/2014/main" id="{F3440954-5CFF-06C7-8641-E2E38BA6F847}"/>
+              </a:ext>
+            </a:extLst>
+          </p:cNvPr>
+          <p:cNvSpPr txBox="1"/>
+          <p:nvPr/>
+        </p:nvSpPr>
+        <p:spPr>
+          <a:xfrm>
+            <a:off x="668216" y="2899117"/>
+            <a:ext cx="3369212" cy="716926"/>
+          </a:xfrm>
+          <a:prstGeom prst="rect">
+            <a:avLst/>
+          </a:prstGeom>
+          <a:noFill/>
+          <a:ln/>
+        </p:spPr>
+        <p:txBody>
+          <a:bodyPr wrap="square" lIns="0" tIns="0" rIns="0" bIns="0" rtlCol="0" anchor="t"/>
+          <a:lstStyle/>
+          <a:p>
+            <a:r>
+              <a:rPr lang="es-ES" sz="1400" b="1" dirty="0">
+                <a:solidFill>
+                  <a:schemeClr val="bg1"/>
+                </a:solidFill>
+                <a:latin typeface="Calibri" pitchFamily="34" charset="0"/>
+                <a:ea typeface="Calibri" pitchFamily="34" charset="-122"/>
+                <a:cs typeface="Calibri" pitchFamily="34" charset="-120"/>
+              </a:rPr>
+              <a:t>Copiá a tu proyecto la carpeta </a:t>
+            </a:r>
+            <a:r>
+              <a:rPr lang="es-ES" sz="1400" b="1" dirty="0" i="1">
+                <a:solidFill>
+                  <a:schemeClr val="bg1"/>
+                </a:solidFill>
+                <a:latin typeface="Calibri" pitchFamily="34" charset="0"/>
+                <a:ea typeface="Calibri" pitchFamily="34" charset="-122"/>
+                <a:cs typeface="Calibri" pitchFamily="34" charset="-120"/>
+              </a:rPr>
+              <a:t>datos/</a:t>
+            </a:r>
+            <a:r>
+              <a:rPr lang="es-ES" sz="1400" b="1" dirty="0">
+                <a:solidFill>
+                  <a:schemeClr val="bg1"/>
+                </a:solidFill>
+                <a:latin typeface="Calibri" pitchFamily="34" charset="0"/>
+                <a:ea typeface="Calibri" pitchFamily="34" charset="-122"/>
+                <a:cs typeface="Calibri" pitchFamily="34" charset="-120"/>
+              </a:rPr>
+              <a:t> y la de la clase en la que trabajás, y hacé los cambios ahí. Así </a:t>
+            </a:r>
+            <a:r>
+              <a:rPr lang="es-ES" sz="1400" b="1" dirty="0" i="1">
+                <a:solidFill>
+                  <a:schemeClr val="bg1"/>
+                </a:solidFill>
+                <a:latin typeface="Calibri" pitchFamily="34" charset="0"/>
+                <a:ea typeface="Calibri" pitchFamily="34" charset="-122"/>
+                <a:cs typeface="Calibri" pitchFamily="34" charset="-120"/>
+              </a:rPr>
+              <a:t>../datos/</a:t>
+            </a:r>
+            <a:r>
+              <a:rPr lang="es-ES" sz="1400" b="1" dirty="0">
+                <a:solidFill>
+                  <a:schemeClr val="bg1"/>
+                </a:solidFill>
+                <a:latin typeface="Calibri" pitchFamily="34" charset="0"/>
+                <a:ea typeface="Calibri" pitchFamily="34" charset="-122"/>
+                <a:cs typeface="Calibri" pitchFamily="34" charset="-120"/>
+              </a:rPr>
+              <a:t> sigue funcionando.</a:t>
+            </a:r>
+          </a:p>
+          <a:p>
+            <a:endParaRPr lang="es-ES" sz="1400" b="1" dirty="0">
+              <a:solidFill>
+                <a:schemeClr val="bg1"/>
+              </a:solidFill>
+              <a:latin typeface="Calibri" pitchFamily="34" charset="0"/>
+              <a:ea typeface="Calibri" pitchFamily="34" charset="-122"/>
+              <a:cs typeface="Calibri" pitchFamily="34" charset="-120"/>
+            </a:endParaRPr>
+          </a:p>
+          <a:p>
+            <a:r>
+              <a:rPr lang="es-ES" sz="1400" b="1" dirty="0">
+                <a:solidFill>
+                  <a:schemeClr val="bg1"/>
+                </a:solidFill>
+                <a:latin typeface="Calibri" pitchFamily="34" charset="0"/>
+                <a:ea typeface="Calibri" pitchFamily="34" charset="-122"/>
+                <a:cs typeface="Calibri" pitchFamily="34" charset="-120"/>
+              </a:rPr>
+              <a:t>En la pestaña </a:t>
+            </a:r>
+            <a:r>
+              <a:rPr lang="es-ES" sz="1400" b="1" dirty="0" i="1">
+                <a:solidFill>
+                  <a:schemeClr val="bg1"/>
+                </a:solidFill>
+                <a:latin typeface="Calibri" pitchFamily="34" charset="0"/>
+                <a:ea typeface="Calibri" pitchFamily="34" charset="-122"/>
+                <a:cs typeface="Calibri" pitchFamily="34" charset="-120"/>
+              </a:rPr>
+              <a:t>Git</a:t>
+            </a:r>
+            <a:r>
+              <a:rPr lang="es-ES" sz="1400" b="1" dirty="0">
+                <a:solidFill>
+                  <a:schemeClr val="bg1"/>
+                </a:solidFill>
+                <a:latin typeface="Calibri" pitchFamily="34" charset="0"/>
+                <a:ea typeface="Calibri" pitchFamily="34" charset="-122"/>
+                <a:cs typeface="Calibri" pitchFamily="34" charset="-120"/>
+              </a:rPr>
+              <a:t>, marcá los archivos, </a:t>
+            </a:r>
+            <a:r>
+              <a:rPr lang="es-ES" sz="1400" b="1" dirty="0" i="1">
+                <a:solidFill>
+                  <a:schemeClr val="bg1"/>
+                </a:solidFill>
+                <a:latin typeface="Calibri" pitchFamily="34" charset="0"/>
+                <a:ea typeface="Calibri" pitchFamily="34" charset="-122"/>
+                <a:cs typeface="Calibri" pitchFamily="34" charset="-120"/>
+              </a:rPr>
+              <a:t>Commit</a:t>
+            </a:r>
+            <a:r>
+              <a:rPr lang="es-ES" sz="1400" b="1" dirty="0">
+                <a:solidFill>
+                  <a:schemeClr val="bg1"/>
+                </a:solidFill>
+                <a:latin typeface="Calibri" pitchFamily="34" charset="0"/>
+                <a:ea typeface="Calibri" pitchFamily="34" charset="-122"/>
+                <a:cs typeface="Calibri" pitchFamily="34" charset="-120"/>
+              </a:rPr>
+              <a:t> con un mensaje corto y </a:t>
+            </a:r>
+            <a:r>
+              <a:rPr lang="es-ES" sz="1400" b="1" dirty="0" i="1">
+                <a:solidFill>
+                  <a:schemeClr val="bg1"/>
+                </a:solidFill>
+                <a:latin typeface="Calibri" pitchFamily="34" charset="0"/>
+                <a:ea typeface="Calibri" pitchFamily="34" charset="-122"/>
+                <a:cs typeface="Calibri" pitchFamily="34" charset="-120"/>
+              </a:rPr>
+              <a:t>Push</a:t>
+            </a:r>
+            <a:r>
+              <a:rPr lang="es-ES" sz="1400" b="1" dirty="0">
+                <a:solidFill>
+                  <a:schemeClr val="bg1"/>
+                </a:solidFill>
+                <a:latin typeface="Calibri" pitchFamily="34" charset="0"/>
+                <a:ea typeface="Calibri" pitchFamily="34" charset="-122"/>
+                <a:cs typeface="Calibri" pitchFamily="34" charset="-120"/>
+              </a:rPr>
+              <a:t>. Conviene hacerlo al terminar cada clase.</a:t>
+            </a:r>
+          </a:p>
+        </p:txBody>
+      </p:sp>
+      <p:pic>
+        <p:nvPicPr>
+          <p:cNvPr id="18" name="Picture 17" descr="cap3.png"/>
+          <p:cNvPicPr>
+            <a:picLocks noChangeAspect="1"/>
+          </p:cNvPicPr>
+          <p:nvPr/>
+        </p:nvPicPr>
+        <p:blipFill>
+          <a:blip r:embed="rId4"/>
+          <a:stretch>
+            <a:fillRect/>
+          </a:stretch>
+        </p:blipFill>
+        <p:spPr>
+          <a:xfrm>
+            <a:off x="4434840" y="1956145"/>
+            <a:ext cx="4480560" cy="1528388"/>
+          </a:xfrm>
+          <a:prstGeom prst="rect">
+            <a:avLst/>
+          </a:prstGeom>
+        </p:spPr>
+      </p:pic>
+    </p:spTree>
+  </p:cSld>
+  <p:clrMapOvr>
+    <a:masterClrMapping/>
+  </p:clrMapOvr>
+</p:sld>
+</file>
+
+<file path=ppt/slides/slide21.xml><?xml version="1.0" encoding="utf-8"?>
 <p:sld xmlns:a="http://schemas.openxmlformats.org/drawingml/2006/main" xmlns:p="http://schemas.openxmlformats.org/presentationml/2006/main" xmlns:r="http://schemas.openxmlformats.org/officeDocument/2006/relationships">
   <p:cSld>
     <p:bg>
@@ -8320,9 +8992,183 @@
                 <a:ea typeface="Calibri" pitchFamily="34" charset="-122"/>
                 <a:cs typeface="Calibri" pitchFamily="34" charset="-120"/>
               </a:rPr>
-              <a:t>Cambiá TITULO en la zona de pruebas y agregá un p() con tu nombre. Después corré primeros_pasos.R de punta a punta.</a:t>
+              <a:t>Cambiá TITULO en la zona de pruebas y agregá un p() con tu nombre. Después corré primeros_pasos.R de punta a punta. Si tomás el desafío opcional, subí tu clase1 a tu repositorio.</a:t>
             </a:r>
             <a:endParaRPr lang="en-US" sz="1700" dirty="0"/>
+          </a:p>
+        </p:txBody>
+      </p:sp>
+    </p:spTree>
+  </p:cSld>
+  <p:clrMapOvr>
+    <a:masterClrMapping/>
+  </p:clrMapOvr>
+</p:sld>
+</file>
+
+<file path=ppt/slides/slide22.xml><?xml version="1.0" encoding="utf-8"?>
+<p:sld xmlns:a="http://schemas.openxmlformats.org/drawingml/2006/main" xmlns:r="http://schemas.openxmlformats.org/officeDocument/2006/relationships" xmlns:p="http://schemas.openxmlformats.org/presentationml/2006/main">
+  <p:cSld name="Slide 8">
+    <p:bg>
+      <p:bgPr>
+        <a:solidFill>
+          <a:srgbClr val="2E0A4E"/>
+        </a:solidFill>
+        <a:effectLst/>
+      </p:bgPr>
+    </p:bg>
+    <p:spTree>
+      <p:nvGrpSpPr>
+        <p:cNvPr id="1" name=""/>
+        <p:cNvGrpSpPr/>
+        <p:nvPr/>
+      </p:nvGrpSpPr>
+      <p:grpSpPr>
+        <a:xfrm>
+          <a:off x="0" y="0"/>
+          <a:ext cx="0" cy="0"/>
+          <a:chOff x="0" y="0"/>
+          <a:chExt cx="0" cy="0"/>
+        </a:xfrm>
+      </p:grpSpPr>
+      <p:sp>
+        <p:nvSpPr>
+          <p:cNvPr id="3" name="Text 1"/>
+          <p:cNvSpPr txBox="1"/>
+          <p:nvPr/>
+        </p:nvSpPr>
+        <p:spPr>
+          <a:xfrm>
+            <a:off x="960120" y="845820"/>
+            <a:ext cx="7315200" cy="1463040"/>
+          </a:xfrm>
+          <a:prstGeom prst="rect">
+            <a:avLst/>
+          </a:prstGeom>
+          <a:noFill/>
+          <a:ln/>
+        </p:spPr>
+        <p:txBody>
+          <a:bodyPr wrap="square" lIns="0" tIns="0" rIns="0" bIns="0" rtlCol="0" anchor="t"/>
+          <a:lstStyle/>
+          <a:p>
+            <a:pPr marL="0" indent="0">
+              <a:buNone/>
+            </a:pPr>
+            <a:r>
+              <a:rPr lang="es-UY" sz="3000" noProof="0" dirty="0">
+                <a:solidFill>
+                  <a:srgbClr val="FFFFFF"/>
+                </a:solidFill>
+                <a:latin typeface="Oswald" pitchFamily="34" charset="0"/>
+                <a:ea typeface="Oswald" pitchFamily="34" charset="-122"/>
+                <a:cs typeface="Oswald" pitchFamily="34" charset="-120"/>
+              </a:rPr>
+              <a:t>Antes de la próxima clase.</a:t>
+            </a:r>
+          </a:p>
+          <a:p>
+            <a:pPr marL="0" indent="0">
+              <a:buNone/>
+            </a:pPr>
+            <a:endParaRPr lang="es-UY" sz="3000" dirty="0">
+              <a:solidFill>
+                <a:srgbClr val="FFFFFF"/>
+              </a:solidFill>
+              <a:latin typeface="Oswald" pitchFamily="34" charset="0"/>
+            </a:endParaRPr>
+          </a:p>
+          <a:p>
+            <a:pPr marL="0" indent="0">
+              <a:buNone/>
+            </a:pPr>
+            <a:r>
+              <a:rPr lang="es-UY" sz="3000" noProof="0" dirty="0">
+                <a:solidFill>
+                  <a:srgbClr val="FFFFFF"/>
+                </a:solidFill>
+                <a:latin typeface="Oswald" pitchFamily="34" charset="0"/>
+              </a:rPr>
+              <a:t>-Correr primeros_pasos.R completo</a:t>
+            </a:r>
+          </a:p>
+          <a:p>
+            <a:pPr marL="0" indent="0">
+              <a:buNone/>
+            </a:pPr>
+            <a:r>
+              <a:rPr lang="es-UY" sz="3000" dirty="0">
+                <a:solidFill>
+                  <a:srgbClr val="FFFFFF"/>
+                </a:solidFill>
+                <a:latin typeface="Oswald" pitchFamily="34" charset="0"/>
+              </a:rPr>
+              <a:t>-Tener R, RStudio y paquetes listos</a:t>
+            </a:r>
+          </a:p>
+          <a:p>
+            <a:pPr marL="0" indent="0">
+              <a:buNone/>
+            </a:pPr>
+            <a:r>
+              <a:rPr lang="es-UY" sz="3000" dirty="0">
+                <a:solidFill>
+                  <a:srgbClr val="FFFFFF"/>
+                </a:solidFill>
+                <a:latin typeface="Oswald" pitchFamily="34" charset="0"/>
+              </a:rPr>
+              <a:t>-Opcional, crear tu repo en GitHub</a:t>
+            </a:r>
+          </a:p>
+          <a:p>
+            <a:pPr marL="0" indent="0">
+              <a:buNone/>
+            </a:pPr>
+            <a:r>
+              <a:rPr lang="es-UY" sz="3000" b="1" noProof="0" dirty="0">
+                <a:solidFill>
+                  <a:srgbClr val="FFFFFF"/>
+                </a:solidFill>
+                <a:latin typeface="Oswald" pitchFamily="34" charset="0"/>
+              </a:rPr>
+              <a:t>-</a:t>
+            </a:r>
+            <a:r>
+              <a:rPr lang="es-UY" sz="3000" b="1" dirty="0">
+                <a:solidFill>
+                  <a:srgbClr val="FFFFFF"/>
+                </a:solidFill>
+                <a:latin typeface="Oswald" pitchFamily="34" charset="0"/>
+              </a:rPr>
+              <a:t>Hacer formulario de diagnóstico:</a:t>
+            </a:r>
+          </a:p>
+          <a:p>
+            <a:pPr marL="0" indent="0">
+              <a:buNone/>
+            </a:pPr>
+            <a:endParaRPr lang="es-UY" sz="3000" b="1" noProof="0" dirty="0">
+              <a:solidFill>
+                <a:srgbClr val="FFFFFF"/>
+              </a:solidFill>
+              <a:latin typeface="Oswald" pitchFamily="34" charset="0"/>
+            </a:endParaRPr>
+          </a:p>
+          <a:p>
+            <a:r>
+              <a:rPr lang="es-UY" sz="3000" b="1" dirty="0">
+                <a:solidFill>
+                  <a:schemeClr val="bg1"/>
+                </a:solidFill>
+                <a:hlinkClick r:id="rId3"/>
+              </a:rPr>
+              <a:t>https://forms.gle/fBNWZZm4eD2N7DDw9</a:t>
+            </a:r>
+            <a:endParaRPr lang="es-UY" sz="3000" b="1" noProof="0" dirty="0">
+              <a:solidFill>
+                <a:schemeClr val="bg1"/>
+              </a:solidFill>
+            </a:endParaRPr>
           </a:p>
         </p:txBody>
       </p:sp>
@@ -11560,7 +12406,7 @@
 </p:sld>
 </file>
 
-<file path=ppt/slides/slide7.xml><?xml version="1.0" encoding="utf-8"?>
+<file path=ppt/slides/slide6.xml><?xml version="1.0" encoding="utf-8"?>
 <p:sld xmlns:a="http://schemas.openxmlformats.org/drawingml/2006/main" xmlns:r="http://schemas.openxmlformats.org/officeDocument/2006/relationships" xmlns:p="http://schemas.openxmlformats.org/presentationml/2006/main">
   <p:cSld>
     <p:bg>
@@ -12033,7 +12879,7 @@
 </p:sld>
 </file>
 
-<file path=ppt/slides/slide8.xml><?xml version="1.0" encoding="utf-8"?>
+<file path=ppt/slides/slide7.xml><?xml version="1.0" encoding="utf-8"?>
 <p:sld xmlns:a="http://schemas.openxmlformats.org/drawingml/2006/main" xmlns:r="http://schemas.openxmlformats.org/officeDocument/2006/relationships" xmlns:p="http://schemas.openxmlformats.org/presentationml/2006/main">
   <p:cSld>
     <p:bg>
@@ -12484,7 +13330,7 @@
 </p:sld>
 </file>
 
-<file path=ppt/slides/slide9.xml><?xml version="1.0" encoding="utf-8"?>
+<file path=ppt/slides/slide8.xml><?xml version="1.0" encoding="utf-8"?>
 <p:sld xmlns:a="http://schemas.openxmlformats.org/drawingml/2006/main" xmlns:r="http://schemas.openxmlformats.org/officeDocument/2006/relationships" xmlns:p="http://schemas.openxmlformats.org/presentationml/2006/main">
   <p:cSld>
     <p:bg>
@@ -12905,6 +13751,387 @@
         <p14:creationId xmlns:p14="http://schemas.microsoft.com/office/powerpoint/2010/main" val="2287114499"/>
       </p:ext>
     </p:extLst>
+  </p:cSld>
+  <p:clrMapOvr>
+    <a:masterClrMapping/>
+  </p:clrMapOvr>
+</p:sld>
+</file>
+
+<file path=ppt/slides/slide9.xml><?xml version="1.0" encoding="utf-8"?>
+<p:sld xmlns:a="http://schemas.openxmlformats.org/drawingml/2006/main" xmlns:p="http://schemas.openxmlformats.org/presentationml/2006/main" xmlns:r="http://schemas.openxmlformats.org/officeDocument/2006/relationships">
+  <p:cSld>
+    <p:bg>
+      <p:bgPr>
+        <a:solidFill>
+          <a:srgbClr val="FFFFFF"/>
+        </a:solidFill>
+        <a:effectLst/>
+      </p:bgPr>
+    </p:bg>
+    <p:spTree>
+      <p:nvGrpSpPr>
+        <p:cNvPr id="1" name=""/>
+        <p:cNvGrpSpPr/>
+        <p:nvPr/>
+      </p:nvGrpSpPr>
+      <p:grpSpPr/>
+      <p:sp>
+        <p:nvSpPr>
+          <p:cNvPr id="2" name="Text 0">
+            <a:extLst>
+              <a:ext uri="{FF2B5EF4-FFF2-40B4-BE49-F238E27FC236}">
+                <a16:creationId xmlns:a16="http://schemas.microsoft.com/office/drawing/2014/main" id="{45FBCF84-BF0C-00DD-1115-ECF03D12DDA6}"/>
+              </a:ext>
+            </a:extLst>
+          </p:cNvPr>
+          <p:cNvSpPr txBox="1"/>
+          <p:nvPr/>
+        </p:nvSpPr>
+        <p:spPr>
+          <a:xfrm>
+            <a:off x="502920" y="320040"/>
+            <a:ext cx="7040880" cy="640080"/>
+          </a:xfrm>
+          <a:prstGeom prst="rect">
+            <a:avLst/>
+          </a:prstGeom>
+          <a:noFill/>
+          <a:ln/>
+        </p:spPr>
+        <p:txBody>
+          <a:bodyPr wrap="square" lIns="0" tIns="0" rIns="0" bIns="0" rtlCol="0" anchor="ctr"/>
+          <a:lstStyle/>
+          <a:p>
+            <a:pPr marL="0" indent="0">
+              <a:buNone/>
+            </a:pPr>
+            <a:r>
+              <a:rPr lang="en-US" sz="3000" b="1" dirty="0">
+                <a:solidFill>
+                  <a:srgbClr val="2E0A4E"/>
+                </a:solidFill>
+                <a:latin typeface="Oswald" pitchFamily="34" charset="0"/>
+                <a:ea typeface="Oswald" pitchFamily="34" charset="-122"/>
+                <a:cs typeface="Oswald" pitchFamily="34" charset="-120"/>
+              </a:rPr>
+              <a:t>Paso a paso (1)</a:t>
+            </a:r>
+            <a:endParaRPr lang="en-US" sz="3000" dirty="0"/>
+          </a:p>
+        </p:txBody>
+      </p:sp>
+      <p:sp>
+        <p:nvSpPr>
+          <p:cNvPr id="11" name="Shape 9">
+            <a:extLst>
+              <a:ext uri="{FF2B5EF4-FFF2-40B4-BE49-F238E27FC236}">
+                <a16:creationId xmlns:a16="http://schemas.microsoft.com/office/drawing/2014/main" id="{1E4D2BBF-BB0F-7CF4-3842-6325D6A2CD35}"/>
+              </a:ext>
+            </a:extLst>
+          </p:cNvPr>
+          <p:cNvSpPr/>
+          <p:nvPr/>
+        </p:nvSpPr>
+        <p:spPr>
+          <a:xfrm>
+            <a:off x="439616" y="1188720"/>
+            <a:ext cx="2560320" cy="1463040"/>
+          </a:xfrm>
+          <a:prstGeom prst="roundRect">
+            <a:avLst>
+              <a:gd name="adj" fmla="val 2143"/>
+            </a:avLst>
+          </a:prstGeom>
+          <a:solidFill>
+            <a:srgbClr val="5A189A"/>
+          </a:solidFill>
+          <a:ln w="12700">
+            <a:solidFill>
+              <a:srgbClr val="5A189A"/>
+            </a:solidFill>
+            <a:prstDash val="solid"/>
+          </a:ln>
+        </p:spPr>
+        <p:txBody>
+          <a:bodyPr/>
+          <a:lstStyle/>
+          <a:p>
+            <a:endParaRPr lang="en-US"/>
+          </a:p>
+        </p:txBody>
+      </p:sp>
+      <p:sp>
+        <p:nvSpPr>
+          <p:cNvPr id="12" name="Text 10">
+            <a:extLst>
+              <a:ext uri="{FF2B5EF4-FFF2-40B4-BE49-F238E27FC236}">
+                <a16:creationId xmlns:a16="http://schemas.microsoft.com/office/drawing/2014/main" id="{57EA7703-08D4-E6C4-4FDB-5B08F7881055}"/>
+              </a:ext>
+            </a:extLst>
+          </p:cNvPr>
+          <p:cNvSpPr txBox="1"/>
+          <p:nvPr/>
+        </p:nvSpPr>
+        <p:spPr>
+          <a:xfrm>
+            <a:off x="668216" y="1256068"/>
+            <a:ext cx="2103120" cy="502920"/>
+          </a:xfrm>
+          <a:prstGeom prst="rect">
+            <a:avLst/>
+          </a:prstGeom>
+          <a:noFill/>
+          <a:ln/>
+        </p:spPr>
+        <p:txBody>
+          <a:bodyPr wrap="square" lIns="0" tIns="0" rIns="0" bIns="0" rtlCol="0" anchor="ctr"/>
+          <a:lstStyle/>
+          <a:p>
+            <a:pPr marL="0" indent="0">
+              <a:buNone/>
+            </a:pPr>
+            <a:r>
+              <a:rPr lang="en-US" sz="1600" b="1" dirty="0">
+                <a:solidFill>
+                  <a:srgbClr val="FFFFFF"/>
+                </a:solidFill>
+                <a:latin typeface="Oswald" pitchFamily="34" charset="0"/>
+                <a:ea typeface="Oswald" pitchFamily="34" charset="-122"/>
+                <a:cs typeface="Oswald" pitchFamily="34" charset="-120"/>
+              </a:rPr>
+              <a:t>OBJETIVO 3</a:t>
+            </a:r>
+            <a:endParaRPr lang="en-US" sz="1600" dirty="0"/>
+          </a:p>
+        </p:txBody>
+      </p:sp>
+      <p:sp>
+        <p:nvSpPr>
+          <p:cNvPr id="13" name="Text 11">
+            <a:extLst>
+              <a:ext uri="{FF2B5EF4-FFF2-40B4-BE49-F238E27FC236}">
+                <a16:creationId xmlns:a16="http://schemas.microsoft.com/office/drawing/2014/main" id="{83082800-1689-F508-4C9C-8E0187A18BDD}"/>
+              </a:ext>
+            </a:extLst>
+          </p:cNvPr>
+          <p:cNvSpPr txBox="1"/>
+          <p:nvPr/>
+        </p:nvSpPr>
+        <p:spPr>
+          <a:xfrm>
+            <a:off x="668216" y="1734572"/>
+            <a:ext cx="2103120" cy="716926"/>
+          </a:xfrm>
+          <a:prstGeom prst="rect">
+            <a:avLst/>
+          </a:prstGeom>
+          <a:noFill/>
+          <a:ln/>
+        </p:spPr>
+        <p:txBody>
+          <a:bodyPr wrap="square" lIns="0" tIns="0" rIns="0" bIns="0" rtlCol="0" anchor="t"/>
+          <a:lstStyle/>
+          <a:p>
+            <a:r>
+              <a:rPr lang="es-ES" sz="1400" dirty="0">
+                <a:solidFill>
+                  <a:schemeClr val="bg1"/>
+                </a:solidFill>
+                <a:latin typeface="Calibri" pitchFamily="34" charset="0"/>
+                <a:ea typeface="Calibri" pitchFamily="34" charset="-122"/>
+                <a:cs typeface="Calibri" pitchFamily="34" charset="-120"/>
+              </a:rPr>
+              <a:t>Dejar todo instalado</a:t>
+            </a:r>
+            <a:endParaRPr lang="en-US" sz="1300" dirty="0"/>
+          </a:p>
+        </p:txBody>
+      </p:sp>
+      <p:sp>
+        <p:nvSpPr>
+          <p:cNvPr id="15" name="Shape 9">
+            <a:extLst>
+              <a:ext uri="{FF2B5EF4-FFF2-40B4-BE49-F238E27FC236}">
+                <a16:creationId xmlns:a16="http://schemas.microsoft.com/office/drawing/2014/main" id="{E750D06A-626A-4348-CA99-CE04C627A232}"/>
+              </a:ext>
+            </a:extLst>
+          </p:cNvPr>
+          <p:cNvSpPr/>
+          <p:nvPr/>
+        </p:nvSpPr>
+        <p:spPr>
+          <a:xfrm>
+            <a:off x="439615" y="2719107"/>
+            <a:ext cx="3773659" cy="2281957"/>
+          </a:xfrm>
+          <a:prstGeom prst="roundRect">
+            <a:avLst>
+              <a:gd name="adj" fmla="val 2143"/>
+            </a:avLst>
+          </a:prstGeom>
+          <a:solidFill>
+            <a:schemeClr val="accent1">
+              <a:lumMod val="75000"/>
+            </a:schemeClr>
+          </a:solidFill>
+          <a:ln w="12700">
+            <a:solidFill>
+              <a:schemeClr val="accent1">
+                <a:lumMod val="75000"/>
+              </a:schemeClr>
+            </a:solidFill>
+            <a:prstDash val="solid"/>
+          </a:ln>
+        </p:spPr>
+        <p:txBody>
+          <a:bodyPr/>
+          <a:lstStyle/>
+          <a:p>
+            <a:endParaRPr lang="en-US"/>
+          </a:p>
+        </p:txBody>
+      </p:sp>
+      <p:sp>
+        <p:nvSpPr>
+          <p:cNvPr id="17" name="Text 11">
+            <a:extLst>
+              <a:ext uri="{FF2B5EF4-FFF2-40B4-BE49-F238E27FC236}">
+                <a16:creationId xmlns:a16="http://schemas.microsoft.com/office/drawing/2014/main" id="{F3440954-5CFF-06C7-8641-E2E38BA6F847}"/>
+              </a:ext>
+            </a:extLst>
+          </p:cNvPr>
+          <p:cNvSpPr txBox="1"/>
+          <p:nvPr/>
+        </p:nvSpPr>
+        <p:spPr>
+          <a:xfrm>
+            <a:off x="668216" y="2899117"/>
+            <a:ext cx="3369212" cy="716926"/>
+          </a:xfrm>
+          <a:prstGeom prst="rect">
+            <a:avLst/>
+          </a:prstGeom>
+          <a:noFill/>
+          <a:ln/>
+        </p:spPr>
+        <p:txBody>
+          <a:bodyPr wrap="square" lIns="0" tIns="0" rIns="0" bIns="0" rtlCol="0" anchor="t"/>
+          <a:lstStyle/>
+          <a:p>
+            <a:r>
+              <a:rPr lang="es-ES" sz="1400" b="1" dirty="0">
+                <a:solidFill>
+                  <a:schemeClr val="bg1"/>
+                </a:solidFill>
+                <a:latin typeface="Calibri" pitchFamily="34" charset="0"/>
+                <a:ea typeface="Calibri" pitchFamily="34" charset="-122"/>
+                <a:cs typeface="Calibri" pitchFamily="34" charset="-120"/>
+              </a:rPr>
+              <a:t>Primero R, después RStudio. Los paquetes se instalan una sola vez con </a:t>
+            </a:r>
+            <a:r>
+              <a:rPr lang="es-ES" sz="1400" b="1" i="1" dirty="0">
+                <a:solidFill>
+                  <a:schemeClr val="bg1"/>
+                </a:solidFill>
+                <a:latin typeface="Calibri" pitchFamily="34" charset="0"/>
+                <a:ea typeface="Calibri" pitchFamily="34" charset="-122"/>
+                <a:cs typeface="Calibri" pitchFamily="34" charset="-120"/>
+              </a:rPr>
+              <a:t>install.packages()</a:t>
+            </a:r>
+            <a:r>
+              <a:rPr lang="es-ES" sz="1400" b="1" dirty="0">
+                <a:solidFill>
+                  <a:schemeClr val="bg1"/>
+                </a:solidFill>
+                <a:latin typeface="Calibri" pitchFamily="34" charset="0"/>
+                <a:ea typeface="Calibri" pitchFamily="34" charset="-122"/>
+                <a:cs typeface="Calibri" pitchFamily="34" charset="-120"/>
+              </a:rPr>
+              <a:t>.</a:t>
+            </a:r>
+          </a:p>
+          <a:p>
+            <a:endParaRPr lang="es-ES" sz="1400" b="1" dirty="0">
+              <a:solidFill>
+                <a:schemeClr val="bg1"/>
+              </a:solidFill>
+              <a:latin typeface="Calibri" pitchFamily="34" charset="0"/>
+              <a:ea typeface="Calibri" pitchFamily="34" charset="-122"/>
+              <a:cs typeface="Calibri" pitchFamily="34" charset="-120"/>
+            </a:endParaRPr>
+          </a:p>
+          <a:p>
+            <a:r>
+              <a:rPr lang="es-ES" sz="1400" b="1" dirty="0">
+                <a:solidFill>
+                  <a:schemeClr val="bg1"/>
+                </a:solidFill>
+                <a:latin typeface="Calibri" pitchFamily="34" charset="0"/>
+                <a:ea typeface="Calibri" pitchFamily="34" charset="-122"/>
+                <a:cs typeface="Calibri" pitchFamily="34" charset="-120"/>
+              </a:rPr>
+              <a:t>Abrir el curso siempre desde el archivo </a:t>
+            </a:r>
+            <a:r>
+              <a:rPr lang="es-ES" sz="1400" b="1" i="1" dirty="0">
+                <a:solidFill>
+                  <a:schemeClr val="bg1"/>
+                </a:solidFill>
+                <a:latin typeface="Calibri" pitchFamily="34" charset="0"/>
+                <a:ea typeface="Calibri" pitchFamily="34" charset="-122"/>
+                <a:cs typeface="Calibri" pitchFamily="34" charset="-120"/>
+              </a:rPr>
+              <a:t>.Rproj</a:t>
+            </a:r>
+            <a:r>
+              <a:rPr lang="es-ES" sz="1400" b="1" dirty="0">
+                <a:solidFill>
+                  <a:schemeClr val="bg1"/>
+                </a:solidFill>
+                <a:latin typeface="Calibri" pitchFamily="34" charset="0"/>
+                <a:ea typeface="Calibri" pitchFamily="34" charset="-122"/>
+                <a:cs typeface="Calibri" pitchFamily="34" charset="-120"/>
+              </a:rPr>
+              <a:t>. Así R sabe dónde están los datos.</a:t>
+            </a:r>
+          </a:p>
+        </p:txBody>
+      </p:sp>
+      <p:pic>
+        <p:nvPicPr>
+          <p:cNvPr id="22" name="Picture 21" descr="p1.png"/>
+          <p:cNvPicPr>
+            <a:picLocks noChangeAspect="1"/>
+          </p:cNvPicPr>
+          <p:nvPr/>
+        </p:nvPicPr>
+        <p:blipFill>
+          <a:blip r:embed="rId2"/>
+          <a:stretch>
+            <a:fillRect/>
+          </a:stretch>
+        </p:blipFill>
+        <p:spPr>
+          <a:xfrm>
+            <a:off x="4434840" y="1668901"/>
+            <a:ext cx="4480560" cy="2102876"/>
+          </a:xfrm>
+          <a:prstGeom prst="rect">
+            <a:avLst/>
+          </a:prstGeom>
+          <a:ln w="76200">
+            <a:solidFill>
+              <a:schemeClr val="accent1">
+                <a:lumMod val="75000"/>
+              </a:schemeClr>
+            </a:solidFill>
+          </a:ln>
+        </p:spPr>
+      </p:pic>
+    </p:spTree>
   </p:cSld>
   <p:clrMapOvr>
     <a:masterClrMapping/>

--- a/clase1/clase1.pptx
+++ b/clase1/clase1.pptx
@@ -5,7 +5,7 @@
     <p:sldMasterId id="2147483648" r:id="rId1"/>
   </p:sldMasterIdLst>
   <p:notesMasterIdLst>
-    <p:notesMasterId r:id="rId14"/>
+    <p:notesMasterId r:id="rId25"/>
   </p:notesMasterIdLst>
   <p:sldIdLst>
     <p:sldId id="256" r:id="rId2"/>
@@ -13,23 +13,24 @@
     <p:sldId id="258" r:id="rId4"/>
     <p:sldId id="259" r:id="rId5"/>
     <p:sldId id="264" r:id="rId6"/>
-    <p:sldId id="267" r:id="rId8"/>
-    <p:sldId id="268" r:id="rId9"/>
-    <p:sldId id="269" r:id="rId10"/>
-    <p:sldId id="272" r:id="rId21"/>
-    <p:sldId id="280" r:id="rId7"/>
-    <p:sldId id="273" r:id="rId22"/>
-    <p:sldId id="274" r:id="rId23"/>
-    <p:sldId id="270" r:id="rId11"/>
-    <p:sldId id="271" r:id="rId12"/>
-    <p:sldId id="275" r:id="rId24"/>
-    <p:sldId id="276" r:id="rId25"/>
-    <p:sldId id="277" r:id="rId26"/>
-    <p:sldId id="278" r:id="rId27"/>
-    <p:sldId id="281" r:id="rId29"/>
-    <p:sldId id="282" r:id="rId30"/>
-    <p:sldId id="279" r:id="rId28"/>
-    <p:sldId id="263" r:id="rId13"/>
+    <p:sldId id="267" r:id="rId7"/>
+    <p:sldId id="268" r:id="rId8"/>
+    <p:sldId id="269" r:id="rId9"/>
+    <p:sldId id="283" r:id="rId10"/>
+    <p:sldId id="272" r:id="rId11"/>
+    <p:sldId id="280" r:id="rId12"/>
+    <p:sldId id="273" r:id="rId13"/>
+    <p:sldId id="274" r:id="rId14"/>
+    <p:sldId id="270" r:id="rId15"/>
+    <p:sldId id="271" r:id="rId16"/>
+    <p:sldId id="275" r:id="rId17"/>
+    <p:sldId id="276" r:id="rId18"/>
+    <p:sldId id="277" r:id="rId19"/>
+    <p:sldId id="278" r:id="rId20"/>
+    <p:sldId id="281" r:id="rId21"/>
+    <p:sldId id="282" r:id="rId22"/>
+    <p:sldId id="279" r:id="rId23"/>
+    <p:sldId id="263" r:id="rId24"/>
   </p:sldIdLst>
   <p:sldSz cx="9144000" cy="5143500" type="screen16x9"/>
   <p:notesSz cx="5143500" cy="9144000"/>
@@ -136,7 +137,7 @@
 <file path=ppt/revisionInfo.xml><?xml version="1.0" encoding="utf-8"?>
 <p1510:revInfo xmlns:a="http://schemas.openxmlformats.org/drawingml/2006/main" xmlns:r="http://schemas.openxmlformats.org/officeDocument/2006/relationships" xmlns:p1510="http://schemas.microsoft.com/office/powerpoint/2015/10/main">
   <p1510:revLst>
-    <p1510:client id="{808BD29D-6A75-433E-8BD7-266EC3CDB597}" v="49" dt="2026-09-26T23:59:05.517"/>
+    <p1510:client id="{75231100-3F8B-4AA8-A25F-ED091176310E}" v="2" dt="2026-10-18T22:52:42.974"/>
   </p1510:revLst>
 </p1510:revInfo>
 </file>
@@ -180,14 +181,6 @@
             <ac:spMk id="4" creationId="{00000000-0000-0000-0000-000000000000}"/>
           </ac:spMkLst>
         </pc:spChg>
-        <pc:spChg chg="del">
-          <ac:chgData name="Nahuel Roel" userId="f57eb92d7f62e27b" providerId="LiveId" clId="{1698397B-2804-4513-BF38-7951CB4798F0}" dt="2026-09-26T17:30:44.743" v="0" actId="478"/>
-          <ac:spMkLst>
-            <pc:docMk/>
-            <pc:sldMk cId="0" sldId="256"/>
-            <ac:spMk id="5" creationId="{00000000-0000-0000-0000-000000000000}"/>
-          </ac:spMkLst>
-        </pc:spChg>
         <pc:spChg chg="mod">
           <ac:chgData name="Nahuel Roel" userId="f57eb92d7f62e27b" providerId="LiveId" clId="{1698397B-2804-4513-BF38-7951CB4798F0}" dt="2026-09-26T18:39:41.958" v="3486" actId="403"/>
           <ac:spMkLst>
@@ -211,14 +204,6 @@
           <pc:docMk/>
           <pc:sldMk cId="0" sldId="257"/>
         </pc:sldMkLst>
-        <pc:spChg chg="mod">
-          <ac:chgData name="Nahuel Roel" userId="f57eb92d7f62e27b" providerId="LiveId" clId="{1698397B-2804-4513-BF38-7951CB4798F0}" dt="2026-09-26T17:37:39.692" v="251" actId="790"/>
-          <ac:spMkLst>
-            <pc:docMk/>
-            <pc:sldMk cId="0" sldId="257"/>
-            <ac:spMk id="2" creationId="{00000000-0000-0000-0000-000000000000}"/>
-          </ac:spMkLst>
-        </pc:spChg>
         <pc:spChg chg="del">
           <ac:chgData name="Nahuel Roel" userId="f57eb92d7f62e27b" providerId="LiveId" clId="{1698397B-2804-4513-BF38-7951CB4798F0}" dt="2026-09-26T17:30:59.592" v="8" actId="478"/>
           <ac:spMkLst>
@@ -330,22 +315,6 @@
             <ac:spMk id="2" creationId="{00000000-0000-0000-0000-000000000000}"/>
           </ac:spMkLst>
         </pc:spChg>
-        <pc:spChg chg="del">
-          <ac:chgData name="Nahuel Roel" userId="f57eb92d7f62e27b" providerId="LiveId" clId="{1698397B-2804-4513-BF38-7951CB4798F0}" dt="2026-09-26T17:35:02.031" v="155" actId="478"/>
-          <ac:spMkLst>
-            <pc:docMk/>
-            <pc:sldMk cId="0" sldId="258"/>
-            <ac:spMk id="3" creationId="{00000000-0000-0000-0000-000000000000}"/>
-          </ac:spMkLst>
-        </pc:spChg>
-        <pc:spChg chg="del">
-          <ac:chgData name="Nahuel Roel" userId="f57eb92d7f62e27b" providerId="LiveId" clId="{1698397B-2804-4513-BF38-7951CB4798F0}" dt="2026-09-26T17:36:37.309" v="219" actId="478"/>
-          <ac:spMkLst>
-            <pc:docMk/>
-            <pc:sldMk cId="0" sldId="258"/>
-            <ac:spMk id="4" creationId="{00000000-0000-0000-0000-000000000000}"/>
-          </ac:spMkLst>
-        </pc:spChg>
         <pc:graphicFrameChg chg="mod modGraphic">
           <ac:chgData name="Nahuel Roel" userId="f57eb92d7f62e27b" providerId="LiveId" clId="{1698397B-2804-4513-BF38-7951CB4798F0}" dt="2026-09-26T23:59:49.058" v="3657" actId="20577"/>
           <ac:graphicFrameMkLst>
@@ -367,22 +336,6 @@
             <pc:docMk/>
             <pc:sldMk cId="0" sldId="259"/>
             <ac:spMk id="2" creationId="{00000000-0000-0000-0000-000000000000}"/>
-          </ac:spMkLst>
-        </pc:spChg>
-        <pc:spChg chg="del">
-          <ac:chgData name="Nahuel Roel" userId="f57eb92d7f62e27b" providerId="LiveId" clId="{1698397B-2804-4513-BF38-7951CB4798F0}" dt="2026-09-26T17:36:42.132" v="220" actId="478"/>
-          <ac:spMkLst>
-            <pc:docMk/>
-            <pc:sldMk cId="0" sldId="259"/>
-            <ac:spMk id="3" creationId="{00000000-0000-0000-0000-000000000000}"/>
-          </ac:spMkLst>
-        </pc:spChg>
-        <pc:spChg chg="del">
-          <ac:chgData name="Nahuel Roel" userId="f57eb92d7f62e27b" providerId="LiveId" clId="{1698397B-2804-4513-BF38-7951CB4798F0}" dt="2026-09-26T17:47:51.879" v="1826" actId="478"/>
-          <ac:spMkLst>
-            <pc:docMk/>
-            <pc:sldMk cId="0" sldId="259"/>
-            <ac:spMk id="4" creationId="{00000000-0000-0000-0000-000000000000}"/>
           </ac:spMkLst>
         </pc:spChg>
         <pc:spChg chg="mod">
@@ -514,207 +467,18 @@
           </ac:spMkLst>
         </pc:spChg>
       </pc:sldChg>
-      <pc:sldChg chg="modSp del mod">
-        <pc:chgData name="Nahuel Roel" userId="f57eb92d7f62e27b" providerId="LiveId" clId="{1698397B-2804-4513-BF38-7951CB4798F0}" dt="2026-09-26T18:09:02.897" v="2859" actId="47"/>
-        <pc:sldMkLst>
-          <pc:docMk/>
-          <pc:sldMk cId="0" sldId="260"/>
-        </pc:sldMkLst>
-        <pc:spChg chg="mod">
-          <ac:chgData name="Nahuel Roel" userId="f57eb92d7f62e27b" providerId="LiveId" clId="{1698397B-2804-4513-BF38-7951CB4798F0}" dt="2026-09-26T17:37:39.692" v="251" actId="790"/>
-          <ac:spMkLst>
-            <pc:docMk/>
-            <pc:sldMk cId="0" sldId="260"/>
-            <ac:spMk id="2" creationId="{00000000-0000-0000-0000-000000000000}"/>
-          </ac:spMkLst>
-        </pc:spChg>
-        <pc:spChg chg="mod">
-          <ac:chgData name="Nahuel Roel" userId="f57eb92d7f62e27b" providerId="LiveId" clId="{1698397B-2804-4513-BF38-7951CB4798F0}" dt="2026-09-26T17:37:39.692" v="251" actId="790"/>
-          <ac:spMkLst>
-            <pc:docMk/>
-            <pc:sldMk cId="0" sldId="260"/>
-            <ac:spMk id="4" creationId="{00000000-0000-0000-0000-000000000000}"/>
-          </ac:spMkLst>
-        </pc:spChg>
-        <pc:spChg chg="mod">
-          <ac:chgData name="Nahuel Roel" userId="f57eb92d7f62e27b" providerId="LiveId" clId="{1698397B-2804-4513-BF38-7951CB4798F0}" dt="2026-09-26T17:37:39.692" v="251" actId="790"/>
-          <ac:spMkLst>
-            <pc:docMk/>
-            <pc:sldMk cId="0" sldId="260"/>
-            <ac:spMk id="5" creationId="{00000000-0000-0000-0000-000000000000}"/>
-          </ac:spMkLst>
-        </pc:spChg>
-        <pc:spChg chg="mod">
-          <ac:chgData name="Nahuel Roel" userId="f57eb92d7f62e27b" providerId="LiveId" clId="{1698397B-2804-4513-BF38-7951CB4798F0}" dt="2026-09-26T17:37:39.692" v="251" actId="790"/>
-          <ac:spMkLst>
-            <pc:docMk/>
-            <pc:sldMk cId="0" sldId="260"/>
-            <ac:spMk id="6" creationId="{00000000-0000-0000-0000-000000000000}"/>
-          </ac:spMkLst>
-        </pc:spChg>
-        <pc:spChg chg="mod">
-          <ac:chgData name="Nahuel Roel" userId="f57eb92d7f62e27b" providerId="LiveId" clId="{1698397B-2804-4513-BF38-7951CB4798F0}" dt="2026-09-26T17:37:39.692" v="251" actId="790"/>
-          <ac:spMkLst>
-            <pc:docMk/>
-            <pc:sldMk cId="0" sldId="260"/>
-            <ac:spMk id="7" creationId="{00000000-0000-0000-0000-000000000000}"/>
-          </ac:spMkLst>
-        </pc:spChg>
-        <pc:spChg chg="mod">
-          <ac:chgData name="Nahuel Roel" userId="f57eb92d7f62e27b" providerId="LiveId" clId="{1698397B-2804-4513-BF38-7951CB4798F0}" dt="2026-09-26T17:37:39.692" v="251" actId="790"/>
-          <ac:spMkLst>
-            <pc:docMk/>
-            <pc:sldMk cId="0" sldId="260"/>
-            <ac:spMk id="8" creationId="{00000000-0000-0000-0000-000000000000}"/>
-          </ac:spMkLst>
-        </pc:spChg>
-        <pc:spChg chg="mod">
-          <ac:chgData name="Nahuel Roel" userId="f57eb92d7f62e27b" providerId="LiveId" clId="{1698397B-2804-4513-BF38-7951CB4798F0}" dt="2026-09-26T17:37:39.692" v="251" actId="790"/>
-          <ac:spMkLst>
-            <pc:docMk/>
-            <pc:sldMk cId="0" sldId="260"/>
-            <ac:spMk id="18" creationId="{00000000-0000-0000-0000-000000000000}"/>
-          </ac:spMkLst>
-        </pc:spChg>
-        <pc:spChg chg="mod">
-          <ac:chgData name="Nahuel Roel" userId="f57eb92d7f62e27b" providerId="LiveId" clId="{1698397B-2804-4513-BF38-7951CB4798F0}" dt="2026-09-26T17:37:39.692" v="251" actId="790"/>
-          <ac:spMkLst>
-            <pc:docMk/>
-            <pc:sldMk cId="0" sldId="260"/>
-            <ac:spMk id="19" creationId="{00000000-0000-0000-0000-000000000000}"/>
-          </ac:spMkLst>
-        </pc:spChg>
-        <pc:spChg chg="mod">
-          <ac:chgData name="Nahuel Roel" userId="f57eb92d7f62e27b" providerId="LiveId" clId="{1698397B-2804-4513-BF38-7951CB4798F0}" dt="2026-09-26T17:37:39.692" v="251" actId="790"/>
-          <ac:spMkLst>
-            <pc:docMk/>
-            <pc:sldMk cId="0" sldId="260"/>
-            <ac:spMk id="21" creationId="{00000000-0000-0000-0000-000000000000}"/>
-          </ac:spMkLst>
-        </pc:spChg>
-        <pc:spChg chg="mod">
-          <ac:chgData name="Nahuel Roel" userId="f57eb92d7f62e27b" providerId="LiveId" clId="{1698397B-2804-4513-BF38-7951CB4798F0}" dt="2026-09-26T17:37:39.692" v="251" actId="790"/>
-          <ac:spMkLst>
-            <pc:docMk/>
-            <pc:sldMk cId="0" sldId="260"/>
-            <ac:spMk id="28" creationId="{00000000-0000-0000-0000-000000000000}"/>
-          </ac:spMkLst>
-        </pc:spChg>
-      </pc:sldChg>
-      <pc:sldChg chg="delSp modSp mod ord">
-        <pc:chgData name="Nahuel Roel" userId="f57eb92d7f62e27b" providerId="LiveId" clId="{1698397B-2804-4513-BF38-7951CB4798F0}" dt="2026-09-26T17:55:17.751" v="2593" actId="20577"/>
-        <pc:sldMkLst>
-          <pc:docMk/>
-          <pc:sldMk cId="0" sldId="261"/>
-        </pc:sldMkLst>
-        <pc:spChg chg="mod">
-          <ac:chgData name="Nahuel Roel" userId="f57eb92d7f62e27b" providerId="LiveId" clId="{1698397B-2804-4513-BF38-7951CB4798F0}" dt="2026-09-26T17:51:54.137" v="2538" actId="20577"/>
-          <ac:spMkLst>
-            <pc:docMk/>
-            <pc:sldMk cId="0" sldId="261"/>
-            <ac:spMk id="2" creationId="{00000000-0000-0000-0000-000000000000}"/>
-          </ac:spMkLst>
-        </pc:spChg>
-        <pc:spChg chg="del mod">
-          <ac:chgData name="Nahuel Roel" userId="f57eb92d7f62e27b" providerId="LiveId" clId="{1698397B-2804-4513-BF38-7951CB4798F0}" dt="2026-09-26T17:50:22.409" v="2372" actId="478"/>
-          <ac:spMkLst>
-            <pc:docMk/>
-            <pc:sldMk cId="0" sldId="261"/>
-            <ac:spMk id="3" creationId="{00000000-0000-0000-0000-000000000000}"/>
-          </ac:spMkLst>
-        </pc:spChg>
-        <pc:spChg chg="mod">
-          <ac:chgData name="Nahuel Roel" userId="f57eb92d7f62e27b" providerId="LiveId" clId="{1698397B-2804-4513-BF38-7951CB4798F0}" dt="2026-09-26T17:37:39.692" v="251" actId="790"/>
-          <ac:spMkLst>
-            <pc:docMk/>
-            <pc:sldMk cId="0" sldId="261"/>
-            <ac:spMk id="4" creationId="{00000000-0000-0000-0000-000000000000}"/>
-          </ac:spMkLst>
-        </pc:spChg>
-        <pc:spChg chg="mod">
-          <ac:chgData name="Nahuel Roel" userId="f57eb92d7f62e27b" providerId="LiveId" clId="{1698397B-2804-4513-BF38-7951CB4798F0}" dt="2026-09-26T17:37:39.692" v="251" actId="790"/>
-          <ac:spMkLst>
-            <pc:docMk/>
-            <pc:sldMk cId="0" sldId="261"/>
-            <ac:spMk id="5" creationId="{00000000-0000-0000-0000-000000000000}"/>
-          </ac:spMkLst>
-        </pc:spChg>
-        <pc:spChg chg="mod">
-          <ac:chgData name="Nahuel Roel" userId="f57eb92d7f62e27b" providerId="LiveId" clId="{1698397B-2804-4513-BF38-7951CB4798F0}" dt="2026-09-26T17:55:17.751" v="2593" actId="20577"/>
-          <ac:spMkLst>
-            <pc:docMk/>
-            <pc:sldMk cId="0" sldId="261"/>
-            <ac:spMk id="6" creationId="{00000000-0000-0000-0000-000000000000}"/>
-          </ac:spMkLst>
-        </pc:spChg>
-      </pc:sldChg>
-      <pc:sldChg chg="modSp del mod">
-        <pc:chgData name="Nahuel Roel" userId="f57eb92d7f62e27b" providerId="LiveId" clId="{1698397B-2804-4513-BF38-7951CB4798F0}" dt="2026-09-26T18:19:37.985" v="3154" actId="2696"/>
-        <pc:sldMkLst>
-          <pc:docMk/>
-          <pc:sldMk cId="0" sldId="262"/>
-        </pc:sldMkLst>
-        <pc:spChg chg="mod">
-          <ac:chgData name="Nahuel Roel" userId="f57eb92d7f62e27b" providerId="LiveId" clId="{1698397B-2804-4513-BF38-7951CB4798F0}" dt="2026-09-26T17:37:39.692" v="251" actId="790"/>
-          <ac:spMkLst>
-            <pc:docMk/>
-            <pc:sldMk cId="0" sldId="262"/>
-            <ac:spMk id="2" creationId="{00000000-0000-0000-0000-000000000000}"/>
-          </ac:spMkLst>
-        </pc:spChg>
-        <pc:spChg chg="mod">
-          <ac:chgData name="Nahuel Roel" userId="f57eb92d7f62e27b" providerId="LiveId" clId="{1698397B-2804-4513-BF38-7951CB4798F0}" dt="2026-09-26T17:37:39.692" v="251" actId="790"/>
-          <ac:spMkLst>
-            <pc:docMk/>
-            <pc:sldMk cId="0" sldId="262"/>
-            <ac:spMk id="3" creationId="{00000000-0000-0000-0000-000000000000}"/>
-          </ac:spMkLst>
-        </pc:spChg>
-        <pc:spChg chg="mod">
-          <ac:chgData name="Nahuel Roel" userId="f57eb92d7f62e27b" providerId="LiveId" clId="{1698397B-2804-4513-BF38-7951CB4798F0}" dt="2026-09-26T17:37:39.692" v="251" actId="790"/>
-          <ac:spMkLst>
-            <pc:docMk/>
-            <pc:sldMk cId="0" sldId="262"/>
-            <ac:spMk id="4" creationId="{00000000-0000-0000-0000-000000000000}"/>
-          </ac:spMkLst>
-        </pc:spChg>
-        <pc:spChg chg="mod">
-          <ac:chgData name="Nahuel Roel" userId="f57eb92d7f62e27b" providerId="LiveId" clId="{1698397B-2804-4513-BF38-7951CB4798F0}" dt="2026-09-26T17:37:39.692" v="251" actId="790"/>
-          <ac:spMkLst>
-            <pc:docMk/>
-            <pc:sldMk cId="0" sldId="262"/>
-            <ac:spMk id="5" creationId="{00000000-0000-0000-0000-000000000000}"/>
-          </ac:spMkLst>
-        </pc:spChg>
-      </pc:sldChg>
       <pc:sldChg chg="delSp modSp mod">
         <pc:chgData name="Nahuel Roel" userId="f57eb92d7f62e27b" providerId="LiveId" clId="{1698397B-2804-4513-BF38-7951CB4798F0}" dt="2026-09-26T19:05:44.831" v="3536"/>
         <pc:sldMkLst>
           <pc:docMk/>
           <pc:sldMk cId="0" sldId="263"/>
         </pc:sldMkLst>
-        <pc:spChg chg="del mod">
-          <ac:chgData name="Nahuel Roel" userId="f57eb92d7f62e27b" providerId="LiveId" clId="{1698397B-2804-4513-BF38-7951CB4798F0}" dt="2026-09-26T18:18:42.429" v="3054" actId="478"/>
-          <ac:spMkLst>
-            <pc:docMk/>
-            <pc:sldMk cId="0" sldId="263"/>
-            <ac:spMk id="2" creationId="{00000000-0000-0000-0000-000000000000}"/>
-          </ac:spMkLst>
-        </pc:spChg>
         <pc:spChg chg="mod">
           <ac:chgData name="Nahuel Roel" userId="f57eb92d7f62e27b" providerId="LiveId" clId="{1698397B-2804-4513-BF38-7951CB4798F0}" dt="2026-09-26T19:05:44.831" v="3536"/>
           <ac:spMkLst>
             <pc:docMk/>
             <pc:sldMk cId="0" sldId="263"/>
             <ac:spMk id="3" creationId="{00000000-0000-0000-0000-000000000000}"/>
-          </ac:spMkLst>
-        </pc:spChg>
-        <pc:spChg chg="del mod">
-          <ac:chgData name="Nahuel Roel" userId="f57eb92d7f62e27b" providerId="LiveId" clId="{1698397B-2804-4513-BF38-7951CB4798F0}" dt="2026-09-26T18:19:19.856" v="3152" actId="478"/>
-          <ac:spMkLst>
-            <pc:docMk/>
-            <pc:sldMk cId="0" sldId="263"/>
-            <ac:spMk id="4" creationId="{00000000-0000-0000-0000-000000000000}"/>
           </ac:spMkLst>
         </pc:spChg>
       </pc:sldChg>
@@ -730,14 +494,6 @@
             <pc:docMk/>
             <pc:sldMk cId="2241413046" sldId="264"/>
             <ac:spMk id="2" creationId="{CA5FB64A-223F-F627-6E58-9363C7C407B0}"/>
-          </ac:spMkLst>
-        </pc:spChg>
-        <pc:spChg chg="del">
-          <ac:chgData name="Nahuel Roel" userId="f57eb92d7f62e27b" providerId="LiveId" clId="{1698397B-2804-4513-BF38-7951CB4798F0}" dt="2026-09-26T17:43:25.075" v="1155" actId="478"/>
-          <ac:spMkLst>
-            <pc:docMk/>
-            <pc:sldMk cId="2241413046" sldId="264"/>
-            <ac:spMk id="4" creationId="{A27F2FEF-1B47-A5C9-523D-9444FD499FDF}"/>
           </ac:spMkLst>
         </pc:spChg>
         <pc:spChg chg="mod">
@@ -901,42 +657,12 @@
           </ac:spMkLst>
         </pc:spChg>
       </pc:sldChg>
-      <pc:sldChg chg="add del">
-        <pc:chgData name="Nahuel Roel" userId="f57eb92d7f62e27b" providerId="LiveId" clId="{1698397B-2804-4513-BF38-7951CB4798F0}" dt="2026-09-26T18:18:32.374" v="3053" actId="47"/>
-        <pc:sldMkLst>
-          <pc:docMk/>
-          <pc:sldMk cId="3766223662" sldId="265"/>
-        </pc:sldMkLst>
-      </pc:sldChg>
-      <pc:sldChg chg="add del">
-        <pc:chgData name="Nahuel Roel" userId="f57eb92d7f62e27b" providerId="LiveId" clId="{1698397B-2804-4513-BF38-7951CB4798F0}" dt="2026-09-26T18:34:44.515" v="3156" actId="47"/>
-        <pc:sldMkLst>
-          <pc:docMk/>
-          <pc:sldMk cId="1983982594" sldId="266"/>
-        </pc:sldMkLst>
-      </pc:sldChg>
       <pc:sldChg chg="addSp delSp modSp add mod ord">
         <pc:chgData name="Nahuel Roel" userId="f57eb92d7f62e27b" providerId="LiveId" clId="{1698397B-2804-4513-BF38-7951CB4798F0}" dt="2026-09-26T18:08:52.175" v="2857" actId="403"/>
         <pc:sldMkLst>
           <pc:docMk/>
           <pc:sldMk cId="2606275426" sldId="267"/>
         </pc:sldMkLst>
-        <pc:spChg chg="del">
-          <ac:chgData name="Nahuel Roel" userId="f57eb92d7f62e27b" providerId="LiveId" clId="{1698397B-2804-4513-BF38-7951CB4798F0}" dt="2026-09-26T18:02:14.930" v="2597" actId="478"/>
-          <ac:spMkLst>
-            <pc:docMk/>
-            <pc:sldMk cId="2606275426" sldId="267"/>
-            <ac:spMk id="3" creationId="{A2122E19-060A-205C-4A63-CBF421A8AD85}"/>
-          </ac:spMkLst>
-        </pc:spChg>
-        <pc:spChg chg="del">
-          <ac:chgData name="Nahuel Roel" userId="f57eb92d7f62e27b" providerId="LiveId" clId="{1698397B-2804-4513-BF38-7951CB4798F0}" dt="2026-09-26T18:04:04.355" v="2616" actId="478"/>
-          <ac:spMkLst>
-            <pc:docMk/>
-            <pc:sldMk cId="2606275426" sldId="267"/>
-            <ac:spMk id="4" creationId="{1F5A23AE-CA9F-2158-55B6-FD7AACD1F750}"/>
-          </ac:spMkLst>
-        </pc:spChg>
         <pc:spChg chg="mod">
           <ac:chgData name="Nahuel Roel" userId="f57eb92d7f62e27b" providerId="LiveId" clId="{1698397B-2804-4513-BF38-7951CB4798F0}" dt="2026-09-26T18:05:08.279" v="2687" actId="1076"/>
           <ac:spMkLst>
@@ -967,150 +693,6 @@
             <pc:docMk/>
             <pc:sldMk cId="2606275426" sldId="267"/>
             <ac:spMk id="10" creationId="{77049FC0-9064-9756-D31B-1D1241163575}"/>
-          </ac:spMkLst>
-        </pc:spChg>
-        <pc:spChg chg="del">
-          <ac:chgData name="Nahuel Roel" userId="f57eb92d7f62e27b" providerId="LiveId" clId="{1698397B-2804-4513-BF38-7951CB4798F0}" dt="2026-09-26T18:04:33.740" v="2672" actId="478"/>
-          <ac:spMkLst>
-            <pc:docMk/>
-            <pc:sldMk cId="2606275426" sldId="267"/>
-            <ac:spMk id="11" creationId="{1F0D57E1-6526-CC03-09B8-3468D6B90F02}"/>
-          </ac:spMkLst>
-        </pc:spChg>
-        <pc:spChg chg="del">
-          <ac:chgData name="Nahuel Roel" userId="f57eb92d7f62e27b" providerId="LiveId" clId="{1698397B-2804-4513-BF38-7951CB4798F0}" dt="2026-09-26T18:03:57.148" v="2611" actId="478"/>
-          <ac:spMkLst>
-            <pc:docMk/>
-            <pc:sldMk cId="2606275426" sldId="267"/>
-            <ac:spMk id="12" creationId="{DEE1F0CA-EED1-5302-CF4B-192F3DC35B06}"/>
-          </ac:spMkLst>
-        </pc:spChg>
-        <pc:spChg chg="del">
-          <ac:chgData name="Nahuel Roel" userId="f57eb92d7f62e27b" providerId="LiveId" clId="{1698397B-2804-4513-BF38-7951CB4798F0}" dt="2026-09-26T18:03:53.703" v="2608" actId="478"/>
-          <ac:spMkLst>
-            <pc:docMk/>
-            <pc:sldMk cId="2606275426" sldId="267"/>
-            <ac:spMk id="13" creationId="{FBF062E1-4B1F-2BB3-BCF1-AA3BCFE85501}"/>
-          </ac:spMkLst>
-        </pc:spChg>
-        <pc:spChg chg="del">
-          <ac:chgData name="Nahuel Roel" userId="f57eb92d7f62e27b" providerId="LiveId" clId="{1698397B-2804-4513-BF38-7951CB4798F0}" dt="2026-09-26T18:03:54.721" v="2609" actId="478"/>
-          <ac:spMkLst>
-            <pc:docMk/>
-            <pc:sldMk cId="2606275426" sldId="267"/>
-            <ac:spMk id="14" creationId="{D16F2CF2-5782-9BFE-2106-2DEF0CA18729}"/>
-          </ac:spMkLst>
-        </pc:spChg>
-        <pc:spChg chg="del">
-          <ac:chgData name="Nahuel Roel" userId="f57eb92d7f62e27b" providerId="LiveId" clId="{1698397B-2804-4513-BF38-7951CB4798F0}" dt="2026-09-26T18:03:55.659" v="2610" actId="478"/>
-          <ac:spMkLst>
-            <pc:docMk/>
-            <pc:sldMk cId="2606275426" sldId="267"/>
-            <ac:spMk id="15" creationId="{6BCB51A0-02E0-D97C-F91E-83207CE692F9}"/>
-          </ac:spMkLst>
-        </pc:spChg>
-        <pc:spChg chg="del">
-          <ac:chgData name="Nahuel Roel" userId="f57eb92d7f62e27b" providerId="LiveId" clId="{1698397B-2804-4513-BF38-7951CB4798F0}" dt="2026-09-26T18:03:58.670" v="2612" actId="478"/>
-          <ac:spMkLst>
-            <pc:docMk/>
-            <pc:sldMk cId="2606275426" sldId="267"/>
-            <ac:spMk id="16" creationId="{7DA21860-8F7D-5D93-A981-076B5A79DEBC}"/>
-          </ac:spMkLst>
-        </pc:spChg>
-        <pc:spChg chg="del">
-          <ac:chgData name="Nahuel Roel" userId="f57eb92d7f62e27b" providerId="LiveId" clId="{1698397B-2804-4513-BF38-7951CB4798F0}" dt="2026-09-26T18:04:39.383" v="2674" actId="478"/>
-          <ac:spMkLst>
-            <pc:docMk/>
-            <pc:sldMk cId="2606275426" sldId="267"/>
-            <ac:spMk id="17" creationId="{2813E8C9-AAA9-B7E9-290F-BD0A2A89C933}"/>
-          </ac:spMkLst>
-        </pc:spChg>
-        <pc:spChg chg="del">
-          <ac:chgData name="Nahuel Roel" userId="f57eb92d7f62e27b" providerId="LiveId" clId="{1698397B-2804-4513-BF38-7951CB4798F0}" dt="2026-09-26T18:04:05.371" v="2618" actId="478"/>
-          <ac:spMkLst>
-            <pc:docMk/>
-            <pc:sldMk cId="2606275426" sldId="267"/>
-            <ac:spMk id="18" creationId="{C8BE1838-C627-FCBD-FD2F-F2CCD2079FFF}"/>
-          </ac:spMkLst>
-        </pc:spChg>
-        <pc:spChg chg="del">
-          <ac:chgData name="Nahuel Roel" userId="f57eb92d7f62e27b" providerId="LiveId" clId="{1698397B-2804-4513-BF38-7951CB4798F0}" dt="2026-09-26T18:04:04.956" v="2617" actId="478"/>
-          <ac:spMkLst>
-            <pc:docMk/>
-            <pc:sldMk cId="2606275426" sldId="267"/>
-            <ac:spMk id="19" creationId="{B57E556F-D42A-2419-B0DD-26D69BFA5CD5}"/>
-          </ac:spMkLst>
-        </pc:spChg>
-        <pc:spChg chg="del">
-          <ac:chgData name="Nahuel Roel" userId="f57eb92d7f62e27b" providerId="LiveId" clId="{1698397B-2804-4513-BF38-7951CB4798F0}" dt="2026-09-26T18:04:00.983" v="2613" actId="478"/>
-          <ac:spMkLst>
-            <pc:docMk/>
-            <pc:sldMk cId="2606275426" sldId="267"/>
-            <ac:spMk id="20" creationId="{2E0A0A77-532F-89B8-7735-78A90B8D6BA7}"/>
-          </ac:spMkLst>
-        </pc:spChg>
-        <pc:spChg chg="del">
-          <ac:chgData name="Nahuel Roel" userId="f57eb92d7f62e27b" providerId="LiveId" clId="{1698397B-2804-4513-BF38-7951CB4798F0}" dt="2026-09-26T18:04:01.943" v="2614" actId="478"/>
-          <ac:spMkLst>
-            <pc:docMk/>
-            <pc:sldMk cId="2606275426" sldId="267"/>
-            <ac:spMk id="21" creationId="{0996CA8B-456A-498F-34DB-28D5622431DC}"/>
-          </ac:spMkLst>
-        </pc:spChg>
-        <pc:spChg chg="del">
-          <ac:chgData name="Nahuel Roel" userId="f57eb92d7f62e27b" providerId="LiveId" clId="{1698397B-2804-4513-BF38-7951CB4798F0}" dt="2026-09-26T18:04:03.394" v="2615" actId="478"/>
-          <ac:spMkLst>
-            <pc:docMk/>
-            <pc:sldMk cId="2606275426" sldId="267"/>
-            <ac:spMk id="22" creationId="{9C0FAE26-0147-B1B1-4691-ECB5DD975872}"/>
-          </ac:spMkLst>
-        </pc:spChg>
-        <pc:spChg chg="del">
-          <ac:chgData name="Nahuel Roel" userId="f57eb92d7f62e27b" providerId="LiveId" clId="{1698397B-2804-4513-BF38-7951CB4798F0}" dt="2026-09-26T18:04:36.518" v="2673" actId="478"/>
-          <ac:spMkLst>
-            <pc:docMk/>
-            <pc:sldMk cId="2606275426" sldId="267"/>
-            <ac:spMk id="23" creationId="{F5B2CB47-CE48-CA68-5093-96C0B3B17B15}"/>
-          </ac:spMkLst>
-        </pc:spChg>
-        <pc:spChg chg="del">
-          <ac:chgData name="Nahuel Roel" userId="f57eb92d7f62e27b" providerId="LiveId" clId="{1698397B-2804-4513-BF38-7951CB4798F0}" dt="2026-09-26T18:02:37.962" v="2606" actId="478"/>
-          <ac:spMkLst>
-            <pc:docMk/>
-            <pc:sldMk cId="2606275426" sldId="267"/>
-            <ac:spMk id="24" creationId="{16D2187B-DB9F-C944-CD98-2ACDE46C0106}"/>
-          </ac:spMkLst>
-        </pc:spChg>
-        <pc:spChg chg="del mod">
-          <ac:chgData name="Nahuel Roel" userId="f57eb92d7f62e27b" providerId="LiveId" clId="{1698397B-2804-4513-BF38-7951CB4798F0}" dt="2026-09-26T18:02:36.588" v="2605" actId="478"/>
-          <ac:spMkLst>
-            <pc:docMk/>
-            <pc:sldMk cId="2606275426" sldId="267"/>
-            <ac:spMk id="25" creationId="{4C4A081E-F2A4-6C23-69C4-0642A77667BC}"/>
-          </ac:spMkLst>
-        </pc:spChg>
-        <pc:spChg chg="del">
-          <ac:chgData name="Nahuel Roel" userId="f57eb92d7f62e27b" providerId="LiveId" clId="{1698397B-2804-4513-BF38-7951CB4798F0}" dt="2026-09-26T18:02:32.194" v="2602" actId="478"/>
-          <ac:spMkLst>
-            <pc:docMk/>
-            <pc:sldMk cId="2606275426" sldId="267"/>
-            <ac:spMk id="26" creationId="{AD91B358-3E0A-C13B-D9BA-7C47A8058FC1}"/>
-          </ac:spMkLst>
-        </pc:spChg>
-        <pc:spChg chg="del">
-          <ac:chgData name="Nahuel Roel" userId="f57eb92d7f62e27b" providerId="LiveId" clId="{1698397B-2804-4513-BF38-7951CB4798F0}" dt="2026-09-26T18:02:33.321" v="2603" actId="478"/>
-          <ac:spMkLst>
-            <pc:docMk/>
-            <pc:sldMk cId="2606275426" sldId="267"/>
-            <ac:spMk id="27" creationId="{FD31C397-8204-4732-ED6E-6187CC58B44F}"/>
-          </ac:spMkLst>
-        </pc:spChg>
-        <pc:spChg chg="del">
-          <ac:chgData name="Nahuel Roel" userId="f57eb92d7f62e27b" providerId="LiveId" clId="{1698397B-2804-4513-BF38-7951CB4798F0}" dt="2026-09-26T18:02:35.117" v="2604" actId="478"/>
-          <ac:spMkLst>
-            <pc:docMk/>
-            <pc:sldMk cId="2606275426" sldId="267"/>
-            <ac:spMk id="28" creationId="{72EC7132-828A-780E-0240-DD04C8561AAB}"/>
           </ac:spMkLst>
         </pc:spChg>
         <pc:spChg chg="add mod">
@@ -1215,28 +797,12 @@
             <ac:spMk id="8" creationId="{01125F25-23D4-B66D-3E30-D33E1CD4083F}"/>
           </ac:spMkLst>
         </pc:spChg>
-        <pc:spChg chg="del">
-          <ac:chgData name="Nahuel Roel" userId="f57eb92d7f62e27b" providerId="LiveId" clId="{1698397B-2804-4513-BF38-7951CB4798F0}" dt="2026-09-26T18:16:47.994" v="2994" actId="478"/>
-          <ac:spMkLst>
-            <pc:docMk/>
-            <pc:sldMk cId="2287114499" sldId="269"/>
-            <ac:spMk id="9" creationId="{BD0760E0-98F6-3208-ED5B-DB03FE9A76BF}"/>
-          </ac:spMkLst>
-        </pc:spChg>
         <pc:spChg chg="mod">
           <ac:chgData name="Nahuel Roel" userId="f57eb92d7f62e27b" providerId="LiveId" clId="{1698397B-2804-4513-BF38-7951CB4798F0}" dt="2026-09-26T18:17:51.245" v="3046" actId="20577"/>
           <ac:spMkLst>
             <pc:docMk/>
             <pc:sldMk cId="2287114499" sldId="269"/>
             <ac:spMk id="10" creationId="{3F05B35A-9777-E593-0FB8-3B4C0E641150}"/>
-          </ac:spMkLst>
-        </pc:spChg>
-        <pc:spChg chg="del mod">
-          <ac:chgData name="Nahuel Roel" userId="f57eb92d7f62e27b" providerId="LiveId" clId="{1698397B-2804-4513-BF38-7951CB4798F0}" dt="2026-09-26T18:16:25.239" v="2974" actId="478"/>
-          <ac:spMkLst>
-            <pc:docMk/>
-            <pc:sldMk cId="2287114499" sldId="269"/>
-            <ac:spMk id="30" creationId="{70C83168-F75F-8452-D13F-37A9D36EE95E}"/>
           </ac:spMkLst>
         </pc:spChg>
         <pc:spChg chg="mod">
@@ -1262,14 +828,6 @@
             <ac:spMk id="2" creationId="{88D3ACF3-B150-B335-2F68-0E72F7D93AA7}"/>
           </ac:spMkLst>
         </pc:spChg>
-        <pc:spChg chg="del">
-          <ac:chgData name="Nahuel Roel" userId="f57eb92d7f62e27b" providerId="LiveId" clId="{1698397B-2804-4513-BF38-7951CB4798F0}" dt="2026-09-26T18:37:05.387" v="3462" actId="478"/>
-          <ac:spMkLst>
-            <pc:docMk/>
-            <pc:sldMk cId="3901877764" sldId="270"/>
-            <ac:spMk id="4" creationId="{B07F8C67-FCF7-5367-E0DF-760285B00AD9}"/>
-          </ac:spMkLst>
-        </pc:spChg>
         <pc:spChg chg="mod">
           <ac:chgData name="Nahuel Roel" userId="f57eb92d7f62e27b" providerId="LiveId" clId="{1698397B-2804-4513-BF38-7951CB4798F0}" dt="2026-09-27T00:02:14.478" v="3872" actId="20577"/>
           <ac:spMkLst>
@@ -1293,20 +851,84 @@
             <ac:spMk id="5" creationId="{42B39C4F-F6CB-7289-3796-A9349E70E62F}"/>
           </ac:spMkLst>
         </pc:spChg>
-        <pc:spChg chg="del">
-          <ac:chgData name="Nahuel Roel" userId="f57eb92d7f62e27b" providerId="LiveId" clId="{1698397B-2804-4513-BF38-7951CB4798F0}" dt="2026-09-26T18:37:57.291" v="3464" actId="478"/>
-          <ac:spMkLst>
-            <pc:docMk/>
-            <pc:sldMk cId="2543718561" sldId="271"/>
-            <ac:spMk id="6" creationId="{CC8E4D1F-454A-2D06-6611-6A9810D3F5AE}"/>
-          </ac:spMkLst>
-        </pc:spChg>
         <pc:picChg chg="add mod modCrop">
           <ac:chgData name="Nahuel Roel" userId="f57eb92d7f62e27b" providerId="LiveId" clId="{1698397B-2804-4513-BF38-7951CB4798F0}" dt="2026-09-26T18:39:16.433" v="3480" actId="1076"/>
           <ac:picMkLst>
             <pc:docMk/>
             <pc:sldMk cId="2543718561" sldId="271"/>
             <ac:picMk id="4" creationId="{FE7350AD-56A0-2E40-8E5D-B8E071AEABC2}"/>
+          </ac:picMkLst>
+        </pc:picChg>
+      </pc:sldChg>
+    </pc:docChg>
+  </pc:docChgLst>
+  <pc:docChgLst>
+    <pc:chgData name="Nahuel Roel" userId="f57eb92d7f62e27b" providerId="LiveId" clId="{FBA21D36-C460-42D2-B883-A1153B3C8AF6}"/>
+    <pc:docChg chg="custSel addSld modSld">
+      <pc:chgData name="Nahuel Roel" userId="f57eb92d7f62e27b" providerId="LiveId" clId="{FBA21D36-C460-42D2-B883-A1153B3C8AF6}" dt="2026-10-18T22:53:55.555" v="96" actId="1076"/>
+      <pc:docMkLst>
+        <pc:docMk/>
+      </pc:docMkLst>
+      <pc:sldChg chg="addSp delSp modSp add mod">
+        <pc:chgData name="Nahuel Roel" userId="f57eb92d7f62e27b" providerId="LiveId" clId="{FBA21D36-C460-42D2-B883-A1153B3C8AF6}" dt="2026-10-18T22:53:55.555" v="96" actId="1076"/>
+        <pc:sldMkLst>
+          <pc:docMk/>
+          <pc:sldMk cId="894793366" sldId="283"/>
+        </pc:sldMkLst>
+        <pc:spChg chg="mod">
+          <ac:chgData name="Nahuel Roel" userId="f57eb92d7f62e27b" providerId="LiveId" clId="{FBA21D36-C460-42D2-B883-A1153B3C8AF6}" dt="2026-10-18T22:52:42.974" v="40"/>
+          <ac:spMkLst>
+            <pc:docMk/>
+            <pc:sldMk cId="894793366" sldId="283"/>
+            <ac:spMk id="2" creationId="{740D0576-CF0B-D304-5830-00968DA6E68F}"/>
+          </ac:spMkLst>
+        </pc:spChg>
+        <pc:spChg chg="del">
+          <ac:chgData name="Nahuel Roel" userId="f57eb92d7f62e27b" providerId="LiveId" clId="{FBA21D36-C460-42D2-B883-A1153B3C8AF6}" dt="2026-10-18T22:52:51.704" v="75" actId="478"/>
+          <ac:spMkLst>
+            <pc:docMk/>
+            <pc:sldMk cId="894793366" sldId="283"/>
+            <ac:spMk id="4" creationId="{E7542B36-5BC9-5C98-B4C3-90D3508B0DDA}"/>
+          </ac:spMkLst>
+        </pc:spChg>
+        <pc:spChg chg="mod">
+          <ac:chgData name="Nahuel Roel" userId="f57eb92d7f62e27b" providerId="LiveId" clId="{FBA21D36-C460-42D2-B883-A1153B3C8AF6}" dt="2026-10-18T22:51:56.017" v="2" actId="6549"/>
+          <ac:spMkLst>
+            <pc:docMk/>
+            <pc:sldMk cId="894793366" sldId="283"/>
+            <ac:spMk id="7" creationId="{BE7799E2-891C-E080-AF62-6365687F53CD}"/>
+          </ac:spMkLst>
+        </pc:spChg>
+        <pc:spChg chg="mod">
+          <ac:chgData name="Nahuel Roel" userId="f57eb92d7f62e27b" providerId="LiveId" clId="{FBA21D36-C460-42D2-B883-A1153B3C8AF6}" dt="2026-10-18T22:53:09.061" v="87" actId="404"/>
+          <ac:spMkLst>
+            <pc:docMk/>
+            <pc:sldMk cId="894793366" sldId="283"/>
+            <ac:spMk id="8" creationId="{A09DC744-6EDD-3786-3D96-786DF242C174}"/>
+          </ac:spMkLst>
+        </pc:spChg>
+        <pc:spChg chg="del mod">
+          <ac:chgData name="Nahuel Roel" userId="f57eb92d7f62e27b" providerId="LiveId" clId="{FBA21D36-C460-42D2-B883-A1153B3C8AF6}" dt="2026-10-18T22:53:11.280" v="88" actId="478"/>
+          <ac:spMkLst>
+            <pc:docMk/>
+            <pc:sldMk cId="894793366" sldId="283"/>
+            <ac:spMk id="10" creationId="{96CC2AA5-50C4-51F3-4086-C45E3E8B7D5E}"/>
+          </ac:spMkLst>
+        </pc:spChg>
+        <pc:spChg chg="mod">
+          <ac:chgData name="Nahuel Roel" userId="f57eb92d7f62e27b" providerId="LiveId" clId="{FBA21D36-C460-42D2-B883-A1153B3C8AF6}" dt="2026-10-18T22:53:55.555" v="96" actId="1076"/>
+          <ac:spMkLst>
+            <pc:docMk/>
+            <pc:sldMk cId="894793366" sldId="283"/>
+            <ac:spMk id="32" creationId="{B7E58599-E4CA-0220-24EA-DE96732ADEA4}"/>
+          </ac:spMkLst>
+        </pc:spChg>
+        <pc:picChg chg="add mod">
+          <ac:chgData name="Nahuel Roel" userId="f57eb92d7f62e27b" providerId="LiveId" clId="{FBA21D36-C460-42D2-B883-A1153B3C8AF6}" dt="2026-10-18T22:53:50.856" v="95" actId="1076"/>
+          <ac:picMkLst>
+            <pc:docMk/>
+            <pc:sldMk cId="894793366" sldId="283"/>
+            <ac:picMk id="9" creationId="{E38B869B-A34C-7776-39FB-D2F254A1FBFD}"/>
           </ac:picMkLst>
         </pc:picChg>
       </pc:sldChg>
@@ -1627,7 +1249,7 @@
           <a:p>
             <a:fld id="{F7021451-1387-4CA6-816F-3879F97B5CBC}" type="slidenum">
               <a:rPr lang="en-US"/>
-              <a:t>10</a:t>
+              <a:t>14</a:t>
             </a:fld>
             <a:endParaRPr lang="en-US"/>
           </a:p>
@@ -1742,7 +1364,7 @@
           <a:p>
             <a:fld id="{F7021451-1387-4CA6-816F-3879F97B5CBC}" type="slidenum">
               <a:rPr lang="en-US"/>
-              <a:t>11</a:t>
+              <a:t>15</a:t>
             </a:fld>
             <a:endParaRPr lang="en-US"/>
           </a:p>
@@ -1833,7 +1455,7 @@
           <a:p>
             <a:fld id="{F7021451-1387-4CA6-816F-3879F97B5CBC}" type="slidenum">
               <a:rPr lang="en-US"/>
-              <a:t>12</a:t>
+              <a:t>23</a:t>
             </a:fld>
             <a:endParaRPr lang="en-US"/>
           </a:p>
@@ -2240,7 +1862,7 @@
 </p:notes>
 </file>
 
-<file path=ppt/notesSlides/notesSlide7.xml><?xml version="1.0" encoding="utf-8"?>
+<file path=ppt/notesSlides/notesSlide6.xml><?xml version="1.0" encoding="utf-8"?>
 <p:notes xmlns:a="http://schemas.openxmlformats.org/drawingml/2006/main" xmlns:r="http://schemas.openxmlformats.org/officeDocument/2006/relationships" xmlns:p="http://schemas.openxmlformats.org/presentationml/2006/main">
   <p:cSld>
     <p:spTree>
@@ -2336,7 +1958,7 @@
           <a:p>
             <a:fld id="{F7021451-1387-4CA6-816F-3879F97B5CBC}" type="slidenum">
               <a:rPr lang="en-US"/>
-              <a:t>7</a:t>
+              <a:t>6</a:t>
             </a:fld>
             <a:endParaRPr lang="en-US"/>
           </a:p>
@@ -2355,7 +1977,7 @@
 </p:notes>
 </file>
 
-<file path=ppt/notesSlides/notesSlide8.xml><?xml version="1.0" encoding="utf-8"?>
+<file path=ppt/notesSlides/notesSlide7.xml><?xml version="1.0" encoding="utf-8"?>
 <p:notes xmlns:a="http://schemas.openxmlformats.org/drawingml/2006/main" xmlns:r="http://schemas.openxmlformats.org/officeDocument/2006/relationships" xmlns:p="http://schemas.openxmlformats.org/presentationml/2006/main">
   <p:cSld>
     <p:spTree>
@@ -2451,7 +2073,7 @@
           <a:p>
             <a:fld id="{F7021451-1387-4CA6-816F-3879F97B5CBC}" type="slidenum">
               <a:rPr lang="en-US"/>
-              <a:t>8</a:t>
+              <a:t>7</a:t>
             </a:fld>
             <a:endParaRPr lang="en-US"/>
           </a:p>
@@ -2470,7 +2092,7 @@
 </p:notes>
 </file>
 
-<file path=ppt/notesSlides/notesSlide9.xml><?xml version="1.0" encoding="utf-8"?>
+<file path=ppt/notesSlides/notesSlide8.xml><?xml version="1.0" encoding="utf-8"?>
 <p:notes xmlns:a="http://schemas.openxmlformats.org/drawingml/2006/main" xmlns:r="http://schemas.openxmlformats.org/officeDocument/2006/relationships" xmlns:p="http://schemas.openxmlformats.org/presentationml/2006/main">
   <p:cSld>
     <p:spTree>
@@ -2566,7 +2188,7 @@
           <a:p>
             <a:fld id="{F7021451-1387-4CA6-816F-3879F97B5CBC}" type="slidenum">
               <a:rPr lang="en-US"/>
-              <a:t>9</a:t>
+              <a:t>8</a:t>
             </a:fld>
             <a:endParaRPr lang="en-US"/>
           </a:p>
@@ -2576,6 +2198,121 @@
     <p:extLst>
       <p:ext uri="{BB962C8B-B14F-4D97-AF65-F5344CB8AC3E}">
         <p14:creationId xmlns:p14="http://schemas.microsoft.com/office/powerpoint/2010/main" val="1836791409"/>
+      </p:ext>
+    </p:extLst>
+  </p:cSld>
+  <p:clrMapOvr>
+    <a:masterClrMapping/>
+  </p:clrMapOvr>
+</p:notes>
+</file>
+
+<file path=ppt/notesSlides/notesSlide9.xml><?xml version="1.0" encoding="utf-8"?>
+<p:notes xmlns:a="http://schemas.openxmlformats.org/drawingml/2006/main" xmlns:r="http://schemas.openxmlformats.org/officeDocument/2006/relationships" xmlns:p="http://schemas.openxmlformats.org/presentationml/2006/main">
+  <p:cSld>
+    <p:spTree>
+      <p:nvGrpSpPr>
+        <p:cNvPr id="1" name="">
+          <a:extLst>
+            <a:ext uri="{FF2B5EF4-FFF2-40B4-BE49-F238E27FC236}">
+              <a16:creationId xmlns:a16="http://schemas.microsoft.com/office/drawing/2014/main" id="{512A62BE-28DF-4FB9-0494-FD55C24947AA}"/>
+            </a:ext>
+          </a:extLst>
+        </p:cNvPr>
+        <p:cNvGrpSpPr/>
+        <p:nvPr/>
+      </p:nvGrpSpPr>
+      <p:grpSpPr>
+        <a:xfrm>
+          <a:off x="0" y="0"/>
+          <a:ext cx="0" cy="0"/>
+          <a:chOff x="0" y="0"/>
+          <a:chExt cx="0" cy="0"/>
+        </a:xfrm>
+      </p:grpSpPr>
+      <p:sp>
+        <p:nvSpPr>
+          <p:cNvPr id="2" name="Slide Image Placeholder 1">
+            <a:extLst>
+              <a:ext uri="{FF2B5EF4-FFF2-40B4-BE49-F238E27FC236}">
+                <a16:creationId xmlns:a16="http://schemas.microsoft.com/office/drawing/2014/main" id="{59372931-AFCE-1426-00B0-336C2337E022}"/>
+              </a:ext>
+            </a:extLst>
+          </p:cNvPr>
+          <p:cNvSpPr>
+            <a:spLocks noGrp="1" noRot="1" noChangeAspect="1"/>
+          </p:cNvSpPr>
+          <p:nvPr>
+            <p:ph type="sldImg"/>
+          </p:nvPr>
+        </p:nvSpPr>
+        <p:spPr/>
+        <p:txBody>
+          <a:bodyPr/>
+          <a:lstStyle/>
+          <a:p>
+            <a:endParaRPr lang="en-US"/>
+          </a:p>
+        </p:txBody>
+      </p:sp>
+      <p:sp>
+        <p:nvSpPr>
+          <p:cNvPr id="3" name="Notes Placeholder 2">
+            <a:extLst>
+              <a:ext uri="{FF2B5EF4-FFF2-40B4-BE49-F238E27FC236}">
+                <a16:creationId xmlns:a16="http://schemas.microsoft.com/office/drawing/2014/main" id="{7B9934A9-7AB2-60A3-A402-6C8E547B6A4A}"/>
+              </a:ext>
+            </a:extLst>
+          </p:cNvPr>
+          <p:cNvSpPr>
+            <a:spLocks noGrp="1"/>
+          </p:cNvSpPr>
+          <p:nvPr>
+            <p:ph type="body" idx="1"/>
+          </p:nvPr>
+        </p:nvSpPr>
+        <p:spPr/>
+        <p:txBody>
+          <a:bodyPr/>
+          <a:lstStyle/>
+          <a:p>
+            <a:endParaRPr lang="en-US" dirty="0"/>
+          </a:p>
+        </p:txBody>
+      </p:sp>
+      <p:sp>
+        <p:nvSpPr>
+          <p:cNvPr id="4" name="Slide Number Placeholder 3">
+            <a:extLst>
+              <a:ext uri="{FF2B5EF4-FFF2-40B4-BE49-F238E27FC236}">
+                <a16:creationId xmlns:a16="http://schemas.microsoft.com/office/drawing/2014/main" id="{4BC718C3-106C-8882-4235-130E13433727}"/>
+              </a:ext>
+            </a:extLst>
+          </p:cNvPr>
+          <p:cNvSpPr>
+            <a:spLocks noGrp="1"/>
+          </p:cNvSpPr>
+          <p:nvPr>
+            <p:ph type="sldNum" sz="quarter" idx="10"/>
+          </p:nvPr>
+        </p:nvSpPr>
+        <p:spPr/>
+        <p:txBody>
+          <a:bodyPr/>
+          <a:lstStyle/>
+          <a:p>
+            <a:fld id="{F7021451-1387-4CA6-816F-3879F97B5CBC}" type="slidenum">
+              <a:rPr lang="en-US"/>
+              <a:t>9</a:t>
+            </a:fld>
+            <a:endParaRPr lang="en-US"/>
+          </a:p>
+        </p:txBody>
+      </p:sp>
+    </p:spTree>
+    <p:extLst>
+      <p:ext uri="{BB962C8B-B14F-4D97-AF65-F5344CB8AC3E}">
+        <p14:creationId xmlns:p14="http://schemas.microsoft.com/office/powerpoint/2010/main" val="1686940858"/>
       </p:ext>
     </p:extLst>
   </p:cSld>
@@ -3121,7 +2858,7 @@
 </file>
 
 <file path=ppt/slides/slide10.xml><?xml version="1.0" encoding="utf-8"?>
-<p:sld xmlns:a="http://schemas.openxmlformats.org/drawingml/2006/main" xmlns:p="http://schemas.openxmlformats.org/presentationml/2006/main" xmlns:r="http://schemas.openxmlformats.org/officeDocument/2006/relationships">
+<p:sld xmlns:a="http://schemas.openxmlformats.org/drawingml/2006/main" xmlns:r="http://schemas.openxmlformats.org/officeDocument/2006/relationships" xmlns:p="http://schemas.openxmlformats.org/presentationml/2006/main">
   <p:cSld>
     <p:bg>
       <p:bgPr>
@@ -3137,7 +2874,14 @@
         <p:cNvGrpSpPr/>
         <p:nvPr/>
       </p:nvGrpSpPr>
-      <p:grpSpPr/>
+      <p:grpSpPr>
+        <a:xfrm>
+          <a:off x="0" y="0"/>
+          <a:ext cx="0" cy="0"/>
+          <a:chOff x="0" y="0"/>
+          <a:chExt cx="0" cy="0"/>
+        </a:xfrm>
+      </p:grpSpPr>
       <p:sp>
         <p:nvSpPr>
           <p:cNvPr id="2" name="Text 0">
@@ -3177,7 +2921,7 @@
                 <a:ea typeface="Oswald" pitchFamily="34" charset="-122"/>
                 <a:cs typeface="Oswald" pitchFamily="34" charset="-120"/>
               </a:rPr>
-              <a:t>Paso a paso (2)</a:t>
+              <a:t>Paso a paso (1)</a:t>
             </a:r>
             <a:endParaRPr lang="en-US" sz="3000" dirty="0"/>
           </a:p>
@@ -3304,7 +3048,7 @@
                 <a:ea typeface="Calibri" pitchFamily="34" charset="-122"/>
                 <a:cs typeface="Calibri" pitchFamily="34" charset="-120"/>
               </a:rPr>
-              <a:t>Trabajar en un proyecto</a:t>
+              <a:t>Dejar todo instalado</a:t>
             </a:r>
             <a:endParaRPr lang="en-US" sz="1300" dirty="0"/>
           </a:p>
@@ -3390,10 +3134,10 @@
                 <a:ea typeface="Calibri" pitchFamily="34" charset="-122"/>
                 <a:cs typeface="Calibri" pitchFamily="34" charset="-120"/>
               </a:rPr>
-              <a:t>Un proyecto es una carpeta con un archivo </a:t>
-            </a:r>
-            <a:r>
-              <a:rPr lang="es-ES" sz="1400" b="1" dirty="0" i="1">
+              <a:t>Primero R, después RStudio. Los paquetes se instalan una sola vez con </a:t>
+            </a:r>
+            <a:r>
+              <a:rPr lang="es-ES" sz="1400" b="1" i="1" dirty="0">
                 <a:solidFill>
                   <a:schemeClr val="bg1"/>
                 </a:solidFill>
@@ -3401,7 +3145,7 @@
                 <a:ea typeface="Calibri" pitchFamily="34" charset="-122"/>
                 <a:cs typeface="Calibri" pitchFamily="34" charset="-120"/>
               </a:rPr>
-              <a:t>.Rproj</a:t>
+              <a:t>install.packages()</a:t>
             </a:r>
             <a:r>
               <a:rPr lang="es-ES" sz="1400" b="1" dirty="0">
@@ -3412,29 +3156,7 @@
                 <a:ea typeface="Calibri" pitchFamily="34" charset="-122"/>
                 <a:cs typeface="Calibri" pitchFamily="34" charset="-120"/>
               </a:rPr>
-              <a:t>. Mientras está abierto, R trabaja desde esa carpeta y rutas como </a:t>
-            </a:r>
-            <a:r>
-              <a:rPr lang="es-ES" sz="1400" b="1" dirty="0" i="1">
-                <a:solidFill>
-                  <a:schemeClr val="bg1"/>
-                </a:solidFill>
-                <a:latin typeface="Calibri" pitchFamily="34" charset="0"/>
-                <a:ea typeface="Calibri" pitchFamily="34" charset="-122"/>
-                <a:cs typeface="Calibri" pitchFamily="34" charset="-120"/>
-              </a:rPr>
-              <a:t>datos/</a:t>
-            </a:r>
-            <a:r>
-              <a:rPr lang="es-ES" sz="1400" b="1" dirty="0">
-                <a:solidFill>
-                  <a:schemeClr val="bg1"/>
-                </a:solidFill>
-                <a:latin typeface="Calibri" pitchFamily="34" charset="0"/>
-                <a:ea typeface="Calibri" pitchFamily="34" charset="-122"/>
-                <a:cs typeface="Calibri" pitchFamily="34" charset="-120"/>
-              </a:rPr>
-              <a:t> funcionan solas.</a:t>
+              <a:t>.</a:t>
             </a:r>
           </a:p>
           <a:p>
@@ -3457,10 +3179,10 @@
                 <a:ea typeface="Calibri" pitchFamily="34" charset="-122"/>
                 <a:cs typeface="Calibri" pitchFamily="34" charset="-120"/>
               </a:rPr>
-              <a:t>Su nombre aparece arriba a la derecha de RStudio. Si no está, </a:t>
-            </a:r>
-            <a:r>
-              <a:rPr lang="es-ES" sz="1400" b="1" dirty="0" i="1">
+              <a:t>Abrir el curso siempre desde el archivo </a:t>
+            </a:r>
+            <a:r>
+              <a:rPr lang="es-ES" sz="1400" b="1" i="1" dirty="0">
                 <a:solidFill>
                   <a:schemeClr val="bg1"/>
                 </a:solidFill>
@@ -3468,7 +3190,7 @@
                 <a:ea typeface="Calibri" pitchFamily="34" charset="-122"/>
                 <a:cs typeface="Calibri" pitchFamily="34" charset="-120"/>
               </a:rPr>
-              <a:t>File, Open Project</a:t>
+              <a:t>.Rproj</a:t>
             </a:r>
             <a:r>
               <a:rPr lang="es-ES" sz="1400" b="1" dirty="0">
@@ -3479,55 +3201,40 @@
                 <a:ea typeface="Calibri" pitchFamily="34" charset="-122"/>
                 <a:cs typeface="Calibri" pitchFamily="34" charset="-120"/>
               </a:rPr>
-              <a:t> y elegir </a:t>
-            </a:r>
-            <a:r>
-              <a:rPr lang="es-ES" sz="1400" b="1" dirty="0" i="1">
-                <a:solidFill>
-                  <a:schemeClr val="bg1"/>
-                </a:solidFill>
-                <a:latin typeface="Calibri" pitchFamily="34" charset="0"/>
-                <a:ea typeface="Calibri" pitchFamily="34" charset="-122"/>
-                <a:cs typeface="Calibri" pitchFamily="34" charset="-120"/>
-              </a:rPr>
-              <a:t>visualizacion_datos_shiny.Rproj</a:t>
-            </a:r>
-            <a:r>
-              <a:rPr lang="es-ES" sz="1400" b="1" dirty="0">
-                <a:solidFill>
-                  <a:schemeClr val="bg1"/>
-                </a:solidFill>
-                <a:latin typeface="Calibri" pitchFamily="34" charset="0"/>
-                <a:ea typeface="Calibri" pitchFamily="34" charset="-122"/>
-                <a:cs typeface="Calibri" pitchFamily="34" charset="-120"/>
-              </a:rPr>
-              <a:t>.</a:t>
+              <a:t>. Así R sabe dónde están los datos.</a:t>
             </a:r>
           </a:p>
         </p:txBody>
       </p:sp>
       <p:pic>
         <p:nvPicPr>
-          <p:cNvPr id="18" name="Picture 17" descr="cap1.png"/>
+          <p:cNvPr id="22" name="Picture 21" descr="p1.png"/>
           <p:cNvPicPr>
             <a:picLocks noChangeAspect="1"/>
           </p:cNvPicPr>
           <p:nvPr/>
         </p:nvPicPr>
         <p:blipFill>
-          <a:blip r:embed="rId5"/>
+          <a:blip r:embed="rId2"/>
           <a:stretch>
             <a:fillRect/>
           </a:stretch>
         </p:blipFill>
         <p:spPr>
           <a:xfrm>
-            <a:off x="4870731" y="1188720"/>
-            <a:ext cx="3608778" cy="3100000"/>
+            <a:off x="4434840" y="1668901"/>
+            <a:ext cx="4480560" cy="2102876"/>
           </a:xfrm>
           <a:prstGeom prst="rect">
             <a:avLst/>
           </a:prstGeom>
+          <a:ln w="76200">
+            <a:solidFill>
+              <a:schemeClr val="accent1">
+                <a:lumMod val="75000"/>
+              </a:schemeClr>
+            </a:solidFill>
+          </a:ln>
         </p:spPr>
       </p:pic>
     </p:spTree>
@@ -3539,7 +3246,7 @@
 </file>
 
 <file path=ppt/slides/slide11.xml><?xml version="1.0" encoding="utf-8"?>
-<p:sld xmlns:a="http://schemas.openxmlformats.org/drawingml/2006/main" xmlns:p="http://schemas.openxmlformats.org/presentationml/2006/main" xmlns:r="http://schemas.openxmlformats.org/officeDocument/2006/relationships">
+<p:sld xmlns:a="http://schemas.openxmlformats.org/drawingml/2006/main" xmlns:r="http://schemas.openxmlformats.org/officeDocument/2006/relationships" xmlns:p="http://schemas.openxmlformats.org/presentationml/2006/main">
   <p:cSld>
     <p:bg>
       <p:bgPr>
@@ -3555,10 +3262,23 @@
         <p:cNvGrpSpPr/>
         <p:nvPr/>
       </p:nvGrpSpPr>
-      <p:grpSpPr/>
-      <p:sp>
-        <p:nvSpPr>
-          <p:cNvPr id="2" name="Text 0"/>
+      <p:grpSpPr>
+        <a:xfrm>
+          <a:off x="0" y="0"/>
+          <a:ext cx="0" cy="0"/>
+          <a:chOff x="0" y="0"/>
+          <a:chExt cx="0" cy="0"/>
+        </a:xfrm>
+      </p:grpSpPr>
+      <p:sp>
+        <p:nvSpPr>
+          <p:cNvPr id="2" name="Text 0">
+            <a:extLst>
+              <a:ext uri="{FF2B5EF4-FFF2-40B4-BE49-F238E27FC236}">
+                <a16:creationId xmlns:a16="http://schemas.microsoft.com/office/drawing/2014/main" id="{45FBCF84-BF0C-00DD-1115-ECF03D12DDA6}"/>
+              </a:ext>
+            </a:extLst>
+          </p:cNvPr>
           <p:cNvSpPr txBox="1"/>
           <p:nvPr/>
         </p:nvSpPr>
@@ -3577,6 +3297,9 @@
           <a:bodyPr wrap="square" lIns="0" tIns="0" rIns="0" bIns="0" rtlCol="0" anchor="ctr"/>
           <a:lstStyle/>
           <a:p>
+            <a:pPr marL="0" indent="0">
+              <a:buNone/>
+            </a:pPr>
             <a:r>
               <a:rPr lang="en-US" sz="3000" b="1" dirty="0">
                 <a:solidFill>
@@ -3586,7 +3309,7 @@
                 <a:ea typeface="Oswald" pitchFamily="34" charset="-122"/>
                 <a:cs typeface="Oswald" pitchFamily="34" charset="-120"/>
               </a:rPr>
-              <a:t>Paso a paso (3)</a:t>
+              <a:t>Paso a paso (2)</a:t>
             </a:r>
             <a:endParaRPr lang="en-US" sz="3000" dirty="0"/>
           </a:p>
@@ -3594,7 +3317,13 @@
       </p:sp>
       <p:sp>
         <p:nvSpPr>
-          <p:cNvPr id="11" name="Shape 9"/>
+          <p:cNvPr id="11" name="Shape 9">
+            <a:extLst>
+              <a:ext uri="{FF2B5EF4-FFF2-40B4-BE49-F238E27FC236}">
+                <a16:creationId xmlns:a16="http://schemas.microsoft.com/office/drawing/2014/main" id="{1E4D2BBF-BB0F-7CF4-3842-6325D6A2CD35}"/>
+              </a:ext>
+            </a:extLst>
+          </p:cNvPr>
           <p:cNvSpPr/>
           <p:nvPr/>
         </p:nvSpPr>
@@ -3628,7 +3357,13 @@
       </p:sp>
       <p:sp>
         <p:nvSpPr>
-          <p:cNvPr id="12" name="Text 10"/>
+          <p:cNvPr id="12" name="Text 10">
+            <a:extLst>
+              <a:ext uri="{FF2B5EF4-FFF2-40B4-BE49-F238E27FC236}">
+                <a16:creationId xmlns:a16="http://schemas.microsoft.com/office/drawing/2014/main" id="{57EA7703-08D4-E6C4-4FDB-5B08F7881055}"/>
+              </a:ext>
+            </a:extLst>
+          </p:cNvPr>
           <p:cNvSpPr txBox="1"/>
           <p:nvPr/>
         </p:nvSpPr>
@@ -3659,7 +3394,7 @@
                 <a:ea typeface="Oswald" pitchFamily="34" charset="-122"/>
                 <a:cs typeface="Oswald" pitchFamily="34" charset="-120"/>
               </a:rPr>
-              <a:t>OBJETIVO 4</a:t>
+              <a:t>OBJETIVO 3</a:t>
             </a:r>
             <a:endParaRPr lang="en-US" sz="1600" dirty="0"/>
           </a:p>
@@ -3667,7 +3402,13 @@
       </p:sp>
       <p:sp>
         <p:nvSpPr>
-          <p:cNvPr id="13" name="Text 11"/>
+          <p:cNvPr id="13" name="Text 11">
+            <a:extLst>
+              <a:ext uri="{FF2B5EF4-FFF2-40B4-BE49-F238E27FC236}">
+                <a16:creationId xmlns:a16="http://schemas.microsoft.com/office/drawing/2014/main" id="{83082800-1689-F508-4C9C-8E0187A18BDD}"/>
+              </a:ext>
+            </a:extLst>
+          </p:cNvPr>
           <p:cNvSpPr txBox="1"/>
           <p:nvPr/>
         </p:nvSpPr>
@@ -3695,7 +3436,7 @@
                 <a:ea typeface="Calibri" pitchFamily="34" charset="-122"/>
                 <a:cs typeface="Calibri" pitchFamily="34" charset="-120"/>
               </a:rPr>
-              <a:t>Los cuatro paneles de RStudio</a:t>
+              <a:t>Trabajar en un proyecto</a:t>
             </a:r>
             <a:endParaRPr lang="en-US" sz="1300" dirty="0"/>
           </a:p>
@@ -3706,7 +3447,7 @@
           <p:cNvPr id="15" name="Shape 9">
             <a:extLst>
               <a:ext uri="{FF2B5EF4-FFF2-40B4-BE49-F238E27FC236}">
-                <a16:creationId xmlns:a16="http://schemas.microsoft.com/office/drawing/2014/main" id="{1ED05ED1-CE50-06A2-178F-B4365671B18F}"/>
+                <a16:creationId xmlns:a16="http://schemas.microsoft.com/office/drawing/2014/main" id="{E750D06A-626A-4348-CA99-CE04C627A232}"/>
               </a:ext>
             </a:extLst>
           </p:cNvPr>
@@ -3750,7 +3491,7 @@
           <p:cNvPr id="17" name="Text 11">
             <a:extLst>
               <a:ext uri="{FF2B5EF4-FFF2-40B4-BE49-F238E27FC236}">
-                <a16:creationId xmlns:a16="http://schemas.microsoft.com/office/drawing/2014/main" id="{1291722D-C809-2238-9939-339690D52438}"/>
+                <a16:creationId xmlns:a16="http://schemas.microsoft.com/office/drawing/2014/main" id="{F3440954-5CFF-06C7-8641-E2E38BA6F847}"/>
               </a:ext>
             </a:extLst>
           </p:cNvPr>
@@ -3773,7 +3514,7 @@
           <a:lstStyle/>
           <a:p>
             <a:r>
-              <a:rPr lang="es-ES" sz="1400" b="1" dirty="0" err="1">
+              <a:rPr lang="es-ES" sz="1400" b="1" dirty="0">
                 <a:solidFill>
                   <a:schemeClr val="bg1"/>
                 </a:solidFill>
@@ -3781,10 +3522,10 @@
                 <a:ea typeface="Calibri" pitchFamily="34" charset="-122"/>
                 <a:cs typeface="Calibri" pitchFamily="34" charset="-120"/>
               </a:rPr>
-              <a:t>En el script se escribe y se guarda. </a:t>
-            </a:r>
-            <a:r>
-              <a:rPr lang="es-ES" sz="1400" b="1" i="1" dirty="0" err="1">
+              <a:t>Un proyecto es una carpeta con un archivo </a:t>
+            </a:r>
+            <a:r>
+              <a:rPr lang="es-ES" sz="1400" b="1" i="1" dirty="0">
                 <a:solidFill>
                   <a:schemeClr val="bg1"/>
                 </a:solidFill>
@@ -3792,10 +3533,10 @@
                 <a:ea typeface="Calibri" pitchFamily="34" charset="-122"/>
                 <a:cs typeface="Calibri" pitchFamily="34" charset="-120"/>
               </a:rPr>
-              <a:t>Ctrl + Enter</a:t>
-            </a:r>
-            <a:r>
-              <a:rPr lang="es-ES" sz="1400" b="1" dirty="0" err="1">
+              <a:t>.Rproj</a:t>
+            </a:r>
+            <a:r>
+              <a:rPr lang="es-ES" sz="1400" b="1" dirty="0">
                 <a:solidFill>
                   <a:schemeClr val="bg1"/>
                 </a:solidFill>
@@ -3803,11 +3544,33 @@
                 <a:ea typeface="Calibri" pitchFamily="34" charset="-122"/>
                 <a:cs typeface="Calibri" pitchFamily="34" charset="-120"/>
               </a:rPr>
-              <a:t> manda la línea a la consola, donde aparece el resultado.</a:t>
-            </a:r>
-          </a:p>
-          <a:p>
-            <a:endParaRPr lang="es-ES" sz="1400" b="1" dirty="0" err="1">
+              <a:t>. Mientras está abierto, R trabaja desde esa carpeta y rutas como </a:t>
+            </a:r>
+            <a:r>
+              <a:rPr lang="es-ES" sz="1400" b="1" i="1" dirty="0">
+                <a:solidFill>
+                  <a:schemeClr val="bg1"/>
+                </a:solidFill>
+                <a:latin typeface="Calibri" pitchFamily="34" charset="0"/>
+                <a:ea typeface="Calibri" pitchFamily="34" charset="-122"/>
+                <a:cs typeface="Calibri" pitchFamily="34" charset="-120"/>
+              </a:rPr>
+              <a:t>datos/</a:t>
+            </a:r>
+            <a:r>
+              <a:rPr lang="es-ES" sz="1400" b="1" dirty="0">
+                <a:solidFill>
+                  <a:schemeClr val="bg1"/>
+                </a:solidFill>
+                <a:latin typeface="Calibri" pitchFamily="34" charset="0"/>
+                <a:ea typeface="Calibri" pitchFamily="34" charset="-122"/>
+                <a:cs typeface="Calibri" pitchFamily="34" charset="-120"/>
+              </a:rPr>
+              <a:t> funcionan solas.</a:t>
+            </a:r>
+          </a:p>
+          <a:p>
+            <a:endParaRPr lang="es-ES" sz="1400" b="1" dirty="0">
               <a:solidFill>
                 <a:schemeClr val="bg1"/>
               </a:solidFill>
@@ -3818,7 +3581,7 @@
           </a:p>
           <a:p>
             <a:r>
-              <a:rPr lang="es-ES" sz="1400" b="1" dirty="0" err="1">
+              <a:rPr lang="es-ES" sz="1400" b="1" dirty="0">
                 <a:solidFill>
                   <a:schemeClr val="bg1"/>
                 </a:solidFill>
@@ -3826,14 +3589,58 @@
                 <a:ea typeface="Calibri" pitchFamily="34" charset="-122"/>
                 <a:cs typeface="Calibri" pitchFamily="34" charset="-120"/>
               </a:rPr>
-              <a:t>Los errores también salen en la consola. Leerlos con calma es la mitad del trabajo.</a:t>
+              <a:t>Su nombre aparece arriba a la derecha de RStudio. Si no está, </a:t>
+            </a:r>
+            <a:r>
+              <a:rPr lang="es-ES" sz="1400" b="1" i="1" dirty="0">
+                <a:solidFill>
+                  <a:schemeClr val="bg1"/>
+                </a:solidFill>
+                <a:latin typeface="Calibri" pitchFamily="34" charset="0"/>
+                <a:ea typeface="Calibri" pitchFamily="34" charset="-122"/>
+                <a:cs typeface="Calibri" pitchFamily="34" charset="-120"/>
+              </a:rPr>
+              <a:t>File, Open Project</a:t>
+            </a:r>
+            <a:r>
+              <a:rPr lang="es-ES" sz="1400" b="1" dirty="0">
+                <a:solidFill>
+                  <a:schemeClr val="bg1"/>
+                </a:solidFill>
+                <a:latin typeface="Calibri" pitchFamily="34" charset="0"/>
+                <a:ea typeface="Calibri" pitchFamily="34" charset="-122"/>
+                <a:cs typeface="Calibri" pitchFamily="34" charset="-120"/>
+              </a:rPr>
+              <a:t> y elegir </a:t>
+            </a:r>
+            <a:r>
+              <a:rPr lang="es-ES" sz="1400" b="1" i="1" dirty="0">
+                <a:solidFill>
+                  <a:schemeClr val="bg1"/>
+                </a:solidFill>
+                <a:latin typeface="Calibri" pitchFamily="34" charset="0"/>
+                <a:ea typeface="Calibri" pitchFamily="34" charset="-122"/>
+                <a:cs typeface="Calibri" pitchFamily="34" charset="-120"/>
+              </a:rPr>
+              <a:t>visualizacion_datos_shiny.Rproj</a:t>
+            </a:r>
+            <a:r>
+              <a:rPr lang="es-ES" sz="1400" b="1" dirty="0">
+                <a:solidFill>
+                  <a:schemeClr val="bg1"/>
+                </a:solidFill>
+                <a:latin typeface="Calibri" pitchFamily="34" charset="0"/>
+                <a:ea typeface="Calibri" pitchFamily="34" charset="-122"/>
+                <a:cs typeface="Calibri" pitchFamily="34" charset="-120"/>
+              </a:rPr>
+              <a:t>.</a:t>
             </a:r>
           </a:p>
         </p:txBody>
       </p:sp>
       <p:pic>
         <p:nvPicPr>
-          <p:cNvPr id="24" name="Picture 23" descr="p2.png"/>
+          <p:cNvPr id="18" name="Picture 17" descr="cap1.png"/>
           <p:cNvPicPr>
             <a:picLocks noChangeAspect="1"/>
           </p:cNvPicPr>
@@ -3847,19 +3654,12 @@
         </p:blipFill>
         <p:spPr>
           <a:xfrm>
-            <a:off x="4434840" y="1320165"/>
-            <a:ext cx="4480560" cy="2800350"/>
+            <a:off x="4870731" y="1188720"/>
+            <a:ext cx="3608778" cy="3100000"/>
           </a:xfrm>
           <a:prstGeom prst="rect">
             <a:avLst/>
           </a:prstGeom>
-          <a:ln w="76200">
-            <a:solidFill>
-              <a:schemeClr val="accent1">
-                <a:lumMod val="75000"/>
-              </a:schemeClr>
-            </a:solidFill>
-          </a:ln>
         </p:spPr>
       </p:pic>
     </p:spTree>
@@ -3871,7 +3671,7 @@
 </file>
 
 <file path=ppt/slides/slide12.xml><?xml version="1.0" encoding="utf-8"?>
-<p:sld xmlns:a="http://schemas.openxmlformats.org/drawingml/2006/main" xmlns:p="http://schemas.openxmlformats.org/presentationml/2006/main" xmlns:r="http://schemas.openxmlformats.org/officeDocument/2006/relationships">
+<p:sld xmlns:a="http://schemas.openxmlformats.org/drawingml/2006/main" xmlns:r="http://schemas.openxmlformats.org/officeDocument/2006/relationships" xmlns:p="http://schemas.openxmlformats.org/presentationml/2006/main">
   <p:cSld>
     <p:bg>
       <p:bgPr>
@@ -3887,16 +3687,17 @@
         <p:cNvGrpSpPr/>
         <p:nvPr/>
       </p:nvGrpSpPr>
-      <p:grpSpPr/>
-      <p:sp>
-        <p:nvSpPr>
-          <p:cNvPr id="2" name="Text 0">
-            <a:extLst>
-              <a:ext uri="{FF2B5EF4-FFF2-40B4-BE49-F238E27FC236}">
-                <a16:creationId xmlns:a16="http://schemas.microsoft.com/office/drawing/2014/main" id="{1B8BE186-2227-0AEE-46BF-1738518AF7E2}"/>
-              </a:ext>
-            </a:extLst>
-          </p:cNvPr>
+      <p:grpSpPr>
+        <a:xfrm>
+          <a:off x="0" y="0"/>
+          <a:ext cx="0" cy="0"/>
+          <a:chOff x="0" y="0"/>
+          <a:chExt cx="0" cy="0"/>
+        </a:xfrm>
+      </p:grpSpPr>
+      <p:sp>
+        <p:nvSpPr>
+          <p:cNvPr id="2" name="Text 0"/>
           <p:cNvSpPr txBox="1"/>
           <p:nvPr/>
         </p:nvSpPr>
@@ -3924,7 +3725,7 @@
                 <a:ea typeface="Oswald" pitchFamily="34" charset="-122"/>
                 <a:cs typeface="Oswald" pitchFamily="34" charset="-120"/>
               </a:rPr>
-              <a:t>Paso a paso (4)</a:t>
+              <a:t>Paso a paso (3)</a:t>
             </a:r>
             <a:endParaRPr lang="en-US" sz="3000" dirty="0"/>
           </a:p>
@@ -3932,13 +3733,7 @@
       </p:sp>
       <p:sp>
         <p:nvSpPr>
-          <p:cNvPr id="11" name="Shape 9">
-            <a:extLst>
-              <a:ext uri="{FF2B5EF4-FFF2-40B4-BE49-F238E27FC236}">
-                <a16:creationId xmlns:a16="http://schemas.microsoft.com/office/drawing/2014/main" id="{2D484EA3-17D5-DFDE-7FFB-391D9E546766}"/>
-              </a:ext>
-            </a:extLst>
-          </p:cNvPr>
+          <p:cNvPr id="11" name="Shape 9"/>
           <p:cNvSpPr/>
           <p:nvPr/>
         </p:nvSpPr>
@@ -3972,13 +3767,7 @@
       </p:sp>
       <p:sp>
         <p:nvSpPr>
-          <p:cNvPr id="12" name="Text 10">
-            <a:extLst>
-              <a:ext uri="{FF2B5EF4-FFF2-40B4-BE49-F238E27FC236}">
-                <a16:creationId xmlns:a16="http://schemas.microsoft.com/office/drawing/2014/main" id="{FF346D48-99B4-78ED-CF54-DB6A3D402E26}"/>
-              </a:ext>
-            </a:extLst>
-          </p:cNvPr>
+          <p:cNvPr id="12" name="Text 10"/>
           <p:cNvSpPr txBox="1"/>
           <p:nvPr/>
         </p:nvSpPr>
@@ -4017,13 +3806,7 @@
       </p:sp>
       <p:sp>
         <p:nvSpPr>
-          <p:cNvPr id="13" name="Text 11">
-            <a:extLst>
-              <a:ext uri="{FF2B5EF4-FFF2-40B4-BE49-F238E27FC236}">
-                <a16:creationId xmlns:a16="http://schemas.microsoft.com/office/drawing/2014/main" id="{961D826F-99A4-C802-E6F8-FA059D329199}"/>
-              </a:ext>
-            </a:extLst>
-          </p:cNvPr>
+          <p:cNvPr id="13" name="Text 11"/>
           <p:cNvSpPr txBox="1"/>
           <p:nvPr/>
         </p:nvSpPr>
@@ -4051,8 +3834,9 @@
                 <a:ea typeface="Calibri" pitchFamily="34" charset="-122"/>
                 <a:cs typeface="Calibri" pitchFamily="34" charset="-120"/>
               </a:rPr>
-              <a:t>Lo básico de R</a:t>
-            </a:r>
+              <a:t>Los cuatro paneles de RStudio</a:t>
+            </a:r>
+            <a:endParaRPr lang="en-US" sz="1300" dirty="0"/>
           </a:p>
         </p:txBody>
       </p:sp>
@@ -4061,7 +3845,7 @@
           <p:cNvPr id="15" name="Shape 9">
             <a:extLst>
               <a:ext uri="{FF2B5EF4-FFF2-40B4-BE49-F238E27FC236}">
-                <a16:creationId xmlns:a16="http://schemas.microsoft.com/office/drawing/2014/main" id="{F33AC7BE-75B4-F8D4-43E0-87B7AD3B3F34}"/>
+                <a16:creationId xmlns:a16="http://schemas.microsoft.com/office/drawing/2014/main" id="{1ED05ED1-CE50-06A2-178F-B4365671B18F}"/>
               </a:ext>
             </a:extLst>
           </p:cNvPr>
@@ -4105,7 +3889,7 @@
           <p:cNvPr id="17" name="Text 11">
             <a:extLst>
               <a:ext uri="{FF2B5EF4-FFF2-40B4-BE49-F238E27FC236}">
-                <a16:creationId xmlns:a16="http://schemas.microsoft.com/office/drawing/2014/main" id="{BFEECB63-4CC8-9CA3-665B-7BF2CFCADD52}"/>
+                <a16:creationId xmlns:a16="http://schemas.microsoft.com/office/drawing/2014/main" id="{1291722D-C809-2238-9939-339690D52438}"/>
               </a:ext>
             </a:extLst>
           </p:cNvPr>
@@ -4128,7 +3912,7 @@
           <a:lstStyle/>
           <a:p>
             <a:r>
-              <a:rPr lang="es-ES" sz="1400" b="1" i="1" dirty="0">
+              <a:rPr lang="es-ES" sz="1400" b="1" dirty="0" err="1">
                 <a:solidFill>
                   <a:schemeClr val="bg1"/>
                 </a:solidFill>
@@ -4136,10 +3920,10 @@
                 <a:ea typeface="Calibri" pitchFamily="34" charset="-122"/>
                 <a:cs typeface="Calibri" pitchFamily="34" charset="-120"/>
               </a:rPr>
-              <a:t>&lt;-</a:t>
-            </a:r>
-            <a:r>
-              <a:rPr lang="es-ES" sz="1400" b="1" dirty="0">
+              <a:t>En el script se escribe y se guarda. </a:t>
+            </a:r>
+            <a:r>
+              <a:rPr lang="es-ES" sz="1400" b="1" i="1" dirty="0" err="1">
                 <a:solidFill>
                   <a:schemeClr val="bg1"/>
                 </a:solidFill>
@@ -4147,10 +3931,10 @@
                 <a:ea typeface="Calibri" pitchFamily="34" charset="-122"/>
                 <a:cs typeface="Calibri" pitchFamily="34" charset="-120"/>
               </a:rPr>
-              <a:t> guarda un valor en un objeto. </a:t>
-            </a:r>
-            <a:r>
-              <a:rPr lang="es-ES" sz="1400" b="1" i="1" dirty="0">
+              <a:t>Ctrl + Enter</a:t>
+            </a:r>
+            <a:r>
+              <a:rPr lang="es-ES" sz="1400" b="1" dirty="0" err="1">
                 <a:solidFill>
                   <a:schemeClr val="bg1"/>
                 </a:solidFill>
@@ -4158,10 +3942,22 @@
                 <a:ea typeface="Calibri" pitchFamily="34" charset="-122"/>
                 <a:cs typeface="Calibri" pitchFamily="34" charset="-120"/>
               </a:rPr>
-              <a:t>c()</a:t>
-            </a:r>
-            <a:r>
-              <a:rPr lang="es-ES" sz="1400" b="1" dirty="0">
+              <a:t> manda la línea a la consola, donde aparece el resultado.</a:t>
+            </a:r>
+          </a:p>
+          <a:p>
+            <a:endParaRPr lang="es-ES" sz="1400" b="1" dirty="0" err="1">
+              <a:solidFill>
+                <a:schemeClr val="bg1"/>
+              </a:solidFill>
+              <a:latin typeface="Calibri" pitchFamily="34" charset="0"/>
+              <a:ea typeface="Calibri" pitchFamily="34" charset="-122"/>
+              <a:cs typeface="Calibri" pitchFamily="34" charset="-120"/>
+            </a:endParaRPr>
+          </a:p>
+          <a:p>
+            <a:r>
+              <a:rPr lang="es-ES" sz="1400" b="1" dirty="0" err="1">
                 <a:solidFill>
                   <a:schemeClr val="bg1"/>
                 </a:solidFill>
@@ -4169,109 +3965,14 @@
                 <a:ea typeface="Calibri" pitchFamily="34" charset="-122"/>
                 <a:cs typeface="Calibri" pitchFamily="34" charset="-120"/>
               </a:rPr>
-              <a:t> arma un vector. </a:t>
-            </a:r>
-            <a:r>
-              <a:rPr lang="es-ES" sz="1400" b="1" i="1" dirty="0">
-                <a:solidFill>
-                  <a:schemeClr val="bg1"/>
-                </a:solidFill>
-                <a:latin typeface="Calibri" pitchFamily="34" charset="0"/>
-                <a:ea typeface="Calibri" pitchFamily="34" charset="-122"/>
-                <a:cs typeface="Calibri" pitchFamily="34" charset="-120"/>
-              </a:rPr>
-              <a:t>read.csv()</a:t>
-            </a:r>
-            <a:r>
-              <a:rPr lang="es-ES" sz="1400" b="1" dirty="0">
-                <a:solidFill>
-                  <a:schemeClr val="bg1"/>
-                </a:solidFill>
-                <a:latin typeface="Calibri" pitchFamily="34" charset="0"/>
-                <a:ea typeface="Calibri" pitchFamily="34" charset="-122"/>
-                <a:cs typeface="Calibri" pitchFamily="34" charset="-120"/>
-              </a:rPr>
-              <a:t> lee una tabla, un data frame.</a:t>
-            </a:r>
-            <a:endParaRPr lang="en-US" sz="1300" dirty="0"/>
-          </a:p>
-          <a:p>
-            <a:endParaRPr lang="en-US" sz="1300" dirty="0"/>
-          </a:p>
-          <a:p>
-            <a:r>
-              <a:rPr lang="es-ES" sz="1400" b="1" i="1" dirty="0">
-                <a:solidFill>
-                  <a:schemeClr val="bg1"/>
-                </a:solidFill>
-                <a:latin typeface="Calibri" pitchFamily="34" charset="0"/>
-                <a:ea typeface="Calibri" pitchFamily="34" charset="-122"/>
-                <a:cs typeface="Calibri" pitchFamily="34" charset="-120"/>
-              </a:rPr>
-              <a:t>elecciones$emitidos</a:t>
-            </a:r>
-            <a:r>
-              <a:rPr lang="es-ES" sz="1400" b="1" dirty="0">
-                <a:solidFill>
-                  <a:schemeClr val="bg1"/>
-                </a:solidFill>
-                <a:latin typeface="Calibri" pitchFamily="34" charset="0"/>
-                <a:ea typeface="Calibri" pitchFamily="34" charset="-122"/>
-                <a:cs typeface="Calibri" pitchFamily="34" charset="-120"/>
-              </a:rPr>
-              <a:t> elige una columna y </a:t>
-            </a:r>
-            <a:r>
-              <a:rPr lang="es-ES" sz="1400" b="1" i="1" dirty="0">
-                <a:solidFill>
-                  <a:schemeClr val="bg1"/>
-                </a:solidFill>
-                <a:latin typeface="Calibri" pitchFamily="34" charset="0"/>
-                <a:ea typeface="Calibri" pitchFamily="34" charset="-122"/>
-                <a:cs typeface="Calibri" pitchFamily="34" charset="-120"/>
-              </a:rPr>
-              <a:t>sum()</a:t>
-            </a:r>
-            <a:r>
-              <a:rPr lang="es-ES" sz="1400" b="1" dirty="0">
-                <a:solidFill>
-                  <a:schemeClr val="bg1"/>
-                </a:solidFill>
-                <a:latin typeface="Calibri" pitchFamily="34" charset="0"/>
-                <a:ea typeface="Calibri" pitchFamily="34" charset="-122"/>
-                <a:cs typeface="Calibri" pitchFamily="34" charset="-120"/>
-              </a:rPr>
-              <a:t> la suma. Todo está en </a:t>
-            </a:r>
-            <a:r>
-              <a:rPr lang="es-ES" sz="1400" b="1" i="1" dirty="0">
-                <a:solidFill>
-                  <a:schemeClr val="bg1"/>
-                </a:solidFill>
-                <a:latin typeface="Calibri" pitchFamily="34" charset="0"/>
-                <a:ea typeface="Calibri" pitchFamily="34" charset="-122"/>
-                <a:cs typeface="Calibri" pitchFamily="34" charset="-120"/>
-              </a:rPr>
-              <a:t>clase1/primeros_pasos.R</a:t>
-            </a:r>
-            <a:r>
-              <a:rPr lang="es-ES" sz="1400" b="1" dirty="0">
-                <a:solidFill>
-                  <a:schemeClr val="bg1"/>
-                </a:solidFill>
-                <a:latin typeface="Calibri" pitchFamily="34" charset="0"/>
-                <a:ea typeface="Calibri" pitchFamily="34" charset="-122"/>
-                <a:cs typeface="Calibri" pitchFamily="34" charset="-120"/>
-              </a:rPr>
-              <a:t>.</a:t>
-            </a:r>
-            <a:endParaRPr lang="en-US" sz="1300" dirty="0"/>
+              <a:t>Los errores también salen en la consola. Leerlos con calma es la mitad del trabajo.</a:t>
+            </a:r>
           </a:p>
         </p:txBody>
       </p:sp>
       <p:pic>
         <p:nvPicPr>
-          <p:cNvPr id="22" name="Picture 21" descr="p3.png"/>
+          <p:cNvPr id="24" name="Picture 23" descr="p2.png"/>
           <p:cNvPicPr>
             <a:picLocks noChangeAspect="1"/>
           </p:cNvPicPr>
@@ -4285,8 +3986,8 @@
         </p:blipFill>
         <p:spPr>
           <a:xfrm>
-            <a:off x="4434840" y="1471757"/>
-            <a:ext cx="4480560" cy="2497165"/>
+            <a:off x="4434840" y="1320165"/>
+            <a:ext cx="4480560" cy="2800350"/>
           </a:xfrm>
           <a:prstGeom prst="rect">
             <a:avLst/>
@@ -4309,6 +4010,451 @@
 </file>
 
 <file path=ppt/slides/slide13.xml><?xml version="1.0" encoding="utf-8"?>
+<p:sld xmlns:a="http://schemas.openxmlformats.org/drawingml/2006/main" xmlns:r="http://schemas.openxmlformats.org/officeDocument/2006/relationships" xmlns:p="http://schemas.openxmlformats.org/presentationml/2006/main">
+  <p:cSld>
+    <p:bg>
+      <p:bgPr>
+        <a:solidFill>
+          <a:srgbClr val="FFFFFF"/>
+        </a:solidFill>
+        <a:effectLst/>
+      </p:bgPr>
+    </p:bg>
+    <p:spTree>
+      <p:nvGrpSpPr>
+        <p:cNvPr id="1" name=""/>
+        <p:cNvGrpSpPr/>
+        <p:nvPr/>
+      </p:nvGrpSpPr>
+      <p:grpSpPr>
+        <a:xfrm>
+          <a:off x="0" y="0"/>
+          <a:ext cx="0" cy="0"/>
+          <a:chOff x="0" y="0"/>
+          <a:chExt cx="0" cy="0"/>
+        </a:xfrm>
+      </p:grpSpPr>
+      <p:sp>
+        <p:nvSpPr>
+          <p:cNvPr id="2" name="Text 0">
+            <a:extLst>
+              <a:ext uri="{FF2B5EF4-FFF2-40B4-BE49-F238E27FC236}">
+                <a16:creationId xmlns:a16="http://schemas.microsoft.com/office/drawing/2014/main" id="{1B8BE186-2227-0AEE-46BF-1738518AF7E2}"/>
+              </a:ext>
+            </a:extLst>
+          </p:cNvPr>
+          <p:cNvSpPr txBox="1"/>
+          <p:nvPr/>
+        </p:nvSpPr>
+        <p:spPr>
+          <a:xfrm>
+            <a:off x="502920" y="320040"/>
+            <a:ext cx="7040880" cy="640080"/>
+          </a:xfrm>
+          <a:prstGeom prst="rect">
+            <a:avLst/>
+          </a:prstGeom>
+          <a:noFill/>
+          <a:ln/>
+        </p:spPr>
+        <p:txBody>
+          <a:bodyPr wrap="square" lIns="0" tIns="0" rIns="0" bIns="0" rtlCol="0" anchor="ctr"/>
+          <a:lstStyle/>
+          <a:p>
+            <a:r>
+              <a:rPr lang="en-US" sz="3000" b="1" dirty="0">
+                <a:solidFill>
+                  <a:srgbClr val="2E0A4E"/>
+                </a:solidFill>
+                <a:latin typeface="Oswald" pitchFamily="34" charset="0"/>
+                <a:ea typeface="Oswald" pitchFamily="34" charset="-122"/>
+                <a:cs typeface="Oswald" pitchFamily="34" charset="-120"/>
+              </a:rPr>
+              <a:t>Paso a paso (4)</a:t>
+            </a:r>
+            <a:endParaRPr lang="en-US" sz="3000" dirty="0"/>
+          </a:p>
+        </p:txBody>
+      </p:sp>
+      <p:sp>
+        <p:nvSpPr>
+          <p:cNvPr id="11" name="Shape 9">
+            <a:extLst>
+              <a:ext uri="{FF2B5EF4-FFF2-40B4-BE49-F238E27FC236}">
+                <a16:creationId xmlns:a16="http://schemas.microsoft.com/office/drawing/2014/main" id="{2D484EA3-17D5-DFDE-7FFB-391D9E546766}"/>
+              </a:ext>
+            </a:extLst>
+          </p:cNvPr>
+          <p:cNvSpPr/>
+          <p:nvPr/>
+        </p:nvSpPr>
+        <p:spPr>
+          <a:xfrm>
+            <a:off x="439616" y="1188720"/>
+            <a:ext cx="2560320" cy="1463040"/>
+          </a:xfrm>
+          <a:prstGeom prst="roundRect">
+            <a:avLst>
+              <a:gd name="adj" fmla="val 2143"/>
+            </a:avLst>
+          </a:prstGeom>
+          <a:solidFill>
+            <a:srgbClr val="5A189A"/>
+          </a:solidFill>
+          <a:ln w="12700">
+            <a:solidFill>
+              <a:srgbClr val="5A189A"/>
+            </a:solidFill>
+            <a:prstDash val="solid"/>
+          </a:ln>
+        </p:spPr>
+        <p:txBody>
+          <a:bodyPr/>
+          <a:lstStyle/>
+          <a:p>
+            <a:endParaRPr lang="en-US"/>
+          </a:p>
+        </p:txBody>
+      </p:sp>
+      <p:sp>
+        <p:nvSpPr>
+          <p:cNvPr id="12" name="Text 10">
+            <a:extLst>
+              <a:ext uri="{FF2B5EF4-FFF2-40B4-BE49-F238E27FC236}">
+                <a16:creationId xmlns:a16="http://schemas.microsoft.com/office/drawing/2014/main" id="{FF346D48-99B4-78ED-CF54-DB6A3D402E26}"/>
+              </a:ext>
+            </a:extLst>
+          </p:cNvPr>
+          <p:cNvSpPr txBox="1"/>
+          <p:nvPr/>
+        </p:nvSpPr>
+        <p:spPr>
+          <a:xfrm>
+            <a:off x="668216" y="1256068"/>
+            <a:ext cx="2103120" cy="502920"/>
+          </a:xfrm>
+          <a:prstGeom prst="rect">
+            <a:avLst/>
+          </a:prstGeom>
+          <a:noFill/>
+          <a:ln/>
+        </p:spPr>
+        <p:txBody>
+          <a:bodyPr wrap="square" lIns="0" tIns="0" rIns="0" bIns="0" rtlCol="0" anchor="ctr"/>
+          <a:lstStyle/>
+          <a:p>
+            <a:pPr marL="0" indent="0">
+              <a:buNone/>
+            </a:pPr>
+            <a:r>
+              <a:rPr lang="en-US" sz="1600" b="1" dirty="0">
+                <a:solidFill>
+                  <a:srgbClr val="FFFFFF"/>
+                </a:solidFill>
+                <a:latin typeface="Oswald" pitchFamily="34" charset="0"/>
+                <a:ea typeface="Oswald" pitchFamily="34" charset="-122"/>
+                <a:cs typeface="Oswald" pitchFamily="34" charset="-120"/>
+              </a:rPr>
+              <a:t>OBJETIVO 4</a:t>
+            </a:r>
+            <a:endParaRPr lang="en-US" sz="1600" dirty="0"/>
+          </a:p>
+        </p:txBody>
+      </p:sp>
+      <p:sp>
+        <p:nvSpPr>
+          <p:cNvPr id="13" name="Text 11">
+            <a:extLst>
+              <a:ext uri="{FF2B5EF4-FFF2-40B4-BE49-F238E27FC236}">
+                <a16:creationId xmlns:a16="http://schemas.microsoft.com/office/drawing/2014/main" id="{961D826F-99A4-C802-E6F8-FA059D329199}"/>
+              </a:ext>
+            </a:extLst>
+          </p:cNvPr>
+          <p:cNvSpPr txBox="1"/>
+          <p:nvPr/>
+        </p:nvSpPr>
+        <p:spPr>
+          <a:xfrm>
+            <a:off x="668216" y="1734572"/>
+            <a:ext cx="2103120" cy="716926"/>
+          </a:xfrm>
+          <a:prstGeom prst="rect">
+            <a:avLst/>
+          </a:prstGeom>
+          <a:noFill/>
+          <a:ln/>
+        </p:spPr>
+        <p:txBody>
+          <a:bodyPr wrap="square" lIns="0" tIns="0" rIns="0" bIns="0" rtlCol="0" anchor="t"/>
+          <a:lstStyle/>
+          <a:p>
+            <a:r>
+              <a:rPr lang="es-ES" sz="1400" dirty="0">
+                <a:solidFill>
+                  <a:schemeClr val="bg1"/>
+                </a:solidFill>
+                <a:latin typeface="Calibri" pitchFamily="34" charset="0"/>
+                <a:ea typeface="Calibri" pitchFamily="34" charset="-122"/>
+                <a:cs typeface="Calibri" pitchFamily="34" charset="-120"/>
+              </a:rPr>
+              <a:t>Lo básico de R</a:t>
+            </a:r>
+          </a:p>
+        </p:txBody>
+      </p:sp>
+      <p:sp>
+        <p:nvSpPr>
+          <p:cNvPr id="15" name="Shape 9">
+            <a:extLst>
+              <a:ext uri="{FF2B5EF4-FFF2-40B4-BE49-F238E27FC236}">
+                <a16:creationId xmlns:a16="http://schemas.microsoft.com/office/drawing/2014/main" id="{F33AC7BE-75B4-F8D4-43E0-87B7AD3B3F34}"/>
+              </a:ext>
+            </a:extLst>
+          </p:cNvPr>
+          <p:cNvSpPr/>
+          <p:nvPr/>
+        </p:nvSpPr>
+        <p:spPr>
+          <a:xfrm>
+            <a:off x="439615" y="2719107"/>
+            <a:ext cx="3773659" cy="2281957"/>
+          </a:xfrm>
+          <a:prstGeom prst="roundRect">
+            <a:avLst>
+              <a:gd name="adj" fmla="val 2143"/>
+            </a:avLst>
+          </a:prstGeom>
+          <a:solidFill>
+            <a:schemeClr val="accent1">
+              <a:lumMod val="75000"/>
+            </a:schemeClr>
+          </a:solidFill>
+          <a:ln w="12700">
+            <a:solidFill>
+              <a:schemeClr val="accent1">
+                <a:lumMod val="75000"/>
+              </a:schemeClr>
+            </a:solidFill>
+            <a:prstDash val="solid"/>
+          </a:ln>
+        </p:spPr>
+        <p:txBody>
+          <a:bodyPr/>
+          <a:lstStyle/>
+          <a:p>
+            <a:endParaRPr lang="en-US"/>
+          </a:p>
+        </p:txBody>
+      </p:sp>
+      <p:sp>
+        <p:nvSpPr>
+          <p:cNvPr id="17" name="Text 11">
+            <a:extLst>
+              <a:ext uri="{FF2B5EF4-FFF2-40B4-BE49-F238E27FC236}">
+                <a16:creationId xmlns:a16="http://schemas.microsoft.com/office/drawing/2014/main" id="{BFEECB63-4CC8-9CA3-665B-7BF2CFCADD52}"/>
+              </a:ext>
+            </a:extLst>
+          </p:cNvPr>
+          <p:cNvSpPr txBox="1"/>
+          <p:nvPr/>
+        </p:nvSpPr>
+        <p:spPr>
+          <a:xfrm>
+            <a:off x="668216" y="2899117"/>
+            <a:ext cx="3369212" cy="716926"/>
+          </a:xfrm>
+          <a:prstGeom prst="rect">
+            <a:avLst/>
+          </a:prstGeom>
+          <a:noFill/>
+          <a:ln/>
+        </p:spPr>
+        <p:txBody>
+          <a:bodyPr wrap="square" lIns="0" tIns="0" rIns="0" bIns="0" rtlCol="0" anchor="t"/>
+          <a:lstStyle/>
+          <a:p>
+            <a:r>
+              <a:rPr lang="es-ES" sz="1400" b="1" i="1" dirty="0">
+                <a:solidFill>
+                  <a:schemeClr val="bg1"/>
+                </a:solidFill>
+                <a:latin typeface="Calibri" pitchFamily="34" charset="0"/>
+                <a:ea typeface="Calibri" pitchFamily="34" charset="-122"/>
+                <a:cs typeface="Calibri" pitchFamily="34" charset="-120"/>
+              </a:rPr>
+              <a:t>&lt;-</a:t>
+            </a:r>
+            <a:r>
+              <a:rPr lang="es-ES" sz="1400" b="1" dirty="0">
+                <a:solidFill>
+                  <a:schemeClr val="bg1"/>
+                </a:solidFill>
+                <a:latin typeface="Calibri" pitchFamily="34" charset="0"/>
+                <a:ea typeface="Calibri" pitchFamily="34" charset="-122"/>
+                <a:cs typeface="Calibri" pitchFamily="34" charset="-120"/>
+              </a:rPr>
+              <a:t> guarda un valor en un objeto. </a:t>
+            </a:r>
+            <a:r>
+              <a:rPr lang="es-ES" sz="1400" b="1" i="1" dirty="0">
+                <a:solidFill>
+                  <a:schemeClr val="bg1"/>
+                </a:solidFill>
+                <a:latin typeface="Calibri" pitchFamily="34" charset="0"/>
+                <a:ea typeface="Calibri" pitchFamily="34" charset="-122"/>
+                <a:cs typeface="Calibri" pitchFamily="34" charset="-120"/>
+              </a:rPr>
+              <a:t>c()</a:t>
+            </a:r>
+            <a:r>
+              <a:rPr lang="es-ES" sz="1400" b="1" dirty="0">
+                <a:solidFill>
+                  <a:schemeClr val="bg1"/>
+                </a:solidFill>
+                <a:latin typeface="Calibri" pitchFamily="34" charset="0"/>
+                <a:ea typeface="Calibri" pitchFamily="34" charset="-122"/>
+                <a:cs typeface="Calibri" pitchFamily="34" charset="-120"/>
+              </a:rPr>
+              <a:t> arma un vector. </a:t>
+            </a:r>
+            <a:r>
+              <a:rPr lang="es-ES" sz="1400" b="1" i="1" dirty="0">
+                <a:solidFill>
+                  <a:schemeClr val="bg1"/>
+                </a:solidFill>
+                <a:latin typeface="Calibri" pitchFamily="34" charset="0"/>
+                <a:ea typeface="Calibri" pitchFamily="34" charset="-122"/>
+                <a:cs typeface="Calibri" pitchFamily="34" charset="-120"/>
+              </a:rPr>
+              <a:t>read.csv()</a:t>
+            </a:r>
+            <a:r>
+              <a:rPr lang="es-ES" sz="1400" b="1" dirty="0">
+                <a:solidFill>
+                  <a:schemeClr val="bg1"/>
+                </a:solidFill>
+                <a:latin typeface="Calibri" pitchFamily="34" charset="0"/>
+                <a:ea typeface="Calibri" pitchFamily="34" charset="-122"/>
+                <a:cs typeface="Calibri" pitchFamily="34" charset="-120"/>
+              </a:rPr>
+              <a:t> lee una tabla, un data frame.</a:t>
+            </a:r>
+            <a:endParaRPr lang="en-US" sz="1300" dirty="0"/>
+          </a:p>
+          <a:p>
+            <a:endParaRPr lang="en-US" sz="1300" dirty="0"/>
+          </a:p>
+          <a:p>
+            <a:r>
+              <a:rPr lang="es-ES" sz="1400" b="1" i="1" dirty="0">
+                <a:solidFill>
+                  <a:schemeClr val="bg1"/>
+                </a:solidFill>
+                <a:latin typeface="Calibri" pitchFamily="34" charset="0"/>
+                <a:ea typeface="Calibri" pitchFamily="34" charset="-122"/>
+                <a:cs typeface="Calibri" pitchFamily="34" charset="-120"/>
+              </a:rPr>
+              <a:t>elecciones$emitidos</a:t>
+            </a:r>
+            <a:r>
+              <a:rPr lang="es-ES" sz="1400" b="1" dirty="0">
+                <a:solidFill>
+                  <a:schemeClr val="bg1"/>
+                </a:solidFill>
+                <a:latin typeface="Calibri" pitchFamily="34" charset="0"/>
+                <a:ea typeface="Calibri" pitchFamily="34" charset="-122"/>
+                <a:cs typeface="Calibri" pitchFamily="34" charset="-120"/>
+              </a:rPr>
+              <a:t> elige una columna y </a:t>
+            </a:r>
+            <a:r>
+              <a:rPr lang="es-ES" sz="1400" b="1" i="1" dirty="0">
+                <a:solidFill>
+                  <a:schemeClr val="bg1"/>
+                </a:solidFill>
+                <a:latin typeface="Calibri" pitchFamily="34" charset="0"/>
+                <a:ea typeface="Calibri" pitchFamily="34" charset="-122"/>
+                <a:cs typeface="Calibri" pitchFamily="34" charset="-120"/>
+              </a:rPr>
+              <a:t>sum()</a:t>
+            </a:r>
+            <a:r>
+              <a:rPr lang="es-ES" sz="1400" b="1" dirty="0">
+                <a:solidFill>
+                  <a:schemeClr val="bg1"/>
+                </a:solidFill>
+                <a:latin typeface="Calibri" pitchFamily="34" charset="0"/>
+                <a:ea typeface="Calibri" pitchFamily="34" charset="-122"/>
+                <a:cs typeface="Calibri" pitchFamily="34" charset="-120"/>
+              </a:rPr>
+              <a:t> la suma. Todo está en </a:t>
+            </a:r>
+            <a:r>
+              <a:rPr lang="es-ES" sz="1400" b="1" i="1" dirty="0">
+                <a:solidFill>
+                  <a:schemeClr val="bg1"/>
+                </a:solidFill>
+                <a:latin typeface="Calibri" pitchFamily="34" charset="0"/>
+                <a:ea typeface="Calibri" pitchFamily="34" charset="-122"/>
+                <a:cs typeface="Calibri" pitchFamily="34" charset="-120"/>
+              </a:rPr>
+              <a:t>clase1/primeros_pasos.R</a:t>
+            </a:r>
+            <a:r>
+              <a:rPr lang="es-ES" sz="1400" b="1" dirty="0">
+                <a:solidFill>
+                  <a:schemeClr val="bg1"/>
+                </a:solidFill>
+                <a:latin typeface="Calibri" pitchFamily="34" charset="0"/>
+                <a:ea typeface="Calibri" pitchFamily="34" charset="-122"/>
+                <a:cs typeface="Calibri" pitchFamily="34" charset="-120"/>
+              </a:rPr>
+              <a:t>.</a:t>
+            </a:r>
+            <a:endParaRPr lang="en-US" sz="1300" dirty="0"/>
+          </a:p>
+        </p:txBody>
+      </p:sp>
+      <p:pic>
+        <p:nvPicPr>
+          <p:cNvPr id="22" name="Picture 21" descr="p3.png"/>
+          <p:cNvPicPr>
+            <a:picLocks noChangeAspect="1"/>
+          </p:cNvPicPr>
+          <p:nvPr/>
+        </p:nvPicPr>
+        <p:blipFill>
+          <a:blip r:embed="rId2"/>
+          <a:stretch>
+            <a:fillRect/>
+          </a:stretch>
+        </p:blipFill>
+        <p:spPr>
+          <a:xfrm>
+            <a:off x="4434840" y="1471757"/>
+            <a:ext cx="4480560" cy="2497165"/>
+          </a:xfrm>
+          <a:prstGeom prst="rect">
+            <a:avLst/>
+          </a:prstGeom>
+          <a:ln w="76200">
+            <a:solidFill>
+              <a:schemeClr val="accent1">
+                <a:lumMod val="75000"/>
+              </a:schemeClr>
+            </a:solidFill>
+          </a:ln>
+        </p:spPr>
+      </p:pic>
+    </p:spTree>
+  </p:cSld>
+  <p:clrMapOvr>
+    <a:masterClrMapping/>
+  </p:clrMapOvr>
+</p:sld>
+</file>
+
+<file path=ppt/slides/slide14.xml><?xml version="1.0" encoding="utf-8"?>
 <p:sld xmlns:a="http://schemas.openxmlformats.org/drawingml/2006/main" xmlns:r="http://schemas.openxmlformats.org/officeDocument/2006/relationships" xmlns:p="http://schemas.openxmlformats.org/presentationml/2006/main">
   <p:cSld>
     <p:spTree>
@@ -4637,7 +4783,7 @@
 </p:sld>
 </file>
 
-<file path=ppt/slides/slide14.xml><?xml version="1.0" encoding="utf-8"?>
+<file path=ppt/slides/slide15.xml><?xml version="1.0" encoding="utf-8"?>
 <p:sld xmlns:a="http://schemas.openxmlformats.org/drawingml/2006/main" xmlns:r="http://schemas.openxmlformats.org/officeDocument/2006/relationships" xmlns:p="http://schemas.openxmlformats.org/presentationml/2006/main">
   <p:cSld>
     <p:spTree>
@@ -4797,8 +4943,8 @@
 </p:sld>
 </file>
 
-<file path=ppt/slides/slide15.xml><?xml version="1.0" encoding="utf-8"?>
-<p:sld xmlns:a="http://schemas.openxmlformats.org/drawingml/2006/main" xmlns:p="http://schemas.openxmlformats.org/presentationml/2006/main" xmlns:r="http://schemas.openxmlformats.org/officeDocument/2006/relationships">
+<file path=ppt/slides/slide16.xml><?xml version="1.0" encoding="utf-8"?>
+<p:sld xmlns:a="http://schemas.openxmlformats.org/drawingml/2006/main" xmlns:r="http://schemas.openxmlformats.org/officeDocument/2006/relationships" xmlns:p="http://schemas.openxmlformats.org/presentationml/2006/main">
   <p:cSld>
     <p:bg>
       <p:bgPr>
@@ -4814,7 +4960,14 @@
         <p:cNvGrpSpPr/>
         <p:nvPr/>
       </p:nvGrpSpPr>
-      <p:grpSpPr/>
+      <p:grpSpPr>
+        <a:xfrm>
+          <a:off x="0" y="0"/>
+          <a:ext cx="0" cy="0"/>
+          <a:chOff x="0" y="0"/>
+          <a:chExt cx="0" cy="0"/>
+        </a:xfrm>
+      </p:grpSpPr>
       <p:sp>
         <p:nvSpPr>
           <p:cNvPr id="2" name="Text 0">
@@ -5055,188 +5208,12 @@
           <a:lstStyle/>
           <a:p>
             <a:endParaRPr lang="en-US" sz="1300" dirty="0"/>
-            <a:r>
-              <a:rPr lang="es-ES" sz="1400" b="1" dirty="0">
-                <a:solidFill>
-                  <a:schemeClr val="bg1"/>
-                </a:solidFill>
-                <a:latin typeface="Calibri" pitchFamily="34" charset="0"/>
-                <a:ea typeface="Calibri" pitchFamily="34" charset="-122"/>
-                <a:cs typeface="Calibri" pitchFamily="34" charset="-120"/>
-              </a:rPr>
-              <a:t/>
-            </a:r>
-            <a:r>
-              <a:rPr lang="es-ES" sz="1400" b="1" i="1" dirty="0">
-                <a:solidFill>
-                  <a:schemeClr val="bg1"/>
-                </a:solidFill>
-                <a:latin typeface="Calibri" pitchFamily="34" charset="0"/>
-                <a:ea typeface="Calibri" pitchFamily="34" charset="-122"/>
-                <a:cs typeface="Calibri" pitchFamily="34" charset="-120"/>
-              </a:rPr>
-              <a:t>fluidPage()</a:t>
-            </a:r>
-            <a:r>
-              <a:rPr lang="es-ES" sz="1400" b="1" dirty="0">
-                <a:solidFill>
-                  <a:schemeClr val="bg1"/>
-                </a:solidFill>
-                <a:latin typeface="Calibri" pitchFamily="34" charset="0"/>
-                <a:ea typeface="Calibri" pitchFamily="34" charset="-122"/>
-                <a:cs typeface="Calibri" pitchFamily="34" charset="-120"/>
-              </a:rPr>
-              <a:t> apila de arriba hacia abajo lo que va adentro. </a:t>
-            </a:r>
-            <a:r>
-              <a:rPr lang="es-ES" sz="1400" b="1" i="1" dirty="0">
-                <a:solidFill>
-                  <a:schemeClr val="bg1"/>
-                </a:solidFill>
-                <a:latin typeface="Calibri" pitchFamily="34" charset="0"/>
-                <a:ea typeface="Calibri" pitchFamily="34" charset="-122"/>
-                <a:cs typeface="Calibri" pitchFamily="34" charset="-120"/>
-              </a:rPr>
-              <a:t>titlePanel()</a:t>
-            </a:r>
-            <a:r>
-              <a:rPr lang="es-ES" sz="1400" b="1" dirty="0">
-                <a:solidFill>
-                  <a:schemeClr val="bg1"/>
-                </a:solidFill>
-                <a:latin typeface="Calibri" pitchFamily="34" charset="0"/>
-                <a:ea typeface="Calibri" pitchFamily="34" charset="-122"/>
-                <a:cs typeface="Calibri" pitchFamily="34" charset="-120"/>
-              </a:rPr>
-              <a:t>, </a:t>
-            </a:r>
-            <a:r>
-              <a:rPr lang="es-ES" sz="1400" b="1" i="1" dirty="0">
-                <a:solidFill>
-                  <a:schemeClr val="bg1"/>
-                </a:solidFill>
-                <a:latin typeface="Calibri" pitchFamily="34" charset="0"/>
-                <a:ea typeface="Calibri" pitchFamily="34" charset="-122"/>
-                <a:cs typeface="Calibri" pitchFamily="34" charset="-120"/>
-              </a:rPr>
-              <a:t>p()</a:t>
-            </a:r>
-            <a:r>
-              <a:rPr lang="es-ES" sz="1400" b="1" dirty="0">
-                <a:solidFill>
-                  <a:schemeClr val="bg1"/>
-                </a:solidFill>
-                <a:latin typeface="Calibri" pitchFamily="34" charset="0"/>
-                <a:ea typeface="Calibri" pitchFamily="34" charset="-122"/>
-                <a:cs typeface="Calibri" pitchFamily="34" charset="-120"/>
-              </a:rPr>
-              <a:t> y </a:t>
-            </a:r>
-            <a:r>
-              <a:rPr lang="es-ES" sz="1400" b="1" i="1" dirty="0">
-                <a:solidFill>
-                  <a:schemeClr val="bg1"/>
-                </a:solidFill>
-                <a:latin typeface="Calibri" pitchFamily="34" charset="0"/>
-                <a:ea typeface="Calibri" pitchFamily="34" charset="-122"/>
-                <a:cs typeface="Calibri" pitchFamily="34" charset="-120"/>
-              </a:rPr>
-              <a:t>h3()</a:t>
-            </a:r>
-            <a:r>
-              <a:rPr lang="es-ES" sz="1400" b="1" dirty="0">
-                <a:solidFill>
-                  <a:schemeClr val="bg1"/>
-                </a:solidFill>
-                <a:latin typeface="Calibri" pitchFamily="34" charset="0"/>
-                <a:ea typeface="Calibri" pitchFamily="34" charset="-122"/>
-                <a:cs typeface="Calibri" pitchFamily="34" charset="-120"/>
-              </a:rPr>
-              <a:t> son texto fijo.</a:t>
-            </a:r>
           </a:p>
           <a:p>
             <a:endParaRPr lang="en-US" sz="1300" dirty="0"/>
           </a:p>
           <a:p>
             <a:endParaRPr lang="en-US" sz="1300" dirty="0"/>
-            <a:r>
-              <a:rPr lang="es-ES" sz="1400" b="1" dirty="0">
-                <a:solidFill>
-                  <a:schemeClr val="bg1"/>
-                </a:solidFill>
-                <a:latin typeface="Calibri" pitchFamily="34" charset="0"/>
-                <a:ea typeface="Calibri" pitchFamily="34" charset="-122"/>
-                <a:cs typeface="Calibri" pitchFamily="34" charset="-120"/>
-              </a:rPr>
-              <a:t/>
-            </a:r>
-            <a:r>
-              <a:rPr lang="es-ES" sz="1400" b="1" i="1" dirty="0">
-                <a:solidFill>
-                  <a:schemeClr val="bg1"/>
-                </a:solidFill>
-                <a:latin typeface="Calibri" pitchFamily="34" charset="0"/>
-                <a:ea typeface="Calibri" pitchFamily="34" charset="-122"/>
-                <a:cs typeface="Calibri" pitchFamily="34" charset="-120"/>
-              </a:rPr>
-              <a:t>tableOutput()</a:t>
-            </a:r>
-            <a:r>
-              <a:rPr lang="es-ES" sz="1400" b="1" dirty="0">
-                <a:solidFill>
-                  <a:schemeClr val="bg1"/>
-                </a:solidFill>
-                <a:latin typeface="Calibri" pitchFamily="34" charset="0"/>
-                <a:ea typeface="Calibri" pitchFamily="34" charset="-122"/>
-                <a:cs typeface="Calibri" pitchFamily="34" charset="-120"/>
-              </a:rPr>
-              <a:t> y </a:t>
-            </a:r>
-            <a:r>
-              <a:rPr lang="es-ES" sz="1400" b="1" i="1" dirty="0">
-                <a:solidFill>
-                  <a:schemeClr val="bg1"/>
-                </a:solidFill>
-                <a:latin typeface="Calibri" pitchFamily="34" charset="0"/>
-                <a:ea typeface="Calibri" pitchFamily="34" charset="-122"/>
-                <a:cs typeface="Calibri" pitchFamily="34" charset="-120"/>
-              </a:rPr>
-              <a:t>textOutput()</a:t>
-            </a:r>
-            <a:r>
-              <a:rPr lang="es-ES" sz="1400" b="1" dirty="0">
-                <a:solidFill>
-                  <a:schemeClr val="bg1"/>
-                </a:solidFill>
-                <a:latin typeface="Calibri" pitchFamily="34" charset="0"/>
-                <a:ea typeface="Calibri" pitchFamily="34" charset="-122"/>
-                <a:cs typeface="Calibri" pitchFamily="34" charset="-120"/>
-              </a:rPr>
-              <a:t> son espacios vacíos con un id, que el server va a rellenar. </a:t>
-            </a:r>
-            <a:r>
-              <a:rPr lang="es-ES" sz="1400" b="1" i="1" dirty="0">
-                <a:solidFill>
-                  <a:schemeClr val="bg1"/>
-                </a:solidFill>
-                <a:latin typeface="Calibri" pitchFamily="34" charset="0"/>
-                <a:ea typeface="Calibri" pitchFamily="34" charset="-122"/>
-                <a:cs typeface="Calibri" pitchFamily="34" charset="-120"/>
-              </a:rPr>
-              <a:t>TITULO</a:t>
-            </a:r>
-            <a:r>
-              <a:rPr lang="es-ES" sz="1400" b="1" dirty="0">
-                <a:solidFill>
-                  <a:schemeClr val="bg1"/>
-                </a:solidFill>
-                <a:latin typeface="Calibri" pitchFamily="34" charset="0"/>
-                <a:ea typeface="Calibri" pitchFamily="34" charset="-122"/>
-                <a:cs typeface="Calibri" pitchFamily="34" charset="-120"/>
-              </a:rPr>
-              <a:t> es la zona de pruebas.</a:t>
-            </a:r>
           </a:p>
         </p:txBody>
       </p:sp>
@@ -5249,7 +5226,7 @@
           <p:nvPr/>
         </p:nvPicPr>
         <p:blipFill>
-          <a:blip r:embed="rId3"/>
+          <a:blip r:embed="rId2"/>
           <a:stretch>
             <a:fillRect/>
           </a:stretch>
@@ -5279,8 +5256,8 @@
 </p:sld>
 </file>
 
-<file path=ppt/slides/slide16.xml><?xml version="1.0" encoding="utf-8"?>
-<p:sld xmlns:a="http://schemas.openxmlformats.org/drawingml/2006/main" xmlns:p="http://schemas.openxmlformats.org/presentationml/2006/main" xmlns:r="http://schemas.openxmlformats.org/officeDocument/2006/relationships">
+<file path=ppt/slides/slide17.xml><?xml version="1.0" encoding="utf-8"?>
+<p:sld xmlns:a="http://schemas.openxmlformats.org/drawingml/2006/main" xmlns:r="http://schemas.openxmlformats.org/officeDocument/2006/relationships" xmlns:p="http://schemas.openxmlformats.org/presentationml/2006/main">
   <p:cSld>
     <p:bg>
       <p:bgPr>
@@ -5296,7 +5273,14 @@
         <p:cNvGrpSpPr/>
         <p:nvPr/>
       </p:nvGrpSpPr>
-      <p:grpSpPr/>
+      <p:grpSpPr>
+        <a:xfrm>
+          <a:off x="0" y="0"/>
+          <a:ext cx="0" cy="0"/>
+          <a:chOff x="0" y="0"/>
+          <a:chExt cx="0" cy="0"/>
+        </a:xfrm>
+      </p:grpSpPr>
       <p:sp>
         <p:nvSpPr>
           <p:cNvPr id="2" name="Text 0">
@@ -5537,122 +5521,12 @@
           <a:lstStyle/>
           <a:p>
             <a:endParaRPr lang="en-US" sz="1300" dirty="0"/>
-            <a:r>
-              <a:rPr lang="es-ES" sz="1400" b="1" dirty="0">
-                <a:solidFill>
-                  <a:schemeClr val="bg1"/>
-                </a:solidFill>
-                <a:latin typeface="Calibri" pitchFamily="34" charset="0"/>
-                <a:ea typeface="Calibri" pitchFamily="34" charset="-122"/>
-                <a:cs typeface="Calibri" pitchFamily="34" charset="-120"/>
-              </a:rPr>
-              <a:t/>
-            </a:r>
-            <a:r>
-              <a:rPr lang="es-ES" sz="1400" b="1" i="1" dirty="0">
-                <a:solidFill>
-                  <a:schemeClr val="bg1"/>
-                </a:solidFill>
-                <a:latin typeface="Calibri" pitchFamily="34" charset="0"/>
-                <a:ea typeface="Calibri" pitchFamily="34" charset="-122"/>
-                <a:cs typeface="Calibri" pitchFamily="34" charset="-120"/>
-              </a:rPr>
-              <a:t>output$tabla_elecciones &lt;- renderTable()</a:t>
-            </a:r>
-            <a:r>
-              <a:rPr lang="es-ES" sz="1400" b="1" dirty="0">
-                <a:solidFill>
-                  <a:schemeClr val="bg1"/>
-                </a:solidFill>
-                <a:latin typeface="Calibri" pitchFamily="34" charset="0"/>
-                <a:ea typeface="Calibri" pitchFamily="34" charset="-122"/>
-                <a:cs typeface="Calibri" pitchFamily="34" charset="-120"/>
-              </a:rPr>
-              <a:t> rellena el espacio que tiene ese mismo id. </a:t>
-            </a:r>
-            <a:r>
-              <a:rPr lang="es-ES" sz="1400" b="1" i="1" dirty="0">
-                <a:solidFill>
-                  <a:schemeClr val="bg1"/>
-                </a:solidFill>
-                <a:latin typeface="Calibri" pitchFamily="34" charset="0"/>
-                <a:ea typeface="Calibri" pitchFamily="34" charset="-122"/>
-                <a:cs typeface="Calibri" pitchFamily="34" charset="-120"/>
-              </a:rPr>
-              <a:t>renderText()</a:t>
-            </a:r>
-            <a:r>
-              <a:rPr lang="es-ES" sz="1400" b="1" dirty="0">
-                <a:solidFill>
-                  <a:schemeClr val="bg1"/>
-                </a:solidFill>
-                <a:latin typeface="Calibri" pitchFamily="34" charset="0"/>
-                <a:ea typeface="Calibri" pitchFamily="34" charset="-122"/>
-                <a:cs typeface="Calibri" pitchFamily="34" charset="-120"/>
-              </a:rPr>
-              <a:t> hace lo mismo con el total.</a:t>
-            </a:r>
           </a:p>
           <a:p>
             <a:endParaRPr lang="en-US" sz="1300" dirty="0"/>
           </a:p>
           <a:p>
             <a:endParaRPr lang="en-US" sz="1300" dirty="0"/>
-            <a:r>
-              <a:rPr lang="es-ES" sz="1400" b="1" dirty="0">
-                <a:solidFill>
-                  <a:schemeClr val="bg1"/>
-                </a:solidFill>
-                <a:latin typeface="Calibri" pitchFamily="34" charset="0"/>
-                <a:ea typeface="Calibri" pitchFamily="34" charset="-122"/>
-                <a:cs typeface="Calibri" pitchFamily="34" charset="-120"/>
-              </a:rPr>
-              <a:t/>
-            </a:r>
-            <a:r>
-              <a:rPr lang="es-ES" sz="1400" b="1" i="1" dirty="0">
-                <a:solidFill>
-                  <a:schemeClr val="bg1"/>
-                </a:solidFill>
-                <a:latin typeface="Calibri" pitchFamily="34" charset="0"/>
-                <a:ea typeface="Calibri" pitchFamily="34" charset="-122"/>
-                <a:cs typeface="Calibri" pitchFamily="34" charset="-120"/>
-              </a:rPr>
-              <a:t>read.csv()</a:t>
-            </a:r>
-            <a:r>
-              <a:rPr lang="es-ES" sz="1400" b="1" dirty="0">
-                <a:solidFill>
-                  <a:schemeClr val="bg1"/>
-                </a:solidFill>
-                <a:latin typeface="Calibri" pitchFamily="34" charset="0"/>
-                <a:ea typeface="Calibri" pitchFamily="34" charset="-122"/>
-                <a:cs typeface="Calibri" pitchFamily="34" charset="-120"/>
-              </a:rPr>
-              <a:t> corre una sola vez, al arrancar. </a:t>
-            </a:r>
-            <a:r>
-              <a:rPr lang="es-ES" sz="1400" b="1" i="1" dirty="0">
-                <a:solidFill>
-                  <a:schemeClr val="bg1"/>
-                </a:solidFill>
-                <a:latin typeface="Calibri" pitchFamily="34" charset="0"/>
-                <a:ea typeface="Calibri" pitchFamily="34" charset="-122"/>
-                <a:cs typeface="Calibri" pitchFamily="34" charset="-120"/>
-              </a:rPr>
-              <a:t>shinyApp()</a:t>
-            </a:r>
-            <a:r>
-              <a:rPr lang="es-ES" sz="1400" b="1" dirty="0">
-                <a:solidFill>
-                  <a:schemeClr val="bg1"/>
-                </a:solidFill>
-                <a:latin typeface="Calibri" pitchFamily="34" charset="0"/>
-                <a:ea typeface="Calibri" pitchFamily="34" charset="-122"/>
-                <a:cs typeface="Calibri" pitchFamily="34" charset="-120"/>
-              </a:rPr>
-              <a:t> une la ui y el server.</a:t>
-            </a:r>
           </a:p>
         </p:txBody>
       </p:sp>
@@ -5665,7 +5539,7 @@
           <p:nvPr/>
         </p:nvPicPr>
         <p:blipFill>
-          <a:blip r:embed="rId3"/>
+          <a:blip r:embed="rId2"/>
           <a:stretch>
             <a:fillRect/>
           </a:stretch>
@@ -5695,1037 +5569,8 @@
 </p:sld>
 </file>
 
-<file path=ppt/slides/slide17.xml><?xml version="1.0" encoding="utf-8"?>
-<p:sld xmlns:a="http://schemas.openxmlformats.org/drawingml/2006/main" xmlns:p="http://schemas.openxmlformats.org/presentationml/2006/main" xmlns:r="http://schemas.openxmlformats.org/officeDocument/2006/relationships">
-  <p:cSld>
-    <p:bg>
-      <p:bgPr>
-        <a:solidFill>
-          <a:srgbClr val="FFFFFF"/>
-        </a:solidFill>
-        <a:effectLst/>
-      </p:bgPr>
-    </p:bg>
-    <p:spTree>
-      <p:nvGrpSpPr>
-        <p:cNvPr id="2" name=""/>
-        <p:cNvGrpSpPr/>
-        <p:nvPr/>
-      </p:nvGrpSpPr>
-      <p:grpSpPr/>
-      <p:sp>
-        <p:nvSpPr>
-          <p:cNvPr id="3" name="Text 0"/>
-          <p:cNvSpPr txBox="1"/>
-          <p:nvPr/>
-        </p:nvSpPr>
-        <p:spPr>
-          <a:xfrm>
-            <a:off x="502920" y="320040"/>
-            <a:ext cx="7040880" cy="640080"/>
-          </a:xfrm>
-          <a:prstGeom prst="rect">
-            <a:avLst/>
-          </a:prstGeom>
-          <a:noFill/>
-          <a:ln/>
-        </p:spPr>
-        <p:txBody>
-          <a:bodyPr wrap="square" lIns="0" tIns="0" rIns="0" bIns="0" rtlCol="0" anchor="ctr"/>
-          <a:lstStyle/>
-          <a:p>
-            <a:pPr marL="0" indent="0">
-              <a:buNone/>
-            </a:pPr>
-            <a:r>
-              <a:rPr lang="en-US" sz="3000" b="1" dirty="0">
-                <a:solidFill>
-                  <a:srgbClr val="2E0A4E"/>
-                </a:solidFill>
-                <a:latin typeface="Oswald" pitchFamily="34" charset="0"/>
-                <a:ea typeface="Oswald" pitchFamily="34" charset="-122"/>
-                <a:cs typeface="Oswald" pitchFamily="34" charset="-120"/>
-              </a:rPr>
-              <a:t>Componentes a </a:t>
-            </a:r>
-            <a:r>
-              <a:rPr lang="en-US" sz="3000" b="1" dirty="0" err="1">
-                <a:solidFill>
-                  <a:srgbClr val="2E0A4E"/>
-                </a:solidFill>
-                <a:latin typeface="Oswald" pitchFamily="34" charset="0"/>
-                <a:ea typeface="Oswald" pitchFamily="34" charset="-122"/>
-                <a:cs typeface="Oswald" pitchFamily="34" charset="-120"/>
-              </a:rPr>
-              <a:t>observar</a:t>
-            </a:r>
-            <a:r>
-              <a:rPr lang="en-US" sz="3000" b="1" dirty="0">
-                <a:solidFill>
-                  <a:srgbClr val="2E0A4E"/>
-                </a:solidFill>
-                <a:latin typeface="Oswald" pitchFamily="34" charset="0"/>
-                <a:ea typeface="Oswald" pitchFamily="34" charset="-122"/>
-                <a:cs typeface="Oswald" pitchFamily="34" charset="-120"/>
-              </a:rPr>
-              <a:t> en la </a:t>
-            </a:r>
-            <a:r>
-              <a:rPr lang="en-US" sz="3000" b="1" dirty="0" err="1">
-                <a:solidFill>
-                  <a:srgbClr val="2E0A4E"/>
-                </a:solidFill>
-                <a:latin typeface="Oswald" pitchFamily="34" charset="0"/>
-                <a:ea typeface="Oswald" pitchFamily="34" charset="-122"/>
-                <a:cs typeface="Oswald" pitchFamily="34" charset="-120"/>
-              </a:rPr>
-              <a:t>replicación</a:t>
-            </a:r>
-            <a:r>
-              <a:rPr lang="en-US" sz="3000" b="1" dirty="0">
-                <a:solidFill>
-                  <a:srgbClr val="2E0A4E"/>
-                </a:solidFill>
-                <a:latin typeface="Oswald" pitchFamily="34" charset="0"/>
-                <a:ea typeface="Oswald" pitchFamily="34" charset="-122"/>
-                <a:cs typeface="Oswald" pitchFamily="34" charset="-120"/>
-              </a:rPr>
-              <a:t> </a:t>
-            </a:r>
-            <a:endParaRPr lang="en-US" sz="3000" dirty="0"/>
-          </a:p>
-        </p:txBody>
-      </p:sp>
-      <p:sp>
-        <p:nvSpPr>
-          <p:cNvPr id="4" name="Shape 3"/>
-          <p:cNvSpPr/>
-          <p:nvPr/>
-        </p:nvSpPr>
-        <p:spPr>
-          <a:xfrm>
-            <a:off x="502920" y="1188720"/>
-            <a:ext cx="3954780" cy="585216"/>
-          </a:xfrm>
-          <a:prstGeom prst="roundRect">
-            <a:avLst>
-              <a:gd name="adj" fmla="val 7813"/>
-            </a:avLst>
-          </a:prstGeom>
-          <a:solidFill>
-            <a:schemeClr val="accent1">
-              <a:lumMod val="20000"/>
-              <a:lumOff val="80000"/>
-            </a:schemeClr>
-          </a:solidFill>
-          <a:ln w="12700">
-            <a:solidFill>
-              <a:srgbClr val="F4ECFB"/>
-            </a:solidFill>
-            <a:prstDash val="solid"/>
-          </a:ln>
-        </p:spPr>
-        <p:txBody>
-          <a:bodyPr/>
-          <a:lstStyle/>
-          <a:p>
-            <a:endParaRPr lang="en-US"/>
-          </a:p>
-        </p:txBody>
-      </p:sp>
-      <p:sp>
-        <p:nvSpPr>
-          <p:cNvPr id="5" name="Text 4"/>
-          <p:cNvSpPr txBox="1"/>
-          <p:nvPr/>
-        </p:nvSpPr>
-        <p:spPr>
-          <a:xfrm>
-            <a:off x="640080" y="1207008"/>
-            <a:ext cx="3680460" cy="292608"/>
-          </a:xfrm>
-          <a:prstGeom prst="rect">
-            <a:avLst/>
-          </a:prstGeom>
-          <a:noFill/>
-          <a:ln/>
-        </p:spPr>
-        <p:txBody>
-          <a:bodyPr wrap="square" lIns="0" tIns="0" rIns="0" bIns="0" rtlCol="0" anchor="ctr"/>
-          <a:lstStyle/>
-          <a:p>
-            <a:pPr marL="0" indent="0">
-              <a:buNone/>
-            </a:pPr>
-            <a:r>
-              <a:rPr lang="en-US" sz="1050" b="1" dirty="0">
-                <a:solidFill>
-                  <a:srgbClr val="5A189A"/>
-                </a:solidFill>
-                <a:latin typeface="Courier New" pitchFamily="34" charset="0"/>
-                <a:ea typeface="Courier New" pitchFamily="34" charset="-122"/>
-                <a:cs typeface="Courier New" pitchFamily="34" charset="-120"/>
-              </a:rPr>
-              <a:t>objeto &lt;- valor</a:t>
-            </a:r>
-            <a:endParaRPr lang="en-US" sz="1050" dirty="0"/>
-          </a:p>
-        </p:txBody>
-      </p:sp>
-      <p:sp>
-        <p:nvSpPr>
-          <p:cNvPr id="6" name="Text 5"/>
-          <p:cNvSpPr txBox="1"/>
-          <p:nvPr/>
-        </p:nvSpPr>
-        <p:spPr>
-          <a:xfrm>
-            <a:off x="640080" y="1469624"/>
-            <a:ext cx="3680460" cy="292608"/>
-          </a:xfrm>
-          <a:prstGeom prst="rect">
-            <a:avLst/>
-          </a:prstGeom>
-          <a:noFill/>
-          <a:ln/>
-        </p:spPr>
-        <p:txBody>
-          <a:bodyPr wrap="square" lIns="0" tIns="0" rIns="0" bIns="0" rtlCol="0" anchor="ctr"/>
-          <a:lstStyle/>
-          <a:p>
-            <a:pPr marL="0" indent="0">
-              <a:buNone/>
-            </a:pPr>
-            <a:r>
-              <a:rPr lang="en-US" sz="1050" dirty="0">
-                <a:solidFill>
-                  <a:srgbClr val="2E0A4E"/>
-                </a:solidFill>
-                <a:latin typeface="Calibri" pitchFamily="34" charset="0"/>
-                <a:ea typeface="Calibri" pitchFamily="34" charset="-122"/>
-                <a:cs typeface="Calibri" pitchFamily="34" charset="-120"/>
-              </a:rPr>
-              <a:t>Guarda un valor con un nombre.</a:t>
-            </a:r>
-            <a:endParaRPr lang="en-US" sz="1050" dirty="0"/>
-          </a:p>
-        </p:txBody>
-      </p:sp>
-      <p:sp>
-        <p:nvSpPr>
-          <p:cNvPr id="7" name="Shape 6"/>
-          <p:cNvSpPr/>
-          <p:nvPr/>
-        </p:nvSpPr>
-        <p:spPr>
-          <a:xfrm>
-            <a:off x="4675751" y="1609344"/>
-            <a:ext cx="3954780" cy="585216"/>
-          </a:xfrm>
-          <a:prstGeom prst="roundRect">
-            <a:avLst>
-              <a:gd name="adj" fmla="val 7813"/>
-            </a:avLst>
-          </a:prstGeom>
-          <a:solidFill>
-            <a:schemeClr val="accent4">
-              <a:lumMod val="20000"/>
-              <a:lumOff val="80000"/>
-            </a:schemeClr>
-          </a:solidFill>
-          <a:ln w="12700">
-            <a:solidFill>
-              <a:srgbClr val="F4ECFB"/>
-            </a:solidFill>
-            <a:prstDash val="solid"/>
-          </a:ln>
-        </p:spPr>
-        <p:txBody>
-          <a:bodyPr/>
-          <a:lstStyle/>
-          <a:p>
-            <a:endParaRPr lang="en-US"/>
-          </a:p>
-        </p:txBody>
-      </p:sp>
-      <p:sp>
-        <p:nvSpPr>
-          <p:cNvPr id="8" name="Text 7"/>
-          <p:cNvSpPr txBox="1"/>
-          <p:nvPr/>
-        </p:nvSpPr>
-        <p:spPr>
-          <a:xfrm>
-            <a:off x="4812911" y="1627632"/>
-            <a:ext cx="3680460" cy="292608"/>
-          </a:xfrm>
-          <a:prstGeom prst="rect">
-            <a:avLst/>
-          </a:prstGeom>
-          <a:noFill/>
-          <a:ln/>
-        </p:spPr>
-        <p:txBody>
-          <a:bodyPr wrap="square" lIns="0" tIns="0" rIns="0" bIns="0" rtlCol="0" anchor="ctr"/>
-          <a:lstStyle/>
-          <a:p>
-            <a:pPr marL="0" indent="0">
-              <a:buNone/>
-            </a:pPr>
-            <a:r>
-              <a:rPr lang="en-US" sz="1050" b="1" dirty="0">
-                <a:solidFill>
-                  <a:srgbClr val="5A189A"/>
-                </a:solidFill>
-                <a:latin typeface="Courier New" pitchFamily="34" charset="0"/>
-                <a:ea typeface="Courier New" pitchFamily="34" charset="-122"/>
-                <a:cs typeface="Courier New" pitchFamily="34" charset="-120"/>
-              </a:rPr>
-              <a:t>c() y vector[1]</a:t>
-            </a:r>
-            <a:endParaRPr lang="en-US" sz="1050" dirty="0"/>
-          </a:p>
-        </p:txBody>
-      </p:sp>
-      <p:sp>
-        <p:nvSpPr>
-          <p:cNvPr id="9" name="Text 8"/>
-          <p:cNvSpPr txBox="1"/>
-          <p:nvPr/>
-        </p:nvSpPr>
-        <p:spPr>
-          <a:xfrm>
-            <a:off x="4812911" y="1890248"/>
-            <a:ext cx="3680460" cy="292608"/>
-          </a:xfrm>
-          <a:prstGeom prst="rect">
-            <a:avLst/>
-          </a:prstGeom>
-          <a:noFill/>
-          <a:ln/>
-        </p:spPr>
-        <p:txBody>
-          <a:bodyPr wrap="square" lIns="0" tIns="0" rIns="0" bIns="0" rtlCol="0" anchor="ctr"/>
-          <a:lstStyle/>
-          <a:p>
-            <a:pPr marL="0" indent="0">
-              <a:buNone/>
-            </a:pPr>
-            <a:r>
-              <a:rPr lang="en-US" sz="1050" dirty="0">
-                <a:solidFill>
-                  <a:srgbClr val="2E0A4E"/>
-                </a:solidFill>
-                <a:latin typeface="Calibri" pitchFamily="34" charset="0"/>
-                <a:ea typeface="Calibri" pitchFamily="34" charset="-122"/>
-                <a:cs typeface="Calibri" pitchFamily="34" charset="-120"/>
-              </a:rPr>
-              <a:t>Varios valores juntos, y cómo elegir uno.</a:t>
-            </a:r>
-            <a:endParaRPr lang="en-US" sz="1050" dirty="0"/>
-          </a:p>
-        </p:txBody>
-      </p:sp>
-      <p:sp>
-        <p:nvSpPr>
-          <p:cNvPr id="10" name="Shape 9"/>
-          <p:cNvSpPr/>
-          <p:nvPr/>
-        </p:nvSpPr>
-        <p:spPr>
-          <a:xfrm>
-            <a:off x="502920" y="1847088"/>
-            <a:ext cx="3954780" cy="585216"/>
-          </a:xfrm>
-          <a:prstGeom prst="roundRect">
-            <a:avLst>
-              <a:gd name="adj" fmla="val 7813"/>
-            </a:avLst>
-          </a:prstGeom>
-          <a:solidFill>
-            <a:schemeClr val="accent1">
-              <a:lumMod val="20000"/>
-              <a:lumOff val="80000"/>
-            </a:schemeClr>
-          </a:solidFill>
-          <a:ln w="12700">
-            <a:solidFill>
-              <a:srgbClr val="F4ECFB"/>
-            </a:solidFill>
-            <a:prstDash val="solid"/>
-          </a:ln>
-        </p:spPr>
-        <p:txBody>
-          <a:bodyPr/>
-          <a:lstStyle/>
-          <a:p>
-            <a:endParaRPr lang="en-US"/>
-          </a:p>
-        </p:txBody>
-      </p:sp>
-      <p:sp>
-        <p:nvSpPr>
-          <p:cNvPr id="11" name="Text 10"/>
-          <p:cNvSpPr txBox="1"/>
-          <p:nvPr/>
-        </p:nvSpPr>
-        <p:spPr>
-          <a:xfrm>
-            <a:off x="640080" y="1865376"/>
-            <a:ext cx="3680460" cy="292608"/>
-          </a:xfrm>
-          <a:prstGeom prst="rect">
-            <a:avLst/>
-          </a:prstGeom>
-          <a:noFill/>
-          <a:ln/>
-        </p:spPr>
-        <p:txBody>
-          <a:bodyPr wrap="square" lIns="0" tIns="0" rIns="0" bIns="0" rtlCol="0" anchor="ctr"/>
-          <a:lstStyle/>
-          <a:p>
-            <a:pPr marL="0" indent="0">
-              <a:buNone/>
-            </a:pPr>
-            <a:r>
-              <a:rPr lang="en-US" sz="1050" b="1" dirty="0">
-                <a:solidFill>
-                  <a:srgbClr val="5A189A"/>
-                </a:solidFill>
-                <a:latin typeface="Courier New" pitchFamily="34" charset="0"/>
-                <a:ea typeface="Courier New" pitchFamily="34" charset="-122"/>
-                <a:cs typeface="Courier New" pitchFamily="34" charset="-120"/>
-              </a:rPr>
-              <a:t>sum(), mean(), paste0()</a:t>
-            </a:r>
-            <a:endParaRPr lang="en-US" sz="1050" dirty="0"/>
-          </a:p>
-        </p:txBody>
-      </p:sp>
-      <p:sp>
-        <p:nvSpPr>
-          <p:cNvPr id="12" name="Text 11"/>
-          <p:cNvSpPr txBox="1"/>
-          <p:nvPr/>
-        </p:nvSpPr>
-        <p:spPr>
-          <a:xfrm>
-            <a:off x="640080" y="2127992"/>
-            <a:ext cx="3680460" cy="292608"/>
-          </a:xfrm>
-          <a:prstGeom prst="rect">
-            <a:avLst/>
-          </a:prstGeom>
-          <a:noFill/>
-          <a:ln/>
-        </p:spPr>
-        <p:txBody>
-          <a:bodyPr wrap="square" lIns="0" tIns="0" rIns="0" bIns="0" rtlCol="0" anchor="ctr"/>
-          <a:lstStyle/>
-          <a:p>
-            <a:pPr marL="0" indent="0">
-              <a:buNone/>
-            </a:pPr>
-            <a:r>
-              <a:rPr lang="en-US" sz="1050" dirty="0">
-                <a:solidFill>
-                  <a:srgbClr val="2E0A4E"/>
-                </a:solidFill>
-                <a:latin typeface="Calibri" pitchFamily="34" charset="0"/>
-                <a:ea typeface="Calibri" pitchFamily="34" charset="-122"/>
-                <a:cs typeface="Calibri" pitchFamily="34" charset="-120"/>
-              </a:rPr>
-              <a:t>Funciones, reciben algo y devuelven un resultado.</a:t>
-            </a:r>
-            <a:endParaRPr lang="en-US" sz="1050" dirty="0"/>
-          </a:p>
-        </p:txBody>
-      </p:sp>
-      <p:sp>
-        <p:nvSpPr>
-          <p:cNvPr id="13" name="Shape 12"/>
-          <p:cNvSpPr/>
-          <p:nvPr/>
-        </p:nvSpPr>
-        <p:spPr>
-          <a:xfrm>
-            <a:off x="4675751" y="2267712"/>
-            <a:ext cx="3954780" cy="585216"/>
-          </a:xfrm>
-          <a:prstGeom prst="roundRect">
-            <a:avLst>
-              <a:gd name="adj" fmla="val 7813"/>
-            </a:avLst>
-          </a:prstGeom>
-          <a:solidFill>
-            <a:schemeClr val="accent4">
-              <a:lumMod val="20000"/>
-              <a:lumOff val="80000"/>
-            </a:schemeClr>
-          </a:solidFill>
-          <a:ln w="12700">
-            <a:solidFill>
-              <a:srgbClr val="F4ECFB"/>
-            </a:solidFill>
-            <a:prstDash val="solid"/>
-          </a:ln>
-        </p:spPr>
-        <p:txBody>
-          <a:bodyPr/>
-          <a:lstStyle/>
-          <a:p>
-            <a:endParaRPr lang="en-US"/>
-          </a:p>
-        </p:txBody>
-      </p:sp>
-      <p:sp>
-        <p:nvSpPr>
-          <p:cNvPr id="14" name="Text 13"/>
-          <p:cNvSpPr txBox="1"/>
-          <p:nvPr/>
-        </p:nvSpPr>
-        <p:spPr>
-          <a:xfrm>
-            <a:off x="4812911" y="2286000"/>
-            <a:ext cx="3680460" cy="292608"/>
-          </a:xfrm>
-          <a:prstGeom prst="rect">
-            <a:avLst/>
-          </a:prstGeom>
-          <a:noFill/>
-          <a:ln/>
-        </p:spPr>
-        <p:txBody>
-          <a:bodyPr wrap="square" lIns="0" tIns="0" rIns="0" bIns="0" rtlCol="0" anchor="ctr"/>
-          <a:lstStyle/>
-          <a:p>
-            <a:pPr marL="0" indent="0">
-              <a:buNone/>
-            </a:pPr>
-            <a:r>
-              <a:rPr lang="en-US" sz="1050" b="1" dirty="0">
-                <a:solidFill>
-                  <a:srgbClr val="5A189A"/>
-                </a:solidFill>
-                <a:latin typeface="Courier New" pitchFamily="34" charset="0"/>
-                <a:ea typeface="Courier New" pitchFamily="34" charset="-122"/>
-                <a:cs typeface="Courier New" pitchFamily="34" charset="-120"/>
-              </a:rPr>
-              <a:t>install.packages() y library()</a:t>
-            </a:r>
-            <a:endParaRPr lang="en-US" sz="1050" dirty="0"/>
-          </a:p>
-        </p:txBody>
-      </p:sp>
-      <p:sp>
-        <p:nvSpPr>
-          <p:cNvPr id="15" name="Text 14"/>
-          <p:cNvSpPr txBox="1"/>
-          <p:nvPr/>
-        </p:nvSpPr>
-        <p:spPr>
-          <a:xfrm>
-            <a:off x="4812911" y="2548616"/>
-            <a:ext cx="3680460" cy="292608"/>
-          </a:xfrm>
-          <a:prstGeom prst="rect">
-            <a:avLst/>
-          </a:prstGeom>
-          <a:noFill/>
-          <a:ln/>
-        </p:spPr>
-        <p:txBody>
-          <a:bodyPr wrap="square" lIns="0" tIns="0" rIns="0" bIns="0" rtlCol="0" anchor="ctr"/>
-          <a:lstStyle/>
-          <a:p>
-            <a:pPr marL="0" indent="0">
-              <a:buNone/>
-            </a:pPr>
-            <a:r>
-              <a:rPr lang="en-US" sz="1050" dirty="0">
-                <a:solidFill>
-                  <a:srgbClr val="2E0A4E"/>
-                </a:solidFill>
-                <a:latin typeface="Calibri" pitchFamily="34" charset="0"/>
-                <a:ea typeface="Calibri" pitchFamily="34" charset="-122"/>
-                <a:cs typeface="Calibri" pitchFamily="34" charset="-120"/>
-              </a:rPr>
-              <a:t>Instalar una vez, activar cada vez.</a:t>
-            </a:r>
-            <a:endParaRPr lang="en-US" sz="1050" dirty="0"/>
-          </a:p>
-        </p:txBody>
-      </p:sp>
-      <p:sp>
-        <p:nvSpPr>
-          <p:cNvPr id="16" name="Shape 15"/>
-          <p:cNvSpPr/>
-          <p:nvPr/>
-        </p:nvSpPr>
-        <p:spPr>
-          <a:xfrm>
-            <a:off x="502920" y="2505456"/>
-            <a:ext cx="3954780" cy="585216"/>
-          </a:xfrm>
-          <a:prstGeom prst="roundRect">
-            <a:avLst>
-              <a:gd name="adj" fmla="val 7813"/>
-            </a:avLst>
-          </a:prstGeom>
-          <a:solidFill>
-            <a:schemeClr val="accent1">
-              <a:lumMod val="20000"/>
-              <a:lumOff val="80000"/>
-            </a:schemeClr>
-          </a:solidFill>
-          <a:ln w="12700">
-            <a:solidFill>
-              <a:srgbClr val="F4ECFB"/>
-            </a:solidFill>
-            <a:prstDash val="solid"/>
-          </a:ln>
-        </p:spPr>
-        <p:txBody>
-          <a:bodyPr/>
-          <a:lstStyle/>
-          <a:p>
-            <a:endParaRPr lang="en-US"/>
-          </a:p>
-        </p:txBody>
-      </p:sp>
-      <p:sp>
-        <p:nvSpPr>
-          <p:cNvPr id="17" name="Text 16"/>
-          <p:cNvSpPr txBox="1"/>
-          <p:nvPr/>
-        </p:nvSpPr>
-        <p:spPr>
-          <a:xfrm>
-            <a:off x="640080" y="2523744"/>
-            <a:ext cx="3680460" cy="292608"/>
-          </a:xfrm>
-          <a:prstGeom prst="rect">
-            <a:avLst/>
-          </a:prstGeom>
-          <a:noFill/>
-          <a:ln/>
-        </p:spPr>
-        <p:txBody>
-          <a:bodyPr wrap="square" lIns="0" tIns="0" rIns="0" bIns="0" rtlCol="0" anchor="ctr"/>
-          <a:lstStyle/>
-          <a:p>
-            <a:pPr marL="0" indent="0">
-              <a:buNone/>
-            </a:pPr>
-            <a:r>
-              <a:rPr lang="en-US" sz="1050" b="1" dirty="0">
-                <a:solidFill>
-                  <a:srgbClr val="5A189A"/>
-                </a:solidFill>
-                <a:latin typeface="Courier New" pitchFamily="34" charset="0"/>
-                <a:ea typeface="Courier New" pitchFamily="34" charset="-122"/>
-                <a:cs typeface="Courier New" pitchFamily="34" charset="-120"/>
-              </a:rPr>
-              <a:t>getwd() y read.csv()</a:t>
-            </a:r>
-            <a:endParaRPr lang="en-US" sz="1050" dirty="0"/>
-          </a:p>
-        </p:txBody>
-      </p:sp>
-      <p:sp>
-        <p:nvSpPr>
-          <p:cNvPr id="18" name="Text 17"/>
-          <p:cNvSpPr txBox="1"/>
-          <p:nvPr/>
-        </p:nvSpPr>
-        <p:spPr>
-          <a:xfrm>
-            <a:off x="640080" y="2786360"/>
-            <a:ext cx="3680460" cy="292608"/>
-          </a:xfrm>
-          <a:prstGeom prst="rect">
-            <a:avLst/>
-          </a:prstGeom>
-          <a:noFill/>
-          <a:ln/>
-        </p:spPr>
-        <p:txBody>
-          <a:bodyPr wrap="square" lIns="0" tIns="0" rIns="0" bIns="0" rtlCol="0" anchor="ctr"/>
-          <a:lstStyle/>
-          <a:p>
-            <a:pPr marL="0" indent="0">
-              <a:buNone/>
-            </a:pPr>
-            <a:r>
-              <a:rPr lang="en-US" sz="1050" dirty="0">
-                <a:solidFill>
-                  <a:srgbClr val="2E0A4E"/>
-                </a:solidFill>
-                <a:latin typeface="Calibri" pitchFamily="34" charset="0"/>
-                <a:ea typeface="Calibri" pitchFamily="34" charset="-122"/>
-                <a:cs typeface="Calibri" pitchFamily="34" charset="-120"/>
-              </a:rPr>
-              <a:t>Dónde está parado R y cómo lee un CSV.</a:t>
-            </a:r>
-            <a:endParaRPr lang="en-US" sz="1050" dirty="0"/>
-          </a:p>
-        </p:txBody>
-      </p:sp>
-      <p:sp>
-        <p:nvSpPr>
-          <p:cNvPr id="19" name="Shape 18"/>
-          <p:cNvSpPr/>
-          <p:nvPr/>
-        </p:nvSpPr>
-        <p:spPr>
-          <a:xfrm>
-            <a:off x="4675751" y="2926080"/>
-            <a:ext cx="3954780" cy="585216"/>
-          </a:xfrm>
-          <a:prstGeom prst="roundRect">
-            <a:avLst>
-              <a:gd name="adj" fmla="val 7813"/>
-            </a:avLst>
-          </a:prstGeom>
-          <a:solidFill>
-            <a:schemeClr val="accent4">
-              <a:lumMod val="20000"/>
-              <a:lumOff val="80000"/>
-            </a:schemeClr>
-          </a:solidFill>
-          <a:ln w="12700">
-            <a:solidFill>
-              <a:srgbClr val="F4ECFB"/>
-            </a:solidFill>
-            <a:prstDash val="solid"/>
-          </a:ln>
-        </p:spPr>
-        <p:txBody>
-          <a:bodyPr/>
-          <a:lstStyle/>
-          <a:p>
-            <a:endParaRPr lang="en-US"/>
-          </a:p>
-        </p:txBody>
-      </p:sp>
-      <p:sp>
-        <p:nvSpPr>
-          <p:cNvPr id="20" name="Text 19"/>
-          <p:cNvSpPr txBox="1"/>
-          <p:nvPr/>
-        </p:nvSpPr>
-        <p:spPr>
-          <a:xfrm>
-            <a:off x="4812911" y="2944368"/>
-            <a:ext cx="3680460" cy="292608"/>
-          </a:xfrm>
-          <a:prstGeom prst="rect">
-            <a:avLst/>
-          </a:prstGeom>
-          <a:noFill/>
-          <a:ln/>
-        </p:spPr>
-        <p:txBody>
-          <a:bodyPr wrap="square" lIns="0" tIns="0" rIns="0" bIns="0" rtlCol="0" anchor="ctr"/>
-          <a:lstStyle/>
-          <a:p>
-            <a:pPr marL="0" indent="0">
-              <a:buNone/>
-            </a:pPr>
-            <a:r>
-              <a:rPr lang="en-US" sz="1050" b="1" dirty="0">
-                <a:solidFill>
-                  <a:srgbClr val="5A189A"/>
-                </a:solidFill>
-                <a:latin typeface="Courier New" pitchFamily="34" charset="0"/>
-                <a:ea typeface="Courier New" pitchFamily="34" charset="-122"/>
-                <a:cs typeface="Courier New" pitchFamily="34" charset="-120"/>
-              </a:rPr>
-              <a:t>datos$columna y datos[filas, columnas]</a:t>
-            </a:r>
-            <a:endParaRPr lang="en-US" sz="1050" dirty="0"/>
-          </a:p>
-        </p:txBody>
-      </p:sp>
-      <p:sp>
-        <p:nvSpPr>
-          <p:cNvPr id="21" name="Text 20"/>
-          <p:cNvSpPr txBox="1"/>
-          <p:nvPr/>
-        </p:nvSpPr>
-        <p:spPr>
-          <a:xfrm>
-            <a:off x="4812911" y="3206984"/>
-            <a:ext cx="3680460" cy="292608"/>
-          </a:xfrm>
-          <a:prstGeom prst="rect">
-            <a:avLst/>
-          </a:prstGeom>
-          <a:noFill/>
-          <a:ln/>
-        </p:spPr>
-        <p:txBody>
-          <a:bodyPr wrap="square" lIns="0" tIns="0" rIns="0" bIns="0" rtlCol="0" anchor="ctr"/>
-          <a:lstStyle/>
-          <a:p>
-            <a:pPr marL="0" indent="0">
-              <a:buNone/>
-            </a:pPr>
-            <a:r>
-              <a:rPr lang="en-US" sz="1050" dirty="0">
-                <a:solidFill>
-                  <a:srgbClr val="2E0A4E"/>
-                </a:solidFill>
-                <a:latin typeface="Calibri" pitchFamily="34" charset="0"/>
-                <a:ea typeface="Calibri" pitchFamily="34" charset="-122"/>
-                <a:cs typeface="Calibri" pitchFamily="34" charset="-120"/>
-              </a:rPr>
-              <a:t>Elegir partes de un data frame.</a:t>
-            </a:r>
-            <a:endParaRPr lang="en-US" sz="1050" dirty="0"/>
-          </a:p>
-        </p:txBody>
-      </p:sp>
-      <p:sp>
-        <p:nvSpPr>
-          <p:cNvPr id="22" name="Shape 21"/>
-          <p:cNvSpPr/>
-          <p:nvPr/>
-        </p:nvSpPr>
-        <p:spPr>
-          <a:xfrm>
-            <a:off x="502920" y="3163824"/>
-            <a:ext cx="3954780" cy="585216"/>
-          </a:xfrm>
-          <a:prstGeom prst="roundRect">
-            <a:avLst>
-              <a:gd name="adj" fmla="val 7813"/>
-            </a:avLst>
-          </a:prstGeom>
-          <a:solidFill>
-            <a:schemeClr val="accent1">
-              <a:lumMod val="20000"/>
-              <a:lumOff val="80000"/>
-            </a:schemeClr>
-          </a:solidFill>
-          <a:ln w="12700">
-            <a:solidFill>
-              <a:srgbClr val="F4ECFB"/>
-            </a:solidFill>
-            <a:prstDash val="solid"/>
-          </a:ln>
-        </p:spPr>
-        <p:txBody>
-          <a:bodyPr/>
-          <a:lstStyle/>
-          <a:p>
-            <a:endParaRPr lang="en-US"/>
-          </a:p>
-        </p:txBody>
-      </p:sp>
-      <p:sp>
-        <p:nvSpPr>
-          <p:cNvPr id="23" name="Text 22"/>
-          <p:cNvSpPr txBox="1"/>
-          <p:nvPr/>
-        </p:nvSpPr>
-        <p:spPr>
-          <a:xfrm>
-            <a:off x="640080" y="3182112"/>
-            <a:ext cx="3680460" cy="292608"/>
-          </a:xfrm>
-          <a:prstGeom prst="rect">
-            <a:avLst/>
-          </a:prstGeom>
-          <a:noFill/>
-          <a:ln/>
-        </p:spPr>
-        <p:txBody>
-          <a:bodyPr wrap="square" lIns="0" tIns="0" rIns="0" bIns="0" rtlCol="0" anchor="ctr"/>
-          <a:lstStyle/>
-          <a:p>
-            <a:pPr marL="0" indent="0">
-              <a:buNone/>
-            </a:pPr>
-            <a:r>
-              <a:rPr lang="en-US" sz="1050" b="1" dirty="0">
-                <a:solidFill>
-                  <a:srgbClr val="5A189A"/>
-                </a:solidFill>
-                <a:latin typeface="Courier New" pitchFamily="34" charset="0"/>
-                <a:ea typeface="Courier New" pitchFamily="34" charset="-122"/>
-                <a:cs typeface="Courier New" pitchFamily="34" charset="-120"/>
-              </a:rPr>
-              <a:t>ui, server y shinyApp()</a:t>
-            </a:r>
-            <a:endParaRPr lang="en-US" sz="1050" dirty="0"/>
-          </a:p>
-        </p:txBody>
-      </p:sp>
-      <p:sp>
-        <p:nvSpPr>
-          <p:cNvPr id="24" name="Text 23"/>
-          <p:cNvSpPr txBox="1"/>
-          <p:nvPr/>
-        </p:nvSpPr>
-        <p:spPr>
-          <a:xfrm>
-            <a:off x="640080" y="3444728"/>
-            <a:ext cx="3680460" cy="292608"/>
-          </a:xfrm>
-          <a:prstGeom prst="rect">
-            <a:avLst/>
-          </a:prstGeom>
-          <a:noFill/>
-          <a:ln/>
-        </p:spPr>
-        <p:txBody>
-          <a:bodyPr wrap="square" lIns="0" tIns="0" rIns="0" bIns="0" rtlCol="0" anchor="ctr"/>
-          <a:lstStyle/>
-          <a:p>
-            <a:pPr marL="0" indent="0">
-              <a:buNone/>
-            </a:pPr>
-            <a:r>
-              <a:rPr lang="en-US" sz="1050" dirty="0">
-                <a:solidFill>
-                  <a:srgbClr val="2E0A4E"/>
-                </a:solidFill>
-                <a:latin typeface="Calibri" pitchFamily="34" charset="0"/>
-                <a:ea typeface="Calibri" pitchFamily="34" charset="-122"/>
-                <a:cs typeface="Calibri" pitchFamily="34" charset="-120"/>
-              </a:rPr>
-              <a:t>Las tres piezas de toda app de Shiny.</a:t>
-            </a:r>
-            <a:endParaRPr lang="en-US" sz="1050" dirty="0"/>
-          </a:p>
-        </p:txBody>
-      </p:sp>
-      <p:sp>
-        <p:nvSpPr>
-          <p:cNvPr id="25" name="Shape 18"/>
-          <p:cNvSpPr/>
-          <p:nvPr/>
-        </p:nvSpPr>
-        <p:spPr>
-          <a:xfrm>
-            <a:off x="4675751" y="3584448"/>
-            <a:ext cx="3954780" cy="585216"/>
-          </a:xfrm>
-          <a:prstGeom prst="roundRect">
-            <a:avLst>
-              <a:gd name="adj" fmla="val 7813"/>
-            </a:avLst>
-          </a:prstGeom>
-          <a:solidFill>
-            <a:schemeClr val="accent4">
-              <a:lumMod val="20000"/>
-              <a:lumOff val="80000"/>
-            </a:schemeClr>
-          </a:solidFill>
-          <a:ln w="12700">
-            <a:solidFill>
-              <a:srgbClr val="F4ECFB"/>
-            </a:solidFill>
-            <a:prstDash val="solid"/>
-          </a:ln>
-        </p:spPr>
-        <p:txBody>
-          <a:bodyPr/>
-          <a:lstStyle/>
-          <a:p>
-            <a:endParaRPr lang="en-US"/>
-          </a:p>
-        </p:txBody>
-      </p:sp>
-      <p:sp>
-        <p:nvSpPr>
-          <p:cNvPr id="26" name="Text 19"/>
-          <p:cNvSpPr txBox="1"/>
-          <p:nvPr/>
-        </p:nvSpPr>
-        <p:spPr>
-          <a:xfrm>
-            <a:off x="4812911" y="3602736"/>
-            <a:ext cx="3680460" cy="292608"/>
-          </a:xfrm>
-          <a:prstGeom prst="rect">
-            <a:avLst/>
-          </a:prstGeom>
-          <a:noFill/>
-          <a:ln/>
-        </p:spPr>
-        <p:txBody>
-          <a:bodyPr wrap="square" lIns="0" tIns="0" rIns="0" bIns="0" rtlCol="0" anchor="ctr"/>
-          <a:lstStyle/>
-          <a:p>
-            <a:pPr marL="0" indent="0">
-              <a:buNone/>
-            </a:pPr>
-            <a:r>
-              <a:rPr lang="en-US" sz="1050" b="1" dirty="0">
-                <a:solidFill>
-                  <a:srgbClr val="5A189A"/>
-                </a:solidFill>
-                <a:latin typeface="Courier New" pitchFamily="34" charset="0"/>
-                <a:ea typeface="Courier New" pitchFamily="34" charset="-122"/>
-                <a:cs typeface="Courier New" pitchFamily="34" charset="-120"/>
-              </a:rPr>
-              <a:t>tableOutput() y renderTable()</a:t>
-            </a:r>
-            <a:endParaRPr lang="en-US" sz="1050" dirty="0"/>
-          </a:p>
-        </p:txBody>
-      </p:sp>
-      <p:sp>
-        <p:nvSpPr>
-          <p:cNvPr id="27" name="Text 20"/>
-          <p:cNvSpPr txBox="1"/>
-          <p:nvPr/>
-        </p:nvSpPr>
-        <p:spPr>
-          <a:xfrm>
-            <a:off x="4812911" y="3865352"/>
-            <a:ext cx="3680460" cy="292608"/>
-          </a:xfrm>
-          <a:prstGeom prst="rect">
-            <a:avLst/>
-          </a:prstGeom>
-          <a:noFill/>
-          <a:ln/>
-        </p:spPr>
-        <p:txBody>
-          <a:bodyPr wrap="square" lIns="0" tIns="0" rIns="0" bIns="0" rtlCol="0" anchor="ctr"/>
-          <a:lstStyle/>
-          <a:p>
-            <a:pPr marL="0" indent="0">
-              <a:buNone/>
-            </a:pPr>
-            <a:r>
-              <a:rPr lang="en-US" sz="1050" dirty="0">
-                <a:solidFill>
-                  <a:srgbClr val="2E0A4E"/>
-                </a:solidFill>
-                <a:latin typeface="Calibri" pitchFamily="34" charset="0"/>
-                <a:ea typeface="Calibri" pitchFamily="34" charset="-122"/>
-                <a:cs typeface="Calibri" pitchFamily="34" charset="-120"/>
-              </a:rPr>
-              <a:t>Un espacio en la ui y lo que lo rellena.</a:t>
-            </a:r>
-            <a:endParaRPr lang="en-US" sz="1050" dirty="0"/>
-          </a:p>
-        </p:txBody>
-      </p:sp>
-    </p:spTree>
-  </p:cSld>
-  <p:clrMapOvr>
-    <a:masterClrMapping/>
-  </p:clrMapOvr>
-</p:sld>
-</file>
-
 <file path=ppt/slides/slide18.xml><?xml version="1.0" encoding="utf-8"?>
-<p:sld xmlns:a="http://schemas.openxmlformats.org/drawingml/2006/main" xmlns:p="http://schemas.openxmlformats.org/presentationml/2006/main" xmlns:r="http://schemas.openxmlformats.org/officeDocument/2006/relationships">
+<p:sld xmlns:a="http://schemas.openxmlformats.org/drawingml/2006/main" xmlns:r="http://schemas.openxmlformats.org/officeDocument/2006/relationships" xmlns:p="http://schemas.openxmlformats.org/presentationml/2006/main">
   <p:cSld>
     <p:bg>
       <p:bgPr>
@@ -6741,10 +5586,17 @@
         <p:cNvGrpSpPr/>
         <p:nvPr/>
       </p:nvGrpSpPr>
-      <p:grpSpPr/>
-      <p:sp>
-        <p:nvSpPr>
-          <p:cNvPr id="2" name="Text 0"/>
+      <p:grpSpPr>
+        <a:xfrm>
+          <a:off x="0" y="0"/>
+          <a:ext cx="0" cy="0"/>
+          <a:chOff x="0" y="0"/>
+          <a:chExt cx="0" cy="0"/>
+        </a:xfrm>
+      </p:grpSpPr>
+      <p:sp>
+        <p:nvSpPr>
+          <p:cNvPr id="3" name="Text 0"/>
           <p:cNvSpPr txBox="1"/>
           <p:nvPr/>
         </p:nvSpPr>
@@ -6775,7 +5627,51 @@
                 <a:ea typeface="Oswald" pitchFamily="34" charset="-122"/>
                 <a:cs typeface="Oswald" pitchFamily="34" charset="-120"/>
               </a:rPr>
-              <a:t>Código clave</a:t>
+              <a:t>Componentes a </a:t>
+            </a:r>
+            <a:r>
+              <a:rPr lang="en-US" sz="3000" b="1" dirty="0" err="1">
+                <a:solidFill>
+                  <a:srgbClr val="2E0A4E"/>
+                </a:solidFill>
+                <a:latin typeface="Oswald" pitchFamily="34" charset="0"/>
+                <a:ea typeface="Oswald" pitchFamily="34" charset="-122"/>
+                <a:cs typeface="Oswald" pitchFamily="34" charset="-120"/>
+              </a:rPr>
+              <a:t>observar</a:t>
+            </a:r>
+            <a:r>
+              <a:rPr lang="en-US" sz="3000" b="1" dirty="0">
+                <a:solidFill>
+                  <a:srgbClr val="2E0A4E"/>
+                </a:solidFill>
+                <a:latin typeface="Oswald" pitchFamily="34" charset="0"/>
+                <a:ea typeface="Oswald" pitchFamily="34" charset="-122"/>
+                <a:cs typeface="Oswald" pitchFamily="34" charset="-120"/>
+              </a:rPr>
+              <a:t> en la </a:t>
+            </a:r>
+            <a:r>
+              <a:rPr lang="en-US" sz="3000" b="1" dirty="0" err="1">
+                <a:solidFill>
+                  <a:srgbClr val="2E0A4E"/>
+                </a:solidFill>
+                <a:latin typeface="Oswald" pitchFamily="34" charset="0"/>
+                <a:ea typeface="Oswald" pitchFamily="34" charset="-122"/>
+                <a:cs typeface="Oswald" pitchFamily="34" charset="-120"/>
+              </a:rPr>
+              <a:t>replicación</a:t>
+            </a:r>
+            <a:r>
+              <a:rPr lang="en-US" sz="3000" b="1" dirty="0">
+                <a:solidFill>
+                  <a:srgbClr val="2E0A4E"/>
+                </a:solidFill>
+                <a:latin typeface="Oswald" pitchFamily="34" charset="0"/>
+                <a:ea typeface="Oswald" pitchFamily="34" charset="-122"/>
+                <a:cs typeface="Oswald" pitchFamily="34" charset="-120"/>
+              </a:rPr>
+              <a:t> </a:t>
             </a:r>
             <a:endParaRPr lang="en-US" sz="3000" dirty="0"/>
           </a:p>
@@ -6783,14 +5679,51 @@
       </p:sp>
       <p:sp>
         <p:nvSpPr>
-          <p:cNvPr id="4" name="Text 2"/>
+          <p:cNvPr id="4" name="Shape 3"/>
+          <p:cNvSpPr/>
+          <p:nvPr/>
+        </p:nvSpPr>
+        <p:spPr>
+          <a:xfrm>
+            <a:off x="502920" y="1188720"/>
+            <a:ext cx="3954780" cy="585216"/>
+          </a:xfrm>
+          <a:prstGeom prst="roundRect">
+            <a:avLst>
+              <a:gd name="adj" fmla="val 7813"/>
+            </a:avLst>
+          </a:prstGeom>
+          <a:solidFill>
+            <a:schemeClr val="accent1">
+              <a:lumMod val="20000"/>
+              <a:lumOff val="80000"/>
+            </a:schemeClr>
+          </a:solidFill>
+          <a:ln w="12700">
+            <a:solidFill>
+              <a:srgbClr val="F4ECFB"/>
+            </a:solidFill>
+            <a:prstDash val="solid"/>
+          </a:ln>
+        </p:spPr>
+        <p:txBody>
+          <a:bodyPr/>
+          <a:lstStyle/>
+          <a:p>
+            <a:endParaRPr lang="en-US"/>
+          </a:p>
+        </p:txBody>
+      </p:sp>
+      <p:sp>
+        <p:nvSpPr>
+          <p:cNvPr id="5" name="Text 4"/>
           <p:cNvSpPr txBox="1"/>
           <p:nvPr/>
         </p:nvSpPr>
         <p:spPr>
           <a:xfrm>
-            <a:off x="502920" y="4759452"/>
-            <a:ext cx="8138160" cy="228600"/>
+            <a:off x="640080" y="1207008"/>
+            <a:ext cx="3680460" cy="292608"/>
           </a:xfrm>
           <a:prstGeom prst="rect">
             <a:avLst/>
@@ -6806,42 +5739,84 @@
               <a:buNone/>
             </a:pPr>
             <a:r>
-              <a:rPr lang="en-US" sz="900" dirty="0">
-                <a:solidFill>
-                  <a:srgbClr val="999999"/>
+              <a:rPr lang="en-US" sz="1050" b="1" dirty="0">
+                <a:solidFill>
+                  <a:srgbClr val="5A189A"/>
+                </a:solidFill>
+                <a:latin typeface="Courier New" pitchFamily="34" charset="0"/>
+                <a:ea typeface="Courier New" pitchFamily="34" charset="-122"/>
+                <a:cs typeface="Courier New" pitchFamily="34" charset="-120"/>
+              </a:rPr>
+              <a:t>objeto &lt;- valor</a:t>
+            </a:r>
+            <a:endParaRPr lang="en-US" sz="1050" dirty="0"/>
+          </a:p>
+        </p:txBody>
+      </p:sp>
+      <p:sp>
+        <p:nvSpPr>
+          <p:cNvPr id="6" name="Text 5"/>
+          <p:cNvSpPr txBox="1"/>
+          <p:nvPr/>
+        </p:nvSpPr>
+        <p:spPr>
+          <a:xfrm>
+            <a:off x="640080" y="1469624"/>
+            <a:ext cx="3680460" cy="292608"/>
+          </a:xfrm>
+          <a:prstGeom prst="rect">
+            <a:avLst/>
+          </a:prstGeom>
+          <a:noFill/>
+          <a:ln/>
+        </p:spPr>
+        <p:txBody>
+          <a:bodyPr wrap="square" lIns="0" tIns="0" rIns="0" bIns="0" rtlCol="0" anchor="ctr"/>
+          <a:lstStyle/>
+          <a:p>
+            <a:pPr marL="0" indent="0">
+              <a:buNone/>
+            </a:pPr>
+            <a:r>
+              <a:rPr lang="en-US" sz="1050" dirty="0">
+                <a:solidFill>
+                  <a:srgbClr val="2E0A4E"/>
                 </a:solidFill>
                 <a:latin typeface="Calibri" pitchFamily="34" charset="0"/>
                 <a:ea typeface="Calibri" pitchFamily="34" charset="-122"/>
                 <a:cs typeface="Calibri" pitchFamily="34" charset="-120"/>
               </a:rPr>
-              <a:t>Visualización interactiva de datos con R y Shiny · Udelar</a:t>
-            </a:r>
-            <a:endParaRPr lang="en-US" sz="900" dirty="0"/>
-          </a:p>
-        </p:txBody>
-      </p:sp>
-      <p:sp>
-        <p:nvSpPr>
-          <p:cNvPr id="5" name="Shape 3"/>
+              <a:t>Guarda un valor con un nombre.</a:t>
+            </a:r>
+            <a:endParaRPr lang="en-US" sz="1050" dirty="0"/>
+          </a:p>
+        </p:txBody>
+      </p:sp>
+      <p:sp>
+        <p:nvSpPr>
+          <p:cNvPr id="7" name="Shape 6"/>
           <p:cNvSpPr/>
           <p:nvPr/>
         </p:nvSpPr>
         <p:spPr>
           <a:xfrm>
-            <a:off x="502920" y="1188720"/>
-            <a:ext cx="8138160" cy="3429000"/>
+            <a:off x="4675751" y="1609344"/>
+            <a:ext cx="3954780" cy="585216"/>
           </a:xfrm>
           <a:prstGeom prst="roundRect">
             <a:avLst>
-              <a:gd name="adj" fmla="val 1600"/>
+              <a:gd name="adj" fmla="val 7813"/>
             </a:avLst>
           </a:prstGeom>
           <a:solidFill>
-            <a:srgbClr val="2E0A4E"/>
+            <a:schemeClr val="accent4">
+              <a:lumMod val="20000"/>
+              <a:lumOff val="80000"/>
+            </a:schemeClr>
           </a:solidFill>
           <a:ln w="12700">
             <a:solidFill>
-              <a:srgbClr val="2E0A4E"/>
+              <a:srgbClr val="F4ECFB"/>
             </a:solidFill>
             <a:prstDash val="solid"/>
           </a:ln>
@@ -6856,14 +5831,14 @@
       </p:sp>
       <p:sp>
         <p:nvSpPr>
-          <p:cNvPr id="6" name="Text 4"/>
+          <p:cNvPr id="8" name="Text 7"/>
           <p:cNvSpPr txBox="1"/>
           <p:nvPr/>
         </p:nvSpPr>
         <p:spPr>
           <a:xfrm>
-            <a:off x="777240" y="1325880"/>
-            <a:ext cx="7589520" cy="3154680"/>
+            <a:off x="4812911" y="1627632"/>
+            <a:ext cx="3680460" cy="292608"/>
           </a:xfrm>
           <a:prstGeom prst="rect">
             <a:avLst/>
@@ -6872,367 +5847,753 @@
           <a:ln/>
         </p:spPr>
         <p:txBody>
-          <a:bodyPr wrap="square" lIns="0" tIns="0" rIns="0" bIns="0" rtlCol="0" anchor="t"/>
+          <a:bodyPr wrap="square" lIns="0" tIns="0" rIns="0" bIns="0" rtlCol="0" anchor="ctr"/>
           <a:lstStyle/>
           <a:p>
             <a:pPr marL="0" indent="0">
-              <a:spcAft>
-                <a:spcPts val="200"/>
-              </a:spcAft>
               <a:buNone/>
             </a:pPr>
             <a:r>
-              <a:rPr lang="en-US" sz="1000" dirty="0">
-                <a:solidFill>
-                  <a:srgbClr val="F1E9F8"/>
+              <a:rPr lang="en-US" sz="1050" b="1" dirty="0">
+                <a:solidFill>
+                  <a:srgbClr val="5A189A"/>
                 </a:solidFill>
                 <a:latin typeface="Courier New" pitchFamily="34" charset="0"/>
                 <a:ea typeface="Courier New" pitchFamily="34" charset="-122"/>
                 <a:cs typeface="Courier New" pitchFamily="34" charset="-120"/>
               </a:rPr>
-              <a:t>library(shiny)</a:t>
-            </a:r>
-            <a:endParaRPr lang="en-US" sz="1100" dirty="0"/>
-          </a:p>
+              <a:t>c() y vector[1]</a:t>
+            </a:r>
+            <a:endParaRPr lang="en-US" sz="1050" dirty="0"/>
+          </a:p>
+        </p:txBody>
+      </p:sp>
+      <p:sp>
+        <p:nvSpPr>
+          <p:cNvPr id="9" name="Text 8"/>
+          <p:cNvSpPr txBox="1"/>
+          <p:nvPr/>
+        </p:nvSpPr>
+        <p:spPr>
+          <a:xfrm>
+            <a:off x="4812911" y="1890248"/>
+            <a:ext cx="3680460" cy="292608"/>
+          </a:xfrm>
+          <a:prstGeom prst="rect">
+            <a:avLst/>
+          </a:prstGeom>
+          <a:noFill/>
+          <a:ln/>
+        </p:spPr>
+        <p:txBody>
+          <a:bodyPr wrap="square" lIns="0" tIns="0" rIns="0" bIns="0" rtlCol="0" anchor="ctr"/>
+          <a:lstStyle/>
           <a:p>
             <a:pPr marL="0" indent="0">
-              <a:spcAft>
-                <a:spcPts val="200"/>
-              </a:spcAft>
               <a:buNone/>
             </a:pPr>
             <a:r>
-              <a:rPr lang="en-US" sz="1000" dirty="0">
-                <a:solidFill>
-                  <a:srgbClr val="F1E9F8"/>
+              <a:rPr lang="en-US" sz="1050" dirty="0">
+                <a:solidFill>
+                  <a:srgbClr val="2E0A4E"/>
+                </a:solidFill>
+                <a:latin typeface="Calibri" pitchFamily="34" charset="0"/>
+                <a:ea typeface="Calibri" pitchFamily="34" charset="-122"/>
+                <a:cs typeface="Calibri" pitchFamily="34" charset="-120"/>
+              </a:rPr>
+              <a:t>Varios valores juntos, y cómo elegir uno.</a:t>
+            </a:r>
+            <a:endParaRPr lang="en-US" sz="1050" dirty="0"/>
+          </a:p>
+        </p:txBody>
+      </p:sp>
+      <p:sp>
+        <p:nvSpPr>
+          <p:cNvPr id="10" name="Shape 9"/>
+          <p:cNvSpPr/>
+          <p:nvPr/>
+        </p:nvSpPr>
+        <p:spPr>
+          <a:xfrm>
+            <a:off x="502920" y="1847088"/>
+            <a:ext cx="3954780" cy="585216"/>
+          </a:xfrm>
+          <a:prstGeom prst="roundRect">
+            <a:avLst>
+              <a:gd name="adj" fmla="val 7813"/>
+            </a:avLst>
+          </a:prstGeom>
+          <a:solidFill>
+            <a:schemeClr val="accent1">
+              <a:lumMod val="20000"/>
+              <a:lumOff val="80000"/>
+            </a:schemeClr>
+          </a:solidFill>
+          <a:ln w="12700">
+            <a:solidFill>
+              <a:srgbClr val="F4ECFB"/>
+            </a:solidFill>
+            <a:prstDash val="solid"/>
+          </a:ln>
+        </p:spPr>
+        <p:txBody>
+          <a:bodyPr/>
+          <a:lstStyle/>
+          <a:p>
+            <a:endParaRPr lang="en-US"/>
+          </a:p>
+        </p:txBody>
+      </p:sp>
+      <p:sp>
+        <p:nvSpPr>
+          <p:cNvPr id="11" name="Text 10"/>
+          <p:cNvSpPr txBox="1"/>
+          <p:nvPr/>
+        </p:nvSpPr>
+        <p:spPr>
+          <a:xfrm>
+            <a:off x="640080" y="1865376"/>
+            <a:ext cx="3680460" cy="292608"/>
+          </a:xfrm>
+          <a:prstGeom prst="rect">
+            <a:avLst/>
+          </a:prstGeom>
+          <a:noFill/>
+          <a:ln/>
+        </p:spPr>
+        <p:txBody>
+          <a:bodyPr wrap="square" lIns="0" tIns="0" rIns="0" bIns="0" rtlCol="0" anchor="ctr"/>
+          <a:lstStyle/>
+          <a:p>
+            <a:pPr marL="0" indent="0">
+              <a:buNone/>
+            </a:pPr>
+            <a:r>
+              <a:rPr lang="en-US" sz="1050" b="1" dirty="0">
+                <a:solidFill>
+                  <a:srgbClr val="5A189A"/>
                 </a:solidFill>
                 <a:latin typeface="Courier New" pitchFamily="34" charset="0"/>
                 <a:ea typeface="Courier New" pitchFamily="34" charset="-122"/>
                 <a:cs typeface="Courier New" pitchFamily="34" charset="-120"/>
               </a:rPr>
-              <a:t>TITULO &lt;- "Mi primera app Shiny"</a:t>
-            </a:r>
-            <a:endParaRPr lang="en-US" sz="1100" dirty="0"/>
-          </a:p>
+              <a:t>sum(), mean(), paste0()</a:t>
+            </a:r>
+            <a:endParaRPr lang="en-US" sz="1050" dirty="0"/>
+          </a:p>
+        </p:txBody>
+      </p:sp>
+      <p:sp>
+        <p:nvSpPr>
+          <p:cNvPr id="12" name="Text 11"/>
+          <p:cNvSpPr txBox="1"/>
+          <p:nvPr/>
+        </p:nvSpPr>
+        <p:spPr>
+          <a:xfrm>
+            <a:off x="640080" y="2127992"/>
+            <a:ext cx="3680460" cy="292608"/>
+          </a:xfrm>
+          <a:prstGeom prst="rect">
+            <a:avLst/>
+          </a:prstGeom>
+          <a:noFill/>
+          <a:ln/>
+        </p:spPr>
+        <p:txBody>
+          <a:bodyPr wrap="square" lIns="0" tIns="0" rIns="0" bIns="0" rtlCol="0" anchor="ctr"/>
+          <a:lstStyle/>
           <a:p>
             <a:pPr marL="0" indent="0">
-              <a:spcAft>
-                <a:spcPts val="200"/>
-              </a:spcAft>
               <a:buNone/>
             </a:pPr>
             <a:r>
-              <a:rPr lang="en-US" sz="1000" dirty="0">
-                <a:solidFill>
-                  <a:srgbClr val="F1E9F8"/>
+              <a:rPr lang="en-US" sz="1050" dirty="0">
+                <a:solidFill>
+                  <a:srgbClr val="2E0A4E"/>
+                </a:solidFill>
+                <a:latin typeface="Calibri" pitchFamily="34" charset="0"/>
+                <a:ea typeface="Calibri" pitchFamily="34" charset="-122"/>
+                <a:cs typeface="Calibri" pitchFamily="34" charset="-120"/>
+              </a:rPr>
+              <a:t>Funciones, reciben algo y devuelven un resultado.</a:t>
+            </a:r>
+            <a:endParaRPr lang="en-US" sz="1050" dirty="0"/>
+          </a:p>
+        </p:txBody>
+      </p:sp>
+      <p:sp>
+        <p:nvSpPr>
+          <p:cNvPr id="13" name="Shape 12"/>
+          <p:cNvSpPr/>
+          <p:nvPr/>
+        </p:nvSpPr>
+        <p:spPr>
+          <a:xfrm>
+            <a:off x="4675751" y="2267712"/>
+            <a:ext cx="3954780" cy="585216"/>
+          </a:xfrm>
+          <a:prstGeom prst="roundRect">
+            <a:avLst>
+              <a:gd name="adj" fmla="val 7813"/>
+            </a:avLst>
+          </a:prstGeom>
+          <a:solidFill>
+            <a:schemeClr val="accent4">
+              <a:lumMod val="20000"/>
+              <a:lumOff val="80000"/>
+            </a:schemeClr>
+          </a:solidFill>
+          <a:ln w="12700">
+            <a:solidFill>
+              <a:srgbClr val="F4ECFB"/>
+            </a:solidFill>
+            <a:prstDash val="solid"/>
+          </a:ln>
+        </p:spPr>
+        <p:txBody>
+          <a:bodyPr/>
+          <a:lstStyle/>
+          <a:p>
+            <a:endParaRPr lang="en-US"/>
+          </a:p>
+        </p:txBody>
+      </p:sp>
+      <p:sp>
+        <p:nvSpPr>
+          <p:cNvPr id="14" name="Text 13"/>
+          <p:cNvSpPr txBox="1"/>
+          <p:nvPr/>
+        </p:nvSpPr>
+        <p:spPr>
+          <a:xfrm>
+            <a:off x="4812911" y="2286000"/>
+            <a:ext cx="3680460" cy="292608"/>
+          </a:xfrm>
+          <a:prstGeom prst="rect">
+            <a:avLst/>
+          </a:prstGeom>
+          <a:noFill/>
+          <a:ln/>
+        </p:spPr>
+        <p:txBody>
+          <a:bodyPr wrap="square" lIns="0" tIns="0" rIns="0" bIns="0" rtlCol="0" anchor="ctr"/>
+          <a:lstStyle/>
+          <a:p>
+            <a:pPr marL="0" indent="0">
+              <a:buNone/>
+            </a:pPr>
+            <a:r>
+              <a:rPr lang="en-US" sz="1050" b="1" dirty="0">
+                <a:solidFill>
+                  <a:srgbClr val="5A189A"/>
                 </a:solidFill>
                 <a:latin typeface="Courier New" pitchFamily="34" charset="0"/>
                 <a:ea typeface="Courier New" pitchFamily="34" charset="-122"/>
                 <a:cs typeface="Courier New" pitchFamily="34" charset="-120"/>
               </a:rPr>
-              <a:t>elecciones &lt;- read.csv("../datos/elecciones_departamento_2024.csv")</a:t>
-            </a:r>
-            <a:endParaRPr lang="en-US" sz="1100" dirty="0"/>
-          </a:p>
+              <a:t>install.packages() y library()</a:t>
+            </a:r>
+            <a:endParaRPr lang="en-US" sz="1050" dirty="0"/>
+          </a:p>
+        </p:txBody>
+      </p:sp>
+      <p:sp>
+        <p:nvSpPr>
+          <p:cNvPr id="15" name="Text 14"/>
+          <p:cNvSpPr txBox="1"/>
+          <p:nvPr/>
+        </p:nvSpPr>
+        <p:spPr>
+          <a:xfrm>
+            <a:off x="4812911" y="2548616"/>
+            <a:ext cx="3680460" cy="292608"/>
+          </a:xfrm>
+          <a:prstGeom prst="rect">
+            <a:avLst/>
+          </a:prstGeom>
+          <a:noFill/>
+          <a:ln/>
+        </p:spPr>
+        <p:txBody>
+          <a:bodyPr wrap="square" lIns="0" tIns="0" rIns="0" bIns="0" rtlCol="0" anchor="ctr"/>
+          <a:lstStyle/>
           <a:p>
             <a:pPr marL="0" indent="0">
-              <a:spcAft>
-                <a:spcPts val="200"/>
-              </a:spcAft>
               <a:buNone/>
             </a:pPr>
             <a:r>
-              <a:rPr lang="en-US" sz="1000" dirty="0">
-                <a:solidFill>
-                  <a:srgbClr val="F1E9F8"/>
+              <a:rPr lang="en-US" sz="1050" dirty="0">
+                <a:solidFill>
+                  <a:srgbClr val="2E0A4E"/>
+                </a:solidFill>
+                <a:latin typeface="Calibri" pitchFamily="34" charset="0"/>
+                <a:ea typeface="Calibri" pitchFamily="34" charset="-122"/>
+                <a:cs typeface="Calibri" pitchFamily="34" charset="-120"/>
+              </a:rPr>
+              <a:t>Instalar una vez, activar cada vez.</a:t>
+            </a:r>
+            <a:endParaRPr lang="en-US" sz="1050" dirty="0"/>
+          </a:p>
+        </p:txBody>
+      </p:sp>
+      <p:sp>
+        <p:nvSpPr>
+          <p:cNvPr id="16" name="Shape 15"/>
+          <p:cNvSpPr/>
+          <p:nvPr/>
+        </p:nvSpPr>
+        <p:spPr>
+          <a:xfrm>
+            <a:off x="502920" y="2505456"/>
+            <a:ext cx="3954780" cy="585216"/>
+          </a:xfrm>
+          <a:prstGeom prst="roundRect">
+            <a:avLst>
+              <a:gd name="adj" fmla="val 7813"/>
+            </a:avLst>
+          </a:prstGeom>
+          <a:solidFill>
+            <a:schemeClr val="accent1">
+              <a:lumMod val="20000"/>
+              <a:lumOff val="80000"/>
+            </a:schemeClr>
+          </a:solidFill>
+          <a:ln w="12700">
+            <a:solidFill>
+              <a:srgbClr val="F4ECFB"/>
+            </a:solidFill>
+            <a:prstDash val="solid"/>
+          </a:ln>
+        </p:spPr>
+        <p:txBody>
+          <a:bodyPr/>
+          <a:lstStyle/>
+          <a:p>
+            <a:endParaRPr lang="en-US"/>
+          </a:p>
+        </p:txBody>
+      </p:sp>
+      <p:sp>
+        <p:nvSpPr>
+          <p:cNvPr id="17" name="Text 16"/>
+          <p:cNvSpPr txBox="1"/>
+          <p:nvPr/>
+        </p:nvSpPr>
+        <p:spPr>
+          <a:xfrm>
+            <a:off x="640080" y="2523744"/>
+            <a:ext cx="3680460" cy="292608"/>
+          </a:xfrm>
+          <a:prstGeom prst="rect">
+            <a:avLst/>
+          </a:prstGeom>
+          <a:noFill/>
+          <a:ln/>
+        </p:spPr>
+        <p:txBody>
+          <a:bodyPr wrap="square" lIns="0" tIns="0" rIns="0" bIns="0" rtlCol="0" anchor="ctr"/>
+          <a:lstStyle/>
+          <a:p>
+            <a:pPr marL="0" indent="0">
+              <a:buNone/>
+            </a:pPr>
+            <a:r>
+              <a:rPr lang="en-US" sz="1050" b="1" dirty="0">
+                <a:solidFill>
+                  <a:srgbClr val="5A189A"/>
                 </a:solidFill>
                 <a:latin typeface="Courier New" pitchFamily="34" charset="0"/>
                 <a:ea typeface="Courier New" pitchFamily="34" charset="-122"/>
                 <a:cs typeface="Courier New" pitchFamily="34" charset="-120"/>
               </a:rPr>
-              <a:t>ui &lt;- fluidPage(</a:t>
-            </a:r>
-            <a:endParaRPr lang="en-US" sz="1100" dirty="0"/>
-          </a:p>
+              <a:t>getwd() y read.csv()</a:t>
+            </a:r>
+            <a:endParaRPr lang="en-US" sz="1050" dirty="0"/>
+          </a:p>
+        </p:txBody>
+      </p:sp>
+      <p:sp>
+        <p:nvSpPr>
+          <p:cNvPr id="18" name="Text 17"/>
+          <p:cNvSpPr txBox="1"/>
+          <p:nvPr/>
+        </p:nvSpPr>
+        <p:spPr>
+          <a:xfrm>
+            <a:off x="640080" y="2786360"/>
+            <a:ext cx="3680460" cy="292608"/>
+          </a:xfrm>
+          <a:prstGeom prst="rect">
+            <a:avLst/>
+          </a:prstGeom>
+          <a:noFill/>
+          <a:ln/>
+        </p:spPr>
+        <p:txBody>
+          <a:bodyPr wrap="square" lIns="0" tIns="0" rIns="0" bIns="0" rtlCol="0" anchor="ctr"/>
+          <a:lstStyle/>
           <a:p>
             <a:pPr marL="0" indent="0">
-              <a:spcAft>
-                <a:spcPts val="200"/>
-              </a:spcAft>
               <a:buNone/>
             </a:pPr>
             <a:r>
-              <a:rPr lang="en-US" sz="1000" dirty="0">
-                <a:solidFill>
-                  <a:srgbClr val="F1E9F8"/>
+              <a:rPr lang="en-US" sz="1050" dirty="0">
+                <a:solidFill>
+                  <a:srgbClr val="2E0A4E"/>
+                </a:solidFill>
+                <a:latin typeface="Calibri" pitchFamily="34" charset="0"/>
+                <a:ea typeface="Calibri" pitchFamily="34" charset="-122"/>
+                <a:cs typeface="Calibri" pitchFamily="34" charset="-120"/>
+              </a:rPr>
+              <a:t>Dónde está parado R y cómo lee un CSV.</a:t>
+            </a:r>
+            <a:endParaRPr lang="en-US" sz="1050" dirty="0"/>
+          </a:p>
+        </p:txBody>
+      </p:sp>
+      <p:sp>
+        <p:nvSpPr>
+          <p:cNvPr id="19" name="Shape 18"/>
+          <p:cNvSpPr/>
+          <p:nvPr/>
+        </p:nvSpPr>
+        <p:spPr>
+          <a:xfrm>
+            <a:off x="4675751" y="2926080"/>
+            <a:ext cx="3954780" cy="585216"/>
+          </a:xfrm>
+          <a:prstGeom prst="roundRect">
+            <a:avLst>
+              <a:gd name="adj" fmla="val 7813"/>
+            </a:avLst>
+          </a:prstGeom>
+          <a:solidFill>
+            <a:schemeClr val="accent4">
+              <a:lumMod val="20000"/>
+              <a:lumOff val="80000"/>
+            </a:schemeClr>
+          </a:solidFill>
+          <a:ln w="12700">
+            <a:solidFill>
+              <a:srgbClr val="F4ECFB"/>
+            </a:solidFill>
+            <a:prstDash val="solid"/>
+          </a:ln>
+        </p:spPr>
+        <p:txBody>
+          <a:bodyPr/>
+          <a:lstStyle/>
+          <a:p>
+            <a:endParaRPr lang="en-US"/>
+          </a:p>
+        </p:txBody>
+      </p:sp>
+      <p:sp>
+        <p:nvSpPr>
+          <p:cNvPr id="20" name="Text 19"/>
+          <p:cNvSpPr txBox="1"/>
+          <p:nvPr/>
+        </p:nvSpPr>
+        <p:spPr>
+          <a:xfrm>
+            <a:off x="4812911" y="2944368"/>
+            <a:ext cx="3680460" cy="292608"/>
+          </a:xfrm>
+          <a:prstGeom prst="rect">
+            <a:avLst/>
+          </a:prstGeom>
+          <a:noFill/>
+          <a:ln/>
+        </p:spPr>
+        <p:txBody>
+          <a:bodyPr wrap="square" lIns="0" tIns="0" rIns="0" bIns="0" rtlCol="0" anchor="ctr"/>
+          <a:lstStyle/>
+          <a:p>
+            <a:pPr marL="0" indent="0">
+              <a:buNone/>
+            </a:pPr>
+            <a:r>
+              <a:rPr lang="en-US" sz="1050" b="1" dirty="0">
+                <a:solidFill>
+                  <a:srgbClr val="5A189A"/>
                 </a:solidFill>
                 <a:latin typeface="Courier New" pitchFamily="34" charset="0"/>
                 <a:ea typeface="Courier New" pitchFamily="34" charset="-122"/>
                 <a:cs typeface="Courier New" pitchFamily="34" charset="-120"/>
               </a:rPr>
-              <a:t>  titlePanel(TITULO),</a:t>
-            </a:r>
-            <a:endParaRPr lang="en-US" sz="1100" dirty="0"/>
-          </a:p>
+              <a:t>datos$columna y datos[filas, columnas]</a:t>
+            </a:r>
+            <a:endParaRPr lang="en-US" sz="1050" dirty="0"/>
+          </a:p>
+        </p:txBody>
+      </p:sp>
+      <p:sp>
+        <p:nvSpPr>
+          <p:cNvPr id="21" name="Text 20"/>
+          <p:cNvSpPr txBox="1"/>
+          <p:nvPr/>
+        </p:nvSpPr>
+        <p:spPr>
+          <a:xfrm>
+            <a:off x="4812911" y="3206984"/>
+            <a:ext cx="3680460" cy="292608"/>
+          </a:xfrm>
+          <a:prstGeom prst="rect">
+            <a:avLst/>
+          </a:prstGeom>
+          <a:noFill/>
+          <a:ln/>
+        </p:spPr>
+        <p:txBody>
+          <a:bodyPr wrap="square" lIns="0" tIns="0" rIns="0" bIns="0" rtlCol="0" anchor="ctr"/>
+          <a:lstStyle/>
           <a:p>
             <a:pPr marL="0" indent="0">
-              <a:spcAft>
-                <a:spcPts val="200"/>
-              </a:spcAft>
               <a:buNone/>
             </a:pPr>
             <a:r>
-              <a:rPr lang="en-US" sz="1000" dirty="0">
-                <a:solidFill>
-                  <a:srgbClr val="F1E9F8"/>
+              <a:rPr lang="en-US" sz="1050" dirty="0">
+                <a:solidFill>
+                  <a:srgbClr val="2E0A4E"/>
+                </a:solidFill>
+                <a:latin typeface="Calibri" pitchFamily="34" charset="0"/>
+                <a:ea typeface="Calibri" pitchFamily="34" charset="-122"/>
+                <a:cs typeface="Calibri" pitchFamily="34" charset="-120"/>
+              </a:rPr>
+              <a:t>Elegir partes de un data frame.</a:t>
+            </a:r>
+            <a:endParaRPr lang="en-US" sz="1050" dirty="0"/>
+          </a:p>
+        </p:txBody>
+      </p:sp>
+      <p:sp>
+        <p:nvSpPr>
+          <p:cNvPr id="22" name="Shape 21"/>
+          <p:cNvSpPr/>
+          <p:nvPr/>
+        </p:nvSpPr>
+        <p:spPr>
+          <a:xfrm>
+            <a:off x="502920" y="3163824"/>
+            <a:ext cx="3954780" cy="585216"/>
+          </a:xfrm>
+          <a:prstGeom prst="roundRect">
+            <a:avLst>
+              <a:gd name="adj" fmla="val 7813"/>
+            </a:avLst>
+          </a:prstGeom>
+          <a:solidFill>
+            <a:schemeClr val="accent1">
+              <a:lumMod val="20000"/>
+              <a:lumOff val="80000"/>
+            </a:schemeClr>
+          </a:solidFill>
+          <a:ln w="12700">
+            <a:solidFill>
+              <a:srgbClr val="F4ECFB"/>
+            </a:solidFill>
+            <a:prstDash val="solid"/>
+          </a:ln>
+        </p:spPr>
+        <p:txBody>
+          <a:bodyPr/>
+          <a:lstStyle/>
+          <a:p>
+            <a:endParaRPr lang="en-US"/>
+          </a:p>
+        </p:txBody>
+      </p:sp>
+      <p:sp>
+        <p:nvSpPr>
+          <p:cNvPr id="23" name="Text 22"/>
+          <p:cNvSpPr txBox="1"/>
+          <p:nvPr/>
+        </p:nvSpPr>
+        <p:spPr>
+          <a:xfrm>
+            <a:off x="640080" y="3182112"/>
+            <a:ext cx="3680460" cy="292608"/>
+          </a:xfrm>
+          <a:prstGeom prst="rect">
+            <a:avLst/>
+          </a:prstGeom>
+          <a:noFill/>
+          <a:ln/>
+        </p:spPr>
+        <p:txBody>
+          <a:bodyPr wrap="square" lIns="0" tIns="0" rIns="0" bIns="0" rtlCol="0" anchor="ctr"/>
+          <a:lstStyle/>
+          <a:p>
+            <a:pPr marL="0" indent="0">
+              <a:buNone/>
+            </a:pPr>
+            <a:r>
+              <a:rPr lang="en-US" sz="1050" b="1" dirty="0">
+                <a:solidFill>
+                  <a:srgbClr val="5A189A"/>
                 </a:solidFill>
                 <a:latin typeface="Courier New" pitchFamily="34" charset="0"/>
                 <a:ea typeface="Courier New" pitchFamily="34" charset="-122"/>
                 <a:cs typeface="Courier New" pitchFamily="34" charset="-120"/>
               </a:rPr>
-              <a:t>  h3("Votos emitidos por departamento"),</a:t>
-            </a:r>
-            <a:endParaRPr lang="en-US" sz="1100" dirty="0"/>
-          </a:p>
+              <a:t>ui, server y shinyApp()</a:t>
+            </a:r>
+            <a:endParaRPr lang="en-US" sz="1050" dirty="0"/>
+          </a:p>
+        </p:txBody>
+      </p:sp>
+      <p:sp>
+        <p:nvSpPr>
+          <p:cNvPr id="24" name="Text 23"/>
+          <p:cNvSpPr txBox="1"/>
+          <p:nvPr/>
+        </p:nvSpPr>
+        <p:spPr>
+          <a:xfrm>
+            <a:off x="640080" y="3444728"/>
+            <a:ext cx="3680460" cy="292608"/>
+          </a:xfrm>
+          <a:prstGeom prst="rect">
+            <a:avLst/>
+          </a:prstGeom>
+          <a:noFill/>
+          <a:ln/>
+        </p:spPr>
+        <p:txBody>
+          <a:bodyPr wrap="square" lIns="0" tIns="0" rIns="0" bIns="0" rtlCol="0" anchor="ctr"/>
+          <a:lstStyle/>
           <a:p>
             <a:pPr marL="0" indent="0">
-              <a:spcAft>
-                <a:spcPts val="200"/>
-              </a:spcAft>
               <a:buNone/>
             </a:pPr>
             <a:r>
-              <a:rPr lang="en-US" sz="1000" dirty="0">
-                <a:solidFill>
-                  <a:srgbClr val="F1E9F8"/>
+              <a:rPr lang="en-US" sz="1050" dirty="0">
+                <a:solidFill>
+                  <a:srgbClr val="2E0A4E"/>
+                </a:solidFill>
+                <a:latin typeface="Calibri" pitchFamily="34" charset="0"/>
+                <a:ea typeface="Calibri" pitchFamily="34" charset="-122"/>
+                <a:cs typeface="Calibri" pitchFamily="34" charset="-120"/>
+              </a:rPr>
+              <a:t>Las tres piezas de toda app de Shiny.</a:t>
+            </a:r>
+            <a:endParaRPr lang="en-US" sz="1050" dirty="0"/>
+          </a:p>
+        </p:txBody>
+      </p:sp>
+      <p:sp>
+        <p:nvSpPr>
+          <p:cNvPr id="25" name="Shape 18"/>
+          <p:cNvSpPr/>
+          <p:nvPr/>
+        </p:nvSpPr>
+        <p:spPr>
+          <a:xfrm>
+            <a:off x="4675751" y="3584448"/>
+            <a:ext cx="3954780" cy="585216"/>
+          </a:xfrm>
+          <a:prstGeom prst="roundRect">
+            <a:avLst>
+              <a:gd name="adj" fmla="val 7813"/>
+            </a:avLst>
+          </a:prstGeom>
+          <a:solidFill>
+            <a:schemeClr val="accent4">
+              <a:lumMod val="20000"/>
+              <a:lumOff val="80000"/>
+            </a:schemeClr>
+          </a:solidFill>
+          <a:ln w="12700">
+            <a:solidFill>
+              <a:srgbClr val="F4ECFB"/>
+            </a:solidFill>
+            <a:prstDash val="solid"/>
+          </a:ln>
+        </p:spPr>
+        <p:txBody>
+          <a:bodyPr/>
+          <a:lstStyle/>
+          <a:p>
+            <a:endParaRPr lang="en-US"/>
+          </a:p>
+        </p:txBody>
+      </p:sp>
+      <p:sp>
+        <p:nvSpPr>
+          <p:cNvPr id="26" name="Text 19"/>
+          <p:cNvSpPr txBox="1"/>
+          <p:nvPr/>
+        </p:nvSpPr>
+        <p:spPr>
+          <a:xfrm>
+            <a:off x="4812911" y="3602736"/>
+            <a:ext cx="3680460" cy="292608"/>
+          </a:xfrm>
+          <a:prstGeom prst="rect">
+            <a:avLst/>
+          </a:prstGeom>
+          <a:noFill/>
+          <a:ln/>
+        </p:spPr>
+        <p:txBody>
+          <a:bodyPr wrap="square" lIns="0" tIns="0" rIns="0" bIns="0" rtlCol="0" anchor="ctr"/>
+          <a:lstStyle/>
+          <a:p>
+            <a:pPr marL="0" indent="0">
+              <a:buNone/>
+            </a:pPr>
+            <a:r>
+              <a:rPr lang="en-US" sz="1050" b="1" dirty="0">
+                <a:solidFill>
+                  <a:srgbClr val="5A189A"/>
                 </a:solidFill>
                 <a:latin typeface="Courier New" pitchFamily="34" charset="0"/>
                 <a:ea typeface="Courier New" pitchFamily="34" charset="-122"/>
                 <a:cs typeface="Courier New" pitchFamily="34" charset="-120"/>
               </a:rPr>
-              <a:t>  tableOutput("tabla_elecciones"),</a:t>
-            </a:r>
-            <a:endParaRPr lang="en-US" sz="1100" dirty="0"/>
-          </a:p>
+              <a:t>tableOutput() y renderTable()</a:t>
+            </a:r>
+            <a:endParaRPr lang="en-US" sz="1050" dirty="0"/>
+          </a:p>
+        </p:txBody>
+      </p:sp>
+      <p:sp>
+        <p:nvSpPr>
+          <p:cNvPr id="27" name="Text 20"/>
+          <p:cNvSpPr txBox="1"/>
+          <p:nvPr/>
+        </p:nvSpPr>
+        <p:spPr>
+          <a:xfrm>
+            <a:off x="4812911" y="3865352"/>
+            <a:ext cx="3680460" cy="292608"/>
+          </a:xfrm>
+          <a:prstGeom prst="rect">
+            <a:avLst/>
+          </a:prstGeom>
+          <a:noFill/>
+          <a:ln/>
+        </p:spPr>
+        <p:txBody>
+          <a:bodyPr wrap="square" lIns="0" tIns="0" rIns="0" bIns="0" rtlCol="0" anchor="ctr"/>
+          <a:lstStyle/>
           <a:p>
             <a:pPr marL="0" indent="0">
-              <a:spcAft>
-                <a:spcPts val="200"/>
-              </a:spcAft>
               <a:buNone/>
             </a:pPr>
             <a:r>
-              <a:rPr lang="en-US" sz="1000" dirty="0">
-                <a:solidFill>
-                  <a:srgbClr val="F1E9F8"/>
-                </a:solidFill>
-                <a:latin typeface="Courier New" pitchFamily="34" charset="0"/>
-                <a:ea typeface="Courier New" pitchFamily="34" charset="-122"/>
-                <a:cs typeface="Courier New" pitchFamily="34" charset="-120"/>
-              </a:rPr>
-              <a:t>  textOutput("resumen")</a:t>
-            </a:r>
-            <a:endParaRPr lang="en-US" sz="1100" dirty="0"/>
-          </a:p>
-          <a:p>
-            <a:pPr marL="0" indent="0">
-              <a:spcAft>
-                <a:spcPts val="200"/>
-              </a:spcAft>
-              <a:buNone/>
-            </a:pPr>
-            <a:r>
-              <a:rPr lang="en-US" sz="1000" dirty="0">
-                <a:solidFill>
-                  <a:srgbClr val="F1E9F8"/>
-                </a:solidFill>
-                <a:latin typeface="Courier New" pitchFamily="34" charset="0"/>
-                <a:ea typeface="Courier New" pitchFamily="34" charset="-122"/>
-                <a:cs typeface="Courier New" pitchFamily="34" charset="-120"/>
-              </a:rPr>
-              <a:t>)</a:t>
-            </a:r>
-            <a:endParaRPr lang="en-US" sz="1100" dirty="0"/>
-          </a:p>
-          <a:p>
-            <a:pPr marL="0" indent="0">
-              <a:spcAft>
-                <a:spcPts val="200"/>
-              </a:spcAft>
-              <a:buNone/>
-            </a:pPr>
-            <a:r>
-              <a:rPr lang="en-US" sz="1000" dirty="0">
-                <a:solidFill>
-                  <a:srgbClr val="F1E9F8"/>
-                </a:solidFill>
-                <a:latin typeface="Courier New" pitchFamily="34" charset="0"/>
-                <a:ea typeface="Courier New" pitchFamily="34" charset="-122"/>
-                <a:cs typeface="Courier New" pitchFamily="34" charset="-120"/>
-              </a:rPr>
-              <a:t>server &lt;- function(input, output, session) {</a:t>
-            </a:r>
-            <a:endParaRPr lang="en-US" sz="1100" dirty="0"/>
-          </a:p>
-          <a:p>
-            <a:pPr marL="0" indent="0">
-              <a:spcAft>
-                <a:spcPts val="200"/>
-              </a:spcAft>
-              <a:buNone/>
-            </a:pPr>
-            <a:r>
-              <a:rPr lang="en-US" sz="1000" dirty="0">
-                <a:solidFill>
-                  <a:srgbClr val="F1E9F8"/>
-                </a:solidFill>
-                <a:latin typeface="Courier New" pitchFamily="34" charset="0"/>
-                <a:ea typeface="Courier New" pitchFamily="34" charset="-122"/>
-                <a:cs typeface="Courier New" pitchFamily="34" charset="-120"/>
-              </a:rPr>
-              <a:t>  output$tabla_elecciones &lt;- renderTable({</a:t>
-            </a:r>
-            <a:endParaRPr lang="en-US" sz="1100" dirty="0"/>
-          </a:p>
-          <a:p>
-            <a:pPr marL="0" indent="0">
-              <a:spcAft>
-                <a:spcPts val="200"/>
-              </a:spcAft>
-              <a:buNone/>
-            </a:pPr>
-            <a:r>
-              <a:rPr lang="en-US" sz="1000" dirty="0">
-                <a:solidFill>
-                  <a:srgbClr val="F1E9F8"/>
-                </a:solidFill>
-                <a:latin typeface="Courier New" pitchFamily="34" charset="0"/>
-                <a:ea typeface="Courier New" pitchFamily="34" charset="-122"/>
-                <a:cs typeface="Courier New" pitchFamily="34" charset="-120"/>
-              </a:rPr>
-              <a:t>    elecciones[, c("departamento", "emitidos")]</a:t>
-            </a:r>
-            <a:endParaRPr lang="en-US" sz="1100" dirty="0"/>
-          </a:p>
-          <a:p>
-            <a:pPr marL="0" indent="0">
-              <a:spcAft>
-                <a:spcPts val="200"/>
-              </a:spcAft>
-              <a:buNone/>
-            </a:pPr>
-            <a:r>
-              <a:rPr lang="en-US" sz="1000" dirty="0">
-                <a:solidFill>
-                  <a:srgbClr val="F1E9F8"/>
-                </a:solidFill>
-                <a:latin typeface="Courier New" pitchFamily="34" charset="0"/>
-                <a:ea typeface="Courier New" pitchFamily="34" charset="-122"/>
-                <a:cs typeface="Courier New" pitchFamily="34" charset="-120"/>
-              </a:rPr>
-              <a:t>  })</a:t>
-            </a:r>
-            <a:endParaRPr lang="en-US" sz="1100" dirty="0"/>
-          </a:p>
-          <a:p>
-            <a:pPr marL="0" indent="0">
-              <a:spcAft>
-                <a:spcPts val="200"/>
-              </a:spcAft>
-              <a:buNone/>
-            </a:pPr>
-            <a:r>
-              <a:rPr lang="en-US" sz="1000" dirty="0">
-                <a:solidFill>
-                  <a:srgbClr val="F1E9F8"/>
-                </a:solidFill>
-                <a:latin typeface="Courier New" pitchFamily="34" charset="0"/>
-                <a:ea typeface="Courier New" pitchFamily="34" charset="-122"/>
-                <a:cs typeface="Courier New" pitchFamily="34" charset="-120"/>
-              </a:rPr>
-              <a:t>  output$resumen &lt;- renderText({</a:t>
-            </a:r>
-            <a:endParaRPr lang="en-US" sz="1100" dirty="0"/>
-          </a:p>
-          <a:p>
-            <a:pPr marL="0" indent="0">
-              <a:spcAft>
-                <a:spcPts val="200"/>
-              </a:spcAft>
-              <a:buNone/>
-            </a:pPr>
-            <a:r>
-              <a:rPr lang="en-US" sz="1000" dirty="0">
-                <a:solidFill>
-                  <a:srgbClr val="F1E9F8"/>
-                </a:solidFill>
-                <a:latin typeface="Courier New" pitchFamily="34" charset="0"/>
-                <a:ea typeface="Courier New" pitchFamily="34" charset="-122"/>
-                <a:cs typeface="Courier New" pitchFamily="34" charset="-120"/>
-              </a:rPr>
-              <a:t>    paste0("Votos emitidos en total: ", sum(elecciones$emitidos))</a:t>
-            </a:r>
-            <a:endParaRPr lang="en-US" sz="1100" dirty="0"/>
-          </a:p>
-          <a:p>
-            <a:pPr marL="0" indent="0">
-              <a:spcAft>
-                <a:spcPts val="200"/>
-              </a:spcAft>
-              <a:buNone/>
-            </a:pPr>
-            <a:r>
-              <a:rPr lang="en-US" sz="1000" dirty="0">
-                <a:solidFill>
-                  <a:srgbClr val="F1E9F8"/>
-                </a:solidFill>
-                <a:latin typeface="Courier New" pitchFamily="34" charset="0"/>
-                <a:ea typeface="Courier New" pitchFamily="34" charset="-122"/>
-                <a:cs typeface="Courier New" pitchFamily="34" charset="-120"/>
-              </a:rPr>
-              <a:t>  })</a:t>
-            </a:r>
-            <a:endParaRPr lang="en-US" sz="1100" dirty="0"/>
-          </a:p>
-          <a:p>
-            <a:pPr marL="0" indent="0">
-              <a:spcAft>
-                <a:spcPts val="200"/>
-              </a:spcAft>
-              <a:buNone/>
-            </a:pPr>
-            <a:r>
-              <a:rPr lang="en-US" sz="1000" dirty="0">
-                <a:solidFill>
-                  <a:srgbClr val="F1E9F8"/>
-                </a:solidFill>
-                <a:latin typeface="Courier New" pitchFamily="34" charset="0"/>
-                <a:ea typeface="Courier New" pitchFamily="34" charset="-122"/>
-                <a:cs typeface="Courier New" pitchFamily="34" charset="-120"/>
-              </a:rPr>
-              <a:t>}</a:t>
-            </a:r>
-            <a:endParaRPr lang="en-US" sz="1100" dirty="0"/>
-          </a:p>
-          <a:p>
-            <a:pPr marL="0" indent="0">
-              <a:spcAft>
-                <a:spcPts val="200"/>
-              </a:spcAft>
-              <a:buNone/>
-            </a:pPr>
-            <a:r>
-              <a:rPr lang="en-US" sz="1000" dirty="0">
-                <a:solidFill>
-                  <a:srgbClr val="F1E9F8"/>
-                </a:solidFill>
-                <a:latin typeface="Courier New" pitchFamily="34" charset="0"/>
-                <a:ea typeface="Courier New" pitchFamily="34" charset="-122"/>
-                <a:cs typeface="Courier New" pitchFamily="34" charset="-120"/>
-              </a:rPr>
-              <a:t>shinyApp(ui = ui, server = server)</a:t>
-            </a:r>
-            <a:endParaRPr lang="en-US" sz="1100" dirty="0"/>
+              <a:rPr lang="en-US" sz="1050" dirty="0">
+                <a:solidFill>
+                  <a:srgbClr val="2E0A4E"/>
+                </a:solidFill>
+                <a:latin typeface="Calibri" pitchFamily="34" charset="0"/>
+                <a:ea typeface="Calibri" pitchFamily="34" charset="-122"/>
+                <a:cs typeface="Calibri" pitchFamily="34" charset="-120"/>
+              </a:rPr>
+              <a:t>Un espacio en la ui y lo que lo rellena.</a:t>
+            </a:r>
+            <a:endParaRPr lang="en-US" sz="1050" dirty="0"/>
           </a:p>
         </p:txBody>
       </p:sp>
@@ -7245,7 +6606,7 @@
 </file>
 
 <file path=ppt/slides/slide19.xml><?xml version="1.0" encoding="utf-8"?>
-<p:sld xmlns:a="http://schemas.openxmlformats.org/drawingml/2006/main" xmlns:p="http://schemas.openxmlformats.org/presentationml/2006/main" xmlns:r="http://schemas.openxmlformats.org/officeDocument/2006/relationships">
+<p:sld xmlns:a="http://schemas.openxmlformats.org/drawingml/2006/main" xmlns:r="http://schemas.openxmlformats.org/officeDocument/2006/relationships" xmlns:p="http://schemas.openxmlformats.org/presentationml/2006/main">
   <p:cSld>
     <p:bg>
       <p:bgPr>
@@ -7261,16 +6622,17 @@
         <p:cNvGrpSpPr/>
         <p:nvPr/>
       </p:nvGrpSpPr>
-      <p:grpSpPr/>
-      <p:sp>
-        <p:nvSpPr>
-          <p:cNvPr id="2" name="Text 0">
-            <a:extLst>
-              <a:ext uri="{FF2B5EF4-FFF2-40B4-BE49-F238E27FC236}">
-                <a16:creationId xmlns:a16="http://schemas.microsoft.com/office/drawing/2014/main" id="{45FBCF84-BF0C-00DD-1115-ECF03D12DDA6}"/>
-              </a:ext>
-            </a:extLst>
-          </p:cNvPr>
+      <p:grpSpPr>
+        <a:xfrm>
+          <a:off x="0" y="0"/>
+          <a:ext cx="0" cy="0"/>
+          <a:chOff x="0" y="0"/>
+          <a:chExt cx="0" cy="0"/>
+        </a:xfrm>
+      </p:grpSpPr>
+      <p:sp>
+        <p:nvSpPr>
+          <p:cNvPr id="2" name="Text 0"/>
           <p:cNvSpPr txBox="1"/>
           <p:nvPr/>
         </p:nvSpPr>
@@ -7301,7 +6663,7 @@
                 <a:ea typeface="Oswald" pitchFamily="34" charset="-122"/>
                 <a:cs typeface="Oswald" pitchFamily="34" charset="-120"/>
               </a:rPr>
-              <a:t>Desafío opcional (1)</a:t>
+              <a:t>Código clave</a:t>
             </a:r>
             <a:endParaRPr lang="en-US" sz="3000" dirty="0"/>
           </a:p>
@@ -7309,32 +6671,65 @@
       </p:sp>
       <p:sp>
         <p:nvSpPr>
-          <p:cNvPr id="11" name="Shape 9">
-            <a:extLst>
-              <a:ext uri="{FF2B5EF4-FFF2-40B4-BE49-F238E27FC236}">
-                <a16:creationId xmlns:a16="http://schemas.microsoft.com/office/drawing/2014/main" id="{1E4D2BBF-BB0F-7CF4-3842-6325D6A2CD35}"/>
-              </a:ext>
-            </a:extLst>
-          </p:cNvPr>
+          <p:cNvPr id="4" name="Text 2"/>
+          <p:cNvSpPr txBox="1"/>
+          <p:nvPr/>
+        </p:nvSpPr>
+        <p:spPr>
+          <a:xfrm>
+            <a:off x="502920" y="4759452"/>
+            <a:ext cx="8138160" cy="228600"/>
+          </a:xfrm>
+          <a:prstGeom prst="rect">
+            <a:avLst/>
+          </a:prstGeom>
+          <a:noFill/>
+          <a:ln/>
+        </p:spPr>
+        <p:txBody>
+          <a:bodyPr wrap="square" lIns="0" tIns="0" rIns="0" bIns="0" rtlCol="0" anchor="ctr"/>
+          <a:lstStyle/>
+          <a:p>
+            <a:pPr marL="0" indent="0">
+              <a:buNone/>
+            </a:pPr>
+            <a:r>
+              <a:rPr lang="en-US" sz="900" dirty="0">
+                <a:solidFill>
+                  <a:srgbClr val="999999"/>
+                </a:solidFill>
+                <a:latin typeface="Calibri" pitchFamily="34" charset="0"/>
+                <a:ea typeface="Calibri" pitchFamily="34" charset="-122"/>
+                <a:cs typeface="Calibri" pitchFamily="34" charset="-120"/>
+              </a:rPr>
+              <a:t>Visualización interactiva de datos con R y Shiny · Udelar</a:t>
+            </a:r>
+            <a:endParaRPr lang="en-US" sz="900" dirty="0"/>
+          </a:p>
+        </p:txBody>
+      </p:sp>
+      <p:sp>
+        <p:nvSpPr>
+          <p:cNvPr id="5" name="Shape 3"/>
           <p:cNvSpPr/>
           <p:nvPr/>
         </p:nvSpPr>
         <p:spPr>
           <a:xfrm>
-            <a:off x="439616" y="1188720"/>
-            <a:ext cx="2560320" cy="1463040"/>
+            <a:off x="502920" y="1188720"/>
+            <a:ext cx="8138160" cy="3429000"/>
           </a:xfrm>
           <a:prstGeom prst="roundRect">
             <a:avLst>
-              <a:gd name="adj" fmla="val 2143"/>
+              <a:gd name="adj" fmla="val 1600"/>
             </a:avLst>
           </a:prstGeom>
           <a:solidFill>
-            <a:srgbClr val="5A189A"/>
+            <a:srgbClr val="2E0A4E"/>
           </a:solidFill>
           <a:ln w="12700">
             <a:solidFill>
-              <a:srgbClr val="5A189A"/>
+              <a:srgbClr val="2E0A4E"/>
             </a:solidFill>
             <a:prstDash val="solid"/>
           </a:ln>
@@ -7349,20 +6744,14 @@
       </p:sp>
       <p:sp>
         <p:nvSpPr>
-          <p:cNvPr id="12" name="Text 10">
-            <a:extLst>
-              <a:ext uri="{FF2B5EF4-FFF2-40B4-BE49-F238E27FC236}">
-                <a16:creationId xmlns:a16="http://schemas.microsoft.com/office/drawing/2014/main" id="{57EA7703-08D4-E6C4-4FDB-5B08F7881055}"/>
-              </a:ext>
-            </a:extLst>
-          </p:cNvPr>
+          <p:cNvPr id="6" name="Text 4"/>
           <p:cNvSpPr txBox="1"/>
           <p:nvPr/>
         </p:nvSpPr>
         <p:spPr>
           <a:xfrm>
-            <a:off x="668216" y="1256068"/>
-            <a:ext cx="2103120" cy="502920"/>
+            <a:off x="777240" y="1325880"/>
+            <a:ext cx="7589520" cy="3154680"/>
           </a:xfrm>
           <a:prstGeom prst="rect">
             <a:avLst/>
@@ -7371,223 +6760,370 @@
           <a:ln/>
         </p:spPr>
         <p:txBody>
-          <a:bodyPr wrap="square" lIns="0" tIns="0" rIns="0" bIns="0" rtlCol="0" anchor="ctr"/>
+          <a:bodyPr wrap="square" lIns="0" tIns="0" rIns="0" bIns="0" rtlCol="0" anchor="t"/>
           <a:lstStyle/>
           <a:p>
             <a:pPr marL="0" indent="0">
+              <a:spcAft>
+                <a:spcPts val="200"/>
+              </a:spcAft>
               <a:buNone/>
             </a:pPr>
             <a:r>
-              <a:rPr lang="en-US" sz="1600" b="1" dirty="0">
-                <a:solidFill>
-                  <a:srgbClr val="FFFFFF"/>
-                </a:solidFill>
-                <a:latin typeface="Oswald" pitchFamily="34" charset="0"/>
-                <a:ea typeface="Oswald" pitchFamily="34" charset="-122"/>
-                <a:cs typeface="Oswald" pitchFamily="34" charset="-120"/>
-              </a:rPr>
-              <a:t>OPCIONAL</a:t>
-            </a:r>
-            <a:endParaRPr lang="en-US" sz="1600" dirty="0"/>
-          </a:p>
-        </p:txBody>
-      </p:sp>
-      <p:sp>
-        <p:nvSpPr>
-          <p:cNvPr id="13" name="Text 11">
-            <a:extLst>
-              <a:ext uri="{FF2B5EF4-FFF2-40B4-BE49-F238E27FC236}">
-                <a16:creationId xmlns:a16="http://schemas.microsoft.com/office/drawing/2014/main" id="{83082800-1689-F508-4C9C-8E0187A18BDD}"/>
-              </a:ext>
-            </a:extLst>
-          </p:cNvPr>
-          <p:cNvSpPr txBox="1"/>
-          <p:nvPr/>
-        </p:nvSpPr>
-        <p:spPr>
-          <a:xfrm>
-            <a:off x="668216" y="1734572"/>
-            <a:ext cx="2103120" cy="716926"/>
-          </a:xfrm>
-          <a:prstGeom prst="rect">
-            <a:avLst/>
-          </a:prstGeom>
-          <a:noFill/>
-          <a:ln/>
-        </p:spPr>
-        <p:txBody>
-          <a:bodyPr wrap="square" lIns="0" tIns="0" rIns="0" bIns="0" rtlCol="0" anchor="t"/>
-          <a:lstStyle/>
-          <a:p>
-            <a:r>
-              <a:rPr lang="es-ES" sz="1400" dirty="0">
-                <a:solidFill>
-                  <a:schemeClr val="bg1"/>
-                </a:solidFill>
-                <a:latin typeface="Calibri" pitchFamily="34" charset="0"/>
-                <a:ea typeface="Calibri" pitchFamily="34" charset="-122"/>
-                <a:cs typeface="Calibri" pitchFamily="34" charset="-120"/>
-              </a:rPr>
-              <a:t>GitHub, tu repositorio</a:t>
-            </a:r>
-            <a:endParaRPr lang="en-US" sz="1300" dirty="0"/>
-          </a:p>
-        </p:txBody>
-      </p:sp>
-      <p:sp>
-        <p:nvSpPr>
-          <p:cNvPr id="15" name="Shape 9">
-            <a:extLst>
-              <a:ext uri="{FF2B5EF4-FFF2-40B4-BE49-F238E27FC236}">
-                <a16:creationId xmlns:a16="http://schemas.microsoft.com/office/drawing/2014/main" id="{E750D06A-626A-4348-CA99-CE04C627A232}"/>
-              </a:ext>
-            </a:extLst>
-          </p:cNvPr>
-          <p:cNvSpPr/>
-          <p:nvPr/>
-        </p:nvSpPr>
-        <p:spPr>
-          <a:xfrm>
-            <a:off x="439615" y="2719107"/>
-            <a:ext cx="3773659" cy="2281957"/>
-          </a:xfrm>
-          <a:prstGeom prst="roundRect">
-            <a:avLst>
-              <a:gd name="adj" fmla="val 2143"/>
-            </a:avLst>
-          </a:prstGeom>
-          <a:solidFill>
-            <a:schemeClr val="accent1">
-              <a:lumMod val="75000"/>
-            </a:schemeClr>
-          </a:solidFill>
-          <a:ln w="12700">
-            <a:solidFill>
-              <a:schemeClr val="accent1">
-                <a:lumMod val="75000"/>
-              </a:schemeClr>
-            </a:solidFill>
-            <a:prstDash val="solid"/>
-          </a:ln>
-        </p:spPr>
-        <p:txBody>
-          <a:bodyPr/>
-          <a:lstStyle/>
-          <a:p>
-            <a:endParaRPr lang="en-US"/>
-          </a:p>
-        </p:txBody>
-      </p:sp>
-      <p:sp>
-        <p:nvSpPr>
-          <p:cNvPr id="17" name="Text 11">
-            <a:extLst>
-              <a:ext uri="{FF2B5EF4-FFF2-40B4-BE49-F238E27FC236}">
-                <a16:creationId xmlns:a16="http://schemas.microsoft.com/office/drawing/2014/main" id="{F3440954-5CFF-06C7-8641-E2E38BA6F847}"/>
-              </a:ext>
-            </a:extLst>
-          </p:cNvPr>
-          <p:cNvSpPr txBox="1"/>
-          <p:nvPr/>
-        </p:nvSpPr>
-        <p:spPr>
-          <a:xfrm>
-            <a:off x="668216" y="2899117"/>
-            <a:ext cx="3369212" cy="716926"/>
-          </a:xfrm>
-          <a:prstGeom prst="rect">
-            <a:avLst/>
-          </a:prstGeom>
-          <a:noFill/>
-          <a:ln/>
-        </p:spPr>
-        <p:txBody>
-          <a:bodyPr wrap="square" lIns="0" tIns="0" rIns="0" bIns="0" rtlCol="0" anchor="t"/>
-          <a:lstStyle/>
-          <a:p>
-            <a:r>
-              <a:rPr lang="es-ES" sz="1400" b="1" dirty="0">
-                <a:solidFill>
-                  <a:schemeClr val="bg1"/>
-                </a:solidFill>
-                <a:latin typeface="Calibri" pitchFamily="34" charset="0"/>
-                <a:ea typeface="Calibri" pitchFamily="34" charset="-122"/>
-                <a:cs typeface="Calibri" pitchFamily="34" charset="-120"/>
-              </a:rPr>
-              <a:t>Git guarda versiones de tu código y GitHub las guarda en la web. Es opcional, el curso se hace completo sin GitHub.</a:t>
-            </a:r>
-          </a:p>
-          <a:p>
-            <a:endParaRPr lang="es-ES" sz="1400" b="1" dirty="0">
-              <a:solidFill>
-                <a:schemeClr val="bg1"/>
-              </a:solidFill>
-              <a:latin typeface="Calibri" pitchFamily="34" charset="0"/>
-              <a:ea typeface="Calibri" pitchFamily="34" charset="-122"/>
-              <a:cs typeface="Calibri" pitchFamily="34" charset="-120"/>
-            </a:endParaRPr>
-          </a:p>
-          <a:p>
-            <a:r>
-              <a:rPr lang="es-ES" sz="1400" b="1" dirty="0">
-                <a:solidFill>
-                  <a:schemeClr val="bg1"/>
-                </a:solidFill>
-                <a:latin typeface="Calibri" pitchFamily="34" charset="0"/>
-                <a:ea typeface="Calibri" pitchFamily="34" charset="-122"/>
-                <a:cs typeface="Calibri" pitchFamily="34" charset="-120"/>
-              </a:rPr>
-              <a:t>Instalá Git, creá una cuenta y un repositorio nuevo. En RStudio, </a:t>
-            </a:r>
-            <a:r>
-              <a:rPr lang="es-ES" sz="1400" b="1" dirty="0" i="1">
-                <a:solidFill>
-                  <a:schemeClr val="bg1"/>
-                </a:solidFill>
-                <a:latin typeface="Calibri" pitchFamily="34" charset="0"/>
-                <a:ea typeface="Calibri" pitchFamily="34" charset="-122"/>
-                <a:cs typeface="Calibri" pitchFamily="34" charset="-120"/>
-              </a:rPr>
-              <a:t>File, New Project, Version Control, Git</a:t>
-            </a:r>
-            <a:r>
-              <a:rPr lang="es-ES" sz="1400" b="1" dirty="0">
-                <a:solidFill>
-                  <a:schemeClr val="bg1"/>
-                </a:solidFill>
-                <a:latin typeface="Calibri" pitchFamily="34" charset="0"/>
-                <a:ea typeface="Calibri" pitchFamily="34" charset="-122"/>
-                <a:cs typeface="Calibri" pitchFamily="34" charset="-120"/>
-              </a:rPr>
-              <a:t> y pegá su dirección. Queda abierto como un proyecto.</a:t>
-            </a:r>
-          </a:p>
-        </p:txBody>
-      </p:sp>
-      <p:pic>
-        <p:nvPicPr>
-          <p:cNvPr id="18" name="Picture 17" descr="cap2.png"/>
-          <p:cNvPicPr>
-            <a:picLocks noChangeAspect="1"/>
-          </p:cNvPicPr>
-          <p:nvPr/>
-        </p:nvPicPr>
-        <p:blipFill>
-          <a:blip r:embed="rId3"/>
-          <a:stretch>
-            <a:fillRect/>
-          </a:stretch>
-        </p:blipFill>
-        <p:spPr>
-          <a:xfrm>
-            <a:off x="4546204" y="1188720"/>
-            <a:ext cx="4257831" cy="3100000"/>
-          </a:xfrm>
-          <a:prstGeom prst="rect">
-            <a:avLst/>
-          </a:prstGeom>
-        </p:spPr>
-      </p:pic>
+              <a:rPr lang="en-US" sz="1000" dirty="0">
+                <a:solidFill>
+                  <a:srgbClr val="F1E9F8"/>
+                </a:solidFill>
+                <a:latin typeface="Courier New" pitchFamily="34" charset="0"/>
+                <a:ea typeface="Courier New" pitchFamily="34" charset="-122"/>
+                <a:cs typeface="Courier New" pitchFamily="34" charset="-120"/>
+              </a:rPr>
+              <a:t>library(shiny)</a:t>
+            </a:r>
+            <a:endParaRPr lang="en-US" sz="1100" dirty="0"/>
+          </a:p>
+          <a:p>
+            <a:pPr marL="0" indent="0">
+              <a:spcAft>
+                <a:spcPts val="200"/>
+              </a:spcAft>
+              <a:buNone/>
+            </a:pPr>
+            <a:r>
+              <a:rPr lang="en-US" sz="1000" dirty="0">
+                <a:solidFill>
+                  <a:srgbClr val="F1E9F8"/>
+                </a:solidFill>
+                <a:latin typeface="Courier New" pitchFamily="34" charset="0"/>
+                <a:ea typeface="Courier New" pitchFamily="34" charset="-122"/>
+                <a:cs typeface="Courier New" pitchFamily="34" charset="-120"/>
+              </a:rPr>
+              <a:t>TITULO &lt;- "Mi primera app Shiny"</a:t>
+            </a:r>
+            <a:endParaRPr lang="en-US" sz="1100" dirty="0"/>
+          </a:p>
+          <a:p>
+            <a:pPr marL="0" indent="0">
+              <a:spcAft>
+                <a:spcPts val="200"/>
+              </a:spcAft>
+              <a:buNone/>
+            </a:pPr>
+            <a:r>
+              <a:rPr lang="en-US" sz="1000" dirty="0">
+                <a:solidFill>
+                  <a:srgbClr val="F1E9F8"/>
+                </a:solidFill>
+                <a:latin typeface="Courier New" pitchFamily="34" charset="0"/>
+                <a:ea typeface="Courier New" pitchFamily="34" charset="-122"/>
+                <a:cs typeface="Courier New" pitchFamily="34" charset="-120"/>
+              </a:rPr>
+              <a:t>elecciones &lt;- read.csv("../datos/elecciones_departamento_2024.csv")</a:t>
+            </a:r>
+            <a:endParaRPr lang="en-US" sz="1100" dirty="0"/>
+          </a:p>
+          <a:p>
+            <a:pPr marL="0" indent="0">
+              <a:spcAft>
+                <a:spcPts val="200"/>
+              </a:spcAft>
+              <a:buNone/>
+            </a:pPr>
+            <a:r>
+              <a:rPr lang="en-US" sz="1000" dirty="0">
+                <a:solidFill>
+                  <a:srgbClr val="F1E9F8"/>
+                </a:solidFill>
+                <a:latin typeface="Courier New" pitchFamily="34" charset="0"/>
+                <a:ea typeface="Courier New" pitchFamily="34" charset="-122"/>
+                <a:cs typeface="Courier New" pitchFamily="34" charset="-120"/>
+              </a:rPr>
+              <a:t>ui &lt;- fluidPage(</a:t>
+            </a:r>
+            <a:endParaRPr lang="en-US" sz="1100" dirty="0"/>
+          </a:p>
+          <a:p>
+            <a:pPr marL="0" indent="0">
+              <a:spcAft>
+                <a:spcPts val="200"/>
+              </a:spcAft>
+              <a:buNone/>
+            </a:pPr>
+            <a:r>
+              <a:rPr lang="en-US" sz="1000" dirty="0">
+                <a:solidFill>
+                  <a:srgbClr val="F1E9F8"/>
+                </a:solidFill>
+                <a:latin typeface="Courier New" pitchFamily="34" charset="0"/>
+                <a:ea typeface="Courier New" pitchFamily="34" charset="-122"/>
+                <a:cs typeface="Courier New" pitchFamily="34" charset="-120"/>
+              </a:rPr>
+              <a:t>  titlePanel(TITULO),</a:t>
+            </a:r>
+            <a:endParaRPr lang="en-US" sz="1100" dirty="0"/>
+          </a:p>
+          <a:p>
+            <a:pPr marL="0" indent="0">
+              <a:spcAft>
+                <a:spcPts val="200"/>
+              </a:spcAft>
+              <a:buNone/>
+            </a:pPr>
+            <a:r>
+              <a:rPr lang="en-US" sz="1000" dirty="0">
+                <a:solidFill>
+                  <a:srgbClr val="F1E9F8"/>
+                </a:solidFill>
+                <a:latin typeface="Courier New" pitchFamily="34" charset="0"/>
+                <a:ea typeface="Courier New" pitchFamily="34" charset="-122"/>
+                <a:cs typeface="Courier New" pitchFamily="34" charset="-120"/>
+              </a:rPr>
+              <a:t>  h3("Votos emitidos por departamento"),</a:t>
+            </a:r>
+            <a:endParaRPr lang="en-US" sz="1100" dirty="0"/>
+          </a:p>
+          <a:p>
+            <a:pPr marL="0" indent="0">
+              <a:spcAft>
+                <a:spcPts val="200"/>
+              </a:spcAft>
+              <a:buNone/>
+            </a:pPr>
+            <a:r>
+              <a:rPr lang="en-US" sz="1000" dirty="0">
+                <a:solidFill>
+                  <a:srgbClr val="F1E9F8"/>
+                </a:solidFill>
+                <a:latin typeface="Courier New" pitchFamily="34" charset="0"/>
+                <a:ea typeface="Courier New" pitchFamily="34" charset="-122"/>
+                <a:cs typeface="Courier New" pitchFamily="34" charset="-120"/>
+              </a:rPr>
+              <a:t>  tableOutput("tabla_elecciones"),</a:t>
+            </a:r>
+            <a:endParaRPr lang="en-US" sz="1100" dirty="0"/>
+          </a:p>
+          <a:p>
+            <a:pPr marL="0" indent="0">
+              <a:spcAft>
+                <a:spcPts val="200"/>
+              </a:spcAft>
+              <a:buNone/>
+            </a:pPr>
+            <a:r>
+              <a:rPr lang="en-US" sz="1000" dirty="0">
+                <a:solidFill>
+                  <a:srgbClr val="F1E9F8"/>
+                </a:solidFill>
+                <a:latin typeface="Courier New" pitchFamily="34" charset="0"/>
+                <a:ea typeface="Courier New" pitchFamily="34" charset="-122"/>
+                <a:cs typeface="Courier New" pitchFamily="34" charset="-120"/>
+              </a:rPr>
+              <a:t>  textOutput("resumen")</a:t>
+            </a:r>
+            <a:endParaRPr lang="en-US" sz="1100" dirty="0"/>
+          </a:p>
+          <a:p>
+            <a:pPr marL="0" indent="0">
+              <a:spcAft>
+                <a:spcPts val="200"/>
+              </a:spcAft>
+              <a:buNone/>
+            </a:pPr>
+            <a:r>
+              <a:rPr lang="en-US" sz="1000" dirty="0">
+                <a:solidFill>
+                  <a:srgbClr val="F1E9F8"/>
+                </a:solidFill>
+                <a:latin typeface="Courier New" pitchFamily="34" charset="0"/>
+                <a:ea typeface="Courier New" pitchFamily="34" charset="-122"/>
+                <a:cs typeface="Courier New" pitchFamily="34" charset="-120"/>
+              </a:rPr>
+              <a:t>)</a:t>
+            </a:r>
+            <a:endParaRPr lang="en-US" sz="1100" dirty="0"/>
+          </a:p>
+          <a:p>
+            <a:pPr marL="0" indent="0">
+              <a:spcAft>
+                <a:spcPts val="200"/>
+              </a:spcAft>
+              <a:buNone/>
+            </a:pPr>
+            <a:r>
+              <a:rPr lang="en-US" sz="1000" dirty="0">
+                <a:solidFill>
+                  <a:srgbClr val="F1E9F8"/>
+                </a:solidFill>
+                <a:latin typeface="Courier New" pitchFamily="34" charset="0"/>
+                <a:ea typeface="Courier New" pitchFamily="34" charset="-122"/>
+                <a:cs typeface="Courier New" pitchFamily="34" charset="-120"/>
+              </a:rPr>
+              <a:t>server &lt;- function(input, output, session) {</a:t>
+            </a:r>
+            <a:endParaRPr lang="en-US" sz="1100" dirty="0"/>
+          </a:p>
+          <a:p>
+            <a:pPr marL="0" indent="0">
+              <a:spcAft>
+                <a:spcPts val="200"/>
+              </a:spcAft>
+              <a:buNone/>
+            </a:pPr>
+            <a:r>
+              <a:rPr lang="en-US" sz="1000" dirty="0">
+                <a:solidFill>
+                  <a:srgbClr val="F1E9F8"/>
+                </a:solidFill>
+                <a:latin typeface="Courier New" pitchFamily="34" charset="0"/>
+                <a:ea typeface="Courier New" pitchFamily="34" charset="-122"/>
+                <a:cs typeface="Courier New" pitchFamily="34" charset="-120"/>
+              </a:rPr>
+              <a:t>  output$tabla_elecciones &lt;- renderTable({</a:t>
+            </a:r>
+            <a:endParaRPr lang="en-US" sz="1100" dirty="0"/>
+          </a:p>
+          <a:p>
+            <a:pPr marL="0" indent="0">
+              <a:spcAft>
+                <a:spcPts val="200"/>
+              </a:spcAft>
+              <a:buNone/>
+            </a:pPr>
+            <a:r>
+              <a:rPr lang="en-US" sz="1000" dirty="0">
+                <a:solidFill>
+                  <a:srgbClr val="F1E9F8"/>
+                </a:solidFill>
+                <a:latin typeface="Courier New" pitchFamily="34" charset="0"/>
+                <a:ea typeface="Courier New" pitchFamily="34" charset="-122"/>
+                <a:cs typeface="Courier New" pitchFamily="34" charset="-120"/>
+              </a:rPr>
+              <a:t>    elecciones[, c("departamento", "emitidos")]</a:t>
+            </a:r>
+            <a:endParaRPr lang="en-US" sz="1100" dirty="0"/>
+          </a:p>
+          <a:p>
+            <a:pPr marL="0" indent="0">
+              <a:spcAft>
+                <a:spcPts val="200"/>
+              </a:spcAft>
+              <a:buNone/>
+            </a:pPr>
+            <a:r>
+              <a:rPr lang="en-US" sz="1000" dirty="0">
+                <a:solidFill>
+                  <a:srgbClr val="F1E9F8"/>
+                </a:solidFill>
+                <a:latin typeface="Courier New" pitchFamily="34" charset="0"/>
+                <a:ea typeface="Courier New" pitchFamily="34" charset="-122"/>
+                <a:cs typeface="Courier New" pitchFamily="34" charset="-120"/>
+              </a:rPr>
+              <a:t>  })</a:t>
+            </a:r>
+            <a:endParaRPr lang="en-US" sz="1100" dirty="0"/>
+          </a:p>
+          <a:p>
+            <a:pPr marL="0" indent="0">
+              <a:spcAft>
+                <a:spcPts val="200"/>
+              </a:spcAft>
+              <a:buNone/>
+            </a:pPr>
+            <a:r>
+              <a:rPr lang="en-US" sz="1000" dirty="0">
+                <a:solidFill>
+                  <a:srgbClr val="F1E9F8"/>
+                </a:solidFill>
+                <a:latin typeface="Courier New" pitchFamily="34" charset="0"/>
+                <a:ea typeface="Courier New" pitchFamily="34" charset="-122"/>
+                <a:cs typeface="Courier New" pitchFamily="34" charset="-120"/>
+              </a:rPr>
+              <a:t>  output$resumen &lt;- renderText({</a:t>
+            </a:r>
+            <a:endParaRPr lang="en-US" sz="1100" dirty="0"/>
+          </a:p>
+          <a:p>
+            <a:pPr marL="0" indent="0">
+              <a:spcAft>
+                <a:spcPts val="200"/>
+              </a:spcAft>
+              <a:buNone/>
+            </a:pPr>
+            <a:r>
+              <a:rPr lang="en-US" sz="1000" dirty="0">
+                <a:solidFill>
+                  <a:srgbClr val="F1E9F8"/>
+                </a:solidFill>
+                <a:latin typeface="Courier New" pitchFamily="34" charset="0"/>
+                <a:ea typeface="Courier New" pitchFamily="34" charset="-122"/>
+                <a:cs typeface="Courier New" pitchFamily="34" charset="-120"/>
+              </a:rPr>
+              <a:t>    paste0("Votos emitidos en total: ", sum(elecciones$emitidos))</a:t>
+            </a:r>
+            <a:endParaRPr lang="en-US" sz="1100" dirty="0"/>
+          </a:p>
+          <a:p>
+            <a:pPr marL="0" indent="0">
+              <a:spcAft>
+                <a:spcPts val="200"/>
+              </a:spcAft>
+              <a:buNone/>
+            </a:pPr>
+            <a:r>
+              <a:rPr lang="en-US" sz="1000" dirty="0">
+                <a:solidFill>
+                  <a:srgbClr val="F1E9F8"/>
+                </a:solidFill>
+                <a:latin typeface="Courier New" pitchFamily="34" charset="0"/>
+                <a:ea typeface="Courier New" pitchFamily="34" charset="-122"/>
+                <a:cs typeface="Courier New" pitchFamily="34" charset="-120"/>
+              </a:rPr>
+              <a:t>  })</a:t>
+            </a:r>
+            <a:endParaRPr lang="en-US" sz="1100" dirty="0"/>
+          </a:p>
+          <a:p>
+            <a:pPr marL="0" indent="0">
+              <a:spcAft>
+                <a:spcPts val="200"/>
+              </a:spcAft>
+              <a:buNone/>
+            </a:pPr>
+            <a:r>
+              <a:rPr lang="en-US" sz="1000" dirty="0">
+                <a:solidFill>
+                  <a:srgbClr val="F1E9F8"/>
+                </a:solidFill>
+                <a:latin typeface="Courier New" pitchFamily="34" charset="0"/>
+                <a:ea typeface="Courier New" pitchFamily="34" charset="-122"/>
+                <a:cs typeface="Courier New" pitchFamily="34" charset="-120"/>
+              </a:rPr>
+              <a:t>}</a:t>
+            </a:r>
+            <a:endParaRPr lang="en-US" sz="1100" dirty="0"/>
+          </a:p>
+          <a:p>
+            <a:pPr marL="0" indent="0">
+              <a:spcAft>
+                <a:spcPts val="200"/>
+              </a:spcAft>
+              <a:buNone/>
+            </a:pPr>
+            <a:r>
+              <a:rPr lang="en-US" sz="1000" dirty="0">
+                <a:solidFill>
+                  <a:srgbClr val="F1E9F8"/>
+                </a:solidFill>
+                <a:latin typeface="Courier New" pitchFamily="34" charset="0"/>
+                <a:ea typeface="Courier New" pitchFamily="34" charset="-122"/>
+                <a:cs typeface="Courier New" pitchFamily="34" charset="-120"/>
+              </a:rPr>
+              <a:t>shinyApp(ui = ui, server = server)</a:t>
+            </a:r>
+            <a:endParaRPr lang="en-US" sz="1100" dirty="0"/>
+          </a:p>
+        </p:txBody>
+      </p:sp>
     </p:spTree>
   </p:cSld>
   <p:clrMapOvr>
@@ -7609,7 +7145,7 @@
     </p:bg>
     <p:spTree>
       <p:nvGrpSpPr>
-        <p:cNvPr id="2" name=""/>
+        <p:cNvPr id="1" name=""/>
         <p:cNvGrpSpPr/>
         <p:nvPr/>
       </p:nvGrpSpPr>
@@ -8368,7 +7904,7 @@
 </file>
 
 <file path=ppt/slides/slide20.xml><?xml version="1.0" encoding="utf-8"?>
-<p:sld xmlns:a="http://schemas.openxmlformats.org/drawingml/2006/main" xmlns:p="http://schemas.openxmlformats.org/presentationml/2006/main" xmlns:r="http://schemas.openxmlformats.org/officeDocument/2006/relationships">
+<p:sld xmlns:a="http://schemas.openxmlformats.org/drawingml/2006/main" xmlns:r="http://schemas.openxmlformats.org/officeDocument/2006/relationships" xmlns:p="http://schemas.openxmlformats.org/presentationml/2006/main">
   <p:cSld>
     <p:bg>
       <p:bgPr>
@@ -8384,7 +7920,14 @@
         <p:cNvGrpSpPr/>
         <p:nvPr/>
       </p:nvGrpSpPr>
-      <p:grpSpPr/>
+      <p:grpSpPr>
+        <a:xfrm>
+          <a:off x="0" y="0"/>
+          <a:ext cx="0" cy="0"/>
+          <a:chOff x="0" y="0"/>
+          <a:chExt cx="0" cy="0"/>
+        </a:xfrm>
+      </p:grpSpPr>
       <p:sp>
         <p:nvSpPr>
           <p:cNvPr id="2" name="Text 0">
@@ -8424,7 +7967,7 @@
                 <a:ea typeface="Oswald" pitchFamily="34" charset="-122"/>
                 <a:cs typeface="Oswald" pitchFamily="34" charset="-120"/>
               </a:rPr>
-              <a:t>Desafío opcional (2)</a:t>
+              <a:t>Desafío opcional (1)</a:t>
             </a:r>
             <a:endParaRPr lang="en-US" sz="3000" dirty="0"/>
           </a:p>
@@ -8551,7 +8094,7 @@
                 <a:ea typeface="Calibri" pitchFamily="34" charset="-122"/>
                 <a:cs typeface="Calibri" pitchFamily="34" charset="-120"/>
               </a:rPr>
-              <a:t>Guardar y subir cambios</a:t>
+              <a:t>GitHub, tu repositorio</a:t>
             </a:r>
             <a:endParaRPr lang="en-US" sz="1300" dirty="0"/>
           </a:p>
@@ -8637,51 +8180,7 @@
                 <a:ea typeface="Calibri" pitchFamily="34" charset="-122"/>
                 <a:cs typeface="Calibri" pitchFamily="34" charset="-120"/>
               </a:rPr>
-              <a:t>Copiá a tu proyecto la carpeta </a:t>
-            </a:r>
-            <a:r>
-              <a:rPr lang="es-ES" sz="1400" b="1" dirty="0" i="1">
-                <a:solidFill>
-                  <a:schemeClr val="bg1"/>
-                </a:solidFill>
-                <a:latin typeface="Calibri" pitchFamily="34" charset="0"/>
-                <a:ea typeface="Calibri" pitchFamily="34" charset="-122"/>
-                <a:cs typeface="Calibri" pitchFamily="34" charset="-120"/>
-              </a:rPr>
-              <a:t>datos/</a:t>
-            </a:r>
-            <a:r>
-              <a:rPr lang="es-ES" sz="1400" b="1" dirty="0">
-                <a:solidFill>
-                  <a:schemeClr val="bg1"/>
-                </a:solidFill>
-                <a:latin typeface="Calibri" pitchFamily="34" charset="0"/>
-                <a:ea typeface="Calibri" pitchFamily="34" charset="-122"/>
-                <a:cs typeface="Calibri" pitchFamily="34" charset="-120"/>
-              </a:rPr>
-              <a:t> y la de la clase en la que trabajás, y hacé los cambios ahí. Así </a:t>
-            </a:r>
-            <a:r>
-              <a:rPr lang="es-ES" sz="1400" b="1" dirty="0" i="1">
-                <a:solidFill>
-                  <a:schemeClr val="bg1"/>
-                </a:solidFill>
-                <a:latin typeface="Calibri" pitchFamily="34" charset="0"/>
-                <a:ea typeface="Calibri" pitchFamily="34" charset="-122"/>
-                <a:cs typeface="Calibri" pitchFamily="34" charset="-120"/>
-              </a:rPr>
-              <a:t>../datos/</a:t>
-            </a:r>
-            <a:r>
-              <a:rPr lang="es-ES" sz="1400" b="1" dirty="0">
-                <a:solidFill>
-                  <a:schemeClr val="bg1"/>
-                </a:solidFill>
-                <a:latin typeface="Calibri" pitchFamily="34" charset="0"/>
-                <a:ea typeface="Calibri" pitchFamily="34" charset="-122"/>
-                <a:cs typeface="Calibri" pitchFamily="34" charset="-120"/>
-              </a:rPr>
-              <a:t> sigue funcionando.</a:t>
+              <a:t>Git guarda versiones de tu código y GitHub las guarda en la web. Es opcional, el curso se hace completo sin GitHub.</a:t>
             </a:r>
           </a:p>
           <a:p>
@@ -8704,10 +8203,10 @@
                 <a:ea typeface="Calibri" pitchFamily="34" charset="-122"/>
                 <a:cs typeface="Calibri" pitchFamily="34" charset="-120"/>
               </a:rPr>
-              <a:t>En la pestaña </a:t>
-            </a:r>
-            <a:r>
-              <a:rPr lang="es-ES" sz="1400" b="1" dirty="0" i="1">
+              <a:t>Instalá Git, creá una cuenta y un repositorio nuevo. En RStudio, </a:t>
+            </a:r>
+            <a:r>
+              <a:rPr lang="es-ES" sz="1400" b="1" i="1" dirty="0">
                 <a:solidFill>
                   <a:schemeClr val="bg1"/>
                 </a:solidFill>
@@ -8715,7 +8214,7 @@
                 <a:ea typeface="Calibri" pitchFamily="34" charset="-122"/>
                 <a:cs typeface="Calibri" pitchFamily="34" charset="-120"/>
               </a:rPr>
-              <a:t>Git</a:t>
+              <a:t>File, New Project, Version Control, Git</a:t>
             </a:r>
             <a:r>
               <a:rPr lang="es-ES" sz="1400" b="1" dirty="0">
@@ -8726,73 +8225,29 @@
                 <a:ea typeface="Calibri" pitchFamily="34" charset="-122"/>
                 <a:cs typeface="Calibri" pitchFamily="34" charset="-120"/>
               </a:rPr>
-              <a:t>, marcá los archivos, </a:t>
-            </a:r>
-            <a:r>
-              <a:rPr lang="es-ES" sz="1400" b="1" dirty="0" i="1">
-                <a:solidFill>
-                  <a:schemeClr val="bg1"/>
-                </a:solidFill>
-                <a:latin typeface="Calibri" pitchFamily="34" charset="0"/>
-                <a:ea typeface="Calibri" pitchFamily="34" charset="-122"/>
-                <a:cs typeface="Calibri" pitchFamily="34" charset="-120"/>
-              </a:rPr>
-              <a:t>Commit</a:t>
-            </a:r>
-            <a:r>
-              <a:rPr lang="es-ES" sz="1400" b="1" dirty="0">
-                <a:solidFill>
-                  <a:schemeClr val="bg1"/>
-                </a:solidFill>
-                <a:latin typeface="Calibri" pitchFamily="34" charset="0"/>
-                <a:ea typeface="Calibri" pitchFamily="34" charset="-122"/>
-                <a:cs typeface="Calibri" pitchFamily="34" charset="-120"/>
-              </a:rPr>
-              <a:t> con un mensaje corto y </a:t>
-            </a:r>
-            <a:r>
-              <a:rPr lang="es-ES" sz="1400" b="1" dirty="0" i="1">
-                <a:solidFill>
-                  <a:schemeClr val="bg1"/>
-                </a:solidFill>
-                <a:latin typeface="Calibri" pitchFamily="34" charset="0"/>
-                <a:ea typeface="Calibri" pitchFamily="34" charset="-122"/>
-                <a:cs typeface="Calibri" pitchFamily="34" charset="-120"/>
-              </a:rPr>
-              <a:t>Push</a:t>
-            </a:r>
-            <a:r>
-              <a:rPr lang="es-ES" sz="1400" b="1" dirty="0">
-                <a:solidFill>
-                  <a:schemeClr val="bg1"/>
-                </a:solidFill>
-                <a:latin typeface="Calibri" pitchFamily="34" charset="0"/>
-                <a:ea typeface="Calibri" pitchFamily="34" charset="-122"/>
-                <a:cs typeface="Calibri" pitchFamily="34" charset="-120"/>
-              </a:rPr>
-              <a:t>. Conviene hacerlo al terminar cada clase.</a:t>
+              <a:t> y pegá su dirección. Queda abierto como un proyecto.</a:t>
             </a:r>
           </a:p>
         </p:txBody>
       </p:sp>
       <p:pic>
         <p:nvPicPr>
-          <p:cNvPr id="18" name="Picture 17" descr="cap3.png"/>
+          <p:cNvPr id="18" name="Picture 17" descr="cap2.png"/>
           <p:cNvPicPr>
             <a:picLocks noChangeAspect="1"/>
           </p:cNvPicPr>
           <p:nvPr/>
         </p:nvPicPr>
         <p:blipFill>
-          <a:blip r:embed="rId4"/>
+          <a:blip r:embed="rId2"/>
           <a:stretch>
             <a:fillRect/>
           </a:stretch>
         </p:blipFill>
         <p:spPr>
           <a:xfrm>
-            <a:off x="4434840" y="1956145"/>
-            <a:ext cx="4480560" cy="1528388"/>
+            <a:off x="4546204" y="1188720"/>
+            <a:ext cx="4257831" cy="3100000"/>
           </a:xfrm>
           <a:prstGeom prst="rect">
             <a:avLst/>
@@ -8808,7 +8263,454 @@
 </file>
 
 <file path=ppt/slides/slide21.xml><?xml version="1.0" encoding="utf-8"?>
-<p:sld xmlns:a="http://schemas.openxmlformats.org/drawingml/2006/main" xmlns:p="http://schemas.openxmlformats.org/presentationml/2006/main" xmlns:r="http://schemas.openxmlformats.org/officeDocument/2006/relationships">
+<p:sld xmlns:a="http://schemas.openxmlformats.org/drawingml/2006/main" xmlns:r="http://schemas.openxmlformats.org/officeDocument/2006/relationships" xmlns:p="http://schemas.openxmlformats.org/presentationml/2006/main">
+  <p:cSld>
+    <p:bg>
+      <p:bgPr>
+        <a:solidFill>
+          <a:srgbClr val="FFFFFF"/>
+        </a:solidFill>
+        <a:effectLst/>
+      </p:bgPr>
+    </p:bg>
+    <p:spTree>
+      <p:nvGrpSpPr>
+        <p:cNvPr id="1" name=""/>
+        <p:cNvGrpSpPr/>
+        <p:nvPr/>
+      </p:nvGrpSpPr>
+      <p:grpSpPr>
+        <a:xfrm>
+          <a:off x="0" y="0"/>
+          <a:ext cx="0" cy="0"/>
+          <a:chOff x="0" y="0"/>
+          <a:chExt cx="0" cy="0"/>
+        </a:xfrm>
+      </p:grpSpPr>
+      <p:sp>
+        <p:nvSpPr>
+          <p:cNvPr id="2" name="Text 0">
+            <a:extLst>
+              <a:ext uri="{FF2B5EF4-FFF2-40B4-BE49-F238E27FC236}">
+                <a16:creationId xmlns:a16="http://schemas.microsoft.com/office/drawing/2014/main" id="{45FBCF84-BF0C-00DD-1115-ECF03D12DDA6}"/>
+              </a:ext>
+            </a:extLst>
+          </p:cNvPr>
+          <p:cNvSpPr txBox="1"/>
+          <p:nvPr/>
+        </p:nvSpPr>
+        <p:spPr>
+          <a:xfrm>
+            <a:off x="502920" y="320040"/>
+            <a:ext cx="7040880" cy="640080"/>
+          </a:xfrm>
+          <a:prstGeom prst="rect">
+            <a:avLst/>
+          </a:prstGeom>
+          <a:noFill/>
+          <a:ln/>
+        </p:spPr>
+        <p:txBody>
+          <a:bodyPr wrap="square" lIns="0" tIns="0" rIns="0" bIns="0" rtlCol="0" anchor="ctr"/>
+          <a:lstStyle/>
+          <a:p>
+            <a:pPr marL="0" indent="0">
+              <a:buNone/>
+            </a:pPr>
+            <a:r>
+              <a:rPr lang="en-US" sz="3000" b="1" dirty="0">
+                <a:solidFill>
+                  <a:srgbClr val="2E0A4E"/>
+                </a:solidFill>
+                <a:latin typeface="Oswald" pitchFamily="34" charset="0"/>
+                <a:ea typeface="Oswald" pitchFamily="34" charset="-122"/>
+                <a:cs typeface="Oswald" pitchFamily="34" charset="-120"/>
+              </a:rPr>
+              <a:t>Desafío opcional (2)</a:t>
+            </a:r>
+            <a:endParaRPr lang="en-US" sz="3000" dirty="0"/>
+          </a:p>
+        </p:txBody>
+      </p:sp>
+      <p:sp>
+        <p:nvSpPr>
+          <p:cNvPr id="11" name="Shape 9">
+            <a:extLst>
+              <a:ext uri="{FF2B5EF4-FFF2-40B4-BE49-F238E27FC236}">
+                <a16:creationId xmlns:a16="http://schemas.microsoft.com/office/drawing/2014/main" id="{1E4D2BBF-BB0F-7CF4-3842-6325D6A2CD35}"/>
+              </a:ext>
+            </a:extLst>
+          </p:cNvPr>
+          <p:cNvSpPr/>
+          <p:nvPr/>
+        </p:nvSpPr>
+        <p:spPr>
+          <a:xfrm>
+            <a:off x="439616" y="1188720"/>
+            <a:ext cx="2560320" cy="1463040"/>
+          </a:xfrm>
+          <a:prstGeom prst="roundRect">
+            <a:avLst>
+              <a:gd name="adj" fmla="val 2143"/>
+            </a:avLst>
+          </a:prstGeom>
+          <a:solidFill>
+            <a:srgbClr val="5A189A"/>
+          </a:solidFill>
+          <a:ln w="12700">
+            <a:solidFill>
+              <a:srgbClr val="5A189A"/>
+            </a:solidFill>
+            <a:prstDash val="solid"/>
+          </a:ln>
+        </p:spPr>
+        <p:txBody>
+          <a:bodyPr/>
+          <a:lstStyle/>
+          <a:p>
+            <a:endParaRPr lang="en-US"/>
+          </a:p>
+        </p:txBody>
+      </p:sp>
+      <p:sp>
+        <p:nvSpPr>
+          <p:cNvPr id="12" name="Text 10">
+            <a:extLst>
+              <a:ext uri="{FF2B5EF4-FFF2-40B4-BE49-F238E27FC236}">
+                <a16:creationId xmlns:a16="http://schemas.microsoft.com/office/drawing/2014/main" id="{57EA7703-08D4-E6C4-4FDB-5B08F7881055}"/>
+              </a:ext>
+            </a:extLst>
+          </p:cNvPr>
+          <p:cNvSpPr txBox="1"/>
+          <p:nvPr/>
+        </p:nvSpPr>
+        <p:spPr>
+          <a:xfrm>
+            <a:off x="668216" y="1256068"/>
+            <a:ext cx="2103120" cy="502920"/>
+          </a:xfrm>
+          <a:prstGeom prst="rect">
+            <a:avLst/>
+          </a:prstGeom>
+          <a:noFill/>
+          <a:ln/>
+        </p:spPr>
+        <p:txBody>
+          <a:bodyPr wrap="square" lIns="0" tIns="0" rIns="0" bIns="0" rtlCol="0" anchor="ctr"/>
+          <a:lstStyle/>
+          <a:p>
+            <a:pPr marL="0" indent="0">
+              <a:buNone/>
+            </a:pPr>
+            <a:r>
+              <a:rPr lang="en-US" sz="1600" b="1" dirty="0">
+                <a:solidFill>
+                  <a:srgbClr val="FFFFFF"/>
+                </a:solidFill>
+                <a:latin typeface="Oswald" pitchFamily="34" charset="0"/>
+                <a:ea typeface="Oswald" pitchFamily="34" charset="-122"/>
+                <a:cs typeface="Oswald" pitchFamily="34" charset="-120"/>
+              </a:rPr>
+              <a:t>OPCIONAL</a:t>
+            </a:r>
+            <a:endParaRPr lang="en-US" sz="1600" dirty="0"/>
+          </a:p>
+        </p:txBody>
+      </p:sp>
+      <p:sp>
+        <p:nvSpPr>
+          <p:cNvPr id="13" name="Text 11">
+            <a:extLst>
+              <a:ext uri="{FF2B5EF4-FFF2-40B4-BE49-F238E27FC236}">
+                <a16:creationId xmlns:a16="http://schemas.microsoft.com/office/drawing/2014/main" id="{83082800-1689-F508-4C9C-8E0187A18BDD}"/>
+              </a:ext>
+            </a:extLst>
+          </p:cNvPr>
+          <p:cNvSpPr txBox="1"/>
+          <p:nvPr/>
+        </p:nvSpPr>
+        <p:spPr>
+          <a:xfrm>
+            <a:off x="668216" y="1734572"/>
+            <a:ext cx="2103120" cy="716926"/>
+          </a:xfrm>
+          <a:prstGeom prst="rect">
+            <a:avLst/>
+          </a:prstGeom>
+          <a:noFill/>
+          <a:ln/>
+        </p:spPr>
+        <p:txBody>
+          <a:bodyPr wrap="square" lIns="0" tIns="0" rIns="0" bIns="0" rtlCol="0" anchor="t"/>
+          <a:lstStyle/>
+          <a:p>
+            <a:r>
+              <a:rPr lang="es-ES" sz="1400" dirty="0">
+                <a:solidFill>
+                  <a:schemeClr val="bg1"/>
+                </a:solidFill>
+                <a:latin typeface="Calibri" pitchFamily="34" charset="0"/>
+                <a:ea typeface="Calibri" pitchFamily="34" charset="-122"/>
+                <a:cs typeface="Calibri" pitchFamily="34" charset="-120"/>
+              </a:rPr>
+              <a:t>Guardar y subir cambios</a:t>
+            </a:r>
+            <a:endParaRPr lang="en-US" sz="1300" dirty="0"/>
+          </a:p>
+        </p:txBody>
+      </p:sp>
+      <p:sp>
+        <p:nvSpPr>
+          <p:cNvPr id="15" name="Shape 9">
+            <a:extLst>
+              <a:ext uri="{FF2B5EF4-FFF2-40B4-BE49-F238E27FC236}">
+                <a16:creationId xmlns:a16="http://schemas.microsoft.com/office/drawing/2014/main" id="{E750D06A-626A-4348-CA99-CE04C627A232}"/>
+              </a:ext>
+            </a:extLst>
+          </p:cNvPr>
+          <p:cNvSpPr/>
+          <p:nvPr/>
+        </p:nvSpPr>
+        <p:spPr>
+          <a:xfrm>
+            <a:off x="439615" y="2719107"/>
+            <a:ext cx="3773659" cy="2281957"/>
+          </a:xfrm>
+          <a:prstGeom prst="roundRect">
+            <a:avLst>
+              <a:gd name="adj" fmla="val 2143"/>
+            </a:avLst>
+          </a:prstGeom>
+          <a:solidFill>
+            <a:schemeClr val="accent1">
+              <a:lumMod val="75000"/>
+            </a:schemeClr>
+          </a:solidFill>
+          <a:ln w="12700">
+            <a:solidFill>
+              <a:schemeClr val="accent1">
+                <a:lumMod val="75000"/>
+              </a:schemeClr>
+            </a:solidFill>
+            <a:prstDash val="solid"/>
+          </a:ln>
+        </p:spPr>
+        <p:txBody>
+          <a:bodyPr/>
+          <a:lstStyle/>
+          <a:p>
+            <a:endParaRPr lang="en-US"/>
+          </a:p>
+        </p:txBody>
+      </p:sp>
+      <p:sp>
+        <p:nvSpPr>
+          <p:cNvPr id="17" name="Text 11">
+            <a:extLst>
+              <a:ext uri="{FF2B5EF4-FFF2-40B4-BE49-F238E27FC236}">
+                <a16:creationId xmlns:a16="http://schemas.microsoft.com/office/drawing/2014/main" id="{F3440954-5CFF-06C7-8641-E2E38BA6F847}"/>
+              </a:ext>
+            </a:extLst>
+          </p:cNvPr>
+          <p:cNvSpPr txBox="1"/>
+          <p:nvPr/>
+        </p:nvSpPr>
+        <p:spPr>
+          <a:xfrm>
+            <a:off x="668216" y="2899117"/>
+            <a:ext cx="3369212" cy="716926"/>
+          </a:xfrm>
+          <a:prstGeom prst="rect">
+            <a:avLst/>
+          </a:prstGeom>
+          <a:noFill/>
+          <a:ln/>
+        </p:spPr>
+        <p:txBody>
+          <a:bodyPr wrap="square" lIns="0" tIns="0" rIns="0" bIns="0" rtlCol="0" anchor="t"/>
+          <a:lstStyle/>
+          <a:p>
+            <a:r>
+              <a:rPr lang="es-ES" sz="1400" b="1" dirty="0">
+                <a:solidFill>
+                  <a:schemeClr val="bg1"/>
+                </a:solidFill>
+                <a:latin typeface="Calibri" pitchFamily="34" charset="0"/>
+                <a:ea typeface="Calibri" pitchFamily="34" charset="-122"/>
+                <a:cs typeface="Calibri" pitchFamily="34" charset="-120"/>
+              </a:rPr>
+              <a:t>Copiá a tu proyecto la carpeta </a:t>
+            </a:r>
+            <a:r>
+              <a:rPr lang="es-ES" sz="1400" b="1" i="1" dirty="0">
+                <a:solidFill>
+                  <a:schemeClr val="bg1"/>
+                </a:solidFill>
+                <a:latin typeface="Calibri" pitchFamily="34" charset="0"/>
+                <a:ea typeface="Calibri" pitchFamily="34" charset="-122"/>
+                <a:cs typeface="Calibri" pitchFamily="34" charset="-120"/>
+              </a:rPr>
+              <a:t>datos/</a:t>
+            </a:r>
+            <a:r>
+              <a:rPr lang="es-ES" sz="1400" b="1" dirty="0">
+                <a:solidFill>
+                  <a:schemeClr val="bg1"/>
+                </a:solidFill>
+                <a:latin typeface="Calibri" pitchFamily="34" charset="0"/>
+                <a:ea typeface="Calibri" pitchFamily="34" charset="-122"/>
+                <a:cs typeface="Calibri" pitchFamily="34" charset="-120"/>
+              </a:rPr>
+              <a:t> y la de la clase en la que trabajás, y hacé los cambios ahí. Así </a:t>
+            </a:r>
+            <a:r>
+              <a:rPr lang="es-ES" sz="1400" b="1" i="1" dirty="0">
+                <a:solidFill>
+                  <a:schemeClr val="bg1"/>
+                </a:solidFill>
+                <a:latin typeface="Calibri" pitchFamily="34" charset="0"/>
+                <a:ea typeface="Calibri" pitchFamily="34" charset="-122"/>
+                <a:cs typeface="Calibri" pitchFamily="34" charset="-120"/>
+              </a:rPr>
+              <a:t>../datos/</a:t>
+            </a:r>
+            <a:r>
+              <a:rPr lang="es-ES" sz="1400" b="1" dirty="0">
+                <a:solidFill>
+                  <a:schemeClr val="bg1"/>
+                </a:solidFill>
+                <a:latin typeface="Calibri" pitchFamily="34" charset="0"/>
+                <a:ea typeface="Calibri" pitchFamily="34" charset="-122"/>
+                <a:cs typeface="Calibri" pitchFamily="34" charset="-120"/>
+              </a:rPr>
+              <a:t> sigue funcionando.</a:t>
+            </a:r>
+          </a:p>
+          <a:p>
+            <a:endParaRPr lang="es-ES" sz="1400" b="1" dirty="0">
+              <a:solidFill>
+                <a:schemeClr val="bg1"/>
+              </a:solidFill>
+              <a:latin typeface="Calibri" pitchFamily="34" charset="0"/>
+              <a:ea typeface="Calibri" pitchFamily="34" charset="-122"/>
+              <a:cs typeface="Calibri" pitchFamily="34" charset="-120"/>
+            </a:endParaRPr>
+          </a:p>
+          <a:p>
+            <a:r>
+              <a:rPr lang="es-ES" sz="1400" b="1" dirty="0">
+                <a:solidFill>
+                  <a:schemeClr val="bg1"/>
+                </a:solidFill>
+                <a:latin typeface="Calibri" pitchFamily="34" charset="0"/>
+                <a:ea typeface="Calibri" pitchFamily="34" charset="-122"/>
+                <a:cs typeface="Calibri" pitchFamily="34" charset="-120"/>
+              </a:rPr>
+              <a:t>En la pestaña </a:t>
+            </a:r>
+            <a:r>
+              <a:rPr lang="es-ES" sz="1400" b="1" i="1" dirty="0">
+                <a:solidFill>
+                  <a:schemeClr val="bg1"/>
+                </a:solidFill>
+                <a:latin typeface="Calibri" pitchFamily="34" charset="0"/>
+                <a:ea typeface="Calibri" pitchFamily="34" charset="-122"/>
+                <a:cs typeface="Calibri" pitchFamily="34" charset="-120"/>
+              </a:rPr>
+              <a:t>Git</a:t>
+            </a:r>
+            <a:r>
+              <a:rPr lang="es-ES" sz="1400" b="1" dirty="0">
+                <a:solidFill>
+                  <a:schemeClr val="bg1"/>
+                </a:solidFill>
+                <a:latin typeface="Calibri" pitchFamily="34" charset="0"/>
+                <a:ea typeface="Calibri" pitchFamily="34" charset="-122"/>
+                <a:cs typeface="Calibri" pitchFamily="34" charset="-120"/>
+              </a:rPr>
+              <a:t>, marcá los archivos, </a:t>
+            </a:r>
+            <a:r>
+              <a:rPr lang="es-ES" sz="1400" b="1" i="1" dirty="0">
+                <a:solidFill>
+                  <a:schemeClr val="bg1"/>
+                </a:solidFill>
+                <a:latin typeface="Calibri" pitchFamily="34" charset="0"/>
+                <a:ea typeface="Calibri" pitchFamily="34" charset="-122"/>
+                <a:cs typeface="Calibri" pitchFamily="34" charset="-120"/>
+              </a:rPr>
+              <a:t>Commit</a:t>
+            </a:r>
+            <a:r>
+              <a:rPr lang="es-ES" sz="1400" b="1" dirty="0">
+                <a:solidFill>
+                  <a:schemeClr val="bg1"/>
+                </a:solidFill>
+                <a:latin typeface="Calibri" pitchFamily="34" charset="0"/>
+                <a:ea typeface="Calibri" pitchFamily="34" charset="-122"/>
+                <a:cs typeface="Calibri" pitchFamily="34" charset="-120"/>
+              </a:rPr>
+              <a:t> con un mensaje corto y </a:t>
+            </a:r>
+            <a:r>
+              <a:rPr lang="es-ES" sz="1400" b="1" i="1" dirty="0">
+                <a:solidFill>
+                  <a:schemeClr val="bg1"/>
+                </a:solidFill>
+                <a:latin typeface="Calibri" pitchFamily="34" charset="0"/>
+                <a:ea typeface="Calibri" pitchFamily="34" charset="-122"/>
+                <a:cs typeface="Calibri" pitchFamily="34" charset="-120"/>
+              </a:rPr>
+              <a:t>Push</a:t>
+            </a:r>
+            <a:r>
+              <a:rPr lang="es-ES" sz="1400" b="1" dirty="0">
+                <a:solidFill>
+                  <a:schemeClr val="bg1"/>
+                </a:solidFill>
+                <a:latin typeface="Calibri" pitchFamily="34" charset="0"/>
+                <a:ea typeface="Calibri" pitchFamily="34" charset="-122"/>
+                <a:cs typeface="Calibri" pitchFamily="34" charset="-120"/>
+              </a:rPr>
+              <a:t>. Conviene hacerlo al terminar cada clase.</a:t>
+            </a:r>
+          </a:p>
+        </p:txBody>
+      </p:sp>
+      <p:pic>
+        <p:nvPicPr>
+          <p:cNvPr id="18" name="Picture 17" descr="cap3.png"/>
+          <p:cNvPicPr>
+            <a:picLocks noChangeAspect="1"/>
+          </p:cNvPicPr>
+          <p:nvPr/>
+        </p:nvPicPr>
+        <p:blipFill>
+          <a:blip r:embed="rId2"/>
+          <a:stretch>
+            <a:fillRect/>
+          </a:stretch>
+        </p:blipFill>
+        <p:spPr>
+          <a:xfrm>
+            <a:off x="4434840" y="1956145"/>
+            <a:ext cx="4480560" cy="1528388"/>
+          </a:xfrm>
+          <a:prstGeom prst="rect">
+            <a:avLst/>
+          </a:prstGeom>
+        </p:spPr>
+      </p:pic>
+    </p:spTree>
+  </p:cSld>
+  <p:clrMapOvr>
+    <a:masterClrMapping/>
+  </p:clrMapOvr>
+</p:sld>
+</file>
+
+<file path=ppt/slides/slide22.xml><?xml version="1.0" encoding="utf-8"?>
+<p:sld xmlns:a="http://schemas.openxmlformats.org/drawingml/2006/main" xmlns:r="http://schemas.openxmlformats.org/officeDocument/2006/relationships" xmlns:p="http://schemas.openxmlformats.org/presentationml/2006/main">
   <p:cSld>
     <p:bg>
       <p:bgPr>
@@ -8824,7 +8726,14 @@
         <p:cNvGrpSpPr/>
         <p:nvPr/>
       </p:nvGrpSpPr>
-      <p:grpSpPr/>
+      <p:grpSpPr>
+        <a:xfrm>
+          <a:off x="0" y="0"/>
+          <a:ext cx="0" cy="0"/>
+          <a:chOff x="0" y="0"/>
+          <a:chExt cx="0" cy="0"/>
+        </a:xfrm>
+      </p:grpSpPr>
       <p:sp>
         <p:nvSpPr>
           <p:cNvPr id="3" name="Text 1"/>
@@ -9006,7 +8915,7 @@
 </p:sld>
 </file>
 
-<file path=ppt/slides/slide22.xml><?xml version="1.0" encoding="utf-8"?>
+<file path=ppt/slides/slide23.xml><?xml version="1.0" encoding="utf-8"?>
 <p:sld xmlns:a="http://schemas.openxmlformats.org/drawingml/2006/main" xmlns:r="http://schemas.openxmlformats.org/officeDocument/2006/relationships" xmlns:p="http://schemas.openxmlformats.org/presentationml/2006/main">
   <p:cSld name="Slide 8">
     <p:bg>
@@ -9859,7 +9768,7 @@
                 </a:tc>
                 <a:extLst>
                   <a:ext uri="{0D108BD9-81ED-4DB2-BD59-A6C34878D82A}">
-                    <a16:rowId xmlns:a16="http://schemas.microsoft.com/office/drawing/2014/main" val="10002"/>
+                    <a16:rowId xmlns:a16="http://schemas.microsoft.com/office/drawing/2014/main" val="2229649505"/>
                   </a:ext>
                 </a:extLst>
               </a:tr>
@@ -9998,7 +9907,7 @@
                 </a:tc>
                 <a:extLst>
                   <a:ext uri="{0D108BD9-81ED-4DB2-BD59-A6C34878D82A}">
-                    <a16:rowId xmlns:a16="http://schemas.microsoft.com/office/drawing/2014/main" val="10002"/>
+                    <a16:rowId xmlns:a16="http://schemas.microsoft.com/office/drawing/2014/main" val="1736751926"/>
                   </a:ext>
                 </a:extLst>
               </a:tr>
@@ -10137,7 +10046,7 @@
                 </a:tc>
                 <a:extLst>
                   <a:ext uri="{0D108BD9-81ED-4DB2-BD59-A6C34878D82A}">
-                    <a16:rowId xmlns:a16="http://schemas.microsoft.com/office/drawing/2014/main" val="10002"/>
+                    <a16:rowId xmlns:a16="http://schemas.microsoft.com/office/drawing/2014/main" val="3594637859"/>
                   </a:ext>
                 </a:extLst>
               </a:tr>
@@ -10276,7 +10185,7 @@
                 </a:tc>
                 <a:extLst>
                   <a:ext uri="{0D108BD9-81ED-4DB2-BD59-A6C34878D82A}">
-                    <a16:rowId xmlns:a16="http://schemas.microsoft.com/office/drawing/2014/main" val="10002"/>
+                    <a16:rowId xmlns:a16="http://schemas.microsoft.com/office/drawing/2014/main" val="2418722407"/>
                   </a:ext>
                 </a:extLst>
               </a:tr>
@@ -10415,7 +10324,7 @@
                 </a:tc>
                 <a:extLst>
                   <a:ext uri="{0D108BD9-81ED-4DB2-BD59-A6C34878D82A}">
-                    <a16:rowId xmlns:a16="http://schemas.microsoft.com/office/drawing/2014/main" val="10002"/>
+                    <a16:rowId xmlns:a16="http://schemas.microsoft.com/office/drawing/2014/main" val="3036020312"/>
                   </a:ext>
                 </a:extLst>
               </a:tr>
@@ -10554,7 +10463,7 @@
                 </a:tc>
                 <a:extLst>
                   <a:ext uri="{0D108BD9-81ED-4DB2-BD59-A6C34878D82A}">
-                    <a16:rowId xmlns:a16="http://schemas.microsoft.com/office/drawing/2014/main" val="10002"/>
+                    <a16:rowId xmlns:a16="http://schemas.microsoft.com/office/drawing/2014/main" val="1228611096"/>
                   </a:ext>
                 </a:extLst>
               </a:tr>
@@ -13759,7 +13668,7 @@
 </file>
 
 <file path=ppt/slides/slide9.xml><?xml version="1.0" encoding="utf-8"?>
-<p:sld xmlns:a="http://schemas.openxmlformats.org/drawingml/2006/main" xmlns:p="http://schemas.openxmlformats.org/presentationml/2006/main" xmlns:r="http://schemas.openxmlformats.org/officeDocument/2006/relationships">
+<p:sld xmlns:a="http://schemas.openxmlformats.org/drawingml/2006/main" xmlns:r="http://schemas.openxmlformats.org/officeDocument/2006/relationships" xmlns:p="http://schemas.openxmlformats.org/presentationml/2006/main">
   <p:cSld>
     <p:bg>
       <p:bgPr>
@@ -13771,17 +13680,30 @@
     </p:bg>
     <p:spTree>
       <p:nvGrpSpPr>
-        <p:cNvPr id="1" name=""/>
+        <p:cNvPr id="1" name="">
+          <a:extLst>
+            <a:ext uri="{FF2B5EF4-FFF2-40B4-BE49-F238E27FC236}">
+              <a16:creationId xmlns:a16="http://schemas.microsoft.com/office/drawing/2014/main" id="{2AB0F8C3-CC5F-F2B4-F57A-B0D453B2CE5E}"/>
+            </a:ext>
+          </a:extLst>
+        </p:cNvPr>
         <p:cNvGrpSpPr/>
         <p:nvPr/>
       </p:nvGrpSpPr>
-      <p:grpSpPr/>
+      <p:grpSpPr>
+        <a:xfrm>
+          <a:off x="0" y="0"/>
+          <a:ext cx="0" cy="0"/>
+          <a:chOff x="0" y="0"/>
+          <a:chExt cx="0" cy="0"/>
+        </a:xfrm>
+      </p:grpSpPr>
       <p:sp>
         <p:nvSpPr>
           <p:cNvPr id="2" name="Text 0">
             <a:extLst>
               <a:ext uri="{FF2B5EF4-FFF2-40B4-BE49-F238E27FC236}">
-                <a16:creationId xmlns:a16="http://schemas.microsoft.com/office/drawing/2014/main" id="{45FBCF84-BF0C-00DD-1115-ECF03D12DDA6}"/>
+                <a16:creationId xmlns:a16="http://schemas.microsoft.com/office/drawing/2014/main" id="{740D0576-CF0B-D304-5830-00968DA6E68F}"/>
               </a:ext>
             </a:extLst>
           </p:cNvPr>
@@ -13803,11 +13725,8 @@
           <a:bodyPr wrap="square" lIns="0" tIns="0" rIns="0" bIns="0" rtlCol="0" anchor="ctr"/>
           <a:lstStyle/>
           <a:p>
-            <a:pPr marL="0" indent="0">
-              <a:buNone/>
-            </a:pPr>
-            <a:r>
-              <a:rPr lang="en-US" sz="3000" b="1" dirty="0">
+            <a:r>
+              <a:rPr lang="es-UY" sz="3000" b="1" dirty="0">
                 <a:solidFill>
                   <a:srgbClr val="2E0A4E"/>
                 </a:solidFill>
@@ -13815,18 +13734,18 @@
                 <a:ea typeface="Oswald" pitchFamily="34" charset="-122"/>
                 <a:cs typeface="Oswald" pitchFamily="34" charset="-120"/>
               </a:rPr>
-              <a:t>Paso a paso (1)</a:t>
-            </a:r>
-            <a:endParaRPr lang="en-US" sz="3000" dirty="0"/>
-          </a:p>
-        </p:txBody>
-      </p:sp>
-      <p:sp>
-        <p:nvSpPr>
-          <p:cNvPr id="11" name="Shape 9">
+              <a:t>Shinys para inspirarse</a:t>
+            </a:r>
+            <a:endParaRPr lang="es-UY" sz="3000" dirty="0"/>
+          </a:p>
+        </p:txBody>
+      </p:sp>
+      <p:sp>
+        <p:nvSpPr>
+          <p:cNvPr id="5" name="Shape 3">
             <a:extLst>
               <a:ext uri="{FF2B5EF4-FFF2-40B4-BE49-F238E27FC236}">
-                <a16:creationId xmlns:a16="http://schemas.microsoft.com/office/drawing/2014/main" id="{1E4D2BBF-BB0F-7CF4-3842-6325D6A2CD35}"/>
+                <a16:creationId xmlns:a16="http://schemas.microsoft.com/office/drawing/2014/main" id="{9F2F5559-8540-9473-88CB-C9B54DF8D2B7}"/>
               </a:ext>
             </a:extLst>
           </p:cNvPr>
@@ -13835,13 +13754,51 @@
         </p:nvSpPr>
         <p:spPr>
           <a:xfrm>
-            <a:off x="439616" y="1188720"/>
-            <a:ext cx="2560320" cy="1463040"/>
+            <a:off x="397412" y="1151792"/>
+            <a:ext cx="8138160" cy="3246120"/>
           </a:xfrm>
           <a:prstGeom prst="roundRect">
             <a:avLst>
-              <a:gd name="adj" fmla="val 2143"/>
+              <a:gd name="adj" fmla="val 3529"/>
             </a:avLst>
+          </a:prstGeom>
+          <a:solidFill>
+            <a:srgbClr val="F4ECFB"/>
+          </a:solidFill>
+          <a:ln w="12700">
+            <a:solidFill>
+              <a:srgbClr val="F4ECFB"/>
+            </a:solidFill>
+            <a:prstDash val="solid"/>
+          </a:ln>
+        </p:spPr>
+        <p:txBody>
+          <a:bodyPr/>
+          <a:lstStyle/>
+          <a:p>
+            <a:endParaRPr lang="es-UY" noProof="0" dirty="0"/>
+          </a:p>
+        </p:txBody>
+      </p:sp>
+      <p:sp>
+        <p:nvSpPr>
+          <p:cNvPr id="6" name="Shape 4">
+            <a:extLst>
+              <a:ext uri="{FF2B5EF4-FFF2-40B4-BE49-F238E27FC236}">
+                <a16:creationId xmlns:a16="http://schemas.microsoft.com/office/drawing/2014/main" id="{1DAD86C9-020D-A459-A4F2-83278273AED4}"/>
+              </a:ext>
+            </a:extLst>
+          </p:cNvPr>
+          <p:cNvSpPr/>
+          <p:nvPr/>
+        </p:nvSpPr>
+        <p:spPr>
+          <a:xfrm>
+            <a:off x="685800" y="1371600"/>
+            <a:ext cx="411480" cy="411480"/>
+          </a:xfrm>
+          <a:prstGeom prst="ellipse">
+            <a:avLst/>
           </a:prstGeom>
           <a:solidFill>
             <a:srgbClr val="5A189A"/>
@@ -13857,16 +13814,16 @@
           <a:bodyPr/>
           <a:lstStyle/>
           <a:p>
-            <a:endParaRPr lang="en-US"/>
-          </a:p>
-        </p:txBody>
-      </p:sp>
-      <p:sp>
-        <p:nvSpPr>
-          <p:cNvPr id="12" name="Text 10">
+            <a:endParaRPr lang="es-UY" noProof="0" dirty="0"/>
+          </a:p>
+        </p:txBody>
+      </p:sp>
+      <p:sp>
+        <p:nvSpPr>
+          <p:cNvPr id="7" name="Text 5">
             <a:extLst>
               <a:ext uri="{FF2B5EF4-FFF2-40B4-BE49-F238E27FC236}">
-                <a16:creationId xmlns:a16="http://schemas.microsoft.com/office/drawing/2014/main" id="{57EA7703-08D4-E6C4-4FDB-5B08F7881055}"/>
+                <a16:creationId xmlns:a16="http://schemas.microsoft.com/office/drawing/2014/main" id="{BE7799E2-891C-E080-AF62-6365687F53CD}"/>
               </a:ext>
             </a:extLst>
           </p:cNvPr>
@@ -13875,8 +13832,8 @@
         </p:nvSpPr>
         <p:spPr>
           <a:xfrm>
-            <a:off x="668216" y="1256068"/>
-            <a:ext cx="2103120" cy="502920"/>
+            <a:off x="685800" y="1371600"/>
+            <a:ext cx="411480" cy="411480"/>
           </a:xfrm>
           <a:prstGeom prst="rect">
             <a:avLst/>
@@ -13888,11 +13845,11 @@
           <a:bodyPr wrap="square" lIns="0" tIns="0" rIns="0" bIns="0" rtlCol="0" anchor="ctr"/>
           <a:lstStyle/>
           <a:p>
-            <a:pPr marL="0" indent="0">
+            <a:pPr marL="0" indent="0" algn="ctr">
               <a:buNone/>
             </a:pPr>
             <a:r>
-              <a:rPr lang="en-US" sz="1600" b="1" dirty="0">
+              <a:rPr lang="es-UY" sz="1400" b="1" noProof="0" dirty="0">
                 <a:solidFill>
                   <a:srgbClr val="FFFFFF"/>
                 </a:solidFill>
@@ -13900,18 +13857,18 @@
                 <a:ea typeface="Oswald" pitchFamily="34" charset="-122"/>
                 <a:cs typeface="Oswald" pitchFamily="34" charset="-120"/>
               </a:rPr>
-              <a:t>OBJETIVO 3</a:t>
-            </a:r>
-            <a:endParaRPr lang="en-US" sz="1600" dirty="0"/>
-          </a:p>
-        </p:txBody>
-      </p:sp>
-      <p:sp>
-        <p:nvSpPr>
-          <p:cNvPr id="13" name="Text 11">
+              <a:t>4</a:t>
+            </a:r>
+            <a:endParaRPr lang="es-UY" sz="1400" noProof="0" dirty="0"/>
+          </a:p>
+        </p:txBody>
+      </p:sp>
+      <p:sp>
+        <p:nvSpPr>
+          <p:cNvPr id="8" name="Text 6">
             <a:extLst>
               <a:ext uri="{FF2B5EF4-FFF2-40B4-BE49-F238E27FC236}">
-                <a16:creationId xmlns:a16="http://schemas.microsoft.com/office/drawing/2014/main" id="{83082800-1689-F508-4C9C-8E0187A18BDD}"/>
+                <a16:creationId xmlns:a16="http://schemas.microsoft.com/office/drawing/2014/main" id="{A09DC744-6EDD-3786-3D96-786DF242C174}"/>
               </a:ext>
             </a:extLst>
           </p:cNvPr>
@@ -13920,8 +13877,8 @@
         </p:nvSpPr>
         <p:spPr>
           <a:xfrm>
-            <a:off x="668216" y="1734572"/>
-            <a:ext cx="2103120" cy="716926"/>
+            <a:off x="1234439" y="1353312"/>
+            <a:ext cx="5961186" cy="457200"/>
           </a:xfrm>
           <a:prstGeom prst="rect">
             <a:avLst/>
@@ -13930,74 +13887,33 @@
           <a:ln/>
         </p:spPr>
         <p:txBody>
-          <a:bodyPr wrap="square" lIns="0" tIns="0" rIns="0" bIns="0" rtlCol="0" anchor="t"/>
-          <a:lstStyle/>
-          <a:p>
-            <a:r>
-              <a:rPr lang="es-ES" sz="1400" dirty="0">
-                <a:solidFill>
-                  <a:schemeClr val="bg1"/>
-                </a:solidFill>
-                <a:latin typeface="Calibri" pitchFamily="34" charset="0"/>
-                <a:ea typeface="Calibri" pitchFamily="34" charset="-122"/>
-                <a:cs typeface="Calibri" pitchFamily="34" charset="-120"/>
-              </a:rPr>
-              <a:t>Dejar todo instalado</a:t>
-            </a:r>
-            <a:endParaRPr lang="en-US" sz="1300" dirty="0"/>
-          </a:p>
-        </p:txBody>
-      </p:sp>
-      <p:sp>
-        <p:nvSpPr>
-          <p:cNvPr id="15" name="Shape 9">
+          <a:bodyPr wrap="square" lIns="0" tIns="0" rIns="0" bIns="0" rtlCol="0" anchor="ctr"/>
+          <a:lstStyle/>
+          <a:p>
+            <a:pPr marL="0" indent="0">
+              <a:buNone/>
+            </a:pPr>
+            <a:r>
+              <a:rPr lang="es-ES" sz="2000" b="1" noProof="0" dirty="0">
+                <a:solidFill>
+                  <a:srgbClr val="2E0A4E"/>
+                </a:solidFill>
+                <a:latin typeface="Oswald" pitchFamily="34" charset="0"/>
+                <a:ea typeface="Oswald" pitchFamily="34" charset="-122"/>
+                <a:cs typeface="Oswald" pitchFamily="34" charset="-120"/>
+              </a:rPr>
+              <a:t>La shiny de nuestro curso:</a:t>
+            </a:r>
+            <a:endParaRPr lang="es-UY" sz="2000" noProof="0" dirty="0"/>
+          </a:p>
+        </p:txBody>
+      </p:sp>
+      <p:sp>
+        <p:nvSpPr>
+          <p:cNvPr id="32" name="Text 7">
             <a:extLst>
               <a:ext uri="{FF2B5EF4-FFF2-40B4-BE49-F238E27FC236}">
-                <a16:creationId xmlns:a16="http://schemas.microsoft.com/office/drawing/2014/main" id="{E750D06A-626A-4348-CA99-CE04C627A232}"/>
-              </a:ext>
-            </a:extLst>
-          </p:cNvPr>
-          <p:cNvSpPr/>
-          <p:nvPr/>
-        </p:nvSpPr>
-        <p:spPr>
-          <a:xfrm>
-            <a:off x="439615" y="2719107"/>
-            <a:ext cx="3773659" cy="2281957"/>
-          </a:xfrm>
-          <a:prstGeom prst="roundRect">
-            <a:avLst>
-              <a:gd name="adj" fmla="val 2143"/>
-            </a:avLst>
-          </a:prstGeom>
-          <a:solidFill>
-            <a:schemeClr val="accent1">
-              <a:lumMod val="75000"/>
-            </a:schemeClr>
-          </a:solidFill>
-          <a:ln w="12700">
-            <a:solidFill>
-              <a:schemeClr val="accent1">
-                <a:lumMod val="75000"/>
-              </a:schemeClr>
-            </a:solidFill>
-            <a:prstDash val="solid"/>
-          </a:ln>
-        </p:spPr>
-        <p:txBody>
-          <a:bodyPr/>
-          <a:lstStyle/>
-          <a:p>
-            <a:endParaRPr lang="en-US"/>
-          </a:p>
-        </p:txBody>
-      </p:sp>
-      <p:sp>
-        <p:nvSpPr>
-          <p:cNvPr id="17" name="Text 11">
-            <a:extLst>
-              <a:ext uri="{FF2B5EF4-FFF2-40B4-BE49-F238E27FC236}">
-                <a16:creationId xmlns:a16="http://schemas.microsoft.com/office/drawing/2014/main" id="{F3440954-5CFF-06C7-8641-E2E38BA6F847}"/>
+                <a16:creationId xmlns:a16="http://schemas.microsoft.com/office/drawing/2014/main" id="{B7E58599-E4CA-0220-24EA-DE96732ADEA4}"/>
               </a:ext>
             </a:extLst>
           </p:cNvPr>
@@ -14006,8 +13922,8 @@
         </p:nvSpPr>
         <p:spPr>
           <a:xfrm>
-            <a:off x="668216" y="2899117"/>
-            <a:ext cx="3369212" cy="716926"/>
+            <a:off x="1234439" y="2829892"/>
+            <a:ext cx="7100669" cy="274320"/>
           </a:xfrm>
           <a:prstGeom prst="rect">
             <a:avLst/>
@@ -14016,122 +13932,60 @@
           <a:ln/>
         </p:spPr>
         <p:txBody>
-          <a:bodyPr wrap="square" lIns="0" tIns="0" rIns="0" bIns="0" rtlCol="0" anchor="t"/>
-          <a:lstStyle/>
-          <a:p>
-            <a:r>
-              <a:rPr lang="es-ES" sz="1400" b="1" dirty="0">
-                <a:solidFill>
-                  <a:schemeClr val="bg1"/>
-                </a:solidFill>
-                <a:latin typeface="Calibri" pitchFamily="34" charset="0"/>
-                <a:ea typeface="Calibri" pitchFamily="34" charset="-122"/>
-                <a:cs typeface="Calibri" pitchFamily="34" charset="-120"/>
-              </a:rPr>
-              <a:t>Primero R, después RStudio. Los paquetes se instalan una sola vez con </a:t>
-            </a:r>
-            <a:r>
-              <a:rPr lang="es-ES" sz="1400" b="1" i="1" dirty="0">
-                <a:solidFill>
-                  <a:schemeClr val="bg1"/>
-                </a:solidFill>
-                <a:latin typeface="Calibri" pitchFamily="34" charset="0"/>
-                <a:ea typeface="Calibri" pitchFamily="34" charset="-122"/>
-                <a:cs typeface="Calibri" pitchFamily="34" charset="-120"/>
-              </a:rPr>
-              <a:t>install.packages()</a:t>
-            </a:r>
-            <a:r>
-              <a:rPr lang="es-ES" sz="1400" b="1" dirty="0">
-                <a:solidFill>
-                  <a:schemeClr val="bg1"/>
-                </a:solidFill>
-                <a:latin typeface="Calibri" pitchFamily="34" charset="0"/>
-                <a:ea typeface="Calibri" pitchFamily="34" charset="-122"/>
-                <a:cs typeface="Calibri" pitchFamily="34" charset="-120"/>
-              </a:rPr>
-              <a:t>.</a:t>
-            </a:r>
-          </a:p>
-          <a:p>
-            <a:endParaRPr lang="es-ES" sz="1400" b="1" dirty="0">
-              <a:solidFill>
-                <a:schemeClr val="bg1"/>
-              </a:solidFill>
-              <a:latin typeface="Calibri" pitchFamily="34" charset="0"/>
-              <a:ea typeface="Calibri" pitchFamily="34" charset="-122"/>
-              <a:cs typeface="Calibri" pitchFamily="34" charset="-120"/>
-            </a:endParaRPr>
-          </a:p>
-          <a:p>
-            <a:r>
-              <a:rPr lang="es-ES" sz="1400" b="1" dirty="0">
-                <a:solidFill>
-                  <a:schemeClr val="bg1"/>
-                </a:solidFill>
-                <a:latin typeface="Calibri" pitchFamily="34" charset="0"/>
-                <a:ea typeface="Calibri" pitchFamily="34" charset="-122"/>
-                <a:cs typeface="Calibri" pitchFamily="34" charset="-120"/>
-              </a:rPr>
-              <a:t>Abrir el curso siempre desde el archivo </a:t>
-            </a:r>
-            <a:r>
-              <a:rPr lang="es-ES" sz="1400" b="1" i="1" dirty="0">
-                <a:solidFill>
-                  <a:schemeClr val="bg1"/>
-                </a:solidFill>
-                <a:latin typeface="Calibri" pitchFamily="34" charset="0"/>
-                <a:ea typeface="Calibri" pitchFamily="34" charset="-122"/>
-                <a:cs typeface="Calibri" pitchFamily="34" charset="-120"/>
-              </a:rPr>
-              <a:t>.Rproj</a:t>
-            </a:r>
-            <a:r>
-              <a:rPr lang="es-ES" sz="1400" b="1" dirty="0">
-                <a:solidFill>
-                  <a:schemeClr val="bg1"/>
-                </a:solidFill>
-                <a:latin typeface="Calibri" pitchFamily="34" charset="0"/>
-                <a:ea typeface="Calibri" pitchFamily="34" charset="-122"/>
-                <a:cs typeface="Calibri" pitchFamily="34" charset="-120"/>
-              </a:rPr>
-              <a:t>. Así R sabe dónde están los datos.</a:t>
-            </a:r>
+          <a:bodyPr wrap="square" lIns="0" tIns="0" rIns="0" bIns="0" rtlCol="0" anchor="ctr"/>
+          <a:lstStyle/>
+          <a:p>
+            <a:r>
+              <a:rPr lang="es-ES" sz="1600" b="1" dirty="0">
+                <a:solidFill>
+                  <a:srgbClr val="5A189A"/>
+                </a:solidFill>
+                <a:latin typeface="Courier New" pitchFamily="34" charset="0"/>
+                <a:cs typeface="Courier New" pitchFamily="34" charset="-120"/>
+                <a:hlinkClick r:id="rId3"/>
+              </a:rPr>
+              <a:t>https://nahuelroel-cursoshiny.share.connect.posit.cloud/</a:t>
+            </a:r>
+            <a:endParaRPr lang="es-UY" sz="1600" b="1" noProof="0" dirty="0"/>
           </a:p>
         </p:txBody>
       </p:sp>
       <p:pic>
         <p:nvPicPr>
-          <p:cNvPr id="22" name="Picture 21" descr="p1.png"/>
+          <p:cNvPr id="9" name="Picture 8">
+            <a:extLst>
+              <a:ext uri="{FF2B5EF4-FFF2-40B4-BE49-F238E27FC236}">
+                <a16:creationId xmlns:a16="http://schemas.microsoft.com/office/drawing/2014/main" id="{E38B869B-A34C-7776-39FB-D2F254A1FBFD}"/>
+              </a:ext>
+            </a:extLst>
+          </p:cNvPr>
           <p:cNvPicPr>
             <a:picLocks noChangeAspect="1"/>
           </p:cNvPicPr>
           <p:nvPr/>
         </p:nvPicPr>
         <p:blipFill>
-          <a:blip r:embed="rId2"/>
+          <a:blip r:embed="rId4"/>
           <a:stretch>
             <a:fillRect/>
           </a:stretch>
         </p:blipFill>
         <p:spPr>
           <a:xfrm>
-            <a:off x="4434840" y="1668901"/>
-            <a:ext cx="4480560" cy="2102876"/>
+            <a:off x="1234439" y="1812471"/>
+            <a:ext cx="2860767" cy="551407"/>
           </a:xfrm>
           <a:prstGeom prst="rect">
             <a:avLst/>
           </a:prstGeom>
-          <a:ln w="76200">
-            <a:solidFill>
-              <a:schemeClr val="accent1">
-                <a:lumMod val="75000"/>
-              </a:schemeClr>
-            </a:solidFill>
-          </a:ln>
         </p:spPr>
       </p:pic>
     </p:spTree>
+    <p:extLst>
+      <p:ext uri="{BB962C8B-B14F-4D97-AF65-F5344CB8AC3E}">
+        <p14:creationId xmlns:p14="http://schemas.microsoft.com/office/powerpoint/2010/main" val="894793366"/>
+      </p:ext>
+    </p:extLst>
   </p:cSld>
   <p:clrMapOvr>
     <a:masterClrMapping/>

--- a/clase1/clase1.pptx
+++ b/clase1/clase1.pptx
@@ -138,6 +138,7 @@
 <p1510:revInfo xmlns:a="http://schemas.openxmlformats.org/drawingml/2006/main" xmlns:r="http://schemas.openxmlformats.org/officeDocument/2006/relationships" xmlns:p1510="http://schemas.microsoft.com/office/powerpoint/2015/10/main">
   <p1510:revLst>
     <p1510:client id="{75231100-3F8B-4AA8-A25F-ED091176310E}" v="2" dt="2026-10-18T22:52:42.974"/>
+    <p1510:client id="{B13002E2-C899-493A-AA5D-FA4E7F53845C}" v="3" dt="2026-10-19T16:59:51.453"/>
   </p1510:revLst>
 </p1510:revInfo>
 </file>
@@ -147,7 +148,7 @@
   <pc:docChgLst>
     <pc:chgData name="Nahuel Roel" userId="f57eb92d7f62e27b" providerId="LiveId" clId="{1698397B-2804-4513-BF38-7951CB4798F0}"/>
     <pc:docChg chg="undo custSel addSld delSld modSld sldOrd">
-      <pc:chgData name="Nahuel Roel" userId="f57eb92d7f62e27b" providerId="LiveId" clId="{1698397B-2804-4513-BF38-7951CB4798F0}" dt="2026-09-27T00:02:14.478" v="3872" actId="20577"/>
+      <pc:chgData name="Nahuel Roel" userId="f57eb92d7f62e27b" providerId="LiveId" clId="{1698397B-2804-4513-BF38-7951CB4798F0}" dt="2026-10-19T17:00:16.823" v="3885" actId="20577"/>
       <pc:docMkLst>
         <pc:docMk/>
       </pc:docMkLst>
@@ -859,6 +860,29 @@
             <ac:picMk id="4" creationId="{FE7350AD-56A0-2E40-8E5D-B8E071AEABC2}"/>
           </ac:picMkLst>
         </pc:picChg>
+      </pc:sldChg>
+      <pc:sldChg chg="addSp modSp mod">
+        <pc:chgData name="Nahuel Roel" userId="f57eb92d7f62e27b" providerId="LiveId" clId="{1698397B-2804-4513-BF38-7951CB4798F0}" dt="2026-10-19T17:00:16.823" v="3885" actId="20577"/>
+        <pc:sldMkLst>
+          <pc:docMk/>
+          <pc:sldMk cId="894793366" sldId="283"/>
+        </pc:sldMkLst>
+        <pc:spChg chg="add mod">
+          <ac:chgData name="Nahuel Roel" userId="f57eb92d7f62e27b" providerId="LiveId" clId="{1698397B-2804-4513-BF38-7951CB4798F0}" dt="2026-10-19T17:00:15.322" v="3883" actId="20577"/>
+          <ac:spMkLst>
+            <pc:docMk/>
+            <pc:sldMk cId="894793366" sldId="283"/>
+            <ac:spMk id="4" creationId="{B2048075-558E-8BAE-6651-8A8B857B1C7D}"/>
+          </ac:spMkLst>
+        </pc:spChg>
+        <pc:spChg chg="mod">
+          <ac:chgData name="Nahuel Roel" userId="f57eb92d7f62e27b" providerId="LiveId" clId="{1698397B-2804-4513-BF38-7951CB4798F0}" dt="2026-10-19T17:00:16.823" v="3885" actId="20577"/>
+          <ac:spMkLst>
+            <pc:docMk/>
+            <pc:sldMk cId="894793366" sldId="283"/>
+            <ac:spMk id="32" creationId="{B7E58599-E4CA-0220-24EA-DE96732ADEA4}"/>
+          </ac:spMkLst>
+        </pc:spChg>
       </pc:sldChg>
     </pc:docChg>
   </pc:docChgLst>
@@ -13980,6 +14004,48 @@
           </a:prstGeom>
         </p:spPr>
       </p:pic>
+      <p:sp>
+        <p:nvSpPr>
+          <p:cNvPr id="4" name="Text 7">
+            <a:extLst>
+              <a:ext uri="{FF2B5EF4-FFF2-40B4-BE49-F238E27FC236}">
+                <a16:creationId xmlns:a16="http://schemas.microsoft.com/office/drawing/2014/main" id="{B2048075-558E-8BAE-6651-8A8B857B1C7D}"/>
+              </a:ext>
+            </a:extLst>
+          </p:cNvPr>
+          <p:cNvSpPr txBox="1"/>
+          <p:nvPr/>
+        </p:nvSpPr>
+        <p:spPr>
+          <a:xfrm>
+            <a:off x="1234438" y="3193132"/>
+            <a:ext cx="7100669" cy="274320"/>
+          </a:xfrm>
+          <a:prstGeom prst="rect">
+            <a:avLst/>
+          </a:prstGeom>
+          <a:noFill/>
+          <a:ln/>
+        </p:spPr>
+        <p:txBody>
+          <a:bodyPr wrap="square" lIns="0" tIns="0" rIns="0" bIns="0" rtlCol="0" anchor="ctr"/>
+          <a:lstStyle/>
+          <a:p>
+            <a:r>
+              <a:rPr lang="es-ES" sz="1600" b="1" dirty="0">
+                <a:solidFill>
+                  <a:srgbClr val="5A189A"/>
+                </a:solidFill>
+                <a:latin typeface="Courier New" pitchFamily="34" charset="0"/>
+                <a:cs typeface="Courier New" pitchFamily="34" charset="-120"/>
+                <a:hlinkClick r:id="rId5"/>
+              </a:rPr>
+              <a:t>https://nahuelroel.shinyapps.io/CursoShiny/</a:t>
+            </a:r>
+            <a:endParaRPr lang="es-UY" sz="1600" b="1" noProof="0" dirty="0"/>
+          </a:p>
+        </p:txBody>
+      </p:sp>
     </p:spTree>
     <p:extLst>
       <p:ext uri="{BB962C8B-B14F-4D97-AF65-F5344CB8AC3E}">

--- a/clase1/clase1.pptx
+++ b/clase1/clase1.pptx
@@ -5,7 +5,7 @@
     <p:sldMasterId id="2147483648" r:id="rId1"/>
   </p:sldMasterIdLst>
   <p:notesMasterIdLst>
-    <p:notesMasterId r:id="rId25"/>
+    <p:notesMasterId r:id="rId26"/>
   </p:notesMasterIdLst>
   <p:sldIdLst>
     <p:sldId id="256" r:id="rId2"/>
@@ -16,21 +16,22 @@
     <p:sldId id="267" r:id="rId7"/>
     <p:sldId id="268" r:id="rId8"/>
     <p:sldId id="269" r:id="rId9"/>
-    <p:sldId id="283" r:id="rId10"/>
-    <p:sldId id="272" r:id="rId11"/>
-    <p:sldId id="280" r:id="rId12"/>
-    <p:sldId id="273" r:id="rId13"/>
-    <p:sldId id="274" r:id="rId14"/>
-    <p:sldId id="270" r:id="rId15"/>
-    <p:sldId id="271" r:id="rId16"/>
-    <p:sldId id="275" r:id="rId17"/>
-    <p:sldId id="276" r:id="rId18"/>
-    <p:sldId id="277" r:id="rId19"/>
-    <p:sldId id="278" r:id="rId20"/>
-    <p:sldId id="281" r:id="rId21"/>
-    <p:sldId id="282" r:id="rId22"/>
-    <p:sldId id="279" r:id="rId23"/>
-    <p:sldId id="263" r:id="rId24"/>
+    <p:sldId id="284" r:id="rId10"/>
+    <p:sldId id="285" r:id="rId11"/>
+    <p:sldId id="283" r:id="rId12"/>
+    <p:sldId id="272" r:id="rId13"/>
+    <p:sldId id="280" r:id="rId14"/>
+    <p:sldId id="273" r:id="rId15"/>
+    <p:sldId id="274" r:id="rId16"/>
+    <p:sldId id="270" r:id="rId17"/>
+    <p:sldId id="271" r:id="rId18"/>
+    <p:sldId id="275" r:id="rId19"/>
+    <p:sldId id="276" r:id="rId20"/>
+    <p:sldId id="277" r:id="rId21"/>
+    <p:sldId id="281" r:id="rId22"/>
+    <p:sldId id="282" r:id="rId23"/>
+    <p:sldId id="279" r:id="rId24"/>
+    <p:sldId id="263" r:id="rId25"/>
   </p:sldIdLst>
   <p:sldSz cx="9144000" cy="5143500" type="screen16x9"/>
   <p:notesSz cx="5143500" cy="9144000"/>
@@ -137,8 +138,7 @@
 <file path=ppt/revisionInfo.xml><?xml version="1.0" encoding="utf-8"?>
 <p1510:revInfo xmlns:a="http://schemas.openxmlformats.org/drawingml/2006/main" xmlns:r="http://schemas.openxmlformats.org/officeDocument/2006/relationships" xmlns:p1510="http://schemas.microsoft.com/office/powerpoint/2015/10/main">
   <p1510:revLst>
-    <p1510:client id="{75231100-3F8B-4AA8-A25F-ED091176310E}" v="2" dt="2026-10-18T22:52:42.974"/>
-    <p1510:client id="{B13002E2-C899-493A-AA5D-FA4E7F53845C}" v="3" dt="2026-10-19T16:59:51.453"/>
+    <p1510:client id="{B13002E2-C899-493A-AA5D-FA4E7F53845C}" v="10" dt="2026-10-23T20:19:18.094"/>
   </p1510:revLst>
 </p1510:revInfo>
 </file>
@@ -148,7 +148,7 @@
   <pc:docChgLst>
     <pc:chgData name="Nahuel Roel" userId="f57eb92d7f62e27b" providerId="LiveId" clId="{1698397B-2804-4513-BF38-7951CB4798F0}"/>
     <pc:docChg chg="undo custSel addSld delSld modSld sldOrd">
-      <pc:chgData name="Nahuel Roel" userId="f57eb92d7f62e27b" providerId="LiveId" clId="{1698397B-2804-4513-BF38-7951CB4798F0}" dt="2026-10-19T17:00:16.823" v="3885" actId="20577"/>
+      <pc:chgData name="Nahuel Roel" userId="f57eb92d7f62e27b" providerId="LiveId" clId="{1698397B-2804-4513-BF38-7951CB4798F0}" dt="2026-10-23T20:20:09.169" v="4014" actId="2696"/>
       <pc:docMkLst>
         <pc:docMk/>
       </pc:docMkLst>
@@ -200,7 +200,7 @@
         </pc:spChg>
       </pc:sldChg>
       <pc:sldChg chg="delSp modSp mod">
-        <pc:chgData name="Nahuel Roel" userId="f57eb92d7f62e27b" providerId="LiveId" clId="{1698397B-2804-4513-BF38-7951CB4798F0}" dt="2026-09-26T17:37:39.692" v="251" actId="790"/>
+        <pc:chgData name="Nahuel Roel" userId="f57eb92d7f62e27b" providerId="LiveId" clId="{1698397B-2804-4513-BF38-7951CB4798F0}" dt="2026-10-23T20:11:23.326" v="3890" actId="478"/>
         <pc:sldMkLst>
           <pc:docMk/>
           <pc:sldMk cId="0" sldId="257"/>
@@ -286,7 +286,7 @@
           </ac:spMkLst>
         </pc:spChg>
         <pc:spChg chg="mod">
-          <ac:chgData name="Nahuel Roel" userId="f57eb92d7f62e27b" providerId="LiveId" clId="{1698397B-2804-4513-BF38-7951CB4798F0}" dt="2026-09-26T17:37:39.692" v="251" actId="790"/>
+          <ac:chgData name="Nahuel Roel" userId="f57eb92d7f62e27b" providerId="LiveId" clId="{1698397B-2804-4513-BF38-7951CB4798F0}" dt="2026-10-23T20:11:15.114" v="3886" actId="6549"/>
           <ac:spMkLst>
             <pc:docMk/>
             <pc:sldMk cId="0" sldId="257"/>
@@ -301,9 +301,41 @@
             <ac:spMk id="17" creationId="{00000000-0000-0000-0000-000000000000}"/>
           </ac:spMkLst>
         </pc:spChg>
+        <pc:spChg chg="mod">
+          <ac:chgData name="Nahuel Roel" userId="f57eb92d7f62e27b" providerId="LiveId" clId="{1698397B-2804-4513-BF38-7951CB4798F0}" dt="2026-10-23T20:11:18.498" v="3887" actId="1076"/>
+          <ac:spMkLst>
+            <pc:docMk/>
+            <pc:sldMk cId="0" sldId="257"/>
+            <ac:spMk id="19" creationId="{00000000-0000-0000-0000-000000000000}"/>
+          </ac:spMkLst>
+        </pc:spChg>
+        <pc:spChg chg="del">
+          <ac:chgData name="Nahuel Roel" userId="f57eb92d7f62e27b" providerId="LiveId" clId="{1698397B-2804-4513-BF38-7951CB4798F0}" dt="2026-10-23T20:11:23.326" v="3890" actId="478"/>
+          <ac:spMkLst>
+            <pc:docMk/>
+            <pc:sldMk cId="0" sldId="257"/>
+            <ac:spMk id="20" creationId="{00000000-0000-0000-0000-000000000000}"/>
+          </ac:spMkLst>
+        </pc:spChg>
+        <pc:spChg chg="del">
+          <ac:chgData name="Nahuel Roel" userId="f57eb92d7f62e27b" providerId="LiveId" clId="{1698397B-2804-4513-BF38-7951CB4798F0}" dt="2026-10-23T20:11:22.748" v="3889" actId="478"/>
+          <ac:spMkLst>
+            <pc:docMk/>
+            <pc:sldMk cId="0" sldId="257"/>
+            <ac:spMk id="21" creationId="{00000000-0000-0000-0000-000000000000}"/>
+          </ac:spMkLst>
+        </pc:spChg>
+        <pc:spChg chg="mod">
+          <ac:chgData name="Nahuel Roel" userId="f57eb92d7f62e27b" providerId="LiveId" clId="{1698397B-2804-4513-BF38-7951CB4798F0}" dt="2026-10-23T20:11:20.209" v="3888" actId="1076"/>
+          <ac:spMkLst>
+            <pc:docMk/>
+            <pc:sldMk cId="0" sldId="257"/>
+            <ac:spMk id="22" creationId="{00000000-0000-0000-0000-000000000000}"/>
+          </ac:spMkLst>
+        </pc:spChg>
       </pc:sldChg>
       <pc:sldChg chg="delSp modSp mod">
-        <pc:chgData name="Nahuel Roel" userId="f57eb92d7f62e27b" providerId="LiveId" clId="{1698397B-2804-4513-BF38-7951CB4798F0}" dt="2026-09-26T23:59:49.058" v="3657" actId="20577"/>
+        <pc:chgData name="Nahuel Roel" userId="f57eb92d7f62e27b" providerId="LiveId" clId="{1698397B-2804-4513-BF38-7951CB4798F0}" dt="2026-10-23T20:11:59.136" v="3950" actId="20577"/>
         <pc:sldMkLst>
           <pc:docMk/>
           <pc:sldMk cId="0" sldId="258"/>
@@ -317,7 +349,7 @@
           </ac:spMkLst>
         </pc:spChg>
         <pc:graphicFrameChg chg="mod modGraphic">
-          <ac:chgData name="Nahuel Roel" userId="f57eb92d7f62e27b" providerId="LiveId" clId="{1698397B-2804-4513-BF38-7951CB4798F0}" dt="2026-09-26T23:59:49.058" v="3657" actId="20577"/>
+          <ac:chgData name="Nahuel Roel" userId="f57eb92d7f62e27b" providerId="LiveId" clId="{1698397B-2804-4513-BF38-7951CB4798F0}" dt="2026-10-23T20:11:59.136" v="3950" actId="20577"/>
           <ac:graphicFrameMkLst>
             <pc:docMk/>
             <pc:sldMk cId="0" sldId="258"/>
@@ -659,7 +691,7 @@
         </pc:spChg>
       </pc:sldChg>
       <pc:sldChg chg="addSp delSp modSp add mod ord">
-        <pc:chgData name="Nahuel Roel" userId="f57eb92d7f62e27b" providerId="LiveId" clId="{1698397B-2804-4513-BF38-7951CB4798F0}" dt="2026-09-26T18:08:52.175" v="2857" actId="403"/>
+        <pc:chgData name="Nahuel Roel" userId="f57eb92d7f62e27b" providerId="LiveId" clId="{1698397B-2804-4513-BF38-7951CB4798F0}" dt="2026-10-23T20:14:36.721" v="3958"/>
         <pc:sldMkLst>
           <pc:docMk/>
           <pc:sldMk cId="2606275426" sldId="267"/>
@@ -713,8 +745,8 @@
           </ac:spMkLst>
         </pc:spChg>
       </pc:sldChg>
-      <pc:sldChg chg="modSp add mod">
-        <pc:chgData name="Nahuel Roel" userId="f57eb92d7f62e27b" providerId="LiveId" clId="{1698397B-2804-4513-BF38-7951CB4798F0}" dt="2026-09-26T18:13:13.784" v="2970"/>
+      <pc:sldChg chg="modSp add mod ord">
+        <pc:chgData name="Nahuel Roel" userId="f57eb92d7f62e27b" providerId="LiveId" clId="{1698397B-2804-4513-BF38-7951CB4798F0}" dt="2026-10-23T20:14:37.723" v="3960"/>
         <pc:sldMkLst>
           <pc:docMk/>
           <pc:sldMk cId="3021253442" sldId="268"/>
@@ -768,8 +800,8 @@
           </ac:spMkLst>
         </pc:spChg>
       </pc:sldChg>
-      <pc:sldChg chg="addSp delSp modSp add mod">
-        <pc:chgData name="Nahuel Roel" userId="f57eb92d7f62e27b" providerId="LiveId" clId="{1698397B-2804-4513-BF38-7951CB4798F0}" dt="2026-09-26T18:18:13.720" v="3052" actId="403"/>
+      <pc:sldChg chg="addSp delSp modSp add mod ord">
+        <pc:chgData name="Nahuel Roel" userId="f57eb92d7f62e27b" providerId="LiveId" clId="{1698397B-2804-4513-BF38-7951CB4798F0}" dt="2026-10-23T20:14:34.210" v="3956"/>
         <pc:sldMkLst>
           <pc:docMk/>
           <pc:sldMk cId="2287114499" sldId="269"/>
@@ -861,8 +893,45 @@
           </ac:picMkLst>
         </pc:picChg>
       </pc:sldChg>
-      <pc:sldChg chg="addSp modSp mod">
-        <pc:chgData name="Nahuel Roel" userId="f57eb92d7f62e27b" providerId="LiveId" clId="{1698397B-2804-4513-BF38-7951CB4798F0}" dt="2026-10-19T17:00:16.823" v="3885" actId="20577"/>
+      <pc:sldChg chg="del">
+        <pc:chgData name="Nahuel Roel" userId="f57eb92d7f62e27b" providerId="LiveId" clId="{1698397B-2804-4513-BF38-7951CB4798F0}" dt="2026-10-23T20:20:09.169" v="4014" actId="2696"/>
+        <pc:sldMkLst>
+          <pc:docMk/>
+          <pc:sldMk cId="0" sldId="278"/>
+        </pc:sldMkLst>
+      </pc:sldChg>
+      <pc:sldChg chg="modSp mod">
+        <pc:chgData name="Nahuel Roel" userId="f57eb92d7f62e27b" providerId="LiveId" clId="{1698397B-2804-4513-BF38-7951CB4798F0}" dt="2026-10-23T20:19:50.259" v="4010" actId="20577"/>
+        <pc:sldMkLst>
+          <pc:docMk/>
+          <pc:sldMk cId="0" sldId="281"/>
+        </pc:sldMkLst>
+        <pc:spChg chg="mod">
+          <ac:chgData name="Nahuel Roel" userId="f57eb92d7f62e27b" providerId="LiveId" clId="{1698397B-2804-4513-BF38-7951CB4798F0}" dt="2026-10-23T20:19:50.259" v="4010" actId="20577"/>
+          <ac:spMkLst>
+            <pc:docMk/>
+            <pc:sldMk cId="0" sldId="281"/>
+            <ac:spMk id="2" creationId="{45FBCF84-BF0C-00DD-1115-ECF03D12DDA6}"/>
+          </ac:spMkLst>
+        </pc:spChg>
+      </pc:sldChg>
+      <pc:sldChg chg="modSp mod">
+        <pc:chgData name="Nahuel Roel" userId="f57eb92d7f62e27b" providerId="LiveId" clId="{1698397B-2804-4513-BF38-7951CB4798F0}" dt="2026-10-23T20:19:55.941" v="4013" actId="20577"/>
+        <pc:sldMkLst>
+          <pc:docMk/>
+          <pc:sldMk cId="0" sldId="282"/>
+        </pc:sldMkLst>
+        <pc:spChg chg="mod">
+          <ac:chgData name="Nahuel Roel" userId="f57eb92d7f62e27b" providerId="LiveId" clId="{1698397B-2804-4513-BF38-7951CB4798F0}" dt="2026-10-23T20:19:55.941" v="4013" actId="20577"/>
+          <ac:spMkLst>
+            <pc:docMk/>
+            <pc:sldMk cId="0" sldId="282"/>
+            <ac:spMk id="2" creationId="{45FBCF84-BF0C-00DD-1115-ECF03D12DDA6}"/>
+          </ac:spMkLst>
+        </pc:spChg>
+      </pc:sldChg>
+      <pc:sldChg chg="addSp modSp mod ord">
+        <pc:chgData name="Nahuel Roel" userId="f57eb92d7f62e27b" providerId="LiveId" clId="{1698397B-2804-4513-BF38-7951CB4798F0}" dt="2026-10-23T20:14:28.656" v="3952"/>
         <pc:sldMkLst>
           <pc:docMk/>
           <pc:sldMk cId="894793366" sldId="283"/>
@@ -881,6 +950,100 @@
             <pc:docMk/>
             <pc:sldMk cId="894793366" sldId="283"/>
             <ac:spMk id="32" creationId="{B7E58599-E4CA-0220-24EA-DE96732ADEA4}"/>
+          </ac:spMkLst>
+        </pc:spChg>
+      </pc:sldChg>
+      <pc:sldChg chg="delSp modSp add mod">
+        <pc:chgData name="Nahuel Roel" userId="f57eb92d7f62e27b" providerId="LiveId" clId="{1698397B-2804-4513-BF38-7951CB4798F0}" dt="2026-10-23T20:17:37.104" v="3974" actId="1076"/>
+        <pc:sldMkLst>
+          <pc:docMk/>
+          <pc:sldMk cId="403348991" sldId="284"/>
+        </pc:sldMkLst>
+        <pc:spChg chg="del">
+          <ac:chgData name="Nahuel Roel" userId="f57eb92d7f62e27b" providerId="LiveId" clId="{1698397B-2804-4513-BF38-7951CB4798F0}" dt="2026-10-23T20:17:31.256" v="3972" actId="478"/>
+          <ac:spMkLst>
+            <pc:docMk/>
+            <pc:sldMk cId="403348991" sldId="284"/>
+            <ac:spMk id="4" creationId="{D26EFF03-223A-B1C5-7C1D-38472E867D1A}"/>
+          </ac:spMkLst>
+        </pc:spChg>
+        <pc:spChg chg="mod">
+          <ac:chgData name="Nahuel Roel" userId="f57eb92d7f62e27b" providerId="LiveId" clId="{1698397B-2804-4513-BF38-7951CB4798F0}" dt="2026-10-23T20:15:08.160" v="3964" actId="20577"/>
+          <ac:spMkLst>
+            <pc:docMk/>
+            <pc:sldMk cId="403348991" sldId="284"/>
+            <ac:spMk id="7" creationId="{1408EB34-4B6C-3B6C-9C92-ACE2E5EA0696}"/>
+          </ac:spMkLst>
+        </pc:spChg>
+        <pc:spChg chg="mod">
+          <ac:chgData name="Nahuel Roel" userId="f57eb92d7f62e27b" providerId="LiveId" clId="{1698397B-2804-4513-BF38-7951CB4798F0}" dt="2026-10-23T20:17:28.591" v="3971"/>
+          <ac:spMkLst>
+            <pc:docMk/>
+            <pc:sldMk cId="403348991" sldId="284"/>
+            <ac:spMk id="8" creationId="{DB5AF91D-9364-F81E-737D-8586BD9B8612}"/>
+          </ac:spMkLst>
+        </pc:spChg>
+        <pc:spChg chg="mod">
+          <ac:chgData name="Nahuel Roel" userId="f57eb92d7f62e27b" providerId="LiveId" clId="{1698397B-2804-4513-BF38-7951CB4798F0}" dt="2026-10-23T20:17:33.804" v="3973" actId="1076"/>
+          <ac:spMkLst>
+            <pc:docMk/>
+            <pc:sldMk cId="403348991" sldId="284"/>
+            <ac:spMk id="10" creationId="{1730D29D-1880-2668-BE08-C7164AF0A796}"/>
+          </ac:spMkLst>
+        </pc:spChg>
+        <pc:spChg chg="mod">
+          <ac:chgData name="Nahuel Roel" userId="f57eb92d7f62e27b" providerId="LiveId" clId="{1698397B-2804-4513-BF38-7951CB4798F0}" dt="2026-10-23T20:17:37.104" v="3974" actId="1076"/>
+          <ac:spMkLst>
+            <pc:docMk/>
+            <pc:sldMk cId="403348991" sldId="284"/>
+            <ac:spMk id="32" creationId="{6080B46F-7A07-AD45-1056-1DAB0F38AB9D}"/>
+          </ac:spMkLst>
+        </pc:spChg>
+      </pc:sldChg>
+      <pc:sldChg chg="delSp modSp add mod">
+        <pc:chgData name="Nahuel Roel" userId="f57eb92d7f62e27b" providerId="LiveId" clId="{1698397B-2804-4513-BF38-7951CB4798F0}" dt="2026-10-23T20:19:22.597" v="4007" actId="1076"/>
+        <pc:sldMkLst>
+          <pc:docMk/>
+          <pc:sldMk cId="908977423" sldId="285"/>
+        </pc:sldMkLst>
+        <pc:spChg chg="del">
+          <ac:chgData name="Nahuel Roel" userId="f57eb92d7f62e27b" providerId="LiveId" clId="{1698397B-2804-4513-BF38-7951CB4798F0}" dt="2026-10-23T20:17:56.454" v="4003" actId="478"/>
+          <ac:spMkLst>
+            <pc:docMk/>
+            <pc:sldMk cId="908977423" sldId="285"/>
+            <ac:spMk id="4" creationId="{EF3040AB-4C64-F61E-9F86-7C19C4B471FF}"/>
+          </ac:spMkLst>
+        </pc:spChg>
+        <pc:spChg chg="mod">
+          <ac:chgData name="Nahuel Roel" userId="f57eb92d7f62e27b" providerId="LiveId" clId="{1698397B-2804-4513-BF38-7951CB4798F0}" dt="2026-10-23T20:17:40.169" v="3976" actId="6549"/>
+          <ac:spMkLst>
+            <pc:docMk/>
+            <pc:sldMk cId="908977423" sldId="285"/>
+            <ac:spMk id="7" creationId="{DD149729-DB23-88D0-8AF7-7AE81D41E23C}"/>
+          </ac:spMkLst>
+        </pc:spChg>
+        <pc:spChg chg="mod">
+          <ac:chgData name="Nahuel Roel" userId="f57eb92d7f62e27b" providerId="LiveId" clId="{1698397B-2804-4513-BF38-7951CB4798F0}" dt="2026-10-23T20:17:52.468" v="4002" actId="20577"/>
+          <ac:spMkLst>
+            <pc:docMk/>
+            <pc:sldMk cId="908977423" sldId="285"/>
+            <ac:spMk id="8" creationId="{791A7990-2029-4EF3-F914-E97B14045AD4}"/>
+          </ac:spMkLst>
+        </pc:spChg>
+        <pc:spChg chg="mod">
+          <ac:chgData name="Nahuel Roel" userId="f57eb92d7f62e27b" providerId="LiveId" clId="{1698397B-2804-4513-BF38-7951CB4798F0}" dt="2026-10-23T20:19:18.094" v="4006"/>
+          <ac:spMkLst>
+            <pc:docMk/>
+            <pc:sldMk cId="908977423" sldId="285"/>
+            <ac:spMk id="10" creationId="{E072864D-C1EE-3228-E8C8-328C9F221432}"/>
+          </ac:spMkLst>
+        </pc:spChg>
+        <pc:spChg chg="mod">
+          <ac:chgData name="Nahuel Roel" userId="f57eb92d7f62e27b" providerId="LiveId" clId="{1698397B-2804-4513-BF38-7951CB4798F0}" dt="2026-10-23T20:19:22.597" v="4007" actId="1076"/>
+          <ac:spMkLst>
+            <pc:docMk/>
+            <pc:sldMk cId="908977423" sldId="285"/>
+            <ac:spMk id="32" creationId="{2453C363-0932-8162-25AE-4E43E6AA4D03}"/>
           </ac:spMkLst>
         </pc:spChg>
       </pc:sldChg>
@@ -907,14 +1070,6 @@
             <ac:spMk id="2" creationId="{740D0576-CF0B-D304-5830-00968DA6E68F}"/>
           </ac:spMkLst>
         </pc:spChg>
-        <pc:spChg chg="del">
-          <ac:chgData name="Nahuel Roel" userId="f57eb92d7f62e27b" providerId="LiveId" clId="{FBA21D36-C460-42D2-B883-A1153B3C8AF6}" dt="2026-10-18T22:52:51.704" v="75" actId="478"/>
-          <ac:spMkLst>
-            <pc:docMk/>
-            <pc:sldMk cId="894793366" sldId="283"/>
-            <ac:spMk id="4" creationId="{E7542B36-5BC9-5C98-B4C3-90D3508B0DDA}"/>
-          </ac:spMkLst>
-        </pc:spChg>
         <pc:spChg chg="mod">
           <ac:chgData name="Nahuel Roel" userId="f57eb92d7f62e27b" providerId="LiveId" clId="{FBA21D36-C460-42D2-B883-A1153B3C8AF6}" dt="2026-10-18T22:51:56.017" v="2" actId="6549"/>
           <ac:spMkLst>
@@ -929,14 +1084,6 @@
             <pc:docMk/>
             <pc:sldMk cId="894793366" sldId="283"/>
             <ac:spMk id="8" creationId="{A09DC744-6EDD-3786-3D96-786DF242C174}"/>
-          </ac:spMkLst>
-        </pc:spChg>
-        <pc:spChg chg="del mod">
-          <ac:chgData name="Nahuel Roel" userId="f57eb92d7f62e27b" providerId="LiveId" clId="{FBA21D36-C460-42D2-B883-A1153B3C8AF6}" dt="2026-10-18T22:53:11.280" v="88" actId="478"/>
-          <ac:spMkLst>
-            <pc:docMk/>
-            <pc:sldMk cId="894793366" sldId="283"/>
-            <ac:spMk id="10" creationId="{96CC2AA5-50C4-51F3-4086-C45E3E8B7D5E}"/>
           </ac:spMkLst>
         </pc:spChg>
         <pc:spChg chg="mod">
@@ -1185,6 +1332,236 @@
         <p:cNvPr id="1" name="">
           <a:extLst>
             <a:ext uri="{FF2B5EF4-FFF2-40B4-BE49-F238E27FC236}">
+              <a16:creationId xmlns:a16="http://schemas.microsoft.com/office/drawing/2014/main" id="{635DDA59-B865-255D-20A8-A4C058C5564A}"/>
+            </a:ext>
+          </a:extLst>
+        </p:cNvPr>
+        <p:cNvGrpSpPr/>
+        <p:nvPr/>
+      </p:nvGrpSpPr>
+      <p:grpSpPr>
+        <a:xfrm>
+          <a:off x="0" y="0"/>
+          <a:ext cx="0" cy="0"/>
+          <a:chOff x="0" y="0"/>
+          <a:chExt cx="0" cy="0"/>
+        </a:xfrm>
+      </p:grpSpPr>
+      <p:sp>
+        <p:nvSpPr>
+          <p:cNvPr id="2" name="Slide Image Placeholder 1">
+            <a:extLst>
+              <a:ext uri="{FF2B5EF4-FFF2-40B4-BE49-F238E27FC236}">
+                <a16:creationId xmlns:a16="http://schemas.microsoft.com/office/drawing/2014/main" id="{EA188DFE-0659-0B93-9076-80B6D8CB5CC6}"/>
+              </a:ext>
+            </a:extLst>
+          </p:cNvPr>
+          <p:cNvSpPr>
+            <a:spLocks noGrp="1" noRot="1" noChangeAspect="1"/>
+          </p:cNvSpPr>
+          <p:nvPr>
+            <p:ph type="sldImg"/>
+          </p:nvPr>
+        </p:nvSpPr>
+        <p:spPr/>
+        <p:txBody>
+          <a:bodyPr/>
+          <a:lstStyle/>
+          <a:p>
+            <a:endParaRPr lang="en-US"/>
+          </a:p>
+        </p:txBody>
+      </p:sp>
+      <p:sp>
+        <p:nvSpPr>
+          <p:cNvPr id="3" name="Notes Placeholder 2">
+            <a:extLst>
+              <a:ext uri="{FF2B5EF4-FFF2-40B4-BE49-F238E27FC236}">
+                <a16:creationId xmlns:a16="http://schemas.microsoft.com/office/drawing/2014/main" id="{42A14772-F22B-BA32-339F-7C4B0FCD40A6}"/>
+              </a:ext>
+            </a:extLst>
+          </p:cNvPr>
+          <p:cNvSpPr>
+            <a:spLocks noGrp="1"/>
+          </p:cNvSpPr>
+          <p:nvPr>
+            <p:ph type="body" idx="1"/>
+          </p:nvPr>
+        </p:nvSpPr>
+        <p:spPr/>
+        <p:txBody>
+          <a:bodyPr/>
+          <a:lstStyle/>
+          <a:p>
+            <a:endParaRPr lang="en-US" dirty="0"/>
+          </a:p>
+        </p:txBody>
+      </p:sp>
+      <p:sp>
+        <p:nvSpPr>
+          <p:cNvPr id="4" name="Slide Number Placeholder 3">
+            <a:extLst>
+              <a:ext uri="{FF2B5EF4-FFF2-40B4-BE49-F238E27FC236}">
+                <a16:creationId xmlns:a16="http://schemas.microsoft.com/office/drawing/2014/main" id="{F633BB58-0AD1-8537-555B-9D33124634F5}"/>
+              </a:ext>
+            </a:extLst>
+          </p:cNvPr>
+          <p:cNvSpPr>
+            <a:spLocks noGrp="1"/>
+          </p:cNvSpPr>
+          <p:nvPr>
+            <p:ph type="sldNum" sz="quarter" idx="10"/>
+          </p:nvPr>
+        </p:nvSpPr>
+        <p:spPr/>
+        <p:txBody>
+          <a:bodyPr/>
+          <a:lstStyle/>
+          <a:p>
+            <a:fld id="{F7021451-1387-4CA6-816F-3879F97B5CBC}" type="slidenum">
+              <a:rPr lang="en-US"/>
+              <a:t>10</a:t>
+            </a:fld>
+            <a:endParaRPr lang="en-US"/>
+          </a:p>
+        </p:txBody>
+      </p:sp>
+    </p:spTree>
+    <p:extLst>
+      <p:ext uri="{BB962C8B-B14F-4D97-AF65-F5344CB8AC3E}">
+        <p14:creationId xmlns:p14="http://schemas.microsoft.com/office/powerpoint/2010/main" val="923594960"/>
+      </p:ext>
+    </p:extLst>
+  </p:cSld>
+  <p:clrMapOvr>
+    <a:masterClrMapping/>
+  </p:clrMapOvr>
+</p:notes>
+</file>
+
+<file path=ppt/notesSlides/notesSlide11.xml><?xml version="1.0" encoding="utf-8"?>
+<p:notes xmlns:a="http://schemas.openxmlformats.org/drawingml/2006/main" xmlns:r="http://schemas.openxmlformats.org/officeDocument/2006/relationships" xmlns:p="http://schemas.openxmlformats.org/presentationml/2006/main">
+  <p:cSld>
+    <p:spTree>
+      <p:nvGrpSpPr>
+        <p:cNvPr id="1" name="">
+          <a:extLst>
+            <a:ext uri="{FF2B5EF4-FFF2-40B4-BE49-F238E27FC236}">
+              <a16:creationId xmlns:a16="http://schemas.microsoft.com/office/drawing/2014/main" id="{512A62BE-28DF-4FB9-0494-FD55C24947AA}"/>
+            </a:ext>
+          </a:extLst>
+        </p:cNvPr>
+        <p:cNvGrpSpPr/>
+        <p:nvPr/>
+      </p:nvGrpSpPr>
+      <p:grpSpPr>
+        <a:xfrm>
+          <a:off x="0" y="0"/>
+          <a:ext cx="0" cy="0"/>
+          <a:chOff x="0" y="0"/>
+          <a:chExt cx="0" cy="0"/>
+        </a:xfrm>
+      </p:grpSpPr>
+      <p:sp>
+        <p:nvSpPr>
+          <p:cNvPr id="2" name="Slide Image Placeholder 1">
+            <a:extLst>
+              <a:ext uri="{FF2B5EF4-FFF2-40B4-BE49-F238E27FC236}">
+                <a16:creationId xmlns:a16="http://schemas.microsoft.com/office/drawing/2014/main" id="{59372931-AFCE-1426-00B0-336C2337E022}"/>
+              </a:ext>
+            </a:extLst>
+          </p:cNvPr>
+          <p:cNvSpPr>
+            <a:spLocks noGrp="1" noRot="1" noChangeAspect="1"/>
+          </p:cNvSpPr>
+          <p:nvPr>
+            <p:ph type="sldImg"/>
+          </p:nvPr>
+        </p:nvSpPr>
+        <p:spPr/>
+        <p:txBody>
+          <a:bodyPr/>
+          <a:lstStyle/>
+          <a:p>
+            <a:endParaRPr lang="en-US"/>
+          </a:p>
+        </p:txBody>
+      </p:sp>
+      <p:sp>
+        <p:nvSpPr>
+          <p:cNvPr id="3" name="Notes Placeholder 2">
+            <a:extLst>
+              <a:ext uri="{FF2B5EF4-FFF2-40B4-BE49-F238E27FC236}">
+                <a16:creationId xmlns:a16="http://schemas.microsoft.com/office/drawing/2014/main" id="{7B9934A9-7AB2-60A3-A402-6C8E547B6A4A}"/>
+              </a:ext>
+            </a:extLst>
+          </p:cNvPr>
+          <p:cNvSpPr>
+            <a:spLocks noGrp="1"/>
+          </p:cNvSpPr>
+          <p:nvPr>
+            <p:ph type="body" idx="1"/>
+          </p:nvPr>
+        </p:nvSpPr>
+        <p:spPr/>
+        <p:txBody>
+          <a:bodyPr/>
+          <a:lstStyle/>
+          <a:p>
+            <a:endParaRPr lang="en-US" dirty="0"/>
+          </a:p>
+        </p:txBody>
+      </p:sp>
+      <p:sp>
+        <p:nvSpPr>
+          <p:cNvPr id="4" name="Slide Number Placeholder 3">
+            <a:extLst>
+              <a:ext uri="{FF2B5EF4-FFF2-40B4-BE49-F238E27FC236}">
+                <a16:creationId xmlns:a16="http://schemas.microsoft.com/office/drawing/2014/main" id="{4BC718C3-106C-8882-4235-130E13433727}"/>
+              </a:ext>
+            </a:extLst>
+          </p:cNvPr>
+          <p:cNvSpPr>
+            <a:spLocks noGrp="1"/>
+          </p:cNvSpPr>
+          <p:nvPr>
+            <p:ph type="sldNum" sz="quarter" idx="10"/>
+          </p:nvPr>
+        </p:nvSpPr>
+        <p:spPr/>
+        <p:txBody>
+          <a:bodyPr/>
+          <a:lstStyle/>
+          <a:p>
+            <a:fld id="{F7021451-1387-4CA6-816F-3879F97B5CBC}" type="slidenum">
+              <a:rPr lang="en-US"/>
+              <a:t>11</a:t>
+            </a:fld>
+            <a:endParaRPr lang="en-US"/>
+          </a:p>
+        </p:txBody>
+      </p:sp>
+    </p:spTree>
+    <p:extLst>
+      <p:ext uri="{BB962C8B-B14F-4D97-AF65-F5344CB8AC3E}">
+        <p14:creationId xmlns:p14="http://schemas.microsoft.com/office/powerpoint/2010/main" val="1686940858"/>
+      </p:ext>
+    </p:extLst>
+  </p:cSld>
+  <p:clrMapOvr>
+    <a:masterClrMapping/>
+  </p:clrMapOvr>
+</p:notes>
+</file>
+
+<file path=ppt/notesSlides/notesSlide12.xml><?xml version="1.0" encoding="utf-8"?>
+<p:notes xmlns:a="http://schemas.openxmlformats.org/drawingml/2006/main" xmlns:r="http://schemas.openxmlformats.org/officeDocument/2006/relationships" xmlns:p="http://schemas.openxmlformats.org/presentationml/2006/main">
+  <p:cSld>
+    <p:spTree>
+      <p:nvGrpSpPr>
+        <p:cNvPr id="1" name="">
+          <a:extLst>
+            <a:ext uri="{FF2B5EF4-FFF2-40B4-BE49-F238E27FC236}">
               <a16:creationId xmlns:a16="http://schemas.microsoft.com/office/drawing/2014/main" id="{341B3A09-33FF-90A6-5FC9-41FDAE129024}"/>
             </a:ext>
           </a:extLst>
@@ -1273,7 +1650,7 @@
           <a:p>
             <a:fld id="{F7021451-1387-4CA6-816F-3879F97B5CBC}" type="slidenum">
               <a:rPr lang="en-US"/>
-              <a:t>14</a:t>
+              <a:t>16</a:t>
             </a:fld>
             <a:endParaRPr lang="en-US"/>
           </a:p>
@@ -1292,7 +1669,7 @@
 </p:notes>
 </file>
 
-<file path=ppt/notesSlides/notesSlide11.xml><?xml version="1.0" encoding="utf-8"?>
+<file path=ppt/notesSlides/notesSlide13.xml><?xml version="1.0" encoding="utf-8"?>
 <p:notes xmlns:a="http://schemas.openxmlformats.org/drawingml/2006/main" xmlns:r="http://schemas.openxmlformats.org/officeDocument/2006/relationships" xmlns:p="http://schemas.openxmlformats.org/presentationml/2006/main">
   <p:cSld>
     <p:spTree>
@@ -1388,7 +1765,7 @@
           <a:p>
             <a:fld id="{F7021451-1387-4CA6-816F-3879F97B5CBC}" type="slidenum">
               <a:rPr lang="en-US"/>
-              <a:t>15</a:t>
+              <a:t>17</a:t>
             </a:fld>
             <a:endParaRPr lang="en-US"/>
           </a:p>
@@ -1407,7 +1784,7 @@
 </p:notes>
 </file>
 
-<file path=ppt/notesSlides/notesSlide12.xml><?xml version="1.0" encoding="utf-8"?>
+<file path=ppt/notesSlides/notesSlide14.xml><?xml version="1.0" encoding="utf-8"?>
 <p:notes xmlns:a="http://schemas.openxmlformats.org/drawingml/2006/main" xmlns:r="http://schemas.openxmlformats.org/officeDocument/2006/relationships" xmlns:p="http://schemas.openxmlformats.org/presentationml/2006/main">
   <p:cSld>
     <p:spTree>
@@ -1479,7 +1856,7 @@
           <a:p>
             <a:fld id="{F7021451-1387-4CA6-816F-3879F97B5CBC}" type="slidenum">
               <a:rPr lang="en-US"/>
-              <a:t>23</a:t>
+              <a:t>24</a:t>
             </a:fld>
             <a:endParaRPr lang="en-US"/>
           </a:p>
@@ -2239,7 +2616,7 @@
         <p:cNvPr id="1" name="">
           <a:extLst>
             <a:ext uri="{FF2B5EF4-FFF2-40B4-BE49-F238E27FC236}">
-              <a16:creationId xmlns:a16="http://schemas.microsoft.com/office/drawing/2014/main" id="{512A62BE-28DF-4FB9-0494-FD55C24947AA}"/>
+              <a16:creationId xmlns:a16="http://schemas.microsoft.com/office/drawing/2014/main" id="{98C44815-D8FB-E7D0-5E36-8DFD7C8F9B6A}"/>
             </a:ext>
           </a:extLst>
         </p:cNvPr>
@@ -2259,7 +2636,7 @@
           <p:cNvPr id="2" name="Slide Image Placeholder 1">
             <a:extLst>
               <a:ext uri="{FF2B5EF4-FFF2-40B4-BE49-F238E27FC236}">
-                <a16:creationId xmlns:a16="http://schemas.microsoft.com/office/drawing/2014/main" id="{59372931-AFCE-1426-00B0-336C2337E022}"/>
+                <a16:creationId xmlns:a16="http://schemas.microsoft.com/office/drawing/2014/main" id="{43CE216A-BCC9-EDAD-62C1-1C77E623CE8E}"/>
               </a:ext>
             </a:extLst>
           </p:cNvPr>
@@ -2284,7 +2661,7 @@
           <p:cNvPr id="3" name="Notes Placeholder 2">
             <a:extLst>
               <a:ext uri="{FF2B5EF4-FFF2-40B4-BE49-F238E27FC236}">
-                <a16:creationId xmlns:a16="http://schemas.microsoft.com/office/drawing/2014/main" id="{7B9934A9-7AB2-60A3-A402-6C8E547B6A4A}"/>
+                <a16:creationId xmlns:a16="http://schemas.microsoft.com/office/drawing/2014/main" id="{2023C89E-13F5-8D45-BF9B-BB3846AB8E41}"/>
               </a:ext>
             </a:extLst>
           </p:cNvPr>
@@ -2309,7 +2686,7 @@
           <p:cNvPr id="4" name="Slide Number Placeholder 3">
             <a:extLst>
               <a:ext uri="{FF2B5EF4-FFF2-40B4-BE49-F238E27FC236}">
-                <a16:creationId xmlns:a16="http://schemas.microsoft.com/office/drawing/2014/main" id="{4BC718C3-106C-8882-4235-130E13433727}"/>
+                <a16:creationId xmlns:a16="http://schemas.microsoft.com/office/drawing/2014/main" id="{806E56E7-AB7A-0ADF-099D-0A4ECD4208FF}"/>
               </a:ext>
             </a:extLst>
           </p:cNvPr>
@@ -2336,7 +2713,7 @@
     </p:spTree>
     <p:extLst>
       <p:ext uri="{BB962C8B-B14F-4D97-AF65-F5344CB8AC3E}">
-        <p14:creationId xmlns:p14="http://schemas.microsoft.com/office/powerpoint/2010/main" val="1686940858"/>
+        <p14:creationId xmlns:p14="http://schemas.microsoft.com/office/powerpoint/2010/main" val="383167002"/>
       </p:ext>
     </p:extLst>
   </p:cSld>
@@ -2894,7 +3271,13 @@
     </p:bg>
     <p:spTree>
       <p:nvGrpSpPr>
-        <p:cNvPr id="1" name=""/>
+        <p:cNvPr id="1" name="">
+          <a:extLst>
+            <a:ext uri="{FF2B5EF4-FFF2-40B4-BE49-F238E27FC236}">
+              <a16:creationId xmlns:a16="http://schemas.microsoft.com/office/drawing/2014/main" id="{44744ABA-04B1-3FDE-1A06-6B75E61CA991}"/>
+            </a:ext>
+          </a:extLst>
+        </p:cNvPr>
         <p:cNvGrpSpPr/>
         <p:nvPr/>
       </p:nvGrpSpPr>
@@ -2911,7 +3294,7 @@
           <p:cNvPr id="2" name="Text 0">
             <a:extLst>
               <a:ext uri="{FF2B5EF4-FFF2-40B4-BE49-F238E27FC236}">
-                <a16:creationId xmlns:a16="http://schemas.microsoft.com/office/drawing/2014/main" id="{45FBCF84-BF0C-00DD-1115-ECF03D12DDA6}"/>
+                <a16:creationId xmlns:a16="http://schemas.microsoft.com/office/drawing/2014/main" id="{C9A94B88-2C47-5693-DE0F-D09725257BAC}"/>
               </a:ext>
             </a:extLst>
           </p:cNvPr>
@@ -2937,7 +3320,7 @@
               <a:buNone/>
             </a:pPr>
             <a:r>
-              <a:rPr lang="en-US" sz="3000" b="1" dirty="0">
+              <a:rPr lang="es-UY" sz="3000" b="1" noProof="0" dirty="0">
                 <a:solidFill>
                   <a:srgbClr val="2E0A4E"/>
                 </a:solidFill>
@@ -2945,18 +3328,18 @@
                 <a:ea typeface="Oswald" pitchFamily="34" charset="-122"/>
                 <a:cs typeface="Oswald" pitchFamily="34" charset="-120"/>
               </a:rPr>
-              <a:t>Paso a paso (1)</a:t>
-            </a:r>
-            <a:endParaRPr lang="en-US" sz="3000" dirty="0"/>
-          </a:p>
-        </p:txBody>
-      </p:sp>
-      <p:sp>
-        <p:nvSpPr>
-          <p:cNvPr id="11" name="Shape 9">
+              <a:t>Shinys para inspirarse</a:t>
+            </a:r>
+            <a:endParaRPr lang="es-UY" sz="3000" noProof="0" dirty="0"/>
+          </a:p>
+        </p:txBody>
+      </p:sp>
+      <p:sp>
+        <p:nvSpPr>
+          <p:cNvPr id="5" name="Shape 3">
             <a:extLst>
               <a:ext uri="{FF2B5EF4-FFF2-40B4-BE49-F238E27FC236}">
-                <a16:creationId xmlns:a16="http://schemas.microsoft.com/office/drawing/2014/main" id="{1E4D2BBF-BB0F-7CF4-3842-6325D6A2CD35}"/>
+                <a16:creationId xmlns:a16="http://schemas.microsoft.com/office/drawing/2014/main" id="{C1AA03FA-9AF1-3510-641D-405359447922}"/>
               </a:ext>
             </a:extLst>
           </p:cNvPr>
@@ -2965,13 +3348,51 @@
         </p:nvSpPr>
         <p:spPr>
           <a:xfrm>
-            <a:off x="439616" y="1188720"/>
-            <a:ext cx="2560320" cy="1463040"/>
+            <a:off x="397412" y="1151792"/>
+            <a:ext cx="8138160" cy="3246120"/>
           </a:xfrm>
           <a:prstGeom prst="roundRect">
             <a:avLst>
-              <a:gd name="adj" fmla="val 2143"/>
+              <a:gd name="adj" fmla="val 3529"/>
             </a:avLst>
+          </a:prstGeom>
+          <a:solidFill>
+            <a:srgbClr val="F4ECFB"/>
+          </a:solidFill>
+          <a:ln w="12700">
+            <a:solidFill>
+              <a:srgbClr val="F4ECFB"/>
+            </a:solidFill>
+            <a:prstDash val="solid"/>
+          </a:ln>
+        </p:spPr>
+        <p:txBody>
+          <a:bodyPr/>
+          <a:lstStyle/>
+          <a:p>
+            <a:endParaRPr lang="es-UY" noProof="0" dirty="0"/>
+          </a:p>
+        </p:txBody>
+      </p:sp>
+      <p:sp>
+        <p:nvSpPr>
+          <p:cNvPr id="6" name="Shape 4">
+            <a:extLst>
+              <a:ext uri="{FF2B5EF4-FFF2-40B4-BE49-F238E27FC236}">
+                <a16:creationId xmlns:a16="http://schemas.microsoft.com/office/drawing/2014/main" id="{72080B57-7DB3-9754-41CD-CCA05AAAAB65}"/>
+              </a:ext>
+            </a:extLst>
+          </p:cNvPr>
+          <p:cNvSpPr/>
+          <p:nvPr/>
+        </p:nvSpPr>
+        <p:spPr>
+          <a:xfrm>
+            <a:off x="685800" y="1371600"/>
+            <a:ext cx="411480" cy="411480"/>
+          </a:xfrm>
+          <a:prstGeom prst="ellipse">
+            <a:avLst/>
           </a:prstGeom>
           <a:solidFill>
             <a:srgbClr val="5A189A"/>
@@ -2987,16 +3408,16 @@
           <a:bodyPr/>
           <a:lstStyle/>
           <a:p>
-            <a:endParaRPr lang="en-US"/>
-          </a:p>
-        </p:txBody>
-      </p:sp>
-      <p:sp>
-        <p:nvSpPr>
-          <p:cNvPr id="12" name="Text 10">
+            <a:endParaRPr lang="es-UY" noProof="0" dirty="0"/>
+          </a:p>
+        </p:txBody>
+      </p:sp>
+      <p:sp>
+        <p:nvSpPr>
+          <p:cNvPr id="7" name="Text 5">
             <a:extLst>
               <a:ext uri="{FF2B5EF4-FFF2-40B4-BE49-F238E27FC236}">
-                <a16:creationId xmlns:a16="http://schemas.microsoft.com/office/drawing/2014/main" id="{57EA7703-08D4-E6C4-4FDB-5B08F7881055}"/>
+                <a16:creationId xmlns:a16="http://schemas.microsoft.com/office/drawing/2014/main" id="{DD149729-DB23-88D0-8AF7-7AE81D41E23C}"/>
               </a:ext>
             </a:extLst>
           </p:cNvPr>
@@ -3005,8 +3426,8 @@
         </p:nvSpPr>
         <p:spPr>
           <a:xfrm>
-            <a:off x="668216" y="1256068"/>
-            <a:ext cx="2103120" cy="502920"/>
+            <a:off x="685800" y="1371600"/>
+            <a:ext cx="411480" cy="411480"/>
           </a:xfrm>
           <a:prstGeom prst="rect">
             <a:avLst/>
@@ -3018,11 +3439,11 @@
           <a:bodyPr wrap="square" lIns="0" tIns="0" rIns="0" bIns="0" rtlCol="0" anchor="ctr"/>
           <a:lstStyle/>
           <a:p>
-            <a:pPr marL="0" indent="0">
+            <a:pPr marL="0" indent="0" algn="ctr">
               <a:buNone/>
             </a:pPr>
             <a:r>
-              <a:rPr lang="en-US" sz="1600" b="1" dirty="0">
+              <a:rPr lang="es-UY" sz="1400" b="1" noProof="0" dirty="0">
                 <a:solidFill>
                   <a:srgbClr val="FFFFFF"/>
                 </a:solidFill>
@@ -3030,18 +3451,18 @@
                 <a:ea typeface="Oswald" pitchFamily="34" charset="-122"/>
                 <a:cs typeface="Oswald" pitchFamily="34" charset="-120"/>
               </a:rPr>
-              <a:t>OBJETIVO 3</a:t>
-            </a:r>
-            <a:endParaRPr lang="en-US" sz="1600" dirty="0"/>
-          </a:p>
-        </p:txBody>
-      </p:sp>
-      <p:sp>
-        <p:nvSpPr>
-          <p:cNvPr id="13" name="Text 11">
+              <a:t>5</a:t>
+            </a:r>
+            <a:endParaRPr lang="es-UY" sz="1400" noProof="0" dirty="0"/>
+          </a:p>
+        </p:txBody>
+      </p:sp>
+      <p:sp>
+        <p:nvSpPr>
+          <p:cNvPr id="8" name="Text 6">
             <a:extLst>
               <a:ext uri="{FF2B5EF4-FFF2-40B4-BE49-F238E27FC236}">
-                <a16:creationId xmlns:a16="http://schemas.microsoft.com/office/drawing/2014/main" id="{83082800-1689-F508-4C9C-8E0187A18BDD}"/>
+                <a16:creationId xmlns:a16="http://schemas.microsoft.com/office/drawing/2014/main" id="{791A7990-2029-4EF3-F914-E97B14045AD4}"/>
               </a:ext>
             </a:extLst>
           </p:cNvPr>
@@ -3050,8 +3471,8 @@
         </p:nvSpPr>
         <p:spPr>
           <a:xfrm>
-            <a:off x="668216" y="1734572"/>
-            <a:ext cx="2103120" cy="716926"/>
+            <a:off x="1234439" y="1353312"/>
+            <a:ext cx="5961186" cy="457200"/>
           </a:xfrm>
           <a:prstGeom prst="rect">
             <a:avLst/>
@@ -3060,74 +3481,33 @@
           <a:ln/>
         </p:spPr>
         <p:txBody>
-          <a:bodyPr wrap="square" lIns="0" tIns="0" rIns="0" bIns="0" rtlCol="0" anchor="t"/>
-          <a:lstStyle/>
-          <a:p>
-            <a:r>
-              <a:rPr lang="es-ES" sz="1400" dirty="0">
-                <a:solidFill>
-                  <a:schemeClr val="bg1"/>
-                </a:solidFill>
-                <a:latin typeface="Calibri" pitchFamily="34" charset="0"/>
-                <a:ea typeface="Calibri" pitchFamily="34" charset="-122"/>
-                <a:cs typeface="Calibri" pitchFamily="34" charset="-120"/>
-              </a:rPr>
-              <a:t>Dejar todo instalado</a:t>
-            </a:r>
-            <a:endParaRPr lang="en-US" sz="1300" dirty="0"/>
-          </a:p>
-        </p:txBody>
-      </p:sp>
-      <p:sp>
-        <p:nvSpPr>
-          <p:cNvPr id="15" name="Shape 9">
+          <a:bodyPr wrap="square" lIns="0" tIns="0" rIns="0" bIns="0" rtlCol="0" anchor="ctr"/>
+          <a:lstStyle/>
+          <a:p>
+            <a:pPr marL="0" indent="0">
+              <a:buNone/>
+            </a:pPr>
+            <a:r>
+              <a:rPr lang="es-ES" sz="1500" b="1" noProof="0" dirty="0">
+                <a:solidFill>
+                  <a:srgbClr val="2E0A4E"/>
+                </a:solidFill>
+                <a:latin typeface="Oswald" pitchFamily="34" charset="0"/>
+                <a:ea typeface="Oswald" pitchFamily="34" charset="-122"/>
+                <a:cs typeface="Oswald" pitchFamily="34" charset="-120"/>
+              </a:rPr>
+              <a:t>App de corrección - FCEA</a:t>
+            </a:r>
+            <a:endParaRPr lang="es-UY" sz="1500" noProof="0" dirty="0"/>
+          </a:p>
+        </p:txBody>
+      </p:sp>
+      <p:sp>
+        <p:nvSpPr>
+          <p:cNvPr id="10" name="Text 8">
             <a:extLst>
               <a:ext uri="{FF2B5EF4-FFF2-40B4-BE49-F238E27FC236}">
-                <a16:creationId xmlns:a16="http://schemas.microsoft.com/office/drawing/2014/main" id="{E750D06A-626A-4348-CA99-CE04C627A232}"/>
-              </a:ext>
-            </a:extLst>
-          </p:cNvPr>
-          <p:cNvSpPr/>
-          <p:nvPr/>
-        </p:nvSpPr>
-        <p:spPr>
-          <a:xfrm>
-            <a:off x="439615" y="2719107"/>
-            <a:ext cx="3773659" cy="2281957"/>
-          </a:xfrm>
-          <a:prstGeom prst="roundRect">
-            <a:avLst>
-              <a:gd name="adj" fmla="val 2143"/>
-            </a:avLst>
-          </a:prstGeom>
-          <a:solidFill>
-            <a:schemeClr val="accent1">
-              <a:lumMod val="75000"/>
-            </a:schemeClr>
-          </a:solidFill>
-          <a:ln w="12700">
-            <a:solidFill>
-              <a:schemeClr val="accent1">
-                <a:lumMod val="75000"/>
-              </a:schemeClr>
-            </a:solidFill>
-            <a:prstDash val="solid"/>
-          </a:ln>
-        </p:spPr>
-        <p:txBody>
-          <a:bodyPr/>
-          <a:lstStyle/>
-          <a:p>
-            <a:endParaRPr lang="en-US"/>
-          </a:p>
-        </p:txBody>
-      </p:sp>
-      <p:sp>
-        <p:nvSpPr>
-          <p:cNvPr id="17" name="Text 11">
-            <a:extLst>
-              <a:ext uri="{FF2B5EF4-FFF2-40B4-BE49-F238E27FC236}">
-                <a16:creationId xmlns:a16="http://schemas.microsoft.com/office/drawing/2014/main" id="{F3440954-5CFF-06C7-8641-E2E38BA6F847}"/>
+                <a16:creationId xmlns:a16="http://schemas.microsoft.com/office/drawing/2014/main" id="{E072864D-C1EE-3228-E8C8-328C9F221432}"/>
               </a:ext>
             </a:extLst>
           </p:cNvPr>
@@ -3136,8 +3516,8 @@
         </p:nvSpPr>
         <p:spPr>
           <a:xfrm>
-            <a:off x="668216" y="2899117"/>
-            <a:ext cx="3369212" cy="716926"/>
+            <a:off x="1234440" y="2057400"/>
+            <a:ext cx="6988126" cy="640080"/>
           </a:xfrm>
           <a:prstGeom prst="rect">
             <a:avLst/>
@@ -3150,118 +3530,269 @@
           <a:lstStyle/>
           <a:p>
             <a:r>
-              <a:rPr lang="es-ES" sz="1400" b="1" dirty="0">
-                <a:solidFill>
-                  <a:schemeClr val="bg1"/>
-                </a:solidFill>
-                <a:latin typeface="Calibri" pitchFamily="34" charset="0"/>
-                <a:ea typeface="Calibri" pitchFamily="34" charset="-122"/>
-                <a:cs typeface="Calibri" pitchFamily="34" charset="-120"/>
-              </a:rPr>
-              <a:t>Primero R, después RStudio. Los paquetes se instalan una sola vez con </a:t>
-            </a:r>
-            <a:r>
-              <a:rPr lang="es-ES" sz="1400" b="1" i="1" dirty="0">
-                <a:solidFill>
-                  <a:schemeClr val="bg1"/>
-                </a:solidFill>
-                <a:latin typeface="Calibri" pitchFamily="34" charset="0"/>
-                <a:ea typeface="Calibri" pitchFamily="34" charset="-122"/>
-                <a:cs typeface="Calibri" pitchFamily="34" charset="-120"/>
-              </a:rPr>
-              <a:t>install.packages()</a:t>
-            </a:r>
-            <a:r>
-              <a:rPr lang="es-ES" sz="1400" b="1" dirty="0">
-                <a:solidFill>
-                  <a:schemeClr val="bg1"/>
-                </a:solidFill>
-                <a:latin typeface="Calibri" pitchFamily="34" charset="0"/>
-                <a:ea typeface="Calibri" pitchFamily="34" charset="-122"/>
-                <a:cs typeface="Calibri" pitchFamily="34" charset="-120"/>
-              </a:rPr>
+              <a:rPr lang="en-US" sz="1100" dirty="0"/>
+              <a:t>Es una app web para </a:t>
+            </a:r>
+            <a:r>
+              <a:rPr lang="en-US" sz="1100" dirty="0" err="1"/>
+              <a:t>corregir</a:t>
+            </a:r>
+            <a:r>
+              <a:rPr lang="en-US" sz="1100" dirty="0"/>
+              <a:t> </a:t>
+            </a:r>
+            <a:r>
+              <a:rPr lang="en-US" sz="1100" dirty="0" err="1"/>
+              <a:t>automáticamente</a:t>
+            </a:r>
+            <a:r>
+              <a:rPr lang="en-US" sz="1100" dirty="0"/>
+              <a:t> </a:t>
+            </a:r>
+            <a:r>
+              <a:rPr lang="en-US" sz="1100" dirty="0" err="1"/>
+              <a:t>pruebas</a:t>
+            </a:r>
+            <a:r>
+              <a:rPr lang="en-US" sz="1100" dirty="0"/>
+              <a:t> de múltiple </a:t>
+            </a:r>
+            <a:r>
+              <a:rPr lang="en-US" sz="1100" dirty="0" err="1"/>
+              <a:t>opción</a:t>
+            </a:r>
+            <a:r>
+              <a:rPr lang="en-US" sz="1100" dirty="0"/>
+              <a:t> de la FCEA (</a:t>
+            </a:r>
+            <a:r>
+              <a:rPr lang="en-US" sz="1100" dirty="0" err="1"/>
+              <a:t>parciales</a:t>
+            </a:r>
+            <a:r>
+              <a:rPr lang="en-US" sz="1100" dirty="0"/>
+              <a:t>, </a:t>
+            </a:r>
+            <a:r>
+              <a:rPr lang="en-US" sz="1100" dirty="0" err="1"/>
+              <a:t>exámenes</a:t>
+            </a:r>
+            <a:r>
+              <a:rPr lang="en-US" sz="1100" dirty="0"/>
+              <a:t> y curso). Toma un Word por </a:t>
+            </a:r>
+            <a:r>
+              <a:rPr lang="en-US" sz="1100" dirty="0" err="1"/>
+              <a:t>versión</a:t>
+            </a:r>
+            <a:r>
+              <a:rPr lang="en-US" sz="1100" dirty="0"/>
+              <a:t> con la clave </a:t>
+            </a:r>
+            <a:r>
+              <a:rPr lang="en-US" sz="1100" dirty="0" err="1"/>
+              <a:t>marcada</a:t>
+            </a:r>
+            <a:r>
+              <a:rPr lang="en-US" sz="1100" dirty="0"/>
+              <a:t>, el Excel de </a:t>
+            </a:r>
+            <a:r>
+              <a:rPr lang="en-US" sz="1100" dirty="0" err="1"/>
+              <a:t>respuestas</a:t>
+            </a:r>
+            <a:r>
+              <a:rPr lang="en-US" sz="1100" dirty="0"/>
+              <a:t> y la </a:t>
+            </a:r>
+            <a:r>
+              <a:rPr lang="en-US" sz="1100" dirty="0" err="1"/>
+              <a:t>lista</a:t>
+            </a:r>
+            <a:r>
+              <a:rPr lang="en-US" sz="1100" dirty="0"/>
+              <a:t> de </a:t>
+            </a:r>
+            <a:r>
+              <a:rPr lang="en-US" sz="1100" dirty="0" err="1"/>
+              <a:t>inscriptos</a:t>
+            </a:r>
+            <a:r>
+              <a:rPr lang="en-US" sz="1100" dirty="0"/>
+              <a:t>. Con </a:t>
+            </a:r>
+            <a:r>
+              <a:rPr lang="en-US" sz="1100" dirty="0" err="1"/>
+              <a:t>eso</a:t>
+            </a:r>
+            <a:r>
+              <a:rPr lang="en-US" sz="1100" dirty="0"/>
+              <a:t> </a:t>
+            </a:r>
+            <a:r>
+              <a:rPr lang="en-US" sz="1100" dirty="0" err="1"/>
+              <a:t>corrige</a:t>
+            </a:r>
+            <a:r>
+              <a:rPr lang="en-US" sz="1100" dirty="0"/>
+              <a:t> a </a:t>
+            </a:r>
+            <a:r>
+              <a:rPr lang="en-US" sz="1100" dirty="0" err="1"/>
+              <a:t>cada</a:t>
+            </a:r>
+            <a:r>
+              <a:rPr lang="en-US" sz="1100" dirty="0"/>
+              <a:t> </a:t>
+            </a:r>
+            <a:r>
+              <a:rPr lang="en-US" sz="1100" dirty="0" err="1"/>
+              <a:t>estudiante</a:t>
+            </a:r>
+            <a:r>
+              <a:rPr lang="en-US" sz="1100" dirty="0"/>
+              <a:t> </a:t>
+            </a:r>
+            <a:r>
+              <a:rPr lang="en-US" sz="1100" dirty="0" err="1"/>
+              <a:t>según</a:t>
+            </a:r>
+            <a:r>
+              <a:rPr lang="en-US" sz="1100" dirty="0"/>
+              <a:t> su </a:t>
+            </a:r>
+            <a:r>
+              <a:rPr lang="en-US" sz="1100" dirty="0" err="1"/>
+              <a:t>versión</a:t>
+            </a:r>
+            <a:r>
+              <a:rPr lang="en-US" sz="1100" dirty="0"/>
+              <a:t>, </a:t>
+            </a:r>
+            <a:r>
+              <a:rPr lang="en-US" sz="1100" dirty="0" err="1"/>
+              <a:t>permite</a:t>
+            </a:r>
+            <a:r>
+              <a:rPr lang="en-US" sz="1100" dirty="0"/>
+              <a:t> </a:t>
+            </a:r>
+            <a:r>
+              <a:rPr lang="en-US" sz="1100" dirty="0" err="1"/>
+              <a:t>verificar</a:t>
+            </a:r>
+            <a:r>
+              <a:rPr lang="en-US" sz="1100" dirty="0"/>
+              <a:t> las claves </a:t>
+            </a:r>
+            <a:r>
+              <a:rPr lang="en-US" sz="1100" dirty="0" err="1"/>
+              <a:t>detectadas</a:t>
+            </a:r>
+            <a:r>
+              <a:rPr lang="en-US" sz="1100" dirty="0"/>
+              <a:t>, </a:t>
+            </a:r>
+            <a:r>
+              <a:rPr lang="en-US" sz="1100" dirty="0" err="1"/>
+              <a:t>señala</a:t>
+            </a:r>
+            <a:r>
+              <a:rPr lang="en-US" sz="1100" dirty="0"/>
+              <a:t> a </a:t>
+            </a:r>
+            <a:r>
+              <a:rPr lang="en-US" sz="1100" dirty="0" err="1"/>
+              <a:t>quienes</a:t>
+            </a:r>
+            <a:r>
+              <a:rPr lang="en-US" sz="1100" dirty="0"/>
+              <a:t> no </a:t>
+            </a:r>
+            <a:r>
+              <a:rPr lang="en-US" sz="1100" dirty="0" err="1"/>
+              <a:t>figuran</a:t>
+            </a:r>
+            <a:r>
+              <a:rPr lang="en-US" sz="1100" dirty="0"/>
+              <a:t> </a:t>
+            </a:r>
+            <a:r>
+              <a:rPr lang="en-US" sz="1100" dirty="0" err="1"/>
+              <a:t>inscriptos</a:t>
+            </a:r>
+            <a:r>
+              <a:rPr lang="en-US" sz="1100" dirty="0"/>
+              <a:t> y genera </a:t>
+            </a:r>
+            <a:r>
+              <a:rPr lang="en-US" sz="1100" dirty="0" err="1"/>
+              <a:t>estadísticas</a:t>
+            </a:r>
+            <a:r>
+              <a:rPr lang="en-US" sz="1100" dirty="0"/>
+              <a:t> de la </a:t>
+            </a:r>
+            <a:r>
+              <a:rPr lang="en-US" sz="1100" dirty="0" err="1"/>
+              <a:t>prueba</a:t>
+            </a:r>
+            <a:r>
+              <a:rPr lang="en-US" sz="1100" dirty="0"/>
               <a:t>.</a:t>
             </a:r>
-          </a:p>
-          <a:p>
-            <a:endParaRPr lang="es-ES" sz="1400" b="1" dirty="0">
-              <a:solidFill>
-                <a:schemeClr val="bg1"/>
-              </a:solidFill>
-              <a:latin typeface="Calibri" pitchFamily="34" charset="0"/>
-              <a:ea typeface="Calibri" pitchFamily="34" charset="-122"/>
-              <a:cs typeface="Calibri" pitchFamily="34" charset="-120"/>
-            </a:endParaRPr>
-          </a:p>
-          <a:p>
-            <a:r>
-              <a:rPr lang="es-ES" sz="1400" b="1" dirty="0">
-                <a:solidFill>
-                  <a:schemeClr val="bg1"/>
-                </a:solidFill>
-                <a:latin typeface="Calibri" pitchFamily="34" charset="0"/>
-                <a:ea typeface="Calibri" pitchFamily="34" charset="-122"/>
-                <a:cs typeface="Calibri" pitchFamily="34" charset="-120"/>
-              </a:rPr>
-              <a:t>Abrir el curso siempre desde el archivo </a:t>
-            </a:r>
-            <a:r>
-              <a:rPr lang="es-ES" sz="1400" b="1" i="1" dirty="0">
-                <a:solidFill>
-                  <a:schemeClr val="bg1"/>
-                </a:solidFill>
-                <a:latin typeface="Calibri" pitchFamily="34" charset="0"/>
-                <a:ea typeface="Calibri" pitchFamily="34" charset="-122"/>
-                <a:cs typeface="Calibri" pitchFamily="34" charset="-120"/>
-              </a:rPr>
-              <a:t>.Rproj</a:t>
-            </a:r>
-            <a:r>
-              <a:rPr lang="es-ES" sz="1400" b="1" dirty="0">
-                <a:solidFill>
-                  <a:schemeClr val="bg1"/>
-                </a:solidFill>
-                <a:latin typeface="Calibri" pitchFamily="34" charset="0"/>
-                <a:ea typeface="Calibri" pitchFamily="34" charset="-122"/>
-                <a:cs typeface="Calibri" pitchFamily="34" charset="-120"/>
-              </a:rPr>
-              <a:t>. Así R sabe dónde están los datos.</a:t>
-            </a:r>
-          </a:p>
-        </p:txBody>
-      </p:sp>
-      <p:pic>
-        <p:nvPicPr>
-          <p:cNvPr id="22" name="Picture 21" descr="p1.png"/>
-          <p:cNvPicPr>
-            <a:picLocks noChangeAspect="1"/>
-          </p:cNvPicPr>
-          <p:nvPr/>
-        </p:nvPicPr>
-        <p:blipFill>
-          <a:blip r:embed="rId2"/>
-          <a:stretch>
-            <a:fillRect/>
-          </a:stretch>
-        </p:blipFill>
-        <p:spPr>
-          <a:xfrm>
-            <a:off x="4434840" y="1668901"/>
-            <a:ext cx="4480560" cy="2102876"/>
+            <a:endParaRPr lang="es-UY" sz="1100" noProof="0" dirty="0"/>
+          </a:p>
+        </p:txBody>
+      </p:sp>
+      <p:sp>
+        <p:nvSpPr>
+          <p:cNvPr id="32" name="Text 7">
+            <a:extLst>
+              <a:ext uri="{FF2B5EF4-FFF2-40B4-BE49-F238E27FC236}">
+                <a16:creationId xmlns:a16="http://schemas.microsoft.com/office/drawing/2014/main" id="{2453C363-0932-8162-25AE-4E43E6AA4D03}"/>
+              </a:ext>
+            </a:extLst>
+          </p:cNvPr>
+          <p:cNvSpPr txBox="1"/>
+          <p:nvPr/>
+        </p:nvSpPr>
+        <p:spPr>
+          <a:xfrm>
+            <a:off x="1234439" y="3041085"/>
+            <a:ext cx="6988126" cy="274320"/>
           </a:xfrm>
           <a:prstGeom prst="rect">
             <a:avLst/>
           </a:prstGeom>
-          <a:ln w="76200">
-            <a:solidFill>
-              <a:schemeClr val="accent1">
-                <a:lumMod val="75000"/>
-              </a:schemeClr>
-            </a:solidFill>
-          </a:ln>
-        </p:spPr>
-      </p:pic>
+          <a:noFill/>
+          <a:ln/>
+        </p:spPr>
+        <p:txBody>
+          <a:bodyPr wrap="square" lIns="0" tIns="0" rIns="0" bIns="0" rtlCol="0" anchor="ctr"/>
+          <a:lstStyle/>
+          <a:p>
+            <a:r>
+              <a:rPr lang="es-ES" sz="1600" dirty="0">
+                <a:solidFill>
+                  <a:srgbClr val="5A189A"/>
+                </a:solidFill>
+                <a:latin typeface="Courier New" pitchFamily="34" charset="0"/>
+                <a:cs typeface="Courier New" pitchFamily="34" charset="-120"/>
+                <a:hlinkClick r:id="rId3"/>
+              </a:rPr>
+              <a:t>https://fabricio-carneiro-correccion-fcea.share.connect.posit.cloud/</a:t>
+            </a:r>
+            <a:endParaRPr lang="es-UY" sz="1600" noProof="0" dirty="0"/>
+          </a:p>
+        </p:txBody>
+      </p:sp>
     </p:spTree>
+    <p:extLst>
+      <p:ext uri="{BB962C8B-B14F-4D97-AF65-F5344CB8AC3E}">
+        <p14:creationId xmlns:p14="http://schemas.microsoft.com/office/powerpoint/2010/main" val="908977423"/>
+      </p:ext>
+    </p:extLst>
   </p:cSld>
   <p:clrMapOvr>
     <a:masterClrMapping/>
@@ -3282,7 +3813,13 @@
     </p:bg>
     <p:spTree>
       <p:nvGrpSpPr>
-        <p:cNvPr id="1" name=""/>
+        <p:cNvPr id="1" name="">
+          <a:extLst>
+            <a:ext uri="{FF2B5EF4-FFF2-40B4-BE49-F238E27FC236}">
+              <a16:creationId xmlns:a16="http://schemas.microsoft.com/office/drawing/2014/main" id="{2AB0F8C3-CC5F-F2B4-F57A-B0D453B2CE5E}"/>
+            </a:ext>
+          </a:extLst>
+        </p:cNvPr>
         <p:cNvGrpSpPr/>
         <p:nvPr/>
       </p:nvGrpSpPr>
@@ -3299,7 +3836,7 @@
           <p:cNvPr id="2" name="Text 0">
             <a:extLst>
               <a:ext uri="{FF2B5EF4-FFF2-40B4-BE49-F238E27FC236}">
-                <a16:creationId xmlns:a16="http://schemas.microsoft.com/office/drawing/2014/main" id="{45FBCF84-BF0C-00DD-1115-ECF03D12DDA6}"/>
+                <a16:creationId xmlns:a16="http://schemas.microsoft.com/office/drawing/2014/main" id="{740D0576-CF0B-D304-5830-00968DA6E68F}"/>
               </a:ext>
             </a:extLst>
           </p:cNvPr>
@@ -3321,11 +3858,8 @@
           <a:bodyPr wrap="square" lIns="0" tIns="0" rIns="0" bIns="0" rtlCol="0" anchor="ctr"/>
           <a:lstStyle/>
           <a:p>
-            <a:pPr marL="0" indent="0">
-              <a:buNone/>
-            </a:pPr>
-            <a:r>
-              <a:rPr lang="en-US" sz="3000" b="1" dirty="0">
+            <a:r>
+              <a:rPr lang="es-UY" sz="3000" b="1" dirty="0">
                 <a:solidFill>
                   <a:srgbClr val="2E0A4E"/>
                 </a:solidFill>
@@ -3333,18 +3867,18 @@
                 <a:ea typeface="Oswald" pitchFamily="34" charset="-122"/>
                 <a:cs typeface="Oswald" pitchFamily="34" charset="-120"/>
               </a:rPr>
-              <a:t>Paso a paso (2)</a:t>
-            </a:r>
-            <a:endParaRPr lang="en-US" sz="3000" dirty="0"/>
-          </a:p>
-        </p:txBody>
-      </p:sp>
-      <p:sp>
-        <p:nvSpPr>
-          <p:cNvPr id="11" name="Shape 9">
+              <a:t>Shinys para inspirarse</a:t>
+            </a:r>
+            <a:endParaRPr lang="es-UY" sz="3000" dirty="0"/>
+          </a:p>
+        </p:txBody>
+      </p:sp>
+      <p:sp>
+        <p:nvSpPr>
+          <p:cNvPr id="5" name="Shape 3">
             <a:extLst>
               <a:ext uri="{FF2B5EF4-FFF2-40B4-BE49-F238E27FC236}">
-                <a16:creationId xmlns:a16="http://schemas.microsoft.com/office/drawing/2014/main" id="{1E4D2BBF-BB0F-7CF4-3842-6325D6A2CD35}"/>
+                <a16:creationId xmlns:a16="http://schemas.microsoft.com/office/drawing/2014/main" id="{9F2F5559-8540-9473-88CB-C9B54DF8D2B7}"/>
               </a:ext>
             </a:extLst>
           </p:cNvPr>
@@ -3353,13 +3887,51 @@
         </p:nvSpPr>
         <p:spPr>
           <a:xfrm>
-            <a:off x="439616" y="1188720"/>
-            <a:ext cx="2560320" cy="1463040"/>
+            <a:off x="397412" y="1151792"/>
+            <a:ext cx="8138160" cy="3246120"/>
           </a:xfrm>
           <a:prstGeom prst="roundRect">
             <a:avLst>
-              <a:gd name="adj" fmla="val 2143"/>
+              <a:gd name="adj" fmla="val 3529"/>
             </a:avLst>
+          </a:prstGeom>
+          <a:solidFill>
+            <a:srgbClr val="F4ECFB"/>
+          </a:solidFill>
+          <a:ln w="12700">
+            <a:solidFill>
+              <a:srgbClr val="F4ECFB"/>
+            </a:solidFill>
+            <a:prstDash val="solid"/>
+          </a:ln>
+        </p:spPr>
+        <p:txBody>
+          <a:bodyPr/>
+          <a:lstStyle/>
+          <a:p>
+            <a:endParaRPr lang="es-UY" noProof="0" dirty="0"/>
+          </a:p>
+        </p:txBody>
+      </p:sp>
+      <p:sp>
+        <p:nvSpPr>
+          <p:cNvPr id="6" name="Shape 4">
+            <a:extLst>
+              <a:ext uri="{FF2B5EF4-FFF2-40B4-BE49-F238E27FC236}">
+                <a16:creationId xmlns:a16="http://schemas.microsoft.com/office/drawing/2014/main" id="{1DAD86C9-020D-A459-A4F2-83278273AED4}"/>
+              </a:ext>
+            </a:extLst>
+          </p:cNvPr>
+          <p:cNvSpPr/>
+          <p:nvPr/>
+        </p:nvSpPr>
+        <p:spPr>
+          <a:xfrm>
+            <a:off x="685800" y="1371600"/>
+            <a:ext cx="411480" cy="411480"/>
+          </a:xfrm>
+          <a:prstGeom prst="ellipse">
+            <a:avLst/>
           </a:prstGeom>
           <a:solidFill>
             <a:srgbClr val="5A189A"/>
@@ -3375,16 +3947,16 @@
           <a:bodyPr/>
           <a:lstStyle/>
           <a:p>
-            <a:endParaRPr lang="en-US"/>
-          </a:p>
-        </p:txBody>
-      </p:sp>
-      <p:sp>
-        <p:nvSpPr>
-          <p:cNvPr id="12" name="Text 10">
+            <a:endParaRPr lang="es-UY" noProof="0" dirty="0"/>
+          </a:p>
+        </p:txBody>
+      </p:sp>
+      <p:sp>
+        <p:nvSpPr>
+          <p:cNvPr id="7" name="Text 5">
             <a:extLst>
               <a:ext uri="{FF2B5EF4-FFF2-40B4-BE49-F238E27FC236}">
-                <a16:creationId xmlns:a16="http://schemas.microsoft.com/office/drawing/2014/main" id="{57EA7703-08D4-E6C4-4FDB-5B08F7881055}"/>
+                <a16:creationId xmlns:a16="http://schemas.microsoft.com/office/drawing/2014/main" id="{BE7799E2-891C-E080-AF62-6365687F53CD}"/>
               </a:ext>
             </a:extLst>
           </p:cNvPr>
@@ -3393,8 +3965,8 @@
         </p:nvSpPr>
         <p:spPr>
           <a:xfrm>
-            <a:off x="668216" y="1256068"/>
-            <a:ext cx="2103120" cy="502920"/>
+            <a:off x="685800" y="1371600"/>
+            <a:ext cx="411480" cy="411480"/>
           </a:xfrm>
           <a:prstGeom prst="rect">
             <a:avLst/>
@@ -3406,11 +3978,11 @@
           <a:bodyPr wrap="square" lIns="0" tIns="0" rIns="0" bIns="0" rtlCol="0" anchor="ctr"/>
           <a:lstStyle/>
           <a:p>
-            <a:pPr marL="0" indent="0">
+            <a:pPr marL="0" indent="0" algn="ctr">
               <a:buNone/>
             </a:pPr>
             <a:r>
-              <a:rPr lang="en-US" sz="1600" b="1" dirty="0">
+              <a:rPr lang="es-UY" sz="1400" b="1" noProof="0" dirty="0">
                 <a:solidFill>
                   <a:srgbClr val="FFFFFF"/>
                 </a:solidFill>
@@ -3418,18 +3990,18 @@
                 <a:ea typeface="Oswald" pitchFamily="34" charset="-122"/>
                 <a:cs typeface="Oswald" pitchFamily="34" charset="-120"/>
               </a:rPr>
-              <a:t>OBJETIVO 3</a:t>
-            </a:r>
-            <a:endParaRPr lang="en-US" sz="1600" dirty="0"/>
-          </a:p>
-        </p:txBody>
-      </p:sp>
-      <p:sp>
-        <p:nvSpPr>
-          <p:cNvPr id="13" name="Text 11">
+              <a:t>4</a:t>
+            </a:r>
+            <a:endParaRPr lang="es-UY" sz="1400" noProof="0" dirty="0"/>
+          </a:p>
+        </p:txBody>
+      </p:sp>
+      <p:sp>
+        <p:nvSpPr>
+          <p:cNvPr id="8" name="Text 6">
             <a:extLst>
               <a:ext uri="{FF2B5EF4-FFF2-40B4-BE49-F238E27FC236}">
-                <a16:creationId xmlns:a16="http://schemas.microsoft.com/office/drawing/2014/main" id="{83082800-1689-F508-4C9C-8E0187A18BDD}"/>
+                <a16:creationId xmlns:a16="http://schemas.microsoft.com/office/drawing/2014/main" id="{A09DC744-6EDD-3786-3D96-786DF242C174}"/>
               </a:ext>
             </a:extLst>
           </p:cNvPr>
@@ -3438,8 +4010,8 @@
         </p:nvSpPr>
         <p:spPr>
           <a:xfrm>
-            <a:off x="668216" y="1734572"/>
-            <a:ext cx="2103120" cy="716926"/>
+            <a:off x="1234439" y="1353312"/>
+            <a:ext cx="5961186" cy="457200"/>
           </a:xfrm>
           <a:prstGeom prst="rect">
             <a:avLst/>
@@ -3448,74 +4020,33 @@
           <a:ln/>
         </p:spPr>
         <p:txBody>
-          <a:bodyPr wrap="square" lIns="0" tIns="0" rIns="0" bIns="0" rtlCol="0" anchor="t"/>
-          <a:lstStyle/>
-          <a:p>
-            <a:r>
-              <a:rPr lang="es-ES" sz="1400" dirty="0">
-                <a:solidFill>
-                  <a:schemeClr val="bg1"/>
-                </a:solidFill>
-                <a:latin typeface="Calibri" pitchFamily="34" charset="0"/>
-                <a:ea typeface="Calibri" pitchFamily="34" charset="-122"/>
-                <a:cs typeface="Calibri" pitchFamily="34" charset="-120"/>
-              </a:rPr>
-              <a:t>Trabajar en un proyecto</a:t>
-            </a:r>
-            <a:endParaRPr lang="en-US" sz="1300" dirty="0"/>
-          </a:p>
-        </p:txBody>
-      </p:sp>
-      <p:sp>
-        <p:nvSpPr>
-          <p:cNvPr id="15" name="Shape 9">
+          <a:bodyPr wrap="square" lIns="0" tIns="0" rIns="0" bIns="0" rtlCol="0" anchor="ctr"/>
+          <a:lstStyle/>
+          <a:p>
+            <a:pPr marL="0" indent="0">
+              <a:buNone/>
+            </a:pPr>
+            <a:r>
+              <a:rPr lang="es-ES" sz="2000" b="1" noProof="0" dirty="0">
+                <a:solidFill>
+                  <a:srgbClr val="2E0A4E"/>
+                </a:solidFill>
+                <a:latin typeface="Oswald" pitchFamily="34" charset="0"/>
+                <a:ea typeface="Oswald" pitchFamily="34" charset="-122"/>
+                <a:cs typeface="Oswald" pitchFamily="34" charset="-120"/>
+              </a:rPr>
+              <a:t>La shiny de nuestro curso:</a:t>
+            </a:r>
+            <a:endParaRPr lang="es-UY" sz="2000" noProof="0" dirty="0"/>
+          </a:p>
+        </p:txBody>
+      </p:sp>
+      <p:sp>
+        <p:nvSpPr>
+          <p:cNvPr id="32" name="Text 7">
             <a:extLst>
               <a:ext uri="{FF2B5EF4-FFF2-40B4-BE49-F238E27FC236}">
-                <a16:creationId xmlns:a16="http://schemas.microsoft.com/office/drawing/2014/main" id="{E750D06A-626A-4348-CA99-CE04C627A232}"/>
-              </a:ext>
-            </a:extLst>
-          </p:cNvPr>
-          <p:cNvSpPr/>
-          <p:nvPr/>
-        </p:nvSpPr>
-        <p:spPr>
-          <a:xfrm>
-            <a:off x="439615" y="2719107"/>
-            <a:ext cx="3773659" cy="2281957"/>
-          </a:xfrm>
-          <a:prstGeom prst="roundRect">
-            <a:avLst>
-              <a:gd name="adj" fmla="val 2143"/>
-            </a:avLst>
-          </a:prstGeom>
-          <a:solidFill>
-            <a:schemeClr val="accent1">
-              <a:lumMod val="75000"/>
-            </a:schemeClr>
-          </a:solidFill>
-          <a:ln w="12700">
-            <a:solidFill>
-              <a:schemeClr val="accent1">
-                <a:lumMod val="75000"/>
-              </a:schemeClr>
-            </a:solidFill>
-            <a:prstDash val="solid"/>
-          </a:ln>
-        </p:spPr>
-        <p:txBody>
-          <a:bodyPr/>
-          <a:lstStyle/>
-          <a:p>
-            <a:endParaRPr lang="en-US"/>
-          </a:p>
-        </p:txBody>
-      </p:sp>
-      <p:sp>
-        <p:nvSpPr>
-          <p:cNvPr id="17" name="Text 11">
-            <a:extLst>
-              <a:ext uri="{FF2B5EF4-FFF2-40B4-BE49-F238E27FC236}">
-                <a16:creationId xmlns:a16="http://schemas.microsoft.com/office/drawing/2014/main" id="{F3440954-5CFF-06C7-8641-E2E38BA6F847}"/>
+                <a16:creationId xmlns:a16="http://schemas.microsoft.com/office/drawing/2014/main" id="{B7E58599-E4CA-0220-24EA-DE96732ADEA4}"/>
               </a:ext>
             </a:extLst>
           </p:cNvPr>
@@ -3524,8 +4055,8 @@
         </p:nvSpPr>
         <p:spPr>
           <a:xfrm>
-            <a:off x="668216" y="2899117"/>
-            <a:ext cx="3369212" cy="716926"/>
+            <a:off x="1234439" y="2829892"/>
+            <a:ext cx="7100669" cy="274320"/>
           </a:xfrm>
           <a:prstGeom prst="rect">
             <a:avLst/>
@@ -3534,159 +4065,102 @@
           <a:ln/>
         </p:spPr>
         <p:txBody>
-          <a:bodyPr wrap="square" lIns="0" tIns="0" rIns="0" bIns="0" rtlCol="0" anchor="t"/>
-          <a:lstStyle/>
-          <a:p>
-            <a:r>
-              <a:rPr lang="es-ES" sz="1400" b="1" dirty="0">
-                <a:solidFill>
-                  <a:schemeClr val="bg1"/>
-                </a:solidFill>
-                <a:latin typeface="Calibri" pitchFamily="34" charset="0"/>
-                <a:ea typeface="Calibri" pitchFamily="34" charset="-122"/>
-                <a:cs typeface="Calibri" pitchFamily="34" charset="-120"/>
-              </a:rPr>
-              <a:t>Un proyecto es una carpeta con un archivo </a:t>
-            </a:r>
-            <a:r>
-              <a:rPr lang="es-ES" sz="1400" b="1" i="1" dirty="0">
-                <a:solidFill>
-                  <a:schemeClr val="bg1"/>
-                </a:solidFill>
-                <a:latin typeface="Calibri" pitchFamily="34" charset="0"/>
-                <a:ea typeface="Calibri" pitchFamily="34" charset="-122"/>
-                <a:cs typeface="Calibri" pitchFamily="34" charset="-120"/>
-              </a:rPr>
-              <a:t>.Rproj</a:t>
-            </a:r>
-            <a:r>
-              <a:rPr lang="es-ES" sz="1400" b="1" dirty="0">
-                <a:solidFill>
-                  <a:schemeClr val="bg1"/>
-                </a:solidFill>
-                <a:latin typeface="Calibri" pitchFamily="34" charset="0"/>
-                <a:ea typeface="Calibri" pitchFamily="34" charset="-122"/>
-                <a:cs typeface="Calibri" pitchFamily="34" charset="-120"/>
-              </a:rPr>
-              <a:t>. Mientras está abierto, R trabaja desde esa carpeta y rutas como </a:t>
-            </a:r>
-            <a:r>
-              <a:rPr lang="es-ES" sz="1400" b="1" i="1" dirty="0">
-                <a:solidFill>
-                  <a:schemeClr val="bg1"/>
-                </a:solidFill>
-                <a:latin typeface="Calibri" pitchFamily="34" charset="0"/>
-                <a:ea typeface="Calibri" pitchFamily="34" charset="-122"/>
-                <a:cs typeface="Calibri" pitchFamily="34" charset="-120"/>
-              </a:rPr>
-              <a:t>datos/</a:t>
-            </a:r>
-            <a:r>
-              <a:rPr lang="es-ES" sz="1400" b="1" dirty="0">
-                <a:solidFill>
-                  <a:schemeClr val="bg1"/>
-                </a:solidFill>
-                <a:latin typeface="Calibri" pitchFamily="34" charset="0"/>
-                <a:ea typeface="Calibri" pitchFamily="34" charset="-122"/>
-                <a:cs typeface="Calibri" pitchFamily="34" charset="-120"/>
-              </a:rPr>
-              <a:t> funcionan solas.</a:t>
-            </a:r>
-          </a:p>
-          <a:p>
-            <a:endParaRPr lang="es-ES" sz="1400" b="1" dirty="0">
-              <a:solidFill>
-                <a:schemeClr val="bg1"/>
-              </a:solidFill>
-              <a:latin typeface="Calibri" pitchFamily="34" charset="0"/>
-              <a:ea typeface="Calibri" pitchFamily="34" charset="-122"/>
-              <a:cs typeface="Calibri" pitchFamily="34" charset="-120"/>
-            </a:endParaRPr>
-          </a:p>
-          <a:p>
-            <a:r>
-              <a:rPr lang="es-ES" sz="1400" b="1" dirty="0">
-                <a:solidFill>
-                  <a:schemeClr val="bg1"/>
-                </a:solidFill>
-                <a:latin typeface="Calibri" pitchFamily="34" charset="0"/>
-                <a:ea typeface="Calibri" pitchFamily="34" charset="-122"/>
-                <a:cs typeface="Calibri" pitchFamily="34" charset="-120"/>
-              </a:rPr>
-              <a:t>Su nombre aparece arriba a la derecha de RStudio. Si no está, </a:t>
-            </a:r>
-            <a:r>
-              <a:rPr lang="es-ES" sz="1400" b="1" i="1" dirty="0">
-                <a:solidFill>
-                  <a:schemeClr val="bg1"/>
-                </a:solidFill>
-                <a:latin typeface="Calibri" pitchFamily="34" charset="0"/>
-                <a:ea typeface="Calibri" pitchFamily="34" charset="-122"/>
-                <a:cs typeface="Calibri" pitchFamily="34" charset="-120"/>
-              </a:rPr>
-              <a:t>File, Open Project</a:t>
-            </a:r>
-            <a:r>
-              <a:rPr lang="es-ES" sz="1400" b="1" dirty="0">
-                <a:solidFill>
-                  <a:schemeClr val="bg1"/>
-                </a:solidFill>
-                <a:latin typeface="Calibri" pitchFamily="34" charset="0"/>
-                <a:ea typeface="Calibri" pitchFamily="34" charset="-122"/>
-                <a:cs typeface="Calibri" pitchFamily="34" charset="-120"/>
-              </a:rPr>
-              <a:t> y elegir </a:t>
-            </a:r>
-            <a:r>
-              <a:rPr lang="es-ES" sz="1400" b="1" i="1" dirty="0">
-                <a:solidFill>
-                  <a:schemeClr val="bg1"/>
-                </a:solidFill>
-                <a:latin typeface="Calibri" pitchFamily="34" charset="0"/>
-                <a:ea typeface="Calibri" pitchFamily="34" charset="-122"/>
-                <a:cs typeface="Calibri" pitchFamily="34" charset="-120"/>
-              </a:rPr>
-              <a:t>visualizacion_datos_shiny.Rproj</a:t>
-            </a:r>
-            <a:r>
-              <a:rPr lang="es-ES" sz="1400" b="1" dirty="0">
-                <a:solidFill>
-                  <a:schemeClr val="bg1"/>
-                </a:solidFill>
-                <a:latin typeface="Calibri" pitchFamily="34" charset="0"/>
-                <a:ea typeface="Calibri" pitchFamily="34" charset="-122"/>
-                <a:cs typeface="Calibri" pitchFamily="34" charset="-120"/>
-              </a:rPr>
-              <a:t>.</a:t>
-            </a:r>
+          <a:bodyPr wrap="square" lIns="0" tIns="0" rIns="0" bIns="0" rtlCol="0" anchor="ctr"/>
+          <a:lstStyle/>
+          <a:p>
+            <a:r>
+              <a:rPr lang="es-ES" sz="1600" b="1" dirty="0">
+                <a:solidFill>
+                  <a:srgbClr val="5A189A"/>
+                </a:solidFill>
+                <a:latin typeface="Courier New" pitchFamily="34" charset="0"/>
+                <a:cs typeface="Courier New" pitchFamily="34" charset="-120"/>
+                <a:hlinkClick r:id="rId3"/>
+              </a:rPr>
+              <a:t>https://nahuelroel-cursoshiny.share.connect.posit.cloud/</a:t>
+            </a:r>
+            <a:endParaRPr lang="es-UY" sz="1600" b="1" noProof="0" dirty="0"/>
           </a:p>
         </p:txBody>
       </p:sp>
       <p:pic>
         <p:nvPicPr>
-          <p:cNvPr id="18" name="Picture 17" descr="cap1.png"/>
+          <p:cNvPr id="9" name="Picture 8">
+            <a:extLst>
+              <a:ext uri="{FF2B5EF4-FFF2-40B4-BE49-F238E27FC236}">
+                <a16:creationId xmlns:a16="http://schemas.microsoft.com/office/drawing/2014/main" id="{E38B869B-A34C-7776-39FB-D2F254A1FBFD}"/>
+              </a:ext>
+            </a:extLst>
+          </p:cNvPr>
           <p:cNvPicPr>
             <a:picLocks noChangeAspect="1"/>
           </p:cNvPicPr>
           <p:nvPr/>
         </p:nvPicPr>
         <p:blipFill>
-          <a:blip r:embed="rId2"/>
+          <a:blip r:embed="rId4"/>
           <a:stretch>
             <a:fillRect/>
           </a:stretch>
         </p:blipFill>
         <p:spPr>
           <a:xfrm>
-            <a:off x="4870731" y="1188720"/>
-            <a:ext cx="3608778" cy="3100000"/>
+            <a:off x="1234439" y="1812471"/>
+            <a:ext cx="2860767" cy="551407"/>
           </a:xfrm>
           <a:prstGeom prst="rect">
             <a:avLst/>
           </a:prstGeom>
         </p:spPr>
       </p:pic>
+      <p:sp>
+        <p:nvSpPr>
+          <p:cNvPr id="4" name="Text 7">
+            <a:extLst>
+              <a:ext uri="{FF2B5EF4-FFF2-40B4-BE49-F238E27FC236}">
+                <a16:creationId xmlns:a16="http://schemas.microsoft.com/office/drawing/2014/main" id="{B2048075-558E-8BAE-6651-8A8B857B1C7D}"/>
+              </a:ext>
+            </a:extLst>
+          </p:cNvPr>
+          <p:cNvSpPr txBox="1"/>
+          <p:nvPr/>
+        </p:nvSpPr>
+        <p:spPr>
+          <a:xfrm>
+            <a:off x="1234438" y="3193132"/>
+            <a:ext cx="7100669" cy="274320"/>
+          </a:xfrm>
+          <a:prstGeom prst="rect">
+            <a:avLst/>
+          </a:prstGeom>
+          <a:noFill/>
+          <a:ln/>
+        </p:spPr>
+        <p:txBody>
+          <a:bodyPr wrap="square" lIns="0" tIns="0" rIns="0" bIns="0" rtlCol="0" anchor="ctr"/>
+          <a:lstStyle/>
+          <a:p>
+            <a:r>
+              <a:rPr lang="es-ES" sz="1600" b="1" dirty="0">
+                <a:solidFill>
+                  <a:srgbClr val="5A189A"/>
+                </a:solidFill>
+                <a:latin typeface="Courier New" pitchFamily="34" charset="0"/>
+                <a:cs typeface="Courier New" pitchFamily="34" charset="-120"/>
+                <a:hlinkClick r:id="rId5"/>
+              </a:rPr>
+              <a:t>https://nahuelroel.shinyapps.io/CursoShiny/</a:t>
+            </a:r>
+            <a:endParaRPr lang="es-UY" sz="1600" b="1" noProof="0" dirty="0"/>
+          </a:p>
+        </p:txBody>
+      </p:sp>
     </p:spTree>
+    <p:extLst>
+      <p:ext uri="{BB962C8B-B14F-4D97-AF65-F5344CB8AC3E}">
+        <p14:creationId xmlns:p14="http://schemas.microsoft.com/office/powerpoint/2010/main" val="894793366"/>
+      </p:ext>
+    </p:extLst>
   </p:cSld>
   <p:clrMapOvr>
     <a:masterClrMapping/>
@@ -3721,7 +4195,13 @@
       </p:grpSpPr>
       <p:sp>
         <p:nvSpPr>
-          <p:cNvPr id="2" name="Text 0"/>
+          <p:cNvPr id="2" name="Text 0">
+            <a:extLst>
+              <a:ext uri="{FF2B5EF4-FFF2-40B4-BE49-F238E27FC236}">
+                <a16:creationId xmlns:a16="http://schemas.microsoft.com/office/drawing/2014/main" id="{45FBCF84-BF0C-00DD-1115-ECF03D12DDA6}"/>
+              </a:ext>
+            </a:extLst>
+          </p:cNvPr>
           <p:cNvSpPr txBox="1"/>
           <p:nvPr/>
         </p:nvSpPr>
@@ -3740,6 +4220,9 @@
           <a:bodyPr wrap="square" lIns="0" tIns="0" rIns="0" bIns="0" rtlCol="0" anchor="ctr"/>
           <a:lstStyle/>
           <a:p>
+            <a:pPr marL="0" indent="0">
+              <a:buNone/>
+            </a:pPr>
             <a:r>
               <a:rPr lang="en-US" sz="3000" b="1" dirty="0">
                 <a:solidFill>
@@ -3749,7 +4232,7 @@
                 <a:ea typeface="Oswald" pitchFamily="34" charset="-122"/>
                 <a:cs typeface="Oswald" pitchFamily="34" charset="-120"/>
               </a:rPr>
-              <a:t>Paso a paso (3)</a:t>
+              <a:t>Paso a paso (1)</a:t>
             </a:r>
             <a:endParaRPr lang="en-US" sz="3000" dirty="0"/>
           </a:p>
@@ -3757,7 +4240,13 @@
       </p:sp>
       <p:sp>
         <p:nvSpPr>
-          <p:cNvPr id="11" name="Shape 9"/>
+          <p:cNvPr id="11" name="Shape 9">
+            <a:extLst>
+              <a:ext uri="{FF2B5EF4-FFF2-40B4-BE49-F238E27FC236}">
+                <a16:creationId xmlns:a16="http://schemas.microsoft.com/office/drawing/2014/main" id="{1E4D2BBF-BB0F-7CF4-3842-6325D6A2CD35}"/>
+              </a:ext>
+            </a:extLst>
+          </p:cNvPr>
           <p:cNvSpPr/>
           <p:nvPr/>
         </p:nvSpPr>
@@ -3791,7 +4280,13 @@
       </p:sp>
       <p:sp>
         <p:nvSpPr>
-          <p:cNvPr id="12" name="Text 10"/>
+          <p:cNvPr id="12" name="Text 10">
+            <a:extLst>
+              <a:ext uri="{FF2B5EF4-FFF2-40B4-BE49-F238E27FC236}">
+                <a16:creationId xmlns:a16="http://schemas.microsoft.com/office/drawing/2014/main" id="{57EA7703-08D4-E6C4-4FDB-5B08F7881055}"/>
+              </a:ext>
+            </a:extLst>
+          </p:cNvPr>
           <p:cNvSpPr txBox="1"/>
           <p:nvPr/>
         </p:nvSpPr>
@@ -3822,7 +4317,7 @@
                 <a:ea typeface="Oswald" pitchFamily="34" charset="-122"/>
                 <a:cs typeface="Oswald" pitchFamily="34" charset="-120"/>
               </a:rPr>
-              <a:t>OBJETIVO 4</a:t>
+              <a:t>OBJETIVO 3</a:t>
             </a:r>
             <a:endParaRPr lang="en-US" sz="1600" dirty="0"/>
           </a:p>
@@ -3830,7 +4325,13 @@
       </p:sp>
       <p:sp>
         <p:nvSpPr>
-          <p:cNvPr id="13" name="Text 11"/>
+          <p:cNvPr id="13" name="Text 11">
+            <a:extLst>
+              <a:ext uri="{FF2B5EF4-FFF2-40B4-BE49-F238E27FC236}">
+                <a16:creationId xmlns:a16="http://schemas.microsoft.com/office/drawing/2014/main" id="{83082800-1689-F508-4C9C-8E0187A18BDD}"/>
+              </a:ext>
+            </a:extLst>
+          </p:cNvPr>
           <p:cNvSpPr txBox="1"/>
           <p:nvPr/>
         </p:nvSpPr>
@@ -3858,7 +4359,7 @@
                 <a:ea typeface="Calibri" pitchFamily="34" charset="-122"/>
                 <a:cs typeface="Calibri" pitchFamily="34" charset="-120"/>
               </a:rPr>
-              <a:t>Los cuatro paneles de RStudio</a:t>
+              <a:t>Dejar todo instalado</a:t>
             </a:r>
             <a:endParaRPr lang="en-US" sz="1300" dirty="0"/>
           </a:p>
@@ -3869,7 +4370,7 @@
           <p:cNvPr id="15" name="Shape 9">
             <a:extLst>
               <a:ext uri="{FF2B5EF4-FFF2-40B4-BE49-F238E27FC236}">
-                <a16:creationId xmlns:a16="http://schemas.microsoft.com/office/drawing/2014/main" id="{1ED05ED1-CE50-06A2-178F-B4365671B18F}"/>
+                <a16:creationId xmlns:a16="http://schemas.microsoft.com/office/drawing/2014/main" id="{E750D06A-626A-4348-CA99-CE04C627A232}"/>
               </a:ext>
             </a:extLst>
           </p:cNvPr>
@@ -3913,7 +4414,7 @@
           <p:cNvPr id="17" name="Text 11">
             <a:extLst>
               <a:ext uri="{FF2B5EF4-FFF2-40B4-BE49-F238E27FC236}">
-                <a16:creationId xmlns:a16="http://schemas.microsoft.com/office/drawing/2014/main" id="{1291722D-C809-2238-9939-339690D52438}"/>
+                <a16:creationId xmlns:a16="http://schemas.microsoft.com/office/drawing/2014/main" id="{F3440954-5CFF-06C7-8641-E2E38BA6F847}"/>
               </a:ext>
             </a:extLst>
           </p:cNvPr>
@@ -3936,7 +4437,7 @@
           <a:lstStyle/>
           <a:p>
             <a:r>
-              <a:rPr lang="es-ES" sz="1400" b="1" dirty="0" err="1">
+              <a:rPr lang="es-ES" sz="1400" b="1" dirty="0">
                 <a:solidFill>
                   <a:schemeClr val="bg1"/>
                 </a:solidFill>
@@ -3944,10 +4445,10 @@
                 <a:ea typeface="Calibri" pitchFamily="34" charset="-122"/>
                 <a:cs typeface="Calibri" pitchFamily="34" charset="-120"/>
               </a:rPr>
-              <a:t>En el script se escribe y se guarda. </a:t>
-            </a:r>
-            <a:r>
-              <a:rPr lang="es-ES" sz="1400" b="1" i="1" dirty="0" err="1">
+              <a:t>Primero R, después RStudio. Los paquetes se instalan una sola vez con </a:t>
+            </a:r>
+            <a:r>
+              <a:rPr lang="es-ES" sz="1400" b="1" i="1" dirty="0">
                 <a:solidFill>
                   <a:schemeClr val="bg1"/>
                 </a:solidFill>
@@ -3955,10 +4456,10 @@
                 <a:ea typeface="Calibri" pitchFamily="34" charset="-122"/>
                 <a:cs typeface="Calibri" pitchFamily="34" charset="-120"/>
               </a:rPr>
-              <a:t>Ctrl + Enter</a:t>
-            </a:r>
-            <a:r>
-              <a:rPr lang="es-ES" sz="1400" b="1" dirty="0" err="1">
+              <a:t>install.packages()</a:t>
+            </a:r>
+            <a:r>
+              <a:rPr lang="es-ES" sz="1400" b="1" dirty="0">
                 <a:solidFill>
                   <a:schemeClr val="bg1"/>
                 </a:solidFill>
@@ -3966,11 +4467,11 @@
                 <a:ea typeface="Calibri" pitchFamily="34" charset="-122"/>
                 <a:cs typeface="Calibri" pitchFamily="34" charset="-120"/>
               </a:rPr>
-              <a:t> manda la línea a la consola, donde aparece el resultado.</a:t>
-            </a:r>
-          </a:p>
-          <a:p>
-            <a:endParaRPr lang="es-ES" sz="1400" b="1" dirty="0" err="1">
+              <a:t>.</a:t>
+            </a:r>
+          </a:p>
+          <a:p>
+            <a:endParaRPr lang="es-ES" sz="1400" b="1" dirty="0">
               <a:solidFill>
                 <a:schemeClr val="bg1"/>
               </a:solidFill>
@@ -3981,7 +4482,7 @@
           </a:p>
           <a:p>
             <a:r>
-              <a:rPr lang="es-ES" sz="1400" b="1" dirty="0" err="1">
+              <a:rPr lang="es-ES" sz="1400" b="1" dirty="0">
                 <a:solidFill>
                   <a:schemeClr val="bg1"/>
                 </a:solidFill>
@@ -3989,14 +4490,36 @@
                 <a:ea typeface="Calibri" pitchFamily="34" charset="-122"/>
                 <a:cs typeface="Calibri" pitchFamily="34" charset="-120"/>
               </a:rPr>
-              <a:t>Los errores también salen en la consola. Leerlos con calma es la mitad del trabajo.</a:t>
+              <a:t>Abrir el curso siempre desde el archivo </a:t>
+            </a:r>
+            <a:r>
+              <a:rPr lang="es-ES" sz="1400" b="1" i="1" dirty="0">
+                <a:solidFill>
+                  <a:schemeClr val="bg1"/>
+                </a:solidFill>
+                <a:latin typeface="Calibri" pitchFamily="34" charset="0"/>
+                <a:ea typeface="Calibri" pitchFamily="34" charset="-122"/>
+                <a:cs typeface="Calibri" pitchFamily="34" charset="-120"/>
+              </a:rPr>
+              <a:t>.Rproj</a:t>
+            </a:r>
+            <a:r>
+              <a:rPr lang="es-ES" sz="1400" b="1" dirty="0">
+                <a:solidFill>
+                  <a:schemeClr val="bg1"/>
+                </a:solidFill>
+                <a:latin typeface="Calibri" pitchFamily="34" charset="0"/>
+                <a:ea typeface="Calibri" pitchFamily="34" charset="-122"/>
+                <a:cs typeface="Calibri" pitchFamily="34" charset="-120"/>
+              </a:rPr>
+              <a:t>. Así R sabe dónde están los datos.</a:t>
             </a:r>
           </a:p>
         </p:txBody>
       </p:sp>
       <p:pic>
         <p:nvPicPr>
-          <p:cNvPr id="24" name="Picture 23" descr="p2.png"/>
+          <p:cNvPr id="22" name="Picture 21" descr="p1.png"/>
           <p:cNvPicPr>
             <a:picLocks noChangeAspect="1"/>
           </p:cNvPicPr>
@@ -4010,8 +4533,8 @@
         </p:blipFill>
         <p:spPr>
           <a:xfrm>
-            <a:off x="4434840" y="1320165"/>
-            <a:ext cx="4480560" cy="2800350"/>
+            <a:off x="4434840" y="1668901"/>
+            <a:ext cx="4480560" cy="2102876"/>
           </a:xfrm>
           <a:prstGeom prst="rect">
             <a:avLst/>
@@ -4063,7 +4586,7 @@
           <p:cNvPr id="2" name="Text 0">
             <a:extLst>
               <a:ext uri="{FF2B5EF4-FFF2-40B4-BE49-F238E27FC236}">
-                <a16:creationId xmlns:a16="http://schemas.microsoft.com/office/drawing/2014/main" id="{1B8BE186-2227-0AEE-46BF-1738518AF7E2}"/>
+                <a16:creationId xmlns:a16="http://schemas.microsoft.com/office/drawing/2014/main" id="{45FBCF84-BF0C-00DD-1115-ECF03D12DDA6}"/>
               </a:ext>
             </a:extLst>
           </p:cNvPr>
@@ -4085,6 +4608,9 @@
           <a:bodyPr wrap="square" lIns="0" tIns="0" rIns="0" bIns="0" rtlCol="0" anchor="ctr"/>
           <a:lstStyle/>
           <a:p>
+            <a:pPr marL="0" indent="0">
+              <a:buNone/>
+            </a:pPr>
             <a:r>
               <a:rPr lang="en-US" sz="3000" b="1" dirty="0">
                 <a:solidFill>
@@ -4094,7 +4620,7 @@
                 <a:ea typeface="Oswald" pitchFamily="34" charset="-122"/>
                 <a:cs typeface="Oswald" pitchFamily="34" charset="-120"/>
               </a:rPr>
-              <a:t>Paso a paso (4)</a:t>
+              <a:t>Paso a paso (2)</a:t>
             </a:r>
             <a:endParaRPr lang="en-US" sz="3000" dirty="0"/>
           </a:p>
@@ -4105,7 +4631,7 @@
           <p:cNvPr id="11" name="Shape 9">
             <a:extLst>
               <a:ext uri="{FF2B5EF4-FFF2-40B4-BE49-F238E27FC236}">
-                <a16:creationId xmlns:a16="http://schemas.microsoft.com/office/drawing/2014/main" id="{2D484EA3-17D5-DFDE-7FFB-391D9E546766}"/>
+                <a16:creationId xmlns:a16="http://schemas.microsoft.com/office/drawing/2014/main" id="{1E4D2BBF-BB0F-7CF4-3842-6325D6A2CD35}"/>
               </a:ext>
             </a:extLst>
           </p:cNvPr>
@@ -4145,7 +4671,7 @@
           <p:cNvPr id="12" name="Text 10">
             <a:extLst>
               <a:ext uri="{FF2B5EF4-FFF2-40B4-BE49-F238E27FC236}">
-                <a16:creationId xmlns:a16="http://schemas.microsoft.com/office/drawing/2014/main" id="{FF346D48-99B4-78ED-CF54-DB6A3D402E26}"/>
+                <a16:creationId xmlns:a16="http://schemas.microsoft.com/office/drawing/2014/main" id="{57EA7703-08D4-E6C4-4FDB-5B08F7881055}"/>
               </a:ext>
             </a:extLst>
           </p:cNvPr>
@@ -4179,7 +4705,7 @@
                 <a:ea typeface="Oswald" pitchFamily="34" charset="-122"/>
                 <a:cs typeface="Oswald" pitchFamily="34" charset="-120"/>
               </a:rPr>
-              <a:t>OBJETIVO 4</a:t>
+              <a:t>OBJETIVO 3</a:t>
             </a:r>
             <a:endParaRPr lang="en-US" sz="1600" dirty="0"/>
           </a:p>
@@ -4190,7 +4716,7 @@
           <p:cNvPr id="13" name="Text 11">
             <a:extLst>
               <a:ext uri="{FF2B5EF4-FFF2-40B4-BE49-F238E27FC236}">
-                <a16:creationId xmlns:a16="http://schemas.microsoft.com/office/drawing/2014/main" id="{961D826F-99A4-C802-E6F8-FA059D329199}"/>
+                <a16:creationId xmlns:a16="http://schemas.microsoft.com/office/drawing/2014/main" id="{83082800-1689-F508-4C9C-8E0187A18BDD}"/>
               </a:ext>
             </a:extLst>
           </p:cNvPr>
@@ -4221,8 +4747,9 @@
                 <a:ea typeface="Calibri" pitchFamily="34" charset="-122"/>
                 <a:cs typeface="Calibri" pitchFamily="34" charset="-120"/>
               </a:rPr>
-              <a:t>Lo básico de R</a:t>
-            </a:r>
+              <a:t>Trabajar en un proyecto</a:t>
+            </a:r>
+            <a:endParaRPr lang="en-US" sz="1300" dirty="0"/>
           </a:p>
         </p:txBody>
       </p:sp>
@@ -4231,7 +4758,7 @@
           <p:cNvPr id="15" name="Shape 9">
             <a:extLst>
               <a:ext uri="{FF2B5EF4-FFF2-40B4-BE49-F238E27FC236}">
-                <a16:creationId xmlns:a16="http://schemas.microsoft.com/office/drawing/2014/main" id="{F33AC7BE-75B4-F8D4-43E0-87B7AD3B3F34}"/>
+                <a16:creationId xmlns:a16="http://schemas.microsoft.com/office/drawing/2014/main" id="{E750D06A-626A-4348-CA99-CE04C627A232}"/>
               </a:ext>
             </a:extLst>
           </p:cNvPr>
@@ -4275,7 +4802,7 @@
           <p:cNvPr id="17" name="Text 11">
             <a:extLst>
               <a:ext uri="{FF2B5EF4-FFF2-40B4-BE49-F238E27FC236}">
-                <a16:creationId xmlns:a16="http://schemas.microsoft.com/office/drawing/2014/main" id="{BFEECB63-4CC8-9CA3-665B-7BF2CFCADD52}"/>
+                <a16:creationId xmlns:a16="http://schemas.microsoft.com/office/drawing/2014/main" id="{F3440954-5CFF-06C7-8641-E2E38BA6F847}"/>
               </a:ext>
             </a:extLst>
           </p:cNvPr>
@@ -4298,7 +4825,7 @@
           <a:lstStyle/>
           <a:p>
             <a:r>
-              <a:rPr lang="es-ES" sz="1400" b="1" i="1" dirty="0">
+              <a:rPr lang="es-ES" sz="1400" b="1" dirty="0">
                 <a:solidFill>
                   <a:schemeClr val="bg1"/>
                 </a:solidFill>
@@ -4306,10 +4833,10 @@
                 <a:ea typeface="Calibri" pitchFamily="34" charset="-122"/>
                 <a:cs typeface="Calibri" pitchFamily="34" charset="-120"/>
               </a:rPr>
-              <a:t>&lt;-</a:t>
-            </a:r>
-            <a:r>
-              <a:rPr lang="es-ES" sz="1400" b="1" dirty="0">
+              <a:t>Un proyecto es una carpeta con un archivo </a:t>
+            </a:r>
+            <a:r>
+              <a:rPr lang="es-ES" sz="1400" b="1" i="1" dirty="0">
                 <a:solidFill>
                   <a:schemeClr val="bg1"/>
                 </a:solidFill>
@@ -4317,10 +4844,10 @@
                 <a:ea typeface="Calibri" pitchFamily="34" charset="-122"/>
                 <a:cs typeface="Calibri" pitchFamily="34" charset="-120"/>
               </a:rPr>
-              <a:t> guarda un valor en un objeto. </a:t>
-            </a:r>
-            <a:r>
-              <a:rPr lang="es-ES" sz="1400" b="1" i="1" dirty="0">
+              <a:t>.Rproj</a:t>
+            </a:r>
+            <a:r>
+              <a:rPr lang="es-ES" sz="1400" b="1" dirty="0">
                 <a:solidFill>
                   <a:schemeClr val="bg1"/>
                 </a:solidFill>
@@ -4328,10 +4855,10 @@
                 <a:ea typeface="Calibri" pitchFamily="34" charset="-122"/>
                 <a:cs typeface="Calibri" pitchFamily="34" charset="-120"/>
               </a:rPr>
-              <a:t>c()</a:t>
-            </a:r>
-            <a:r>
-              <a:rPr lang="es-ES" sz="1400" b="1" dirty="0">
+              <a:t>. Mientras está abierto, R trabaja desde esa carpeta y rutas como </a:t>
+            </a:r>
+            <a:r>
+              <a:rPr lang="es-ES" sz="1400" b="1" i="1" dirty="0">
                 <a:solidFill>
                   <a:schemeClr val="bg1"/>
                 </a:solidFill>
@@ -4339,10 +4866,10 @@
                 <a:ea typeface="Calibri" pitchFamily="34" charset="-122"/>
                 <a:cs typeface="Calibri" pitchFamily="34" charset="-120"/>
               </a:rPr>
-              <a:t> arma un vector. </a:t>
-            </a:r>
-            <a:r>
-              <a:rPr lang="es-ES" sz="1400" b="1" i="1" dirty="0">
+              <a:t>datos/</a:t>
+            </a:r>
+            <a:r>
+              <a:rPr lang="es-ES" sz="1400" b="1" dirty="0">
                 <a:solidFill>
                   <a:schemeClr val="bg1"/>
                 </a:solidFill>
@@ -4350,8 +4877,20 @@
                 <a:ea typeface="Calibri" pitchFamily="34" charset="-122"/>
                 <a:cs typeface="Calibri" pitchFamily="34" charset="-120"/>
               </a:rPr>
-              <a:t>read.csv()</a:t>
-            </a:r>
+              <a:t> funcionan solas.</a:t>
+            </a:r>
+          </a:p>
+          <a:p>
+            <a:endParaRPr lang="es-ES" sz="1400" b="1" dirty="0">
+              <a:solidFill>
+                <a:schemeClr val="bg1"/>
+              </a:solidFill>
+              <a:latin typeface="Calibri" pitchFamily="34" charset="0"/>
+              <a:ea typeface="Calibri" pitchFamily="34" charset="-122"/>
+              <a:cs typeface="Calibri" pitchFamily="34" charset="-120"/>
+            </a:endParaRPr>
+          </a:p>
+          <a:p>
             <a:r>
               <a:rPr lang="es-ES" sz="1400" b="1" dirty="0">
                 <a:solidFill>
@@ -4361,14 +4900,8 @@
                 <a:ea typeface="Calibri" pitchFamily="34" charset="-122"/>
                 <a:cs typeface="Calibri" pitchFamily="34" charset="-120"/>
               </a:rPr>
-              <a:t> lee una tabla, un data frame.</a:t>
-            </a:r>
-            <a:endParaRPr lang="en-US" sz="1300" dirty="0"/>
-          </a:p>
-          <a:p>
-            <a:endParaRPr lang="en-US" sz="1300" dirty="0"/>
-          </a:p>
-          <a:p>
+              <a:t>Su nombre aparece arriba a la derecha de RStudio. Si no está, </a:t>
+            </a:r>
             <a:r>
               <a:rPr lang="es-ES" sz="1400" b="1" i="1" dirty="0">
                 <a:solidFill>
@@ -4378,7 +4911,7 @@
                 <a:ea typeface="Calibri" pitchFamily="34" charset="-122"/>
                 <a:cs typeface="Calibri" pitchFamily="34" charset="-120"/>
               </a:rPr>
-              <a:t>elecciones$emitidos</a:t>
+              <a:t>File, Open Project</a:t>
             </a:r>
             <a:r>
               <a:rPr lang="es-ES" sz="1400" b="1" dirty="0">
@@ -4389,7 +4922,7 @@
                 <a:ea typeface="Calibri" pitchFamily="34" charset="-122"/>
                 <a:cs typeface="Calibri" pitchFamily="34" charset="-120"/>
               </a:rPr>
-              <a:t> elige una columna y </a:t>
+              <a:t> y elegir </a:t>
             </a:r>
             <a:r>
               <a:rPr lang="es-ES" sz="1400" b="1" i="1" dirty="0">
@@ -4400,7 +4933,7 @@
                 <a:ea typeface="Calibri" pitchFamily="34" charset="-122"/>
                 <a:cs typeface="Calibri" pitchFamily="34" charset="-120"/>
               </a:rPr>
-              <a:t>sum()</a:t>
+              <a:t>visualizacion_datos_shiny.Rproj</a:t>
             </a:r>
             <a:r>
               <a:rPr lang="es-ES" sz="1400" b="1" dirty="0">
@@ -4411,37 +4944,14 @@
                 <a:ea typeface="Calibri" pitchFamily="34" charset="-122"/>
                 <a:cs typeface="Calibri" pitchFamily="34" charset="-120"/>
               </a:rPr>
-              <a:t> la suma. Todo está en </a:t>
-            </a:r>
-            <a:r>
-              <a:rPr lang="es-ES" sz="1400" b="1" i="1" dirty="0">
-                <a:solidFill>
-                  <a:schemeClr val="bg1"/>
-                </a:solidFill>
-                <a:latin typeface="Calibri" pitchFamily="34" charset="0"/>
-                <a:ea typeface="Calibri" pitchFamily="34" charset="-122"/>
-                <a:cs typeface="Calibri" pitchFamily="34" charset="-120"/>
-              </a:rPr>
-              <a:t>clase1/primeros_pasos.R</a:t>
-            </a:r>
-            <a:r>
-              <a:rPr lang="es-ES" sz="1400" b="1" dirty="0">
-                <a:solidFill>
-                  <a:schemeClr val="bg1"/>
-                </a:solidFill>
-                <a:latin typeface="Calibri" pitchFamily="34" charset="0"/>
-                <a:ea typeface="Calibri" pitchFamily="34" charset="-122"/>
-                <a:cs typeface="Calibri" pitchFamily="34" charset="-120"/>
-              </a:rPr>
               <a:t>.</a:t>
             </a:r>
-            <a:endParaRPr lang="en-US" sz="1300" dirty="0"/>
           </a:p>
         </p:txBody>
       </p:sp>
       <p:pic>
         <p:nvPicPr>
-          <p:cNvPr id="22" name="Picture 21" descr="p3.png"/>
+          <p:cNvPr id="18" name="Picture 17" descr="cap1.png"/>
           <p:cNvPicPr>
             <a:picLocks noChangeAspect="1"/>
           </p:cNvPicPr>
@@ -4455,19 +4965,12 @@
         </p:blipFill>
         <p:spPr>
           <a:xfrm>
-            <a:off x="4434840" y="1471757"/>
-            <a:ext cx="4480560" cy="2497165"/>
+            <a:off x="4870731" y="1188720"/>
+            <a:ext cx="3608778" cy="3100000"/>
           </a:xfrm>
           <a:prstGeom prst="rect">
             <a:avLst/>
           </a:prstGeom>
-          <a:ln w="76200">
-            <a:solidFill>
-              <a:schemeClr val="accent1">
-                <a:lumMod val="75000"/>
-              </a:schemeClr>
-            </a:solidFill>
-          </a:ln>
         </p:spPr>
       </p:pic>
     </p:spTree>
@@ -4479,495 +4982,6 @@
 </file>
 
 <file path=ppt/slides/slide14.xml><?xml version="1.0" encoding="utf-8"?>
-<p:sld xmlns:a="http://schemas.openxmlformats.org/drawingml/2006/main" xmlns:r="http://schemas.openxmlformats.org/officeDocument/2006/relationships" xmlns:p="http://schemas.openxmlformats.org/presentationml/2006/main">
-  <p:cSld>
-    <p:spTree>
-      <p:nvGrpSpPr>
-        <p:cNvPr id="1" name="">
-          <a:extLst>
-            <a:ext uri="{FF2B5EF4-FFF2-40B4-BE49-F238E27FC236}">
-              <a16:creationId xmlns:a16="http://schemas.microsoft.com/office/drawing/2014/main" id="{AD58CD19-0A05-980C-28BC-1CD69A6E7366}"/>
-            </a:ext>
-          </a:extLst>
-        </p:cNvPr>
-        <p:cNvGrpSpPr/>
-        <p:nvPr/>
-      </p:nvGrpSpPr>
-      <p:grpSpPr>
-        <a:xfrm>
-          <a:off x="0" y="0"/>
-          <a:ext cx="0" cy="0"/>
-          <a:chOff x="0" y="0"/>
-          <a:chExt cx="0" cy="0"/>
-        </a:xfrm>
-      </p:grpSpPr>
-      <p:sp>
-        <p:nvSpPr>
-          <p:cNvPr id="2" name="Text 0">
-            <a:extLst>
-              <a:ext uri="{FF2B5EF4-FFF2-40B4-BE49-F238E27FC236}">
-                <a16:creationId xmlns:a16="http://schemas.microsoft.com/office/drawing/2014/main" id="{88D3ACF3-B150-B335-2F68-0E72F7D93AA7}"/>
-              </a:ext>
-            </a:extLst>
-          </p:cNvPr>
-          <p:cNvSpPr txBox="1"/>
-          <p:nvPr/>
-        </p:nvSpPr>
-        <p:spPr>
-          <a:xfrm>
-            <a:off x="502920" y="320040"/>
-            <a:ext cx="7040880" cy="640080"/>
-          </a:xfrm>
-          <a:prstGeom prst="rect">
-            <a:avLst/>
-          </a:prstGeom>
-          <a:noFill/>
-          <a:ln/>
-        </p:spPr>
-        <p:txBody>
-          <a:bodyPr wrap="square" lIns="0" tIns="0" rIns="0" bIns="0" rtlCol="0" anchor="ctr"/>
-          <a:lstStyle/>
-          <a:p>
-            <a:pPr marL="0" indent="0">
-              <a:buNone/>
-            </a:pPr>
-            <a:r>
-              <a:rPr lang="es-UY" sz="3000" b="1" noProof="0" dirty="0">
-                <a:solidFill>
-                  <a:srgbClr val="2E0A4E"/>
-                </a:solidFill>
-                <a:latin typeface="Oswald" pitchFamily="34" charset="0"/>
-                <a:ea typeface="Oswald" pitchFamily="34" charset="-122"/>
-                <a:cs typeface="Oswald" pitchFamily="34" charset="-120"/>
-              </a:rPr>
-              <a:t>Primer prueba básica</a:t>
-            </a:r>
-            <a:endParaRPr lang="es-UY" sz="3000" noProof="0" dirty="0"/>
-          </a:p>
-        </p:txBody>
-      </p:sp>
-      <p:sp>
-        <p:nvSpPr>
-          <p:cNvPr id="5" name="Shape 3">
-            <a:extLst>
-              <a:ext uri="{FF2B5EF4-FFF2-40B4-BE49-F238E27FC236}">
-                <a16:creationId xmlns:a16="http://schemas.microsoft.com/office/drawing/2014/main" id="{E290BAFC-E6EB-5634-FBC3-CCC9F39E92D9}"/>
-              </a:ext>
-            </a:extLst>
-          </p:cNvPr>
-          <p:cNvSpPr/>
-          <p:nvPr/>
-        </p:nvSpPr>
-        <p:spPr>
-          <a:xfrm>
-            <a:off x="502920" y="1188720"/>
-            <a:ext cx="8138160" cy="3429000"/>
-          </a:xfrm>
-          <a:prstGeom prst="roundRect">
-            <a:avLst>
-              <a:gd name="adj" fmla="val 1600"/>
-            </a:avLst>
-          </a:prstGeom>
-          <a:solidFill>
-            <a:srgbClr val="2E0A4E"/>
-          </a:solidFill>
-          <a:ln w="12700">
-            <a:solidFill>
-              <a:srgbClr val="2E0A4E"/>
-            </a:solidFill>
-            <a:prstDash val="solid"/>
-          </a:ln>
-        </p:spPr>
-        <p:txBody>
-          <a:bodyPr/>
-          <a:lstStyle/>
-          <a:p>
-            <a:endParaRPr lang="es-UY" noProof="0" dirty="0"/>
-          </a:p>
-        </p:txBody>
-      </p:sp>
-      <p:sp>
-        <p:nvSpPr>
-          <p:cNvPr id="6" name="Text 4">
-            <a:extLst>
-              <a:ext uri="{FF2B5EF4-FFF2-40B4-BE49-F238E27FC236}">
-                <a16:creationId xmlns:a16="http://schemas.microsoft.com/office/drawing/2014/main" id="{5DF983FE-53D9-DEAA-65C1-D3415B85244D}"/>
-              </a:ext>
-            </a:extLst>
-          </p:cNvPr>
-          <p:cNvSpPr txBox="1"/>
-          <p:nvPr/>
-        </p:nvSpPr>
-        <p:spPr>
-          <a:xfrm>
-            <a:off x="777240" y="1325880"/>
-            <a:ext cx="7589520" cy="3154680"/>
-          </a:xfrm>
-          <a:prstGeom prst="rect">
-            <a:avLst/>
-          </a:prstGeom>
-          <a:noFill/>
-          <a:ln/>
-        </p:spPr>
-        <p:txBody>
-          <a:bodyPr wrap="square" lIns="0" tIns="0" rIns="0" bIns="0" rtlCol="0" anchor="t"/>
-          <a:lstStyle/>
-          <a:p>
-            <a:pPr marL="171450" indent="-171450">
-              <a:spcAft>
-                <a:spcPts val="200"/>
-              </a:spcAft>
-              <a:buFont typeface="Arial" panose="020B0604020202020204" pitchFamily="34" charset="0"/>
-              <a:buChar char="•"/>
-            </a:pPr>
-            <a:r>
-              <a:rPr lang="es-UY" sz="1200" b="1" noProof="0" dirty="0">
-                <a:solidFill>
-                  <a:srgbClr val="F1E9F8"/>
-                </a:solidFill>
-                <a:latin typeface="Courier New" pitchFamily="34" charset="0"/>
-                <a:ea typeface="Courier New" pitchFamily="34" charset="-122"/>
-                <a:cs typeface="Courier New" pitchFamily="34" charset="-120"/>
-              </a:rPr>
-              <a:t>Abrimos clase1/app.R en Rstudio</a:t>
-            </a:r>
-          </a:p>
-          <a:p>
-            <a:pPr marL="0" indent="0">
-              <a:spcAft>
-                <a:spcPts val="200"/>
-              </a:spcAft>
-              <a:buNone/>
-            </a:pPr>
-            <a:endParaRPr lang="es-UY" sz="1200" dirty="0">
-              <a:solidFill>
-                <a:srgbClr val="F1E9F8"/>
-              </a:solidFill>
-              <a:latin typeface="Courier New" pitchFamily="34" charset="0"/>
-              <a:cs typeface="Courier New" pitchFamily="34" charset="-120"/>
-            </a:endParaRPr>
-          </a:p>
-          <a:p>
-            <a:pPr marL="171450" indent="-171450">
-              <a:spcAft>
-                <a:spcPts val="200"/>
-              </a:spcAft>
-              <a:buFont typeface="Arial" panose="020B0604020202020204" pitchFamily="34" charset="0"/>
-              <a:buChar char="•"/>
-            </a:pPr>
-            <a:r>
-              <a:rPr lang="es-UY" sz="1200" b="1" noProof="0" dirty="0">
-                <a:solidFill>
-                  <a:srgbClr val="F1E9F8"/>
-                </a:solidFill>
-                <a:latin typeface="Courier New" pitchFamily="34" charset="0"/>
-                <a:ea typeface="Courier New" pitchFamily="34" charset="-122"/>
-                <a:cs typeface="Courier New" pitchFamily="34" charset="-120"/>
-              </a:rPr>
-              <a:t>Observamos el código y prestamos especial atención a los comentarios (#...)</a:t>
-            </a:r>
-          </a:p>
-          <a:p>
-            <a:pPr marL="171450" indent="-171450">
-              <a:spcAft>
-                <a:spcPts val="200"/>
-              </a:spcAft>
-              <a:buFont typeface="Arial" panose="020B0604020202020204" pitchFamily="34" charset="0"/>
-              <a:buChar char="•"/>
-            </a:pPr>
-            <a:endParaRPr lang="es-UY" sz="1200" b="1" dirty="0">
-              <a:solidFill>
-                <a:srgbClr val="F1E9F8"/>
-              </a:solidFill>
-              <a:latin typeface="Courier New" pitchFamily="34" charset="0"/>
-              <a:cs typeface="Courier New" pitchFamily="34" charset="-120"/>
-            </a:endParaRPr>
-          </a:p>
-          <a:p>
-            <a:pPr marL="171450" indent="-171450">
-              <a:spcAft>
-                <a:spcPts val="200"/>
-              </a:spcAft>
-              <a:buFont typeface="Arial" panose="020B0604020202020204" pitchFamily="34" charset="0"/>
-              <a:buChar char="•"/>
-            </a:pPr>
-            <a:r>
-              <a:rPr lang="es-UY" sz="1200" b="1" noProof="0" dirty="0">
-                <a:solidFill>
-                  <a:srgbClr val="F1E9F8"/>
-                </a:solidFill>
-                <a:latin typeface="Courier New" pitchFamily="34" charset="0"/>
-                <a:cs typeface="Courier New" pitchFamily="34" charset="-120"/>
-              </a:rPr>
-              <a:t>Ejecutamos la app localmente haciendo clic en “Run App”</a:t>
-            </a:r>
-            <a:endParaRPr lang="es-UY" sz="1200" noProof="0" dirty="0">
-              <a:solidFill>
-                <a:srgbClr val="F1E9F8"/>
-              </a:solidFill>
-              <a:latin typeface="Courier New" pitchFamily="34" charset="0"/>
-              <a:ea typeface="Courier New" pitchFamily="34" charset="-122"/>
-              <a:cs typeface="Courier New" pitchFamily="34" charset="-120"/>
-            </a:endParaRPr>
-          </a:p>
-          <a:p>
-            <a:pPr marL="0" indent="0">
-              <a:spcAft>
-                <a:spcPts val="200"/>
-              </a:spcAft>
-              <a:buNone/>
-            </a:pPr>
-            <a:endParaRPr lang="es-UY" sz="1200" dirty="0">
-              <a:solidFill>
-                <a:srgbClr val="F1E9F8"/>
-              </a:solidFill>
-              <a:latin typeface="Courier New" pitchFamily="34" charset="0"/>
-              <a:ea typeface="Courier New" pitchFamily="34" charset="-122"/>
-              <a:cs typeface="Courier New" pitchFamily="34" charset="-120"/>
-            </a:endParaRPr>
-          </a:p>
-          <a:p>
-            <a:pPr marL="171450" indent="-171450">
-              <a:spcAft>
-                <a:spcPts val="200"/>
-              </a:spcAft>
-              <a:buFont typeface="Arial" panose="020B0604020202020204" pitchFamily="34" charset="0"/>
-              <a:buChar char="•"/>
-            </a:pPr>
-            <a:r>
-              <a:rPr lang="es-UY" sz="1200" b="1" noProof="0" dirty="0">
-                <a:solidFill>
-                  <a:srgbClr val="F1E9F8"/>
-                </a:solidFill>
-                <a:latin typeface="Courier New" pitchFamily="34" charset="0"/>
-                <a:ea typeface="Courier New" pitchFamily="34" charset="-122"/>
-                <a:cs typeface="Courier New" pitchFamily="34" charset="-120"/>
-              </a:rPr>
-              <a:t>En caso de tener avisos o errores, revisar la consola y leer el texto que se imprimió allí.</a:t>
-            </a:r>
-          </a:p>
-          <a:p>
-            <a:pPr marL="171450" indent="-171450">
-              <a:spcAft>
-                <a:spcPts val="200"/>
-              </a:spcAft>
-              <a:buFont typeface="Arial" panose="020B0604020202020204" pitchFamily="34" charset="0"/>
-              <a:buChar char="•"/>
-            </a:pPr>
-            <a:endParaRPr lang="es-UY" sz="1200" b="1" dirty="0">
-              <a:solidFill>
-                <a:srgbClr val="F1E9F8"/>
-              </a:solidFill>
-              <a:latin typeface="Courier New" pitchFamily="34" charset="0"/>
-              <a:cs typeface="Courier New" pitchFamily="34" charset="-120"/>
-            </a:endParaRPr>
-          </a:p>
-          <a:p>
-            <a:pPr marL="171450" indent="-171450">
-              <a:spcAft>
-                <a:spcPts val="200"/>
-              </a:spcAft>
-              <a:buFont typeface="Arial" panose="020B0604020202020204" pitchFamily="34" charset="0"/>
-              <a:buChar char="•"/>
-            </a:pPr>
-            <a:r>
-              <a:rPr lang="es-UY" sz="1200" b="1" noProof="0" dirty="0">
-                <a:solidFill>
-                  <a:srgbClr val="F1E9F8"/>
-                </a:solidFill>
-                <a:latin typeface="Courier New" pitchFamily="34" charset="0"/>
-                <a:cs typeface="Courier New" pitchFamily="34" charset="-120"/>
-              </a:rPr>
-              <a:t>Primero revisamos si funciona la aplicación y contrastamos los datos mostrados con </a:t>
-            </a:r>
-            <a:r>
-              <a:rPr lang="es-UY" sz="1200" b="1" dirty="0">
-                <a:solidFill>
-                  <a:srgbClr val="F1E9F8"/>
-                </a:solidFill>
-                <a:latin typeface="Courier New" pitchFamily="34" charset="0"/>
-                <a:cs typeface="Courier New" pitchFamily="34" charset="-120"/>
-              </a:rPr>
-              <a:t>nuestra base de datos original. Después vemos, pieza por pieza, cómo está construida.</a:t>
-            </a:r>
-            <a:endParaRPr lang="es-UY" sz="1200" b="1" noProof="0" dirty="0"/>
-          </a:p>
-        </p:txBody>
-      </p:sp>
-    </p:spTree>
-    <p:extLst>
-      <p:ext uri="{BB962C8B-B14F-4D97-AF65-F5344CB8AC3E}">
-        <p14:creationId xmlns:p14="http://schemas.microsoft.com/office/powerpoint/2010/main" val="3901877764"/>
-      </p:ext>
-    </p:extLst>
-  </p:cSld>
-  <p:clrMapOvr>
-    <a:masterClrMapping/>
-  </p:clrMapOvr>
-</p:sld>
-</file>
-
-<file path=ppt/slides/slide15.xml><?xml version="1.0" encoding="utf-8"?>
-<p:sld xmlns:a="http://schemas.openxmlformats.org/drawingml/2006/main" xmlns:r="http://schemas.openxmlformats.org/officeDocument/2006/relationships" xmlns:p="http://schemas.openxmlformats.org/presentationml/2006/main">
-  <p:cSld>
-    <p:spTree>
-      <p:nvGrpSpPr>
-        <p:cNvPr id="1" name="">
-          <a:extLst>
-            <a:ext uri="{FF2B5EF4-FFF2-40B4-BE49-F238E27FC236}">
-              <a16:creationId xmlns:a16="http://schemas.microsoft.com/office/drawing/2014/main" id="{5C2E6952-D65A-228F-FF92-58532377F0A1}"/>
-            </a:ext>
-          </a:extLst>
-        </p:cNvPr>
-        <p:cNvGrpSpPr/>
-        <p:nvPr/>
-      </p:nvGrpSpPr>
-      <p:grpSpPr>
-        <a:xfrm>
-          <a:off x="0" y="0"/>
-          <a:ext cx="0" cy="0"/>
-          <a:chOff x="0" y="0"/>
-          <a:chExt cx="0" cy="0"/>
-        </a:xfrm>
-      </p:grpSpPr>
-      <p:sp>
-        <p:nvSpPr>
-          <p:cNvPr id="2" name="Text 0">
-            <a:extLst>
-              <a:ext uri="{FF2B5EF4-FFF2-40B4-BE49-F238E27FC236}">
-                <a16:creationId xmlns:a16="http://schemas.microsoft.com/office/drawing/2014/main" id="{0EEFDE8D-D2BB-385F-94BB-42328D95E4C4}"/>
-              </a:ext>
-            </a:extLst>
-          </p:cNvPr>
-          <p:cNvSpPr txBox="1"/>
-          <p:nvPr/>
-        </p:nvSpPr>
-        <p:spPr>
-          <a:xfrm>
-            <a:off x="502920" y="320040"/>
-            <a:ext cx="7040880" cy="640080"/>
-          </a:xfrm>
-          <a:prstGeom prst="rect">
-            <a:avLst/>
-          </a:prstGeom>
-          <a:noFill/>
-          <a:ln/>
-        </p:spPr>
-        <p:txBody>
-          <a:bodyPr wrap="square" lIns="0" tIns="0" rIns="0" bIns="0" rtlCol="0" anchor="ctr"/>
-          <a:lstStyle/>
-          <a:p>
-            <a:pPr marL="0" indent="0">
-              <a:buNone/>
-            </a:pPr>
-            <a:r>
-              <a:rPr lang="es-UY" sz="3000" b="1" noProof="0" dirty="0">
-                <a:solidFill>
-                  <a:srgbClr val="2E0A4E"/>
-                </a:solidFill>
-                <a:latin typeface="Oswald" pitchFamily="34" charset="0"/>
-                <a:ea typeface="Oswald" pitchFamily="34" charset="-122"/>
-                <a:cs typeface="Oswald" pitchFamily="34" charset="-120"/>
-              </a:rPr>
-              <a:t>Primer prueba básica</a:t>
-            </a:r>
-            <a:endParaRPr lang="es-UY" sz="3000" noProof="0" dirty="0"/>
-          </a:p>
-        </p:txBody>
-      </p:sp>
-      <p:sp>
-        <p:nvSpPr>
-          <p:cNvPr id="5" name="Shape 3">
-            <a:extLst>
-              <a:ext uri="{FF2B5EF4-FFF2-40B4-BE49-F238E27FC236}">
-                <a16:creationId xmlns:a16="http://schemas.microsoft.com/office/drawing/2014/main" id="{42B39C4F-F6CB-7289-3796-A9349E70E62F}"/>
-              </a:ext>
-            </a:extLst>
-          </p:cNvPr>
-          <p:cNvSpPr/>
-          <p:nvPr/>
-        </p:nvSpPr>
-        <p:spPr>
-          <a:xfrm>
-            <a:off x="502920" y="1394460"/>
-            <a:ext cx="8138160" cy="3429000"/>
-          </a:xfrm>
-          <a:prstGeom prst="roundRect">
-            <a:avLst>
-              <a:gd name="adj" fmla="val 1600"/>
-            </a:avLst>
-          </a:prstGeom>
-          <a:solidFill>
-            <a:srgbClr val="2E0A4E"/>
-          </a:solidFill>
-          <a:ln w="12700">
-            <a:solidFill>
-              <a:srgbClr val="2E0A4E"/>
-            </a:solidFill>
-            <a:prstDash val="solid"/>
-          </a:ln>
-        </p:spPr>
-        <p:txBody>
-          <a:bodyPr/>
-          <a:lstStyle/>
-          <a:p>
-            <a:endParaRPr lang="es-UY" noProof="0" dirty="0"/>
-          </a:p>
-        </p:txBody>
-      </p:sp>
-      <p:pic>
-        <p:nvPicPr>
-          <p:cNvPr id="4" name="Picture 3">
-            <a:extLst>
-              <a:ext uri="{FF2B5EF4-FFF2-40B4-BE49-F238E27FC236}">
-                <a16:creationId xmlns:a16="http://schemas.microsoft.com/office/drawing/2014/main" id="{FE7350AD-56A0-2E40-8E5D-B8E071AEABC2}"/>
-              </a:ext>
-            </a:extLst>
-          </p:cNvPr>
-          <p:cNvPicPr>
-            <a:picLocks noChangeAspect="1"/>
-          </p:cNvPicPr>
-          <p:nvPr/>
-        </p:nvPicPr>
-        <p:blipFill>
-          <a:blip r:embed="rId3"/>
-          <a:srcRect b="4251"/>
-          <a:stretch>
-            <a:fillRect/>
-          </a:stretch>
-        </p:blipFill>
-        <p:spPr>
-          <a:xfrm>
-            <a:off x="1296312" y="1079696"/>
-            <a:ext cx="6368495" cy="3429000"/>
-          </a:xfrm>
-          <a:prstGeom prst="rect">
-            <a:avLst/>
-          </a:prstGeom>
-          <a:ln w="76200">
-            <a:solidFill>
-              <a:schemeClr val="accent5">
-                <a:lumMod val="60000"/>
-                <a:lumOff val="40000"/>
-              </a:schemeClr>
-            </a:solidFill>
-          </a:ln>
-        </p:spPr>
-      </p:pic>
-    </p:spTree>
-    <p:extLst>
-      <p:ext uri="{BB962C8B-B14F-4D97-AF65-F5344CB8AC3E}">
-        <p14:creationId xmlns:p14="http://schemas.microsoft.com/office/powerpoint/2010/main" val="2543718561"/>
-      </p:ext>
-    </p:extLst>
-  </p:cSld>
-  <p:clrMapOvr>
-    <a:masterClrMapping/>
-  </p:clrMapOvr>
-</p:sld>
-</file>
-
-<file path=ppt/slides/slide16.xml><?xml version="1.0" encoding="utf-8"?>
 <p:sld xmlns:a="http://schemas.openxmlformats.org/drawingml/2006/main" xmlns:r="http://schemas.openxmlformats.org/officeDocument/2006/relationships" xmlns:p="http://schemas.openxmlformats.org/presentationml/2006/main">
   <p:cSld>
     <p:bg>
@@ -4994,13 +5008,7 @@
       </p:grpSpPr>
       <p:sp>
         <p:nvSpPr>
-          <p:cNvPr id="2" name="Text 0">
-            <a:extLst>
-              <a:ext uri="{FF2B5EF4-FFF2-40B4-BE49-F238E27FC236}">
-                <a16:creationId xmlns:a16="http://schemas.microsoft.com/office/drawing/2014/main" id="{21E0B84E-B772-A594-B980-A7B918F749C6}"/>
-              </a:ext>
-            </a:extLst>
-          </p:cNvPr>
+          <p:cNvPr id="2" name="Text 0"/>
           <p:cNvSpPr txBox="1"/>
           <p:nvPr/>
         </p:nvSpPr>
@@ -5028,7 +5036,7 @@
                 <a:ea typeface="Oswald" pitchFamily="34" charset="-122"/>
                 <a:cs typeface="Oswald" pitchFamily="34" charset="-120"/>
               </a:rPr>
-              <a:t>Paso a paso (5)</a:t>
+              <a:t>Paso a paso (3)</a:t>
             </a:r>
             <a:endParaRPr lang="en-US" sz="3000" dirty="0"/>
           </a:p>
@@ -5036,13 +5044,7 @@
       </p:sp>
       <p:sp>
         <p:nvSpPr>
-          <p:cNvPr id="11" name="Shape 9">
-            <a:extLst>
-              <a:ext uri="{FF2B5EF4-FFF2-40B4-BE49-F238E27FC236}">
-                <a16:creationId xmlns:a16="http://schemas.microsoft.com/office/drawing/2014/main" id="{8584C834-90F2-8AA8-B328-3643E4CCE677}"/>
-              </a:ext>
-            </a:extLst>
-          </p:cNvPr>
+          <p:cNvPr id="11" name="Shape 9"/>
           <p:cNvSpPr/>
           <p:nvPr/>
         </p:nvSpPr>
@@ -5076,13 +5078,7 @@
       </p:sp>
       <p:sp>
         <p:nvSpPr>
-          <p:cNvPr id="12" name="Text 10">
-            <a:extLst>
-              <a:ext uri="{FF2B5EF4-FFF2-40B4-BE49-F238E27FC236}">
-                <a16:creationId xmlns:a16="http://schemas.microsoft.com/office/drawing/2014/main" id="{3D0787E2-7C7C-7A9C-ED72-1B8D5BA244E4}"/>
-              </a:ext>
-            </a:extLst>
-          </p:cNvPr>
+          <p:cNvPr id="12" name="Text 10"/>
           <p:cNvSpPr txBox="1"/>
           <p:nvPr/>
         </p:nvSpPr>
@@ -5113,7 +5109,7 @@
                 <a:ea typeface="Oswald" pitchFamily="34" charset="-122"/>
                 <a:cs typeface="Oswald" pitchFamily="34" charset="-120"/>
               </a:rPr>
-              <a:t>OBJETIVO 5</a:t>
+              <a:t>OBJETIVO 4</a:t>
             </a:r>
             <a:endParaRPr lang="en-US" sz="1600" dirty="0"/>
           </a:p>
@@ -5121,13 +5117,7 @@
       </p:sp>
       <p:sp>
         <p:nvSpPr>
-          <p:cNvPr id="13" name="Text 11">
-            <a:extLst>
-              <a:ext uri="{FF2B5EF4-FFF2-40B4-BE49-F238E27FC236}">
-                <a16:creationId xmlns:a16="http://schemas.microsoft.com/office/drawing/2014/main" id="{0C2592C3-39BA-DB09-D0F1-BF73ED6DEC99}"/>
-              </a:ext>
-            </a:extLst>
-          </p:cNvPr>
+          <p:cNvPr id="13" name="Text 11"/>
           <p:cNvSpPr txBox="1"/>
           <p:nvPr/>
         </p:nvSpPr>
@@ -5155,8 +5145,9 @@
                 <a:ea typeface="Calibri" pitchFamily="34" charset="-122"/>
                 <a:cs typeface="Calibri" pitchFamily="34" charset="-120"/>
               </a:rPr>
-              <a:t>La interfaz (ui)</a:t>
-            </a:r>
+              <a:t>Los cuatro paneles de RStudio</a:t>
+            </a:r>
+            <a:endParaRPr lang="en-US" sz="1300" dirty="0"/>
           </a:p>
         </p:txBody>
       </p:sp>
@@ -5165,7 +5156,7 @@
           <p:cNvPr id="15" name="Shape 9">
             <a:extLst>
               <a:ext uri="{FF2B5EF4-FFF2-40B4-BE49-F238E27FC236}">
-                <a16:creationId xmlns:a16="http://schemas.microsoft.com/office/drawing/2014/main" id="{ADB729CB-A987-663A-1058-A842556E3C9E}"/>
+                <a16:creationId xmlns:a16="http://schemas.microsoft.com/office/drawing/2014/main" id="{1ED05ED1-CE50-06A2-178F-B4365671B18F}"/>
               </a:ext>
             </a:extLst>
           </p:cNvPr>
@@ -5209,7 +5200,7 @@
           <p:cNvPr id="17" name="Text 11">
             <a:extLst>
               <a:ext uri="{FF2B5EF4-FFF2-40B4-BE49-F238E27FC236}">
-                <a16:creationId xmlns:a16="http://schemas.microsoft.com/office/drawing/2014/main" id="{90C1F140-6606-DACA-D829-EF5414EB787C}"/>
+                <a16:creationId xmlns:a16="http://schemas.microsoft.com/office/drawing/2014/main" id="{1291722D-C809-2238-9939-339690D52438}"/>
               </a:ext>
             </a:extLst>
           </p:cNvPr>
@@ -5218,7 +5209,7 @@
         </p:nvSpPr>
         <p:spPr>
           <a:xfrm>
-            <a:off x="647115" y="2880360"/>
+            <a:off x="668216" y="2899117"/>
             <a:ext cx="3369212" cy="716926"/>
           </a:xfrm>
           <a:prstGeom prst="rect">
@@ -5231,19 +5222,68 @@
           <a:bodyPr wrap="square" lIns="0" tIns="0" rIns="0" bIns="0" rtlCol="0" anchor="t"/>
           <a:lstStyle/>
           <a:p>
-            <a:endParaRPr lang="en-US" sz="1300" dirty="0"/>
-          </a:p>
-          <a:p>
-            <a:endParaRPr lang="en-US" sz="1300" dirty="0"/>
-          </a:p>
-          <a:p>
-            <a:endParaRPr lang="en-US" sz="1300" dirty="0"/>
+            <a:r>
+              <a:rPr lang="es-ES" sz="1400" b="1" dirty="0" err="1">
+                <a:solidFill>
+                  <a:schemeClr val="bg1"/>
+                </a:solidFill>
+                <a:latin typeface="Calibri" pitchFamily="34" charset="0"/>
+                <a:ea typeface="Calibri" pitchFamily="34" charset="-122"/>
+                <a:cs typeface="Calibri" pitchFamily="34" charset="-120"/>
+              </a:rPr>
+              <a:t>En el script se escribe y se guarda. </a:t>
+            </a:r>
+            <a:r>
+              <a:rPr lang="es-ES" sz="1400" b="1" i="1" dirty="0" err="1">
+                <a:solidFill>
+                  <a:schemeClr val="bg1"/>
+                </a:solidFill>
+                <a:latin typeface="Calibri" pitchFamily="34" charset="0"/>
+                <a:ea typeface="Calibri" pitchFamily="34" charset="-122"/>
+                <a:cs typeface="Calibri" pitchFamily="34" charset="-120"/>
+              </a:rPr>
+              <a:t>Ctrl + Enter</a:t>
+            </a:r>
+            <a:r>
+              <a:rPr lang="es-ES" sz="1400" b="1" dirty="0" err="1">
+                <a:solidFill>
+                  <a:schemeClr val="bg1"/>
+                </a:solidFill>
+                <a:latin typeface="Calibri" pitchFamily="34" charset="0"/>
+                <a:ea typeface="Calibri" pitchFamily="34" charset="-122"/>
+                <a:cs typeface="Calibri" pitchFamily="34" charset="-120"/>
+              </a:rPr>
+              <a:t> manda la línea a la consola, donde aparece el resultado.</a:t>
+            </a:r>
+          </a:p>
+          <a:p>
+            <a:endParaRPr lang="es-ES" sz="1400" b="1" dirty="0" err="1">
+              <a:solidFill>
+                <a:schemeClr val="bg1"/>
+              </a:solidFill>
+              <a:latin typeface="Calibri" pitchFamily="34" charset="0"/>
+              <a:ea typeface="Calibri" pitchFamily="34" charset="-122"/>
+              <a:cs typeface="Calibri" pitchFamily="34" charset="-120"/>
+            </a:endParaRPr>
+          </a:p>
+          <a:p>
+            <a:r>
+              <a:rPr lang="es-ES" sz="1400" b="1" dirty="0" err="1">
+                <a:solidFill>
+                  <a:schemeClr val="bg1"/>
+                </a:solidFill>
+                <a:latin typeface="Calibri" pitchFamily="34" charset="0"/>
+                <a:ea typeface="Calibri" pitchFamily="34" charset="-122"/>
+                <a:cs typeface="Calibri" pitchFamily="34" charset="-120"/>
+              </a:rPr>
+              <a:t>Los errores también salen en la consola. Leerlos con calma es la mitad del trabajo.</a:t>
+            </a:r>
           </a:p>
         </p:txBody>
       </p:sp>
       <p:pic>
         <p:nvPicPr>
-          <p:cNvPr id="22" name="Picture 21" descr="p4.png"/>
+          <p:cNvPr id="24" name="Picture 23" descr="p2.png"/>
           <p:cNvPicPr>
             <a:picLocks noChangeAspect="1"/>
           </p:cNvPicPr>
@@ -5257,8 +5297,8 @@
         </p:blipFill>
         <p:spPr>
           <a:xfrm>
-            <a:off x="4434840" y="1979662"/>
-            <a:ext cx="4300000" cy="2040677"/>
+            <a:off x="4434840" y="1320165"/>
+            <a:ext cx="4480560" cy="2800350"/>
           </a:xfrm>
           <a:prstGeom prst="rect">
             <a:avLst/>
@@ -5280,7 +5320,7 @@
 </p:sld>
 </file>
 
-<file path=ppt/slides/slide17.xml><?xml version="1.0" encoding="utf-8"?>
+<file path=ppt/slides/slide15.xml><?xml version="1.0" encoding="utf-8"?>
 <p:sld xmlns:a="http://schemas.openxmlformats.org/drawingml/2006/main" xmlns:r="http://schemas.openxmlformats.org/officeDocument/2006/relationships" xmlns:p="http://schemas.openxmlformats.org/presentationml/2006/main">
   <p:cSld>
     <p:bg>
@@ -5310,7 +5350,7 @@
           <p:cNvPr id="2" name="Text 0">
             <a:extLst>
               <a:ext uri="{FF2B5EF4-FFF2-40B4-BE49-F238E27FC236}">
-                <a16:creationId xmlns:a16="http://schemas.microsoft.com/office/drawing/2014/main" id="{21E0B84E-B772-A594-B980-A7B918F749C6}"/>
+                <a16:creationId xmlns:a16="http://schemas.microsoft.com/office/drawing/2014/main" id="{1B8BE186-2227-0AEE-46BF-1738518AF7E2}"/>
               </a:ext>
             </a:extLst>
           </p:cNvPr>
@@ -5341,7 +5381,7 @@
                 <a:ea typeface="Oswald" pitchFamily="34" charset="-122"/>
                 <a:cs typeface="Oswald" pitchFamily="34" charset="-120"/>
               </a:rPr>
-              <a:t>Paso a paso (6)</a:t>
+              <a:t>Paso a paso (4)</a:t>
             </a:r>
             <a:endParaRPr lang="en-US" sz="3000" dirty="0"/>
           </a:p>
@@ -5352,7 +5392,7 @@
           <p:cNvPr id="11" name="Shape 9">
             <a:extLst>
               <a:ext uri="{FF2B5EF4-FFF2-40B4-BE49-F238E27FC236}">
-                <a16:creationId xmlns:a16="http://schemas.microsoft.com/office/drawing/2014/main" id="{8584C834-90F2-8AA8-B328-3643E4CCE677}"/>
+                <a16:creationId xmlns:a16="http://schemas.microsoft.com/office/drawing/2014/main" id="{2D484EA3-17D5-DFDE-7FFB-391D9E546766}"/>
               </a:ext>
             </a:extLst>
           </p:cNvPr>
@@ -5392,7 +5432,7 @@
           <p:cNvPr id="12" name="Text 10">
             <a:extLst>
               <a:ext uri="{FF2B5EF4-FFF2-40B4-BE49-F238E27FC236}">
-                <a16:creationId xmlns:a16="http://schemas.microsoft.com/office/drawing/2014/main" id="{3D0787E2-7C7C-7A9C-ED72-1B8D5BA244E4}"/>
+                <a16:creationId xmlns:a16="http://schemas.microsoft.com/office/drawing/2014/main" id="{FF346D48-99B4-78ED-CF54-DB6A3D402E26}"/>
               </a:ext>
             </a:extLst>
           </p:cNvPr>
@@ -5426,7 +5466,7 @@
                 <a:ea typeface="Oswald" pitchFamily="34" charset="-122"/>
                 <a:cs typeface="Oswald" pitchFamily="34" charset="-120"/>
               </a:rPr>
-              <a:t>OBJETIVO 5</a:t>
+              <a:t>OBJETIVO 4</a:t>
             </a:r>
             <a:endParaRPr lang="en-US" sz="1600" dirty="0"/>
           </a:p>
@@ -5437,7 +5477,7 @@
           <p:cNvPr id="13" name="Text 11">
             <a:extLst>
               <a:ext uri="{FF2B5EF4-FFF2-40B4-BE49-F238E27FC236}">
-                <a16:creationId xmlns:a16="http://schemas.microsoft.com/office/drawing/2014/main" id="{0C2592C3-39BA-DB09-D0F1-BF73ED6DEC99}"/>
+                <a16:creationId xmlns:a16="http://schemas.microsoft.com/office/drawing/2014/main" id="{961D826F-99A4-C802-E6F8-FA059D329199}"/>
               </a:ext>
             </a:extLst>
           </p:cNvPr>
@@ -5468,7 +5508,7 @@
                 <a:ea typeface="Calibri" pitchFamily="34" charset="-122"/>
                 <a:cs typeface="Calibri" pitchFamily="34" charset="-120"/>
               </a:rPr>
-              <a:t>El servidor (server)</a:t>
+              <a:t>Lo básico de R</a:t>
             </a:r>
           </a:p>
         </p:txBody>
@@ -5478,7 +5518,7 @@
           <p:cNvPr id="15" name="Shape 9">
             <a:extLst>
               <a:ext uri="{FF2B5EF4-FFF2-40B4-BE49-F238E27FC236}">
-                <a16:creationId xmlns:a16="http://schemas.microsoft.com/office/drawing/2014/main" id="{ADB729CB-A987-663A-1058-A842556E3C9E}"/>
+                <a16:creationId xmlns:a16="http://schemas.microsoft.com/office/drawing/2014/main" id="{F33AC7BE-75B4-F8D4-43E0-87B7AD3B3F34}"/>
               </a:ext>
             </a:extLst>
           </p:cNvPr>
@@ -5522,7 +5562,7 @@
           <p:cNvPr id="17" name="Text 11">
             <a:extLst>
               <a:ext uri="{FF2B5EF4-FFF2-40B4-BE49-F238E27FC236}">
-                <a16:creationId xmlns:a16="http://schemas.microsoft.com/office/drawing/2014/main" id="{90C1F140-6606-DACA-D829-EF5414EB787C}"/>
+                <a16:creationId xmlns:a16="http://schemas.microsoft.com/office/drawing/2014/main" id="{BFEECB63-4CC8-9CA3-665B-7BF2CFCADD52}"/>
               </a:ext>
             </a:extLst>
           </p:cNvPr>
@@ -5531,7 +5571,7 @@
         </p:nvSpPr>
         <p:spPr>
           <a:xfrm>
-            <a:off x="647115" y="2880360"/>
+            <a:off x="668216" y="2899117"/>
             <a:ext cx="3369212" cy="716926"/>
           </a:xfrm>
           <a:prstGeom prst="rect">
@@ -5544,19 +5584,151 @@
           <a:bodyPr wrap="square" lIns="0" tIns="0" rIns="0" bIns="0" rtlCol="0" anchor="t"/>
           <a:lstStyle/>
           <a:p>
+            <a:r>
+              <a:rPr lang="es-ES" sz="1400" b="1" i="1" dirty="0">
+                <a:solidFill>
+                  <a:schemeClr val="bg1"/>
+                </a:solidFill>
+                <a:latin typeface="Calibri" pitchFamily="34" charset="0"/>
+                <a:ea typeface="Calibri" pitchFamily="34" charset="-122"/>
+                <a:cs typeface="Calibri" pitchFamily="34" charset="-120"/>
+              </a:rPr>
+              <a:t>&lt;-</a:t>
+            </a:r>
+            <a:r>
+              <a:rPr lang="es-ES" sz="1400" b="1" dirty="0">
+                <a:solidFill>
+                  <a:schemeClr val="bg1"/>
+                </a:solidFill>
+                <a:latin typeface="Calibri" pitchFamily="34" charset="0"/>
+                <a:ea typeface="Calibri" pitchFamily="34" charset="-122"/>
+                <a:cs typeface="Calibri" pitchFamily="34" charset="-120"/>
+              </a:rPr>
+              <a:t> guarda un valor en un objeto. </a:t>
+            </a:r>
+            <a:r>
+              <a:rPr lang="es-ES" sz="1400" b="1" i="1" dirty="0">
+                <a:solidFill>
+                  <a:schemeClr val="bg1"/>
+                </a:solidFill>
+                <a:latin typeface="Calibri" pitchFamily="34" charset="0"/>
+                <a:ea typeface="Calibri" pitchFamily="34" charset="-122"/>
+                <a:cs typeface="Calibri" pitchFamily="34" charset="-120"/>
+              </a:rPr>
+              <a:t>c()</a:t>
+            </a:r>
+            <a:r>
+              <a:rPr lang="es-ES" sz="1400" b="1" dirty="0">
+                <a:solidFill>
+                  <a:schemeClr val="bg1"/>
+                </a:solidFill>
+                <a:latin typeface="Calibri" pitchFamily="34" charset="0"/>
+                <a:ea typeface="Calibri" pitchFamily="34" charset="-122"/>
+                <a:cs typeface="Calibri" pitchFamily="34" charset="-120"/>
+              </a:rPr>
+              <a:t> arma un vector. </a:t>
+            </a:r>
+            <a:r>
+              <a:rPr lang="es-ES" sz="1400" b="1" i="1" dirty="0">
+                <a:solidFill>
+                  <a:schemeClr val="bg1"/>
+                </a:solidFill>
+                <a:latin typeface="Calibri" pitchFamily="34" charset="0"/>
+                <a:ea typeface="Calibri" pitchFamily="34" charset="-122"/>
+                <a:cs typeface="Calibri" pitchFamily="34" charset="-120"/>
+              </a:rPr>
+              <a:t>read.csv()</a:t>
+            </a:r>
+            <a:r>
+              <a:rPr lang="es-ES" sz="1400" b="1" dirty="0">
+                <a:solidFill>
+                  <a:schemeClr val="bg1"/>
+                </a:solidFill>
+                <a:latin typeface="Calibri" pitchFamily="34" charset="0"/>
+                <a:ea typeface="Calibri" pitchFamily="34" charset="-122"/>
+                <a:cs typeface="Calibri" pitchFamily="34" charset="-120"/>
+              </a:rPr>
+              <a:t> lee una tabla, un data frame.</a:t>
+            </a:r>
             <a:endParaRPr lang="en-US" sz="1300" dirty="0"/>
           </a:p>
           <a:p>
             <a:endParaRPr lang="en-US" sz="1300" dirty="0"/>
           </a:p>
           <a:p>
+            <a:r>
+              <a:rPr lang="es-ES" sz="1400" b="1" i="1" dirty="0">
+                <a:solidFill>
+                  <a:schemeClr val="bg1"/>
+                </a:solidFill>
+                <a:latin typeface="Calibri" pitchFamily="34" charset="0"/>
+                <a:ea typeface="Calibri" pitchFamily="34" charset="-122"/>
+                <a:cs typeface="Calibri" pitchFamily="34" charset="-120"/>
+              </a:rPr>
+              <a:t>elecciones$emitidos</a:t>
+            </a:r>
+            <a:r>
+              <a:rPr lang="es-ES" sz="1400" b="1" dirty="0">
+                <a:solidFill>
+                  <a:schemeClr val="bg1"/>
+                </a:solidFill>
+                <a:latin typeface="Calibri" pitchFamily="34" charset="0"/>
+                <a:ea typeface="Calibri" pitchFamily="34" charset="-122"/>
+                <a:cs typeface="Calibri" pitchFamily="34" charset="-120"/>
+              </a:rPr>
+              <a:t> elige una columna y </a:t>
+            </a:r>
+            <a:r>
+              <a:rPr lang="es-ES" sz="1400" b="1" i="1" dirty="0">
+                <a:solidFill>
+                  <a:schemeClr val="bg1"/>
+                </a:solidFill>
+                <a:latin typeface="Calibri" pitchFamily="34" charset="0"/>
+                <a:ea typeface="Calibri" pitchFamily="34" charset="-122"/>
+                <a:cs typeface="Calibri" pitchFamily="34" charset="-120"/>
+              </a:rPr>
+              <a:t>sum()</a:t>
+            </a:r>
+            <a:r>
+              <a:rPr lang="es-ES" sz="1400" b="1" dirty="0">
+                <a:solidFill>
+                  <a:schemeClr val="bg1"/>
+                </a:solidFill>
+                <a:latin typeface="Calibri" pitchFamily="34" charset="0"/>
+                <a:ea typeface="Calibri" pitchFamily="34" charset="-122"/>
+                <a:cs typeface="Calibri" pitchFamily="34" charset="-120"/>
+              </a:rPr>
+              <a:t> la suma. Todo está en </a:t>
+            </a:r>
+            <a:r>
+              <a:rPr lang="es-ES" sz="1400" b="1" i="1" dirty="0">
+                <a:solidFill>
+                  <a:schemeClr val="bg1"/>
+                </a:solidFill>
+                <a:latin typeface="Calibri" pitchFamily="34" charset="0"/>
+                <a:ea typeface="Calibri" pitchFamily="34" charset="-122"/>
+                <a:cs typeface="Calibri" pitchFamily="34" charset="-120"/>
+              </a:rPr>
+              <a:t>clase1/primeros_pasos.R</a:t>
+            </a:r>
+            <a:r>
+              <a:rPr lang="es-ES" sz="1400" b="1" dirty="0">
+                <a:solidFill>
+                  <a:schemeClr val="bg1"/>
+                </a:solidFill>
+                <a:latin typeface="Calibri" pitchFamily="34" charset="0"/>
+                <a:ea typeface="Calibri" pitchFamily="34" charset="-122"/>
+                <a:cs typeface="Calibri" pitchFamily="34" charset="-120"/>
+              </a:rPr>
+              <a:t>.</a:t>
+            </a:r>
             <a:endParaRPr lang="en-US" sz="1300" dirty="0"/>
           </a:p>
         </p:txBody>
       </p:sp>
       <p:pic>
         <p:nvPicPr>
-          <p:cNvPr id="22" name="Picture 21" descr="p4.png"/>
+          <p:cNvPr id="22" name="Picture 21" descr="p3.png"/>
           <p:cNvPicPr>
             <a:picLocks noChangeAspect="1"/>
           </p:cNvPicPr>
@@ -5570,8 +5742,8 @@
         </p:blipFill>
         <p:spPr>
           <a:xfrm>
-            <a:off x="4434840" y="2296950"/>
-            <a:ext cx="4300000" cy="1406100"/>
+            <a:off x="4434840" y="1471757"/>
+            <a:ext cx="4480560" cy="2497165"/>
           </a:xfrm>
           <a:prstGeom prst="rect">
             <a:avLst/>
@@ -5586,6 +5758,495 @@
         </p:spPr>
       </p:pic>
     </p:spTree>
+  </p:cSld>
+  <p:clrMapOvr>
+    <a:masterClrMapping/>
+  </p:clrMapOvr>
+</p:sld>
+</file>
+
+<file path=ppt/slides/slide16.xml><?xml version="1.0" encoding="utf-8"?>
+<p:sld xmlns:a="http://schemas.openxmlformats.org/drawingml/2006/main" xmlns:r="http://schemas.openxmlformats.org/officeDocument/2006/relationships" xmlns:p="http://schemas.openxmlformats.org/presentationml/2006/main">
+  <p:cSld>
+    <p:spTree>
+      <p:nvGrpSpPr>
+        <p:cNvPr id="1" name="">
+          <a:extLst>
+            <a:ext uri="{FF2B5EF4-FFF2-40B4-BE49-F238E27FC236}">
+              <a16:creationId xmlns:a16="http://schemas.microsoft.com/office/drawing/2014/main" id="{AD58CD19-0A05-980C-28BC-1CD69A6E7366}"/>
+            </a:ext>
+          </a:extLst>
+        </p:cNvPr>
+        <p:cNvGrpSpPr/>
+        <p:nvPr/>
+      </p:nvGrpSpPr>
+      <p:grpSpPr>
+        <a:xfrm>
+          <a:off x="0" y="0"/>
+          <a:ext cx="0" cy="0"/>
+          <a:chOff x="0" y="0"/>
+          <a:chExt cx="0" cy="0"/>
+        </a:xfrm>
+      </p:grpSpPr>
+      <p:sp>
+        <p:nvSpPr>
+          <p:cNvPr id="2" name="Text 0">
+            <a:extLst>
+              <a:ext uri="{FF2B5EF4-FFF2-40B4-BE49-F238E27FC236}">
+                <a16:creationId xmlns:a16="http://schemas.microsoft.com/office/drawing/2014/main" id="{88D3ACF3-B150-B335-2F68-0E72F7D93AA7}"/>
+              </a:ext>
+            </a:extLst>
+          </p:cNvPr>
+          <p:cNvSpPr txBox="1"/>
+          <p:nvPr/>
+        </p:nvSpPr>
+        <p:spPr>
+          <a:xfrm>
+            <a:off x="502920" y="320040"/>
+            <a:ext cx="7040880" cy="640080"/>
+          </a:xfrm>
+          <a:prstGeom prst="rect">
+            <a:avLst/>
+          </a:prstGeom>
+          <a:noFill/>
+          <a:ln/>
+        </p:spPr>
+        <p:txBody>
+          <a:bodyPr wrap="square" lIns="0" tIns="0" rIns="0" bIns="0" rtlCol="0" anchor="ctr"/>
+          <a:lstStyle/>
+          <a:p>
+            <a:pPr marL="0" indent="0">
+              <a:buNone/>
+            </a:pPr>
+            <a:r>
+              <a:rPr lang="es-UY" sz="3000" b="1" noProof="0" dirty="0">
+                <a:solidFill>
+                  <a:srgbClr val="2E0A4E"/>
+                </a:solidFill>
+                <a:latin typeface="Oswald" pitchFamily="34" charset="0"/>
+                <a:ea typeface="Oswald" pitchFamily="34" charset="-122"/>
+                <a:cs typeface="Oswald" pitchFamily="34" charset="-120"/>
+              </a:rPr>
+              <a:t>Primer prueba básica</a:t>
+            </a:r>
+            <a:endParaRPr lang="es-UY" sz="3000" noProof="0" dirty="0"/>
+          </a:p>
+        </p:txBody>
+      </p:sp>
+      <p:sp>
+        <p:nvSpPr>
+          <p:cNvPr id="5" name="Shape 3">
+            <a:extLst>
+              <a:ext uri="{FF2B5EF4-FFF2-40B4-BE49-F238E27FC236}">
+                <a16:creationId xmlns:a16="http://schemas.microsoft.com/office/drawing/2014/main" id="{E290BAFC-E6EB-5634-FBC3-CCC9F39E92D9}"/>
+              </a:ext>
+            </a:extLst>
+          </p:cNvPr>
+          <p:cNvSpPr/>
+          <p:nvPr/>
+        </p:nvSpPr>
+        <p:spPr>
+          <a:xfrm>
+            <a:off x="502920" y="1188720"/>
+            <a:ext cx="8138160" cy="3429000"/>
+          </a:xfrm>
+          <a:prstGeom prst="roundRect">
+            <a:avLst>
+              <a:gd name="adj" fmla="val 1600"/>
+            </a:avLst>
+          </a:prstGeom>
+          <a:solidFill>
+            <a:srgbClr val="2E0A4E"/>
+          </a:solidFill>
+          <a:ln w="12700">
+            <a:solidFill>
+              <a:srgbClr val="2E0A4E"/>
+            </a:solidFill>
+            <a:prstDash val="solid"/>
+          </a:ln>
+        </p:spPr>
+        <p:txBody>
+          <a:bodyPr/>
+          <a:lstStyle/>
+          <a:p>
+            <a:endParaRPr lang="es-UY" noProof="0" dirty="0"/>
+          </a:p>
+        </p:txBody>
+      </p:sp>
+      <p:sp>
+        <p:nvSpPr>
+          <p:cNvPr id="6" name="Text 4">
+            <a:extLst>
+              <a:ext uri="{FF2B5EF4-FFF2-40B4-BE49-F238E27FC236}">
+                <a16:creationId xmlns:a16="http://schemas.microsoft.com/office/drawing/2014/main" id="{5DF983FE-53D9-DEAA-65C1-D3415B85244D}"/>
+              </a:ext>
+            </a:extLst>
+          </p:cNvPr>
+          <p:cNvSpPr txBox="1"/>
+          <p:nvPr/>
+        </p:nvSpPr>
+        <p:spPr>
+          <a:xfrm>
+            <a:off x="777240" y="1325880"/>
+            <a:ext cx="7589520" cy="3154680"/>
+          </a:xfrm>
+          <a:prstGeom prst="rect">
+            <a:avLst/>
+          </a:prstGeom>
+          <a:noFill/>
+          <a:ln/>
+        </p:spPr>
+        <p:txBody>
+          <a:bodyPr wrap="square" lIns="0" tIns="0" rIns="0" bIns="0" rtlCol="0" anchor="t"/>
+          <a:lstStyle/>
+          <a:p>
+            <a:pPr marL="171450" indent="-171450">
+              <a:spcAft>
+                <a:spcPts val="200"/>
+              </a:spcAft>
+              <a:buFont typeface="Arial" panose="020B0604020202020204" pitchFamily="34" charset="0"/>
+              <a:buChar char="•"/>
+            </a:pPr>
+            <a:r>
+              <a:rPr lang="es-UY" sz="1200" b="1" noProof="0" dirty="0">
+                <a:solidFill>
+                  <a:srgbClr val="F1E9F8"/>
+                </a:solidFill>
+                <a:latin typeface="Courier New" pitchFamily="34" charset="0"/>
+                <a:ea typeface="Courier New" pitchFamily="34" charset="-122"/>
+                <a:cs typeface="Courier New" pitchFamily="34" charset="-120"/>
+              </a:rPr>
+              <a:t>Abrimos clase1/app.R en Rstudio</a:t>
+            </a:r>
+          </a:p>
+          <a:p>
+            <a:pPr marL="0" indent="0">
+              <a:spcAft>
+                <a:spcPts val="200"/>
+              </a:spcAft>
+              <a:buNone/>
+            </a:pPr>
+            <a:endParaRPr lang="es-UY" sz="1200" dirty="0">
+              <a:solidFill>
+                <a:srgbClr val="F1E9F8"/>
+              </a:solidFill>
+              <a:latin typeface="Courier New" pitchFamily="34" charset="0"/>
+              <a:cs typeface="Courier New" pitchFamily="34" charset="-120"/>
+            </a:endParaRPr>
+          </a:p>
+          <a:p>
+            <a:pPr marL="171450" indent="-171450">
+              <a:spcAft>
+                <a:spcPts val="200"/>
+              </a:spcAft>
+              <a:buFont typeface="Arial" panose="020B0604020202020204" pitchFamily="34" charset="0"/>
+              <a:buChar char="•"/>
+            </a:pPr>
+            <a:r>
+              <a:rPr lang="es-UY" sz="1200" b="1" noProof="0" dirty="0">
+                <a:solidFill>
+                  <a:srgbClr val="F1E9F8"/>
+                </a:solidFill>
+                <a:latin typeface="Courier New" pitchFamily="34" charset="0"/>
+                <a:ea typeface="Courier New" pitchFamily="34" charset="-122"/>
+                <a:cs typeface="Courier New" pitchFamily="34" charset="-120"/>
+              </a:rPr>
+              <a:t>Observamos el código y prestamos especial atención a los comentarios (#...)</a:t>
+            </a:r>
+          </a:p>
+          <a:p>
+            <a:pPr marL="171450" indent="-171450">
+              <a:spcAft>
+                <a:spcPts val="200"/>
+              </a:spcAft>
+              <a:buFont typeface="Arial" panose="020B0604020202020204" pitchFamily="34" charset="0"/>
+              <a:buChar char="•"/>
+            </a:pPr>
+            <a:endParaRPr lang="es-UY" sz="1200" b="1" dirty="0">
+              <a:solidFill>
+                <a:srgbClr val="F1E9F8"/>
+              </a:solidFill>
+              <a:latin typeface="Courier New" pitchFamily="34" charset="0"/>
+              <a:cs typeface="Courier New" pitchFamily="34" charset="-120"/>
+            </a:endParaRPr>
+          </a:p>
+          <a:p>
+            <a:pPr marL="171450" indent="-171450">
+              <a:spcAft>
+                <a:spcPts val="200"/>
+              </a:spcAft>
+              <a:buFont typeface="Arial" panose="020B0604020202020204" pitchFamily="34" charset="0"/>
+              <a:buChar char="•"/>
+            </a:pPr>
+            <a:r>
+              <a:rPr lang="es-UY" sz="1200" b="1" noProof="0" dirty="0">
+                <a:solidFill>
+                  <a:srgbClr val="F1E9F8"/>
+                </a:solidFill>
+                <a:latin typeface="Courier New" pitchFamily="34" charset="0"/>
+                <a:cs typeface="Courier New" pitchFamily="34" charset="-120"/>
+              </a:rPr>
+              <a:t>Ejecutamos la app localmente haciendo clic en “Run App”</a:t>
+            </a:r>
+            <a:endParaRPr lang="es-UY" sz="1200" noProof="0" dirty="0">
+              <a:solidFill>
+                <a:srgbClr val="F1E9F8"/>
+              </a:solidFill>
+              <a:latin typeface="Courier New" pitchFamily="34" charset="0"/>
+              <a:ea typeface="Courier New" pitchFamily="34" charset="-122"/>
+              <a:cs typeface="Courier New" pitchFamily="34" charset="-120"/>
+            </a:endParaRPr>
+          </a:p>
+          <a:p>
+            <a:pPr marL="0" indent="0">
+              <a:spcAft>
+                <a:spcPts val="200"/>
+              </a:spcAft>
+              <a:buNone/>
+            </a:pPr>
+            <a:endParaRPr lang="es-UY" sz="1200" dirty="0">
+              <a:solidFill>
+                <a:srgbClr val="F1E9F8"/>
+              </a:solidFill>
+              <a:latin typeface="Courier New" pitchFamily="34" charset="0"/>
+              <a:ea typeface="Courier New" pitchFamily="34" charset="-122"/>
+              <a:cs typeface="Courier New" pitchFamily="34" charset="-120"/>
+            </a:endParaRPr>
+          </a:p>
+          <a:p>
+            <a:pPr marL="171450" indent="-171450">
+              <a:spcAft>
+                <a:spcPts val="200"/>
+              </a:spcAft>
+              <a:buFont typeface="Arial" panose="020B0604020202020204" pitchFamily="34" charset="0"/>
+              <a:buChar char="•"/>
+            </a:pPr>
+            <a:r>
+              <a:rPr lang="es-UY" sz="1200" b="1" noProof="0" dirty="0">
+                <a:solidFill>
+                  <a:srgbClr val="F1E9F8"/>
+                </a:solidFill>
+                <a:latin typeface="Courier New" pitchFamily="34" charset="0"/>
+                <a:ea typeface="Courier New" pitchFamily="34" charset="-122"/>
+                <a:cs typeface="Courier New" pitchFamily="34" charset="-120"/>
+              </a:rPr>
+              <a:t>En caso de tener avisos o errores, revisar la consola y leer el texto que se imprimió allí.</a:t>
+            </a:r>
+          </a:p>
+          <a:p>
+            <a:pPr marL="171450" indent="-171450">
+              <a:spcAft>
+                <a:spcPts val="200"/>
+              </a:spcAft>
+              <a:buFont typeface="Arial" panose="020B0604020202020204" pitchFamily="34" charset="0"/>
+              <a:buChar char="•"/>
+            </a:pPr>
+            <a:endParaRPr lang="es-UY" sz="1200" b="1" dirty="0">
+              <a:solidFill>
+                <a:srgbClr val="F1E9F8"/>
+              </a:solidFill>
+              <a:latin typeface="Courier New" pitchFamily="34" charset="0"/>
+              <a:cs typeface="Courier New" pitchFamily="34" charset="-120"/>
+            </a:endParaRPr>
+          </a:p>
+          <a:p>
+            <a:pPr marL="171450" indent="-171450">
+              <a:spcAft>
+                <a:spcPts val="200"/>
+              </a:spcAft>
+              <a:buFont typeface="Arial" panose="020B0604020202020204" pitchFamily="34" charset="0"/>
+              <a:buChar char="•"/>
+            </a:pPr>
+            <a:r>
+              <a:rPr lang="es-UY" sz="1200" b="1" noProof="0" dirty="0">
+                <a:solidFill>
+                  <a:srgbClr val="F1E9F8"/>
+                </a:solidFill>
+                <a:latin typeface="Courier New" pitchFamily="34" charset="0"/>
+                <a:cs typeface="Courier New" pitchFamily="34" charset="-120"/>
+              </a:rPr>
+              <a:t>Primero revisamos si funciona la aplicación y contrastamos los datos mostrados con </a:t>
+            </a:r>
+            <a:r>
+              <a:rPr lang="es-UY" sz="1200" b="1" dirty="0">
+                <a:solidFill>
+                  <a:srgbClr val="F1E9F8"/>
+                </a:solidFill>
+                <a:latin typeface="Courier New" pitchFamily="34" charset="0"/>
+                <a:cs typeface="Courier New" pitchFamily="34" charset="-120"/>
+              </a:rPr>
+              <a:t>nuestra base de datos original. Después vemos, pieza por pieza, cómo está construida.</a:t>
+            </a:r>
+            <a:endParaRPr lang="es-UY" sz="1200" b="1" noProof="0" dirty="0"/>
+          </a:p>
+        </p:txBody>
+      </p:sp>
+    </p:spTree>
+    <p:extLst>
+      <p:ext uri="{BB962C8B-B14F-4D97-AF65-F5344CB8AC3E}">
+        <p14:creationId xmlns:p14="http://schemas.microsoft.com/office/powerpoint/2010/main" val="3901877764"/>
+      </p:ext>
+    </p:extLst>
+  </p:cSld>
+  <p:clrMapOvr>
+    <a:masterClrMapping/>
+  </p:clrMapOvr>
+</p:sld>
+</file>
+
+<file path=ppt/slides/slide17.xml><?xml version="1.0" encoding="utf-8"?>
+<p:sld xmlns:a="http://schemas.openxmlformats.org/drawingml/2006/main" xmlns:r="http://schemas.openxmlformats.org/officeDocument/2006/relationships" xmlns:p="http://schemas.openxmlformats.org/presentationml/2006/main">
+  <p:cSld>
+    <p:spTree>
+      <p:nvGrpSpPr>
+        <p:cNvPr id="1" name="">
+          <a:extLst>
+            <a:ext uri="{FF2B5EF4-FFF2-40B4-BE49-F238E27FC236}">
+              <a16:creationId xmlns:a16="http://schemas.microsoft.com/office/drawing/2014/main" id="{5C2E6952-D65A-228F-FF92-58532377F0A1}"/>
+            </a:ext>
+          </a:extLst>
+        </p:cNvPr>
+        <p:cNvGrpSpPr/>
+        <p:nvPr/>
+      </p:nvGrpSpPr>
+      <p:grpSpPr>
+        <a:xfrm>
+          <a:off x="0" y="0"/>
+          <a:ext cx="0" cy="0"/>
+          <a:chOff x="0" y="0"/>
+          <a:chExt cx="0" cy="0"/>
+        </a:xfrm>
+      </p:grpSpPr>
+      <p:sp>
+        <p:nvSpPr>
+          <p:cNvPr id="2" name="Text 0">
+            <a:extLst>
+              <a:ext uri="{FF2B5EF4-FFF2-40B4-BE49-F238E27FC236}">
+                <a16:creationId xmlns:a16="http://schemas.microsoft.com/office/drawing/2014/main" id="{0EEFDE8D-D2BB-385F-94BB-42328D95E4C4}"/>
+              </a:ext>
+            </a:extLst>
+          </p:cNvPr>
+          <p:cNvSpPr txBox="1"/>
+          <p:nvPr/>
+        </p:nvSpPr>
+        <p:spPr>
+          <a:xfrm>
+            <a:off x="502920" y="320040"/>
+            <a:ext cx="7040880" cy="640080"/>
+          </a:xfrm>
+          <a:prstGeom prst="rect">
+            <a:avLst/>
+          </a:prstGeom>
+          <a:noFill/>
+          <a:ln/>
+        </p:spPr>
+        <p:txBody>
+          <a:bodyPr wrap="square" lIns="0" tIns="0" rIns="0" bIns="0" rtlCol="0" anchor="ctr"/>
+          <a:lstStyle/>
+          <a:p>
+            <a:pPr marL="0" indent="0">
+              <a:buNone/>
+            </a:pPr>
+            <a:r>
+              <a:rPr lang="es-UY" sz="3000" b="1" noProof="0" dirty="0">
+                <a:solidFill>
+                  <a:srgbClr val="2E0A4E"/>
+                </a:solidFill>
+                <a:latin typeface="Oswald" pitchFamily="34" charset="0"/>
+                <a:ea typeface="Oswald" pitchFamily="34" charset="-122"/>
+                <a:cs typeface="Oswald" pitchFamily="34" charset="-120"/>
+              </a:rPr>
+              <a:t>Primer prueba básica</a:t>
+            </a:r>
+            <a:endParaRPr lang="es-UY" sz="3000" noProof="0" dirty="0"/>
+          </a:p>
+        </p:txBody>
+      </p:sp>
+      <p:sp>
+        <p:nvSpPr>
+          <p:cNvPr id="5" name="Shape 3">
+            <a:extLst>
+              <a:ext uri="{FF2B5EF4-FFF2-40B4-BE49-F238E27FC236}">
+                <a16:creationId xmlns:a16="http://schemas.microsoft.com/office/drawing/2014/main" id="{42B39C4F-F6CB-7289-3796-A9349E70E62F}"/>
+              </a:ext>
+            </a:extLst>
+          </p:cNvPr>
+          <p:cNvSpPr/>
+          <p:nvPr/>
+        </p:nvSpPr>
+        <p:spPr>
+          <a:xfrm>
+            <a:off x="502920" y="1394460"/>
+            <a:ext cx="8138160" cy="3429000"/>
+          </a:xfrm>
+          <a:prstGeom prst="roundRect">
+            <a:avLst>
+              <a:gd name="adj" fmla="val 1600"/>
+            </a:avLst>
+          </a:prstGeom>
+          <a:solidFill>
+            <a:srgbClr val="2E0A4E"/>
+          </a:solidFill>
+          <a:ln w="12700">
+            <a:solidFill>
+              <a:srgbClr val="2E0A4E"/>
+            </a:solidFill>
+            <a:prstDash val="solid"/>
+          </a:ln>
+        </p:spPr>
+        <p:txBody>
+          <a:bodyPr/>
+          <a:lstStyle/>
+          <a:p>
+            <a:endParaRPr lang="es-UY" noProof="0" dirty="0"/>
+          </a:p>
+        </p:txBody>
+      </p:sp>
+      <p:pic>
+        <p:nvPicPr>
+          <p:cNvPr id="4" name="Picture 3">
+            <a:extLst>
+              <a:ext uri="{FF2B5EF4-FFF2-40B4-BE49-F238E27FC236}">
+                <a16:creationId xmlns:a16="http://schemas.microsoft.com/office/drawing/2014/main" id="{FE7350AD-56A0-2E40-8E5D-B8E071AEABC2}"/>
+              </a:ext>
+            </a:extLst>
+          </p:cNvPr>
+          <p:cNvPicPr>
+            <a:picLocks noChangeAspect="1"/>
+          </p:cNvPicPr>
+          <p:nvPr/>
+        </p:nvPicPr>
+        <p:blipFill>
+          <a:blip r:embed="rId3"/>
+          <a:srcRect b="4251"/>
+          <a:stretch>
+            <a:fillRect/>
+          </a:stretch>
+        </p:blipFill>
+        <p:spPr>
+          <a:xfrm>
+            <a:off x="1296312" y="1079696"/>
+            <a:ext cx="6368495" cy="3429000"/>
+          </a:xfrm>
+          <a:prstGeom prst="rect">
+            <a:avLst/>
+          </a:prstGeom>
+          <a:ln w="76200">
+            <a:solidFill>
+              <a:schemeClr val="accent5">
+                <a:lumMod val="60000"/>
+                <a:lumOff val="40000"/>
+              </a:schemeClr>
+            </a:solidFill>
+          </a:ln>
+        </p:spPr>
+      </p:pic>
+    </p:spTree>
+    <p:extLst>
+      <p:ext uri="{BB962C8B-B14F-4D97-AF65-F5344CB8AC3E}">
+        <p14:creationId xmlns:p14="http://schemas.microsoft.com/office/powerpoint/2010/main" val="2543718561"/>
+      </p:ext>
+    </p:extLst>
   </p:cSld>
   <p:clrMapOvr>
     <a:masterClrMapping/>
@@ -5620,7 +6281,13 @@
       </p:grpSpPr>
       <p:sp>
         <p:nvSpPr>
-          <p:cNvPr id="3" name="Text 0"/>
+          <p:cNvPr id="2" name="Text 0">
+            <a:extLst>
+              <a:ext uri="{FF2B5EF4-FFF2-40B4-BE49-F238E27FC236}">
+                <a16:creationId xmlns:a16="http://schemas.microsoft.com/office/drawing/2014/main" id="{21E0B84E-B772-A594-B980-A7B918F749C6}"/>
+              </a:ext>
+            </a:extLst>
+          </p:cNvPr>
           <p:cNvSpPr txBox="1"/>
           <p:nvPr/>
         </p:nvSpPr>
@@ -5628,6 +6295,88 @@
           <a:xfrm>
             <a:off x="502920" y="320040"/>
             <a:ext cx="7040880" cy="640080"/>
+          </a:xfrm>
+          <a:prstGeom prst="rect">
+            <a:avLst/>
+          </a:prstGeom>
+          <a:noFill/>
+          <a:ln/>
+        </p:spPr>
+        <p:txBody>
+          <a:bodyPr wrap="square" lIns="0" tIns="0" rIns="0" bIns="0" rtlCol="0" anchor="ctr"/>
+          <a:lstStyle/>
+          <a:p>
+            <a:r>
+              <a:rPr lang="en-US" sz="3000" b="1" dirty="0">
+                <a:solidFill>
+                  <a:srgbClr val="2E0A4E"/>
+                </a:solidFill>
+                <a:latin typeface="Oswald" pitchFamily="34" charset="0"/>
+                <a:ea typeface="Oswald" pitchFamily="34" charset="-122"/>
+                <a:cs typeface="Oswald" pitchFamily="34" charset="-120"/>
+              </a:rPr>
+              <a:t>Paso a paso (5)</a:t>
+            </a:r>
+            <a:endParaRPr lang="en-US" sz="3000" dirty="0"/>
+          </a:p>
+        </p:txBody>
+      </p:sp>
+      <p:sp>
+        <p:nvSpPr>
+          <p:cNvPr id="11" name="Shape 9">
+            <a:extLst>
+              <a:ext uri="{FF2B5EF4-FFF2-40B4-BE49-F238E27FC236}">
+                <a16:creationId xmlns:a16="http://schemas.microsoft.com/office/drawing/2014/main" id="{8584C834-90F2-8AA8-B328-3643E4CCE677}"/>
+              </a:ext>
+            </a:extLst>
+          </p:cNvPr>
+          <p:cNvSpPr/>
+          <p:nvPr/>
+        </p:nvSpPr>
+        <p:spPr>
+          <a:xfrm>
+            <a:off x="439616" y="1188720"/>
+            <a:ext cx="2560320" cy="1463040"/>
+          </a:xfrm>
+          <a:prstGeom prst="roundRect">
+            <a:avLst>
+              <a:gd name="adj" fmla="val 2143"/>
+            </a:avLst>
+          </a:prstGeom>
+          <a:solidFill>
+            <a:srgbClr val="5A189A"/>
+          </a:solidFill>
+          <a:ln w="12700">
+            <a:solidFill>
+              <a:srgbClr val="5A189A"/>
+            </a:solidFill>
+            <a:prstDash val="solid"/>
+          </a:ln>
+        </p:spPr>
+        <p:txBody>
+          <a:bodyPr/>
+          <a:lstStyle/>
+          <a:p>
+            <a:endParaRPr lang="en-US"/>
+          </a:p>
+        </p:txBody>
+      </p:sp>
+      <p:sp>
+        <p:nvSpPr>
+          <p:cNvPr id="12" name="Text 10">
+            <a:extLst>
+              <a:ext uri="{FF2B5EF4-FFF2-40B4-BE49-F238E27FC236}">
+                <a16:creationId xmlns:a16="http://schemas.microsoft.com/office/drawing/2014/main" id="{3D0787E2-7C7C-7A9C-ED72-1B8D5BA244E4}"/>
+              </a:ext>
+            </a:extLst>
+          </p:cNvPr>
+          <p:cNvSpPr txBox="1"/>
+          <p:nvPr/>
+        </p:nvSpPr>
+        <p:spPr>
+          <a:xfrm>
+            <a:off x="668216" y="1256068"/>
+            <a:ext cx="2103120" cy="502920"/>
           </a:xfrm>
           <a:prstGeom prst="rect">
             <a:avLst/>
@@ -5643,89 +6392,93 @@
               <a:buNone/>
             </a:pPr>
             <a:r>
-              <a:rPr lang="en-US" sz="3000" b="1" dirty="0">
-                <a:solidFill>
-                  <a:srgbClr val="2E0A4E"/>
+              <a:rPr lang="en-US" sz="1600" b="1" dirty="0">
+                <a:solidFill>
+                  <a:srgbClr val="FFFFFF"/>
                 </a:solidFill>
                 <a:latin typeface="Oswald" pitchFamily="34" charset="0"/>
                 <a:ea typeface="Oswald" pitchFamily="34" charset="-122"/>
                 <a:cs typeface="Oswald" pitchFamily="34" charset="-120"/>
               </a:rPr>
-              <a:t>Componentes a </a:t>
-            </a:r>
-            <a:r>
-              <a:rPr lang="en-US" sz="3000" b="1" dirty="0" err="1">
-                <a:solidFill>
-                  <a:srgbClr val="2E0A4E"/>
-                </a:solidFill>
-                <a:latin typeface="Oswald" pitchFamily="34" charset="0"/>
-                <a:ea typeface="Oswald" pitchFamily="34" charset="-122"/>
-                <a:cs typeface="Oswald" pitchFamily="34" charset="-120"/>
-              </a:rPr>
-              <a:t>observar</a:t>
-            </a:r>
-            <a:r>
-              <a:rPr lang="en-US" sz="3000" b="1" dirty="0">
-                <a:solidFill>
-                  <a:srgbClr val="2E0A4E"/>
-                </a:solidFill>
-                <a:latin typeface="Oswald" pitchFamily="34" charset="0"/>
-                <a:ea typeface="Oswald" pitchFamily="34" charset="-122"/>
-                <a:cs typeface="Oswald" pitchFamily="34" charset="-120"/>
-              </a:rPr>
-              <a:t> en la </a:t>
-            </a:r>
-            <a:r>
-              <a:rPr lang="en-US" sz="3000" b="1" dirty="0" err="1">
-                <a:solidFill>
-                  <a:srgbClr val="2E0A4E"/>
-                </a:solidFill>
-                <a:latin typeface="Oswald" pitchFamily="34" charset="0"/>
-                <a:ea typeface="Oswald" pitchFamily="34" charset="-122"/>
-                <a:cs typeface="Oswald" pitchFamily="34" charset="-120"/>
-              </a:rPr>
-              <a:t>replicación</a:t>
-            </a:r>
-            <a:r>
-              <a:rPr lang="en-US" sz="3000" b="1" dirty="0">
-                <a:solidFill>
-                  <a:srgbClr val="2E0A4E"/>
-                </a:solidFill>
-                <a:latin typeface="Oswald" pitchFamily="34" charset="0"/>
-                <a:ea typeface="Oswald" pitchFamily="34" charset="-122"/>
-                <a:cs typeface="Oswald" pitchFamily="34" charset="-120"/>
-              </a:rPr>
-              <a:t> </a:t>
-            </a:r>
-            <a:endParaRPr lang="en-US" sz="3000" dirty="0"/>
-          </a:p>
-        </p:txBody>
-      </p:sp>
-      <p:sp>
-        <p:nvSpPr>
-          <p:cNvPr id="4" name="Shape 3"/>
+              <a:t>OBJETIVO 5</a:t>
+            </a:r>
+            <a:endParaRPr lang="en-US" sz="1600" dirty="0"/>
+          </a:p>
+        </p:txBody>
+      </p:sp>
+      <p:sp>
+        <p:nvSpPr>
+          <p:cNvPr id="13" name="Text 11">
+            <a:extLst>
+              <a:ext uri="{FF2B5EF4-FFF2-40B4-BE49-F238E27FC236}">
+                <a16:creationId xmlns:a16="http://schemas.microsoft.com/office/drawing/2014/main" id="{0C2592C3-39BA-DB09-D0F1-BF73ED6DEC99}"/>
+              </a:ext>
+            </a:extLst>
+          </p:cNvPr>
+          <p:cNvSpPr txBox="1"/>
+          <p:nvPr/>
+        </p:nvSpPr>
+        <p:spPr>
+          <a:xfrm>
+            <a:off x="668216" y="1734572"/>
+            <a:ext cx="2103120" cy="716926"/>
+          </a:xfrm>
+          <a:prstGeom prst="rect">
+            <a:avLst/>
+          </a:prstGeom>
+          <a:noFill/>
+          <a:ln/>
+        </p:spPr>
+        <p:txBody>
+          <a:bodyPr wrap="square" lIns="0" tIns="0" rIns="0" bIns="0" rtlCol="0" anchor="t"/>
+          <a:lstStyle/>
+          <a:p>
+            <a:r>
+              <a:rPr lang="es-ES" sz="1400" dirty="0">
+                <a:solidFill>
+                  <a:schemeClr val="bg1"/>
+                </a:solidFill>
+                <a:latin typeface="Calibri" pitchFamily="34" charset="0"/>
+                <a:ea typeface="Calibri" pitchFamily="34" charset="-122"/>
+                <a:cs typeface="Calibri" pitchFamily="34" charset="-120"/>
+              </a:rPr>
+              <a:t>La interfaz (ui)</a:t>
+            </a:r>
+          </a:p>
+        </p:txBody>
+      </p:sp>
+      <p:sp>
+        <p:nvSpPr>
+          <p:cNvPr id="15" name="Shape 9">
+            <a:extLst>
+              <a:ext uri="{FF2B5EF4-FFF2-40B4-BE49-F238E27FC236}">
+                <a16:creationId xmlns:a16="http://schemas.microsoft.com/office/drawing/2014/main" id="{ADB729CB-A987-663A-1058-A842556E3C9E}"/>
+              </a:ext>
+            </a:extLst>
+          </p:cNvPr>
           <p:cNvSpPr/>
           <p:nvPr/>
         </p:nvSpPr>
         <p:spPr>
           <a:xfrm>
-            <a:off x="502920" y="1188720"/>
-            <a:ext cx="3954780" cy="585216"/>
+            <a:off x="439615" y="2719107"/>
+            <a:ext cx="3773659" cy="2281957"/>
           </a:xfrm>
           <a:prstGeom prst="roundRect">
             <a:avLst>
-              <a:gd name="adj" fmla="val 7813"/>
+              <a:gd name="adj" fmla="val 2143"/>
             </a:avLst>
           </a:prstGeom>
           <a:solidFill>
             <a:schemeClr val="accent1">
-              <a:lumMod val="20000"/>
-              <a:lumOff val="80000"/>
+              <a:lumMod val="75000"/>
             </a:schemeClr>
           </a:solidFill>
           <a:ln w="12700">
             <a:solidFill>
-              <a:srgbClr val="F4ECFB"/>
+              <a:schemeClr val="accent1">
+                <a:lumMod val="75000"/>
+              </a:schemeClr>
             </a:solidFill>
             <a:prstDash val="solid"/>
           </a:ln>
@@ -5740,14 +6493,20 @@
       </p:sp>
       <p:sp>
         <p:nvSpPr>
-          <p:cNvPr id="5" name="Text 4"/>
+          <p:cNvPr id="17" name="Text 11">
+            <a:extLst>
+              <a:ext uri="{FF2B5EF4-FFF2-40B4-BE49-F238E27FC236}">
+                <a16:creationId xmlns:a16="http://schemas.microsoft.com/office/drawing/2014/main" id="{90C1F140-6606-DACA-D829-EF5414EB787C}"/>
+              </a:ext>
+            </a:extLst>
+          </p:cNvPr>
           <p:cNvSpPr txBox="1"/>
           <p:nvPr/>
         </p:nvSpPr>
         <p:spPr>
           <a:xfrm>
-            <a:off x="640080" y="1207008"/>
-            <a:ext cx="3680460" cy="292608"/>
+            <a:off x="647115" y="2880360"/>
+            <a:ext cx="3369212" cy="716926"/>
           </a:xfrm>
           <a:prstGeom prst="rect">
             <a:avLst/>
@@ -5756,871 +6515,50 @@
           <a:ln/>
         </p:spPr>
         <p:txBody>
-          <a:bodyPr wrap="square" lIns="0" tIns="0" rIns="0" bIns="0" rtlCol="0" anchor="ctr"/>
-          <a:lstStyle/>
-          <a:p>
-            <a:pPr marL="0" indent="0">
-              <a:buNone/>
-            </a:pPr>
-            <a:r>
-              <a:rPr lang="en-US" sz="1050" b="1" dirty="0">
-                <a:solidFill>
-                  <a:srgbClr val="5A189A"/>
-                </a:solidFill>
-                <a:latin typeface="Courier New" pitchFamily="34" charset="0"/>
-                <a:ea typeface="Courier New" pitchFamily="34" charset="-122"/>
-                <a:cs typeface="Courier New" pitchFamily="34" charset="-120"/>
-              </a:rPr>
-              <a:t>objeto &lt;- valor</a:t>
-            </a:r>
-            <a:endParaRPr lang="en-US" sz="1050" dirty="0"/>
-          </a:p>
-        </p:txBody>
-      </p:sp>
-      <p:sp>
-        <p:nvSpPr>
-          <p:cNvPr id="6" name="Text 5"/>
-          <p:cNvSpPr txBox="1"/>
-          <p:nvPr/>
-        </p:nvSpPr>
-        <p:spPr>
-          <a:xfrm>
-            <a:off x="640080" y="1469624"/>
-            <a:ext cx="3680460" cy="292608"/>
+          <a:bodyPr wrap="square" lIns="0" tIns="0" rIns="0" bIns="0" rtlCol="0" anchor="t"/>
+          <a:lstStyle/>
+          <a:p>
+            <a:endParaRPr lang="en-US" sz="1300" dirty="0"/>
+          </a:p>
+          <a:p>
+            <a:endParaRPr lang="en-US" sz="1300" dirty="0"/>
+          </a:p>
+          <a:p>
+            <a:endParaRPr lang="en-US" sz="1300" dirty="0"/>
+          </a:p>
+        </p:txBody>
+      </p:sp>
+      <p:pic>
+        <p:nvPicPr>
+          <p:cNvPr id="22" name="Picture 21" descr="p4.png"/>
+          <p:cNvPicPr>
+            <a:picLocks noChangeAspect="1"/>
+          </p:cNvPicPr>
+          <p:nvPr/>
+        </p:nvPicPr>
+        <p:blipFill>
+          <a:blip r:embed="rId2"/>
+          <a:stretch>
+            <a:fillRect/>
+          </a:stretch>
+        </p:blipFill>
+        <p:spPr>
+          <a:xfrm>
+            <a:off x="4434840" y="1979662"/>
+            <a:ext cx="4300000" cy="2040677"/>
           </a:xfrm>
           <a:prstGeom prst="rect">
             <a:avLst/>
           </a:prstGeom>
-          <a:noFill/>
-          <a:ln/>
-        </p:spPr>
-        <p:txBody>
-          <a:bodyPr wrap="square" lIns="0" tIns="0" rIns="0" bIns="0" rtlCol="0" anchor="ctr"/>
-          <a:lstStyle/>
-          <a:p>
-            <a:pPr marL="0" indent="0">
-              <a:buNone/>
-            </a:pPr>
-            <a:r>
-              <a:rPr lang="en-US" sz="1050" dirty="0">
-                <a:solidFill>
-                  <a:srgbClr val="2E0A4E"/>
-                </a:solidFill>
-                <a:latin typeface="Calibri" pitchFamily="34" charset="0"/>
-                <a:ea typeface="Calibri" pitchFamily="34" charset="-122"/>
-                <a:cs typeface="Calibri" pitchFamily="34" charset="-120"/>
-              </a:rPr>
-              <a:t>Guarda un valor con un nombre.</a:t>
-            </a:r>
-            <a:endParaRPr lang="en-US" sz="1050" dirty="0"/>
-          </a:p>
-        </p:txBody>
-      </p:sp>
-      <p:sp>
-        <p:nvSpPr>
-          <p:cNvPr id="7" name="Shape 6"/>
-          <p:cNvSpPr/>
-          <p:nvPr/>
-        </p:nvSpPr>
-        <p:spPr>
-          <a:xfrm>
-            <a:off x="4675751" y="1609344"/>
-            <a:ext cx="3954780" cy="585216"/>
-          </a:xfrm>
-          <a:prstGeom prst="roundRect">
-            <a:avLst>
-              <a:gd name="adj" fmla="val 7813"/>
-            </a:avLst>
-          </a:prstGeom>
-          <a:solidFill>
-            <a:schemeClr val="accent4">
-              <a:lumMod val="20000"/>
-              <a:lumOff val="80000"/>
-            </a:schemeClr>
-          </a:solidFill>
-          <a:ln w="12700">
+          <a:ln w="76200">
             <a:solidFill>
-              <a:srgbClr val="F4ECFB"/>
+              <a:schemeClr val="accent1">
+                <a:lumMod val="75000"/>
+              </a:schemeClr>
             </a:solidFill>
-            <a:prstDash val="solid"/>
           </a:ln>
         </p:spPr>
-        <p:txBody>
-          <a:bodyPr/>
-          <a:lstStyle/>
-          <a:p>
-            <a:endParaRPr lang="en-US"/>
-          </a:p>
-        </p:txBody>
-      </p:sp>
-      <p:sp>
-        <p:nvSpPr>
-          <p:cNvPr id="8" name="Text 7"/>
-          <p:cNvSpPr txBox="1"/>
-          <p:nvPr/>
-        </p:nvSpPr>
-        <p:spPr>
-          <a:xfrm>
-            <a:off x="4812911" y="1627632"/>
-            <a:ext cx="3680460" cy="292608"/>
-          </a:xfrm>
-          <a:prstGeom prst="rect">
-            <a:avLst/>
-          </a:prstGeom>
-          <a:noFill/>
-          <a:ln/>
-        </p:spPr>
-        <p:txBody>
-          <a:bodyPr wrap="square" lIns="0" tIns="0" rIns="0" bIns="0" rtlCol="0" anchor="ctr"/>
-          <a:lstStyle/>
-          <a:p>
-            <a:pPr marL="0" indent="0">
-              <a:buNone/>
-            </a:pPr>
-            <a:r>
-              <a:rPr lang="en-US" sz="1050" b="1" dirty="0">
-                <a:solidFill>
-                  <a:srgbClr val="5A189A"/>
-                </a:solidFill>
-                <a:latin typeface="Courier New" pitchFamily="34" charset="0"/>
-                <a:ea typeface="Courier New" pitchFamily="34" charset="-122"/>
-                <a:cs typeface="Courier New" pitchFamily="34" charset="-120"/>
-              </a:rPr>
-              <a:t>c() y vector[1]</a:t>
-            </a:r>
-            <a:endParaRPr lang="en-US" sz="1050" dirty="0"/>
-          </a:p>
-        </p:txBody>
-      </p:sp>
-      <p:sp>
-        <p:nvSpPr>
-          <p:cNvPr id="9" name="Text 8"/>
-          <p:cNvSpPr txBox="1"/>
-          <p:nvPr/>
-        </p:nvSpPr>
-        <p:spPr>
-          <a:xfrm>
-            <a:off x="4812911" y="1890248"/>
-            <a:ext cx="3680460" cy="292608"/>
-          </a:xfrm>
-          <a:prstGeom prst="rect">
-            <a:avLst/>
-          </a:prstGeom>
-          <a:noFill/>
-          <a:ln/>
-        </p:spPr>
-        <p:txBody>
-          <a:bodyPr wrap="square" lIns="0" tIns="0" rIns="0" bIns="0" rtlCol="0" anchor="ctr"/>
-          <a:lstStyle/>
-          <a:p>
-            <a:pPr marL="0" indent="0">
-              <a:buNone/>
-            </a:pPr>
-            <a:r>
-              <a:rPr lang="en-US" sz="1050" dirty="0">
-                <a:solidFill>
-                  <a:srgbClr val="2E0A4E"/>
-                </a:solidFill>
-                <a:latin typeface="Calibri" pitchFamily="34" charset="0"/>
-                <a:ea typeface="Calibri" pitchFamily="34" charset="-122"/>
-                <a:cs typeface="Calibri" pitchFamily="34" charset="-120"/>
-              </a:rPr>
-              <a:t>Varios valores juntos, y cómo elegir uno.</a:t>
-            </a:r>
-            <a:endParaRPr lang="en-US" sz="1050" dirty="0"/>
-          </a:p>
-        </p:txBody>
-      </p:sp>
-      <p:sp>
-        <p:nvSpPr>
-          <p:cNvPr id="10" name="Shape 9"/>
-          <p:cNvSpPr/>
-          <p:nvPr/>
-        </p:nvSpPr>
-        <p:spPr>
-          <a:xfrm>
-            <a:off x="502920" y="1847088"/>
-            <a:ext cx="3954780" cy="585216"/>
-          </a:xfrm>
-          <a:prstGeom prst="roundRect">
-            <a:avLst>
-              <a:gd name="adj" fmla="val 7813"/>
-            </a:avLst>
-          </a:prstGeom>
-          <a:solidFill>
-            <a:schemeClr val="accent1">
-              <a:lumMod val="20000"/>
-              <a:lumOff val="80000"/>
-            </a:schemeClr>
-          </a:solidFill>
-          <a:ln w="12700">
-            <a:solidFill>
-              <a:srgbClr val="F4ECFB"/>
-            </a:solidFill>
-            <a:prstDash val="solid"/>
-          </a:ln>
-        </p:spPr>
-        <p:txBody>
-          <a:bodyPr/>
-          <a:lstStyle/>
-          <a:p>
-            <a:endParaRPr lang="en-US"/>
-          </a:p>
-        </p:txBody>
-      </p:sp>
-      <p:sp>
-        <p:nvSpPr>
-          <p:cNvPr id="11" name="Text 10"/>
-          <p:cNvSpPr txBox="1"/>
-          <p:nvPr/>
-        </p:nvSpPr>
-        <p:spPr>
-          <a:xfrm>
-            <a:off x="640080" y="1865376"/>
-            <a:ext cx="3680460" cy="292608"/>
-          </a:xfrm>
-          <a:prstGeom prst="rect">
-            <a:avLst/>
-          </a:prstGeom>
-          <a:noFill/>
-          <a:ln/>
-        </p:spPr>
-        <p:txBody>
-          <a:bodyPr wrap="square" lIns="0" tIns="0" rIns="0" bIns="0" rtlCol="0" anchor="ctr"/>
-          <a:lstStyle/>
-          <a:p>
-            <a:pPr marL="0" indent="0">
-              <a:buNone/>
-            </a:pPr>
-            <a:r>
-              <a:rPr lang="en-US" sz="1050" b="1" dirty="0">
-                <a:solidFill>
-                  <a:srgbClr val="5A189A"/>
-                </a:solidFill>
-                <a:latin typeface="Courier New" pitchFamily="34" charset="0"/>
-                <a:ea typeface="Courier New" pitchFamily="34" charset="-122"/>
-                <a:cs typeface="Courier New" pitchFamily="34" charset="-120"/>
-              </a:rPr>
-              <a:t>sum(), mean(), paste0()</a:t>
-            </a:r>
-            <a:endParaRPr lang="en-US" sz="1050" dirty="0"/>
-          </a:p>
-        </p:txBody>
-      </p:sp>
-      <p:sp>
-        <p:nvSpPr>
-          <p:cNvPr id="12" name="Text 11"/>
-          <p:cNvSpPr txBox="1"/>
-          <p:nvPr/>
-        </p:nvSpPr>
-        <p:spPr>
-          <a:xfrm>
-            <a:off x="640080" y="2127992"/>
-            <a:ext cx="3680460" cy="292608"/>
-          </a:xfrm>
-          <a:prstGeom prst="rect">
-            <a:avLst/>
-          </a:prstGeom>
-          <a:noFill/>
-          <a:ln/>
-        </p:spPr>
-        <p:txBody>
-          <a:bodyPr wrap="square" lIns="0" tIns="0" rIns="0" bIns="0" rtlCol="0" anchor="ctr"/>
-          <a:lstStyle/>
-          <a:p>
-            <a:pPr marL="0" indent="0">
-              <a:buNone/>
-            </a:pPr>
-            <a:r>
-              <a:rPr lang="en-US" sz="1050" dirty="0">
-                <a:solidFill>
-                  <a:srgbClr val="2E0A4E"/>
-                </a:solidFill>
-                <a:latin typeface="Calibri" pitchFamily="34" charset="0"/>
-                <a:ea typeface="Calibri" pitchFamily="34" charset="-122"/>
-                <a:cs typeface="Calibri" pitchFamily="34" charset="-120"/>
-              </a:rPr>
-              <a:t>Funciones, reciben algo y devuelven un resultado.</a:t>
-            </a:r>
-            <a:endParaRPr lang="en-US" sz="1050" dirty="0"/>
-          </a:p>
-        </p:txBody>
-      </p:sp>
-      <p:sp>
-        <p:nvSpPr>
-          <p:cNvPr id="13" name="Shape 12"/>
-          <p:cNvSpPr/>
-          <p:nvPr/>
-        </p:nvSpPr>
-        <p:spPr>
-          <a:xfrm>
-            <a:off x="4675751" y="2267712"/>
-            <a:ext cx="3954780" cy="585216"/>
-          </a:xfrm>
-          <a:prstGeom prst="roundRect">
-            <a:avLst>
-              <a:gd name="adj" fmla="val 7813"/>
-            </a:avLst>
-          </a:prstGeom>
-          <a:solidFill>
-            <a:schemeClr val="accent4">
-              <a:lumMod val="20000"/>
-              <a:lumOff val="80000"/>
-            </a:schemeClr>
-          </a:solidFill>
-          <a:ln w="12700">
-            <a:solidFill>
-              <a:srgbClr val="F4ECFB"/>
-            </a:solidFill>
-            <a:prstDash val="solid"/>
-          </a:ln>
-        </p:spPr>
-        <p:txBody>
-          <a:bodyPr/>
-          <a:lstStyle/>
-          <a:p>
-            <a:endParaRPr lang="en-US"/>
-          </a:p>
-        </p:txBody>
-      </p:sp>
-      <p:sp>
-        <p:nvSpPr>
-          <p:cNvPr id="14" name="Text 13"/>
-          <p:cNvSpPr txBox="1"/>
-          <p:nvPr/>
-        </p:nvSpPr>
-        <p:spPr>
-          <a:xfrm>
-            <a:off x="4812911" y="2286000"/>
-            <a:ext cx="3680460" cy="292608"/>
-          </a:xfrm>
-          <a:prstGeom prst="rect">
-            <a:avLst/>
-          </a:prstGeom>
-          <a:noFill/>
-          <a:ln/>
-        </p:spPr>
-        <p:txBody>
-          <a:bodyPr wrap="square" lIns="0" tIns="0" rIns="0" bIns="0" rtlCol="0" anchor="ctr"/>
-          <a:lstStyle/>
-          <a:p>
-            <a:pPr marL="0" indent="0">
-              <a:buNone/>
-            </a:pPr>
-            <a:r>
-              <a:rPr lang="en-US" sz="1050" b="1" dirty="0">
-                <a:solidFill>
-                  <a:srgbClr val="5A189A"/>
-                </a:solidFill>
-                <a:latin typeface="Courier New" pitchFamily="34" charset="0"/>
-                <a:ea typeface="Courier New" pitchFamily="34" charset="-122"/>
-                <a:cs typeface="Courier New" pitchFamily="34" charset="-120"/>
-              </a:rPr>
-              <a:t>install.packages() y library()</a:t>
-            </a:r>
-            <a:endParaRPr lang="en-US" sz="1050" dirty="0"/>
-          </a:p>
-        </p:txBody>
-      </p:sp>
-      <p:sp>
-        <p:nvSpPr>
-          <p:cNvPr id="15" name="Text 14"/>
-          <p:cNvSpPr txBox="1"/>
-          <p:nvPr/>
-        </p:nvSpPr>
-        <p:spPr>
-          <a:xfrm>
-            <a:off x="4812911" y="2548616"/>
-            <a:ext cx="3680460" cy="292608"/>
-          </a:xfrm>
-          <a:prstGeom prst="rect">
-            <a:avLst/>
-          </a:prstGeom>
-          <a:noFill/>
-          <a:ln/>
-        </p:spPr>
-        <p:txBody>
-          <a:bodyPr wrap="square" lIns="0" tIns="0" rIns="0" bIns="0" rtlCol="0" anchor="ctr"/>
-          <a:lstStyle/>
-          <a:p>
-            <a:pPr marL="0" indent="0">
-              <a:buNone/>
-            </a:pPr>
-            <a:r>
-              <a:rPr lang="en-US" sz="1050" dirty="0">
-                <a:solidFill>
-                  <a:srgbClr val="2E0A4E"/>
-                </a:solidFill>
-                <a:latin typeface="Calibri" pitchFamily="34" charset="0"/>
-                <a:ea typeface="Calibri" pitchFamily="34" charset="-122"/>
-                <a:cs typeface="Calibri" pitchFamily="34" charset="-120"/>
-              </a:rPr>
-              <a:t>Instalar una vez, activar cada vez.</a:t>
-            </a:r>
-            <a:endParaRPr lang="en-US" sz="1050" dirty="0"/>
-          </a:p>
-        </p:txBody>
-      </p:sp>
-      <p:sp>
-        <p:nvSpPr>
-          <p:cNvPr id="16" name="Shape 15"/>
-          <p:cNvSpPr/>
-          <p:nvPr/>
-        </p:nvSpPr>
-        <p:spPr>
-          <a:xfrm>
-            <a:off x="502920" y="2505456"/>
-            <a:ext cx="3954780" cy="585216"/>
-          </a:xfrm>
-          <a:prstGeom prst="roundRect">
-            <a:avLst>
-              <a:gd name="adj" fmla="val 7813"/>
-            </a:avLst>
-          </a:prstGeom>
-          <a:solidFill>
-            <a:schemeClr val="accent1">
-              <a:lumMod val="20000"/>
-              <a:lumOff val="80000"/>
-            </a:schemeClr>
-          </a:solidFill>
-          <a:ln w="12700">
-            <a:solidFill>
-              <a:srgbClr val="F4ECFB"/>
-            </a:solidFill>
-            <a:prstDash val="solid"/>
-          </a:ln>
-        </p:spPr>
-        <p:txBody>
-          <a:bodyPr/>
-          <a:lstStyle/>
-          <a:p>
-            <a:endParaRPr lang="en-US"/>
-          </a:p>
-        </p:txBody>
-      </p:sp>
-      <p:sp>
-        <p:nvSpPr>
-          <p:cNvPr id="17" name="Text 16"/>
-          <p:cNvSpPr txBox="1"/>
-          <p:nvPr/>
-        </p:nvSpPr>
-        <p:spPr>
-          <a:xfrm>
-            <a:off x="640080" y="2523744"/>
-            <a:ext cx="3680460" cy="292608"/>
-          </a:xfrm>
-          <a:prstGeom prst="rect">
-            <a:avLst/>
-          </a:prstGeom>
-          <a:noFill/>
-          <a:ln/>
-        </p:spPr>
-        <p:txBody>
-          <a:bodyPr wrap="square" lIns="0" tIns="0" rIns="0" bIns="0" rtlCol="0" anchor="ctr"/>
-          <a:lstStyle/>
-          <a:p>
-            <a:pPr marL="0" indent="0">
-              <a:buNone/>
-            </a:pPr>
-            <a:r>
-              <a:rPr lang="en-US" sz="1050" b="1" dirty="0">
-                <a:solidFill>
-                  <a:srgbClr val="5A189A"/>
-                </a:solidFill>
-                <a:latin typeface="Courier New" pitchFamily="34" charset="0"/>
-                <a:ea typeface="Courier New" pitchFamily="34" charset="-122"/>
-                <a:cs typeface="Courier New" pitchFamily="34" charset="-120"/>
-              </a:rPr>
-              <a:t>getwd() y read.csv()</a:t>
-            </a:r>
-            <a:endParaRPr lang="en-US" sz="1050" dirty="0"/>
-          </a:p>
-        </p:txBody>
-      </p:sp>
-      <p:sp>
-        <p:nvSpPr>
-          <p:cNvPr id="18" name="Text 17"/>
-          <p:cNvSpPr txBox="1"/>
-          <p:nvPr/>
-        </p:nvSpPr>
-        <p:spPr>
-          <a:xfrm>
-            <a:off x="640080" y="2786360"/>
-            <a:ext cx="3680460" cy="292608"/>
-          </a:xfrm>
-          <a:prstGeom prst="rect">
-            <a:avLst/>
-          </a:prstGeom>
-          <a:noFill/>
-          <a:ln/>
-        </p:spPr>
-        <p:txBody>
-          <a:bodyPr wrap="square" lIns="0" tIns="0" rIns="0" bIns="0" rtlCol="0" anchor="ctr"/>
-          <a:lstStyle/>
-          <a:p>
-            <a:pPr marL="0" indent="0">
-              <a:buNone/>
-            </a:pPr>
-            <a:r>
-              <a:rPr lang="en-US" sz="1050" dirty="0">
-                <a:solidFill>
-                  <a:srgbClr val="2E0A4E"/>
-                </a:solidFill>
-                <a:latin typeface="Calibri" pitchFamily="34" charset="0"/>
-                <a:ea typeface="Calibri" pitchFamily="34" charset="-122"/>
-                <a:cs typeface="Calibri" pitchFamily="34" charset="-120"/>
-              </a:rPr>
-              <a:t>Dónde está parado R y cómo lee un CSV.</a:t>
-            </a:r>
-            <a:endParaRPr lang="en-US" sz="1050" dirty="0"/>
-          </a:p>
-        </p:txBody>
-      </p:sp>
-      <p:sp>
-        <p:nvSpPr>
-          <p:cNvPr id="19" name="Shape 18"/>
-          <p:cNvSpPr/>
-          <p:nvPr/>
-        </p:nvSpPr>
-        <p:spPr>
-          <a:xfrm>
-            <a:off x="4675751" y="2926080"/>
-            <a:ext cx="3954780" cy="585216"/>
-          </a:xfrm>
-          <a:prstGeom prst="roundRect">
-            <a:avLst>
-              <a:gd name="adj" fmla="val 7813"/>
-            </a:avLst>
-          </a:prstGeom>
-          <a:solidFill>
-            <a:schemeClr val="accent4">
-              <a:lumMod val="20000"/>
-              <a:lumOff val="80000"/>
-            </a:schemeClr>
-          </a:solidFill>
-          <a:ln w="12700">
-            <a:solidFill>
-              <a:srgbClr val="F4ECFB"/>
-            </a:solidFill>
-            <a:prstDash val="solid"/>
-          </a:ln>
-        </p:spPr>
-        <p:txBody>
-          <a:bodyPr/>
-          <a:lstStyle/>
-          <a:p>
-            <a:endParaRPr lang="en-US"/>
-          </a:p>
-        </p:txBody>
-      </p:sp>
-      <p:sp>
-        <p:nvSpPr>
-          <p:cNvPr id="20" name="Text 19"/>
-          <p:cNvSpPr txBox="1"/>
-          <p:nvPr/>
-        </p:nvSpPr>
-        <p:spPr>
-          <a:xfrm>
-            <a:off x="4812911" y="2944368"/>
-            <a:ext cx="3680460" cy="292608"/>
-          </a:xfrm>
-          <a:prstGeom prst="rect">
-            <a:avLst/>
-          </a:prstGeom>
-          <a:noFill/>
-          <a:ln/>
-        </p:spPr>
-        <p:txBody>
-          <a:bodyPr wrap="square" lIns="0" tIns="0" rIns="0" bIns="0" rtlCol="0" anchor="ctr"/>
-          <a:lstStyle/>
-          <a:p>
-            <a:pPr marL="0" indent="0">
-              <a:buNone/>
-            </a:pPr>
-            <a:r>
-              <a:rPr lang="en-US" sz="1050" b="1" dirty="0">
-                <a:solidFill>
-                  <a:srgbClr val="5A189A"/>
-                </a:solidFill>
-                <a:latin typeface="Courier New" pitchFamily="34" charset="0"/>
-                <a:ea typeface="Courier New" pitchFamily="34" charset="-122"/>
-                <a:cs typeface="Courier New" pitchFamily="34" charset="-120"/>
-              </a:rPr>
-              <a:t>datos$columna y datos[filas, columnas]</a:t>
-            </a:r>
-            <a:endParaRPr lang="en-US" sz="1050" dirty="0"/>
-          </a:p>
-        </p:txBody>
-      </p:sp>
-      <p:sp>
-        <p:nvSpPr>
-          <p:cNvPr id="21" name="Text 20"/>
-          <p:cNvSpPr txBox="1"/>
-          <p:nvPr/>
-        </p:nvSpPr>
-        <p:spPr>
-          <a:xfrm>
-            <a:off x="4812911" y="3206984"/>
-            <a:ext cx="3680460" cy="292608"/>
-          </a:xfrm>
-          <a:prstGeom prst="rect">
-            <a:avLst/>
-          </a:prstGeom>
-          <a:noFill/>
-          <a:ln/>
-        </p:spPr>
-        <p:txBody>
-          <a:bodyPr wrap="square" lIns="0" tIns="0" rIns="0" bIns="0" rtlCol="0" anchor="ctr"/>
-          <a:lstStyle/>
-          <a:p>
-            <a:pPr marL="0" indent="0">
-              <a:buNone/>
-            </a:pPr>
-            <a:r>
-              <a:rPr lang="en-US" sz="1050" dirty="0">
-                <a:solidFill>
-                  <a:srgbClr val="2E0A4E"/>
-                </a:solidFill>
-                <a:latin typeface="Calibri" pitchFamily="34" charset="0"/>
-                <a:ea typeface="Calibri" pitchFamily="34" charset="-122"/>
-                <a:cs typeface="Calibri" pitchFamily="34" charset="-120"/>
-              </a:rPr>
-              <a:t>Elegir partes de un data frame.</a:t>
-            </a:r>
-            <a:endParaRPr lang="en-US" sz="1050" dirty="0"/>
-          </a:p>
-        </p:txBody>
-      </p:sp>
-      <p:sp>
-        <p:nvSpPr>
-          <p:cNvPr id="22" name="Shape 21"/>
-          <p:cNvSpPr/>
-          <p:nvPr/>
-        </p:nvSpPr>
-        <p:spPr>
-          <a:xfrm>
-            <a:off x="502920" y="3163824"/>
-            <a:ext cx="3954780" cy="585216"/>
-          </a:xfrm>
-          <a:prstGeom prst="roundRect">
-            <a:avLst>
-              <a:gd name="adj" fmla="val 7813"/>
-            </a:avLst>
-          </a:prstGeom>
-          <a:solidFill>
-            <a:schemeClr val="accent1">
-              <a:lumMod val="20000"/>
-              <a:lumOff val="80000"/>
-            </a:schemeClr>
-          </a:solidFill>
-          <a:ln w="12700">
-            <a:solidFill>
-              <a:srgbClr val="F4ECFB"/>
-            </a:solidFill>
-            <a:prstDash val="solid"/>
-          </a:ln>
-        </p:spPr>
-        <p:txBody>
-          <a:bodyPr/>
-          <a:lstStyle/>
-          <a:p>
-            <a:endParaRPr lang="en-US"/>
-          </a:p>
-        </p:txBody>
-      </p:sp>
-      <p:sp>
-        <p:nvSpPr>
-          <p:cNvPr id="23" name="Text 22"/>
-          <p:cNvSpPr txBox="1"/>
-          <p:nvPr/>
-        </p:nvSpPr>
-        <p:spPr>
-          <a:xfrm>
-            <a:off x="640080" y="3182112"/>
-            <a:ext cx="3680460" cy="292608"/>
-          </a:xfrm>
-          <a:prstGeom prst="rect">
-            <a:avLst/>
-          </a:prstGeom>
-          <a:noFill/>
-          <a:ln/>
-        </p:spPr>
-        <p:txBody>
-          <a:bodyPr wrap="square" lIns="0" tIns="0" rIns="0" bIns="0" rtlCol="0" anchor="ctr"/>
-          <a:lstStyle/>
-          <a:p>
-            <a:pPr marL="0" indent="0">
-              <a:buNone/>
-            </a:pPr>
-            <a:r>
-              <a:rPr lang="en-US" sz="1050" b="1" dirty="0">
-                <a:solidFill>
-                  <a:srgbClr val="5A189A"/>
-                </a:solidFill>
-                <a:latin typeface="Courier New" pitchFamily="34" charset="0"/>
-                <a:ea typeface="Courier New" pitchFamily="34" charset="-122"/>
-                <a:cs typeface="Courier New" pitchFamily="34" charset="-120"/>
-              </a:rPr>
-              <a:t>ui, server y shinyApp()</a:t>
-            </a:r>
-            <a:endParaRPr lang="en-US" sz="1050" dirty="0"/>
-          </a:p>
-        </p:txBody>
-      </p:sp>
-      <p:sp>
-        <p:nvSpPr>
-          <p:cNvPr id="24" name="Text 23"/>
-          <p:cNvSpPr txBox="1"/>
-          <p:nvPr/>
-        </p:nvSpPr>
-        <p:spPr>
-          <a:xfrm>
-            <a:off x="640080" y="3444728"/>
-            <a:ext cx="3680460" cy="292608"/>
-          </a:xfrm>
-          <a:prstGeom prst="rect">
-            <a:avLst/>
-          </a:prstGeom>
-          <a:noFill/>
-          <a:ln/>
-        </p:spPr>
-        <p:txBody>
-          <a:bodyPr wrap="square" lIns="0" tIns="0" rIns="0" bIns="0" rtlCol="0" anchor="ctr"/>
-          <a:lstStyle/>
-          <a:p>
-            <a:pPr marL="0" indent="0">
-              <a:buNone/>
-            </a:pPr>
-            <a:r>
-              <a:rPr lang="en-US" sz="1050" dirty="0">
-                <a:solidFill>
-                  <a:srgbClr val="2E0A4E"/>
-                </a:solidFill>
-                <a:latin typeface="Calibri" pitchFamily="34" charset="0"/>
-                <a:ea typeface="Calibri" pitchFamily="34" charset="-122"/>
-                <a:cs typeface="Calibri" pitchFamily="34" charset="-120"/>
-              </a:rPr>
-              <a:t>Las tres piezas de toda app de Shiny.</a:t>
-            </a:r>
-            <a:endParaRPr lang="en-US" sz="1050" dirty="0"/>
-          </a:p>
-        </p:txBody>
-      </p:sp>
-      <p:sp>
-        <p:nvSpPr>
-          <p:cNvPr id="25" name="Shape 18"/>
-          <p:cNvSpPr/>
-          <p:nvPr/>
-        </p:nvSpPr>
-        <p:spPr>
-          <a:xfrm>
-            <a:off x="4675751" y="3584448"/>
-            <a:ext cx="3954780" cy="585216"/>
-          </a:xfrm>
-          <a:prstGeom prst="roundRect">
-            <a:avLst>
-              <a:gd name="adj" fmla="val 7813"/>
-            </a:avLst>
-          </a:prstGeom>
-          <a:solidFill>
-            <a:schemeClr val="accent4">
-              <a:lumMod val="20000"/>
-              <a:lumOff val="80000"/>
-            </a:schemeClr>
-          </a:solidFill>
-          <a:ln w="12700">
-            <a:solidFill>
-              <a:srgbClr val="F4ECFB"/>
-            </a:solidFill>
-            <a:prstDash val="solid"/>
-          </a:ln>
-        </p:spPr>
-        <p:txBody>
-          <a:bodyPr/>
-          <a:lstStyle/>
-          <a:p>
-            <a:endParaRPr lang="en-US"/>
-          </a:p>
-        </p:txBody>
-      </p:sp>
-      <p:sp>
-        <p:nvSpPr>
-          <p:cNvPr id="26" name="Text 19"/>
-          <p:cNvSpPr txBox="1"/>
-          <p:nvPr/>
-        </p:nvSpPr>
-        <p:spPr>
-          <a:xfrm>
-            <a:off x="4812911" y="3602736"/>
-            <a:ext cx="3680460" cy="292608"/>
-          </a:xfrm>
-          <a:prstGeom prst="rect">
-            <a:avLst/>
-          </a:prstGeom>
-          <a:noFill/>
-          <a:ln/>
-        </p:spPr>
-        <p:txBody>
-          <a:bodyPr wrap="square" lIns="0" tIns="0" rIns="0" bIns="0" rtlCol="0" anchor="ctr"/>
-          <a:lstStyle/>
-          <a:p>
-            <a:pPr marL="0" indent="0">
-              <a:buNone/>
-            </a:pPr>
-            <a:r>
-              <a:rPr lang="en-US" sz="1050" b="1" dirty="0">
-                <a:solidFill>
-                  <a:srgbClr val="5A189A"/>
-                </a:solidFill>
-                <a:latin typeface="Courier New" pitchFamily="34" charset="0"/>
-                <a:ea typeface="Courier New" pitchFamily="34" charset="-122"/>
-                <a:cs typeface="Courier New" pitchFamily="34" charset="-120"/>
-              </a:rPr>
-              <a:t>tableOutput() y renderTable()</a:t>
-            </a:r>
-            <a:endParaRPr lang="en-US" sz="1050" dirty="0"/>
-          </a:p>
-        </p:txBody>
-      </p:sp>
-      <p:sp>
-        <p:nvSpPr>
-          <p:cNvPr id="27" name="Text 20"/>
-          <p:cNvSpPr txBox="1"/>
-          <p:nvPr/>
-        </p:nvSpPr>
-        <p:spPr>
-          <a:xfrm>
-            <a:off x="4812911" y="3865352"/>
-            <a:ext cx="3680460" cy="292608"/>
-          </a:xfrm>
-          <a:prstGeom prst="rect">
-            <a:avLst/>
-          </a:prstGeom>
-          <a:noFill/>
-          <a:ln/>
-        </p:spPr>
-        <p:txBody>
-          <a:bodyPr wrap="square" lIns="0" tIns="0" rIns="0" bIns="0" rtlCol="0" anchor="ctr"/>
-          <a:lstStyle/>
-          <a:p>
-            <a:pPr marL="0" indent="0">
-              <a:buNone/>
-            </a:pPr>
-            <a:r>
-              <a:rPr lang="en-US" sz="1050" dirty="0">
-                <a:solidFill>
-                  <a:srgbClr val="2E0A4E"/>
-                </a:solidFill>
-                <a:latin typeface="Calibri" pitchFamily="34" charset="0"/>
-                <a:ea typeface="Calibri" pitchFamily="34" charset="-122"/>
-                <a:cs typeface="Calibri" pitchFamily="34" charset="-120"/>
-              </a:rPr>
-              <a:t>Un espacio en la ui y lo que lo rellena.</a:t>
-            </a:r>
-            <a:endParaRPr lang="en-US" sz="1050" dirty="0"/>
-          </a:p>
-        </p:txBody>
-      </p:sp>
+      </p:pic>
     </p:spTree>
   </p:cSld>
   <p:clrMapOvr>
@@ -6656,7 +6594,13 @@
       </p:grpSpPr>
       <p:sp>
         <p:nvSpPr>
-          <p:cNvPr id="2" name="Text 0"/>
+          <p:cNvPr id="2" name="Text 0">
+            <a:extLst>
+              <a:ext uri="{FF2B5EF4-FFF2-40B4-BE49-F238E27FC236}">
+                <a16:creationId xmlns:a16="http://schemas.microsoft.com/office/drawing/2014/main" id="{21E0B84E-B772-A594-B980-A7B918F749C6}"/>
+              </a:ext>
+            </a:extLst>
+          </p:cNvPr>
           <p:cNvSpPr txBox="1"/>
           <p:nvPr/>
         </p:nvSpPr>
@@ -6664,6 +6608,88 @@
           <a:xfrm>
             <a:off x="502920" y="320040"/>
             <a:ext cx="7040880" cy="640080"/>
+          </a:xfrm>
+          <a:prstGeom prst="rect">
+            <a:avLst/>
+          </a:prstGeom>
+          <a:noFill/>
+          <a:ln/>
+        </p:spPr>
+        <p:txBody>
+          <a:bodyPr wrap="square" lIns="0" tIns="0" rIns="0" bIns="0" rtlCol="0" anchor="ctr"/>
+          <a:lstStyle/>
+          <a:p>
+            <a:r>
+              <a:rPr lang="en-US" sz="3000" b="1" dirty="0">
+                <a:solidFill>
+                  <a:srgbClr val="2E0A4E"/>
+                </a:solidFill>
+                <a:latin typeface="Oswald" pitchFamily="34" charset="0"/>
+                <a:ea typeface="Oswald" pitchFamily="34" charset="-122"/>
+                <a:cs typeface="Oswald" pitchFamily="34" charset="-120"/>
+              </a:rPr>
+              <a:t>Paso a paso (6)</a:t>
+            </a:r>
+            <a:endParaRPr lang="en-US" sz="3000" dirty="0"/>
+          </a:p>
+        </p:txBody>
+      </p:sp>
+      <p:sp>
+        <p:nvSpPr>
+          <p:cNvPr id="11" name="Shape 9">
+            <a:extLst>
+              <a:ext uri="{FF2B5EF4-FFF2-40B4-BE49-F238E27FC236}">
+                <a16:creationId xmlns:a16="http://schemas.microsoft.com/office/drawing/2014/main" id="{8584C834-90F2-8AA8-B328-3643E4CCE677}"/>
+              </a:ext>
+            </a:extLst>
+          </p:cNvPr>
+          <p:cNvSpPr/>
+          <p:nvPr/>
+        </p:nvSpPr>
+        <p:spPr>
+          <a:xfrm>
+            <a:off x="439616" y="1188720"/>
+            <a:ext cx="2560320" cy="1463040"/>
+          </a:xfrm>
+          <a:prstGeom prst="roundRect">
+            <a:avLst>
+              <a:gd name="adj" fmla="val 2143"/>
+            </a:avLst>
+          </a:prstGeom>
+          <a:solidFill>
+            <a:srgbClr val="5A189A"/>
+          </a:solidFill>
+          <a:ln w="12700">
+            <a:solidFill>
+              <a:srgbClr val="5A189A"/>
+            </a:solidFill>
+            <a:prstDash val="solid"/>
+          </a:ln>
+        </p:spPr>
+        <p:txBody>
+          <a:bodyPr/>
+          <a:lstStyle/>
+          <a:p>
+            <a:endParaRPr lang="en-US"/>
+          </a:p>
+        </p:txBody>
+      </p:sp>
+      <p:sp>
+        <p:nvSpPr>
+          <p:cNvPr id="12" name="Text 10">
+            <a:extLst>
+              <a:ext uri="{FF2B5EF4-FFF2-40B4-BE49-F238E27FC236}">
+                <a16:creationId xmlns:a16="http://schemas.microsoft.com/office/drawing/2014/main" id="{3D0787E2-7C7C-7A9C-ED72-1B8D5BA244E4}"/>
+              </a:ext>
+            </a:extLst>
+          </p:cNvPr>
+          <p:cNvSpPr txBox="1"/>
+          <p:nvPr/>
+        </p:nvSpPr>
+        <p:spPr>
+          <a:xfrm>
+            <a:off x="668216" y="1256068"/>
+            <a:ext cx="2103120" cy="502920"/>
           </a:xfrm>
           <a:prstGeom prst="rect">
             <a:avLst/>
@@ -6679,30 +6705,36 @@
               <a:buNone/>
             </a:pPr>
             <a:r>
-              <a:rPr lang="en-US" sz="3000" b="1" dirty="0">
-                <a:solidFill>
-                  <a:srgbClr val="2E0A4E"/>
+              <a:rPr lang="en-US" sz="1600" b="1" dirty="0">
+                <a:solidFill>
+                  <a:srgbClr val="FFFFFF"/>
                 </a:solidFill>
                 <a:latin typeface="Oswald" pitchFamily="34" charset="0"/>
                 <a:ea typeface="Oswald" pitchFamily="34" charset="-122"/>
                 <a:cs typeface="Oswald" pitchFamily="34" charset="-120"/>
               </a:rPr>
-              <a:t>Código clave</a:t>
-            </a:r>
-            <a:endParaRPr lang="en-US" sz="3000" dirty="0"/>
-          </a:p>
-        </p:txBody>
-      </p:sp>
-      <p:sp>
-        <p:nvSpPr>
-          <p:cNvPr id="4" name="Text 2"/>
+              <a:t>OBJETIVO 5</a:t>
+            </a:r>
+            <a:endParaRPr lang="en-US" sz="1600" dirty="0"/>
+          </a:p>
+        </p:txBody>
+      </p:sp>
+      <p:sp>
+        <p:nvSpPr>
+          <p:cNvPr id="13" name="Text 11">
+            <a:extLst>
+              <a:ext uri="{FF2B5EF4-FFF2-40B4-BE49-F238E27FC236}">
+                <a16:creationId xmlns:a16="http://schemas.microsoft.com/office/drawing/2014/main" id="{0C2592C3-39BA-DB09-D0F1-BF73ED6DEC99}"/>
+              </a:ext>
+            </a:extLst>
+          </p:cNvPr>
           <p:cNvSpPr txBox="1"/>
           <p:nvPr/>
         </p:nvSpPr>
         <p:spPr>
           <a:xfrm>
-            <a:off x="502920" y="4759452"/>
-            <a:ext cx="8138160" cy="228600"/>
+            <a:off x="668216" y="1734572"/>
+            <a:ext cx="2103120" cy="716926"/>
           </a:xfrm>
           <a:prstGeom prst="rect">
             <a:avLst/>
@@ -6711,49 +6743,55 @@
           <a:ln/>
         </p:spPr>
         <p:txBody>
-          <a:bodyPr wrap="square" lIns="0" tIns="0" rIns="0" bIns="0" rtlCol="0" anchor="ctr"/>
-          <a:lstStyle/>
-          <a:p>
-            <a:pPr marL="0" indent="0">
-              <a:buNone/>
-            </a:pPr>
-            <a:r>
-              <a:rPr lang="en-US" sz="900" dirty="0">
-                <a:solidFill>
-                  <a:srgbClr val="999999"/>
+          <a:bodyPr wrap="square" lIns="0" tIns="0" rIns="0" bIns="0" rtlCol="0" anchor="t"/>
+          <a:lstStyle/>
+          <a:p>
+            <a:r>
+              <a:rPr lang="es-ES" sz="1400" dirty="0">
+                <a:solidFill>
+                  <a:schemeClr val="bg1"/>
                 </a:solidFill>
                 <a:latin typeface="Calibri" pitchFamily="34" charset="0"/>
                 <a:ea typeface="Calibri" pitchFamily="34" charset="-122"/>
                 <a:cs typeface="Calibri" pitchFamily="34" charset="-120"/>
               </a:rPr>
-              <a:t>Visualización interactiva de datos con R y Shiny · Udelar</a:t>
-            </a:r>
-            <a:endParaRPr lang="en-US" sz="900" dirty="0"/>
-          </a:p>
-        </p:txBody>
-      </p:sp>
-      <p:sp>
-        <p:nvSpPr>
-          <p:cNvPr id="5" name="Shape 3"/>
+              <a:t>El servidor (server)</a:t>
+            </a:r>
+          </a:p>
+        </p:txBody>
+      </p:sp>
+      <p:sp>
+        <p:nvSpPr>
+          <p:cNvPr id="15" name="Shape 9">
+            <a:extLst>
+              <a:ext uri="{FF2B5EF4-FFF2-40B4-BE49-F238E27FC236}">
+                <a16:creationId xmlns:a16="http://schemas.microsoft.com/office/drawing/2014/main" id="{ADB729CB-A987-663A-1058-A842556E3C9E}"/>
+              </a:ext>
+            </a:extLst>
+          </p:cNvPr>
           <p:cNvSpPr/>
           <p:nvPr/>
         </p:nvSpPr>
         <p:spPr>
           <a:xfrm>
-            <a:off x="502920" y="1188720"/>
-            <a:ext cx="8138160" cy="3429000"/>
+            <a:off x="439615" y="2719107"/>
+            <a:ext cx="3773659" cy="2281957"/>
           </a:xfrm>
           <a:prstGeom prst="roundRect">
             <a:avLst>
-              <a:gd name="adj" fmla="val 1600"/>
+              <a:gd name="adj" fmla="val 2143"/>
             </a:avLst>
           </a:prstGeom>
           <a:solidFill>
-            <a:srgbClr val="2E0A4E"/>
+            <a:schemeClr val="accent1">
+              <a:lumMod val="75000"/>
+            </a:schemeClr>
           </a:solidFill>
           <a:ln w="12700">
             <a:solidFill>
-              <a:srgbClr val="2E0A4E"/>
+              <a:schemeClr val="accent1">
+                <a:lumMod val="75000"/>
+              </a:schemeClr>
             </a:solidFill>
             <a:prstDash val="solid"/>
           </a:ln>
@@ -6768,14 +6806,20 @@
       </p:sp>
       <p:sp>
         <p:nvSpPr>
-          <p:cNvPr id="6" name="Text 4"/>
+          <p:cNvPr id="17" name="Text 11">
+            <a:extLst>
+              <a:ext uri="{FF2B5EF4-FFF2-40B4-BE49-F238E27FC236}">
+                <a16:creationId xmlns:a16="http://schemas.microsoft.com/office/drawing/2014/main" id="{90C1F140-6606-DACA-D829-EF5414EB787C}"/>
+              </a:ext>
+            </a:extLst>
+          </p:cNvPr>
           <p:cNvSpPr txBox="1"/>
           <p:nvPr/>
         </p:nvSpPr>
         <p:spPr>
           <a:xfrm>
-            <a:off x="777240" y="1325880"/>
-            <a:ext cx="7589520" cy="3154680"/>
+            <a:off x="647115" y="2880360"/>
+            <a:ext cx="3369212" cy="716926"/>
           </a:xfrm>
           <a:prstGeom prst="rect">
             <a:avLst/>
@@ -6787,367 +6831,47 @@
           <a:bodyPr wrap="square" lIns="0" tIns="0" rIns="0" bIns="0" rtlCol="0" anchor="t"/>
           <a:lstStyle/>
           <a:p>
-            <a:pPr marL="0" indent="0">
-              <a:spcAft>
-                <a:spcPts val="200"/>
-              </a:spcAft>
-              <a:buNone/>
-            </a:pPr>
-            <a:r>
-              <a:rPr lang="en-US" sz="1000" dirty="0">
-                <a:solidFill>
-                  <a:srgbClr val="F1E9F8"/>
-                </a:solidFill>
-                <a:latin typeface="Courier New" pitchFamily="34" charset="0"/>
-                <a:ea typeface="Courier New" pitchFamily="34" charset="-122"/>
-                <a:cs typeface="Courier New" pitchFamily="34" charset="-120"/>
-              </a:rPr>
-              <a:t>library(shiny)</a:t>
-            </a:r>
-            <a:endParaRPr lang="en-US" sz="1100" dirty="0"/>
-          </a:p>
-          <a:p>
-            <a:pPr marL="0" indent="0">
-              <a:spcAft>
-                <a:spcPts val="200"/>
-              </a:spcAft>
-              <a:buNone/>
-            </a:pPr>
-            <a:r>
-              <a:rPr lang="en-US" sz="1000" dirty="0">
-                <a:solidFill>
-                  <a:srgbClr val="F1E9F8"/>
-                </a:solidFill>
-                <a:latin typeface="Courier New" pitchFamily="34" charset="0"/>
-                <a:ea typeface="Courier New" pitchFamily="34" charset="-122"/>
-                <a:cs typeface="Courier New" pitchFamily="34" charset="-120"/>
-              </a:rPr>
-              <a:t>TITULO &lt;- "Mi primera app Shiny"</a:t>
-            </a:r>
-            <a:endParaRPr lang="en-US" sz="1100" dirty="0"/>
-          </a:p>
-          <a:p>
-            <a:pPr marL="0" indent="0">
-              <a:spcAft>
-                <a:spcPts val="200"/>
-              </a:spcAft>
-              <a:buNone/>
-            </a:pPr>
-            <a:r>
-              <a:rPr lang="en-US" sz="1000" dirty="0">
-                <a:solidFill>
-                  <a:srgbClr val="F1E9F8"/>
-                </a:solidFill>
-                <a:latin typeface="Courier New" pitchFamily="34" charset="0"/>
-                <a:ea typeface="Courier New" pitchFamily="34" charset="-122"/>
-                <a:cs typeface="Courier New" pitchFamily="34" charset="-120"/>
-              </a:rPr>
-              <a:t>elecciones &lt;- read.csv("../datos/elecciones_departamento_2024.csv")</a:t>
-            </a:r>
-            <a:endParaRPr lang="en-US" sz="1100" dirty="0"/>
-          </a:p>
-          <a:p>
-            <a:pPr marL="0" indent="0">
-              <a:spcAft>
-                <a:spcPts val="200"/>
-              </a:spcAft>
-              <a:buNone/>
-            </a:pPr>
-            <a:r>
-              <a:rPr lang="en-US" sz="1000" dirty="0">
-                <a:solidFill>
-                  <a:srgbClr val="F1E9F8"/>
-                </a:solidFill>
-                <a:latin typeface="Courier New" pitchFamily="34" charset="0"/>
-                <a:ea typeface="Courier New" pitchFamily="34" charset="-122"/>
-                <a:cs typeface="Courier New" pitchFamily="34" charset="-120"/>
-              </a:rPr>
-              <a:t>ui &lt;- fluidPage(</a:t>
-            </a:r>
-            <a:endParaRPr lang="en-US" sz="1100" dirty="0"/>
-          </a:p>
-          <a:p>
-            <a:pPr marL="0" indent="0">
-              <a:spcAft>
-                <a:spcPts val="200"/>
-              </a:spcAft>
-              <a:buNone/>
-            </a:pPr>
-            <a:r>
-              <a:rPr lang="en-US" sz="1000" dirty="0">
-                <a:solidFill>
-                  <a:srgbClr val="F1E9F8"/>
-                </a:solidFill>
-                <a:latin typeface="Courier New" pitchFamily="34" charset="0"/>
-                <a:ea typeface="Courier New" pitchFamily="34" charset="-122"/>
-                <a:cs typeface="Courier New" pitchFamily="34" charset="-120"/>
-              </a:rPr>
-              <a:t>  titlePanel(TITULO),</a:t>
-            </a:r>
-            <a:endParaRPr lang="en-US" sz="1100" dirty="0"/>
-          </a:p>
-          <a:p>
-            <a:pPr marL="0" indent="0">
-              <a:spcAft>
-                <a:spcPts val="200"/>
-              </a:spcAft>
-              <a:buNone/>
-            </a:pPr>
-            <a:r>
-              <a:rPr lang="en-US" sz="1000" dirty="0">
-                <a:solidFill>
-                  <a:srgbClr val="F1E9F8"/>
-                </a:solidFill>
-                <a:latin typeface="Courier New" pitchFamily="34" charset="0"/>
-                <a:ea typeface="Courier New" pitchFamily="34" charset="-122"/>
-                <a:cs typeface="Courier New" pitchFamily="34" charset="-120"/>
-              </a:rPr>
-              <a:t>  h3("Votos emitidos por departamento"),</a:t>
-            </a:r>
-            <a:endParaRPr lang="en-US" sz="1100" dirty="0"/>
-          </a:p>
-          <a:p>
-            <a:pPr marL="0" indent="0">
-              <a:spcAft>
-                <a:spcPts val="200"/>
-              </a:spcAft>
-              <a:buNone/>
-            </a:pPr>
-            <a:r>
-              <a:rPr lang="en-US" sz="1000" dirty="0">
-                <a:solidFill>
-                  <a:srgbClr val="F1E9F8"/>
-                </a:solidFill>
-                <a:latin typeface="Courier New" pitchFamily="34" charset="0"/>
-                <a:ea typeface="Courier New" pitchFamily="34" charset="-122"/>
-                <a:cs typeface="Courier New" pitchFamily="34" charset="-120"/>
-              </a:rPr>
-              <a:t>  tableOutput("tabla_elecciones"),</a:t>
-            </a:r>
-            <a:endParaRPr lang="en-US" sz="1100" dirty="0"/>
-          </a:p>
-          <a:p>
-            <a:pPr marL="0" indent="0">
-              <a:spcAft>
-                <a:spcPts val="200"/>
-              </a:spcAft>
-              <a:buNone/>
-            </a:pPr>
-            <a:r>
-              <a:rPr lang="en-US" sz="1000" dirty="0">
-                <a:solidFill>
-                  <a:srgbClr val="F1E9F8"/>
-                </a:solidFill>
-                <a:latin typeface="Courier New" pitchFamily="34" charset="0"/>
-                <a:ea typeface="Courier New" pitchFamily="34" charset="-122"/>
-                <a:cs typeface="Courier New" pitchFamily="34" charset="-120"/>
-              </a:rPr>
-              <a:t>  textOutput("resumen")</a:t>
-            </a:r>
-            <a:endParaRPr lang="en-US" sz="1100" dirty="0"/>
-          </a:p>
-          <a:p>
-            <a:pPr marL="0" indent="0">
-              <a:spcAft>
-                <a:spcPts val="200"/>
-              </a:spcAft>
-              <a:buNone/>
-            </a:pPr>
-            <a:r>
-              <a:rPr lang="en-US" sz="1000" dirty="0">
-                <a:solidFill>
-                  <a:srgbClr val="F1E9F8"/>
-                </a:solidFill>
-                <a:latin typeface="Courier New" pitchFamily="34" charset="0"/>
-                <a:ea typeface="Courier New" pitchFamily="34" charset="-122"/>
-                <a:cs typeface="Courier New" pitchFamily="34" charset="-120"/>
-              </a:rPr>
-              <a:t>)</a:t>
-            </a:r>
-            <a:endParaRPr lang="en-US" sz="1100" dirty="0"/>
-          </a:p>
-          <a:p>
-            <a:pPr marL="0" indent="0">
-              <a:spcAft>
-                <a:spcPts val="200"/>
-              </a:spcAft>
-              <a:buNone/>
-            </a:pPr>
-            <a:r>
-              <a:rPr lang="en-US" sz="1000" dirty="0">
-                <a:solidFill>
-                  <a:srgbClr val="F1E9F8"/>
-                </a:solidFill>
-                <a:latin typeface="Courier New" pitchFamily="34" charset="0"/>
-                <a:ea typeface="Courier New" pitchFamily="34" charset="-122"/>
-                <a:cs typeface="Courier New" pitchFamily="34" charset="-120"/>
-              </a:rPr>
-              <a:t>server &lt;- function(input, output, session) {</a:t>
-            </a:r>
-            <a:endParaRPr lang="en-US" sz="1100" dirty="0"/>
-          </a:p>
-          <a:p>
-            <a:pPr marL="0" indent="0">
-              <a:spcAft>
-                <a:spcPts val="200"/>
-              </a:spcAft>
-              <a:buNone/>
-            </a:pPr>
-            <a:r>
-              <a:rPr lang="en-US" sz="1000" dirty="0">
-                <a:solidFill>
-                  <a:srgbClr val="F1E9F8"/>
-                </a:solidFill>
-                <a:latin typeface="Courier New" pitchFamily="34" charset="0"/>
-                <a:ea typeface="Courier New" pitchFamily="34" charset="-122"/>
-                <a:cs typeface="Courier New" pitchFamily="34" charset="-120"/>
-              </a:rPr>
-              <a:t>  output$tabla_elecciones &lt;- renderTable({</a:t>
-            </a:r>
-            <a:endParaRPr lang="en-US" sz="1100" dirty="0"/>
-          </a:p>
-          <a:p>
-            <a:pPr marL="0" indent="0">
-              <a:spcAft>
-                <a:spcPts val="200"/>
-              </a:spcAft>
-              <a:buNone/>
-            </a:pPr>
-            <a:r>
-              <a:rPr lang="en-US" sz="1000" dirty="0">
-                <a:solidFill>
-                  <a:srgbClr val="F1E9F8"/>
-                </a:solidFill>
-                <a:latin typeface="Courier New" pitchFamily="34" charset="0"/>
-                <a:ea typeface="Courier New" pitchFamily="34" charset="-122"/>
-                <a:cs typeface="Courier New" pitchFamily="34" charset="-120"/>
-              </a:rPr>
-              <a:t>    elecciones[, c("departamento", "emitidos")]</a:t>
-            </a:r>
-            <a:endParaRPr lang="en-US" sz="1100" dirty="0"/>
-          </a:p>
-          <a:p>
-            <a:pPr marL="0" indent="0">
-              <a:spcAft>
-                <a:spcPts val="200"/>
-              </a:spcAft>
-              <a:buNone/>
-            </a:pPr>
-            <a:r>
-              <a:rPr lang="en-US" sz="1000" dirty="0">
-                <a:solidFill>
-                  <a:srgbClr val="F1E9F8"/>
-                </a:solidFill>
-                <a:latin typeface="Courier New" pitchFamily="34" charset="0"/>
-                <a:ea typeface="Courier New" pitchFamily="34" charset="-122"/>
-                <a:cs typeface="Courier New" pitchFamily="34" charset="-120"/>
-              </a:rPr>
-              <a:t>  })</a:t>
-            </a:r>
-            <a:endParaRPr lang="en-US" sz="1100" dirty="0"/>
-          </a:p>
-          <a:p>
-            <a:pPr marL="0" indent="0">
-              <a:spcAft>
-                <a:spcPts val="200"/>
-              </a:spcAft>
-              <a:buNone/>
-            </a:pPr>
-            <a:r>
-              <a:rPr lang="en-US" sz="1000" dirty="0">
-                <a:solidFill>
-                  <a:srgbClr val="F1E9F8"/>
-                </a:solidFill>
-                <a:latin typeface="Courier New" pitchFamily="34" charset="0"/>
-                <a:ea typeface="Courier New" pitchFamily="34" charset="-122"/>
-                <a:cs typeface="Courier New" pitchFamily="34" charset="-120"/>
-              </a:rPr>
-              <a:t>  output$resumen &lt;- renderText({</a:t>
-            </a:r>
-            <a:endParaRPr lang="en-US" sz="1100" dirty="0"/>
-          </a:p>
-          <a:p>
-            <a:pPr marL="0" indent="0">
-              <a:spcAft>
-                <a:spcPts val="200"/>
-              </a:spcAft>
-              <a:buNone/>
-            </a:pPr>
-            <a:r>
-              <a:rPr lang="en-US" sz="1000" dirty="0">
-                <a:solidFill>
-                  <a:srgbClr val="F1E9F8"/>
-                </a:solidFill>
-                <a:latin typeface="Courier New" pitchFamily="34" charset="0"/>
-                <a:ea typeface="Courier New" pitchFamily="34" charset="-122"/>
-                <a:cs typeface="Courier New" pitchFamily="34" charset="-120"/>
-              </a:rPr>
-              <a:t>    paste0("Votos emitidos en total: ", sum(elecciones$emitidos))</a:t>
-            </a:r>
-            <a:endParaRPr lang="en-US" sz="1100" dirty="0"/>
-          </a:p>
-          <a:p>
-            <a:pPr marL="0" indent="0">
-              <a:spcAft>
-                <a:spcPts val="200"/>
-              </a:spcAft>
-              <a:buNone/>
-            </a:pPr>
-            <a:r>
-              <a:rPr lang="en-US" sz="1000" dirty="0">
-                <a:solidFill>
-                  <a:srgbClr val="F1E9F8"/>
-                </a:solidFill>
-                <a:latin typeface="Courier New" pitchFamily="34" charset="0"/>
-                <a:ea typeface="Courier New" pitchFamily="34" charset="-122"/>
-                <a:cs typeface="Courier New" pitchFamily="34" charset="-120"/>
-              </a:rPr>
-              <a:t>  })</a:t>
-            </a:r>
-            <a:endParaRPr lang="en-US" sz="1100" dirty="0"/>
-          </a:p>
-          <a:p>
-            <a:pPr marL="0" indent="0">
-              <a:spcAft>
-                <a:spcPts val="200"/>
-              </a:spcAft>
-              <a:buNone/>
-            </a:pPr>
-            <a:r>
-              <a:rPr lang="en-US" sz="1000" dirty="0">
-                <a:solidFill>
-                  <a:srgbClr val="F1E9F8"/>
-                </a:solidFill>
-                <a:latin typeface="Courier New" pitchFamily="34" charset="0"/>
-                <a:ea typeface="Courier New" pitchFamily="34" charset="-122"/>
-                <a:cs typeface="Courier New" pitchFamily="34" charset="-120"/>
-              </a:rPr>
-              <a:t>}</a:t>
-            </a:r>
-            <a:endParaRPr lang="en-US" sz="1100" dirty="0"/>
-          </a:p>
-          <a:p>
-            <a:pPr marL="0" indent="0">
-              <a:spcAft>
-                <a:spcPts val="200"/>
-              </a:spcAft>
-              <a:buNone/>
-            </a:pPr>
-            <a:r>
-              <a:rPr lang="en-US" sz="1000" dirty="0">
-                <a:solidFill>
-                  <a:srgbClr val="F1E9F8"/>
-                </a:solidFill>
-                <a:latin typeface="Courier New" pitchFamily="34" charset="0"/>
-                <a:ea typeface="Courier New" pitchFamily="34" charset="-122"/>
-                <a:cs typeface="Courier New" pitchFamily="34" charset="-120"/>
-              </a:rPr>
-              <a:t>shinyApp(ui = ui, server = server)</a:t>
-            </a:r>
-            <a:endParaRPr lang="en-US" sz="1100" dirty="0"/>
-          </a:p>
-        </p:txBody>
-      </p:sp>
+            <a:endParaRPr lang="en-US" sz="1300" dirty="0"/>
+          </a:p>
+          <a:p>
+            <a:endParaRPr lang="en-US" sz="1300" dirty="0"/>
+          </a:p>
+          <a:p>
+            <a:endParaRPr lang="en-US" sz="1300" dirty="0"/>
+          </a:p>
+        </p:txBody>
+      </p:sp>
+      <p:pic>
+        <p:nvPicPr>
+          <p:cNvPr id="22" name="Picture 21" descr="p4.png"/>
+          <p:cNvPicPr>
+            <a:picLocks noChangeAspect="1"/>
+          </p:cNvPicPr>
+          <p:nvPr/>
+        </p:nvPicPr>
+        <p:blipFill>
+          <a:blip r:embed="rId2"/>
+          <a:stretch>
+            <a:fillRect/>
+          </a:stretch>
+        </p:blipFill>
+        <p:spPr>
+          <a:xfrm>
+            <a:off x="4434840" y="2296950"/>
+            <a:ext cx="4300000" cy="1406100"/>
+          </a:xfrm>
+          <a:prstGeom prst="rect">
+            <a:avLst/>
+          </a:prstGeom>
+          <a:ln w="76200">
+            <a:solidFill>
+              <a:schemeClr val="accent1">
+                <a:lumMod val="75000"/>
+              </a:schemeClr>
+            </a:solidFill>
+          </a:ln>
+        </p:spPr>
+      </p:pic>
     </p:spTree>
   </p:cSld>
   <p:clrMapOvr>
@@ -7684,17 +7408,6 @@
             <a:pPr marL="0" indent="0">
               <a:buNone/>
             </a:pPr>
-            <a:r>
-              <a:rPr lang="es-UY" sz="1500" noProof="0" dirty="0">
-                <a:solidFill>
-                  <a:srgbClr val="2E0A4E"/>
-                </a:solidFill>
-                <a:latin typeface="Calibri" pitchFamily="34" charset="0"/>
-                <a:ea typeface="Calibri" pitchFamily="34" charset="-122"/>
-                <a:cs typeface="Calibri" pitchFamily="34" charset="-120"/>
-              </a:rPr>
-              <a:t>Conocer RStudio y lo básico de R, objetos, funciones y tablas.</a:t>
-            </a:r>
             <a:endParaRPr lang="es-UY" sz="1500" noProof="0" dirty="0"/>
           </a:p>
         </p:txBody>
@@ -7778,7 +7491,7 @@
         </p:nvSpPr>
         <p:spPr>
           <a:xfrm>
-            <a:off x="1188720" y="3398520"/>
+            <a:off x="1188720" y="2793492"/>
             <a:ext cx="5120640" cy="548640"/>
           </a:xfrm>
           <a:prstGeom prst="rect">
@@ -7811,84 +7524,13 @@
       </p:sp>
       <p:sp>
         <p:nvSpPr>
-          <p:cNvPr id="20" name="Shape 12"/>
-          <p:cNvSpPr/>
-          <p:nvPr/>
-        </p:nvSpPr>
-        <p:spPr>
-          <a:xfrm>
-            <a:off x="502920" y="4008120"/>
-            <a:ext cx="457200" cy="457200"/>
-          </a:xfrm>
-          <a:prstGeom prst="ellipse">
-            <a:avLst/>
-          </a:prstGeom>
-          <a:solidFill>
-            <a:srgbClr val="5A189A"/>
-          </a:solidFill>
-          <a:ln w="12700">
-            <a:solidFill>
-              <a:srgbClr val="5A189A"/>
-            </a:solidFill>
-            <a:prstDash val="solid"/>
-          </a:ln>
-        </p:spPr>
-        <p:txBody>
-          <a:bodyPr/>
-          <a:lstStyle/>
-          <a:p>
-            <a:endParaRPr lang="es-UY" noProof="0" dirty="0"/>
-          </a:p>
-        </p:txBody>
-      </p:sp>
-      <p:sp>
-        <p:nvSpPr>
-          <p:cNvPr id="21" name="Text 13"/>
-          <p:cNvSpPr txBox="1"/>
-          <p:nvPr/>
-        </p:nvSpPr>
-        <p:spPr>
-          <a:xfrm>
-            <a:off x="502920" y="4008120"/>
-            <a:ext cx="457200" cy="457200"/>
-          </a:xfrm>
-          <a:prstGeom prst="rect">
-            <a:avLst/>
-          </a:prstGeom>
-          <a:noFill/>
-          <a:ln/>
-        </p:spPr>
-        <p:txBody>
-          <a:bodyPr wrap="square" lIns="0" tIns="0" rIns="0" bIns="0" rtlCol="0" anchor="ctr"/>
-          <a:lstStyle/>
-          <a:p>
-            <a:pPr marL="0" indent="0" algn="ctr">
-              <a:buNone/>
-            </a:pPr>
-            <a:r>
-              <a:rPr lang="es-UY" sz="1600" b="1" noProof="0" dirty="0">
-                <a:solidFill>
-                  <a:srgbClr val="FFFFFF"/>
-                </a:solidFill>
-                <a:latin typeface="Oswald" pitchFamily="34" charset="0"/>
-                <a:ea typeface="Oswald" pitchFamily="34" charset="-122"/>
-                <a:cs typeface="Oswald" pitchFamily="34" charset="-120"/>
-              </a:rPr>
-              <a:t>6</a:t>
-            </a:r>
-            <a:endParaRPr lang="es-UY" sz="1600" noProof="0" dirty="0"/>
-          </a:p>
-        </p:txBody>
-      </p:sp>
-      <p:sp>
-        <p:nvSpPr>
           <p:cNvPr id="22" name="Text 14"/>
           <p:cNvSpPr txBox="1"/>
           <p:nvPr/>
         </p:nvSpPr>
         <p:spPr>
           <a:xfrm>
-            <a:off x="1188720" y="3962400"/>
+            <a:off x="1188720" y="3366750"/>
             <a:ext cx="5120640" cy="548640"/>
           </a:xfrm>
           <a:prstGeom prst="rect">
@@ -7954,13 +7596,7 @@
       </p:grpSpPr>
       <p:sp>
         <p:nvSpPr>
-          <p:cNvPr id="2" name="Text 0">
-            <a:extLst>
-              <a:ext uri="{FF2B5EF4-FFF2-40B4-BE49-F238E27FC236}">
-                <a16:creationId xmlns:a16="http://schemas.microsoft.com/office/drawing/2014/main" id="{45FBCF84-BF0C-00DD-1115-ECF03D12DDA6}"/>
-              </a:ext>
-            </a:extLst>
-          </p:cNvPr>
+          <p:cNvPr id="3" name="Text 0"/>
           <p:cNvSpPr txBox="1"/>
           <p:nvPr/>
         </p:nvSpPr>
@@ -7991,171 +7627,81 @@
                 <a:ea typeface="Oswald" pitchFamily="34" charset="-122"/>
                 <a:cs typeface="Oswald" pitchFamily="34" charset="-120"/>
               </a:rPr>
-              <a:t>Desafío opcional (1)</a:t>
-            </a:r>
-            <a:endParaRPr lang="en-US" sz="3000" dirty="0"/>
-          </a:p>
-        </p:txBody>
-      </p:sp>
-      <p:sp>
-        <p:nvSpPr>
-          <p:cNvPr id="11" name="Shape 9">
-            <a:extLst>
-              <a:ext uri="{FF2B5EF4-FFF2-40B4-BE49-F238E27FC236}">
-                <a16:creationId xmlns:a16="http://schemas.microsoft.com/office/drawing/2014/main" id="{1E4D2BBF-BB0F-7CF4-3842-6325D6A2CD35}"/>
-              </a:ext>
-            </a:extLst>
-          </p:cNvPr>
-          <p:cNvSpPr/>
-          <p:nvPr/>
-        </p:nvSpPr>
-        <p:spPr>
-          <a:xfrm>
-            <a:off x="439616" y="1188720"/>
-            <a:ext cx="2560320" cy="1463040"/>
-          </a:xfrm>
-          <a:prstGeom prst="roundRect">
-            <a:avLst>
-              <a:gd name="adj" fmla="val 2143"/>
-            </a:avLst>
-          </a:prstGeom>
-          <a:solidFill>
-            <a:srgbClr val="5A189A"/>
-          </a:solidFill>
-          <a:ln w="12700">
-            <a:solidFill>
-              <a:srgbClr val="5A189A"/>
-            </a:solidFill>
-            <a:prstDash val="solid"/>
-          </a:ln>
-        </p:spPr>
-        <p:txBody>
-          <a:bodyPr/>
-          <a:lstStyle/>
-          <a:p>
-            <a:endParaRPr lang="en-US"/>
-          </a:p>
-        </p:txBody>
-      </p:sp>
-      <p:sp>
-        <p:nvSpPr>
-          <p:cNvPr id="12" name="Text 10">
-            <a:extLst>
-              <a:ext uri="{FF2B5EF4-FFF2-40B4-BE49-F238E27FC236}">
-                <a16:creationId xmlns:a16="http://schemas.microsoft.com/office/drawing/2014/main" id="{57EA7703-08D4-E6C4-4FDB-5B08F7881055}"/>
-              </a:ext>
-            </a:extLst>
-          </p:cNvPr>
-          <p:cNvSpPr txBox="1"/>
-          <p:nvPr/>
-        </p:nvSpPr>
-        <p:spPr>
-          <a:xfrm>
-            <a:off x="668216" y="1256068"/>
-            <a:ext cx="2103120" cy="502920"/>
-          </a:xfrm>
-          <a:prstGeom prst="rect">
-            <a:avLst/>
-          </a:prstGeom>
-          <a:noFill/>
-          <a:ln/>
-        </p:spPr>
-        <p:txBody>
-          <a:bodyPr wrap="square" lIns="0" tIns="0" rIns="0" bIns="0" rtlCol="0" anchor="ctr"/>
-          <a:lstStyle/>
-          <a:p>
-            <a:pPr marL="0" indent="0">
-              <a:buNone/>
-            </a:pPr>
-            <a:r>
-              <a:rPr lang="en-US" sz="1600" b="1" dirty="0">
-                <a:solidFill>
-                  <a:srgbClr val="FFFFFF"/>
+              <a:t>Componentes a </a:t>
+            </a:r>
+            <a:r>
+              <a:rPr lang="en-US" sz="3000" b="1" dirty="0" err="1">
+                <a:solidFill>
+                  <a:srgbClr val="2E0A4E"/>
                 </a:solidFill>
                 <a:latin typeface="Oswald" pitchFamily="34" charset="0"/>
                 <a:ea typeface="Oswald" pitchFamily="34" charset="-122"/>
                 <a:cs typeface="Oswald" pitchFamily="34" charset="-120"/>
               </a:rPr>
-              <a:t>OPCIONAL</a:t>
-            </a:r>
-            <a:endParaRPr lang="en-US" sz="1600" dirty="0"/>
-          </a:p>
-        </p:txBody>
-      </p:sp>
-      <p:sp>
-        <p:nvSpPr>
-          <p:cNvPr id="13" name="Text 11">
-            <a:extLst>
-              <a:ext uri="{FF2B5EF4-FFF2-40B4-BE49-F238E27FC236}">
-                <a16:creationId xmlns:a16="http://schemas.microsoft.com/office/drawing/2014/main" id="{83082800-1689-F508-4C9C-8E0187A18BDD}"/>
-              </a:ext>
-            </a:extLst>
-          </p:cNvPr>
-          <p:cNvSpPr txBox="1"/>
-          <p:nvPr/>
-        </p:nvSpPr>
-        <p:spPr>
-          <a:xfrm>
-            <a:off x="668216" y="1734572"/>
-            <a:ext cx="2103120" cy="716926"/>
-          </a:xfrm>
-          <a:prstGeom prst="rect">
-            <a:avLst/>
-          </a:prstGeom>
-          <a:noFill/>
-          <a:ln/>
-        </p:spPr>
-        <p:txBody>
-          <a:bodyPr wrap="square" lIns="0" tIns="0" rIns="0" bIns="0" rtlCol="0" anchor="t"/>
-          <a:lstStyle/>
-          <a:p>
-            <a:r>
-              <a:rPr lang="es-ES" sz="1400" dirty="0">
-                <a:solidFill>
-                  <a:schemeClr val="bg1"/>
-                </a:solidFill>
-                <a:latin typeface="Calibri" pitchFamily="34" charset="0"/>
-                <a:ea typeface="Calibri" pitchFamily="34" charset="-122"/>
-                <a:cs typeface="Calibri" pitchFamily="34" charset="-120"/>
-              </a:rPr>
-              <a:t>GitHub, tu repositorio</a:t>
-            </a:r>
-            <a:endParaRPr lang="en-US" sz="1300" dirty="0"/>
-          </a:p>
-        </p:txBody>
-      </p:sp>
-      <p:sp>
-        <p:nvSpPr>
-          <p:cNvPr id="15" name="Shape 9">
-            <a:extLst>
-              <a:ext uri="{FF2B5EF4-FFF2-40B4-BE49-F238E27FC236}">
-                <a16:creationId xmlns:a16="http://schemas.microsoft.com/office/drawing/2014/main" id="{E750D06A-626A-4348-CA99-CE04C627A232}"/>
-              </a:ext>
-            </a:extLst>
-          </p:cNvPr>
+              <a:t>observar</a:t>
+            </a:r>
+            <a:r>
+              <a:rPr lang="en-US" sz="3000" b="1" dirty="0">
+                <a:solidFill>
+                  <a:srgbClr val="2E0A4E"/>
+                </a:solidFill>
+                <a:latin typeface="Oswald" pitchFamily="34" charset="0"/>
+                <a:ea typeface="Oswald" pitchFamily="34" charset="-122"/>
+                <a:cs typeface="Oswald" pitchFamily="34" charset="-120"/>
+              </a:rPr>
+              <a:t> en la </a:t>
+            </a:r>
+            <a:r>
+              <a:rPr lang="en-US" sz="3000" b="1" dirty="0" err="1">
+                <a:solidFill>
+                  <a:srgbClr val="2E0A4E"/>
+                </a:solidFill>
+                <a:latin typeface="Oswald" pitchFamily="34" charset="0"/>
+                <a:ea typeface="Oswald" pitchFamily="34" charset="-122"/>
+                <a:cs typeface="Oswald" pitchFamily="34" charset="-120"/>
+              </a:rPr>
+              <a:t>replicación</a:t>
+            </a:r>
+            <a:r>
+              <a:rPr lang="en-US" sz="3000" b="1" dirty="0">
+                <a:solidFill>
+                  <a:srgbClr val="2E0A4E"/>
+                </a:solidFill>
+                <a:latin typeface="Oswald" pitchFamily="34" charset="0"/>
+                <a:ea typeface="Oswald" pitchFamily="34" charset="-122"/>
+                <a:cs typeface="Oswald" pitchFamily="34" charset="-120"/>
+              </a:rPr>
+              <a:t> </a:t>
+            </a:r>
+            <a:endParaRPr lang="en-US" sz="3000" dirty="0"/>
+          </a:p>
+        </p:txBody>
+      </p:sp>
+      <p:sp>
+        <p:nvSpPr>
+          <p:cNvPr id="4" name="Shape 3"/>
           <p:cNvSpPr/>
           <p:nvPr/>
         </p:nvSpPr>
         <p:spPr>
           <a:xfrm>
-            <a:off x="439615" y="2719107"/>
-            <a:ext cx="3773659" cy="2281957"/>
+            <a:off x="502920" y="1188720"/>
+            <a:ext cx="3954780" cy="585216"/>
           </a:xfrm>
           <a:prstGeom prst="roundRect">
             <a:avLst>
-              <a:gd name="adj" fmla="val 2143"/>
+              <a:gd name="adj" fmla="val 7813"/>
             </a:avLst>
           </a:prstGeom>
           <a:solidFill>
             <a:schemeClr val="accent1">
-              <a:lumMod val="75000"/>
+              <a:lumMod val="20000"/>
+              <a:lumOff val="80000"/>
             </a:schemeClr>
           </a:solidFill>
           <a:ln w="12700">
             <a:solidFill>
-              <a:schemeClr val="accent1">
-                <a:lumMod val="75000"/>
-              </a:schemeClr>
+              <a:srgbClr val="F4ECFB"/>
             </a:solidFill>
             <a:prstDash val="solid"/>
           </a:ln>
@@ -8170,20 +7716,14 @@
       </p:sp>
       <p:sp>
         <p:nvSpPr>
-          <p:cNvPr id="17" name="Text 11">
-            <a:extLst>
-              <a:ext uri="{FF2B5EF4-FFF2-40B4-BE49-F238E27FC236}">
-                <a16:creationId xmlns:a16="http://schemas.microsoft.com/office/drawing/2014/main" id="{F3440954-5CFF-06C7-8641-E2E38BA6F847}"/>
-              </a:ext>
-            </a:extLst>
-          </p:cNvPr>
+          <p:cNvPr id="5" name="Text 4"/>
           <p:cNvSpPr txBox="1"/>
           <p:nvPr/>
         </p:nvSpPr>
         <p:spPr>
           <a:xfrm>
-            <a:off x="668216" y="2899117"/>
-            <a:ext cx="3369212" cy="716926"/>
+            <a:off x="640080" y="1207008"/>
+            <a:ext cx="3680460" cy="292608"/>
           </a:xfrm>
           <a:prstGeom prst="rect">
             <a:avLst/>
@@ -8192,92 +7732,871 @@
           <a:ln/>
         </p:spPr>
         <p:txBody>
-          <a:bodyPr wrap="square" lIns="0" tIns="0" rIns="0" bIns="0" rtlCol="0" anchor="t"/>
-          <a:lstStyle/>
-          <a:p>
-            <a:r>
-              <a:rPr lang="es-ES" sz="1400" b="1" dirty="0">
-                <a:solidFill>
-                  <a:schemeClr val="bg1"/>
+          <a:bodyPr wrap="square" lIns="0" tIns="0" rIns="0" bIns="0" rtlCol="0" anchor="ctr"/>
+          <a:lstStyle/>
+          <a:p>
+            <a:pPr marL="0" indent="0">
+              <a:buNone/>
+            </a:pPr>
+            <a:r>
+              <a:rPr lang="en-US" sz="1050" b="1" dirty="0">
+                <a:solidFill>
+                  <a:srgbClr val="5A189A"/>
+                </a:solidFill>
+                <a:latin typeface="Courier New" pitchFamily="34" charset="0"/>
+                <a:ea typeface="Courier New" pitchFamily="34" charset="-122"/>
+                <a:cs typeface="Courier New" pitchFamily="34" charset="-120"/>
+              </a:rPr>
+              <a:t>objeto &lt;- valor</a:t>
+            </a:r>
+            <a:endParaRPr lang="en-US" sz="1050" dirty="0"/>
+          </a:p>
+        </p:txBody>
+      </p:sp>
+      <p:sp>
+        <p:nvSpPr>
+          <p:cNvPr id="6" name="Text 5"/>
+          <p:cNvSpPr txBox="1"/>
+          <p:nvPr/>
+        </p:nvSpPr>
+        <p:spPr>
+          <a:xfrm>
+            <a:off x="640080" y="1469624"/>
+            <a:ext cx="3680460" cy="292608"/>
+          </a:xfrm>
+          <a:prstGeom prst="rect">
+            <a:avLst/>
+          </a:prstGeom>
+          <a:noFill/>
+          <a:ln/>
+        </p:spPr>
+        <p:txBody>
+          <a:bodyPr wrap="square" lIns="0" tIns="0" rIns="0" bIns="0" rtlCol="0" anchor="ctr"/>
+          <a:lstStyle/>
+          <a:p>
+            <a:pPr marL="0" indent="0">
+              <a:buNone/>
+            </a:pPr>
+            <a:r>
+              <a:rPr lang="en-US" sz="1050" dirty="0">
+                <a:solidFill>
+                  <a:srgbClr val="2E0A4E"/>
                 </a:solidFill>
                 <a:latin typeface="Calibri" pitchFamily="34" charset="0"/>
                 <a:ea typeface="Calibri" pitchFamily="34" charset="-122"/>
                 <a:cs typeface="Calibri" pitchFamily="34" charset="-120"/>
               </a:rPr>
-              <a:t>Git guarda versiones de tu código y GitHub las guarda en la web. Es opcional, el curso se hace completo sin GitHub.</a:t>
-            </a:r>
-          </a:p>
-          <a:p>
-            <a:endParaRPr lang="es-ES" sz="1400" b="1" dirty="0">
-              <a:solidFill>
-                <a:schemeClr val="bg1"/>
-              </a:solidFill>
-              <a:latin typeface="Calibri" pitchFamily="34" charset="0"/>
-              <a:ea typeface="Calibri" pitchFamily="34" charset="-122"/>
-              <a:cs typeface="Calibri" pitchFamily="34" charset="-120"/>
-            </a:endParaRPr>
-          </a:p>
-          <a:p>
-            <a:r>
-              <a:rPr lang="es-ES" sz="1400" b="1" dirty="0">
-                <a:solidFill>
-                  <a:schemeClr val="bg1"/>
+              <a:t>Guarda un valor con un nombre.</a:t>
+            </a:r>
+            <a:endParaRPr lang="en-US" sz="1050" dirty="0"/>
+          </a:p>
+        </p:txBody>
+      </p:sp>
+      <p:sp>
+        <p:nvSpPr>
+          <p:cNvPr id="7" name="Shape 6"/>
+          <p:cNvSpPr/>
+          <p:nvPr/>
+        </p:nvSpPr>
+        <p:spPr>
+          <a:xfrm>
+            <a:off x="4675751" y="1609344"/>
+            <a:ext cx="3954780" cy="585216"/>
+          </a:xfrm>
+          <a:prstGeom prst="roundRect">
+            <a:avLst>
+              <a:gd name="adj" fmla="val 7813"/>
+            </a:avLst>
+          </a:prstGeom>
+          <a:solidFill>
+            <a:schemeClr val="accent4">
+              <a:lumMod val="20000"/>
+              <a:lumOff val="80000"/>
+            </a:schemeClr>
+          </a:solidFill>
+          <a:ln w="12700">
+            <a:solidFill>
+              <a:srgbClr val="F4ECFB"/>
+            </a:solidFill>
+            <a:prstDash val="solid"/>
+          </a:ln>
+        </p:spPr>
+        <p:txBody>
+          <a:bodyPr/>
+          <a:lstStyle/>
+          <a:p>
+            <a:endParaRPr lang="en-US"/>
+          </a:p>
+        </p:txBody>
+      </p:sp>
+      <p:sp>
+        <p:nvSpPr>
+          <p:cNvPr id="8" name="Text 7"/>
+          <p:cNvSpPr txBox="1"/>
+          <p:nvPr/>
+        </p:nvSpPr>
+        <p:spPr>
+          <a:xfrm>
+            <a:off x="4812911" y="1627632"/>
+            <a:ext cx="3680460" cy="292608"/>
+          </a:xfrm>
+          <a:prstGeom prst="rect">
+            <a:avLst/>
+          </a:prstGeom>
+          <a:noFill/>
+          <a:ln/>
+        </p:spPr>
+        <p:txBody>
+          <a:bodyPr wrap="square" lIns="0" tIns="0" rIns="0" bIns="0" rtlCol="0" anchor="ctr"/>
+          <a:lstStyle/>
+          <a:p>
+            <a:pPr marL="0" indent="0">
+              <a:buNone/>
+            </a:pPr>
+            <a:r>
+              <a:rPr lang="en-US" sz="1050" b="1" dirty="0">
+                <a:solidFill>
+                  <a:srgbClr val="5A189A"/>
+                </a:solidFill>
+                <a:latin typeface="Courier New" pitchFamily="34" charset="0"/>
+                <a:ea typeface="Courier New" pitchFamily="34" charset="-122"/>
+                <a:cs typeface="Courier New" pitchFamily="34" charset="-120"/>
+              </a:rPr>
+              <a:t>c() y vector[1]</a:t>
+            </a:r>
+            <a:endParaRPr lang="en-US" sz="1050" dirty="0"/>
+          </a:p>
+        </p:txBody>
+      </p:sp>
+      <p:sp>
+        <p:nvSpPr>
+          <p:cNvPr id="9" name="Text 8"/>
+          <p:cNvSpPr txBox="1"/>
+          <p:nvPr/>
+        </p:nvSpPr>
+        <p:spPr>
+          <a:xfrm>
+            <a:off x="4812911" y="1890248"/>
+            <a:ext cx="3680460" cy="292608"/>
+          </a:xfrm>
+          <a:prstGeom prst="rect">
+            <a:avLst/>
+          </a:prstGeom>
+          <a:noFill/>
+          <a:ln/>
+        </p:spPr>
+        <p:txBody>
+          <a:bodyPr wrap="square" lIns="0" tIns="0" rIns="0" bIns="0" rtlCol="0" anchor="ctr"/>
+          <a:lstStyle/>
+          <a:p>
+            <a:pPr marL="0" indent="0">
+              <a:buNone/>
+            </a:pPr>
+            <a:r>
+              <a:rPr lang="en-US" sz="1050" dirty="0">
+                <a:solidFill>
+                  <a:srgbClr val="2E0A4E"/>
                 </a:solidFill>
                 <a:latin typeface="Calibri" pitchFamily="34" charset="0"/>
                 <a:ea typeface="Calibri" pitchFamily="34" charset="-122"/>
                 <a:cs typeface="Calibri" pitchFamily="34" charset="-120"/>
               </a:rPr>
-              <a:t>Instalá Git, creá una cuenta y un repositorio nuevo. En RStudio, </a:t>
-            </a:r>
-            <a:r>
-              <a:rPr lang="es-ES" sz="1400" b="1" i="1" dirty="0">
-                <a:solidFill>
-                  <a:schemeClr val="bg1"/>
+              <a:t>Varios valores juntos, y cómo elegir uno.</a:t>
+            </a:r>
+            <a:endParaRPr lang="en-US" sz="1050" dirty="0"/>
+          </a:p>
+        </p:txBody>
+      </p:sp>
+      <p:sp>
+        <p:nvSpPr>
+          <p:cNvPr id="10" name="Shape 9"/>
+          <p:cNvSpPr/>
+          <p:nvPr/>
+        </p:nvSpPr>
+        <p:spPr>
+          <a:xfrm>
+            <a:off x="502920" y="1847088"/>
+            <a:ext cx="3954780" cy="585216"/>
+          </a:xfrm>
+          <a:prstGeom prst="roundRect">
+            <a:avLst>
+              <a:gd name="adj" fmla="val 7813"/>
+            </a:avLst>
+          </a:prstGeom>
+          <a:solidFill>
+            <a:schemeClr val="accent1">
+              <a:lumMod val="20000"/>
+              <a:lumOff val="80000"/>
+            </a:schemeClr>
+          </a:solidFill>
+          <a:ln w="12700">
+            <a:solidFill>
+              <a:srgbClr val="F4ECFB"/>
+            </a:solidFill>
+            <a:prstDash val="solid"/>
+          </a:ln>
+        </p:spPr>
+        <p:txBody>
+          <a:bodyPr/>
+          <a:lstStyle/>
+          <a:p>
+            <a:endParaRPr lang="en-US"/>
+          </a:p>
+        </p:txBody>
+      </p:sp>
+      <p:sp>
+        <p:nvSpPr>
+          <p:cNvPr id="11" name="Text 10"/>
+          <p:cNvSpPr txBox="1"/>
+          <p:nvPr/>
+        </p:nvSpPr>
+        <p:spPr>
+          <a:xfrm>
+            <a:off x="640080" y="1865376"/>
+            <a:ext cx="3680460" cy="292608"/>
+          </a:xfrm>
+          <a:prstGeom prst="rect">
+            <a:avLst/>
+          </a:prstGeom>
+          <a:noFill/>
+          <a:ln/>
+        </p:spPr>
+        <p:txBody>
+          <a:bodyPr wrap="square" lIns="0" tIns="0" rIns="0" bIns="0" rtlCol="0" anchor="ctr"/>
+          <a:lstStyle/>
+          <a:p>
+            <a:pPr marL="0" indent="0">
+              <a:buNone/>
+            </a:pPr>
+            <a:r>
+              <a:rPr lang="en-US" sz="1050" b="1" dirty="0">
+                <a:solidFill>
+                  <a:srgbClr val="5A189A"/>
+                </a:solidFill>
+                <a:latin typeface="Courier New" pitchFamily="34" charset="0"/>
+                <a:ea typeface="Courier New" pitchFamily="34" charset="-122"/>
+                <a:cs typeface="Courier New" pitchFamily="34" charset="-120"/>
+              </a:rPr>
+              <a:t>sum(), mean(), paste0()</a:t>
+            </a:r>
+            <a:endParaRPr lang="en-US" sz="1050" dirty="0"/>
+          </a:p>
+        </p:txBody>
+      </p:sp>
+      <p:sp>
+        <p:nvSpPr>
+          <p:cNvPr id="12" name="Text 11"/>
+          <p:cNvSpPr txBox="1"/>
+          <p:nvPr/>
+        </p:nvSpPr>
+        <p:spPr>
+          <a:xfrm>
+            <a:off x="640080" y="2127992"/>
+            <a:ext cx="3680460" cy="292608"/>
+          </a:xfrm>
+          <a:prstGeom prst="rect">
+            <a:avLst/>
+          </a:prstGeom>
+          <a:noFill/>
+          <a:ln/>
+        </p:spPr>
+        <p:txBody>
+          <a:bodyPr wrap="square" lIns="0" tIns="0" rIns="0" bIns="0" rtlCol="0" anchor="ctr"/>
+          <a:lstStyle/>
+          <a:p>
+            <a:pPr marL="0" indent="0">
+              <a:buNone/>
+            </a:pPr>
+            <a:r>
+              <a:rPr lang="en-US" sz="1050" dirty="0">
+                <a:solidFill>
+                  <a:srgbClr val="2E0A4E"/>
                 </a:solidFill>
                 <a:latin typeface="Calibri" pitchFamily="34" charset="0"/>
                 <a:ea typeface="Calibri" pitchFamily="34" charset="-122"/>
                 <a:cs typeface="Calibri" pitchFamily="34" charset="-120"/>
               </a:rPr>
-              <a:t>File, New Project, Version Control, Git</a:t>
-            </a:r>
-            <a:r>
-              <a:rPr lang="es-ES" sz="1400" b="1" dirty="0">
-                <a:solidFill>
-                  <a:schemeClr val="bg1"/>
+              <a:t>Funciones, reciben algo y devuelven un resultado.</a:t>
+            </a:r>
+            <a:endParaRPr lang="en-US" sz="1050" dirty="0"/>
+          </a:p>
+        </p:txBody>
+      </p:sp>
+      <p:sp>
+        <p:nvSpPr>
+          <p:cNvPr id="13" name="Shape 12"/>
+          <p:cNvSpPr/>
+          <p:nvPr/>
+        </p:nvSpPr>
+        <p:spPr>
+          <a:xfrm>
+            <a:off x="4675751" y="2267712"/>
+            <a:ext cx="3954780" cy="585216"/>
+          </a:xfrm>
+          <a:prstGeom prst="roundRect">
+            <a:avLst>
+              <a:gd name="adj" fmla="val 7813"/>
+            </a:avLst>
+          </a:prstGeom>
+          <a:solidFill>
+            <a:schemeClr val="accent4">
+              <a:lumMod val="20000"/>
+              <a:lumOff val="80000"/>
+            </a:schemeClr>
+          </a:solidFill>
+          <a:ln w="12700">
+            <a:solidFill>
+              <a:srgbClr val="F4ECFB"/>
+            </a:solidFill>
+            <a:prstDash val="solid"/>
+          </a:ln>
+        </p:spPr>
+        <p:txBody>
+          <a:bodyPr/>
+          <a:lstStyle/>
+          <a:p>
+            <a:endParaRPr lang="en-US"/>
+          </a:p>
+        </p:txBody>
+      </p:sp>
+      <p:sp>
+        <p:nvSpPr>
+          <p:cNvPr id="14" name="Text 13"/>
+          <p:cNvSpPr txBox="1"/>
+          <p:nvPr/>
+        </p:nvSpPr>
+        <p:spPr>
+          <a:xfrm>
+            <a:off x="4812911" y="2286000"/>
+            <a:ext cx="3680460" cy="292608"/>
+          </a:xfrm>
+          <a:prstGeom prst="rect">
+            <a:avLst/>
+          </a:prstGeom>
+          <a:noFill/>
+          <a:ln/>
+        </p:spPr>
+        <p:txBody>
+          <a:bodyPr wrap="square" lIns="0" tIns="0" rIns="0" bIns="0" rtlCol="0" anchor="ctr"/>
+          <a:lstStyle/>
+          <a:p>
+            <a:pPr marL="0" indent="0">
+              <a:buNone/>
+            </a:pPr>
+            <a:r>
+              <a:rPr lang="en-US" sz="1050" b="1" dirty="0">
+                <a:solidFill>
+                  <a:srgbClr val="5A189A"/>
+                </a:solidFill>
+                <a:latin typeface="Courier New" pitchFamily="34" charset="0"/>
+                <a:ea typeface="Courier New" pitchFamily="34" charset="-122"/>
+                <a:cs typeface="Courier New" pitchFamily="34" charset="-120"/>
+              </a:rPr>
+              <a:t>install.packages() y library()</a:t>
+            </a:r>
+            <a:endParaRPr lang="en-US" sz="1050" dirty="0"/>
+          </a:p>
+        </p:txBody>
+      </p:sp>
+      <p:sp>
+        <p:nvSpPr>
+          <p:cNvPr id="15" name="Text 14"/>
+          <p:cNvSpPr txBox="1"/>
+          <p:nvPr/>
+        </p:nvSpPr>
+        <p:spPr>
+          <a:xfrm>
+            <a:off x="4812911" y="2548616"/>
+            <a:ext cx="3680460" cy="292608"/>
+          </a:xfrm>
+          <a:prstGeom prst="rect">
+            <a:avLst/>
+          </a:prstGeom>
+          <a:noFill/>
+          <a:ln/>
+        </p:spPr>
+        <p:txBody>
+          <a:bodyPr wrap="square" lIns="0" tIns="0" rIns="0" bIns="0" rtlCol="0" anchor="ctr"/>
+          <a:lstStyle/>
+          <a:p>
+            <a:pPr marL="0" indent="0">
+              <a:buNone/>
+            </a:pPr>
+            <a:r>
+              <a:rPr lang="en-US" sz="1050" dirty="0">
+                <a:solidFill>
+                  <a:srgbClr val="2E0A4E"/>
                 </a:solidFill>
                 <a:latin typeface="Calibri" pitchFamily="34" charset="0"/>
                 <a:ea typeface="Calibri" pitchFamily="34" charset="-122"/>
                 <a:cs typeface="Calibri" pitchFamily="34" charset="-120"/>
               </a:rPr>
-              <a:t> y pegá su dirección. Queda abierto como un proyecto.</a:t>
-            </a:r>
-          </a:p>
-        </p:txBody>
-      </p:sp>
-      <p:pic>
-        <p:nvPicPr>
-          <p:cNvPr id="18" name="Picture 17" descr="cap2.png"/>
-          <p:cNvPicPr>
-            <a:picLocks noChangeAspect="1"/>
-          </p:cNvPicPr>
-          <p:nvPr/>
-        </p:nvPicPr>
-        <p:blipFill>
-          <a:blip r:embed="rId2"/>
-          <a:stretch>
-            <a:fillRect/>
-          </a:stretch>
-        </p:blipFill>
-        <p:spPr>
-          <a:xfrm>
-            <a:off x="4546204" y="1188720"/>
-            <a:ext cx="4257831" cy="3100000"/>
+              <a:t>Instalar una vez, activar cada vez.</a:t>
+            </a:r>
+            <a:endParaRPr lang="en-US" sz="1050" dirty="0"/>
+          </a:p>
+        </p:txBody>
+      </p:sp>
+      <p:sp>
+        <p:nvSpPr>
+          <p:cNvPr id="16" name="Shape 15"/>
+          <p:cNvSpPr/>
+          <p:nvPr/>
+        </p:nvSpPr>
+        <p:spPr>
+          <a:xfrm>
+            <a:off x="502920" y="2505456"/>
+            <a:ext cx="3954780" cy="585216"/>
+          </a:xfrm>
+          <a:prstGeom prst="roundRect">
+            <a:avLst>
+              <a:gd name="adj" fmla="val 7813"/>
+            </a:avLst>
+          </a:prstGeom>
+          <a:solidFill>
+            <a:schemeClr val="accent1">
+              <a:lumMod val="20000"/>
+              <a:lumOff val="80000"/>
+            </a:schemeClr>
+          </a:solidFill>
+          <a:ln w="12700">
+            <a:solidFill>
+              <a:srgbClr val="F4ECFB"/>
+            </a:solidFill>
+            <a:prstDash val="solid"/>
+          </a:ln>
+        </p:spPr>
+        <p:txBody>
+          <a:bodyPr/>
+          <a:lstStyle/>
+          <a:p>
+            <a:endParaRPr lang="en-US"/>
+          </a:p>
+        </p:txBody>
+      </p:sp>
+      <p:sp>
+        <p:nvSpPr>
+          <p:cNvPr id="17" name="Text 16"/>
+          <p:cNvSpPr txBox="1"/>
+          <p:nvPr/>
+        </p:nvSpPr>
+        <p:spPr>
+          <a:xfrm>
+            <a:off x="640080" y="2523744"/>
+            <a:ext cx="3680460" cy="292608"/>
           </a:xfrm>
           <a:prstGeom prst="rect">
             <a:avLst/>
           </a:prstGeom>
-        </p:spPr>
-      </p:pic>
+          <a:noFill/>
+          <a:ln/>
+        </p:spPr>
+        <p:txBody>
+          <a:bodyPr wrap="square" lIns="0" tIns="0" rIns="0" bIns="0" rtlCol="0" anchor="ctr"/>
+          <a:lstStyle/>
+          <a:p>
+            <a:pPr marL="0" indent="0">
+              <a:buNone/>
+            </a:pPr>
+            <a:r>
+              <a:rPr lang="en-US" sz="1050" b="1" dirty="0">
+                <a:solidFill>
+                  <a:srgbClr val="5A189A"/>
+                </a:solidFill>
+                <a:latin typeface="Courier New" pitchFamily="34" charset="0"/>
+                <a:ea typeface="Courier New" pitchFamily="34" charset="-122"/>
+                <a:cs typeface="Courier New" pitchFamily="34" charset="-120"/>
+              </a:rPr>
+              <a:t>getwd() y read.csv()</a:t>
+            </a:r>
+            <a:endParaRPr lang="en-US" sz="1050" dirty="0"/>
+          </a:p>
+        </p:txBody>
+      </p:sp>
+      <p:sp>
+        <p:nvSpPr>
+          <p:cNvPr id="18" name="Text 17"/>
+          <p:cNvSpPr txBox="1"/>
+          <p:nvPr/>
+        </p:nvSpPr>
+        <p:spPr>
+          <a:xfrm>
+            <a:off x="640080" y="2786360"/>
+            <a:ext cx="3680460" cy="292608"/>
+          </a:xfrm>
+          <a:prstGeom prst="rect">
+            <a:avLst/>
+          </a:prstGeom>
+          <a:noFill/>
+          <a:ln/>
+        </p:spPr>
+        <p:txBody>
+          <a:bodyPr wrap="square" lIns="0" tIns="0" rIns="0" bIns="0" rtlCol="0" anchor="ctr"/>
+          <a:lstStyle/>
+          <a:p>
+            <a:pPr marL="0" indent="0">
+              <a:buNone/>
+            </a:pPr>
+            <a:r>
+              <a:rPr lang="en-US" sz="1050" dirty="0">
+                <a:solidFill>
+                  <a:srgbClr val="2E0A4E"/>
+                </a:solidFill>
+                <a:latin typeface="Calibri" pitchFamily="34" charset="0"/>
+                <a:ea typeface="Calibri" pitchFamily="34" charset="-122"/>
+                <a:cs typeface="Calibri" pitchFamily="34" charset="-120"/>
+              </a:rPr>
+              <a:t>Dónde está parado R y cómo lee un CSV.</a:t>
+            </a:r>
+            <a:endParaRPr lang="en-US" sz="1050" dirty="0"/>
+          </a:p>
+        </p:txBody>
+      </p:sp>
+      <p:sp>
+        <p:nvSpPr>
+          <p:cNvPr id="19" name="Shape 18"/>
+          <p:cNvSpPr/>
+          <p:nvPr/>
+        </p:nvSpPr>
+        <p:spPr>
+          <a:xfrm>
+            <a:off x="4675751" y="2926080"/>
+            <a:ext cx="3954780" cy="585216"/>
+          </a:xfrm>
+          <a:prstGeom prst="roundRect">
+            <a:avLst>
+              <a:gd name="adj" fmla="val 7813"/>
+            </a:avLst>
+          </a:prstGeom>
+          <a:solidFill>
+            <a:schemeClr val="accent4">
+              <a:lumMod val="20000"/>
+              <a:lumOff val="80000"/>
+            </a:schemeClr>
+          </a:solidFill>
+          <a:ln w="12700">
+            <a:solidFill>
+              <a:srgbClr val="F4ECFB"/>
+            </a:solidFill>
+            <a:prstDash val="solid"/>
+          </a:ln>
+        </p:spPr>
+        <p:txBody>
+          <a:bodyPr/>
+          <a:lstStyle/>
+          <a:p>
+            <a:endParaRPr lang="en-US"/>
+          </a:p>
+        </p:txBody>
+      </p:sp>
+      <p:sp>
+        <p:nvSpPr>
+          <p:cNvPr id="20" name="Text 19"/>
+          <p:cNvSpPr txBox="1"/>
+          <p:nvPr/>
+        </p:nvSpPr>
+        <p:spPr>
+          <a:xfrm>
+            <a:off x="4812911" y="2944368"/>
+            <a:ext cx="3680460" cy="292608"/>
+          </a:xfrm>
+          <a:prstGeom prst="rect">
+            <a:avLst/>
+          </a:prstGeom>
+          <a:noFill/>
+          <a:ln/>
+        </p:spPr>
+        <p:txBody>
+          <a:bodyPr wrap="square" lIns="0" tIns="0" rIns="0" bIns="0" rtlCol="0" anchor="ctr"/>
+          <a:lstStyle/>
+          <a:p>
+            <a:pPr marL="0" indent="0">
+              <a:buNone/>
+            </a:pPr>
+            <a:r>
+              <a:rPr lang="en-US" sz="1050" b="1" dirty="0">
+                <a:solidFill>
+                  <a:srgbClr val="5A189A"/>
+                </a:solidFill>
+                <a:latin typeface="Courier New" pitchFamily="34" charset="0"/>
+                <a:ea typeface="Courier New" pitchFamily="34" charset="-122"/>
+                <a:cs typeface="Courier New" pitchFamily="34" charset="-120"/>
+              </a:rPr>
+              <a:t>datos$columna y datos[filas, columnas]</a:t>
+            </a:r>
+            <a:endParaRPr lang="en-US" sz="1050" dirty="0"/>
+          </a:p>
+        </p:txBody>
+      </p:sp>
+      <p:sp>
+        <p:nvSpPr>
+          <p:cNvPr id="21" name="Text 20"/>
+          <p:cNvSpPr txBox="1"/>
+          <p:nvPr/>
+        </p:nvSpPr>
+        <p:spPr>
+          <a:xfrm>
+            <a:off x="4812911" y="3206984"/>
+            <a:ext cx="3680460" cy="292608"/>
+          </a:xfrm>
+          <a:prstGeom prst="rect">
+            <a:avLst/>
+          </a:prstGeom>
+          <a:noFill/>
+          <a:ln/>
+        </p:spPr>
+        <p:txBody>
+          <a:bodyPr wrap="square" lIns="0" tIns="0" rIns="0" bIns="0" rtlCol="0" anchor="ctr"/>
+          <a:lstStyle/>
+          <a:p>
+            <a:pPr marL="0" indent="0">
+              <a:buNone/>
+            </a:pPr>
+            <a:r>
+              <a:rPr lang="en-US" sz="1050" dirty="0">
+                <a:solidFill>
+                  <a:srgbClr val="2E0A4E"/>
+                </a:solidFill>
+                <a:latin typeface="Calibri" pitchFamily="34" charset="0"/>
+                <a:ea typeface="Calibri" pitchFamily="34" charset="-122"/>
+                <a:cs typeface="Calibri" pitchFamily="34" charset="-120"/>
+              </a:rPr>
+              <a:t>Elegir partes de un data frame.</a:t>
+            </a:r>
+            <a:endParaRPr lang="en-US" sz="1050" dirty="0"/>
+          </a:p>
+        </p:txBody>
+      </p:sp>
+      <p:sp>
+        <p:nvSpPr>
+          <p:cNvPr id="22" name="Shape 21"/>
+          <p:cNvSpPr/>
+          <p:nvPr/>
+        </p:nvSpPr>
+        <p:spPr>
+          <a:xfrm>
+            <a:off x="502920" y="3163824"/>
+            <a:ext cx="3954780" cy="585216"/>
+          </a:xfrm>
+          <a:prstGeom prst="roundRect">
+            <a:avLst>
+              <a:gd name="adj" fmla="val 7813"/>
+            </a:avLst>
+          </a:prstGeom>
+          <a:solidFill>
+            <a:schemeClr val="accent1">
+              <a:lumMod val="20000"/>
+              <a:lumOff val="80000"/>
+            </a:schemeClr>
+          </a:solidFill>
+          <a:ln w="12700">
+            <a:solidFill>
+              <a:srgbClr val="F4ECFB"/>
+            </a:solidFill>
+            <a:prstDash val="solid"/>
+          </a:ln>
+        </p:spPr>
+        <p:txBody>
+          <a:bodyPr/>
+          <a:lstStyle/>
+          <a:p>
+            <a:endParaRPr lang="en-US"/>
+          </a:p>
+        </p:txBody>
+      </p:sp>
+      <p:sp>
+        <p:nvSpPr>
+          <p:cNvPr id="23" name="Text 22"/>
+          <p:cNvSpPr txBox="1"/>
+          <p:nvPr/>
+        </p:nvSpPr>
+        <p:spPr>
+          <a:xfrm>
+            <a:off x="640080" y="3182112"/>
+            <a:ext cx="3680460" cy="292608"/>
+          </a:xfrm>
+          <a:prstGeom prst="rect">
+            <a:avLst/>
+          </a:prstGeom>
+          <a:noFill/>
+          <a:ln/>
+        </p:spPr>
+        <p:txBody>
+          <a:bodyPr wrap="square" lIns="0" tIns="0" rIns="0" bIns="0" rtlCol="0" anchor="ctr"/>
+          <a:lstStyle/>
+          <a:p>
+            <a:pPr marL="0" indent="0">
+              <a:buNone/>
+            </a:pPr>
+            <a:r>
+              <a:rPr lang="en-US" sz="1050" b="1" dirty="0">
+                <a:solidFill>
+                  <a:srgbClr val="5A189A"/>
+                </a:solidFill>
+                <a:latin typeface="Courier New" pitchFamily="34" charset="0"/>
+                <a:ea typeface="Courier New" pitchFamily="34" charset="-122"/>
+                <a:cs typeface="Courier New" pitchFamily="34" charset="-120"/>
+              </a:rPr>
+              <a:t>ui, server y shinyApp()</a:t>
+            </a:r>
+            <a:endParaRPr lang="en-US" sz="1050" dirty="0"/>
+          </a:p>
+        </p:txBody>
+      </p:sp>
+      <p:sp>
+        <p:nvSpPr>
+          <p:cNvPr id="24" name="Text 23"/>
+          <p:cNvSpPr txBox="1"/>
+          <p:nvPr/>
+        </p:nvSpPr>
+        <p:spPr>
+          <a:xfrm>
+            <a:off x="640080" y="3444728"/>
+            <a:ext cx="3680460" cy="292608"/>
+          </a:xfrm>
+          <a:prstGeom prst="rect">
+            <a:avLst/>
+          </a:prstGeom>
+          <a:noFill/>
+          <a:ln/>
+        </p:spPr>
+        <p:txBody>
+          <a:bodyPr wrap="square" lIns="0" tIns="0" rIns="0" bIns="0" rtlCol="0" anchor="ctr"/>
+          <a:lstStyle/>
+          <a:p>
+            <a:pPr marL="0" indent="0">
+              <a:buNone/>
+            </a:pPr>
+            <a:r>
+              <a:rPr lang="en-US" sz="1050" dirty="0">
+                <a:solidFill>
+                  <a:srgbClr val="2E0A4E"/>
+                </a:solidFill>
+                <a:latin typeface="Calibri" pitchFamily="34" charset="0"/>
+                <a:ea typeface="Calibri" pitchFamily="34" charset="-122"/>
+                <a:cs typeface="Calibri" pitchFamily="34" charset="-120"/>
+              </a:rPr>
+              <a:t>Las tres piezas de toda app de Shiny.</a:t>
+            </a:r>
+            <a:endParaRPr lang="en-US" sz="1050" dirty="0"/>
+          </a:p>
+        </p:txBody>
+      </p:sp>
+      <p:sp>
+        <p:nvSpPr>
+          <p:cNvPr id="25" name="Shape 18"/>
+          <p:cNvSpPr/>
+          <p:nvPr/>
+        </p:nvSpPr>
+        <p:spPr>
+          <a:xfrm>
+            <a:off x="4675751" y="3584448"/>
+            <a:ext cx="3954780" cy="585216"/>
+          </a:xfrm>
+          <a:prstGeom prst="roundRect">
+            <a:avLst>
+              <a:gd name="adj" fmla="val 7813"/>
+            </a:avLst>
+          </a:prstGeom>
+          <a:solidFill>
+            <a:schemeClr val="accent4">
+              <a:lumMod val="20000"/>
+              <a:lumOff val="80000"/>
+            </a:schemeClr>
+          </a:solidFill>
+          <a:ln w="12700">
+            <a:solidFill>
+              <a:srgbClr val="F4ECFB"/>
+            </a:solidFill>
+            <a:prstDash val="solid"/>
+          </a:ln>
+        </p:spPr>
+        <p:txBody>
+          <a:bodyPr/>
+          <a:lstStyle/>
+          <a:p>
+            <a:endParaRPr lang="en-US"/>
+          </a:p>
+        </p:txBody>
+      </p:sp>
+      <p:sp>
+        <p:nvSpPr>
+          <p:cNvPr id="26" name="Text 19"/>
+          <p:cNvSpPr txBox="1"/>
+          <p:nvPr/>
+        </p:nvSpPr>
+        <p:spPr>
+          <a:xfrm>
+            <a:off x="4812911" y="3602736"/>
+            <a:ext cx="3680460" cy="292608"/>
+          </a:xfrm>
+          <a:prstGeom prst="rect">
+            <a:avLst/>
+          </a:prstGeom>
+          <a:noFill/>
+          <a:ln/>
+        </p:spPr>
+        <p:txBody>
+          <a:bodyPr wrap="square" lIns="0" tIns="0" rIns="0" bIns="0" rtlCol="0" anchor="ctr"/>
+          <a:lstStyle/>
+          <a:p>
+            <a:pPr marL="0" indent="0">
+              <a:buNone/>
+            </a:pPr>
+            <a:r>
+              <a:rPr lang="en-US" sz="1050" b="1" dirty="0">
+                <a:solidFill>
+                  <a:srgbClr val="5A189A"/>
+                </a:solidFill>
+                <a:latin typeface="Courier New" pitchFamily="34" charset="0"/>
+                <a:ea typeface="Courier New" pitchFamily="34" charset="-122"/>
+                <a:cs typeface="Courier New" pitchFamily="34" charset="-120"/>
+              </a:rPr>
+              <a:t>tableOutput() y renderTable()</a:t>
+            </a:r>
+            <a:endParaRPr lang="en-US" sz="1050" dirty="0"/>
+          </a:p>
+        </p:txBody>
+      </p:sp>
+      <p:sp>
+        <p:nvSpPr>
+          <p:cNvPr id="27" name="Text 20"/>
+          <p:cNvSpPr txBox="1"/>
+          <p:nvPr/>
+        </p:nvSpPr>
+        <p:spPr>
+          <a:xfrm>
+            <a:off x="4812911" y="3865352"/>
+            <a:ext cx="3680460" cy="292608"/>
+          </a:xfrm>
+          <a:prstGeom prst="rect">
+            <a:avLst/>
+          </a:prstGeom>
+          <a:noFill/>
+          <a:ln/>
+        </p:spPr>
+        <p:txBody>
+          <a:bodyPr wrap="square" lIns="0" tIns="0" rIns="0" bIns="0" rtlCol="0" anchor="ctr"/>
+          <a:lstStyle/>
+          <a:p>
+            <a:pPr marL="0" indent="0">
+              <a:buNone/>
+            </a:pPr>
+            <a:r>
+              <a:rPr lang="en-US" sz="1050" dirty="0">
+                <a:solidFill>
+                  <a:srgbClr val="2E0A4E"/>
+                </a:solidFill>
+                <a:latin typeface="Calibri" pitchFamily="34" charset="0"/>
+                <a:ea typeface="Calibri" pitchFamily="34" charset="-122"/>
+                <a:cs typeface="Calibri" pitchFamily="34" charset="-120"/>
+              </a:rPr>
+              <a:t>Un espacio en la ui y lo que lo rellena.</a:t>
+            </a:r>
+            <a:endParaRPr lang="en-US" sz="1050" dirty="0"/>
+          </a:p>
+        </p:txBody>
+      </p:sp>
     </p:spTree>
   </p:cSld>
   <p:clrMapOvr>
@@ -8342,7 +8661,7 @@
               <a:buNone/>
             </a:pPr>
             <a:r>
-              <a:rPr lang="en-US" sz="3000" b="1" dirty="0">
+              <a:rPr lang="en-US" sz="3000" b="1" dirty="0" err="1">
                 <a:solidFill>
                   <a:srgbClr val="2E0A4E"/>
                 </a:solidFill>
@@ -8350,7 +8669,7 @@
                 <a:ea typeface="Oswald" pitchFamily="34" charset="-122"/>
                 <a:cs typeface="Oswald" pitchFamily="34" charset="-120"/>
               </a:rPr>
-              <a:t>Desafío opcional (2)</a:t>
+              <a:t>Desafío</a:t>
             </a:r>
             <a:endParaRPr lang="en-US" sz="3000" dirty="0"/>
           </a:p>
@@ -8477,7 +8796,7 @@
                 <a:ea typeface="Calibri" pitchFamily="34" charset="-122"/>
                 <a:cs typeface="Calibri" pitchFamily="34" charset="-120"/>
               </a:rPr>
-              <a:t>Guardar y subir cambios</a:t>
+              <a:t>GitHub, tu repositorio</a:t>
             </a:r>
             <a:endParaRPr lang="en-US" sz="1300" dirty="0"/>
           </a:p>
@@ -8563,51 +8882,7 @@
                 <a:ea typeface="Calibri" pitchFamily="34" charset="-122"/>
                 <a:cs typeface="Calibri" pitchFamily="34" charset="-120"/>
               </a:rPr>
-              <a:t>Copiá a tu proyecto la carpeta </a:t>
-            </a:r>
-            <a:r>
-              <a:rPr lang="es-ES" sz="1400" b="1" i="1" dirty="0">
-                <a:solidFill>
-                  <a:schemeClr val="bg1"/>
-                </a:solidFill>
-                <a:latin typeface="Calibri" pitchFamily="34" charset="0"/>
-                <a:ea typeface="Calibri" pitchFamily="34" charset="-122"/>
-                <a:cs typeface="Calibri" pitchFamily="34" charset="-120"/>
-              </a:rPr>
-              <a:t>datos/</a:t>
-            </a:r>
-            <a:r>
-              <a:rPr lang="es-ES" sz="1400" b="1" dirty="0">
-                <a:solidFill>
-                  <a:schemeClr val="bg1"/>
-                </a:solidFill>
-                <a:latin typeface="Calibri" pitchFamily="34" charset="0"/>
-                <a:ea typeface="Calibri" pitchFamily="34" charset="-122"/>
-                <a:cs typeface="Calibri" pitchFamily="34" charset="-120"/>
-              </a:rPr>
-              <a:t> y la de la clase en la que trabajás, y hacé los cambios ahí. Así </a:t>
-            </a:r>
-            <a:r>
-              <a:rPr lang="es-ES" sz="1400" b="1" i="1" dirty="0">
-                <a:solidFill>
-                  <a:schemeClr val="bg1"/>
-                </a:solidFill>
-                <a:latin typeface="Calibri" pitchFamily="34" charset="0"/>
-                <a:ea typeface="Calibri" pitchFamily="34" charset="-122"/>
-                <a:cs typeface="Calibri" pitchFamily="34" charset="-120"/>
-              </a:rPr>
-              <a:t>../datos/</a:t>
-            </a:r>
-            <a:r>
-              <a:rPr lang="es-ES" sz="1400" b="1" dirty="0">
-                <a:solidFill>
-                  <a:schemeClr val="bg1"/>
-                </a:solidFill>
-                <a:latin typeface="Calibri" pitchFamily="34" charset="0"/>
-                <a:ea typeface="Calibri" pitchFamily="34" charset="-122"/>
-                <a:cs typeface="Calibri" pitchFamily="34" charset="-120"/>
-              </a:rPr>
-              <a:t> sigue funcionando.</a:t>
+              <a:t>Git guarda versiones de tu código y GitHub las guarda en la web. Es opcional, el curso se hace completo sin GitHub.</a:t>
             </a:r>
           </a:p>
           <a:p>
@@ -8630,7 +8905,7 @@
                 <a:ea typeface="Calibri" pitchFamily="34" charset="-122"/>
                 <a:cs typeface="Calibri" pitchFamily="34" charset="-120"/>
               </a:rPr>
-              <a:t>En la pestaña </a:t>
+              <a:t>Instalá Git, creá una cuenta y un repositorio nuevo. En RStudio, </a:t>
             </a:r>
             <a:r>
               <a:rPr lang="es-ES" sz="1400" b="1" i="1" dirty="0">
@@ -8641,7 +8916,7 @@
                 <a:ea typeface="Calibri" pitchFamily="34" charset="-122"/>
                 <a:cs typeface="Calibri" pitchFamily="34" charset="-120"/>
               </a:rPr>
-              <a:t>Git</a:t>
+              <a:t>File, New Project, Version Control, Git</a:t>
             </a:r>
             <a:r>
               <a:rPr lang="es-ES" sz="1400" b="1" dirty="0">
@@ -8652,58 +8927,14 @@
                 <a:ea typeface="Calibri" pitchFamily="34" charset="-122"/>
                 <a:cs typeface="Calibri" pitchFamily="34" charset="-120"/>
               </a:rPr>
-              <a:t>, marcá los archivos, </a:t>
-            </a:r>
-            <a:r>
-              <a:rPr lang="es-ES" sz="1400" b="1" i="1" dirty="0">
-                <a:solidFill>
-                  <a:schemeClr val="bg1"/>
-                </a:solidFill>
-                <a:latin typeface="Calibri" pitchFamily="34" charset="0"/>
-                <a:ea typeface="Calibri" pitchFamily="34" charset="-122"/>
-                <a:cs typeface="Calibri" pitchFamily="34" charset="-120"/>
-              </a:rPr>
-              <a:t>Commit</a:t>
-            </a:r>
-            <a:r>
-              <a:rPr lang="es-ES" sz="1400" b="1" dirty="0">
-                <a:solidFill>
-                  <a:schemeClr val="bg1"/>
-                </a:solidFill>
-                <a:latin typeface="Calibri" pitchFamily="34" charset="0"/>
-                <a:ea typeface="Calibri" pitchFamily="34" charset="-122"/>
-                <a:cs typeface="Calibri" pitchFamily="34" charset="-120"/>
-              </a:rPr>
-              <a:t> con un mensaje corto y </a:t>
-            </a:r>
-            <a:r>
-              <a:rPr lang="es-ES" sz="1400" b="1" i="1" dirty="0">
-                <a:solidFill>
-                  <a:schemeClr val="bg1"/>
-                </a:solidFill>
-                <a:latin typeface="Calibri" pitchFamily="34" charset="0"/>
-                <a:ea typeface="Calibri" pitchFamily="34" charset="-122"/>
-                <a:cs typeface="Calibri" pitchFamily="34" charset="-120"/>
-              </a:rPr>
-              <a:t>Push</a:t>
-            </a:r>
-            <a:r>
-              <a:rPr lang="es-ES" sz="1400" b="1" dirty="0">
-                <a:solidFill>
-                  <a:schemeClr val="bg1"/>
-                </a:solidFill>
-                <a:latin typeface="Calibri" pitchFamily="34" charset="0"/>
-                <a:ea typeface="Calibri" pitchFamily="34" charset="-122"/>
-                <a:cs typeface="Calibri" pitchFamily="34" charset="-120"/>
-              </a:rPr>
-              <a:t>. Conviene hacerlo al terminar cada clase.</a:t>
+              <a:t> y pegá su dirección. Queda abierto como un proyecto.</a:t>
             </a:r>
           </a:p>
         </p:txBody>
       </p:sp>
       <p:pic>
         <p:nvPicPr>
-          <p:cNvPr id="18" name="Picture 17" descr="cap3.png"/>
+          <p:cNvPr id="18" name="Picture 17" descr="cap2.png"/>
           <p:cNvPicPr>
             <a:picLocks noChangeAspect="1"/>
           </p:cNvPicPr>
@@ -8717,8 +8948,8 @@
         </p:blipFill>
         <p:spPr>
           <a:xfrm>
-            <a:off x="4434840" y="1956145"/>
-            <a:ext cx="4480560" cy="1528388"/>
+            <a:off x="4546204" y="1188720"/>
+            <a:ext cx="4257831" cy="3100000"/>
           </a:xfrm>
           <a:prstGeom prst="rect">
             <a:avLst/>
@@ -8734,6 +8965,453 @@
 </file>
 
 <file path=ppt/slides/slide22.xml><?xml version="1.0" encoding="utf-8"?>
+<p:sld xmlns:a="http://schemas.openxmlformats.org/drawingml/2006/main" xmlns:r="http://schemas.openxmlformats.org/officeDocument/2006/relationships" xmlns:p="http://schemas.openxmlformats.org/presentationml/2006/main">
+  <p:cSld>
+    <p:bg>
+      <p:bgPr>
+        <a:solidFill>
+          <a:srgbClr val="FFFFFF"/>
+        </a:solidFill>
+        <a:effectLst/>
+      </p:bgPr>
+    </p:bg>
+    <p:spTree>
+      <p:nvGrpSpPr>
+        <p:cNvPr id="1" name=""/>
+        <p:cNvGrpSpPr/>
+        <p:nvPr/>
+      </p:nvGrpSpPr>
+      <p:grpSpPr>
+        <a:xfrm>
+          <a:off x="0" y="0"/>
+          <a:ext cx="0" cy="0"/>
+          <a:chOff x="0" y="0"/>
+          <a:chExt cx="0" cy="0"/>
+        </a:xfrm>
+      </p:grpSpPr>
+      <p:sp>
+        <p:nvSpPr>
+          <p:cNvPr id="2" name="Text 0">
+            <a:extLst>
+              <a:ext uri="{FF2B5EF4-FFF2-40B4-BE49-F238E27FC236}">
+                <a16:creationId xmlns:a16="http://schemas.microsoft.com/office/drawing/2014/main" id="{45FBCF84-BF0C-00DD-1115-ECF03D12DDA6}"/>
+              </a:ext>
+            </a:extLst>
+          </p:cNvPr>
+          <p:cNvSpPr txBox="1"/>
+          <p:nvPr/>
+        </p:nvSpPr>
+        <p:spPr>
+          <a:xfrm>
+            <a:off x="502920" y="320040"/>
+            <a:ext cx="7040880" cy="640080"/>
+          </a:xfrm>
+          <a:prstGeom prst="rect">
+            <a:avLst/>
+          </a:prstGeom>
+          <a:noFill/>
+          <a:ln/>
+        </p:spPr>
+        <p:txBody>
+          <a:bodyPr wrap="square" lIns="0" tIns="0" rIns="0" bIns="0" rtlCol="0" anchor="ctr"/>
+          <a:lstStyle/>
+          <a:p>
+            <a:pPr marL="0" indent="0">
+              <a:buNone/>
+            </a:pPr>
+            <a:r>
+              <a:rPr lang="en-US" sz="3000" b="1" dirty="0" err="1">
+                <a:solidFill>
+                  <a:srgbClr val="2E0A4E"/>
+                </a:solidFill>
+                <a:latin typeface="Oswald" pitchFamily="34" charset="0"/>
+                <a:ea typeface="Oswald" pitchFamily="34" charset="-122"/>
+                <a:cs typeface="Oswald" pitchFamily="34" charset="-120"/>
+              </a:rPr>
+              <a:t>Desafío</a:t>
+            </a:r>
+            <a:endParaRPr lang="en-US" sz="3000" dirty="0"/>
+          </a:p>
+        </p:txBody>
+      </p:sp>
+      <p:sp>
+        <p:nvSpPr>
+          <p:cNvPr id="11" name="Shape 9">
+            <a:extLst>
+              <a:ext uri="{FF2B5EF4-FFF2-40B4-BE49-F238E27FC236}">
+                <a16:creationId xmlns:a16="http://schemas.microsoft.com/office/drawing/2014/main" id="{1E4D2BBF-BB0F-7CF4-3842-6325D6A2CD35}"/>
+              </a:ext>
+            </a:extLst>
+          </p:cNvPr>
+          <p:cNvSpPr/>
+          <p:nvPr/>
+        </p:nvSpPr>
+        <p:spPr>
+          <a:xfrm>
+            <a:off x="439616" y="1188720"/>
+            <a:ext cx="2560320" cy="1463040"/>
+          </a:xfrm>
+          <a:prstGeom prst="roundRect">
+            <a:avLst>
+              <a:gd name="adj" fmla="val 2143"/>
+            </a:avLst>
+          </a:prstGeom>
+          <a:solidFill>
+            <a:srgbClr val="5A189A"/>
+          </a:solidFill>
+          <a:ln w="12700">
+            <a:solidFill>
+              <a:srgbClr val="5A189A"/>
+            </a:solidFill>
+            <a:prstDash val="solid"/>
+          </a:ln>
+        </p:spPr>
+        <p:txBody>
+          <a:bodyPr/>
+          <a:lstStyle/>
+          <a:p>
+            <a:endParaRPr lang="en-US"/>
+          </a:p>
+        </p:txBody>
+      </p:sp>
+      <p:sp>
+        <p:nvSpPr>
+          <p:cNvPr id="12" name="Text 10">
+            <a:extLst>
+              <a:ext uri="{FF2B5EF4-FFF2-40B4-BE49-F238E27FC236}">
+                <a16:creationId xmlns:a16="http://schemas.microsoft.com/office/drawing/2014/main" id="{57EA7703-08D4-E6C4-4FDB-5B08F7881055}"/>
+              </a:ext>
+            </a:extLst>
+          </p:cNvPr>
+          <p:cNvSpPr txBox="1"/>
+          <p:nvPr/>
+        </p:nvSpPr>
+        <p:spPr>
+          <a:xfrm>
+            <a:off x="668216" y="1256068"/>
+            <a:ext cx="2103120" cy="502920"/>
+          </a:xfrm>
+          <a:prstGeom prst="rect">
+            <a:avLst/>
+          </a:prstGeom>
+          <a:noFill/>
+          <a:ln/>
+        </p:spPr>
+        <p:txBody>
+          <a:bodyPr wrap="square" lIns="0" tIns="0" rIns="0" bIns="0" rtlCol="0" anchor="ctr"/>
+          <a:lstStyle/>
+          <a:p>
+            <a:pPr marL="0" indent="0">
+              <a:buNone/>
+            </a:pPr>
+            <a:r>
+              <a:rPr lang="en-US" sz="1600" b="1" dirty="0">
+                <a:solidFill>
+                  <a:srgbClr val="FFFFFF"/>
+                </a:solidFill>
+                <a:latin typeface="Oswald" pitchFamily="34" charset="0"/>
+                <a:ea typeface="Oswald" pitchFamily="34" charset="-122"/>
+                <a:cs typeface="Oswald" pitchFamily="34" charset="-120"/>
+              </a:rPr>
+              <a:t>OPCIONAL</a:t>
+            </a:r>
+            <a:endParaRPr lang="en-US" sz="1600" dirty="0"/>
+          </a:p>
+        </p:txBody>
+      </p:sp>
+      <p:sp>
+        <p:nvSpPr>
+          <p:cNvPr id="13" name="Text 11">
+            <a:extLst>
+              <a:ext uri="{FF2B5EF4-FFF2-40B4-BE49-F238E27FC236}">
+                <a16:creationId xmlns:a16="http://schemas.microsoft.com/office/drawing/2014/main" id="{83082800-1689-F508-4C9C-8E0187A18BDD}"/>
+              </a:ext>
+            </a:extLst>
+          </p:cNvPr>
+          <p:cNvSpPr txBox="1"/>
+          <p:nvPr/>
+        </p:nvSpPr>
+        <p:spPr>
+          <a:xfrm>
+            <a:off x="668216" y="1734572"/>
+            <a:ext cx="2103120" cy="716926"/>
+          </a:xfrm>
+          <a:prstGeom prst="rect">
+            <a:avLst/>
+          </a:prstGeom>
+          <a:noFill/>
+          <a:ln/>
+        </p:spPr>
+        <p:txBody>
+          <a:bodyPr wrap="square" lIns="0" tIns="0" rIns="0" bIns="0" rtlCol="0" anchor="t"/>
+          <a:lstStyle/>
+          <a:p>
+            <a:r>
+              <a:rPr lang="es-ES" sz="1400" dirty="0">
+                <a:solidFill>
+                  <a:schemeClr val="bg1"/>
+                </a:solidFill>
+                <a:latin typeface="Calibri" pitchFamily="34" charset="0"/>
+                <a:ea typeface="Calibri" pitchFamily="34" charset="-122"/>
+                <a:cs typeface="Calibri" pitchFamily="34" charset="-120"/>
+              </a:rPr>
+              <a:t>Guardar y subir cambios</a:t>
+            </a:r>
+            <a:endParaRPr lang="en-US" sz="1300" dirty="0"/>
+          </a:p>
+        </p:txBody>
+      </p:sp>
+      <p:sp>
+        <p:nvSpPr>
+          <p:cNvPr id="15" name="Shape 9">
+            <a:extLst>
+              <a:ext uri="{FF2B5EF4-FFF2-40B4-BE49-F238E27FC236}">
+                <a16:creationId xmlns:a16="http://schemas.microsoft.com/office/drawing/2014/main" id="{E750D06A-626A-4348-CA99-CE04C627A232}"/>
+              </a:ext>
+            </a:extLst>
+          </p:cNvPr>
+          <p:cNvSpPr/>
+          <p:nvPr/>
+        </p:nvSpPr>
+        <p:spPr>
+          <a:xfrm>
+            <a:off x="439615" y="2719107"/>
+            <a:ext cx="3773659" cy="2281957"/>
+          </a:xfrm>
+          <a:prstGeom prst="roundRect">
+            <a:avLst>
+              <a:gd name="adj" fmla="val 2143"/>
+            </a:avLst>
+          </a:prstGeom>
+          <a:solidFill>
+            <a:schemeClr val="accent1">
+              <a:lumMod val="75000"/>
+            </a:schemeClr>
+          </a:solidFill>
+          <a:ln w="12700">
+            <a:solidFill>
+              <a:schemeClr val="accent1">
+                <a:lumMod val="75000"/>
+              </a:schemeClr>
+            </a:solidFill>
+            <a:prstDash val="solid"/>
+          </a:ln>
+        </p:spPr>
+        <p:txBody>
+          <a:bodyPr/>
+          <a:lstStyle/>
+          <a:p>
+            <a:endParaRPr lang="en-US"/>
+          </a:p>
+        </p:txBody>
+      </p:sp>
+      <p:sp>
+        <p:nvSpPr>
+          <p:cNvPr id="17" name="Text 11">
+            <a:extLst>
+              <a:ext uri="{FF2B5EF4-FFF2-40B4-BE49-F238E27FC236}">
+                <a16:creationId xmlns:a16="http://schemas.microsoft.com/office/drawing/2014/main" id="{F3440954-5CFF-06C7-8641-E2E38BA6F847}"/>
+              </a:ext>
+            </a:extLst>
+          </p:cNvPr>
+          <p:cNvSpPr txBox="1"/>
+          <p:nvPr/>
+        </p:nvSpPr>
+        <p:spPr>
+          <a:xfrm>
+            <a:off x="668216" y="2899117"/>
+            <a:ext cx="3369212" cy="716926"/>
+          </a:xfrm>
+          <a:prstGeom prst="rect">
+            <a:avLst/>
+          </a:prstGeom>
+          <a:noFill/>
+          <a:ln/>
+        </p:spPr>
+        <p:txBody>
+          <a:bodyPr wrap="square" lIns="0" tIns="0" rIns="0" bIns="0" rtlCol="0" anchor="t"/>
+          <a:lstStyle/>
+          <a:p>
+            <a:r>
+              <a:rPr lang="es-ES" sz="1400" b="1" dirty="0">
+                <a:solidFill>
+                  <a:schemeClr val="bg1"/>
+                </a:solidFill>
+                <a:latin typeface="Calibri" pitchFamily="34" charset="0"/>
+                <a:ea typeface="Calibri" pitchFamily="34" charset="-122"/>
+                <a:cs typeface="Calibri" pitchFamily="34" charset="-120"/>
+              </a:rPr>
+              <a:t>Copiá a tu proyecto la carpeta </a:t>
+            </a:r>
+            <a:r>
+              <a:rPr lang="es-ES" sz="1400" b="1" i="1" dirty="0">
+                <a:solidFill>
+                  <a:schemeClr val="bg1"/>
+                </a:solidFill>
+                <a:latin typeface="Calibri" pitchFamily="34" charset="0"/>
+                <a:ea typeface="Calibri" pitchFamily="34" charset="-122"/>
+                <a:cs typeface="Calibri" pitchFamily="34" charset="-120"/>
+              </a:rPr>
+              <a:t>datos/</a:t>
+            </a:r>
+            <a:r>
+              <a:rPr lang="es-ES" sz="1400" b="1" dirty="0">
+                <a:solidFill>
+                  <a:schemeClr val="bg1"/>
+                </a:solidFill>
+                <a:latin typeface="Calibri" pitchFamily="34" charset="0"/>
+                <a:ea typeface="Calibri" pitchFamily="34" charset="-122"/>
+                <a:cs typeface="Calibri" pitchFamily="34" charset="-120"/>
+              </a:rPr>
+              <a:t> y la de la clase en la que trabajás, y hacé los cambios ahí. Así </a:t>
+            </a:r>
+            <a:r>
+              <a:rPr lang="es-ES" sz="1400" b="1" i="1" dirty="0">
+                <a:solidFill>
+                  <a:schemeClr val="bg1"/>
+                </a:solidFill>
+                <a:latin typeface="Calibri" pitchFamily="34" charset="0"/>
+                <a:ea typeface="Calibri" pitchFamily="34" charset="-122"/>
+                <a:cs typeface="Calibri" pitchFamily="34" charset="-120"/>
+              </a:rPr>
+              <a:t>../datos/</a:t>
+            </a:r>
+            <a:r>
+              <a:rPr lang="es-ES" sz="1400" b="1" dirty="0">
+                <a:solidFill>
+                  <a:schemeClr val="bg1"/>
+                </a:solidFill>
+                <a:latin typeface="Calibri" pitchFamily="34" charset="0"/>
+                <a:ea typeface="Calibri" pitchFamily="34" charset="-122"/>
+                <a:cs typeface="Calibri" pitchFamily="34" charset="-120"/>
+              </a:rPr>
+              <a:t> sigue funcionando.</a:t>
+            </a:r>
+          </a:p>
+          <a:p>
+            <a:endParaRPr lang="es-ES" sz="1400" b="1" dirty="0">
+              <a:solidFill>
+                <a:schemeClr val="bg1"/>
+              </a:solidFill>
+              <a:latin typeface="Calibri" pitchFamily="34" charset="0"/>
+              <a:ea typeface="Calibri" pitchFamily="34" charset="-122"/>
+              <a:cs typeface="Calibri" pitchFamily="34" charset="-120"/>
+            </a:endParaRPr>
+          </a:p>
+          <a:p>
+            <a:r>
+              <a:rPr lang="es-ES" sz="1400" b="1" dirty="0">
+                <a:solidFill>
+                  <a:schemeClr val="bg1"/>
+                </a:solidFill>
+                <a:latin typeface="Calibri" pitchFamily="34" charset="0"/>
+                <a:ea typeface="Calibri" pitchFamily="34" charset="-122"/>
+                <a:cs typeface="Calibri" pitchFamily="34" charset="-120"/>
+              </a:rPr>
+              <a:t>En la pestaña </a:t>
+            </a:r>
+            <a:r>
+              <a:rPr lang="es-ES" sz="1400" b="1" i="1" dirty="0">
+                <a:solidFill>
+                  <a:schemeClr val="bg1"/>
+                </a:solidFill>
+                <a:latin typeface="Calibri" pitchFamily="34" charset="0"/>
+                <a:ea typeface="Calibri" pitchFamily="34" charset="-122"/>
+                <a:cs typeface="Calibri" pitchFamily="34" charset="-120"/>
+              </a:rPr>
+              <a:t>Git</a:t>
+            </a:r>
+            <a:r>
+              <a:rPr lang="es-ES" sz="1400" b="1" dirty="0">
+                <a:solidFill>
+                  <a:schemeClr val="bg1"/>
+                </a:solidFill>
+                <a:latin typeface="Calibri" pitchFamily="34" charset="0"/>
+                <a:ea typeface="Calibri" pitchFamily="34" charset="-122"/>
+                <a:cs typeface="Calibri" pitchFamily="34" charset="-120"/>
+              </a:rPr>
+              <a:t>, marcá los archivos, </a:t>
+            </a:r>
+            <a:r>
+              <a:rPr lang="es-ES" sz="1400" b="1" i="1" dirty="0">
+                <a:solidFill>
+                  <a:schemeClr val="bg1"/>
+                </a:solidFill>
+                <a:latin typeface="Calibri" pitchFamily="34" charset="0"/>
+                <a:ea typeface="Calibri" pitchFamily="34" charset="-122"/>
+                <a:cs typeface="Calibri" pitchFamily="34" charset="-120"/>
+              </a:rPr>
+              <a:t>Commit</a:t>
+            </a:r>
+            <a:r>
+              <a:rPr lang="es-ES" sz="1400" b="1" dirty="0">
+                <a:solidFill>
+                  <a:schemeClr val="bg1"/>
+                </a:solidFill>
+                <a:latin typeface="Calibri" pitchFamily="34" charset="0"/>
+                <a:ea typeface="Calibri" pitchFamily="34" charset="-122"/>
+                <a:cs typeface="Calibri" pitchFamily="34" charset="-120"/>
+              </a:rPr>
+              <a:t> con un mensaje corto y </a:t>
+            </a:r>
+            <a:r>
+              <a:rPr lang="es-ES" sz="1400" b="1" i="1" dirty="0">
+                <a:solidFill>
+                  <a:schemeClr val="bg1"/>
+                </a:solidFill>
+                <a:latin typeface="Calibri" pitchFamily="34" charset="0"/>
+                <a:ea typeface="Calibri" pitchFamily="34" charset="-122"/>
+                <a:cs typeface="Calibri" pitchFamily="34" charset="-120"/>
+              </a:rPr>
+              <a:t>Push</a:t>
+            </a:r>
+            <a:r>
+              <a:rPr lang="es-ES" sz="1400" b="1" dirty="0">
+                <a:solidFill>
+                  <a:schemeClr val="bg1"/>
+                </a:solidFill>
+                <a:latin typeface="Calibri" pitchFamily="34" charset="0"/>
+                <a:ea typeface="Calibri" pitchFamily="34" charset="-122"/>
+                <a:cs typeface="Calibri" pitchFamily="34" charset="-120"/>
+              </a:rPr>
+              <a:t>. Conviene hacerlo al terminar cada clase.</a:t>
+            </a:r>
+          </a:p>
+        </p:txBody>
+      </p:sp>
+      <p:pic>
+        <p:nvPicPr>
+          <p:cNvPr id="18" name="Picture 17" descr="cap3.png"/>
+          <p:cNvPicPr>
+            <a:picLocks noChangeAspect="1"/>
+          </p:cNvPicPr>
+          <p:nvPr/>
+        </p:nvPicPr>
+        <p:blipFill>
+          <a:blip r:embed="rId2"/>
+          <a:stretch>
+            <a:fillRect/>
+          </a:stretch>
+        </p:blipFill>
+        <p:spPr>
+          <a:xfrm>
+            <a:off x="4434840" y="1956145"/>
+            <a:ext cx="4480560" cy="1528388"/>
+          </a:xfrm>
+          <a:prstGeom prst="rect">
+            <a:avLst/>
+          </a:prstGeom>
+        </p:spPr>
+      </p:pic>
+    </p:spTree>
+  </p:cSld>
+  <p:clrMapOvr>
+    <a:masterClrMapping/>
+  </p:clrMapOvr>
+</p:sld>
+</file>
+
+<file path=ppt/slides/slide23.xml><?xml version="1.0" encoding="utf-8"?>
 <p:sld xmlns:a="http://schemas.openxmlformats.org/drawingml/2006/main" xmlns:r="http://schemas.openxmlformats.org/officeDocument/2006/relationships" xmlns:p="http://schemas.openxmlformats.org/presentationml/2006/main">
   <p:cSld>
     <p:bg>
@@ -8939,7 +9617,7 @@
 </p:sld>
 </file>
 
-<file path=ppt/slides/slide23.xml><?xml version="1.0" encoding="utf-8"?>
+<file path=ppt/slides/slide24.xml><?xml version="1.0" encoding="utf-8"?>
 <p:sld xmlns:a="http://schemas.openxmlformats.org/drawingml/2006/main" xmlns:r="http://schemas.openxmlformats.org/officeDocument/2006/relationships" xmlns:p="http://schemas.openxmlformats.org/presentationml/2006/main">
   <p:cSld name="Slide 8">
     <p:bg>
@@ -9186,7 +9864,7 @@
           <p:nvPr>
             <p:extLst>
               <p:ext uri="{D42A27DB-BD31-4B8C-83A1-F6EECF244321}">
-                <p14:modId xmlns:p14="http://schemas.microsoft.com/office/powerpoint/2010/main" val="3907259707"/>
+                <p14:modId xmlns:p14="http://schemas.microsoft.com/office/powerpoint/2010/main" val="4124846591"/>
               </p:ext>
             </p:extLst>
           </p:nvPr>
@@ -9482,7 +10160,7 @@
                           <a:ea typeface="Calibri" pitchFamily="34" charset="-122"/>
                           <a:cs typeface="Calibri" pitchFamily="34" charset="-120"/>
                         </a:rPr>
-                        <a:t>Programa, instalación, R básico y la primera app con datos.</a:t>
+                        <a:t>Qué es una shiny? R básico y la primera app con datos.</a:t>
                       </a:r>
                       <a:endParaRPr lang="es-UY" sz="1000" noProof="0" dirty="0">
                         <a:highlight>
@@ -9616,6 +10294,17 @@
                         <a:buNone/>
                       </a:pPr>
                       <a:r>
+                        <a:rPr lang="es-UY" sz="1000" noProof="0" dirty="0">
+                          <a:solidFill>
+                            <a:srgbClr val="2E0A4E"/>
+                          </a:solidFill>
+                          <a:latin typeface="Calibri" pitchFamily="34" charset="0"/>
+                          <a:ea typeface="Calibri" pitchFamily="34" charset="-122"/>
+                          <a:cs typeface="Calibri" pitchFamily="34" charset="-120"/>
+                        </a:rPr>
+                        <a:t>Repaso R. UI, server y shinyApp(). </a:t>
+                      </a:r>
+                      <a:r>
                         <a:rPr lang="es-UY" sz="1000" noProof="0" dirty="0" err="1">
                           <a:solidFill>
                             <a:srgbClr val="2E0A4E"/>
@@ -9624,7 +10313,7 @@
                           <a:ea typeface="Calibri" pitchFamily="34" charset="-122"/>
                           <a:cs typeface="Calibri" pitchFamily="34" charset="-120"/>
                         </a:rPr>
-                        <a:t>ui, server y shinyApp(). Un menú que cambia un texto.</a:t>
+                        <a:t>Un menú que cambia un texto.</a:t>
                       </a:r>
                       <a:endParaRPr lang="es-UY" sz="1000" noProof="0" dirty="0">
                         <a:latin typeface="Calibri" charset="0"/>
@@ -13707,7 +14396,7 @@
         <p:cNvPr id="1" name="">
           <a:extLst>
             <a:ext uri="{FF2B5EF4-FFF2-40B4-BE49-F238E27FC236}">
-              <a16:creationId xmlns:a16="http://schemas.microsoft.com/office/drawing/2014/main" id="{2AB0F8C3-CC5F-F2B4-F57A-B0D453B2CE5E}"/>
+              <a16:creationId xmlns:a16="http://schemas.microsoft.com/office/drawing/2014/main" id="{0C52259F-B737-7438-2739-12C2B78E47D7}"/>
             </a:ext>
           </a:extLst>
         </p:cNvPr>
@@ -13727,7 +14416,7 @@
           <p:cNvPr id="2" name="Text 0">
             <a:extLst>
               <a:ext uri="{FF2B5EF4-FFF2-40B4-BE49-F238E27FC236}">
-                <a16:creationId xmlns:a16="http://schemas.microsoft.com/office/drawing/2014/main" id="{740D0576-CF0B-D304-5830-00968DA6E68F}"/>
+                <a16:creationId xmlns:a16="http://schemas.microsoft.com/office/drawing/2014/main" id="{9B1D089F-A0E9-F613-A327-CEB9D6C82910}"/>
               </a:ext>
             </a:extLst>
           </p:cNvPr>
@@ -13749,8 +14438,11 @@
           <a:bodyPr wrap="square" lIns="0" tIns="0" rIns="0" bIns="0" rtlCol="0" anchor="ctr"/>
           <a:lstStyle/>
           <a:p>
-            <a:r>
-              <a:rPr lang="es-UY" sz="3000" b="1" dirty="0">
+            <a:pPr marL="0" indent="0">
+              <a:buNone/>
+            </a:pPr>
+            <a:r>
+              <a:rPr lang="es-UY" sz="3000" b="1" noProof="0" dirty="0">
                 <a:solidFill>
                   <a:srgbClr val="2E0A4E"/>
                 </a:solidFill>
@@ -13760,7 +14452,7 @@
               </a:rPr>
               <a:t>Shinys para inspirarse</a:t>
             </a:r>
-            <a:endParaRPr lang="es-UY" sz="3000" dirty="0"/>
+            <a:endParaRPr lang="es-UY" sz="3000" noProof="0" dirty="0"/>
           </a:p>
         </p:txBody>
       </p:sp>
@@ -13769,7 +14461,7 @@
           <p:cNvPr id="5" name="Shape 3">
             <a:extLst>
               <a:ext uri="{FF2B5EF4-FFF2-40B4-BE49-F238E27FC236}">
-                <a16:creationId xmlns:a16="http://schemas.microsoft.com/office/drawing/2014/main" id="{9F2F5559-8540-9473-88CB-C9B54DF8D2B7}"/>
+                <a16:creationId xmlns:a16="http://schemas.microsoft.com/office/drawing/2014/main" id="{3E9A45C0-20C0-CCB3-959D-C4A5480E502C}"/>
               </a:ext>
             </a:extLst>
           </p:cNvPr>
@@ -13809,7 +14501,7 @@
           <p:cNvPr id="6" name="Shape 4">
             <a:extLst>
               <a:ext uri="{FF2B5EF4-FFF2-40B4-BE49-F238E27FC236}">
-                <a16:creationId xmlns:a16="http://schemas.microsoft.com/office/drawing/2014/main" id="{1DAD86C9-020D-A459-A4F2-83278273AED4}"/>
+                <a16:creationId xmlns:a16="http://schemas.microsoft.com/office/drawing/2014/main" id="{6576F44F-CCFF-F7C8-F2B0-14CE21BF13DD}"/>
               </a:ext>
             </a:extLst>
           </p:cNvPr>
@@ -13847,7 +14539,7 @@
           <p:cNvPr id="7" name="Text 5">
             <a:extLst>
               <a:ext uri="{FF2B5EF4-FFF2-40B4-BE49-F238E27FC236}">
-                <a16:creationId xmlns:a16="http://schemas.microsoft.com/office/drawing/2014/main" id="{BE7799E2-891C-E080-AF62-6365687F53CD}"/>
+                <a16:creationId xmlns:a16="http://schemas.microsoft.com/office/drawing/2014/main" id="{1408EB34-4B6C-3B6C-9C92-ACE2E5EA0696}"/>
               </a:ext>
             </a:extLst>
           </p:cNvPr>
@@ -13873,13 +14565,11 @@
               <a:buNone/>
             </a:pPr>
             <a:r>
-              <a:rPr lang="es-UY" sz="1400" b="1" noProof="0" dirty="0">
+              <a:rPr lang="es-UY" sz="1400" b="1" dirty="0">
                 <a:solidFill>
                   <a:srgbClr val="FFFFFF"/>
                 </a:solidFill>
                 <a:latin typeface="Oswald" pitchFamily="34" charset="0"/>
-                <a:ea typeface="Oswald" pitchFamily="34" charset="-122"/>
-                <a:cs typeface="Oswald" pitchFamily="34" charset="-120"/>
               </a:rPr>
               <a:t>4</a:t>
             </a:r>
@@ -13892,7 +14582,7 @@
           <p:cNvPr id="8" name="Text 6">
             <a:extLst>
               <a:ext uri="{FF2B5EF4-FFF2-40B4-BE49-F238E27FC236}">
-                <a16:creationId xmlns:a16="http://schemas.microsoft.com/office/drawing/2014/main" id="{A09DC744-6EDD-3786-3D96-786DF242C174}"/>
+                <a16:creationId xmlns:a16="http://schemas.microsoft.com/office/drawing/2014/main" id="{DB5AF91D-9364-F81E-737D-8586BD9B8612}"/>
               </a:ext>
             </a:extLst>
           </p:cNvPr>
@@ -13918,7 +14608,7 @@
               <a:buNone/>
             </a:pPr>
             <a:r>
-              <a:rPr lang="es-ES" sz="2000" b="1" noProof="0" dirty="0">
+              <a:rPr lang="es-ES" sz="1500" b="1" noProof="0" dirty="0">
                 <a:solidFill>
                   <a:srgbClr val="2E0A4E"/>
                 </a:solidFill>
@@ -13926,18 +14616,18 @@
                 <a:ea typeface="Oswald" pitchFamily="34" charset="-122"/>
                 <a:cs typeface="Oswald" pitchFamily="34" charset="-120"/>
               </a:rPr>
-              <a:t>La shiny de nuestro curso:</a:t>
-            </a:r>
-            <a:endParaRPr lang="es-UY" sz="2000" noProof="0" dirty="0"/>
-          </a:p>
-        </p:txBody>
-      </p:sp>
-      <p:sp>
-        <p:nvSpPr>
-          <p:cNvPr id="32" name="Text 7">
+              <a:t>Costos salariales docentes</a:t>
+            </a:r>
+            <a:endParaRPr lang="es-UY" sz="1500" noProof="0" dirty="0"/>
+          </a:p>
+        </p:txBody>
+      </p:sp>
+      <p:sp>
+        <p:nvSpPr>
+          <p:cNvPr id="10" name="Text 8">
             <a:extLst>
               <a:ext uri="{FF2B5EF4-FFF2-40B4-BE49-F238E27FC236}">
-                <a16:creationId xmlns:a16="http://schemas.microsoft.com/office/drawing/2014/main" id="{B7E58599-E4CA-0220-24EA-DE96732ADEA4}"/>
+                <a16:creationId xmlns:a16="http://schemas.microsoft.com/office/drawing/2014/main" id="{1730D29D-1880-2668-BE08-C7164AF0A796}"/>
               </a:ext>
             </a:extLst>
           </p:cNvPr>
@@ -13946,8 +14636,8 @@
         </p:nvSpPr>
         <p:spPr>
           <a:xfrm>
-            <a:off x="1234439" y="2829892"/>
-            <a:ext cx="7100669" cy="274320"/>
+            <a:off x="1234438" y="1931670"/>
+            <a:ext cx="6988126" cy="640080"/>
           </a:xfrm>
           <a:prstGeom prst="rect">
             <a:avLst/>
@@ -13956,60 +14646,407 @@
           <a:ln/>
         </p:spPr>
         <p:txBody>
-          <a:bodyPr wrap="square" lIns="0" tIns="0" rIns="0" bIns="0" rtlCol="0" anchor="ctr"/>
-          <a:lstStyle/>
-          <a:p>
-            <a:r>
-              <a:rPr lang="es-ES" sz="1600" b="1" dirty="0">
-                <a:solidFill>
-                  <a:srgbClr val="5A189A"/>
-                </a:solidFill>
-                <a:latin typeface="Courier New" pitchFamily="34" charset="0"/>
-                <a:cs typeface="Courier New" pitchFamily="34" charset="-120"/>
-                <a:hlinkClick r:id="rId3"/>
-              </a:rPr>
-              <a:t>https://nahuelroel-cursoshiny.share.connect.posit.cloud/</a:t>
-            </a:r>
-            <a:endParaRPr lang="es-UY" sz="1600" b="1" noProof="0" dirty="0"/>
-          </a:p>
-        </p:txBody>
-      </p:sp>
-      <p:pic>
-        <p:nvPicPr>
-          <p:cNvPr id="9" name="Picture 8">
+          <a:bodyPr wrap="square" lIns="0" tIns="0" rIns="0" bIns="0" rtlCol="0" anchor="t"/>
+          <a:lstStyle/>
+          <a:p>
+            <a:r>
+              <a:rPr lang="en-US" sz="1100" dirty="0"/>
+              <a:t>Es una </a:t>
+            </a:r>
+            <a:r>
+              <a:rPr lang="en-US" sz="1100" dirty="0" err="1"/>
+              <a:t>calculadora</a:t>
+            </a:r>
+            <a:r>
+              <a:rPr lang="en-US" sz="1100" dirty="0"/>
+              <a:t> web (</a:t>
+            </a:r>
+            <a:r>
+              <a:rPr lang="en-US" sz="1100" dirty="0" err="1"/>
+              <a:t>Streamlit</a:t>
+            </a:r>
+            <a:r>
+              <a:rPr lang="en-US" sz="1100" dirty="0"/>
+              <a:t>) del </a:t>
+            </a:r>
+            <a:r>
+              <a:rPr lang="en-US" sz="1100" dirty="0" err="1"/>
+              <a:t>costo</a:t>
+            </a:r>
+            <a:r>
+              <a:rPr lang="en-US" sz="1100" dirty="0"/>
+              <a:t> </a:t>
+            </a:r>
+            <a:r>
+              <a:rPr lang="en-US" sz="1100" dirty="0" err="1"/>
+              <a:t>salarial</a:t>
+            </a:r>
+            <a:r>
+              <a:rPr lang="en-US" sz="1100" dirty="0"/>
+              <a:t> </a:t>
+            </a:r>
+            <a:r>
+              <a:rPr lang="en-US" sz="1100" dirty="0" err="1"/>
+              <a:t>anual</a:t>
+            </a:r>
+            <a:r>
+              <a:rPr lang="en-US" sz="1100" dirty="0"/>
+              <a:t> de cargos </a:t>
+            </a:r>
+            <a:r>
+              <a:rPr lang="en-US" sz="1100" dirty="0" err="1"/>
+              <a:t>docentes</a:t>
+            </a:r>
+            <a:r>
+              <a:rPr lang="en-US" sz="1100" dirty="0"/>
+              <a:t> de la FCS bajo el </a:t>
+            </a:r>
+            <a:r>
+              <a:rPr lang="en-US" sz="1100" dirty="0" err="1"/>
+              <a:t>régimen</a:t>
+            </a:r>
+            <a:r>
+              <a:rPr lang="en-US" sz="1100" dirty="0"/>
+              <a:t> sin </a:t>
+            </a:r>
+            <a:r>
+              <a:rPr lang="en-US" sz="1100" dirty="0" err="1"/>
+              <a:t>Dedicación</a:t>
+            </a:r>
+            <a:r>
+              <a:rPr lang="en-US" sz="1100" dirty="0"/>
+              <a:t> Total, con la </a:t>
+            </a:r>
+            <a:r>
+              <a:rPr lang="en-US" sz="1100" dirty="0" err="1"/>
+              <a:t>tabla</a:t>
+            </a:r>
+            <a:r>
+              <a:rPr lang="en-US" sz="1100" dirty="0"/>
+              <a:t> </a:t>
+            </a:r>
+            <a:r>
+              <a:rPr lang="en-US" sz="1100" dirty="0" err="1"/>
+              <a:t>salarial</a:t>
+            </a:r>
+            <a:r>
+              <a:rPr lang="en-US" sz="1100" dirty="0"/>
+              <a:t> 2026 y cargas de 3 a 60 horas. Se carga una fila por cargo con </a:t>
+            </a:r>
+            <a:r>
+              <a:rPr lang="en-US" sz="1100" dirty="0" err="1"/>
+              <a:t>grado</a:t>
+            </a:r>
+            <a:r>
+              <a:rPr lang="en-US" sz="1100" dirty="0"/>
+              <a:t>, horas base, </a:t>
+            </a:r>
+            <a:r>
+              <a:rPr lang="en-US" sz="1100" dirty="0" err="1"/>
+              <a:t>extensión</a:t>
+            </a:r>
+            <a:r>
+              <a:rPr lang="en-US" sz="1100" dirty="0"/>
+              <a:t> </a:t>
+            </a:r>
+            <a:r>
+              <a:rPr lang="en-US" sz="1100" dirty="0" err="1"/>
+              <a:t>horaria</a:t>
+            </a:r>
+            <a:r>
+              <a:rPr lang="en-US" sz="1100" dirty="0"/>
+              <a:t> </a:t>
+            </a:r>
+            <a:r>
+              <a:rPr lang="en-US" sz="1100" dirty="0" err="1"/>
+              <a:t>opcional</a:t>
+            </a:r>
+            <a:r>
+              <a:rPr lang="en-US" sz="1100" dirty="0"/>
+              <a:t> y período, y la app </a:t>
+            </a:r>
+            <a:r>
+              <a:rPr lang="en-US" sz="1100" dirty="0" err="1"/>
+              <a:t>calcula</a:t>
+            </a:r>
+            <a:r>
+              <a:rPr lang="en-US" sz="1100" dirty="0"/>
+              <a:t> el </a:t>
+            </a:r>
+            <a:r>
+              <a:rPr lang="en-US" sz="1100" dirty="0" err="1"/>
+              <a:t>costo</a:t>
+            </a:r>
+            <a:r>
+              <a:rPr lang="en-US" sz="1100" dirty="0"/>
+              <a:t> total de </a:t>
+            </a:r>
+            <a:r>
+              <a:rPr lang="en-US" sz="1100" dirty="0" err="1"/>
+              <a:t>cada</a:t>
+            </a:r>
+            <a:r>
+              <a:rPr lang="en-US" sz="1100" dirty="0"/>
+              <a:t> uno. Ese </a:t>
+            </a:r>
+            <a:r>
+              <a:rPr lang="en-US" sz="1100" dirty="0" err="1"/>
+              <a:t>costo</a:t>
+            </a:r>
+            <a:r>
+              <a:rPr lang="en-US" sz="1100" dirty="0"/>
+              <a:t> es el nominal más </a:t>
+            </a:r>
+            <a:r>
+              <a:rPr lang="en-US" sz="1100" dirty="0" err="1"/>
+              <a:t>aportes</a:t>
+            </a:r>
+            <a:r>
+              <a:rPr lang="en-US" sz="1100" dirty="0"/>
+              <a:t> </a:t>
+            </a:r>
+            <a:r>
+              <a:rPr lang="en-US" sz="1100" dirty="0" err="1"/>
+              <a:t>patronales</a:t>
+            </a:r>
+            <a:r>
+              <a:rPr lang="en-US" sz="1100" dirty="0"/>
+              <a:t> y SNIS, más el </a:t>
+            </a:r>
+            <a:r>
+              <a:rPr lang="en-US" sz="1100" dirty="0" err="1"/>
+              <a:t>aguinaldo</a:t>
+            </a:r>
+            <a:r>
+              <a:rPr lang="en-US" sz="1100" dirty="0"/>
+              <a:t> con </a:t>
+            </a:r>
+            <a:r>
+              <a:rPr lang="en-US" sz="1100" dirty="0" err="1"/>
+              <a:t>aportes</a:t>
+            </a:r>
+            <a:r>
+              <a:rPr lang="en-US" sz="1100" dirty="0"/>
+              <a:t>. Además arma un </a:t>
+            </a:r>
+            <a:r>
+              <a:rPr lang="en-US" sz="1100" dirty="0" err="1"/>
+              <a:t>detalle</a:t>
+            </a:r>
+            <a:r>
+              <a:rPr lang="en-US" sz="1100" dirty="0"/>
+              <a:t> por cargo con su total, que </a:t>
+            </a:r>
+            <a:r>
+              <a:rPr lang="en-US" sz="1100" dirty="0" err="1"/>
+              <a:t>muestra</a:t>
+            </a:r>
+            <a:r>
+              <a:rPr lang="en-US" sz="1100" dirty="0"/>
+              <a:t> el </a:t>
+            </a:r>
+            <a:r>
+              <a:rPr lang="en-US" sz="1100" dirty="0" err="1"/>
+              <a:t>sueldo</a:t>
+            </a:r>
+            <a:r>
+              <a:rPr lang="en-US" sz="1100" dirty="0"/>
+              <a:t> </a:t>
+            </a:r>
+            <a:r>
+              <a:rPr lang="en-US" sz="1100" dirty="0" err="1"/>
+              <a:t>mensual</a:t>
+            </a:r>
+            <a:r>
+              <a:rPr lang="en-US" sz="1100" dirty="0"/>
+              <a:t> </a:t>
+            </a:r>
+            <a:r>
+              <a:rPr lang="en-US" sz="1100" dirty="0" err="1"/>
+              <a:t>imputado</a:t>
+            </a:r>
+            <a:r>
+              <a:rPr lang="en-US" sz="1100" dirty="0"/>
+              <a:t>, los meses </a:t>
+            </a:r>
+            <a:r>
+              <a:rPr lang="en-US" sz="1100" dirty="0" err="1"/>
+              <a:t>efectivos</a:t>
+            </a:r>
+            <a:r>
+              <a:rPr lang="en-US" sz="1100" dirty="0"/>
+              <a:t>, la </a:t>
+            </a:r>
+            <a:r>
+              <a:rPr lang="en-US" sz="1100" dirty="0" err="1"/>
+              <a:t>partida</a:t>
+            </a:r>
+            <a:r>
+              <a:rPr lang="en-US" sz="1100" dirty="0"/>
+              <a:t> </a:t>
+            </a:r>
+            <a:r>
+              <a:rPr lang="en-US" sz="1100" dirty="0" err="1"/>
+              <a:t>libros</a:t>
+            </a:r>
+            <a:r>
+              <a:rPr lang="en-US" sz="1100" dirty="0"/>
+              <a:t> y </a:t>
+            </a:r>
+            <a:r>
+              <a:rPr lang="en-US" sz="1100" dirty="0" err="1"/>
+              <a:t>cuántas</a:t>
+            </a:r>
+            <a:r>
+              <a:rPr lang="en-US" sz="1100" dirty="0"/>
+              <a:t> </a:t>
+            </a:r>
+            <a:r>
+              <a:rPr lang="en-US" sz="1100" dirty="0" err="1"/>
+              <a:t>veces</a:t>
+            </a:r>
+            <a:r>
+              <a:rPr lang="en-US" sz="1100" dirty="0"/>
+              <a:t> se </a:t>
+            </a:r>
+            <a:r>
+              <a:rPr lang="en-US" sz="1100" dirty="0" err="1"/>
+              <a:t>paga</a:t>
+            </a:r>
+            <a:r>
+              <a:rPr lang="en-US" sz="1100" dirty="0"/>
+              <a:t> en el período, y los </a:t>
+            </a:r>
+            <a:r>
+              <a:rPr lang="en-US" sz="1100" dirty="0" err="1"/>
+              <a:t>subtotales</a:t>
+            </a:r>
+            <a:r>
+              <a:rPr lang="en-US" sz="1100" dirty="0"/>
+              <a:t>. La </a:t>
+            </a:r>
+            <a:r>
+              <a:rPr lang="en-US" sz="1100" dirty="0" err="1"/>
+              <a:t>tabla</a:t>
+            </a:r>
+            <a:r>
+              <a:rPr lang="en-US" sz="1100" dirty="0"/>
+              <a:t> </a:t>
+            </a:r>
+            <a:r>
+              <a:rPr lang="en-US" sz="1100" dirty="0" err="1"/>
+              <a:t>salarial</a:t>
+            </a:r>
+            <a:r>
+              <a:rPr lang="en-US" sz="1100" dirty="0"/>
+              <a:t> por </a:t>
+            </a:r>
+            <a:r>
+              <a:rPr lang="en-US" sz="1100" dirty="0" err="1"/>
+              <a:t>defecto</a:t>
+            </a:r>
+            <a:r>
+              <a:rPr lang="en-US" sz="1100" dirty="0"/>
+              <a:t> se </a:t>
+            </a:r>
+            <a:r>
+              <a:rPr lang="en-US" sz="1100" dirty="0" err="1"/>
+              <a:t>puede</a:t>
+            </a:r>
+            <a:r>
+              <a:rPr lang="en-US" sz="1100" dirty="0"/>
+              <a:t> </a:t>
+            </a:r>
+            <a:r>
+              <a:rPr lang="en-US" sz="1100" dirty="0" err="1"/>
+              <a:t>reemplazar</a:t>
+            </a:r>
+            <a:r>
+              <a:rPr lang="en-US" sz="1100" dirty="0"/>
+              <a:t> </a:t>
+            </a:r>
+            <a:r>
+              <a:rPr lang="en-US" sz="1100" dirty="0" err="1"/>
+              <a:t>subiendo</a:t>
+            </a:r>
+            <a:r>
+              <a:rPr lang="en-US" sz="1100" dirty="0"/>
+              <a:t> un CSV, y el </a:t>
+            </a:r>
+            <a:r>
+              <a:rPr lang="en-US" sz="1100" dirty="0" err="1"/>
+              <a:t>resultado</a:t>
+            </a:r>
+            <a:r>
+              <a:rPr lang="en-US" sz="1100" dirty="0"/>
+              <a:t> se </a:t>
+            </a:r>
+            <a:r>
+              <a:rPr lang="en-US" sz="1100" dirty="0" err="1"/>
+              <a:t>descarga</a:t>
+            </a:r>
+            <a:r>
+              <a:rPr lang="en-US" sz="1100" dirty="0"/>
+              <a:t> en Excel. </a:t>
+            </a:r>
+            <a:r>
+              <a:rPr lang="en-US" sz="1100" dirty="0" err="1"/>
+              <a:t>Está</a:t>
+            </a:r>
+            <a:r>
+              <a:rPr lang="en-US" sz="1100" dirty="0"/>
+              <a:t> </a:t>
+            </a:r>
+            <a:r>
+              <a:rPr lang="en-US" sz="1100" dirty="0" err="1"/>
+              <a:t>pensada</a:t>
+            </a:r>
+            <a:r>
+              <a:rPr lang="en-US" sz="1100" dirty="0"/>
+              <a:t> para </a:t>
+            </a:r>
+            <a:r>
+              <a:rPr lang="en-US" sz="1100" dirty="0" err="1"/>
+              <a:t>presupuestar</a:t>
+            </a:r>
+            <a:r>
+              <a:rPr lang="en-US" sz="1100" dirty="0"/>
+              <a:t> cargos </a:t>
+            </a:r>
+            <a:r>
+              <a:rPr lang="en-US" sz="1100" dirty="0" err="1"/>
+              <a:t>docentes</a:t>
+            </a:r>
+            <a:r>
+              <a:rPr lang="en-US" sz="1100" dirty="0"/>
+              <a:t> en </a:t>
+            </a:r>
+            <a:r>
+              <a:rPr lang="en-US" sz="1100" dirty="0" err="1"/>
+              <a:t>proyectos</a:t>
+            </a:r>
+            <a:r>
+              <a:rPr lang="en-US" sz="1100" dirty="0"/>
+              <a:t> o </a:t>
+            </a:r>
+            <a:r>
+              <a:rPr lang="en-US" sz="1100" dirty="0" err="1"/>
+              <a:t>convenios</a:t>
+            </a:r>
+            <a:r>
+              <a:rPr lang="en-US" sz="1100" dirty="0"/>
+              <a:t>.</a:t>
+            </a:r>
+            <a:endParaRPr lang="es-UY" sz="1100" noProof="0" dirty="0"/>
+          </a:p>
+        </p:txBody>
+      </p:sp>
+      <p:sp>
+        <p:nvSpPr>
+          <p:cNvPr id="32" name="Text 7">
             <a:extLst>
               <a:ext uri="{FF2B5EF4-FFF2-40B4-BE49-F238E27FC236}">
-                <a16:creationId xmlns:a16="http://schemas.microsoft.com/office/drawing/2014/main" id="{E38B869B-A34C-7776-39FB-D2F254A1FBFD}"/>
-              </a:ext>
-            </a:extLst>
-          </p:cNvPr>
-          <p:cNvPicPr>
-            <a:picLocks noChangeAspect="1"/>
-          </p:cNvPicPr>
-          <p:nvPr/>
-        </p:nvPicPr>
-        <p:blipFill>
-          <a:blip r:embed="rId4"/>
-          <a:stretch>
-            <a:fillRect/>
-          </a:stretch>
-        </p:blipFill>
-        <p:spPr>
-          <a:xfrm>
-            <a:off x="1234439" y="1812471"/>
-            <a:ext cx="2860767" cy="551407"/>
-          </a:xfrm>
-          <a:prstGeom prst="rect">
-            <a:avLst/>
-          </a:prstGeom>
-        </p:spPr>
-      </p:pic>
-      <p:sp>
-        <p:nvSpPr>
-          <p:cNvPr id="4" name="Text 7">
-            <a:extLst>
-              <a:ext uri="{FF2B5EF4-FFF2-40B4-BE49-F238E27FC236}">
-                <a16:creationId xmlns:a16="http://schemas.microsoft.com/office/drawing/2014/main" id="{B2048075-558E-8BAE-6651-8A8B857B1C7D}"/>
+                <a16:creationId xmlns:a16="http://schemas.microsoft.com/office/drawing/2014/main" id="{6080B46F-7A07-AD45-1056-1DAB0F38AB9D}"/>
               </a:ext>
             </a:extLst>
           </p:cNvPr>
@@ -14018,7 +15055,7 @@
         </p:nvSpPr>
         <p:spPr>
           <a:xfrm>
-            <a:off x="1234438" y="3193132"/>
+            <a:off x="1234438" y="3344154"/>
             <a:ext cx="7100669" cy="274320"/>
           </a:xfrm>
           <a:prstGeom prst="rect">
@@ -14032,24 +15069,24 @@
           <a:lstStyle/>
           <a:p>
             <a:r>
-              <a:rPr lang="es-ES" sz="1600" b="1" dirty="0">
+              <a:rPr lang="es-ES" sz="1600" dirty="0">
                 <a:solidFill>
                   <a:srgbClr val="5A189A"/>
                 </a:solidFill>
                 <a:latin typeface="Courier New" pitchFamily="34" charset="0"/>
                 <a:cs typeface="Courier New" pitchFamily="34" charset="-120"/>
-                <a:hlinkClick r:id="rId5"/>
-              </a:rPr>
-              <a:t>https://nahuelroel.shinyapps.io/CursoShiny/</a:t>
-            </a:r>
-            <a:endParaRPr lang="es-UY" sz="1600" b="1" noProof="0" dirty="0"/>
+                <a:hlinkClick r:id="rId3"/>
+              </a:rPr>
+              <a:t>https://calcula-salarios-fcs.streamlit.app/</a:t>
+            </a:r>
+            <a:endParaRPr lang="es-UY" sz="1600" noProof="0" dirty="0"/>
           </a:p>
         </p:txBody>
       </p:sp>
     </p:spTree>
     <p:extLst>
       <p:ext uri="{BB962C8B-B14F-4D97-AF65-F5344CB8AC3E}">
-        <p14:creationId xmlns:p14="http://schemas.microsoft.com/office/powerpoint/2010/main" val="894793366"/>
+        <p14:creationId xmlns:p14="http://schemas.microsoft.com/office/powerpoint/2010/main" val="403348991"/>
       </p:ext>
     </p:extLst>
   </p:cSld>

--- a/clase1/clase1.pptx
+++ b/clase1/clase1.pptx
@@ -148,7 +148,7 @@
   <pc:docChgLst>
     <pc:chgData name="Nahuel Roel" userId="f57eb92d7f62e27b" providerId="LiveId" clId="{1698397B-2804-4513-BF38-7951CB4798F0}"/>
     <pc:docChg chg="undo custSel addSld delSld modSld sldOrd">
-      <pc:chgData name="Nahuel Roel" userId="f57eb92d7f62e27b" providerId="LiveId" clId="{1698397B-2804-4513-BF38-7951CB4798F0}" dt="2026-10-23T20:20:09.169" v="4014" actId="2696"/>
+      <pc:chgData name="Nahuel Roel" userId="f57eb92d7f62e27b" providerId="LiveId" clId="{1698397B-2804-4513-BF38-7951CB4798F0}" dt="2026-10-23T22:03:28.768" v="4015" actId="1076"/>
       <pc:docMkLst>
         <pc:docMk/>
       </pc:docMkLst>
@@ -801,7 +801,7 @@
         </pc:spChg>
       </pc:sldChg>
       <pc:sldChg chg="addSp delSp modSp add mod ord">
-        <pc:chgData name="Nahuel Roel" userId="f57eb92d7f62e27b" providerId="LiveId" clId="{1698397B-2804-4513-BF38-7951CB4798F0}" dt="2026-10-23T20:14:34.210" v="3956"/>
+        <pc:chgData name="Nahuel Roel" userId="f57eb92d7f62e27b" providerId="LiveId" clId="{1698397B-2804-4513-BF38-7951CB4798F0}" dt="2026-10-23T22:03:28.768" v="4015" actId="1076"/>
         <pc:sldMkLst>
           <pc:docMk/>
           <pc:sldMk cId="2287114499" sldId="269"/>
@@ -812,6 +812,14 @@
             <pc:docMk/>
             <pc:sldMk cId="2287114499" sldId="269"/>
             <ac:spMk id="4" creationId="{414B8CB4-5304-436B-891C-2E19C52A7B11}"/>
+          </ac:spMkLst>
+        </pc:spChg>
+        <pc:spChg chg="mod">
+          <ac:chgData name="Nahuel Roel" userId="f57eb92d7f62e27b" providerId="LiveId" clId="{1698397B-2804-4513-BF38-7951CB4798F0}" dt="2026-10-23T22:03:28.768" v="4015" actId="1076"/>
+          <ac:spMkLst>
+            <pc:docMk/>
+            <pc:sldMk cId="2287114499" sldId="269"/>
+            <ac:spMk id="5" creationId="{A43249B9-5FA7-2F35-B375-081EFB79BA5D}"/>
           </ac:spMkLst>
         </pc:spChg>
         <pc:spChg chg="mod">
@@ -14042,7 +14050,7 @@
         </p:nvSpPr>
         <p:spPr>
           <a:xfrm>
-            <a:off x="397412" y="1151792"/>
+            <a:off x="863405" y="1285435"/>
             <a:ext cx="8138160" cy="3246120"/>
           </a:xfrm>
           <a:prstGeom prst="roundRect">
